--- a/output/ppt-review-20261011/final/MeBOD_複審簡報_第二輪修訂版.pptx
+++ b/output/ppt-review-20261011/final/MeBOD_複審簡報_第二輪修訂版.pptx
@@ -3536,6 +3536,30 @@
       <p:grpSpPr>
         <a:xfrm xmlns:a="http://schemas.openxmlformats.org/drawingml/2006/main"/>
       </p:grpSpPr>
+      <p:pic xmlns:a="http://schemas.openxmlformats.org/drawingml/2006/main" xmlns:r="http://schemas.openxmlformats.org/officeDocument/2006/relationships">
+        <p:nvPicPr>
+          <p:cNvPr id="12" name="Cover Illustration" descr="cover-hero.png"/>
+          <p:cNvPicPr>
+            <a:picLocks noChangeAspect="1"/>
+          </p:cNvPicPr>
+          <p:nvPr/>
+        </p:nvPicPr>
+        <p:blipFill>
+          <a:blip r:embed="rId5"/>
+          <a:stretch>
+            <a:fillRect/>
+          </a:stretch>
+        </p:blipFill>
+        <p:spPr>
+          <a:xfrm>
+            <a:off x="6309360" y="0"/>
+            <a:ext cx="5880199" cy="6858000"/>
+          </a:xfrm>
+          <a:prstGeom prst="rect">
+            <a:avLst/>
+          </a:prstGeom>
+        </p:spPr>
+      </p:pic>
       <p:sp>
         <p:nvSpPr>
           <p:cNvPr id="5" name="Text 2">
@@ -3553,7 +3577,7 @@
         <p:spPr>
           <a:xfrm xmlns:a="http://schemas.openxmlformats.org/drawingml/2006/main">
             <a:off x="731520" y="1463040"/>
-            <a:ext cx="7315200" cy="320040"/>
+            <a:ext cx="5577840" cy="320040"/>
           </a:xfrm>
           <a:prstGeom xmlns:a="http://schemas.openxmlformats.org/drawingml/2006/main" prst="rect">
             <a:avLst/>
@@ -3598,8 +3622,8 @@
         </p:nvSpPr>
         <p:spPr>
           <a:xfrm xmlns:a="http://schemas.openxmlformats.org/drawingml/2006/main">
-            <a:off x="731520" y="1874520"/>
-            <a:ext cx="7315200" cy="1005840"/>
+            <a:off x="1783080" y="1874520"/>
+            <a:ext cx="4480560" cy="1005840"/>
           </a:xfrm>
           <a:prstGeom xmlns:a="http://schemas.openxmlformats.org/drawingml/2006/main" prst="rect">
             <a:avLst/>
@@ -3645,7 +3669,7 @@
         <p:spPr>
           <a:xfrm xmlns:a="http://schemas.openxmlformats.org/drawingml/2006/main">
             <a:off x="731520" y="2926080"/>
-            <a:ext cx="7315200" cy="502920"/>
+            <a:ext cx="5577840" cy="502920"/>
           </a:xfrm>
           <a:prstGeom xmlns:a="http://schemas.openxmlformats.org/drawingml/2006/main" prst="rect">
             <a:avLst/>
@@ -3691,7 +3715,7 @@
         <p:spPr>
           <a:xfrm xmlns:a="http://schemas.openxmlformats.org/drawingml/2006/main">
             <a:off x="731520" y="3611880"/>
-            <a:ext cx="7680960" cy="411480"/>
+            <a:ext cx="5577840" cy="411480"/>
           </a:xfrm>
           <a:prstGeom xmlns:a="http://schemas.openxmlformats.org/drawingml/2006/main" prst="rect">
             <a:avLst/>
@@ -3736,8 +3760,8 @@
         </p:nvSpPr>
         <p:spPr>
           <a:xfrm xmlns:a="http://schemas.openxmlformats.org/drawingml/2006/main">
-            <a:off x="731520" y="5623560"/>
-            <a:ext cx="10058400" cy="320040"/>
+            <a:off x="731520" y="5257800"/>
+            <a:ext cx="5577840" cy="731520"/>
           </a:xfrm>
           <a:prstGeom xmlns:a="http://schemas.openxmlformats.org/drawingml/2006/main" prst="rect">
             <a:avLst/>
@@ -3760,10 +3784,27 @@
                 <a:ea typeface="Microsoft JhengHei"/>
                 <a:cs typeface="Microsoft JhengHei"/>
               </a:rPr>
-              <a:t>組長 陳威帆 11246044　｜　組員 許家全 11246039　｜　指導老師 陳信宏</a:t>
+              <a:t>組長 陳威帆 11246044　｜　組員 許家全 11246039</a:t>
             </a:r>
             <a:endParaRPr sz="1400"/>
           </a:p>
+          <a:p xmlns:a="http://schemas.openxmlformats.org/drawingml/2006/main">
+            <a:pPr marL="0" indent="0">
+              <a:buNone/>
+            </a:pPr>
+            <a:r>
+              <a:rPr sz="1400">
+                <a:solidFill>
+                  <a:srgbClr val="7A8CA3"/>
+                </a:solidFill>
+                <a:latin typeface="Microsoft JhengHei"/>
+                <a:ea typeface="Microsoft JhengHei"/>
+                <a:cs typeface="Microsoft JhengHei"/>
+              </a:rPr>
+              <a:t>指導老師 陳信宏 老師</a:t>
+            </a:r>
+            <a:endParaRPr sz="1400"/>
+          </a:p>
         </p:txBody>
       </p:sp>
       <p:sp>
@@ -3783,7 +3824,7 @@
         <p:spPr>
           <a:xfrm xmlns:a="http://schemas.openxmlformats.org/drawingml/2006/main">
             <a:off x="731520" y="5989320"/>
-            <a:ext cx="10058400" cy="320040"/>
+            <a:ext cx="5577840" cy="320040"/>
           </a:xfrm>
           <a:prstGeom xmlns:a="http://schemas.openxmlformats.org/drawingml/2006/main" prst="rect">
             <a:avLst/>
@@ -3872,7 +3913,7 @@
       </p:sp>
       <p:pic xmlns:a="http://schemas.openxmlformats.org/drawingml/2006/main" xmlns:r="http://schemas.openxmlformats.org/officeDocument/2006/relationships">
         <p:nvPicPr>
-          <p:cNvPr id="12" name="MeBOD Logo" descr="mebod-mark.png"/>
+          <p:cNvPr id="13" name="MeBOD Logo" descr="image.png"/>
           <p:cNvPicPr>
             <a:picLocks noChangeAspect="1"/>
           </p:cNvPicPr>
@@ -3886,16 +3927,16 @@
         </p:blipFill>
         <p:spPr>
           <a:xfrm>
-            <a:off x="8915400" y="1325880"/>
-            <a:ext cx="2514600" cy="2514600"/>
+            <a:off x="731520" y="1984248"/>
+            <a:ext cx="868680" cy="868680"/>
           </a:xfrm>
           <a:prstGeom prst="rect">
             <a:avLst/>
           </a:prstGeom>
           <a:effectLst>
-            <a:outerShdw blurRad="381000" dist="152400" dir="5400000" algn="t" rotWithShape="0">
+            <a:outerShdw blurRad="152400" dist="50800" dir="5400000" algn="t" rotWithShape="0">
               <a:srgbClr val="4F46E5">
-                <a:alpha val="28000"/>
+                <a:alpha val="30000"/>
               </a:srgbClr>
             </a:outerShdw>
           </a:effectLst>
@@ -3932,52 +3973,6 @@
       </p:grpSpPr>
       <p:sp>
         <p:nvSpPr>
-          <p:cNvPr id="2" name="Text 0">
-            <a:extLst xmlns:a="http://schemas.openxmlformats.org/drawingml/2006/main">
-              <a:ext uri="{FF2B5EF4-FFF2-40B4-BE49-F238E27FC236}">
-                <a16:creationId xmlns:a16="http://schemas.microsoft.com/office/drawing/2014/main" id="{AB329953-4910-47FA-969C-2A92C2CC35F4}"/>
-              </a:ext>
-            </a:extLst>
-          </p:cNvPr>
-          <p:cNvSpPr>
-            <a:spLocks xmlns:a="http://schemas.openxmlformats.org/drawingml/2006/main" noGrp="1"/>
-          </p:cNvSpPr>
-          <p:nvPr/>
-        </p:nvSpPr>
-        <p:spPr>
-          <a:xfrm xmlns:a="http://schemas.openxmlformats.org/drawingml/2006/main">
-            <a:off x="731520" y="457200"/>
-            <a:ext cx="7315200" cy="274320"/>
-          </a:xfrm>
-          <a:prstGeom xmlns:a="http://schemas.openxmlformats.org/drawingml/2006/main" prst="rect">
-            <a:avLst/>
-          </a:prstGeom>
-          <a:noFill xmlns:a="http://schemas.openxmlformats.org/drawingml/2006/main"/>
-        </p:spPr>
-        <p:txBody>
-          <a:bodyPr xmlns:a="http://schemas.openxmlformats.org/drawingml/2006/main" wrap="square" lIns="0" tIns="0" rIns="0" bIns="0" anchor="t"/>
-          <a:lstStyle xmlns:a="http://schemas.openxmlformats.org/drawingml/2006/main"/>
-          <a:p xmlns:a="http://schemas.openxmlformats.org/drawingml/2006/main">
-            <a:pPr marL="0" indent="0">
-              <a:buNone/>
-            </a:pPr>
-            <a:r>
-              <a:rPr sz="1300" b="1" spc="200">
-                <a:solidFill>
-                  <a:srgbClr val="D46A12"/>
-                </a:solidFill>
-                <a:latin typeface="Microsoft JhengHei"/>
-                <a:ea typeface="Microsoft JhengHei"/>
-                <a:cs typeface="Microsoft JhengHei"/>
-              </a:rPr>
-              <a:t>評審C · 爬蟲觸發 ／ 評審B · 資料篩選</a:t>
-            </a:r>
-            <a:endParaRPr sz="1300"/>
-          </a:p>
-        </p:txBody>
-      </p:sp>
-      <p:sp>
-        <p:nvSpPr>
           <p:cNvPr id="4" name="Text 2">
             <a:extLst xmlns:a="http://schemas.openxmlformats.org/drawingml/2006/main">
               <a:ext uri="{FF2B5EF4-FFF2-40B4-BE49-F238E27FC236}">
@@ -4056,6 +4051,10 @@
             <a:prstDash val="solid"/>
           </a:ln>
         </p:spPr>
+        <p:txBody xmlns:a="http://schemas.openxmlformats.org/drawingml/2006/main">
+          <a:bodyPr/>
+          <a:p/>
+        </p:txBody>
       </p:sp>
       <p:sp>
         <p:nvSpPr>
@@ -4089,6 +4088,10 @@
             <a:prstDash val="solid"/>
           </a:ln>
         </p:spPr>
+        <p:txBody xmlns:a="http://schemas.openxmlformats.org/drawingml/2006/main">
+          <a:bodyPr/>
+          <a:p/>
+        </p:txBody>
       </p:sp>
       <p:pic>
         <p:nvPicPr>
@@ -4293,6 +4296,10 @@
             <a:prstDash val="solid"/>
           </a:ln>
         </p:spPr>
+        <p:txBody xmlns:a="http://schemas.openxmlformats.org/drawingml/2006/main">
+          <a:bodyPr/>
+          <a:p/>
+        </p:txBody>
       </p:sp>
       <p:sp>
         <p:nvSpPr>
@@ -4326,6 +4333,10 @@
             <a:prstDash val="solid"/>
           </a:ln>
         </p:spPr>
+        <p:txBody xmlns:a="http://schemas.openxmlformats.org/drawingml/2006/main">
+          <a:bodyPr/>
+          <a:p/>
+        </p:txBody>
       </p:sp>
       <p:pic>
         <p:nvPicPr>
@@ -4530,6 +4541,10 @@
             <a:prstDash val="solid"/>
           </a:ln>
         </p:spPr>
+        <p:txBody xmlns:a="http://schemas.openxmlformats.org/drawingml/2006/main">
+          <a:bodyPr/>
+          <a:p/>
+        </p:txBody>
       </p:sp>
       <p:sp>
         <p:nvSpPr>
@@ -4563,6 +4578,10 @@
             <a:prstDash val="solid"/>
           </a:ln>
         </p:spPr>
+        <p:txBody xmlns:a="http://schemas.openxmlformats.org/drawingml/2006/main">
+          <a:bodyPr/>
+          <a:p/>
+        </p:txBody>
       </p:sp>
       <p:pic>
         <p:nvPicPr>
@@ -4766,6 +4785,10 @@
             <a:prstDash val="solid"/>
           </a:ln>
         </p:spPr>
+        <p:txBody xmlns:a="http://schemas.openxmlformats.org/drawingml/2006/main">
+          <a:bodyPr/>
+          <a:p/>
+        </p:txBody>
       </p:sp>
       <p:sp>
         <p:nvSpPr>
@@ -4799,6 +4822,10 @@
             <a:prstDash val="solid"/>
           </a:ln>
         </p:spPr>
+        <p:txBody xmlns:a="http://schemas.openxmlformats.org/drawingml/2006/main">
+          <a:bodyPr/>
+          <a:p/>
+        </p:txBody>
       </p:sp>
       <p:pic>
         <p:nvPicPr>
@@ -4973,6 +5000,10 @@
             <a:prstDash val="solid"/>
           </a:ln>
         </p:spPr>
+        <p:txBody xmlns:a="http://schemas.openxmlformats.org/drawingml/2006/main">
+          <a:bodyPr/>
+          <a:p/>
+        </p:txBody>
       </p:sp>
       <p:sp>
         <p:nvSpPr>
@@ -5054,6 +5085,10 @@
             <a:prstDash val="solid"/>
           </a:ln>
         </p:spPr>
+        <p:txBody xmlns:a="http://schemas.openxmlformats.org/drawingml/2006/main">
+          <a:bodyPr/>
+          <a:p/>
+        </p:txBody>
       </p:sp>
       <p:sp>
         <p:nvSpPr>
@@ -5135,6 +5170,10 @@
             <a:prstDash val="solid"/>
           </a:ln>
         </p:spPr>
+        <p:txBody xmlns:a="http://schemas.openxmlformats.org/drawingml/2006/main">
+          <a:bodyPr/>
+          <a:p/>
+        </p:txBody>
       </p:sp>
       <p:sp>
         <p:nvSpPr>
@@ -5329,64 +5368,6 @@
       </p:grpSpPr>
       <p:sp>
         <p:nvSpPr>
-          <p:cNvPr id="25" name="評審 B · RAG 修正">
-            <a:extLst xmlns:a="http://schemas.openxmlformats.org/drawingml/2006/main">
-              <a:ext uri="{FF2B5EF4-FFF2-40B4-BE49-F238E27FC236}">
-                <a16:creationId xmlns:a16="http://schemas.microsoft.com/office/drawing/2014/main" id="{75DE63E1-E2C4-45FD-85D0-6BD338CA52D7}"/>
-              </a:ext>
-            </a:extLst>
-          </p:cNvPr>
-          <p:cNvSpPr>
-            <a:spLocks xmlns:a="http://schemas.openxmlformats.org/drawingml/2006/main" noGrp="1"/>
-          </p:cNvSpPr>
-          <p:nvPr/>
-        </p:nvSpPr>
-        <p:spPr>
-          <a:xfrm xmlns:a="http://schemas.openxmlformats.org/drawingml/2006/main">
-            <a:off x="733425" y="447675"/>
-            <a:ext cx="10287000" cy="304800"/>
-          </a:xfrm>
-          <a:prstGeom xmlns:a="http://schemas.openxmlformats.org/drawingml/2006/main" prst="rect">
-            <a:avLst/>
-          </a:prstGeom>
-          <a:noFill xmlns:a="http://schemas.openxmlformats.org/drawingml/2006/main"/>
-          <a:ln xmlns:a="http://schemas.openxmlformats.org/drawingml/2006/main" w="0">
-            <a:noFill/>
-          </a:ln>
-        </p:spPr>
-        <p:txBody>
-          <a:bodyPr xmlns:a="http://schemas.openxmlformats.org/drawingml/2006/main" lIns="0" tIns="0" rIns="0" bIns="0"/>
-          <a:lstStyle xmlns:a="http://schemas.openxmlformats.org/drawingml/2006/main">
-            <a:defPPr>
-              <a:defRPr sz="1350" b="1">
-                <a:solidFill>
-                  <a:srgbClr val="C85C00"/>
-                </a:solidFill>
-              </a:defRPr>
-            </a:defPPr>
-          </a:lstStyle>
-          <a:p xmlns:a="http://schemas.openxmlformats.org/drawingml/2006/main">
-            <a:pPr>
-              <a:buNone/>
-              <a:defRPr sz="1350" b="1">
-                <a:solidFill>
-                  <a:srgbClr val="C85C00"/>
-                </a:solidFill>
-              </a:defRPr>
-            </a:pPr>
-            <a:r>
-              <a:rPr sz="1350" b="1">
-                <a:solidFill>
-                  <a:srgbClr val="C85C00"/>
-                </a:solidFill>
-              </a:rPr>
-              <a:t>評審 B · RAG 修正</a:t>
-            </a:r>
-          </a:p>
-        </p:txBody>
-      </p:sp>
-      <p:sp>
-        <p:nvSpPr>
           <p:cNvPr id="2" name="RAG：先找證據，再依問題整理答案">
             <a:extLst xmlns:a="http://schemas.openxmlformats.org/drawingml/2006/main">
               <a:ext uri="{FF2B5EF4-FFF2-40B4-BE49-F238E27FC236}">
@@ -5476,6 +5457,10 @@
             </a:solidFill>
           </a:ln>
         </p:spPr>
+        <p:txBody xmlns:a="http://schemas.openxmlformats.org/drawingml/2006/main">
+          <a:bodyPr/>
+          <a:p/>
+        </p:txBody>
       </p:sp>
       <p:sp>
         <p:nvSpPr>
@@ -5702,6 +5687,10 @@
             </a:solidFill>
           </a:ln>
         </p:spPr>
+        <p:txBody xmlns:a="http://schemas.openxmlformats.org/drawingml/2006/main">
+          <a:bodyPr/>
+          <a:p/>
+        </p:txBody>
       </p:sp>
       <p:sp>
         <p:nvSpPr>
@@ -5928,6 +5917,10 @@
             </a:solidFill>
           </a:ln>
         </p:spPr>
+        <p:txBody xmlns:a="http://schemas.openxmlformats.org/drawingml/2006/main">
+          <a:bodyPr/>
+          <a:p/>
+        </p:txBody>
       </p:sp>
       <p:sp>
         <p:nvSpPr>
@@ -6154,6 +6147,10 @@
             </a:solidFill>
           </a:ln>
         </p:spPr>
+        <p:txBody xmlns:a="http://schemas.openxmlformats.org/drawingml/2006/main">
+          <a:bodyPr/>
+          <a:p/>
+        </p:txBody>
       </p:sp>
       <p:sp>
         <p:nvSpPr>
@@ -6496,6 +6493,10 @@
             </a:solidFill>
           </a:ln>
         </p:spPr>
+        <p:txBody xmlns:a="http://schemas.openxmlformats.org/drawingml/2006/main">
+          <a:bodyPr/>
+          <a:p/>
+        </p:txBody>
       </p:sp>
       <p:sp>
         <p:nvSpPr>
@@ -6702,52 +6703,6 @@
       </p:grpSpPr>
       <p:sp>
         <p:nvSpPr>
-          <p:cNvPr id="2" name="Text 0">
-            <a:extLst xmlns:a="http://schemas.openxmlformats.org/drawingml/2006/main">
-              <a:ext uri="{FF2B5EF4-FFF2-40B4-BE49-F238E27FC236}">
-                <a16:creationId xmlns:a16="http://schemas.microsoft.com/office/drawing/2014/main" id="{7BAAFB14-3979-4C29-A168-E86AC5F85444}"/>
-              </a:ext>
-            </a:extLst>
-          </p:cNvPr>
-          <p:cNvSpPr>
-            <a:spLocks xmlns:a="http://schemas.openxmlformats.org/drawingml/2006/main" noGrp="1"/>
-          </p:cNvSpPr>
-          <p:nvPr/>
-        </p:nvSpPr>
-        <p:spPr>
-          <a:xfrm xmlns:a="http://schemas.openxmlformats.org/drawingml/2006/main">
-            <a:off x="731520" y="457200"/>
-            <a:ext cx="7315200" cy="274320"/>
-          </a:xfrm>
-          <a:prstGeom xmlns:a="http://schemas.openxmlformats.org/drawingml/2006/main" prst="rect">
-            <a:avLst/>
-          </a:prstGeom>
-          <a:noFill xmlns:a="http://schemas.openxmlformats.org/drawingml/2006/main"/>
-        </p:spPr>
-        <p:txBody>
-          <a:bodyPr xmlns:a="http://schemas.openxmlformats.org/drawingml/2006/main" wrap="square" lIns="0" tIns="0" rIns="0" bIns="0" anchor="t"/>
-          <a:lstStyle xmlns:a="http://schemas.openxmlformats.org/drawingml/2006/main"/>
-          <a:p xmlns:a="http://schemas.openxmlformats.org/drawingml/2006/main">
-            <a:pPr marL="0" indent="0">
-              <a:buNone/>
-            </a:pPr>
-            <a:r>
-              <a:rPr sz="1300" b="1" spc="200">
-                <a:solidFill>
-                  <a:srgbClr val="D46A12"/>
-                </a:solidFill>
-                <a:latin typeface="Microsoft JhengHei"/>
-                <a:ea typeface="Microsoft JhengHei"/>
-                <a:cs typeface="Microsoft JhengHei"/>
-              </a:rPr>
-              <a:t>評審B · 分數一致性</a:t>
-            </a:r>
-            <a:endParaRPr sz="1300"/>
-          </a:p>
-        </p:txBody>
-      </p:sp>
-      <p:sp>
-        <p:nvSpPr>
           <p:cNvPr id="4" name="Text 2">
             <a:extLst xmlns:a="http://schemas.openxmlformats.org/drawingml/2006/main">
               <a:ext uri="{FF2B5EF4-FFF2-40B4-BE49-F238E27FC236}">
@@ -6826,6 +6781,10 @@
             <a:prstDash val="solid"/>
           </a:ln>
         </p:spPr>
+        <p:txBody xmlns:a="http://schemas.openxmlformats.org/drawingml/2006/main">
+          <a:bodyPr/>
+          <a:p/>
+        </p:txBody>
       </p:sp>
       <p:sp>
         <p:nvSpPr>
@@ -6999,6 +6958,10 @@
             <a:prstDash val="solid"/>
           </a:ln>
         </p:spPr>
+        <p:txBody xmlns:a="http://schemas.openxmlformats.org/drawingml/2006/main">
+          <a:bodyPr/>
+          <a:p/>
+        </p:txBody>
       </p:sp>
       <p:sp>
         <p:nvSpPr>
@@ -7172,6 +7135,10 @@
             <a:prstDash val="solid"/>
           </a:ln>
         </p:spPr>
+        <p:txBody xmlns:a="http://schemas.openxmlformats.org/drawingml/2006/main">
+          <a:bodyPr/>
+          <a:p/>
+        </p:txBody>
       </p:sp>
       <p:sp>
         <p:nvSpPr>
@@ -7345,6 +7312,10 @@
             <a:prstDash val="solid"/>
           </a:ln>
         </p:spPr>
+        <p:txBody xmlns:a="http://schemas.openxmlformats.org/drawingml/2006/main">
+          <a:bodyPr/>
+          <a:p/>
+        </p:txBody>
       </p:sp>
       <p:sp>
         <p:nvSpPr>
@@ -7472,6 +7443,10 @@
             <a:prstDash val="solid"/>
           </a:ln>
         </p:spPr>
+        <p:txBody xmlns:a="http://schemas.openxmlformats.org/drawingml/2006/main">
+          <a:bodyPr/>
+          <a:p/>
+        </p:txBody>
       </p:sp>
       <p:sp>
         <p:nvSpPr>
@@ -7666,52 +7641,6 @@
       </p:grpSpPr>
       <p:sp>
         <p:nvSpPr>
-          <p:cNvPr id="2" name="Text 0">
-            <a:extLst xmlns:a="http://schemas.openxmlformats.org/drawingml/2006/main">
-              <a:ext uri="{FF2B5EF4-FFF2-40B4-BE49-F238E27FC236}">
-                <a16:creationId xmlns:a16="http://schemas.microsoft.com/office/drawing/2014/main" id="{58E45A7A-556D-4F81-83A7-14615AB27198}"/>
-              </a:ext>
-            </a:extLst>
-          </p:cNvPr>
-          <p:cNvSpPr>
-            <a:spLocks xmlns:a="http://schemas.openxmlformats.org/drawingml/2006/main" noGrp="1"/>
-          </p:cNvSpPr>
-          <p:nvPr/>
-        </p:nvSpPr>
-        <p:spPr>
-          <a:xfrm xmlns:a="http://schemas.openxmlformats.org/drawingml/2006/main">
-            <a:off x="731520" y="457200"/>
-            <a:ext cx="7315200" cy="274320"/>
-          </a:xfrm>
-          <a:prstGeom xmlns:a="http://schemas.openxmlformats.org/drawingml/2006/main" prst="rect">
-            <a:avLst/>
-          </a:prstGeom>
-          <a:noFill xmlns:a="http://schemas.openxmlformats.org/drawingml/2006/main"/>
-        </p:spPr>
-        <p:txBody>
-          <a:bodyPr xmlns:a="http://schemas.openxmlformats.org/drawingml/2006/main" wrap="square" lIns="0" tIns="0" rIns="0" bIns="0" anchor="t"/>
-          <a:lstStyle xmlns:a="http://schemas.openxmlformats.org/drawingml/2006/main"/>
-          <a:p xmlns:a="http://schemas.openxmlformats.org/drawingml/2006/main">
-            <a:pPr marL="0" indent="0">
-              <a:buNone/>
-            </a:pPr>
-            <a:r>
-              <a:rPr sz="1300" b="1" spc="200">
-                <a:solidFill>
-                  <a:srgbClr val="D46A12"/>
-                </a:solidFill>
-                <a:latin typeface="Microsoft JhengHei"/>
-                <a:ea typeface="Microsoft JhengHei"/>
-                <a:cs typeface="Microsoft JhengHei"/>
-              </a:rPr>
-              <a:t>系統完成度</a:t>
-            </a:r>
-            <a:endParaRPr sz="1300"/>
-          </a:p>
-        </p:txBody>
-      </p:sp>
-      <p:sp>
-        <p:nvSpPr>
           <p:cNvPr id="4" name="Text 2">
             <a:extLst xmlns:a="http://schemas.openxmlformats.org/drawingml/2006/main">
               <a:ext uri="{FF2B5EF4-FFF2-40B4-BE49-F238E27FC236}">
@@ -7790,6 +7719,10 @@
             <a:prstDash val="solid"/>
           </a:ln>
         </p:spPr>
+        <p:txBody xmlns:a="http://schemas.openxmlformats.org/drawingml/2006/main">
+          <a:bodyPr/>
+          <a:p/>
+        </p:txBody>
       </p:sp>
       <p:sp>
         <p:nvSpPr>
@@ -7823,6 +7756,10 @@
             <a:prstDash val="solid"/>
           </a:ln>
         </p:spPr>
+        <p:txBody xmlns:a="http://schemas.openxmlformats.org/drawingml/2006/main">
+          <a:bodyPr/>
+          <a:p/>
+        </p:txBody>
       </p:sp>
       <p:pic>
         <p:nvPicPr>
@@ -8083,6 +8020,10 @@
             <a:prstDash val="solid"/>
           </a:ln>
         </p:spPr>
+        <p:txBody xmlns:a="http://schemas.openxmlformats.org/drawingml/2006/main">
+          <a:bodyPr/>
+          <a:p/>
+        </p:txBody>
       </p:sp>
       <p:sp>
         <p:nvSpPr>
@@ -8116,6 +8057,10 @@
             <a:prstDash val="solid"/>
           </a:ln>
         </p:spPr>
+        <p:txBody xmlns:a="http://schemas.openxmlformats.org/drawingml/2006/main">
+          <a:bodyPr/>
+          <a:p/>
+        </p:txBody>
       </p:sp>
       <p:pic>
         <p:nvPicPr>
@@ -8336,6 +8281,10 @@
             <a:prstDash val="solid"/>
           </a:ln>
         </p:spPr>
+        <p:txBody xmlns:a="http://schemas.openxmlformats.org/drawingml/2006/main">
+          <a:bodyPr/>
+          <a:p/>
+        </p:txBody>
       </p:sp>
       <p:sp>
         <p:nvSpPr>
@@ -8369,6 +8318,10 @@
             <a:prstDash val="solid"/>
           </a:ln>
         </p:spPr>
+        <p:txBody xmlns:a="http://schemas.openxmlformats.org/drawingml/2006/main">
+          <a:bodyPr/>
+          <a:p/>
+        </p:txBody>
       </p:sp>
       <p:pic>
         <p:nvPicPr>
@@ -8589,6 +8542,10 @@
             <a:prstDash val="solid"/>
           </a:ln>
         </p:spPr>
+        <p:txBody xmlns:a="http://schemas.openxmlformats.org/drawingml/2006/main">
+          <a:bodyPr/>
+          <a:p/>
+        </p:txBody>
       </p:sp>
       <p:sp>
         <p:nvSpPr>
@@ -8783,22 +8740,22 @@
       </p:grpSpPr>
       <p:sp>
         <p:nvSpPr>
-          <p:cNvPr id="8" name="功能完整性">
-            <a:extLst xmlns:a="http://schemas.openxmlformats.org/drawingml/2006/main">
-              <a:ext uri="{FF2B5EF4-FFF2-40B4-BE49-F238E27FC236}">
-                <a16:creationId xmlns:a16="http://schemas.microsoft.com/office/drawing/2014/main" id="{6E42A8D1-38E0-47A4-9BC4-5B5DFEDFCB2F}"/>
-              </a:ext>
-            </a:extLst>
-          </p:cNvPr>
-          <p:cNvSpPr>
-            <a:spLocks xmlns:a="http://schemas.openxmlformats.org/drawingml/2006/main" noGrp="1"/>
-          </p:cNvSpPr>
-          <p:nvPr/>
-        </p:nvSpPr>
-        <p:spPr>
-          <a:xfrm xmlns:a="http://schemas.openxmlformats.org/drawingml/2006/main">
-            <a:off x="733425" y="447675"/>
-            <a:ext cx="10287000" cy="304800"/>
+          <p:cNvPr id="2" name="一條研究流程，對應六組可操作功能">
+            <a:extLst xmlns:a="http://schemas.openxmlformats.org/drawingml/2006/main">
+              <a:ext uri="{FF2B5EF4-FFF2-40B4-BE49-F238E27FC236}">
+                <a16:creationId xmlns:a16="http://schemas.microsoft.com/office/drawing/2014/main" id="{BE27C868-2AD2-4089-8BF8-60D6F295EC7D}"/>
+              </a:ext>
+            </a:extLst>
+          </p:cNvPr>
+          <p:cNvSpPr>
+            <a:spLocks xmlns:a="http://schemas.openxmlformats.org/drawingml/2006/main" noGrp="1"/>
+          </p:cNvSpPr>
+          <p:nvPr/>
+        </p:nvSpPr>
+        <p:spPr>
+          <a:xfrm xmlns:a="http://schemas.openxmlformats.org/drawingml/2006/main">
+            <a:off x="733425" y="933450"/>
+            <a:ext cx="10725150" cy="619125"/>
           </a:xfrm>
           <a:prstGeom xmlns:a="http://schemas.openxmlformats.org/drawingml/2006/main" prst="rect">
             <a:avLst/>
@@ -8812,9 +8769,9 @@
           <a:bodyPr xmlns:a="http://schemas.openxmlformats.org/drawingml/2006/main" lIns="0" tIns="0" rIns="0" bIns="0"/>
           <a:lstStyle xmlns:a="http://schemas.openxmlformats.org/drawingml/2006/main">
             <a:defPPr>
-              <a:defRPr sz="1350" b="1">
-                <a:solidFill>
-                  <a:srgbClr val="C85C00"/>
+              <a:defRPr sz="2700" b="1">
+                <a:solidFill>
+                  <a:srgbClr val="14243A"/>
                 </a:solidFill>
               </a:defRPr>
             </a:defPPr>
@@ -8822,77 +8779,19 @@
           <a:p xmlns:a="http://schemas.openxmlformats.org/drawingml/2006/main">
             <a:pPr>
               <a:buNone/>
-              <a:defRPr sz="1350" b="1">
-                <a:solidFill>
-                  <a:srgbClr val="C85C00"/>
+              <a:defRPr sz="2700" b="1">
+                <a:solidFill>
+                  <a:srgbClr val="14243A"/>
                 </a:solidFill>
               </a:defRPr>
             </a:pPr>
             <a:r>
-              <a:rPr sz="1350" b="1">
-                <a:solidFill>
-                  <a:srgbClr val="C85C00"/>
-                </a:solidFill>
-              </a:rPr>
-              <a:t>功能完整性</a:t>
-            </a:r>
-          </a:p>
-        </p:txBody>
-      </p:sp>
-      <p:sp>
-        <p:nvSpPr>
-          <p:cNvPr id="2" name="一條研究流程，對應六組可操作功能">
-            <a:extLst xmlns:a="http://schemas.openxmlformats.org/drawingml/2006/main">
-              <a:ext uri="{FF2B5EF4-FFF2-40B4-BE49-F238E27FC236}">
-                <a16:creationId xmlns:a16="http://schemas.microsoft.com/office/drawing/2014/main" id="{BE27C868-2AD2-4089-8BF8-60D6F295EC7D}"/>
-              </a:ext>
-            </a:extLst>
-          </p:cNvPr>
-          <p:cNvSpPr>
-            <a:spLocks xmlns:a="http://schemas.openxmlformats.org/drawingml/2006/main" noGrp="1"/>
-          </p:cNvSpPr>
-          <p:nvPr/>
-        </p:nvSpPr>
-        <p:spPr>
-          <a:xfrm xmlns:a="http://schemas.openxmlformats.org/drawingml/2006/main">
-            <a:off x="733425" y="933450"/>
-            <a:ext cx="10725150" cy="619125"/>
-          </a:xfrm>
-          <a:prstGeom xmlns:a="http://schemas.openxmlformats.org/drawingml/2006/main" prst="rect">
-            <a:avLst/>
-          </a:prstGeom>
-          <a:noFill xmlns:a="http://schemas.openxmlformats.org/drawingml/2006/main"/>
-          <a:ln xmlns:a="http://schemas.openxmlformats.org/drawingml/2006/main" w="0">
-            <a:noFill/>
-          </a:ln>
-        </p:spPr>
-        <p:txBody>
-          <a:bodyPr xmlns:a="http://schemas.openxmlformats.org/drawingml/2006/main" lIns="0" tIns="0" rIns="0" bIns="0"/>
-          <a:lstStyle xmlns:a="http://schemas.openxmlformats.org/drawingml/2006/main">
-            <a:defPPr>
-              <a:defRPr sz="2700" b="1">
+              <a:rPr sz="2700" b="1">
                 <a:solidFill>
                   <a:srgbClr val="14243A"/>
                 </a:solidFill>
-              </a:defRPr>
-            </a:defPPr>
-          </a:lstStyle>
-          <a:p xmlns:a="http://schemas.openxmlformats.org/drawingml/2006/main">
-            <a:pPr>
-              <a:buNone/>
-              <a:defRPr sz="2700" b="1">
-                <a:solidFill>
-                  <a:srgbClr val="14243A"/>
-                </a:solidFill>
-              </a:defRPr>
-            </a:pPr>
-            <a:r>
-              <a:rPr sz="2700" b="1">
-                <a:solidFill>
-                  <a:srgbClr val="14243A"/>
-                </a:solidFill>
-              </a:rPr>
-              <a:t>一條研究流程，對應六組可操作功能</a:t>
+              </a:rPr>
+              <a:t>功能完整性：一條研究流程，對應六組可操作功能</a:t>
             </a:r>
           </a:p>
         </p:txBody>
@@ -9726,6 +9625,10 @@
             </a:solidFill>
           </a:ln>
         </p:spPr>
+        <p:txBody xmlns:a="http://schemas.openxmlformats.org/drawingml/2006/main">
+          <a:bodyPr/>
+          <a:p/>
+        </p:txBody>
       </p:sp>
       <p:sp>
         <p:nvSpPr>
@@ -9932,64 +9835,6 @@
       </p:grpSpPr>
       <p:sp>
         <p:nvSpPr>
-          <p:cNvPr id="14" name="實機展示 · 2 分 20 秒">
-            <a:extLst xmlns:a="http://schemas.openxmlformats.org/drawingml/2006/main">
-              <a:ext uri="{FF2B5EF4-FFF2-40B4-BE49-F238E27FC236}">
-                <a16:creationId xmlns:a16="http://schemas.microsoft.com/office/drawing/2014/main" id="{6A4537BA-0D5D-4481-9844-C69165E11B8D}"/>
-              </a:ext>
-            </a:extLst>
-          </p:cNvPr>
-          <p:cNvSpPr>
-            <a:spLocks xmlns:a="http://schemas.openxmlformats.org/drawingml/2006/main" noGrp="1"/>
-          </p:cNvSpPr>
-          <p:nvPr/>
-        </p:nvSpPr>
-        <p:spPr>
-          <a:xfrm xmlns:a="http://schemas.openxmlformats.org/drawingml/2006/main">
-            <a:off x="733425" y="447675"/>
-            <a:ext cx="10287000" cy="304800"/>
-          </a:xfrm>
-          <a:prstGeom xmlns:a="http://schemas.openxmlformats.org/drawingml/2006/main" prst="rect">
-            <a:avLst/>
-          </a:prstGeom>
-          <a:noFill xmlns:a="http://schemas.openxmlformats.org/drawingml/2006/main"/>
-          <a:ln xmlns:a="http://schemas.openxmlformats.org/drawingml/2006/main" w="0">
-            <a:noFill/>
-          </a:ln>
-        </p:spPr>
-        <p:txBody>
-          <a:bodyPr xmlns:a="http://schemas.openxmlformats.org/drawingml/2006/main" lIns="0" tIns="0" rIns="0" bIns="0"/>
-          <a:lstStyle xmlns:a="http://schemas.openxmlformats.org/drawingml/2006/main">
-            <a:defPPr>
-              <a:defRPr sz="1350" b="1">
-                <a:solidFill>
-                  <a:srgbClr val="C85C00"/>
-                </a:solidFill>
-              </a:defRPr>
-            </a:defPPr>
-          </a:lstStyle>
-          <a:p xmlns:a="http://schemas.openxmlformats.org/drawingml/2006/main">
-            <a:pPr>
-              <a:buNone/>
-              <a:defRPr sz="1350" b="1">
-                <a:solidFill>
-                  <a:srgbClr val="C85C00"/>
-                </a:solidFill>
-              </a:defRPr>
-            </a:pPr>
-            <a:r>
-              <a:rPr sz="1350" b="1">
-                <a:solidFill>
-                  <a:srgbClr val="C85C00"/>
-                </a:solidFill>
-              </a:rPr>
-              <a:t>實機展示 · 2 分 20 秒</a:t>
-            </a:r>
-          </a:p>
-        </p:txBody>
-      </p:sp>
-      <p:sp>
-        <p:nvSpPr>
           <p:cNvPr id="2" name="Demo：完成一次跨平台口碑研究">
             <a:extLst xmlns:a="http://schemas.openxmlformats.org/drawingml/2006/main">
               <a:ext uri="{FF2B5EF4-FFF2-40B4-BE49-F238E27FC236}">
@@ -10491,6 +10336,10 @@
             </a:solidFill>
           </a:ln>
         </p:spPr>
+        <p:txBody xmlns:a="http://schemas.openxmlformats.org/drawingml/2006/main">
+          <a:bodyPr/>
+          <a:p/>
+        </p:txBody>
       </p:sp>
       <p:sp>
         <p:nvSpPr>
@@ -10695,64 +10544,6 @@
       <p:grpSpPr>
         <a:xfrm xmlns:a="http://schemas.openxmlformats.org/drawingml/2006/main"/>
       </p:grpSpPr>
-      <p:sp>
-        <p:nvSpPr>
-          <p:cNvPr id="9" name="驗證證據">
-            <a:extLst xmlns:a="http://schemas.openxmlformats.org/drawingml/2006/main">
-              <a:ext uri="{FF2B5EF4-FFF2-40B4-BE49-F238E27FC236}">
-                <a16:creationId xmlns:a16="http://schemas.microsoft.com/office/drawing/2014/main" id="{38E10553-FCB4-4202-94B2-40896151ED1D}"/>
-              </a:ext>
-            </a:extLst>
-          </p:cNvPr>
-          <p:cNvSpPr>
-            <a:spLocks xmlns:a="http://schemas.openxmlformats.org/drawingml/2006/main" noGrp="1"/>
-          </p:cNvSpPr>
-          <p:nvPr/>
-        </p:nvSpPr>
-        <p:spPr>
-          <a:xfrm xmlns:a="http://schemas.openxmlformats.org/drawingml/2006/main">
-            <a:off x="733425" y="447675"/>
-            <a:ext cx="10287000" cy="304800"/>
-          </a:xfrm>
-          <a:prstGeom xmlns:a="http://schemas.openxmlformats.org/drawingml/2006/main" prst="rect">
-            <a:avLst/>
-          </a:prstGeom>
-          <a:noFill xmlns:a="http://schemas.openxmlformats.org/drawingml/2006/main"/>
-          <a:ln xmlns:a="http://schemas.openxmlformats.org/drawingml/2006/main" w="0">
-            <a:noFill/>
-          </a:ln>
-        </p:spPr>
-        <p:txBody>
-          <a:bodyPr xmlns:a="http://schemas.openxmlformats.org/drawingml/2006/main" lIns="0" tIns="0" rIns="0" bIns="0"/>
-          <a:lstStyle xmlns:a="http://schemas.openxmlformats.org/drawingml/2006/main">
-            <a:defPPr>
-              <a:defRPr sz="1350" b="1">
-                <a:solidFill>
-                  <a:srgbClr val="C85C00"/>
-                </a:solidFill>
-              </a:defRPr>
-            </a:defPPr>
-          </a:lstStyle>
-          <a:p xmlns:a="http://schemas.openxmlformats.org/drawingml/2006/main">
-            <a:pPr>
-              <a:buNone/>
-              <a:defRPr sz="1350" b="1">
-                <a:solidFill>
-                  <a:srgbClr val="C85C00"/>
-                </a:solidFill>
-              </a:defRPr>
-            </a:pPr>
-            <a:r>
-              <a:rPr sz="1350" b="1">
-                <a:solidFill>
-                  <a:srgbClr val="C85C00"/>
-                </a:solidFill>
-              </a:rPr>
-              <a:t>驗證證據</a:t>
-            </a:r>
-          </a:p>
-        </p:txBody>
-      </p:sp>
       <p:sp>
         <p:nvSpPr>
           <p:cNvPr id="2" name="分層測試：區分原始報告與原稿紀錄">
@@ -11694,52 +11485,6 @@
       </p:grpSpPr>
       <p:sp>
         <p:nvSpPr>
-          <p:cNvPr id="2" name="Text 0">
-            <a:extLst xmlns:a="http://schemas.openxmlformats.org/drawingml/2006/main">
-              <a:ext uri="{FF2B5EF4-FFF2-40B4-BE49-F238E27FC236}">
-                <a16:creationId xmlns:a16="http://schemas.microsoft.com/office/drawing/2014/main" id="{677474F0-F8F4-49B2-B021-2841AA6251A6}"/>
-              </a:ext>
-            </a:extLst>
-          </p:cNvPr>
-          <p:cNvSpPr>
-            <a:spLocks xmlns:a="http://schemas.openxmlformats.org/drawingml/2006/main" noGrp="1"/>
-          </p:cNvSpPr>
-          <p:nvPr/>
-        </p:nvSpPr>
-        <p:spPr>
-          <a:xfrm xmlns:a="http://schemas.openxmlformats.org/drawingml/2006/main">
-            <a:off x="731520" y="457200"/>
-            <a:ext cx="7315200" cy="274320"/>
-          </a:xfrm>
-          <a:prstGeom xmlns:a="http://schemas.openxmlformats.org/drawingml/2006/main" prst="rect">
-            <a:avLst/>
-          </a:prstGeom>
-          <a:noFill xmlns:a="http://schemas.openxmlformats.org/drawingml/2006/main"/>
-        </p:spPr>
-        <p:txBody>
-          <a:bodyPr xmlns:a="http://schemas.openxmlformats.org/drawingml/2006/main" wrap="square" lIns="0" tIns="0" rIns="0" bIns="0" anchor="t"/>
-          <a:lstStyle xmlns:a="http://schemas.openxmlformats.org/drawingml/2006/main"/>
-          <a:p xmlns:a="http://schemas.openxmlformats.org/drawingml/2006/main">
-            <a:pPr marL="0" indent="0">
-              <a:buNone/>
-            </a:pPr>
-            <a:r>
-              <a:rPr sz="1300" b="1" spc="200">
-                <a:solidFill>
-                  <a:srgbClr val="D46A12"/>
-                </a:solidFill>
-                <a:latin typeface="Microsoft JhengHei"/>
-                <a:ea typeface="Microsoft JhengHei"/>
-                <a:cs typeface="Microsoft JhengHei"/>
-              </a:rPr>
-              <a:t>評審C · 甘特圖年月 ／ GitHub</a:t>
-            </a:r>
-            <a:endParaRPr sz="1300"/>
-          </a:p>
-        </p:txBody>
-      </p:sp>
-      <p:sp>
-        <p:nvSpPr>
           <p:cNvPr id="4" name="Text 2">
             <a:extLst xmlns:a="http://schemas.openxmlformats.org/drawingml/2006/main">
               <a:ext uri="{FF2B5EF4-FFF2-40B4-BE49-F238E27FC236}">
@@ -12370,6 +12115,10 @@
             <a:prstDash val="solid"/>
           </a:ln>
         </p:spPr>
+        <p:txBody xmlns:a="http://schemas.openxmlformats.org/drawingml/2006/main">
+          <a:bodyPr/>
+          <a:p/>
+        </p:txBody>
       </p:sp>
       <p:sp>
         <p:nvSpPr>
@@ -12451,6 +12200,10 @@
             <a:prstDash val="solid"/>
           </a:ln>
         </p:spPr>
+        <p:txBody xmlns:a="http://schemas.openxmlformats.org/drawingml/2006/main">
+          <a:bodyPr/>
+          <a:p/>
+        </p:txBody>
       </p:sp>
       <p:sp>
         <p:nvSpPr>
@@ -12532,6 +12285,10 @@
             <a:prstDash val="solid"/>
           </a:ln>
         </p:spPr>
+        <p:txBody xmlns:a="http://schemas.openxmlformats.org/drawingml/2006/main">
+          <a:bodyPr/>
+          <a:p/>
+        </p:txBody>
       </p:sp>
       <p:sp>
         <p:nvSpPr>
@@ -12613,6 +12370,10 @@
             <a:prstDash val="solid"/>
           </a:ln>
         </p:spPr>
+        <p:txBody xmlns:a="http://schemas.openxmlformats.org/drawingml/2006/main">
+          <a:bodyPr/>
+          <a:p/>
+        </p:txBody>
       </p:sp>
       <p:sp>
         <p:nvSpPr>
@@ -12692,6 +12453,10 @@
             <a:prstDash val="solid"/>
           </a:ln>
         </p:spPr>
+        <p:txBody xmlns:a="http://schemas.openxmlformats.org/drawingml/2006/main">
+          <a:bodyPr/>
+          <a:p/>
+        </p:txBody>
       </p:sp>
       <p:sp>
         <p:nvSpPr>
@@ -12788,6 +12553,10 @@
             <a:prstDash val="solid"/>
           </a:ln>
         </p:spPr>
+        <p:txBody xmlns:a="http://schemas.openxmlformats.org/drawingml/2006/main">
+          <a:bodyPr/>
+          <a:p/>
+        </p:txBody>
       </p:sp>
       <p:sp>
         <p:nvSpPr>
@@ -12884,6 +12653,10 @@
             <a:prstDash val="solid"/>
           </a:ln>
         </p:spPr>
+        <p:txBody xmlns:a="http://schemas.openxmlformats.org/drawingml/2006/main">
+          <a:bodyPr/>
+          <a:p/>
+        </p:txBody>
       </p:sp>
       <p:sp>
         <p:nvSpPr>
@@ -12980,6 +12753,10 @@
             <a:prstDash val="solid"/>
           </a:ln>
         </p:spPr>
+        <p:txBody xmlns:a="http://schemas.openxmlformats.org/drawingml/2006/main">
+          <a:bodyPr/>
+          <a:p/>
+        </p:txBody>
       </p:sp>
       <p:sp>
         <p:nvSpPr>
@@ -13078,6 +12855,10 @@
             <a:prstDash val="solid"/>
           </a:ln>
         </p:spPr>
+        <p:txBody xmlns:a="http://schemas.openxmlformats.org/drawingml/2006/main">
+          <a:bodyPr/>
+          <a:p/>
+        </p:txBody>
       </p:sp>
       <p:sp>
         <p:nvSpPr>
@@ -13113,6 +12894,10 @@
             <a:prstDash val="solid"/>
           </a:ln>
         </p:spPr>
+        <p:txBody xmlns:a="http://schemas.openxmlformats.org/drawingml/2006/main">
+          <a:bodyPr/>
+          <a:p/>
+        </p:txBody>
       </p:sp>
       <p:sp>
         <p:nvSpPr>
@@ -13148,6 +12933,10 @@
             <a:prstDash val="solid"/>
           </a:ln>
         </p:spPr>
+        <p:txBody xmlns:a="http://schemas.openxmlformats.org/drawingml/2006/main">
+          <a:bodyPr/>
+          <a:p/>
+        </p:txBody>
       </p:sp>
       <p:sp>
         <p:nvSpPr>
@@ -13275,6 +13064,10 @@
             <a:prstDash val="solid"/>
           </a:ln>
         </p:spPr>
+        <p:txBody xmlns:a="http://schemas.openxmlformats.org/drawingml/2006/main">
+          <a:bodyPr/>
+          <a:p/>
+        </p:txBody>
       </p:sp>
       <p:sp>
         <p:nvSpPr>
@@ -13402,6 +13195,10 @@
             <a:prstDash val="solid"/>
           </a:ln>
         </p:spPr>
+        <p:txBody xmlns:a="http://schemas.openxmlformats.org/drawingml/2006/main">
+          <a:bodyPr/>
+          <a:p/>
+        </p:txBody>
       </p:sp>
       <p:sp>
         <p:nvSpPr>
@@ -13529,6 +13326,10 @@
             <a:prstDash val="solid"/>
           </a:ln>
         </p:spPr>
+        <p:txBody xmlns:a="http://schemas.openxmlformats.org/drawingml/2006/main">
+          <a:bodyPr/>
+          <a:p/>
+        </p:txBody>
       </p:sp>
       <p:sp>
         <p:nvSpPr>
@@ -13656,6 +13457,10 @@
             <a:prstDash val="solid"/>
           </a:ln>
         </p:spPr>
+        <p:txBody xmlns:a="http://schemas.openxmlformats.org/drawingml/2006/main">
+          <a:bodyPr/>
+          <a:p/>
+        </p:txBody>
       </p:sp>
       <p:sp>
         <p:nvSpPr>
@@ -13783,6 +13588,10 @@
             <a:prstDash val="solid"/>
           </a:ln>
         </p:spPr>
+        <p:txBody xmlns:a="http://schemas.openxmlformats.org/drawingml/2006/main">
+          <a:bodyPr/>
+          <a:p/>
+        </p:txBody>
       </p:sp>
       <p:sp>
         <p:nvSpPr>
@@ -13999,52 +13808,6 @@
       </p:grpSpPr>
       <p:sp>
         <p:nvSpPr>
-          <p:cNvPr id="2" name="Text 0">
-            <a:extLst xmlns:a="http://schemas.openxmlformats.org/drawingml/2006/main">
-              <a:ext uri="{FF2B5EF4-FFF2-40B4-BE49-F238E27FC236}">
-                <a16:creationId xmlns:a16="http://schemas.microsoft.com/office/drawing/2014/main" id="{B16872A3-C2B2-4E51-AA59-7D118329E014}"/>
-              </a:ext>
-            </a:extLst>
-          </p:cNvPr>
-          <p:cNvSpPr>
-            <a:spLocks xmlns:a="http://schemas.openxmlformats.org/drawingml/2006/main" noGrp="1"/>
-          </p:cNvSpPr>
-          <p:nvPr/>
-        </p:nvSpPr>
-        <p:spPr>
-          <a:xfrm xmlns:a="http://schemas.openxmlformats.org/drawingml/2006/main">
-            <a:off x="731520" y="457200"/>
-            <a:ext cx="7315200" cy="274320"/>
-          </a:xfrm>
-          <a:prstGeom xmlns:a="http://schemas.openxmlformats.org/drawingml/2006/main" prst="rect">
-            <a:avLst/>
-          </a:prstGeom>
-          <a:noFill xmlns:a="http://schemas.openxmlformats.org/drawingml/2006/main"/>
-        </p:spPr>
-        <p:txBody>
-          <a:bodyPr xmlns:a="http://schemas.openxmlformats.org/drawingml/2006/main" wrap="square" lIns="0" tIns="0" rIns="0" bIns="0" anchor="t"/>
-          <a:lstStyle xmlns:a="http://schemas.openxmlformats.org/drawingml/2006/main"/>
-          <a:p xmlns:a="http://schemas.openxmlformats.org/drawingml/2006/main">
-            <a:pPr marL="0" indent="0">
-              <a:buNone/>
-            </a:pPr>
-            <a:r>
-              <a:rPr sz="1300" b="1" spc="200">
-                <a:solidFill>
-                  <a:srgbClr val="D46A12"/>
-                </a:solidFill>
-                <a:latin typeface="Microsoft JhengHei"/>
-                <a:ea typeface="Microsoft JhengHei"/>
-                <a:cs typeface="Microsoft JhengHei"/>
-              </a:rPr>
-              <a:t>分工參與</a:t>
-            </a:r>
-            <a:endParaRPr sz="1300"/>
-          </a:p>
-        </p:txBody>
-      </p:sp>
-      <p:sp>
-        <p:nvSpPr>
           <p:cNvPr id="4" name="Text 2">
             <a:extLst xmlns:a="http://schemas.openxmlformats.org/drawingml/2006/main">
               <a:ext uri="{FF2B5EF4-FFF2-40B4-BE49-F238E27FC236}">
@@ -14123,6 +13886,10 @@
             <a:prstDash val="solid"/>
           </a:ln>
         </p:spPr>
+        <p:txBody xmlns:a="http://schemas.openxmlformats.org/drawingml/2006/main">
+          <a:bodyPr/>
+          <a:p/>
+        </p:txBody>
       </p:sp>
       <p:sp>
         <p:nvSpPr>
@@ -14156,6 +13923,10 @@
             <a:prstDash val="solid"/>
           </a:ln>
         </p:spPr>
+        <p:txBody xmlns:a="http://schemas.openxmlformats.org/drawingml/2006/main">
+          <a:bodyPr/>
+          <a:p/>
+        </p:txBody>
       </p:sp>
       <p:pic>
         <p:nvPicPr>
@@ -14422,6 +14193,10 @@
             <a:prstDash val="solid"/>
           </a:ln>
         </p:spPr>
+        <p:txBody xmlns:a="http://schemas.openxmlformats.org/drawingml/2006/main">
+          <a:bodyPr/>
+          <a:p/>
+        </p:txBody>
       </p:sp>
       <p:sp>
         <p:nvSpPr>
@@ -14455,6 +14230,10 @@
             <a:prstDash val="solid"/>
           </a:ln>
         </p:spPr>
+        <p:txBody xmlns:a="http://schemas.openxmlformats.org/drawingml/2006/main">
+          <a:bodyPr/>
+          <a:p/>
+        </p:txBody>
       </p:sp>
       <p:pic>
         <p:nvPicPr>
@@ -14721,6 +14500,10 @@
             <a:prstDash val="solid"/>
           </a:ln>
         </p:spPr>
+        <p:txBody xmlns:a="http://schemas.openxmlformats.org/drawingml/2006/main">
+          <a:bodyPr/>
+          <a:p/>
+        </p:txBody>
       </p:sp>
       <p:sp>
         <p:nvSpPr>
@@ -14915,52 +14698,6 @@
       </p:grpSpPr>
       <p:sp>
         <p:nvSpPr>
-          <p:cNvPr id="2" name="Text 0">
-            <a:extLst xmlns:a="http://schemas.openxmlformats.org/drawingml/2006/main">
-              <a:ext uri="{FF2B5EF4-FFF2-40B4-BE49-F238E27FC236}">
-                <a16:creationId xmlns:a16="http://schemas.microsoft.com/office/drawing/2014/main" id="{04112E93-58A0-4FBC-948D-8502D6A3142D}"/>
-              </a:ext>
-            </a:extLst>
-          </p:cNvPr>
-          <p:cNvSpPr>
-            <a:spLocks xmlns:a="http://schemas.openxmlformats.org/drawingml/2006/main" noGrp="1"/>
-          </p:cNvSpPr>
-          <p:nvPr/>
-        </p:nvSpPr>
-        <p:spPr>
-          <a:xfrm xmlns:a="http://schemas.openxmlformats.org/drawingml/2006/main">
-            <a:off x="731520" y="457200"/>
-            <a:ext cx="7315200" cy="274320"/>
-          </a:xfrm>
-          <a:prstGeom xmlns:a="http://schemas.openxmlformats.org/drawingml/2006/main" prst="rect">
-            <a:avLst/>
-          </a:prstGeom>
-          <a:noFill xmlns:a="http://schemas.openxmlformats.org/drawingml/2006/main"/>
-        </p:spPr>
-        <p:txBody>
-          <a:bodyPr xmlns:a="http://schemas.openxmlformats.org/drawingml/2006/main" wrap="square" lIns="0" tIns="0" rIns="0" bIns="0" anchor="t"/>
-          <a:lstStyle xmlns:a="http://schemas.openxmlformats.org/drawingml/2006/main"/>
-          <a:p xmlns:a="http://schemas.openxmlformats.org/drawingml/2006/main">
-            <a:pPr marL="0" indent="0">
-              <a:buNone/>
-            </a:pPr>
-            <a:r>
-              <a:rPr sz="1300" b="1" spc="200">
-                <a:solidFill>
-                  <a:srgbClr val="D46A12"/>
-                </a:solidFill>
-                <a:latin typeface="Microsoft JhengHei"/>
-                <a:ea typeface="Microsoft JhengHei"/>
-                <a:cs typeface="Microsoft JhengHei"/>
-              </a:rPr>
-              <a:t>WRAP-UP</a:t>
-            </a:r>
-            <a:endParaRPr sz="1300"/>
-          </a:p>
-        </p:txBody>
-      </p:sp>
-      <p:sp>
-        <p:nvSpPr>
           <p:cNvPr id="4" name="Text 2">
             <a:extLst xmlns:a="http://schemas.openxmlformats.org/drawingml/2006/main">
               <a:ext uri="{FF2B5EF4-FFF2-40B4-BE49-F238E27FC236}">
@@ -15039,6 +14776,10 @@
             <a:prstDash val="solid"/>
           </a:ln>
         </p:spPr>
+        <p:txBody xmlns:a="http://schemas.openxmlformats.org/drawingml/2006/main">
+          <a:bodyPr/>
+          <a:p/>
+        </p:txBody>
       </p:sp>
       <p:sp>
         <p:nvSpPr>
@@ -15072,6 +14813,10 @@
             <a:prstDash val="solid"/>
           </a:ln>
         </p:spPr>
+        <p:txBody xmlns:a="http://schemas.openxmlformats.org/drawingml/2006/main">
+          <a:bodyPr/>
+          <a:p/>
+        </p:txBody>
       </p:sp>
       <p:pic>
         <p:nvPicPr>
@@ -15312,6 +15057,10 @@
             <a:prstDash val="solid"/>
           </a:ln>
         </p:spPr>
+        <p:txBody xmlns:a="http://schemas.openxmlformats.org/drawingml/2006/main">
+          <a:bodyPr/>
+          <a:p/>
+        </p:txBody>
       </p:sp>
       <p:sp>
         <p:nvSpPr>
@@ -15345,6 +15094,10 @@
             <a:prstDash val="solid"/>
           </a:ln>
         </p:spPr>
+        <p:txBody xmlns:a="http://schemas.openxmlformats.org/drawingml/2006/main">
+          <a:bodyPr/>
+          <a:p/>
+        </p:txBody>
       </p:sp>
       <p:pic>
         <p:nvPicPr>
@@ -15585,6 +15338,10 @@
             <a:prstDash val="solid"/>
           </a:ln>
         </p:spPr>
+        <p:txBody xmlns:a="http://schemas.openxmlformats.org/drawingml/2006/main">
+          <a:bodyPr/>
+          <a:p/>
+        </p:txBody>
       </p:sp>
       <p:sp>
         <p:nvSpPr>
@@ -15618,6 +15375,10 @@
             <a:prstDash val="solid"/>
           </a:ln>
         </p:spPr>
+        <p:txBody xmlns:a="http://schemas.openxmlformats.org/drawingml/2006/main">
+          <a:bodyPr/>
+          <a:p/>
+        </p:txBody>
       </p:sp>
       <p:pic>
         <p:nvPicPr>
@@ -15858,6 +15619,10 @@
             <a:prstDash val="solid"/>
           </a:ln>
         </p:spPr>
+        <p:txBody xmlns:a="http://schemas.openxmlformats.org/drawingml/2006/main">
+          <a:bodyPr/>
+          <a:p/>
+        </p:txBody>
       </p:sp>
       <p:sp>
         <p:nvSpPr>
@@ -16052,52 +15817,6 @@
       </p:grpSpPr>
       <p:sp>
         <p:nvSpPr>
-          <p:cNvPr id="2" name="Text 0">
-            <a:extLst xmlns:a="http://schemas.openxmlformats.org/drawingml/2006/main">
-              <a:ext uri="{FF2B5EF4-FFF2-40B4-BE49-F238E27FC236}">
-                <a16:creationId xmlns:a16="http://schemas.microsoft.com/office/drawing/2014/main" id="{1C455A85-E8A3-4FD7-BB36-5887F2307008}"/>
-              </a:ext>
-            </a:extLst>
-          </p:cNvPr>
-          <p:cNvSpPr>
-            <a:spLocks xmlns:a="http://schemas.openxmlformats.org/drawingml/2006/main" noGrp="1"/>
-          </p:cNvSpPr>
-          <p:nvPr/>
-        </p:nvSpPr>
-        <p:spPr>
-          <a:xfrm xmlns:a="http://schemas.openxmlformats.org/drawingml/2006/main">
-            <a:off x="731520" y="457200"/>
-            <a:ext cx="7315200" cy="274320"/>
-          </a:xfrm>
-          <a:prstGeom xmlns:a="http://schemas.openxmlformats.org/drawingml/2006/main" prst="rect">
-            <a:avLst/>
-          </a:prstGeom>
-          <a:noFill xmlns:a="http://schemas.openxmlformats.org/drawingml/2006/main"/>
-        </p:spPr>
-        <p:txBody>
-          <a:bodyPr xmlns:a="http://schemas.openxmlformats.org/drawingml/2006/main" wrap="square" lIns="0" tIns="0" rIns="0" bIns="0" anchor="t"/>
-          <a:lstStyle xmlns:a="http://schemas.openxmlformats.org/drawingml/2006/main"/>
-          <a:p xmlns:a="http://schemas.openxmlformats.org/drawingml/2006/main">
-            <a:pPr marL="0" indent="0">
-              <a:buNone/>
-            </a:pPr>
-            <a:r>
-              <a:rPr sz="1300" b="1" spc="200">
-                <a:solidFill>
-                  <a:srgbClr val="D46A12"/>
-                </a:solidFill>
-                <a:latin typeface="Microsoft JhengHei"/>
-                <a:ea typeface="Microsoft JhengHei"/>
-                <a:cs typeface="Microsoft JhengHei"/>
-              </a:rPr>
-              <a:t>AGENDA</a:t>
-            </a:r>
-            <a:endParaRPr sz="1300"/>
-          </a:p>
-        </p:txBody>
-      </p:sp>
-      <p:sp>
-        <p:nvSpPr>
           <p:cNvPr id="4" name="Text 2">
             <a:extLst xmlns:a="http://schemas.openxmlformats.org/drawingml/2006/main">
               <a:ext uri="{FF2B5EF4-FFF2-40B4-BE49-F238E27FC236}">
@@ -16176,6 +15895,10 @@
             <a:prstDash val="solid"/>
           </a:ln>
         </p:spPr>
+        <p:txBody xmlns:a="http://schemas.openxmlformats.org/drawingml/2006/main">
+          <a:bodyPr/>
+          <a:p/>
+        </p:txBody>
       </p:sp>
       <p:sp>
         <p:nvSpPr>
@@ -16366,6 +16089,10 @@
             <a:prstDash val="solid"/>
           </a:ln>
         </p:spPr>
+        <p:txBody xmlns:a="http://schemas.openxmlformats.org/drawingml/2006/main">
+          <a:bodyPr/>
+          <a:p/>
+        </p:txBody>
       </p:sp>
       <p:sp>
         <p:nvSpPr>
@@ -16493,6 +16220,10 @@
             <a:prstDash val="solid"/>
           </a:ln>
         </p:spPr>
+        <p:txBody xmlns:a="http://schemas.openxmlformats.org/drawingml/2006/main">
+          <a:bodyPr/>
+          <a:p/>
+        </p:txBody>
       </p:sp>
       <p:sp>
         <p:nvSpPr>
@@ -16683,6 +16414,10 @@
             <a:prstDash val="solid"/>
           </a:ln>
         </p:spPr>
+        <p:txBody xmlns:a="http://schemas.openxmlformats.org/drawingml/2006/main">
+          <a:bodyPr/>
+          <a:p/>
+        </p:txBody>
       </p:sp>
       <p:sp>
         <p:nvSpPr>
@@ -16810,6 +16545,10 @@
             <a:prstDash val="solid"/>
           </a:ln>
         </p:spPr>
+        <p:txBody xmlns:a="http://schemas.openxmlformats.org/drawingml/2006/main">
+          <a:bodyPr/>
+          <a:p/>
+        </p:txBody>
       </p:sp>
       <p:sp>
         <p:nvSpPr>
@@ -17000,6 +16739,10 @@
             <a:prstDash val="solid"/>
           </a:ln>
         </p:spPr>
+        <p:txBody xmlns:a="http://schemas.openxmlformats.org/drawingml/2006/main">
+          <a:bodyPr/>
+          <a:p/>
+        </p:txBody>
       </p:sp>
       <p:sp>
         <p:nvSpPr>
@@ -17127,6 +16870,10 @@
             <a:prstDash val="solid"/>
           </a:ln>
         </p:spPr>
+        <p:txBody xmlns:a="http://schemas.openxmlformats.org/drawingml/2006/main">
+          <a:bodyPr/>
+          <a:p/>
+        </p:txBody>
       </p:sp>
       <p:sp>
         <p:nvSpPr>
@@ -17317,6 +17064,10 @@
             <a:prstDash val="solid"/>
           </a:ln>
         </p:spPr>
+        <p:txBody xmlns:a="http://schemas.openxmlformats.org/drawingml/2006/main">
+          <a:bodyPr/>
+          <a:p/>
+        </p:txBody>
       </p:sp>
       <p:sp>
         <p:nvSpPr>
@@ -17444,6 +17195,10 @@
             <a:prstDash val="solid"/>
           </a:ln>
         </p:spPr>
+        <p:txBody xmlns:a="http://schemas.openxmlformats.org/drawingml/2006/main">
+          <a:bodyPr/>
+          <a:p/>
+        </p:txBody>
       </p:sp>
       <p:sp>
         <p:nvSpPr>
@@ -17485,7 +17240,7 @@
                 <a:ea typeface="Microsoft JhengHei"/>
                 <a:cs typeface="Microsoft JhengHei"/>
               </a:rPr>
-              <a:t>每頁左上角標示這頁回應的初審評審意見</a:t>
+              <a:t>16 項初評意見與回應頁碼，逐條對照於附錄 A、B</a:t>
             </a:r>
             <a:endParaRPr sz="1400"/>
           </a:p>
@@ -17638,22 +17393,22 @@
       </p:grpSpPr>
       <p:sp>
         <p:nvSpPr>
-          <p:cNvPr id="5" name="附錄 A · 前次評審意見修正情形">
-            <a:extLst xmlns:a="http://schemas.openxmlformats.org/drawingml/2006/main">
-              <a:ext uri="{FF2B5EF4-FFF2-40B4-BE49-F238E27FC236}">
-                <a16:creationId xmlns:a16="http://schemas.microsoft.com/office/drawing/2014/main" id="{857FA5A3-3658-46EE-AAB5-0C9EECE77345}"/>
-              </a:ext>
-            </a:extLst>
-          </p:cNvPr>
-          <p:cNvSpPr>
-            <a:spLocks xmlns:a="http://schemas.openxmlformats.org/drawingml/2006/main" noGrp="1"/>
-          </p:cNvSpPr>
-          <p:nvPr/>
-        </p:nvSpPr>
-        <p:spPr>
-          <a:xfrm xmlns:a="http://schemas.openxmlformats.org/drawingml/2006/main">
-            <a:off x="733425" y="447675"/>
-            <a:ext cx="10287000" cy="304800"/>
+          <p:cNvPr id="2" name="16 項意見對照：定位、營運與實作（1/2）">
+            <a:extLst xmlns:a="http://schemas.openxmlformats.org/drawingml/2006/main">
+              <a:ext uri="{FF2B5EF4-FFF2-40B4-BE49-F238E27FC236}">
+                <a16:creationId xmlns:a16="http://schemas.microsoft.com/office/drawing/2014/main" id="{E2BC45AA-4715-493E-B4D5-33FB96DEDD6F}"/>
+              </a:ext>
+            </a:extLst>
+          </p:cNvPr>
+          <p:cNvSpPr>
+            <a:spLocks xmlns:a="http://schemas.openxmlformats.org/drawingml/2006/main" noGrp="1"/>
+          </p:cNvSpPr>
+          <p:nvPr/>
+        </p:nvSpPr>
+        <p:spPr>
+          <a:xfrm xmlns:a="http://schemas.openxmlformats.org/drawingml/2006/main">
+            <a:off x="733425" y="933450"/>
+            <a:ext cx="10725150" cy="619125"/>
           </a:xfrm>
           <a:prstGeom xmlns:a="http://schemas.openxmlformats.org/drawingml/2006/main" prst="rect">
             <a:avLst/>
@@ -17667,9 +17422,9 @@
           <a:bodyPr xmlns:a="http://schemas.openxmlformats.org/drawingml/2006/main" lIns="0" tIns="0" rIns="0" bIns="0"/>
           <a:lstStyle xmlns:a="http://schemas.openxmlformats.org/drawingml/2006/main">
             <a:defPPr>
-              <a:defRPr sz="1350" b="1">
-                <a:solidFill>
-                  <a:srgbClr val="C85C00"/>
+              <a:defRPr sz="2700" b="1">
+                <a:solidFill>
+                  <a:srgbClr val="14243A"/>
                 </a:solidFill>
               </a:defRPr>
             </a:defPPr>
@@ -17677,77 +17432,19 @@
           <a:p xmlns:a="http://schemas.openxmlformats.org/drawingml/2006/main">
             <a:pPr>
               <a:buNone/>
-              <a:defRPr sz="1350" b="1">
-                <a:solidFill>
-                  <a:srgbClr val="C85C00"/>
+              <a:defRPr sz="2700" b="1">
+                <a:solidFill>
+                  <a:srgbClr val="14243A"/>
                 </a:solidFill>
               </a:defRPr>
             </a:pPr>
             <a:r>
-              <a:rPr sz="1350" b="1">
-                <a:solidFill>
-                  <a:srgbClr val="C85C00"/>
-                </a:solidFill>
-              </a:rPr>
-              <a:t>附錄 A · 前次評審意見修正情形</a:t>
-            </a:r>
-          </a:p>
-        </p:txBody>
-      </p:sp>
-      <p:sp>
-        <p:nvSpPr>
-          <p:cNvPr id="2" name="16 項意見對照：定位、營運與實作（1/2）">
-            <a:extLst xmlns:a="http://schemas.openxmlformats.org/drawingml/2006/main">
-              <a:ext uri="{FF2B5EF4-FFF2-40B4-BE49-F238E27FC236}">
-                <a16:creationId xmlns:a16="http://schemas.microsoft.com/office/drawing/2014/main" id="{E2BC45AA-4715-493E-B4D5-33FB96DEDD6F}"/>
-              </a:ext>
-            </a:extLst>
-          </p:cNvPr>
-          <p:cNvSpPr>
-            <a:spLocks xmlns:a="http://schemas.openxmlformats.org/drawingml/2006/main" noGrp="1"/>
-          </p:cNvSpPr>
-          <p:nvPr/>
-        </p:nvSpPr>
-        <p:spPr>
-          <a:xfrm xmlns:a="http://schemas.openxmlformats.org/drawingml/2006/main">
-            <a:off x="733425" y="933450"/>
-            <a:ext cx="10725150" cy="619125"/>
-          </a:xfrm>
-          <a:prstGeom xmlns:a="http://schemas.openxmlformats.org/drawingml/2006/main" prst="rect">
-            <a:avLst/>
-          </a:prstGeom>
-          <a:noFill xmlns:a="http://schemas.openxmlformats.org/drawingml/2006/main"/>
-          <a:ln xmlns:a="http://schemas.openxmlformats.org/drawingml/2006/main" w="0">
-            <a:noFill/>
-          </a:ln>
-        </p:spPr>
-        <p:txBody>
-          <a:bodyPr xmlns:a="http://schemas.openxmlformats.org/drawingml/2006/main" lIns="0" tIns="0" rIns="0" bIns="0"/>
-          <a:lstStyle xmlns:a="http://schemas.openxmlformats.org/drawingml/2006/main">
-            <a:defPPr>
-              <a:defRPr sz="2700" b="1">
+              <a:rPr sz="2700" b="1">
                 <a:solidFill>
                   <a:srgbClr val="14243A"/>
                 </a:solidFill>
-              </a:defRPr>
-            </a:defPPr>
-          </a:lstStyle>
-          <a:p xmlns:a="http://schemas.openxmlformats.org/drawingml/2006/main">
-            <a:pPr>
-              <a:buNone/>
-              <a:defRPr sz="2700" b="1">
-                <a:solidFill>
-                  <a:srgbClr val="14243A"/>
-                </a:solidFill>
-              </a:defRPr>
-            </a:pPr>
-            <a:r>
-              <a:rPr sz="2700" b="1">
-                <a:solidFill>
-                  <a:srgbClr val="14243A"/>
-                </a:solidFill>
-              </a:rPr>
-              <a:t>16 項意見對照：定位、營運與實作（1/2）</a:t>
+              </a:rPr>
+              <a:t>附錄 A｜16 項意見對照：定位、營運與實作（1/2）</a:t>
             </a:r>
           </a:p>
         </p:txBody>
@@ -18851,22 +18548,22 @@
       </p:grpSpPr>
       <p:sp>
         <p:nvSpPr>
-          <p:cNvPr id="7" name="附錄 B · 前次評審意見修正情形">
-            <a:extLst xmlns:a="http://schemas.openxmlformats.org/drawingml/2006/main">
-              <a:ext uri="{FF2B5EF4-FFF2-40B4-BE49-F238E27FC236}">
-                <a16:creationId xmlns:a16="http://schemas.microsoft.com/office/drawing/2014/main" id="{642ACF4E-61A3-4305-ADAD-3A0BA3122366}"/>
-              </a:ext>
-            </a:extLst>
-          </p:cNvPr>
-          <p:cNvSpPr>
-            <a:spLocks xmlns:a="http://schemas.openxmlformats.org/drawingml/2006/main" noGrp="1"/>
-          </p:cNvSpPr>
-          <p:nvPr/>
-        </p:nvSpPr>
-        <p:spPr>
-          <a:xfrm xmlns:a="http://schemas.openxmlformats.org/drawingml/2006/main">
-            <a:off x="733425" y="447675"/>
-            <a:ext cx="10287000" cy="304800"/>
+          <p:cNvPr id="2" name="16 項意見對照：資料品質與驗證（2/2）">
+            <a:extLst xmlns:a="http://schemas.openxmlformats.org/drawingml/2006/main">
+              <a:ext uri="{FF2B5EF4-FFF2-40B4-BE49-F238E27FC236}">
+                <a16:creationId xmlns:a16="http://schemas.microsoft.com/office/drawing/2014/main" id="{CF353B7E-532B-48C0-B4DB-3B5F5BA6C063}"/>
+              </a:ext>
+            </a:extLst>
+          </p:cNvPr>
+          <p:cNvSpPr>
+            <a:spLocks xmlns:a="http://schemas.openxmlformats.org/drawingml/2006/main" noGrp="1"/>
+          </p:cNvSpPr>
+          <p:nvPr/>
+        </p:nvSpPr>
+        <p:spPr>
+          <a:xfrm xmlns:a="http://schemas.openxmlformats.org/drawingml/2006/main">
+            <a:off x="733425" y="933450"/>
+            <a:ext cx="10725150" cy="619125"/>
           </a:xfrm>
           <a:prstGeom xmlns:a="http://schemas.openxmlformats.org/drawingml/2006/main" prst="rect">
             <a:avLst/>
@@ -18880,9 +18577,9 @@
           <a:bodyPr xmlns:a="http://schemas.openxmlformats.org/drawingml/2006/main" lIns="0" tIns="0" rIns="0" bIns="0"/>
           <a:lstStyle xmlns:a="http://schemas.openxmlformats.org/drawingml/2006/main">
             <a:defPPr>
-              <a:defRPr sz="1350" b="1">
-                <a:solidFill>
-                  <a:srgbClr val="C85C00"/>
+              <a:defRPr sz="2700" b="1">
+                <a:solidFill>
+                  <a:srgbClr val="14243A"/>
                 </a:solidFill>
               </a:defRPr>
             </a:defPPr>
@@ -18890,77 +18587,19 @@
           <a:p xmlns:a="http://schemas.openxmlformats.org/drawingml/2006/main">
             <a:pPr>
               <a:buNone/>
-              <a:defRPr sz="1350" b="1">
-                <a:solidFill>
-                  <a:srgbClr val="C85C00"/>
+              <a:defRPr sz="2700" b="1">
+                <a:solidFill>
+                  <a:srgbClr val="14243A"/>
                 </a:solidFill>
               </a:defRPr>
             </a:pPr>
             <a:r>
-              <a:rPr sz="1350" b="1">
-                <a:solidFill>
-                  <a:srgbClr val="C85C00"/>
-                </a:solidFill>
-              </a:rPr>
-              <a:t>附錄 B · 前次評審意見修正情形</a:t>
-            </a:r>
-          </a:p>
-        </p:txBody>
-      </p:sp>
-      <p:sp>
-        <p:nvSpPr>
-          <p:cNvPr id="2" name="16 項意見對照：資料品質與驗證（2/2）">
-            <a:extLst xmlns:a="http://schemas.openxmlformats.org/drawingml/2006/main">
-              <a:ext uri="{FF2B5EF4-FFF2-40B4-BE49-F238E27FC236}">
-                <a16:creationId xmlns:a16="http://schemas.microsoft.com/office/drawing/2014/main" id="{CF353B7E-532B-48C0-B4DB-3B5F5BA6C063}"/>
-              </a:ext>
-            </a:extLst>
-          </p:cNvPr>
-          <p:cNvSpPr>
-            <a:spLocks xmlns:a="http://schemas.openxmlformats.org/drawingml/2006/main" noGrp="1"/>
-          </p:cNvSpPr>
-          <p:nvPr/>
-        </p:nvSpPr>
-        <p:spPr>
-          <a:xfrm xmlns:a="http://schemas.openxmlformats.org/drawingml/2006/main">
-            <a:off x="733425" y="933450"/>
-            <a:ext cx="10725150" cy="619125"/>
-          </a:xfrm>
-          <a:prstGeom xmlns:a="http://schemas.openxmlformats.org/drawingml/2006/main" prst="rect">
-            <a:avLst/>
-          </a:prstGeom>
-          <a:noFill xmlns:a="http://schemas.openxmlformats.org/drawingml/2006/main"/>
-          <a:ln xmlns:a="http://schemas.openxmlformats.org/drawingml/2006/main" w="0">
-            <a:noFill/>
-          </a:ln>
-        </p:spPr>
-        <p:txBody>
-          <a:bodyPr xmlns:a="http://schemas.openxmlformats.org/drawingml/2006/main" lIns="0" tIns="0" rIns="0" bIns="0"/>
-          <a:lstStyle xmlns:a="http://schemas.openxmlformats.org/drawingml/2006/main">
-            <a:defPPr>
-              <a:defRPr sz="2700" b="1">
+              <a:rPr sz="2700" b="1">
                 <a:solidFill>
                   <a:srgbClr val="14243A"/>
                 </a:solidFill>
-              </a:defRPr>
-            </a:defPPr>
-          </a:lstStyle>
-          <a:p xmlns:a="http://schemas.openxmlformats.org/drawingml/2006/main">
-            <a:pPr>
-              <a:buNone/>
-              <a:defRPr sz="2700" b="1">
-                <a:solidFill>
-                  <a:srgbClr val="14243A"/>
-                </a:solidFill>
-              </a:defRPr>
-            </a:pPr>
-            <a:r>
-              <a:rPr sz="2700" b="1">
-                <a:solidFill>
-                  <a:srgbClr val="14243A"/>
-                </a:solidFill>
-              </a:rPr>
-              <a:t>16 項意見對照：資料品質與驗證（2/2）</a:t>
+              </a:rPr>
+              <a:t>附錄 B｜16 項意見對照：資料品質與驗證（2/2）</a:t>
             </a:r>
           </a:p>
         </p:txBody>
@@ -20008,6 +19647,10 @@
             </a:solidFill>
           </a:ln>
         </p:spPr>
+        <p:txBody xmlns:a="http://schemas.openxmlformats.org/drawingml/2006/main">
+          <a:bodyPr/>
+          <a:p/>
+        </p:txBody>
       </p:sp>
       <p:sp>
         <p:nvSpPr>
@@ -20156,22 +19799,22 @@
       </p:grpSpPr>
       <p:sp>
         <p:nvSpPr>
-          <p:cNvPr id="8" name="附錄 C · 成本敏感度（純情境）">
-            <a:extLst xmlns:a="http://schemas.openxmlformats.org/drawingml/2006/main">
-              <a:ext uri="{FF2B5EF4-FFF2-40B4-BE49-F238E27FC236}">
-                <a16:creationId xmlns:a16="http://schemas.microsoft.com/office/drawing/2014/main" id="{214F1E84-FCAD-443F-93C1-46E80450F956}"/>
-              </a:ext>
-            </a:extLst>
-          </p:cNvPr>
-          <p:cNvSpPr>
-            <a:spLocks xmlns:a="http://schemas.openxmlformats.org/drawingml/2006/main" noGrp="1"/>
-          </p:cNvSpPr>
-          <p:nvPr/>
-        </p:nvSpPr>
-        <p:spPr>
-          <a:xfrm xmlns:a="http://schemas.openxmlformats.org/drawingml/2006/main">
-            <a:off x="733425" y="447675"/>
-            <a:ext cx="10287000" cy="304800"/>
+          <p:cNvPr id="2" name="人力成本納入後，平衡帳號數會上升">
+            <a:extLst xmlns:a="http://schemas.openxmlformats.org/drawingml/2006/main">
+              <a:ext uri="{FF2B5EF4-FFF2-40B4-BE49-F238E27FC236}">
+                <a16:creationId xmlns:a16="http://schemas.microsoft.com/office/drawing/2014/main" id="{D86BB3C5-1D82-4414-88DB-A862FA32F41C}"/>
+              </a:ext>
+            </a:extLst>
+          </p:cNvPr>
+          <p:cNvSpPr>
+            <a:spLocks xmlns:a="http://schemas.openxmlformats.org/drawingml/2006/main" noGrp="1"/>
+          </p:cNvSpPr>
+          <p:nvPr/>
+        </p:nvSpPr>
+        <p:spPr>
+          <a:xfrm xmlns:a="http://schemas.openxmlformats.org/drawingml/2006/main">
+            <a:off x="733425" y="933450"/>
+            <a:ext cx="10725150" cy="619125"/>
           </a:xfrm>
           <a:prstGeom xmlns:a="http://schemas.openxmlformats.org/drawingml/2006/main" prst="rect">
             <a:avLst/>
@@ -20185,9 +19828,9 @@
           <a:bodyPr xmlns:a="http://schemas.openxmlformats.org/drawingml/2006/main" lIns="0" tIns="0" rIns="0" bIns="0"/>
           <a:lstStyle xmlns:a="http://schemas.openxmlformats.org/drawingml/2006/main">
             <a:defPPr>
-              <a:defRPr sz="1350" b="1">
-                <a:solidFill>
-                  <a:srgbClr val="C85C00"/>
+              <a:defRPr sz="2700" b="1">
+                <a:solidFill>
+                  <a:srgbClr val="14243A"/>
                 </a:solidFill>
               </a:defRPr>
             </a:defPPr>
@@ -20195,77 +19838,19 @@
           <a:p xmlns:a="http://schemas.openxmlformats.org/drawingml/2006/main">
             <a:pPr>
               <a:buNone/>
-              <a:defRPr sz="1350" b="1">
-                <a:solidFill>
-                  <a:srgbClr val="C85C00"/>
+              <a:defRPr sz="2700" b="1">
+                <a:solidFill>
+                  <a:srgbClr val="14243A"/>
                 </a:solidFill>
               </a:defRPr>
             </a:pPr>
             <a:r>
-              <a:rPr sz="1350" b="1">
-                <a:solidFill>
-                  <a:srgbClr val="C85C00"/>
-                </a:solidFill>
-              </a:rPr>
-              <a:t>附錄 C · 成本敏感度（加入人力）</a:t>
-            </a:r>
-          </a:p>
-        </p:txBody>
-      </p:sp>
-      <p:sp>
-        <p:nvSpPr>
-          <p:cNvPr id="2" name="人力成本納入後，平衡帳號數會上升">
-            <a:extLst xmlns:a="http://schemas.openxmlformats.org/drawingml/2006/main">
-              <a:ext uri="{FF2B5EF4-FFF2-40B4-BE49-F238E27FC236}">
-                <a16:creationId xmlns:a16="http://schemas.microsoft.com/office/drawing/2014/main" id="{D86BB3C5-1D82-4414-88DB-A862FA32F41C}"/>
-              </a:ext>
-            </a:extLst>
-          </p:cNvPr>
-          <p:cNvSpPr>
-            <a:spLocks xmlns:a="http://schemas.openxmlformats.org/drawingml/2006/main" noGrp="1"/>
-          </p:cNvSpPr>
-          <p:nvPr/>
-        </p:nvSpPr>
-        <p:spPr>
-          <a:xfrm xmlns:a="http://schemas.openxmlformats.org/drawingml/2006/main">
-            <a:off x="733425" y="933450"/>
-            <a:ext cx="10725150" cy="619125"/>
-          </a:xfrm>
-          <a:prstGeom xmlns:a="http://schemas.openxmlformats.org/drawingml/2006/main" prst="rect">
-            <a:avLst/>
-          </a:prstGeom>
-          <a:noFill xmlns:a="http://schemas.openxmlformats.org/drawingml/2006/main"/>
-          <a:ln xmlns:a="http://schemas.openxmlformats.org/drawingml/2006/main" w="0">
-            <a:noFill/>
-          </a:ln>
-        </p:spPr>
-        <p:txBody>
-          <a:bodyPr xmlns:a="http://schemas.openxmlformats.org/drawingml/2006/main" lIns="0" tIns="0" rIns="0" bIns="0"/>
-          <a:lstStyle xmlns:a="http://schemas.openxmlformats.org/drawingml/2006/main">
-            <a:defPPr>
-              <a:defRPr sz="2700" b="1">
+              <a:rPr sz="2700" b="1">
                 <a:solidFill>
                   <a:srgbClr val="14243A"/>
                 </a:solidFill>
-              </a:defRPr>
-            </a:defPPr>
-          </a:lstStyle>
-          <a:p xmlns:a="http://schemas.openxmlformats.org/drawingml/2006/main">
-            <a:pPr>
-              <a:buNone/>
-              <a:defRPr sz="2700" b="1">
-                <a:solidFill>
-                  <a:srgbClr val="14243A"/>
-                </a:solidFill>
-              </a:defRPr>
-            </a:pPr>
-            <a:r>
-              <a:rPr sz="2700" b="1">
-                <a:solidFill>
-                  <a:srgbClr val="14243A"/>
-                </a:solidFill>
-              </a:rPr>
-              <a:t>加入維運人力後，平衡帳號數變成 12～21 個</a:t>
+              </a:rPr>
+              <a:t>附錄 C｜加入維運人力後，平衡帳號數變成 12～21 個</a:t>
             </a:r>
           </a:p>
         </p:txBody>
@@ -20988,22 +20573,22 @@
       </p:grpSpPr>
       <p:sp>
         <p:nvSpPr>
-          <p:cNvPr id="7" name="附錄 D · Demo 備援畫面">
-            <a:extLst xmlns:a="http://schemas.openxmlformats.org/drawingml/2006/main">
-              <a:ext uri="{FF2B5EF4-FFF2-40B4-BE49-F238E27FC236}">
-                <a16:creationId xmlns:a16="http://schemas.microsoft.com/office/drawing/2014/main" id="{5CE1F2A8-0EE7-40D8-80F0-F729CCA9E822}"/>
-              </a:ext>
-            </a:extLst>
-          </p:cNvPr>
-          <p:cNvSpPr>
-            <a:spLocks xmlns:a="http://schemas.openxmlformats.org/drawingml/2006/main" noGrp="1"/>
-          </p:cNvSpPr>
-          <p:nvPr/>
-        </p:nvSpPr>
-        <p:spPr>
-          <a:xfrm xmlns:a="http://schemas.openxmlformats.org/drawingml/2006/main">
-            <a:off x="733425" y="447675"/>
-            <a:ext cx="10287000" cy="304800"/>
+          <p:cNvPr id="2" name="AI 問答：從回答回到引用文章">
+            <a:extLst xmlns:a="http://schemas.openxmlformats.org/drawingml/2006/main">
+              <a:ext uri="{FF2B5EF4-FFF2-40B4-BE49-F238E27FC236}">
+                <a16:creationId xmlns:a16="http://schemas.microsoft.com/office/drawing/2014/main" id="{CD4E88AE-E5B8-4FC4-AFE2-AC0F898C4A3F}"/>
+              </a:ext>
+            </a:extLst>
+          </p:cNvPr>
+          <p:cNvSpPr>
+            <a:spLocks xmlns:a="http://schemas.openxmlformats.org/drawingml/2006/main" noGrp="1"/>
+          </p:cNvSpPr>
+          <p:nvPr/>
+        </p:nvSpPr>
+        <p:spPr>
+          <a:xfrm xmlns:a="http://schemas.openxmlformats.org/drawingml/2006/main">
+            <a:off x="733425" y="933450"/>
+            <a:ext cx="10725150" cy="619125"/>
           </a:xfrm>
           <a:prstGeom xmlns:a="http://schemas.openxmlformats.org/drawingml/2006/main" prst="rect">
             <a:avLst/>
@@ -21017,9 +20602,9 @@
           <a:bodyPr xmlns:a="http://schemas.openxmlformats.org/drawingml/2006/main" lIns="0" tIns="0" rIns="0" bIns="0"/>
           <a:lstStyle xmlns:a="http://schemas.openxmlformats.org/drawingml/2006/main">
             <a:defPPr>
-              <a:defRPr sz="1350" b="1">
-                <a:solidFill>
-                  <a:srgbClr val="C85C00"/>
+              <a:defRPr sz="2700" b="1">
+                <a:solidFill>
+                  <a:srgbClr val="14243A"/>
                 </a:solidFill>
               </a:defRPr>
             </a:defPPr>
@@ -21027,77 +20612,19 @@
           <a:p xmlns:a="http://schemas.openxmlformats.org/drawingml/2006/main">
             <a:pPr>
               <a:buNone/>
-              <a:defRPr sz="1350" b="1">
-                <a:solidFill>
-                  <a:srgbClr val="C85C00"/>
+              <a:defRPr sz="2700" b="1">
+                <a:solidFill>
+                  <a:srgbClr val="14243A"/>
                 </a:solidFill>
               </a:defRPr>
             </a:pPr>
             <a:r>
-              <a:rPr sz="1350" b="1">
-                <a:solidFill>
-                  <a:srgbClr val="C85C00"/>
-                </a:solidFill>
-              </a:rPr>
-              <a:t>附錄 D · Demo 備援畫面</a:t>
-            </a:r>
-          </a:p>
-        </p:txBody>
-      </p:sp>
-      <p:sp>
-        <p:nvSpPr>
-          <p:cNvPr id="2" name="AI 問答：從回答回到引用文章">
-            <a:extLst xmlns:a="http://schemas.openxmlformats.org/drawingml/2006/main">
-              <a:ext uri="{FF2B5EF4-FFF2-40B4-BE49-F238E27FC236}">
-                <a16:creationId xmlns:a16="http://schemas.microsoft.com/office/drawing/2014/main" id="{CD4E88AE-E5B8-4FC4-AFE2-AC0F898C4A3F}"/>
-              </a:ext>
-            </a:extLst>
-          </p:cNvPr>
-          <p:cNvSpPr>
-            <a:spLocks xmlns:a="http://schemas.openxmlformats.org/drawingml/2006/main" noGrp="1"/>
-          </p:cNvSpPr>
-          <p:nvPr/>
-        </p:nvSpPr>
-        <p:spPr>
-          <a:xfrm xmlns:a="http://schemas.openxmlformats.org/drawingml/2006/main">
-            <a:off x="733425" y="933450"/>
-            <a:ext cx="10725150" cy="619125"/>
-          </a:xfrm>
-          <a:prstGeom xmlns:a="http://schemas.openxmlformats.org/drawingml/2006/main" prst="rect">
-            <a:avLst/>
-          </a:prstGeom>
-          <a:noFill xmlns:a="http://schemas.openxmlformats.org/drawingml/2006/main"/>
-          <a:ln xmlns:a="http://schemas.openxmlformats.org/drawingml/2006/main" w="0">
-            <a:noFill/>
-          </a:ln>
-        </p:spPr>
-        <p:txBody>
-          <a:bodyPr xmlns:a="http://schemas.openxmlformats.org/drawingml/2006/main" lIns="0" tIns="0" rIns="0" bIns="0"/>
-          <a:lstStyle xmlns:a="http://schemas.openxmlformats.org/drawingml/2006/main">
-            <a:defPPr>
-              <a:defRPr sz="2700" b="1">
+              <a:rPr sz="2700" b="1">
                 <a:solidFill>
                   <a:srgbClr val="14243A"/>
                 </a:solidFill>
-              </a:defRPr>
-            </a:defPPr>
-          </a:lstStyle>
-          <a:p xmlns:a="http://schemas.openxmlformats.org/drawingml/2006/main">
-            <a:pPr>
-              <a:buNone/>
-              <a:defRPr sz="2700" b="1">
-                <a:solidFill>
-                  <a:srgbClr val="14243A"/>
-                </a:solidFill>
-              </a:defRPr>
-            </a:pPr>
-            <a:r>
-              <a:rPr sz="2700" b="1">
-                <a:solidFill>
-                  <a:srgbClr val="14243A"/>
-                </a:solidFill>
-              </a:rPr>
-              <a:t>AI 問答：從回答回到引用文章</a:t>
+              </a:rPr>
+              <a:t>附錄 D｜AI 問答：從回答回到引用文章</a:t>
             </a:r>
           </a:p>
         </p:txBody>
@@ -21163,6 +20690,10 @@
             </a:solidFill>
           </a:ln>
         </p:spPr>
+        <p:txBody xmlns:a="http://schemas.openxmlformats.org/drawingml/2006/main">
+          <a:bodyPr/>
+          <a:p/>
+        </p:txBody>
       </p:sp>
       <p:sp>
         <p:nvSpPr>
@@ -21311,22 +20842,22 @@
       </p:grpSpPr>
       <p:sp>
         <p:nvSpPr>
-          <p:cNvPr id="7" name="附錄 E · Demo 備援畫面">
-            <a:extLst xmlns:a="http://schemas.openxmlformats.org/drawingml/2006/main">
-              <a:ext uri="{FF2B5EF4-FFF2-40B4-BE49-F238E27FC236}">
-                <a16:creationId xmlns:a16="http://schemas.microsoft.com/office/drawing/2014/main" id="{5EA75AAF-5CFE-49EB-A641-5693FBDAF375}"/>
-              </a:ext>
-            </a:extLst>
-          </p:cNvPr>
-          <p:cNvSpPr>
-            <a:spLocks xmlns:a="http://schemas.openxmlformats.org/drawingml/2006/main" noGrp="1"/>
-          </p:cNvSpPr>
-          <p:nvPr/>
-        </p:nvSpPr>
-        <p:spPr>
-          <a:xfrm xmlns:a="http://schemas.openxmlformats.org/drawingml/2006/main">
-            <a:off x="733425" y="447675"/>
-            <a:ext cx="10287000" cy="304800"/>
+          <p:cNvPr id="2" name="歷史比較：保留兩次查詢的分析結果">
+            <a:extLst xmlns:a="http://schemas.openxmlformats.org/drawingml/2006/main">
+              <a:ext uri="{FF2B5EF4-FFF2-40B4-BE49-F238E27FC236}">
+                <a16:creationId xmlns:a16="http://schemas.microsoft.com/office/drawing/2014/main" id="{18FF3E2A-7776-4E3F-9C3A-5421CE753764}"/>
+              </a:ext>
+            </a:extLst>
+          </p:cNvPr>
+          <p:cNvSpPr>
+            <a:spLocks xmlns:a="http://schemas.openxmlformats.org/drawingml/2006/main" noGrp="1"/>
+          </p:cNvSpPr>
+          <p:nvPr/>
+        </p:nvSpPr>
+        <p:spPr>
+          <a:xfrm xmlns:a="http://schemas.openxmlformats.org/drawingml/2006/main">
+            <a:off x="733425" y="933450"/>
+            <a:ext cx="10725150" cy="619125"/>
           </a:xfrm>
           <a:prstGeom xmlns:a="http://schemas.openxmlformats.org/drawingml/2006/main" prst="rect">
             <a:avLst/>
@@ -21340,9 +20871,9 @@
           <a:bodyPr xmlns:a="http://schemas.openxmlformats.org/drawingml/2006/main" lIns="0" tIns="0" rIns="0" bIns="0"/>
           <a:lstStyle xmlns:a="http://schemas.openxmlformats.org/drawingml/2006/main">
             <a:defPPr>
-              <a:defRPr sz="1350" b="1">
-                <a:solidFill>
-                  <a:srgbClr val="C85C00"/>
+              <a:defRPr sz="2700" b="1">
+                <a:solidFill>
+                  <a:srgbClr val="14243A"/>
                 </a:solidFill>
               </a:defRPr>
             </a:defPPr>
@@ -21350,77 +20881,19 @@
           <a:p xmlns:a="http://schemas.openxmlformats.org/drawingml/2006/main">
             <a:pPr>
               <a:buNone/>
-              <a:defRPr sz="1350" b="1">
-                <a:solidFill>
-                  <a:srgbClr val="C85C00"/>
+              <a:defRPr sz="2700" b="1">
+                <a:solidFill>
+                  <a:srgbClr val="14243A"/>
                 </a:solidFill>
               </a:defRPr>
             </a:pPr>
             <a:r>
-              <a:rPr sz="1350" b="1">
-                <a:solidFill>
-                  <a:srgbClr val="C85C00"/>
-                </a:solidFill>
-              </a:rPr>
-              <a:t>附錄 E · Demo 備援畫面</a:t>
-            </a:r>
-          </a:p>
-        </p:txBody>
-      </p:sp>
-      <p:sp>
-        <p:nvSpPr>
-          <p:cNvPr id="2" name="歷史比較：保留兩次查詢的分析結果">
-            <a:extLst xmlns:a="http://schemas.openxmlformats.org/drawingml/2006/main">
-              <a:ext uri="{FF2B5EF4-FFF2-40B4-BE49-F238E27FC236}">
-                <a16:creationId xmlns:a16="http://schemas.microsoft.com/office/drawing/2014/main" id="{18FF3E2A-7776-4E3F-9C3A-5421CE753764}"/>
-              </a:ext>
-            </a:extLst>
-          </p:cNvPr>
-          <p:cNvSpPr>
-            <a:spLocks xmlns:a="http://schemas.openxmlformats.org/drawingml/2006/main" noGrp="1"/>
-          </p:cNvSpPr>
-          <p:nvPr/>
-        </p:nvSpPr>
-        <p:spPr>
-          <a:xfrm xmlns:a="http://schemas.openxmlformats.org/drawingml/2006/main">
-            <a:off x="733425" y="933450"/>
-            <a:ext cx="10725150" cy="619125"/>
-          </a:xfrm>
-          <a:prstGeom xmlns:a="http://schemas.openxmlformats.org/drawingml/2006/main" prst="rect">
-            <a:avLst/>
-          </a:prstGeom>
-          <a:noFill xmlns:a="http://schemas.openxmlformats.org/drawingml/2006/main"/>
-          <a:ln xmlns:a="http://schemas.openxmlformats.org/drawingml/2006/main" w="0">
-            <a:noFill/>
-          </a:ln>
-        </p:spPr>
-        <p:txBody>
-          <a:bodyPr xmlns:a="http://schemas.openxmlformats.org/drawingml/2006/main" lIns="0" tIns="0" rIns="0" bIns="0"/>
-          <a:lstStyle xmlns:a="http://schemas.openxmlformats.org/drawingml/2006/main">
-            <a:defPPr>
-              <a:defRPr sz="2700" b="1">
+              <a:rPr sz="2700" b="1">
                 <a:solidFill>
                   <a:srgbClr val="14243A"/>
                 </a:solidFill>
-              </a:defRPr>
-            </a:defPPr>
-          </a:lstStyle>
-          <a:p xmlns:a="http://schemas.openxmlformats.org/drawingml/2006/main">
-            <a:pPr>
-              <a:buNone/>
-              <a:defRPr sz="2700" b="1">
-                <a:solidFill>
-                  <a:srgbClr val="14243A"/>
-                </a:solidFill>
-              </a:defRPr>
-            </a:pPr>
-            <a:r>
-              <a:rPr sz="2700" b="1">
-                <a:solidFill>
-                  <a:srgbClr val="14243A"/>
-                </a:solidFill>
-              </a:rPr>
-              <a:t>歷史比較：保留兩次查詢的分析結果</a:t>
+              </a:rPr>
+              <a:t>附錄 E｜歷史比較：保留兩次查詢的分析結果</a:t>
             </a:r>
           </a:p>
         </p:txBody>
@@ -21486,6 +20959,10 @@
             </a:solidFill>
           </a:ln>
         </p:spPr>
+        <p:txBody xmlns:a="http://schemas.openxmlformats.org/drawingml/2006/main">
+          <a:bodyPr/>
+          <a:p/>
+        </p:txBody>
       </p:sp>
       <p:sp>
         <p:nvSpPr>
@@ -21634,22 +21111,22 @@
       </p:grpSpPr>
       <p:sp>
         <p:nvSpPr>
-          <p:cNvPr id="8" name="附錄 C · 成本敏感度（純情境）">
-            <a:extLst xmlns:a="http://schemas.openxmlformats.org/drawingml/2006/main">
-              <a:ext uri="{FF2B5EF4-FFF2-40B4-BE49-F238E27FC236}">
-                <a16:creationId xmlns:a16="http://schemas.microsoft.com/office/drawing/2014/main" id="{214F1E84-FCAD-443F-93C1-46E80450F956}"/>
-              </a:ext>
-            </a:extLst>
-          </p:cNvPr>
-          <p:cNvSpPr>
-            <a:spLocks xmlns:a="http://schemas.openxmlformats.org/drawingml/2006/main" noGrp="1"/>
-          </p:cNvSpPr>
-          <p:nvPr/>
-        </p:nvSpPr>
-        <p:spPr>
-          <a:xfrm xmlns:a="http://schemas.openxmlformats.org/drawingml/2006/main">
-            <a:off x="733425" y="447675"/>
-            <a:ext cx="10287000" cy="304800"/>
+          <p:cNvPr id="2" name="人力成本納入後，平衡帳號數會上升">
+            <a:extLst xmlns:a="http://schemas.openxmlformats.org/drawingml/2006/main">
+              <a:ext uri="{FF2B5EF4-FFF2-40B4-BE49-F238E27FC236}">
+                <a16:creationId xmlns:a16="http://schemas.microsoft.com/office/drawing/2014/main" id="{D86BB3C5-1D82-4414-88DB-A862FA32F41C}"/>
+              </a:ext>
+            </a:extLst>
+          </p:cNvPr>
+          <p:cNvSpPr>
+            <a:spLocks xmlns:a="http://schemas.openxmlformats.org/drawingml/2006/main" noGrp="1"/>
+          </p:cNvSpPr>
+          <p:nvPr/>
+        </p:nvSpPr>
+        <p:spPr>
+          <a:xfrm xmlns:a="http://schemas.openxmlformats.org/drawingml/2006/main">
+            <a:off x="733425" y="933450"/>
+            <a:ext cx="10725150" cy="619125"/>
           </a:xfrm>
           <a:prstGeom xmlns:a="http://schemas.openxmlformats.org/drawingml/2006/main" prst="rect">
             <a:avLst/>
@@ -21663,9 +21140,9 @@
           <a:bodyPr xmlns:a="http://schemas.openxmlformats.org/drawingml/2006/main" lIns="0" tIns="0" rIns="0" bIns="0"/>
           <a:lstStyle xmlns:a="http://schemas.openxmlformats.org/drawingml/2006/main">
             <a:defPPr>
-              <a:defRPr sz="1350" b="1">
-                <a:solidFill>
-                  <a:srgbClr val="C85C00"/>
+              <a:defRPr sz="2700" b="1">
+                <a:solidFill>
+                  <a:srgbClr val="14243A"/>
                 </a:solidFill>
               </a:defRPr>
             </a:defPPr>
@@ -21673,77 +21150,19 @@
           <a:p xmlns:a="http://schemas.openxmlformats.org/drawingml/2006/main">
             <a:pPr>
               <a:buNone/>
-              <a:defRPr sz="1350" b="1">
-                <a:solidFill>
-                  <a:srgbClr val="C85C00"/>
+              <a:defRPr sz="2700" b="1">
+                <a:solidFill>
+                  <a:srgbClr val="14243A"/>
                 </a:solidFill>
               </a:defRPr>
             </a:pPr>
             <a:r>
-              <a:rPr sz="1350" b="1">
-                <a:solidFill>
-                  <a:srgbClr val="C85C00"/>
-                </a:solidFill>
-              </a:rPr>
-              <a:t>附錄 F · 成本明細與來源</a:t>
-            </a:r>
-          </a:p>
-        </p:txBody>
-      </p:sp>
-      <p:sp>
-        <p:nvSpPr>
-          <p:cNvPr id="2" name="人力成本納入後，平衡帳號數會上升">
-            <a:extLst xmlns:a="http://schemas.openxmlformats.org/drawingml/2006/main">
-              <a:ext uri="{FF2B5EF4-FFF2-40B4-BE49-F238E27FC236}">
-                <a16:creationId xmlns:a16="http://schemas.microsoft.com/office/drawing/2014/main" id="{D86BB3C5-1D82-4414-88DB-A862FA32F41C}"/>
-              </a:ext>
-            </a:extLst>
-          </p:cNvPr>
-          <p:cNvSpPr>
-            <a:spLocks xmlns:a="http://schemas.openxmlformats.org/drawingml/2006/main" noGrp="1"/>
-          </p:cNvSpPr>
-          <p:nvPr/>
-        </p:nvSpPr>
-        <p:spPr>
-          <a:xfrm xmlns:a="http://schemas.openxmlformats.org/drawingml/2006/main">
-            <a:off x="733425" y="933450"/>
-            <a:ext cx="10725150" cy="619125"/>
-          </a:xfrm>
-          <a:prstGeom xmlns:a="http://schemas.openxmlformats.org/drawingml/2006/main" prst="rect">
-            <a:avLst/>
-          </a:prstGeom>
-          <a:noFill xmlns:a="http://schemas.openxmlformats.org/drawingml/2006/main"/>
-          <a:ln xmlns:a="http://schemas.openxmlformats.org/drawingml/2006/main" w="0">
-            <a:noFill/>
-          </a:ln>
-        </p:spPr>
-        <p:txBody>
-          <a:bodyPr xmlns:a="http://schemas.openxmlformats.org/drawingml/2006/main" lIns="0" tIns="0" rIns="0" bIns="0"/>
-          <a:lstStyle xmlns:a="http://schemas.openxmlformats.org/drawingml/2006/main">
-            <a:defPPr>
-              <a:defRPr sz="2700" b="1">
+              <a:rPr sz="2700" b="1">
                 <a:solidFill>
                   <a:srgbClr val="14243A"/>
                 </a:solidFill>
-              </a:defRPr>
-            </a:defPPr>
-          </a:lstStyle>
-          <a:p xmlns:a="http://schemas.openxmlformats.org/drawingml/2006/main">
-            <a:pPr>
-              <a:buNone/>
-              <a:defRPr sz="2700" b="1">
-                <a:solidFill>
-                  <a:srgbClr val="14243A"/>
-                </a:solidFill>
-              </a:defRPr>
-            </a:pPr>
-            <a:r>
-              <a:rPr sz="2700" b="1">
-                <a:solidFill>
-                  <a:srgbClr val="14243A"/>
-                </a:solidFill>
-              </a:rPr>
-              <a:t>每一個數字的算法與出處</a:t>
+              </a:rPr>
+              <a:t>附錄 F｜每一個數字的算法與出處</a:t>
             </a:r>
           </a:p>
         </p:txBody>
@@ -22729,52 +22148,6 @@
       </p:grpSpPr>
       <p:sp>
         <p:nvSpPr>
-          <p:cNvPr id="2" name="Text 0">
-            <a:extLst xmlns:a="http://schemas.openxmlformats.org/drawingml/2006/main">
-              <a:ext uri="{FF2B5EF4-FFF2-40B4-BE49-F238E27FC236}">
-                <a16:creationId xmlns:a16="http://schemas.microsoft.com/office/drawing/2014/main" id="{D5EFDA59-683B-4B95-90AF-A7AFA2728D43}"/>
-              </a:ext>
-            </a:extLst>
-          </p:cNvPr>
-          <p:cNvSpPr>
-            <a:spLocks xmlns:a="http://schemas.openxmlformats.org/drawingml/2006/main" noGrp="1"/>
-          </p:cNvSpPr>
-          <p:nvPr/>
-        </p:nvSpPr>
-        <p:spPr>
-          <a:xfrm xmlns:a="http://schemas.openxmlformats.org/drawingml/2006/main">
-            <a:off x="731520" y="457200"/>
-            <a:ext cx="7315200" cy="274320"/>
-          </a:xfrm>
-          <a:prstGeom xmlns:a="http://schemas.openxmlformats.org/drawingml/2006/main" prst="rect">
-            <a:avLst/>
-          </a:prstGeom>
-          <a:noFill xmlns:a="http://schemas.openxmlformats.org/drawingml/2006/main"/>
-        </p:spPr>
-        <p:txBody>
-          <a:bodyPr xmlns:a="http://schemas.openxmlformats.org/drawingml/2006/main" wrap="square" lIns="0" tIns="0" rIns="0" bIns="0" anchor="t"/>
-          <a:lstStyle xmlns:a="http://schemas.openxmlformats.org/drawingml/2006/main"/>
-          <a:p xmlns:a="http://schemas.openxmlformats.org/drawingml/2006/main">
-            <a:pPr marL="0" indent="0">
-              <a:buNone/>
-            </a:pPr>
-            <a:r>
-              <a:rPr sz="1300" b="1" spc="200">
-                <a:solidFill>
-                  <a:srgbClr val="D46A12"/>
-                </a:solidFill>
-                <a:latin typeface="Microsoft JhengHei"/>
-                <a:ea typeface="Microsoft JhengHei"/>
-                <a:cs typeface="Microsoft JhengHei"/>
-              </a:rPr>
-              <a:t>WHY · 問題與動機</a:t>
-            </a:r>
-            <a:endParaRPr sz="1300"/>
-          </a:p>
-        </p:txBody>
-      </p:sp>
-      <p:sp>
-        <p:nvSpPr>
           <p:cNvPr id="4" name="Text 2">
             <a:extLst xmlns:a="http://schemas.openxmlformats.org/drawingml/2006/main">
               <a:ext uri="{FF2B5EF4-FFF2-40B4-BE49-F238E27FC236}">
@@ -22853,6 +22226,10 @@
             <a:prstDash val="solid"/>
           </a:ln>
         </p:spPr>
+        <p:txBody xmlns:a="http://schemas.openxmlformats.org/drawingml/2006/main">
+          <a:bodyPr/>
+          <a:p/>
+        </p:txBody>
       </p:sp>
       <p:sp>
         <p:nvSpPr>
@@ -22886,6 +22263,10 @@
             <a:prstDash val="solid"/>
           </a:ln>
         </p:spPr>
+        <p:txBody xmlns:a="http://schemas.openxmlformats.org/drawingml/2006/main">
+          <a:bodyPr/>
+          <a:p/>
+        </p:txBody>
       </p:sp>
       <p:pic>
         <p:nvPicPr>
@@ -23060,6 +22441,10 @@
             <a:prstDash val="solid"/>
           </a:ln>
         </p:spPr>
+        <p:txBody xmlns:a="http://schemas.openxmlformats.org/drawingml/2006/main">
+          <a:bodyPr/>
+          <a:p/>
+        </p:txBody>
       </p:sp>
       <p:sp>
         <p:nvSpPr>
@@ -23093,6 +22478,10 @@
             <a:prstDash val="solid"/>
           </a:ln>
         </p:spPr>
+        <p:txBody xmlns:a="http://schemas.openxmlformats.org/drawingml/2006/main">
+          <a:bodyPr/>
+          <a:p/>
+        </p:txBody>
       </p:sp>
       <p:pic>
         <p:nvPicPr>
@@ -23267,6 +22656,10 @@
             <a:prstDash val="solid"/>
           </a:ln>
         </p:spPr>
+        <p:txBody xmlns:a="http://schemas.openxmlformats.org/drawingml/2006/main">
+          <a:bodyPr/>
+          <a:p/>
+        </p:txBody>
       </p:sp>
       <p:sp>
         <p:nvSpPr>
@@ -23300,6 +22693,10 @@
             <a:prstDash val="solid"/>
           </a:ln>
         </p:spPr>
+        <p:txBody xmlns:a="http://schemas.openxmlformats.org/drawingml/2006/main">
+          <a:bodyPr/>
+          <a:p/>
+        </p:txBody>
       </p:sp>
       <p:pic>
         <p:nvPicPr>
@@ -23474,6 +22871,10 @@
             <a:prstDash val="solid"/>
           </a:ln>
         </p:spPr>
+        <p:txBody xmlns:a="http://schemas.openxmlformats.org/drawingml/2006/main">
+          <a:bodyPr/>
+          <a:p/>
+        </p:txBody>
       </p:sp>
       <p:sp>
         <p:nvSpPr>
@@ -23631,6 +23032,10 @@
             <a:prstDash val="solid"/>
           </a:ln>
         </p:spPr>
+        <p:txBody xmlns:a="http://schemas.openxmlformats.org/drawingml/2006/main">
+          <a:bodyPr/>
+          <a:p/>
+        </p:txBody>
       </p:sp>
       <p:sp>
         <p:nvSpPr>
@@ -23788,6 +23193,10 @@
             <a:prstDash val="solid"/>
           </a:ln>
         </p:spPr>
+        <p:txBody xmlns:a="http://schemas.openxmlformats.org/drawingml/2006/main">
+          <a:bodyPr/>
+          <a:p/>
+        </p:txBody>
       </p:sp>
       <p:sp>
         <p:nvSpPr>
@@ -23915,6 +23324,10 @@
             <a:prstDash val="solid"/>
           </a:ln>
         </p:spPr>
+        <p:txBody xmlns:a="http://schemas.openxmlformats.org/drawingml/2006/main">
+          <a:bodyPr/>
+          <a:p/>
+        </p:txBody>
       </p:sp>
       <p:sp>
         <p:nvSpPr>
@@ -24109,22 +23522,22 @@
       </p:grpSpPr>
       <p:sp>
         <p:nvSpPr>
-          <p:cNvPr id="8" name="前次評審意見修正情形">
-            <a:extLst xmlns:a="http://schemas.openxmlformats.org/drawingml/2006/main">
-              <a:ext uri="{FF2B5EF4-FFF2-40B4-BE49-F238E27FC236}">
-                <a16:creationId xmlns:a16="http://schemas.microsoft.com/office/drawing/2014/main" id="{6AF31943-CD07-4715-B488-8A905AEC654F}"/>
-              </a:ext>
-            </a:extLst>
-          </p:cNvPr>
-          <p:cNvSpPr>
-            <a:spLocks xmlns:a="http://schemas.openxmlformats.org/drawingml/2006/main" noGrp="1"/>
-          </p:cNvSpPr>
-          <p:nvPr/>
-        </p:nvSpPr>
-        <p:spPr>
-          <a:xfrm xmlns:a="http://schemas.openxmlformats.org/drawingml/2006/main">
-            <a:off x="733425" y="447675"/>
-            <a:ext cx="10287000" cy="304800"/>
+          <p:cNvPr id="2" name="初評意見已轉成具體修正與待辦">
+            <a:extLst xmlns:a="http://schemas.openxmlformats.org/drawingml/2006/main">
+              <a:ext uri="{FF2B5EF4-FFF2-40B4-BE49-F238E27FC236}">
+                <a16:creationId xmlns:a16="http://schemas.microsoft.com/office/drawing/2014/main" id="{4FD84B34-62B7-42E5-BDA4-DEAC158EE649}"/>
+              </a:ext>
+            </a:extLst>
+          </p:cNvPr>
+          <p:cNvSpPr>
+            <a:spLocks xmlns:a="http://schemas.openxmlformats.org/drawingml/2006/main" noGrp="1"/>
+          </p:cNvSpPr>
+          <p:nvPr/>
+        </p:nvSpPr>
+        <p:spPr>
+          <a:xfrm xmlns:a="http://schemas.openxmlformats.org/drawingml/2006/main">
+            <a:off x="733425" y="933450"/>
+            <a:ext cx="10725150" cy="619125"/>
           </a:xfrm>
           <a:prstGeom xmlns:a="http://schemas.openxmlformats.org/drawingml/2006/main" prst="rect">
             <a:avLst/>
@@ -24138,9 +23551,9 @@
           <a:bodyPr xmlns:a="http://schemas.openxmlformats.org/drawingml/2006/main" lIns="0" tIns="0" rIns="0" bIns="0"/>
           <a:lstStyle xmlns:a="http://schemas.openxmlformats.org/drawingml/2006/main">
             <a:defPPr>
-              <a:defRPr sz="1350" b="1">
-                <a:solidFill>
-                  <a:srgbClr val="C85C00"/>
+              <a:defRPr sz="2700" b="1">
+                <a:solidFill>
+                  <a:srgbClr val="14243A"/>
                 </a:solidFill>
               </a:defRPr>
             </a:defPPr>
@@ -24148,77 +23561,19 @@
           <a:p xmlns:a="http://schemas.openxmlformats.org/drawingml/2006/main">
             <a:pPr>
               <a:buNone/>
-              <a:defRPr sz="1350" b="1">
-                <a:solidFill>
-                  <a:srgbClr val="C85C00"/>
+              <a:defRPr sz="2700" b="1">
+                <a:solidFill>
+                  <a:srgbClr val="14243A"/>
                 </a:solidFill>
               </a:defRPr>
             </a:pPr>
             <a:r>
-              <a:rPr sz="1350" b="1">
-                <a:solidFill>
-                  <a:srgbClr val="C85C00"/>
-                </a:solidFill>
-              </a:rPr>
-              <a:t>前次評審意見修正情形</a:t>
-            </a:r>
-          </a:p>
-        </p:txBody>
-      </p:sp>
-      <p:sp>
-        <p:nvSpPr>
-          <p:cNvPr id="2" name="初評意見已轉成具體修正與待辦">
-            <a:extLst xmlns:a="http://schemas.openxmlformats.org/drawingml/2006/main">
-              <a:ext uri="{FF2B5EF4-FFF2-40B4-BE49-F238E27FC236}">
-                <a16:creationId xmlns:a16="http://schemas.microsoft.com/office/drawing/2014/main" id="{4FD84B34-62B7-42E5-BDA4-DEAC158EE649}"/>
-              </a:ext>
-            </a:extLst>
-          </p:cNvPr>
-          <p:cNvSpPr>
-            <a:spLocks xmlns:a="http://schemas.openxmlformats.org/drawingml/2006/main" noGrp="1"/>
-          </p:cNvSpPr>
-          <p:nvPr/>
-        </p:nvSpPr>
-        <p:spPr>
-          <a:xfrm xmlns:a="http://schemas.openxmlformats.org/drawingml/2006/main">
-            <a:off x="733425" y="933450"/>
-            <a:ext cx="10725150" cy="619125"/>
-          </a:xfrm>
-          <a:prstGeom xmlns:a="http://schemas.openxmlformats.org/drawingml/2006/main" prst="rect">
-            <a:avLst/>
-          </a:prstGeom>
-          <a:noFill xmlns:a="http://schemas.openxmlformats.org/drawingml/2006/main"/>
-          <a:ln xmlns:a="http://schemas.openxmlformats.org/drawingml/2006/main" w="0">
-            <a:noFill/>
-          </a:ln>
-        </p:spPr>
-        <p:txBody>
-          <a:bodyPr xmlns:a="http://schemas.openxmlformats.org/drawingml/2006/main" lIns="0" tIns="0" rIns="0" bIns="0"/>
-          <a:lstStyle xmlns:a="http://schemas.openxmlformats.org/drawingml/2006/main">
-            <a:defPPr>
-              <a:defRPr sz="2700" b="1">
+              <a:rPr sz="2700" b="1">
                 <a:solidFill>
                   <a:srgbClr val="14243A"/>
                 </a:solidFill>
-              </a:defRPr>
-            </a:defPPr>
-          </a:lstStyle>
-          <a:p xmlns:a="http://schemas.openxmlformats.org/drawingml/2006/main">
-            <a:pPr>
-              <a:buNone/>
-              <a:defRPr sz="2700" b="1">
-                <a:solidFill>
-                  <a:srgbClr val="14243A"/>
-                </a:solidFill>
-              </a:defRPr>
-            </a:pPr>
-            <a:r>
-              <a:rPr sz="2700" b="1">
-                <a:solidFill>
-                  <a:srgbClr val="14243A"/>
-                </a:solidFill>
-              </a:rPr>
-              <a:t>初評意見已轉成具體修正與待辦</a:t>
+              </a:rPr>
+              <a:t>前次評審意見修正情形：初評意見已轉成具體修正與待辦</a:t>
             </a:r>
           </a:p>
         </p:txBody>
@@ -24838,6 +24193,10 @@
             </a:solidFill>
           </a:ln>
         </p:spPr>
+        <p:txBody xmlns:a="http://schemas.openxmlformats.org/drawingml/2006/main">
+          <a:bodyPr/>
+          <a:p/>
+        </p:txBody>
       </p:sp>
       <p:sp>
         <p:nvSpPr>
@@ -25044,52 +24403,6 @@
       </p:grpSpPr>
       <p:sp>
         <p:nvSpPr>
-          <p:cNvPr id="2" name="Text 0">
-            <a:extLst xmlns:a="http://schemas.openxmlformats.org/drawingml/2006/main">
-              <a:ext uri="{FF2B5EF4-FFF2-40B4-BE49-F238E27FC236}">
-                <a16:creationId xmlns:a16="http://schemas.microsoft.com/office/drawing/2014/main" id="{8378EB1E-5866-46B2-B727-E02E66C706AA}"/>
-              </a:ext>
-            </a:extLst>
-          </p:cNvPr>
-          <p:cNvSpPr>
-            <a:spLocks xmlns:a="http://schemas.openxmlformats.org/drawingml/2006/main" noGrp="1"/>
-          </p:cNvSpPr>
-          <p:nvPr/>
-        </p:nvSpPr>
-        <p:spPr>
-          <a:xfrm xmlns:a="http://schemas.openxmlformats.org/drawingml/2006/main">
-            <a:off x="731520" y="457200"/>
-            <a:ext cx="7315200" cy="274320"/>
-          </a:xfrm>
-          <a:prstGeom xmlns:a="http://schemas.openxmlformats.org/drawingml/2006/main" prst="rect">
-            <a:avLst/>
-          </a:prstGeom>
-          <a:noFill xmlns:a="http://schemas.openxmlformats.org/drawingml/2006/main"/>
-        </p:spPr>
-        <p:txBody>
-          <a:bodyPr xmlns:a="http://schemas.openxmlformats.org/drawingml/2006/main" wrap="square" lIns="0" tIns="0" rIns="0" bIns="0" anchor="t"/>
-          <a:lstStyle xmlns:a="http://schemas.openxmlformats.org/drawingml/2006/main"/>
-          <a:p xmlns:a="http://schemas.openxmlformats.org/drawingml/2006/main">
-            <a:pPr marL="0" indent="0">
-              <a:buNone/>
-            </a:pPr>
-            <a:r>
-              <a:rPr sz="1300" b="1" spc="200">
-                <a:solidFill>
-                  <a:srgbClr val="D46A12"/>
-                </a:solidFill>
-                <a:latin typeface="Microsoft JhengHei"/>
-                <a:ea typeface="Microsoft JhengHei"/>
-                <a:cs typeface="Microsoft JhengHei"/>
-              </a:rPr>
-              <a:t>評審A · 使用對象</a:t>
-            </a:r>
-            <a:endParaRPr sz="1300"/>
-          </a:p>
-        </p:txBody>
-      </p:sp>
-      <p:sp>
-        <p:nvSpPr>
           <p:cNvPr id="4" name="Text 2">
             <a:extLst xmlns:a="http://schemas.openxmlformats.org/drawingml/2006/main">
               <a:ext uri="{FF2B5EF4-FFF2-40B4-BE49-F238E27FC236}">
@@ -25168,6 +24481,10 @@
             <a:prstDash val="solid"/>
           </a:ln>
         </p:spPr>
+        <p:txBody xmlns:a="http://schemas.openxmlformats.org/drawingml/2006/main">
+          <a:bodyPr/>
+          <a:p/>
+        </p:txBody>
       </p:sp>
       <p:sp>
         <p:nvSpPr>
@@ -25201,6 +24518,10 @@
             <a:prstDash val="solid"/>
           </a:ln>
         </p:spPr>
+        <p:txBody xmlns:a="http://schemas.openxmlformats.org/drawingml/2006/main">
+          <a:bodyPr/>
+          <a:p/>
+        </p:txBody>
       </p:sp>
       <p:pic>
         <p:nvPicPr>
@@ -25404,6 +24725,10 @@
             <a:prstDash val="solid"/>
           </a:ln>
         </p:spPr>
+        <p:txBody xmlns:a="http://schemas.openxmlformats.org/drawingml/2006/main">
+          <a:bodyPr/>
+          <a:p/>
+        </p:txBody>
       </p:sp>
       <p:sp>
         <p:nvSpPr>
@@ -25485,6 +24810,10 @@
             <a:prstDash val="solid"/>
           </a:ln>
         </p:spPr>
+        <p:txBody xmlns:a="http://schemas.openxmlformats.org/drawingml/2006/main">
+          <a:bodyPr/>
+          <a:p/>
+        </p:txBody>
       </p:sp>
       <p:sp>
         <p:nvSpPr>
@@ -25566,6 +24895,10 @@
             <a:prstDash val="solid"/>
           </a:ln>
         </p:spPr>
+        <p:txBody xmlns:a="http://schemas.openxmlformats.org/drawingml/2006/main">
+          <a:bodyPr/>
+          <a:p/>
+        </p:txBody>
       </p:sp>
       <p:sp>
         <p:nvSpPr>
@@ -25739,6 +25072,10 @@
             <a:prstDash val="solid"/>
           </a:ln>
         </p:spPr>
+        <p:txBody xmlns:a="http://schemas.openxmlformats.org/drawingml/2006/main">
+          <a:bodyPr/>
+          <a:p/>
+        </p:txBody>
       </p:sp>
       <p:sp>
         <p:nvSpPr>
@@ -25850,6 +25187,10 @@
             <a:prstDash val="solid"/>
           </a:ln>
         </p:spPr>
+        <p:txBody xmlns:a="http://schemas.openxmlformats.org/drawingml/2006/main">
+          <a:bodyPr/>
+          <a:p/>
+        </p:txBody>
       </p:sp>
       <p:sp>
         <p:nvSpPr>
@@ -25931,6 +25272,10 @@
             <a:prstDash val="solid"/>
           </a:ln>
         </p:spPr>
+        <p:txBody xmlns:a="http://schemas.openxmlformats.org/drawingml/2006/main">
+          <a:bodyPr/>
+          <a:p/>
+        </p:txBody>
       </p:sp>
       <p:sp>
         <p:nvSpPr>
@@ -26042,6 +25387,10 @@
             <a:prstDash val="solid"/>
           </a:ln>
         </p:spPr>
+        <p:txBody xmlns:a="http://schemas.openxmlformats.org/drawingml/2006/main">
+          <a:bodyPr/>
+          <a:p/>
+        </p:txBody>
       </p:sp>
       <p:sp>
         <p:nvSpPr>
@@ -26123,6 +25472,10 @@
             <a:prstDash val="solid"/>
           </a:ln>
         </p:spPr>
+        <p:txBody xmlns:a="http://schemas.openxmlformats.org/drawingml/2006/main">
+          <a:bodyPr/>
+          <a:p/>
+        </p:txBody>
       </p:sp>
       <p:sp>
         <p:nvSpPr>
@@ -26234,6 +25587,10 @@
             <a:prstDash val="solid"/>
           </a:ln>
         </p:spPr>
+        <p:txBody xmlns:a="http://schemas.openxmlformats.org/drawingml/2006/main">
+          <a:bodyPr/>
+          <a:p/>
+        </p:txBody>
       </p:sp>
       <p:sp>
         <p:nvSpPr>
@@ -26315,6 +25672,10 @@
             <a:prstDash val="solid"/>
           </a:ln>
         </p:spPr>
+        <p:txBody xmlns:a="http://schemas.openxmlformats.org/drawingml/2006/main">
+          <a:bodyPr/>
+          <a:p/>
+        </p:txBody>
       </p:sp>
       <p:sp>
         <p:nvSpPr>
@@ -26426,6 +25787,10 @@
             <a:prstDash val="solid"/>
           </a:ln>
         </p:spPr>
+        <p:txBody xmlns:a="http://schemas.openxmlformats.org/drawingml/2006/main">
+          <a:bodyPr/>
+          <a:p/>
+        </p:txBody>
       </p:sp>
       <p:sp>
         <p:nvSpPr>
@@ -26507,6 +25872,10 @@
             <a:prstDash val="solid"/>
           </a:ln>
         </p:spPr>
+        <p:txBody xmlns:a="http://schemas.openxmlformats.org/drawingml/2006/main">
+          <a:bodyPr/>
+          <a:p/>
+        </p:txBody>
       </p:sp>
       <p:sp>
         <p:nvSpPr>
@@ -26701,52 +26070,6 @@
       </p:grpSpPr>
       <p:sp>
         <p:nvSpPr>
-          <p:cNvPr id="2" name="Text 0">
-            <a:extLst xmlns:a="http://schemas.openxmlformats.org/drawingml/2006/main">
-              <a:ext uri="{FF2B5EF4-FFF2-40B4-BE49-F238E27FC236}">
-                <a16:creationId xmlns:a16="http://schemas.microsoft.com/office/drawing/2014/main" id="{CE48E66F-7B16-4B77-A90F-18E4CCBD9A61}"/>
-              </a:ext>
-            </a:extLst>
-          </p:cNvPr>
-          <p:cNvSpPr>
-            <a:spLocks xmlns:a="http://schemas.openxmlformats.org/drawingml/2006/main" noGrp="1"/>
-          </p:cNvSpPr>
-          <p:nvPr/>
-        </p:nvSpPr>
-        <p:spPr>
-          <a:xfrm xmlns:a="http://schemas.openxmlformats.org/drawingml/2006/main">
-            <a:off x="731520" y="457200"/>
-            <a:ext cx="7315200" cy="274320"/>
-          </a:xfrm>
-          <a:prstGeom xmlns:a="http://schemas.openxmlformats.org/drawingml/2006/main" prst="rect">
-            <a:avLst/>
-          </a:prstGeom>
-          <a:noFill xmlns:a="http://schemas.openxmlformats.org/drawingml/2006/main"/>
-        </p:spPr>
-        <p:txBody>
-          <a:bodyPr xmlns:a="http://schemas.openxmlformats.org/drawingml/2006/main" wrap="square" lIns="0" tIns="0" rIns="0" bIns="0" anchor="t"/>
-          <a:lstStyle xmlns:a="http://schemas.openxmlformats.org/drawingml/2006/main"/>
-          <a:p xmlns:a="http://schemas.openxmlformats.org/drawingml/2006/main">
-            <a:pPr marL="0" indent="0">
-              <a:buNone/>
-            </a:pPr>
-            <a:r>
-              <a:rPr sz="1300" b="1" spc="200">
-                <a:solidFill>
-                  <a:srgbClr val="D46A12"/>
-                </a:solidFill>
-                <a:latin typeface="Microsoft JhengHei"/>
-                <a:ea typeface="Microsoft JhengHei"/>
-                <a:cs typeface="Microsoft JhengHei"/>
-              </a:rPr>
-              <a:t>評審C · 商業模式九大區塊</a:t>
-            </a:r>
-            <a:endParaRPr sz="1300"/>
-          </a:p>
-        </p:txBody>
-      </p:sp>
-      <p:sp>
-        <p:nvSpPr>
           <p:cNvPr id="4" name="Text 2">
             <a:extLst xmlns:a="http://schemas.openxmlformats.org/drawingml/2006/main">
               <a:ext uri="{FF2B5EF4-FFF2-40B4-BE49-F238E27FC236}">
@@ -26825,6 +26148,10 @@
             <a:prstDash val="solid"/>
           </a:ln>
         </p:spPr>
+        <p:txBody xmlns:a="http://schemas.openxmlformats.org/drawingml/2006/main">
+          <a:bodyPr/>
+          <a:p/>
+        </p:txBody>
       </p:sp>
       <p:sp>
         <p:nvSpPr>
@@ -26969,6 +26296,10 @@
             <a:prstDash val="solid"/>
           </a:ln>
         </p:spPr>
+        <p:txBody xmlns:a="http://schemas.openxmlformats.org/drawingml/2006/main">
+          <a:bodyPr/>
+          <a:p/>
+        </p:txBody>
       </p:sp>
       <p:sp>
         <p:nvSpPr>
@@ -27113,6 +26444,10 @@
             <a:prstDash val="solid"/>
           </a:ln>
         </p:spPr>
+        <p:txBody xmlns:a="http://schemas.openxmlformats.org/drawingml/2006/main">
+          <a:bodyPr/>
+          <a:p/>
+        </p:txBody>
       </p:sp>
       <p:sp>
         <p:nvSpPr>
@@ -27257,6 +26592,10 @@
             <a:prstDash val="solid"/>
           </a:ln>
         </p:spPr>
+        <p:txBody xmlns:a="http://schemas.openxmlformats.org/drawingml/2006/main">
+          <a:bodyPr/>
+          <a:p/>
+        </p:txBody>
       </p:sp>
       <p:sp>
         <p:nvSpPr>
@@ -27401,6 +26740,10 @@
             <a:prstDash val="solid"/>
           </a:ln>
         </p:spPr>
+        <p:txBody xmlns:a="http://schemas.openxmlformats.org/drawingml/2006/main">
+          <a:bodyPr/>
+          <a:p/>
+        </p:txBody>
       </p:sp>
       <p:sp>
         <p:nvSpPr>
@@ -27545,6 +26888,10 @@
             <a:prstDash val="solid"/>
           </a:ln>
         </p:spPr>
+        <p:txBody xmlns:a="http://schemas.openxmlformats.org/drawingml/2006/main">
+          <a:bodyPr/>
+          <a:p/>
+        </p:txBody>
       </p:sp>
       <p:sp>
         <p:nvSpPr>
@@ -27689,6 +27036,10 @@
             <a:prstDash val="solid"/>
           </a:ln>
         </p:spPr>
+        <p:txBody xmlns:a="http://schemas.openxmlformats.org/drawingml/2006/main">
+          <a:bodyPr/>
+          <a:p/>
+        </p:txBody>
       </p:sp>
       <p:sp>
         <p:nvSpPr>
@@ -27833,6 +27184,10 @@
             <a:prstDash val="solid"/>
           </a:ln>
         </p:spPr>
+        <p:txBody xmlns:a="http://schemas.openxmlformats.org/drawingml/2006/main">
+          <a:bodyPr/>
+          <a:p/>
+        </p:txBody>
       </p:sp>
       <p:sp>
         <p:nvSpPr>
@@ -27976,6 +27331,10 @@
             <a:prstDash val="solid"/>
           </a:ln>
         </p:spPr>
+        <p:txBody xmlns:a="http://schemas.openxmlformats.org/drawingml/2006/main">
+          <a:bodyPr/>
+          <a:p/>
+        </p:txBody>
       </p:sp>
       <p:sp>
         <p:nvSpPr>
@@ -28120,6 +27479,10 @@
             <a:prstDash val="solid"/>
           </a:ln>
         </p:spPr>
+        <p:txBody xmlns:a="http://schemas.openxmlformats.org/drawingml/2006/main">
+          <a:bodyPr/>
+          <a:p/>
+        </p:txBody>
       </p:sp>
       <p:sp>
         <p:nvSpPr>
@@ -28314,52 +27677,6 @@
       </p:grpSpPr>
       <p:sp>
         <p:nvSpPr>
-          <p:cNvPr id="2" name="Text 0">
-            <a:extLst xmlns:a="http://schemas.openxmlformats.org/drawingml/2006/main">
-              <a:ext uri="{FF2B5EF4-FFF2-40B4-BE49-F238E27FC236}">
-                <a16:creationId xmlns:a16="http://schemas.microsoft.com/office/drawing/2014/main" id="{D5251437-2CBB-4C6D-8413-BC466264DD57}"/>
-              </a:ext>
-            </a:extLst>
-          </p:cNvPr>
-          <p:cNvSpPr>
-            <a:spLocks xmlns:a="http://schemas.openxmlformats.org/drawingml/2006/main" noGrp="1"/>
-          </p:cNvSpPr>
-          <p:nvPr/>
-        </p:nvSpPr>
-        <p:spPr>
-          <a:xfrm xmlns:a="http://schemas.openxmlformats.org/drawingml/2006/main">
-            <a:off x="731520" y="457200"/>
-            <a:ext cx="7315200" cy="274320"/>
-          </a:xfrm>
-          <a:prstGeom xmlns:a="http://schemas.openxmlformats.org/drawingml/2006/main" prst="rect">
-            <a:avLst/>
-          </a:prstGeom>
-          <a:noFill xmlns:a="http://schemas.openxmlformats.org/drawingml/2006/main"/>
-        </p:spPr>
-        <p:txBody>
-          <a:bodyPr xmlns:a="http://schemas.openxmlformats.org/drawingml/2006/main" wrap="square" lIns="0" tIns="0" rIns="0" bIns="0" anchor="t"/>
-          <a:lstStyle xmlns:a="http://schemas.openxmlformats.org/drawingml/2006/main"/>
-          <a:p xmlns:a="http://schemas.openxmlformats.org/drawingml/2006/main">
-            <a:pPr marL="0" indent="0">
-              <a:buNone/>
-            </a:pPr>
-            <a:r>
-              <a:rPr sz="1300" b="1" spc="200">
-                <a:solidFill>
-                  <a:srgbClr val="D46A12"/>
-                </a:solidFill>
-                <a:latin typeface="Microsoft JhengHei"/>
-                <a:ea typeface="Microsoft JhengHei"/>
-                <a:cs typeface="Microsoft JhengHei"/>
-              </a:rPr>
-              <a:t>評審C · 量化</a:t>
-            </a:r>
-            <a:endParaRPr sz="1300"/>
-          </a:p>
-        </p:txBody>
-      </p:sp>
-      <p:sp>
-        <p:nvSpPr>
           <p:cNvPr id="4" name="Text 2">
             <a:extLst xmlns:a="http://schemas.openxmlformats.org/drawingml/2006/main">
               <a:ext uri="{FF2B5EF4-FFF2-40B4-BE49-F238E27FC236}">
@@ -28438,6 +27755,10 @@
             <a:prstDash val="solid"/>
           </a:ln>
         </p:spPr>
+        <p:txBody xmlns:a="http://schemas.openxmlformats.org/drawingml/2006/main">
+          <a:bodyPr/>
+          <a:p/>
+        </p:txBody>
       </p:sp>
       <p:sp>
         <p:nvSpPr>
@@ -28611,6 +27932,10 @@
             <a:prstDash val="solid"/>
           </a:ln>
         </p:spPr>
+        <p:txBody xmlns:a="http://schemas.openxmlformats.org/drawingml/2006/main">
+          <a:bodyPr/>
+          <a:p/>
+        </p:txBody>
       </p:sp>
       <p:sp>
         <p:nvSpPr>
@@ -28784,6 +28109,10 @@
             <a:prstDash val="solid"/>
           </a:ln>
         </p:spPr>
+        <p:txBody xmlns:a="http://schemas.openxmlformats.org/drawingml/2006/main">
+          <a:bodyPr/>
+          <a:p/>
+        </p:txBody>
       </p:sp>
       <p:sp>
         <p:nvSpPr>
@@ -28957,6 +28286,10 @@
             <a:prstDash val="solid"/>
           </a:ln>
         </p:spPr>
+        <p:txBody xmlns:a="http://schemas.openxmlformats.org/drawingml/2006/main">
+          <a:bodyPr/>
+          <a:p/>
+        </p:txBody>
       </p:sp>
       <p:sp>
         <p:nvSpPr>
@@ -28998,7 +28331,7 @@
                 <a:ea typeface="Microsoft JhengHei"/>
                 <a:cs typeface="Microsoft JhengHei"/>
               </a:rPr>
-              <a:t>營運支出平衡</a:t>
+              <a:t>損益平衡點</a:t>
             </a:r>
             <a:endParaRPr sz="1600"/>
           </a:p>
@@ -29044,7 +28377,7 @@
                 <a:ea typeface="Microsoft JhengHei"/>
                 <a:cs typeface="Microsoft JhengHei"/>
               </a:rPr>
-              <a:t>4 帳號</a:t>
+              <a:t>4 個</a:t>
             </a:r>
             <a:endParaRPr sz="5200"/>
           </a:p>
@@ -29082,7 +28415,7 @@
               <a:buNone/>
             </a:pPr>
             <a:r>
-              <a:rPr sz="1200">
+              <a:rPr sz="1400" b="1">
                 <a:solidFill>
                   <a:srgbClr val="3F546C"/>
                 </a:solidFill>
@@ -29090,7 +28423,7 @@
                 <a:ea typeface="Microsoft JhengHei"/>
                 <a:cs typeface="Microsoft JhengHei"/>
               </a:rPr>
-              <a:t>⌈1,450 ÷ (490 − 27)⌉</a:t>
+              <a:t>專業版付費帳號／月</a:t>
             </a:r>
             <a:endParaRPr sz="1200"/>
           </a:p>
@@ -29128,7 +28461,7 @@
               <a:buNone/>
             </a:pPr>
             <a:r>
-              <a:rPr sz="1200">
+              <a:rPr sz="1400">
                 <a:solidFill>
                   <a:srgbClr val="3F546C"/>
                 </a:solidFill>
@@ -29136,7 +28469,7 @@
                 <a:ea typeface="Microsoft JhengHei"/>
                 <a:cs typeface="Microsoft JhengHei"/>
               </a:rPr>
-              <a:t>4 帳號每月餘額 402 元</a:t>
+              <a:t>收入 1,960 ＞ 支出 1,558</a:t>
             </a:r>
             <a:endParaRPr sz="1200"/>
           </a:p>
@@ -29182,7 +28515,7 @@
                 <a:ea typeface="Microsoft JhengHei"/>
                 <a:cs typeface="Microsoft JhengHei"/>
               </a:rPr>
-              <a:t>月費 490 元為團隊假設</a:t>
+              <a:t>每月 1,450 固定支出＋每帳號 27</a:t>
             </a:r>
             <a:endParaRPr sz="1200"/>
           </a:p>
@@ -29222,6 +28555,10 @@
             <a:prstDash val="solid"/>
           </a:ln>
         </p:spPr>
+        <p:txBody xmlns:a="http://schemas.openxmlformats.org/drawingml/2006/main">
+          <a:bodyPr/>
+          <a:p/>
+        </p:txBody>
       </p:sp>
       <p:sp>
         <p:nvSpPr>
@@ -29257,6 +28594,10 @@
             <a:prstDash val="solid"/>
           </a:ln>
         </p:spPr>
+        <p:txBody xmlns:a="http://schemas.openxmlformats.org/drawingml/2006/main">
+          <a:bodyPr/>
+          <a:p/>
+        </p:txBody>
       </p:sp>
       <p:sp>
         <p:nvSpPr>
@@ -29473,52 +28814,6 @@
       </p:grpSpPr>
       <p:sp>
         <p:nvSpPr>
-          <p:cNvPr id="2" name="Text 0">
-            <a:extLst xmlns:a="http://schemas.openxmlformats.org/drawingml/2006/main">
-              <a:ext uri="{FF2B5EF4-FFF2-40B4-BE49-F238E27FC236}">
-                <a16:creationId xmlns:a16="http://schemas.microsoft.com/office/drawing/2014/main" id="{9DD8379D-9BFF-494D-AFB5-B484A88F09BF}"/>
-              </a:ext>
-            </a:extLst>
-          </p:cNvPr>
-          <p:cNvSpPr>
-            <a:spLocks xmlns:a="http://schemas.openxmlformats.org/drawingml/2006/main" noGrp="1"/>
-          </p:cNvSpPr>
-          <p:nvPr/>
-        </p:nvSpPr>
-        <p:spPr>
-          <a:xfrm xmlns:a="http://schemas.openxmlformats.org/drawingml/2006/main">
-            <a:off x="731520" y="457200"/>
-            <a:ext cx="7315200" cy="274320"/>
-          </a:xfrm>
-          <a:prstGeom xmlns:a="http://schemas.openxmlformats.org/drawingml/2006/main" prst="rect">
-            <a:avLst/>
-          </a:prstGeom>
-          <a:noFill xmlns:a="http://schemas.openxmlformats.org/drawingml/2006/main"/>
-        </p:spPr>
-        <p:txBody>
-          <a:bodyPr xmlns:a="http://schemas.openxmlformats.org/drawingml/2006/main" wrap="square" lIns="0" tIns="0" rIns="0" bIns="0" anchor="t"/>
-          <a:lstStyle xmlns:a="http://schemas.openxmlformats.org/drawingml/2006/main"/>
-          <a:p xmlns:a="http://schemas.openxmlformats.org/drawingml/2006/main">
-            <a:pPr marL="0" indent="0">
-              <a:buNone/>
-            </a:pPr>
-            <a:r>
-              <a:rPr sz="1300" b="1" spc="200">
-                <a:solidFill>
-                  <a:srgbClr val="D46A12"/>
-                </a:solidFill>
-                <a:latin typeface="Microsoft JhengHei"/>
-                <a:ea typeface="Microsoft JhengHei"/>
-                <a:cs typeface="Microsoft JhengHei"/>
-              </a:rPr>
-              <a:t>評審C · SWOT → TOWS ／ Agentic AI</a:t>
-            </a:r>
-            <a:endParaRPr sz="1300"/>
-          </a:p>
-        </p:txBody>
-      </p:sp>
-      <p:sp>
-        <p:nvSpPr>
           <p:cNvPr id="4" name="Text 2">
             <a:extLst xmlns:a="http://schemas.openxmlformats.org/drawingml/2006/main">
               <a:ext uri="{FF2B5EF4-FFF2-40B4-BE49-F238E27FC236}">
@@ -29597,6 +28892,10 @@
             <a:prstDash val="solid"/>
           </a:ln>
         </p:spPr>
+        <p:txBody xmlns:a="http://schemas.openxmlformats.org/drawingml/2006/main">
+          <a:bodyPr/>
+          <a:p/>
+        </p:txBody>
       </p:sp>
       <p:sp>
         <p:nvSpPr>
@@ -29678,6 +28977,10 @@
             <a:prstDash val="solid"/>
           </a:ln>
         </p:spPr>
+        <p:txBody xmlns:a="http://schemas.openxmlformats.org/drawingml/2006/main">
+          <a:bodyPr/>
+          <a:p/>
+        </p:txBody>
       </p:sp>
       <p:sp>
         <p:nvSpPr>
@@ -29805,6 +29108,10 @@
             <a:prstDash val="solid"/>
           </a:ln>
         </p:spPr>
+        <p:txBody xmlns:a="http://schemas.openxmlformats.org/drawingml/2006/main">
+          <a:bodyPr/>
+          <a:p/>
+        </p:txBody>
       </p:sp>
       <p:sp>
         <p:nvSpPr>
@@ -29949,6 +29256,10 @@
             <a:prstDash val="solid"/>
           </a:ln>
         </p:spPr>
+        <p:txBody xmlns:a="http://schemas.openxmlformats.org/drawingml/2006/main">
+          <a:bodyPr/>
+          <a:p/>
+        </p:txBody>
       </p:sp>
       <p:sp>
         <p:nvSpPr>
@@ -30093,6 +29404,10 @@
             <a:prstDash val="solid"/>
           </a:ln>
         </p:spPr>
+        <p:txBody xmlns:a="http://schemas.openxmlformats.org/drawingml/2006/main">
+          <a:bodyPr/>
+          <a:p/>
+        </p:txBody>
       </p:sp>
       <p:sp>
         <p:nvSpPr>
@@ -30237,6 +29552,10 @@
             <a:prstDash val="solid"/>
           </a:ln>
         </p:spPr>
+        <p:txBody xmlns:a="http://schemas.openxmlformats.org/drawingml/2006/main">
+          <a:bodyPr/>
+          <a:p/>
+        </p:txBody>
       </p:sp>
       <p:sp>
         <p:nvSpPr>
@@ -30410,6 +29729,10 @@
             <a:prstDash val="solid"/>
           </a:ln>
         </p:spPr>
+        <p:txBody xmlns:a="http://schemas.openxmlformats.org/drawingml/2006/main">
+          <a:bodyPr/>
+          <a:p/>
+        </p:txBody>
       </p:sp>
       <p:sp>
         <p:nvSpPr>
@@ -30600,6 +29923,10 @@
             <a:prstDash val="solid"/>
           </a:ln>
         </p:spPr>
+        <p:txBody xmlns:a="http://schemas.openxmlformats.org/drawingml/2006/main">
+          <a:bodyPr/>
+          <a:p/>
+        </p:txBody>
       </p:sp>
       <p:sp>
         <p:nvSpPr>
@@ -30773,6 +30100,10 @@
             <a:prstDash val="solid"/>
           </a:ln>
         </p:spPr>
+        <p:txBody xmlns:a="http://schemas.openxmlformats.org/drawingml/2006/main">
+          <a:bodyPr/>
+          <a:p/>
+        </p:txBody>
       </p:sp>
       <p:sp>
         <p:nvSpPr>
@@ -30946,6 +30277,10 @@
             <a:prstDash val="solid"/>
           </a:ln>
         </p:spPr>
+        <p:txBody xmlns:a="http://schemas.openxmlformats.org/drawingml/2006/main">
+          <a:bodyPr/>
+          <a:p/>
+        </p:txBody>
       </p:sp>
       <p:sp>
         <p:nvSpPr>
@@ -31140,52 +30475,6 @@
       </p:grpSpPr>
       <p:sp>
         <p:nvSpPr>
-          <p:cNvPr id="2" name="Text 0">
-            <a:extLst xmlns:a="http://schemas.openxmlformats.org/drawingml/2006/main">
-              <a:ext uri="{FF2B5EF4-FFF2-40B4-BE49-F238E27FC236}">
-                <a16:creationId xmlns:a16="http://schemas.microsoft.com/office/drawing/2014/main" id="{6A382AC0-1725-4E97-8880-5B5576A9C65F}"/>
-              </a:ext>
-            </a:extLst>
-          </p:cNvPr>
-          <p:cNvSpPr>
-            <a:spLocks xmlns:a="http://schemas.openxmlformats.org/drawingml/2006/main" noGrp="1"/>
-          </p:cNvSpPr>
-          <p:nvPr/>
-        </p:nvSpPr>
-        <p:spPr>
-          <a:xfrm xmlns:a="http://schemas.openxmlformats.org/drawingml/2006/main">
-            <a:off x="731520" y="457200"/>
-            <a:ext cx="7315200" cy="274320"/>
-          </a:xfrm>
-          <a:prstGeom xmlns:a="http://schemas.openxmlformats.org/drawingml/2006/main" prst="rect">
-            <a:avLst/>
-          </a:prstGeom>
-          <a:noFill xmlns:a="http://schemas.openxmlformats.org/drawingml/2006/main"/>
-        </p:spPr>
-        <p:txBody>
-          <a:bodyPr xmlns:a="http://schemas.openxmlformats.org/drawingml/2006/main" wrap="square" lIns="0" tIns="0" rIns="0" bIns="0" anchor="t"/>
-          <a:lstStyle xmlns:a="http://schemas.openxmlformats.org/drawingml/2006/main"/>
-          <a:p xmlns:a="http://schemas.openxmlformats.org/drawingml/2006/main">
-            <a:pPr marL="0" indent="0">
-              <a:buNone/>
-            </a:pPr>
-            <a:r>
-              <a:rPr sz="1300" b="1" spc="200">
-                <a:solidFill>
-                  <a:srgbClr val="D46A12"/>
-                </a:solidFill>
-                <a:latin typeface="Microsoft JhengHei"/>
-                <a:ea typeface="Microsoft JhengHei"/>
-                <a:cs typeface="Microsoft JhengHei"/>
-              </a:rPr>
-              <a:t>HOW · 系統架構</a:t>
-            </a:r>
-            <a:endParaRPr sz="1300"/>
-          </a:p>
-        </p:txBody>
-      </p:sp>
-      <p:sp>
-        <p:nvSpPr>
           <p:cNvPr id="4" name="Text 2">
             <a:extLst xmlns:a="http://schemas.openxmlformats.org/drawingml/2006/main">
               <a:ext uri="{FF2B5EF4-FFF2-40B4-BE49-F238E27FC236}">
@@ -31264,6 +30553,10 @@
             <a:prstDash val="solid"/>
           </a:ln>
         </p:spPr>
+        <p:txBody xmlns:a="http://schemas.openxmlformats.org/drawingml/2006/main">
+          <a:bodyPr/>
+          <a:p/>
+        </p:txBody>
       </p:sp>
       <p:sp>
         <p:nvSpPr>
@@ -31297,6 +30590,10 @@
             <a:prstDash val="solid"/>
           </a:ln>
         </p:spPr>
+        <p:txBody xmlns:a="http://schemas.openxmlformats.org/drawingml/2006/main">
+          <a:bodyPr/>
+          <a:p/>
+        </p:txBody>
       </p:sp>
       <p:pic>
         <p:nvPicPr>
@@ -31501,6 +30798,10 @@
             <a:prstDash val="solid"/>
           </a:ln>
         </p:spPr>
+        <p:txBody xmlns:a="http://schemas.openxmlformats.org/drawingml/2006/main">
+          <a:bodyPr/>
+          <a:p/>
+        </p:txBody>
       </p:sp>
       <p:sp>
         <p:nvSpPr>
@@ -31534,6 +30835,10 @@
             <a:prstDash val="solid"/>
           </a:ln>
         </p:spPr>
+        <p:txBody xmlns:a="http://schemas.openxmlformats.org/drawingml/2006/main">
+          <a:bodyPr/>
+          <a:p/>
+        </p:txBody>
       </p:sp>
       <p:pic>
         <p:nvPicPr>
@@ -31738,6 +31043,10 @@
             <a:prstDash val="solid"/>
           </a:ln>
         </p:spPr>
+        <p:txBody xmlns:a="http://schemas.openxmlformats.org/drawingml/2006/main">
+          <a:bodyPr/>
+          <a:p/>
+        </p:txBody>
       </p:sp>
       <p:sp>
         <p:nvSpPr>
@@ -31771,6 +31080,10 @@
             <a:prstDash val="solid"/>
           </a:ln>
         </p:spPr>
+        <p:txBody xmlns:a="http://schemas.openxmlformats.org/drawingml/2006/main">
+          <a:bodyPr/>
+          <a:p/>
+        </p:txBody>
       </p:sp>
       <p:pic>
         <p:nvPicPr>
@@ -31945,6 +31258,10 @@
             <a:prstDash val="solid"/>
           </a:ln>
         </p:spPr>
+        <p:txBody xmlns:a="http://schemas.openxmlformats.org/drawingml/2006/main">
+          <a:bodyPr/>
+          <a:p/>
+        </p:txBody>
       </p:sp>
       <p:sp>
         <p:nvSpPr>
@@ -32026,6 +31343,10 @@
             <a:prstDash val="solid"/>
           </a:ln>
         </p:spPr>
+        <p:txBody xmlns:a="http://schemas.openxmlformats.org/drawingml/2006/main">
+          <a:bodyPr/>
+          <a:p/>
+        </p:txBody>
       </p:sp>
       <p:sp>
         <p:nvSpPr>
@@ -32107,6 +31428,10 @@
             <a:prstDash val="solid"/>
           </a:ln>
         </p:spPr>
+        <p:txBody xmlns:a="http://schemas.openxmlformats.org/drawingml/2006/main">
+          <a:bodyPr/>
+          <a:p/>
+        </p:txBody>
       </p:sp>
       <p:sp>
         <p:nvSpPr>
@@ -32188,6 +31513,10 @@
             <a:prstDash val="solid"/>
           </a:ln>
         </p:spPr>
+        <p:txBody xmlns:a="http://schemas.openxmlformats.org/drawingml/2006/main">
+          <a:bodyPr/>
+          <a:p/>
+        </p:txBody>
       </p:sp>
       <p:sp>
         <p:nvSpPr>
@@ -32269,6 +31598,10 @@
             <a:prstDash val="solid"/>
           </a:ln>
         </p:spPr>
+        <p:txBody xmlns:a="http://schemas.openxmlformats.org/drawingml/2006/main">
+          <a:bodyPr/>
+          <a:p/>
+        </p:txBody>
       </p:sp>
       <p:sp>
         <p:nvSpPr>

--- a/output/ppt-review-20261011/final/MeBOD_複審簡報_第二輪修訂版.pptx
+++ b/output/ppt-review-20261011/final/MeBOD_複審簡報_第二輪修訂版.pptx
@@ -3600,7 +3600,7 @@
                 <a:ea typeface="Microsoft JhengHei"/>
                 <a:cs typeface="Microsoft JhengHei"/>
               </a:rPr>
-              <a:t>複審 · 15 MIN · 第115405組</a:t>
+              <a:t>複審 · 第115405組</a:t>
             </a:r>
             <a:endParaRPr sz="1500"/>
           </a:p>
@@ -5223,64 +5223,6 @@
       </p:sp>
       <p:sp>
         <p:nvSpPr>
-          <p:cNvPr id="35" name="許家全 · 5:10–5:50">
-            <a:extLst xmlns:a="http://schemas.openxmlformats.org/drawingml/2006/main">
-              <a:ext uri="{FF2B5EF4-FFF2-40B4-BE49-F238E27FC236}">
-                <a16:creationId xmlns:a16="http://schemas.microsoft.com/office/drawing/2014/main" id="{1199BFDD-CEBC-4035-91D6-76DEC2CFE29F}"/>
-              </a:ext>
-            </a:extLst>
-          </p:cNvPr>
-          <p:cNvSpPr>
-            <a:spLocks xmlns:a="http://schemas.openxmlformats.org/drawingml/2006/main" noGrp="1"/>
-          </p:cNvSpPr>
-          <p:nvPr/>
-        </p:nvSpPr>
-        <p:spPr>
-          <a:xfrm xmlns:a="http://schemas.openxmlformats.org/drawingml/2006/main">
-            <a:off x="8667750" y="457200"/>
-            <a:ext cx="2790825" cy="266700"/>
-          </a:xfrm>
-          <a:prstGeom xmlns:a="http://schemas.openxmlformats.org/drawingml/2006/main" prst="rect">
-            <a:avLst/>
-          </a:prstGeom>
-          <a:noFill xmlns:a="http://schemas.openxmlformats.org/drawingml/2006/main"/>
-          <a:ln xmlns:a="http://schemas.openxmlformats.org/drawingml/2006/main" w="0">
-            <a:noFill/>
-          </a:ln>
-        </p:spPr>
-        <p:txBody>
-          <a:bodyPr xmlns:a="http://schemas.openxmlformats.org/drawingml/2006/main" lIns="0" tIns="0" rIns="0" bIns="0"/>
-          <a:lstStyle xmlns:a="http://schemas.openxmlformats.org/drawingml/2006/main">
-            <a:defPPr>
-              <a:defRPr sz="1275" b="0">
-                <a:solidFill>
-                  <a:srgbClr val="465E78"/>
-                </a:solidFill>
-              </a:defRPr>
-            </a:defPPr>
-          </a:lstStyle>
-          <a:p xmlns:a="http://schemas.openxmlformats.org/drawingml/2006/main">
-            <a:pPr>
-              <a:buNone/>
-              <a:defRPr sz="1275" b="0">
-                <a:solidFill>
-                  <a:srgbClr val="465E78"/>
-                </a:solidFill>
-              </a:defRPr>
-            </a:pPr>
-            <a:r>
-              <a:rPr sz="1275" b="0">
-                <a:solidFill>
-                  <a:srgbClr val="465E78"/>
-                </a:solidFill>
-              </a:rPr>
-              <a:t>許家全 · 5:10–5:50</a:t>
-            </a:r>
-          </a:p>
-        </p:txBody>
-      </p:sp>
-      <p:sp>
-        <p:nvSpPr>
           <p:cNvPr id="36" name="10">
             <a:extLst xmlns:a="http://schemas.openxmlformats.org/drawingml/2006/main">
               <a:ext uri="{FF2B5EF4-FFF2-40B4-BE49-F238E27FC236}">
@@ -6558,64 +6500,6 @@
       </p:sp>
       <p:sp>
         <p:nvSpPr>
-          <p:cNvPr id="23" name="許家全 · 5:50–6:35">
-            <a:extLst xmlns:a="http://schemas.openxmlformats.org/drawingml/2006/main">
-              <a:ext uri="{FF2B5EF4-FFF2-40B4-BE49-F238E27FC236}">
-                <a16:creationId xmlns:a16="http://schemas.microsoft.com/office/drawing/2014/main" id="{209D6858-4F66-42BB-AE07-5F5B74BFBB01}"/>
-              </a:ext>
-            </a:extLst>
-          </p:cNvPr>
-          <p:cNvSpPr>
-            <a:spLocks xmlns:a="http://schemas.openxmlformats.org/drawingml/2006/main" noGrp="1"/>
-          </p:cNvSpPr>
-          <p:nvPr/>
-        </p:nvSpPr>
-        <p:spPr>
-          <a:xfrm xmlns:a="http://schemas.openxmlformats.org/drawingml/2006/main">
-            <a:off x="8667750" y="457200"/>
-            <a:ext cx="2790825" cy="266700"/>
-          </a:xfrm>
-          <a:prstGeom xmlns:a="http://schemas.openxmlformats.org/drawingml/2006/main" prst="rect">
-            <a:avLst/>
-          </a:prstGeom>
-          <a:noFill xmlns:a="http://schemas.openxmlformats.org/drawingml/2006/main"/>
-          <a:ln xmlns:a="http://schemas.openxmlformats.org/drawingml/2006/main" w="0">
-            <a:noFill/>
-          </a:ln>
-        </p:spPr>
-        <p:txBody>
-          <a:bodyPr xmlns:a="http://schemas.openxmlformats.org/drawingml/2006/main" lIns="0" tIns="0" rIns="0" bIns="0"/>
-          <a:lstStyle xmlns:a="http://schemas.openxmlformats.org/drawingml/2006/main">
-            <a:defPPr>
-              <a:defRPr sz="1275" b="0">
-                <a:solidFill>
-                  <a:srgbClr val="465E78"/>
-                </a:solidFill>
-              </a:defRPr>
-            </a:defPPr>
-          </a:lstStyle>
-          <a:p xmlns:a="http://schemas.openxmlformats.org/drawingml/2006/main">
-            <a:pPr>
-              <a:buNone/>
-              <a:defRPr sz="1275" b="0">
-                <a:solidFill>
-                  <a:srgbClr val="465E78"/>
-                </a:solidFill>
-              </a:defRPr>
-            </a:pPr>
-            <a:r>
-              <a:rPr sz="1275" b="0">
-                <a:solidFill>
-                  <a:srgbClr val="465E78"/>
-                </a:solidFill>
-              </a:rPr>
-              <a:t>許家全 · 5:50–6:35</a:t>
-            </a:r>
-          </a:p>
-        </p:txBody>
-      </p:sp>
-      <p:sp>
-        <p:nvSpPr>
           <p:cNvPr id="24" name="11">
             <a:extLst xmlns:a="http://schemas.openxmlformats.org/drawingml/2006/main">
               <a:ext uri="{FF2B5EF4-FFF2-40B4-BE49-F238E27FC236}">
@@ -7496,64 +7380,6 @@
       </p:sp>
       <p:sp>
         <p:nvSpPr>
-          <p:cNvPr id="23" name="許家全 · 6:35–7:20">
-            <a:extLst xmlns:a="http://schemas.openxmlformats.org/drawingml/2006/main">
-              <a:ext uri="{FF2B5EF4-FFF2-40B4-BE49-F238E27FC236}">
-                <a16:creationId xmlns:a16="http://schemas.microsoft.com/office/drawing/2014/main" id="{FA88BA15-74D1-4710-8B9E-0D832E8BFF67}"/>
-              </a:ext>
-            </a:extLst>
-          </p:cNvPr>
-          <p:cNvSpPr>
-            <a:spLocks xmlns:a="http://schemas.openxmlformats.org/drawingml/2006/main" noGrp="1"/>
-          </p:cNvSpPr>
-          <p:nvPr/>
-        </p:nvSpPr>
-        <p:spPr>
-          <a:xfrm xmlns:a="http://schemas.openxmlformats.org/drawingml/2006/main">
-            <a:off x="8667750" y="457200"/>
-            <a:ext cx="2790825" cy="266700"/>
-          </a:xfrm>
-          <a:prstGeom xmlns:a="http://schemas.openxmlformats.org/drawingml/2006/main" prst="rect">
-            <a:avLst/>
-          </a:prstGeom>
-          <a:noFill xmlns:a="http://schemas.openxmlformats.org/drawingml/2006/main"/>
-          <a:ln xmlns:a="http://schemas.openxmlformats.org/drawingml/2006/main" w="0">
-            <a:noFill/>
-          </a:ln>
-        </p:spPr>
-        <p:txBody>
-          <a:bodyPr xmlns:a="http://schemas.openxmlformats.org/drawingml/2006/main" lIns="0" tIns="0" rIns="0" bIns="0"/>
-          <a:lstStyle xmlns:a="http://schemas.openxmlformats.org/drawingml/2006/main">
-            <a:defPPr>
-              <a:defRPr sz="1275" b="0">
-                <a:solidFill>
-                  <a:srgbClr val="465E78"/>
-                </a:solidFill>
-              </a:defRPr>
-            </a:defPPr>
-          </a:lstStyle>
-          <a:p xmlns:a="http://schemas.openxmlformats.org/drawingml/2006/main">
-            <a:pPr>
-              <a:buNone/>
-              <a:defRPr sz="1275" b="0">
-                <a:solidFill>
-                  <a:srgbClr val="465E78"/>
-                </a:solidFill>
-              </a:defRPr>
-            </a:pPr>
-            <a:r>
-              <a:rPr sz="1275" b="0">
-                <a:solidFill>
-                  <a:srgbClr val="465E78"/>
-                </a:solidFill>
-              </a:rPr>
-              <a:t>許家全 · 6:35–7:20</a:t>
-            </a:r>
-          </a:p>
-        </p:txBody>
-      </p:sp>
-      <p:sp>
-        <p:nvSpPr>
           <p:cNvPr id="24" name="12">
             <a:extLst xmlns:a="http://schemas.openxmlformats.org/drawingml/2006/main">
               <a:ext uri="{FF2B5EF4-FFF2-40B4-BE49-F238E27FC236}">
@@ -8590,64 +8416,6 @@
               <a:t>依「已實作／待驗證／規劃」分列；未定義驗收分母，不宣稱完成百分比。</a:t>
             </a:r>
             <a:endParaRPr sz="1400"/>
-          </a:p>
-        </p:txBody>
-      </p:sp>
-      <p:sp>
-        <p:nvSpPr>
-          <p:cNvPr id="23" name="許家全 · 7:20–8:00">
-            <a:extLst xmlns:a="http://schemas.openxmlformats.org/drawingml/2006/main">
-              <a:ext uri="{FF2B5EF4-FFF2-40B4-BE49-F238E27FC236}">
-                <a16:creationId xmlns:a16="http://schemas.microsoft.com/office/drawing/2014/main" id="{3CFAA62A-AF22-4B52-AE23-A600D1B91FE2}"/>
-              </a:ext>
-            </a:extLst>
-          </p:cNvPr>
-          <p:cNvSpPr>
-            <a:spLocks xmlns:a="http://schemas.openxmlformats.org/drawingml/2006/main" noGrp="1"/>
-          </p:cNvSpPr>
-          <p:nvPr/>
-        </p:nvSpPr>
-        <p:spPr>
-          <a:xfrm xmlns:a="http://schemas.openxmlformats.org/drawingml/2006/main">
-            <a:off x="8667750" y="457200"/>
-            <a:ext cx="2790825" cy="266700"/>
-          </a:xfrm>
-          <a:prstGeom xmlns:a="http://schemas.openxmlformats.org/drawingml/2006/main" prst="rect">
-            <a:avLst/>
-          </a:prstGeom>
-          <a:noFill xmlns:a="http://schemas.openxmlformats.org/drawingml/2006/main"/>
-          <a:ln xmlns:a="http://schemas.openxmlformats.org/drawingml/2006/main" w="0">
-            <a:noFill/>
-          </a:ln>
-        </p:spPr>
-        <p:txBody>
-          <a:bodyPr xmlns:a="http://schemas.openxmlformats.org/drawingml/2006/main" lIns="0" tIns="0" rIns="0" bIns="0"/>
-          <a:lstStyle xmlns:a="http://schemas.openxmlformats.org/drawingml/2006/main">
-            <a:defPPr>
-              <a:defRPr sz="1275" b="0">
-                <a:solidFill>
-                  <a:srgbClr val="465E78"/>
-                </a:solidFill>
-              </a:defRPr>
-            </a:defPPr>
-          </a:lstStyle>
-          <a:p xmlns:a="http://schemas.openxmlformats.org/drawingml/2006/main">
-            <a:pPr>
-              <a:buNone/>
-              <a:defRPr sz="1275" b="0">
-                <a:solidFill>
-                  <a:srgbClr val="465E78"/>
-                </a:solidFill>
-              </a:defRPr>
-            </a:pPr>
-            <a:r>
-              <a:rPr sz="1275" b="0">
-                <a:solidFill>
-                  <a:srgbClr val="465E78"/>
-                </a:solidFill>
-              </a:rPr>
-              <a:t>許家全 · 7:20–8:00</a:t>
-            </a:r>
           </a:p>
         </p:txBody>
       </p:sp>
@@ -9690,64 +9458,6 @@
       </p:sp>
       <p:sp>
         <p:nvSpPr>
-          <p:cNvPr id="6" name="許家全 · 8:00–8:35">
-            <a:extLst xmlns:a="http://schemas.openxmlformats.org/drawingml/2006/main">
-              <a:ext uri="{FF2B5EF4-FFF2-40B4-BE49-F238E27FC236}">
-                <a16:creationId xmlns:a16="http://schemas.microsoft.com/office/drawing/2014/main" id="{256D84E3-1A04-45AE-B6C2-61D7838A920C}"/>
-              </a:ext>
-            </a:extLst>
-          </p:cNvPr>
-          <p:cNvSpPr>
-            <a:spLocks xmlns:a="http://schemas.openxmlformats.org/drawingml/2006/main" noGrp="1"/>
-          </p:cNvSpPr>
-          <p:nvPr/>
-        </p:nvSpPr>
-        <p:spPr>
-          <a:xfrm xmlns:a="http://schemas.openxmlformats.org/drawingml/2006/main">
-            <a:off x="8667750" y="457200"/>
-            <a:ext cx="2790825" cy="266700"/>
-          </a:xfrm>
-          <a:prstGeom xmlns:a="http://schemas.openxmlformats.org/drawingml/2006/main" prst="rect">
-            <a:avLst/>
-          </a:prstGeom>
-          <a:noFill xmlns:a="http://schemas.openxmlformats.org/drawingml/2006/main"/>
-          <a:ln xmlns:a="http://schemas.openxmlformats.org/drawingml/2006/main" w="0">
-            <a:noFill/>
-          </a:ln>
-        </p:spPr>
-        <p:txBody>
-          <a:bodyPr xmlns:a="http://schemas.openxmlformats.org/drawingml/2006/main" lIns="0" tIns="0" rIns="0" bIns="0"/>
-          <a:lstStyle xmlns:a="http://schemas.openxmlformats.org/drawingml/2006/main">
-            <a:defPPr>
-              <a:defRPr sz="1275" b="0">
-                <a:solidFill>
-                  <a:srgbClr val="465E78"/>
-                </a:solidFill>
-              </a:defRPr>
-            </a:defPPr>
-          </a:lstStyle>
-          <a:p xmlns:a="http://schemas.openxmlformats.org/drawingml/2006/main">
-            <a:pPr>
-              <a:buNone/>
-              <a:defRPr sz="1275" b="0">
-                <a:solidFill>
-                  <a:srgbClr val="465E78"/>
-                </a:solidFill>
-              </a:defRPr>
-            </a:pPr>
-            <a:r>
-              <a:rPr sz="1275" b="0">
-                <a:solidFill>
-                  <a:srgbClr val="465E78"/>
-                </a:solidFill>
-              </a:rPr>
-              <a:t>許家全 · 8:00–8:35</a:t>
-            </a:r>
-          </a:p>
-        </p:txBody>
-      </p:sp>
-      <p:sp>
-        <p:nvSpPr>
           <p:cNvPr id="7" name="14">
             <a:extLst xmlns:a="http://schemas.openxmlformats.org/drawingml/2006/main">
               <a:ext uri="{FF2B5EF4-FFF2-40B4-BE49-F238E27FC236}">
@@ -10395,64 +10105,6 @@
                 </a:solidFill>
               </a:rPr>
               <a:t>示範重點：相同查詢條件、可回查的來源、可留存的結果。</a:t>
-            </a:r>
-          </a:p>
-        </p:txBody>
-      </p:sp>
-      <p:sp>
-        <p:nvSpPr>
-          <p:cNvPr id="12" name="許家全 · 8:35–10:55">
-            <a:extLst xmlns:a="http://schemas.openxmlformats.org/drawingml/2006/main">
-              <a:ext uri="{FF2B5EF4-FFF2-40B4-BE49-F238E27FC236}">
-                <a16:creationId xmlns:a16="http://schemas.microsoft.com/office/drawing/2014/main" id="{3FAED758-A0C2-4EBA-A42C-BB1D0193EE4E}"/>
-              </a:ext>
-            </a:extLst>
-          </p:cNvPr>
-          <p:cNvSpPr>
-            <a:spLocks xmlns:a="http://schemas.openxmlformats.org/drawingml/2006/main" noGrp="1"/>
-          </p:cNvSpPr>
-          <p:nvPr/>
-        </p:nvSpPr>
-        <p:spPr>
-          <a:xfrm xmlns:a="http://schemas.openxmlformats.org/drawingml/2006/main">
-            <a:off x="8667750" y="457200"/>
-            <a:ext cx="2790825" cy="266700"/>
-          </a:xfrm>
-          <a:prstGeom xmlns:a="http://schemas.openxmlformats.org/drawingml/2006/main" prst="rect">
-            <a:avLst/>
-          </a:prstGeom>
-          <a:noFill xmlns:a="http://schemas.openxmlformats.org/drawingml/2006/main"/>
-          <a:ln xmlns:a="http://schemas.openxmlformats.org/drawingml/2006/main" w="0">
-            <a:noFill/>
-          </a:ln>
-        </p:spPr>
-        <p:txBody>
-          <a:bodyPr xmlns:a="http://schemas.openxmlformats.org/drawingml/2006/main" lIns="0" tIns="0" rIns="0" bIns="0"/>
-          <a:lstStyle xmlns:a="http://schemas.openxmlformats.org/drawingml/2006/main">
-            <a:defPPr>
-              <a:defRPr sz="1275" b="0">
-                <a:solidFill>
-                  <a:srgbClr val="465E78"/>
-                </a:solidFill>
-              </a:defRPr>
-            </a:defPPr>
-          </a:lstStyle>
-          <a:p xmlns:a="http://schemas.openxmlformats.org/drawingml/2006/main">
-            <a:pPr>
-              <a:buNone/>
-              <a:defRPr sz="1275" b="0">
-                <a:solidFill>
-                  <a:srgbClr val="465E78"/>
-                </a:solidFill>
-              </a:defRPr>
-            </a:pPr>
-            <a:r>
-              <a:rPr sz="1275" b="0">
-                <a:solidFill>
-                  <a:srgbClr val="465E78"/>
-                </a:solidFill>
-              </a:rPr>
-              <a:t>許家全 · 8:35–10:55</a:t>
             </a:r>
           </a:p>
         </p:txBody>
@@ -11340,64 +10992,6 @@
       </p:sp>
       <p:sp>
         <p:nvSpPr>
-          <p:cNvPr id="7" name="許家全 · 10:55–11:30">
-            <a:extLst xmlns:a="http://schemas.openxmlformats.org/drawingml/2006/main">
-              <a:ext uri="{FF2B5EF4-FFF2-40B4-BE49-F238E27FC236}">
-                <a16:creationId xmlns:a16="http://schemas.microsoft.com/office/drawing/2014/main" id="{ADC34263-8249-4F0D-8E5E-90DCF42FB234}"/>
-              </a:ext>
-            </a:extLst>
-          </p:cNvPr>
-          <p:cNvSpPr>
-            <a:spLocks xmlns:a="http://schemas.openxmlformats.org/drawingml/2006/main" noGrp="1"/>
-          </p:cNvSpPr>
-          <p:nvPr/>
-        </p:nvSpPr>
-        <p:spPr>
-          <a:xfrm xmlns:a="http://schemas.openxmlformats.org/drawingml/2006/main">
-            <a:off x="8667750" y="457200"/>
-            <a:ext cx="2790825" cy="266700"/>
-          </a:xfrm>
-          <a:prstGeom xmlns:a="http://schemas.openxmlformats.org/drawingml/2006/main" prst="rect">
-            <a:avLst/>
-          </a:prstGeom>
-          <a:noFill xmlns:a="http://schemas.openxmlformats.org/drawingml/2006/main"/>
-          <a:ln xmlns:a="http://schemas.openxmlformats.org/drawingml/2006/main" w="0">
-            <a:noFill/>
-          </a:ln>
-        </p:spPr>
-        <p:txBody>
-          <a:bodyPr xmlns:a="http://schemas.openxmlformats.org/drawingml/2006/main" lIns="0" tIns="0" rIns="0" bIns="0"/>
-          <a:lstStyle xmlns:a="http://schemas.openxmlformats.org/drawingml/2006/main">
-            <a:defPPr>
-              <a:defRPr sz="1275" b="0">
-                <a:solidFill>
-                  <a:srgbClr val="465E78"/>
-                </a:solidFill>
-              </a:defRPr>
-            </a:defPPr>
-          </a:lstStyle>
-          <a:p xmlns:a="http://schemas.openxmlformats.org/drawingml/2006/main">
-            <a:pPr>
-              <a:buNone/>
-              <a:defRPr sz="1275" b="0">
-                <a:solidFill>
-                  <a:srgbClr val="465E78"/>
-                </a:solidFill>
-              </a:defRPr>
-            </a:pPr>
-            <a:r>
-              <a:rPr sz="1275" b="0">
-                <a:solidFill>
-                  <a:srgbClr val="465E78"/>
-                </a:solidFill>
-              </a:rPr>
-              <a:t>許家全 · 10:55–11:30</a:t>
-            </a:r>
-          </a:p>
-        </p:txBody>
-      </p:sp>
-      <p:sp>
-        <p:nvSpPr>
           <p:cNvPr id="8" name="16">
             <a:extLst xmlns:a="http://schemas.openxmlformats.org/drawingml/2006/main">
               <a:ext uri="{FF2B5EF4-FFF2-40B4-BE49-F238E27FC236}">
@@ -13636,64 +13230,6 @@
               <a:t>GitHub：7–10 月 146 次提交（截至 10/12，皆已推送）；非逐人貢獻比例。</a:t>
             </a:r>
             <a:endParaRPr sz="1400"/>
-          </a:p>
-        </p:txBody>
-      </p:sp>
-      <p:sp>
-        <p:nvSpPr>
-          <p:cNvPr id="54" name="陳威帆 · 11:30–12:15">
-            <a:extLst xmlns:a="http://schemas.openxmlformats.org/drawingml/2006/main">
-              <a:ext uri="{FF2B5EF4-FFF2-40B4-BE49-F238E27FC236}">
-                <a16:creationId xmlns:a16="http://schemas.microsoft.com/office/drawing/2014/main" id="{CB8A64D2-E498-4020-B1A2-49E6B8E7474F}"/>
-              </a:ext>
-            </a:extLst>
-          </p:cNvPr>
-          <p:cNvSpPr>
-            <a:spLocks xmlns:a="http://schemas.openxmlformats.org/drawingml/2006/main" noGrp="1"/>
-          </p:cNvSpPr>
-          <p:nvPr/>
-        </p:nvSpPr>
-        <p:spPr>
-          <a:xfrm xmlns:a="http://schemas.openxmlformats.org/drawingml/2006/main">
-            <a:off x="8667750" y="457200"/>
-            <a:ext cx="2790825" cy="266700"/>
-          </a:xfrm>
-          <a:prstGeom xmlns:a="http://schemas.openxmlformats.org/drawingml/2006/main" prst="rect">
-            <a:avLst/>
-          </a:prstGeom>
-          <a:noFill xmlns:a="http://schemas.openxmlformats.org/drawingml/2006/main"/>
-          <a:ln xmlns:a="http://schemas.openxmlformats.org/drawingml/2006/main" w="0">
-            <a:noFill/>
-          </a:ln>
-        </p:spPr>
-        <p:txBody>
-          <a:bodyPr xmlns:a="http://schemas.openxmlformats.org/drawingml/2006/main" lIns="0" tIns="0" rIns="0" bIns="0"/>
-          <a:lstStyle xmlns:a="http://schemas.openxmlformats.org/drawingml/2006/main">
-            <a:defPPr>
-              <a:defRPr sz="1275" b="0">
-                <a:solidFill>
-                  <a:srgbClr val="465E78"/>
-                </a:solidFill>
-              </a:defRPr>
-            </a:defPPr>
-          </a:lstStyle>
-          <a:p xmlns:a="http://schemas.openxmlformats.org/drawingml/2006/main">
-            <a:pPr>
-              <a:buNone/>
-              <a:defRPr sz="1275" b="0">
-                <a:solidFill>
-                  <a:srgbClr val="465E78"/>
-                </a:solidFill>
-              </a:defRPr>
-            </a:pPr>
-            <a:r>
-              <a:rPr sz="1275" b="0">
-                <a:solidFill>
-                  <a:srgbClr val="465E78"/>
-                </a:solidFill>
-              </a:rPr>
-              <a:t>陳威帆 · 11:30–12:15</a:t>
-            </a:r>
           </a:p>
         </p:txBody>
       </p:sp>
@@ -14553,64 +14089,6 @@
       </p:sp>
       <p:sp>
         <p:nvSpPr>
-          <p:cNvPr id="20" name="陳威帆 · 12:15–12:45">
-            <a:extLst xmlns:a="http://schemas.openxmlformats.org/drawingml/2006/main">
-              <a:ext uri="{FF2B5EF4-FFF2-40B4-BE49-F238E27FC236}">
-                <a16:creationId xmlns:a16="http://schemas.microsoft.com/office/drawing/2014/main" id="{D2AEDEB7-F2B9-4051-8EE1-9EAEFFA5EF28}"/>
-              </a:ext>
-            </a:extLst>
-          </p:cNvPr>
-          <p:cNvSpPr>
-            <a:spLocks xmlns:a="http://schemas.openxmlformats.org/drawingml/2006/main" noGrp="1"/>
-          </p:cNvSpPr>
-          <p:nvPr/>
-        </p:nvSpPr>
-        <p:spPr>
-          <a:xfrm xmlns:a="http://schemas.openxmlformats.org/drawingml/2006/main">
-            <a:off x="8667750" y="457200"/>
-            <a:ext cx="2790825" cy="266700"/>
-          </a:xfrm>
-          <a:prstGeom xmlns:a="http://schemas.openxmlformats.org/drawingml/2006/main" prst="rect">
-            <a:avLst/>
-          </a:prstGeom>
-          <a:noFill xmlns:a="http://schemas.openxmlformats.org/drawingml/2006/main"/>
-          <a:ln xmlns:a="http://schemas.openxmlformats.org/drawingml/2006/main" w="0">
-            <a:noFill/>
-          </a:ln>
-        </p:spPr>
-        <p:txBody>
-          <a:bodyPr xmlns:a="http://schemas.openxmlformats.org/drawingml/2006/main" lIns="0" tIns="0" rIns="0" bIns="0"/>
-          <a:lstStyle xmlns:a="http://schemas.openxmlformats.org/drawingml/2006/main">
-            <a:defPPr>
-              <a:defRPr sz="1275" b="0">
-                <a:solidFill>
-                  <a:srgbClr val="465E78"/>
-                </a:solidFill>
-              </a:defRPr>
-            </a:defPPr>
-          </a:lstStyle>
-          <a:p xmlns:a="http://schemas.openxmlformats.org/drawingml/2006/main">
-            <a:pPr>
-              <a:buNone/>
-              <a:defRPr sz="1275" b="0">
-                <a:solidFill>
-                  <a:srgbClr val="465E78"/>
-                </a:solidFill>
-              </a:defRPr>
-            </a:pPr>
-            <a:r>
-              <a:rPr sz="1275" b="0">
-                <a:solidFill>
-                  <a:srgbClr val="465E78"/>
-                </a:solidFill>
-              </a:rPr>
-              <a:t>陳威帆 · 12:15–12:45</a:t>
-            </a:r>
-          </a:p>
-        </p:txBody>
-      </p:sp>
-      <p:sp>
-        <p:nvSpPr>
           <p:cNvPr id="21" name="18">
             <a:extLst xmlns:a="http://schemas.openxmlformats.org/drawingml/2006/main">
               <a:ext uri="{FF2B5EF4-FFF2-40B4-BE49-F238E27FC236}">
@@ -15672,64 +15150,6 @@
       </p:sp>
       <p:sp>
         <p:nvSpPr>
-          <p:cNvPr id="23" name="陳威帆 · 12:45–14:30">
-            <a:extLst xmlns:a="http://schemas.openxmlformats.org/drawingml/2006/main">
-              <a:ext uri="{FF2B5EF4-FFF2-40B4-BE49-F238E27FC236}">
-                <a16:creationId xmlns:a16="http://schemas.microsoft.com/office/drawing/2014/main" id="{E7AAF622-5A08-4036-802C-FF55E4684AD2}"/>
-              </a:ext>
-            </a:extLst>
-          </p:cNvPr>
-          <p:cNvSpPr>
-            <a:spLocks xmlns:a="http://schemas.openxmlformats.org/drawingml/2006/main" noGrp="1"/>
-          </p:cNvSpPr>
-          <p:nvPr/>
-        </p:nvSpPr>
-        <p:spPr>
-          <a:xfrm xmlns:a="http://schemas.openxmlformats.org/drawingml/2006/main">
-            <a:off x="8667750" y="457200"/>
-            <a:ext cx="2790825" cy="266700"/>
-          </a:xfrm>
-          <a:prstGeom xmlns:a="http://schemas.openxmlformats.org/drawingml/2006/main" prst="rect">
-            <a:avLst/>
-          </a:prstGeom>
-          <a:noFill xmlns:a="http://schemas.openxmlformats.org/drawingml/2006/main"/>
-          <a:ln xmlns:a="http://schemas.openxmlformats.org/drawingml/2006/main" w="0">
-            <a:noFill/>
-          </a:ln>
-        </p:spPr>
-        <p:txBody>
-          <a:bodyPr xmlns:a="http://schemas.openxmlformats.org/drawingml/2006/main" lIns="0" tIns="0" rIns="0" bIns="0"/>
-          <a:lstStyle xmlns:a="http://schemas.openxmlformats.org/drawingml/2006/main">
-            <a:defPPr>
-              <a:defRPr sz="1275" b="0">
-                <a:solidFill>
-                  <a:srgbClr val="465E78"/>
-                </a:solidFill>
-              </a:defRPr>
-            </a:defPPr>
-          </a:lstStyle>
-          <a:p xmlns:a="http://schemas.openxmlformats.org/drawingml/2006/main">
-            <a:pPr>
-              <a:buNone/>
-              <a:defRPr sz="1275" b="0">
-                <a:solidFill>
-                  <a:srgbClr val="465E78"/>
-                </a:solidFill>
-              </a:defRPr>
-            </a:pPr>
-            <a:r>
-              <a:rPr sz="1275" b="0">
-                <a:solidFill>
-                  <a:srgbClr val="465E78"/>
-                </a:solidFill>
-              </a:rPr>
-              <a:t>陳威帆 · 12:45–14:30</a:t>
-            </a:r>
-          </a:p>
-        </p:txBody>
-      </p:sp>
-      <p:sp>
-        <p:nvSpPr>
           <p:cNvPr id="24" name="19">
             <a:extLst xmlns:a="http://schemas.openxmlformats.org/drawingml/2006/main">
               <a:ext uri="{FF2B5EF4-FFF2-40B4-BE49-F238E27FC236}">
@@ -15855,7 +15275,7 @@
                 <a:ea typeface="Microsoft JhengHei"/>
                 <a:cs typeface="Microsoft JhengHei"/>
               </a:rPr>
-              <a:t>14 分 30 秒主講，保留 30 秒緩衝</a:t>
+              <a:t>報告流程</a:t>
             </a:r>
             <a:endParaRPr sz="3000"/>
           </a:p>
@@ -16142,52 +15562,6 @@
       </p:sp>
       <p:sp>
         <p:nvSpPr>
-          <p:cNvPr id="12" name="Text 10">
-            <a:extLst xmlns:a="http://schemas.openxmlformats.org/drawingml/2006/main">
-              <a:ext uri="{FF2B5EF4-FFF2-40B4-BE49-F238E27FC236}">
-                <a16:creationId xmlns:a16="http://schemas.microsoft.com/office/drawing/2014/main" id="{A4337ECD-DA45-4041-86CE-5B52C9456FBC}"/>
-              </a:ext>
-            </a:extLst>
-          </p:cNvPr>
-          <p:cNvSpPr>
-            <a:spLocks xmlns:a="http://schemas.openxmlformats.org/drawingml/2006/main" noGrp="1"/>
-          </p:cNvSpPr>
-          <p:nvPr/>
-        </p:nvSpPr>
-        <p:spPr>
-          <a:xfrm xmlns:a="http://schemas.openxmlformats.org/drawingml/2006/main">
-            <a:off x="731520" y="4937760"/>
-            <a:ext cx="2523744" cy="274320"/>
-          </a:xfrm>
-          <a:prstGeom xmlns:a="http://schemas.openxmlformats.org/drawingml/2006/main" prst="rect">
-            <a:avLst/>
-          </a:prstGeom>
-          <a:noFill xmlns:a="http://schemas.openxmlformats.org/drawingml/2006/main"/>
-        </p:spPr>
-        <p:txBody>
-          <a:bodyPr xmlns:a="http://schemas.openxmlformats.org/drawingml/2006/main" wrap="square" lIns="0" tIns="0" rIns="0" bIns="0" anchor="ctr"/>
-          <a:lstStyle xmlns:a="http://schemas.openxmlformats.org/drawingml/2006/main"/>
-          <a:p xmlns:a="http://schemas.openxmlformats.org/drawingml/2006/main">
-            <a:pPr marL="0" indent="0" algn="ctr">
-              <a:buNone/>
-            </a:pPr>
-            <a:r>
-              <a:rPr sz="1200">
-                <a:solidFill>
-                  <a:srgbClr val="7A8CA3"/>
-                </a:solidFill>
-                <a:latin typeface="Microsoft JhengHei"/>
-                <a:ea typeface="Microsoft JhengHei"/>
-                <a:cs typeface="Microsoft JhengHei"/>
-              </a:rPr>
-              <a:t>0:35–4:25</a:t>
-            </a:r>
-            <a:endParaRPr sz="1200"/>
-          </a:p>
-        </p:txBody>
-      </p:sp>
-      <p:sp>
-        <p:nvSpPr>
           <p:cNvPr id="13" name="Shape 11">
             <a:extLst xmlns:a="http://schemas.openxmlformats.org/drawingml/2006/main">
               <a:ext uri="{FF2B5EF4-FFF2-40B4-BE49-F238E27FC236}">
@@ -16467,52 +15841,6 @@
       </p:sp>
       <p:sp>
         <p:nvSpPr>
-          <p:cNvPr id="19" name="Text 17">
-            <a:extLst xmlns:a="http://schemas.openxmlformats.org/drawingml/2006/main">
-              <a:ext uri="{FF2B5EF4-FFF2-40B4-BE49-F238E27FC236}">
-                <a16:creationId xmlns:a16="http://schemas.microsoft.com/office/drawing/2014/main" id="{A5CB081B-9640-426B-B589-1CA1FDE16795}"/>
-              </a:ext>
-            </a:extLst>
-          </p:cNvPr>
-          <p:cNvSpPr>
-            <a:spLocks xmlns:a="http://schemas.openxmlformats.org/drawingml/2006/main" noGrp="1"/>
-          </p:cNvSpPr>
-          <p:nvPr/>
-        </p:nvSpPr>
-        <p:spPr>
-          <a:xfrm xmlns:a="http://schemas.openxmlformats.org/drawingml/2006/main">
-            <a:off x="3465576" y="4937760"/>
-            <a:ext cx="2523744" cy="274320"/>
-          </a:xfrm>
-          <a:prstGeom xmlns:a="http://schemas.openxmlformats.org/drawingml/2006/main" prst="rect">
-            <a:avLst/>
-          </a:prstGeom>
-          <a:noFill xmlns:a="http://schemas.openxmlformats.org/drawingml/2006/main"/>
-        </p:spPr>
-        <p:txBody>
-          <a:bodyPr xmlns:a="http://schemas.openxmlformats.org/drawingml/2006/main" wrap="square" lIns="0" tIns="0" rIns="0" bIns="0" anchor="ctr"/>
-          <a:lstStyle xmlns:a="http://schemas.openxmlformats.org/drawingml/2006/main"/>
-          <a:p xmlns:a="http://schemas.openxmlformats.org/drawingml/2006/main">
-            <a:pPr marL="0" indent="0" algn="ctr">
-              <a:buNone/>
-            </a:pPr>
-            <a:r>
-              <a:rPr sz="1200">
-                <a:solidFill>
-                  <a:srgbClr val="7A8CA3"/>
-                </a:solidFill>
-                <a:latin typeface="Microsoft JhengHei"/>
-                <a:ea typeface="Microsoft JhengHei"/>
-                <a:cs typeface="Microsoft JhengHei"/>
-              </a:rPr>
-              <a:t>4:25–7:20</a:t>
-            </a:r>
-            <a:endParaRPr sz="1200"/>
-          </a:p>
-        </p:txBody>
-      </p:sp>
-      <p:sp>
-        <p:nvSpPr>
           <p:cNvPr id="20" name="Shape 18">
             <a:extLst xmlns:a="http://schemas.openxmlformats.org/drawingml/2006/main">
               <a:ext uri="{FF2B5EF4-FFF2-40B4-BE49-F238E27FC236}">
@@ -16792,52 +16120,6 @@
       </p:sp>
       <p:sp>
         <p:nvSpPr>
-          <p:cNvPr id="26" name="Text 24">
-            <a:extLst xmlns:a="http://schemas.openxmlformats.org/drawingml/2006/main">
-              <a:ext uri="{FF2B5EF4-FFF2-40B4-BE49-F238E27FC236}">
-                <a16:creationId xmlns:a16="http://schemas.microsoft.com/office/drawing/2014/main" id="{31707E0E-4583-4848-9066-6812488A681D}"/>
-              </a:ext>
-            </a:extLst>
-          </p:cNvPr>
-          <p:cNvSpPr>
-            <a:spLocks xmlns:a="http://schemas.openxmlformats.org/drawingml/2006/main" noGrp="1"/>
-          </p:cNvSpPr>
-          <p:nvPr/>
-        </p:nvSpPr>
-        <p:spPr>
-          <a:xfrm xmlns:a="http://schemas.openxmlformats.org/drawingml/2006/main">
-            <a:off x="6199632" y="4937760"/>
-            <a:ext cx="2523744" cy="274320"/>
-          </a:xfrm>
-          <a:prstGeom xmlns:a="http://schemas.openxmlformats.org/drawingml/2006/main" prst="rect">
-            <a:avLst/>
-          </a:prstGeom>
-          <a:noFill xmlns:a="http://schemas.openxmlformats.org/drawingml/2006/main"/>
-        </p:spPr>
-        <p:txBody>
-          <a:bodyPr xmlns:a="http://schemas.openxmlformats.org/drawingml/2006/main" wrap="square" lIns="0" tIns="0" rIns="0" bIns="0" anchor="ctr"/>
-          <a:lstStyle xmlns:a="http://schemas.openxmlformats.org/drawingml/2006/main"/>
-          <a:p xmlns:a="http://schemas.openxmlformats.org/drawingml/2006/main">
-            <a:pPr marL="0" indent="0" algn="ctr">
-              <a:buNone/>
-            </a:pPr>
-            <a:r>
-              <a:rPr sz="1200">
-                <a:solidFill>
-                  <a:srgbClr val="7A8CA3"/>
-                </a:solidFill>
-                <a:latin typeface="Microsoft JhengHei"/>
-                <a:ea typeface="Microsoft JhengHei"/>
-                <a:cs typeface="Microsoft JhengHei"/>
-              </a:rPr>
-              <a:t>7:20–11:30</a:t>
-            </a:r>
-            <a:endParaRPr sz="1200"/>
-          </a:p>
-        </p:txBody>
-      </p:sp>
-      <p:sp>
-        <p:nvSpPr>
           <p:cNvPr id="27" name="Shape 25">
             <a:extLst xmlns:a="http://schemas.openxmlformats.org/drawingml/2006/main">
               <a:ext uri="{FF2B5EF4-FFF2-40B4-BE49-F238E27FC236}">
@@ -17117,52 +16399,6 @@
       </p:sp>
       <p:sp>
         <p:nvSpPr>
-          <p:cNvPr id="33" name="Text 31">
-            <a:extLst xmlns:a="http://schemas.openxmlformats.org/drawingml/2006/main">
-              <a:ext uri="{FF2B5EF4-FFF2-40B4-BE49-F238E27FC236}">
-                <a16:creationId xmlns:a16="http://schemas.microsoft.com/office/drawing/2014/main" id="{FFCA79A7-477B-467C-A67D-655C618F8EFF}"/>
-              </a:ext>
-            </a:extLst>
-          </p:cNvPr>
-          <p:cNvSpPr>
-            <a:spLocks xmlns:a="http://schemas.openxmlformats.org/drawingml/2006/main" noGrp="1"/>
-          </p:cNvSpPr>
-          <p:nvPr/>
-        </p:nvSpPr>
-        <p:spPr>
-          <a:xfrm xmlns:a="http://schemas.openxmlformats.org/drawingml/2006/main">
-            <a:off x="8933688" y="4937760"/>
-            <a:ext cx="2523744" cy="274320"/>
-          </a:xfrm>
-          <a:prstGeom xmlns:a="http://schemas.openxmlformats.org/drawingml/2006/main" prst="rect">
-            <a:avLst/>
-          </a:prstGeom>
-          <a:noFill xmlns:a="http://schemas.openxmlformats.org/drawingml/2006/main"/>
-        </p:spPr>
-        <p:txBody>
-          <a:bodyPr xmlns:a="http://schemas.openxmlformats.org/drawingml/2006/main" wrap="square" lIns="0" tIns="0" rIns="0" bIns="0" anchor="ctr"/>
-          <a:lstStyle xmlns:a="http://schemas.openxmlformats.org/drawingml/2006/main"/>
-          <a:p xmlns:a="http://schemas.openxmlformats.org/drawingml/2006/main">
-            <a:pPr marL="0" indent="0" algn="ctr">
-              <a:buNone/>
-            </a:pPr>
-            <a:r>
-              <a:rPr sz="1200">
-                <a:solidFill>
-                  <a:srgbClr val="7A8CA3"/>
-                </a:solidFill>
-                <a:latin typeface="Microsoft JhengHei"/>
-                <a:ea typeface="Microsoft JhengHei"/>
-                <a:cs typeface="Microsoft JhengHei"/>
-              </a:rPr>
-              <a:t>11:30–14:30</a:t>
-            </a:r>
-            <a:endParaRPr sz="1200"/>
-          </a:p>
-        </p:txBody>
-      </p:sp>
-      <p:sp>
-        <p:nvSpPr>
           <p:cNvPr id="34" name="Shape 32">
             <a:extLst xmlns:a="http://schemas.openxmlformats.org/drawingml/2006/main">
               <a:ext uri="{FF2B5EF4-FFF2-40B4-BE49-F238E27FC236}">
@@ -17243,64 +16479,6 @@
               <a:t>16 項初評意見與回應頁碼，逐條對照於附錄 A、B</a:t>
             </a:r>
             <a:endParaRPr sz="1400"/>
-          </a:p>
-        </p:txBody>
-      </p:sp>
-      <p:sp>
-        <p:nvSpPr>
-          <p:cNvPr id="36" name="陳威帆 · 0:20–0:35">
-            <a:extLst xmlns:a="http://schemas.openxmlformats.org/drawingml/2006/main">
-              <a:ext uri="{FF2B5EF4-FFF2-40B4-BE49-F238E27FC236}">
-                <a16:creationId xmlns:a16="http://schemas.microsoft.com/office/drawing/2014/main" id="{A7B5A32B-B239-4E44-AC24-585C9C8A01EA}"/>
-              </a:ext>
-            </a:extLst>
-          </p:cNvPr>
-          <p:cNvSpPr>
-            <a:spLocks xmlns:a="http://schemas.openxmlformats.org/drawingml/2006/main" noGrp="1"/>
-          </p:cNvSpPr>
-          <p:nvPr/>
-        </p:nvSpPr>
-        <p:spPr>
-          <a:xfrm xmlns:a="http://schemas.openxmlformats.org/drawingml/2006/main">
-            <a:off x="8667750" y="457200"/>
-            <a:ext cx="2790825" cy="266700"/>
-          </a:xfrm>
-          <a:prstGeom xmlns:a="http://schemas.openxmlformats.org/drawingml/2006/main" prst="rect">
-            <a:avLst/>
-          </a:prstGeom>
-          <a:noFill xmlns:a="http://schemas.openxmlformats.org/drawingml/2006/main"/>
-          <a:ln xmlns:a="http://schemas.openxmlformats.org/drawingml/2006/main" w="0">
-            <a:noFill/>
-          </a:ln>
-        </p:spPr>
-        <p:txBody>
-          <a:bodyPr xmlns:a="http://schemas.openxmlformats.org/drawingml/2006/main" lIns="0" tIns="0" rIns="0" bIns="0"/>
-          <a:lstStyle xmlns:a="http://schemas.openxmlformats.org/drawingml/2006/main">
-            <a:defPPr>
-              <a:defRPr sz="1275" b="0">
-                <a:solidFill>
-                  <a:srgbClr val="465E78"/>
-                </a:solidFill>
-              </a:defRPr>
-            </a:defPPr>
-          </a:lstStyle>
-          <a:p xmlns:a="http://schemas.openxmlformats.org/drawingml/2006/main">
-            <a:pPr>
-              <a:buNone/>
-              <a:defRPr sz="1275" b="0">
-                <a:solidFill>
-                  <a:srgbClr val="465E78"/>
-                </a:solidFill>
-              </a:defRPr>
-            </a:pPr>
-            <a:r>
-              <a:rPr sz="1275" b="0">
-                <a:solidFill>
-                  <a:srgbClr val="465E78"/>
-                </a:solidFill>
-              </a:rPr>
-              <a:t>陳威帆 · 0:20–0:35</a:t>
-            </a:r>
           </a:p>
         </p:txBody>
       </p:sp>
@@ -23377,64 +22555,6 @@
       </p:sp>
       <p:sp>
         <p:nvSpPr>
-          <p:cNvPr id="34" name="陳威帆 · 0:35–1:15">
-            <a:extLst xmlns:a="http://schemas.openxmlformats.org/drawingml/2006/main">
-              <a:ext uri="{FF2B5EF4-FFF2-40B4-BE49-F238E27FC236}">
-                <a16:creationId xmlns:a16="http://schemas.microsoft.com/office/drawing/2014/main" id="{34BD9E31-64E3-4CAB-A968-734B96A5BD63}"/>
-              </a:ext>
-            </a:extLst>
-          </p:cNvPr>
-          <p:cNvSpPr>
-            <a:spLocks xmlns:a="http://schemas.openxmlformats.org/drawingml/2006/main" noGrp="1"/>
-          </p:cNvSpPr>
-          <p:nvPr/>
-        </p:nvSpPr>
-        <p:spPr>
-          <a:xfrm xmlns:a="http://schemas.openxmlformats.org/drawingml/2006/main">
-            <a:off x="8667750" y="457200"/>
-            <a:ext cx="2790825" cy="266700"/>
-          </a:xfrm>
-          <a:prstGeom xmlns:a="http://schemas.openxmlformats.org/drawingml/2006/main" prst="rect">
-            <a:avLst/>
-          </a:prstGeom>
-          <a:noFill xmlns:a="http://schemas.openxmlformats.org/drawingml/2006/main"/>
-          <a:ln xmlns:a="http://schemas.openxmlformats.org/drawingml/2006/main" w="0">
-            <a:noFill/>
-          </a:ln>
-        </p:spPr>
-        <p:txBody>
-          <a:bodyPr xmlns:a="http://schemas.openxmlformats.org/drawingml/2006/main" lIns="0" tIns="0" rIns="0" bIns="0"/>
-          <a:lstStyle xmlns:a="http://schemas.openxmlformats.org/drawingml/2006/main">
-            <a:defPPr>
-              <a:defRPr sz="1275" b="0">
-                <a:solidFill>
-                  <a:srgbClr val="465E78"/>
-                </a:solidFill>
-              </a:defRPr>
-            </a:defPPr>
-          </a:lstStyle>
-          <a:p xmlns:a="http://schemas.openxmlformats.org/drawingml/2006/main">
-            <a:pPr>
-              <a:buNone/>
-              <a:defRPr sz="1275" b="0">
-                <a:solidFill>
-                  <a:srgbClr val="465E78"/>
-                </a:solidFill>
-              </a:defRPr>
-            </a:pPr>
-            <a:r>
-              <a:rPr sz="1275" b="0">
-                <a:solidFill>
-                  <a:srgbClr val="465E78"/>
-                </a:solidFill>
-              </a:rPr>
-              <a:t>陳威帆 · 0:35–1:15</a:t>
-            </a:r>
-          </a:p>
-        </p:txBody>
-      </p:sp>
-      <p:sp>
-        <p:nvSpPr>
           <p:cNvPr id="35" name="03">
             <a:extLst xmlns:a="http://schemas.openxmlformats.org/drawingml/2006/main">
               <a:ext uri="{FF2B5EF4-FFF2-40B4-BE49-F238E27FC236}">
@@ -24258,64 +23378,6 @@
       </p:sp>
       <p:sp>
         <p:nvSpPr>
-          <p:cNvPr id="6" name="陳威帆 · 1:15–1:50">
-            <a:extLst xmlns:a="http://schemas.openxmlformats.org/drawingml/2006/main">
-              <a:ext uri="{FF2B5EF4-FFF2-40B4-BE49-F238E27FC236}">
-                <a16:creationId xmlns:a16="http://schemas.microsoft.com/office/drawing/2014/main" id="{11F455A9-78D6-42C9-91DB-A24956B1CB3E}"/>
-              </a:ext>
-            </a:extLst>
-          </p:cNvPr>
-          <p:cNvSpPr>
-            <a:spLocks xmlns:a="http://schemas.openxmlformats.org/drawingml/2006/main" noGrp="1"/>
-          </p:cNvSpPr>
-          <p:nvPr/>
-        </p:nvSpPr>
-        <p:spPr>
-          <a:xfrm xmlns:a="http://schemas.openxmlformats.org/drawingml/2006/main">
-            <a:off x="8667750" y="457200"/>
-            <a:ext cx="2790825" cy="266700"/>
-          </a:xfrm>
-          <a:prstGeom xmlns:a="http://schemas.openxmlformats.org/drawingml/2006/main" prst="rect">
-            <a:avLst/>
-          </a:prstGeom>
-          <a:noFill xmlns:a="http://schemas.openxmlformats.org/drawingml/2006/main"/>
-          <a:ln xmlns:a="http://schemas.openxmlformats.org/drawingml/2006/main" w="0">
-            <a:noFill/>
-          </a:ln>
-        </p:spPr>
-        <p:txBody>
-          <a:bodyPr xmlns:a="http://schemas.openxmlformats.org/drawingml/2006/main" lIns="0" tIns="0" rIns="0" bIns="0"/>
-          <a:lstStyle xmlns:a="http://schemas.openxmlformats.org/drawingml/2006/main">
-            <a:defPPr>
-              <a:defRPr sz="1275" b="0">
-                <a:solidFill>
-                  <a:srgbClr val="465E78"/>
-                </a:solidFill>
-              </a:defRPr>
-            </a:defPPr>
-          </a:lstStyle>
-          <a:p xmlns:a="http://schemas.openxmlformats.org/drawingml/2006/main">
-            <a:pPr>
-              <a:buNone/>
-              <a:defRPr sz="1275" b="0">
-                <a:solidFill>
-                  <a:srgbClr val="465E78"/>
-                </a:solidFill>
-              </a:defRPr>
-            </a:pPr>
-            <a:r>
-              <a:rPr sz="1275" b="0">
-                <a:solidFill>
-                  <a:srgbClr val="465E78"/>
-                </a:solidFill>
-              </a:rPr>
-              <a:t>陳威帆 · 1:15–1:50</a:t>
-            </a:r>
-          </a:p>
-        </p:txBody>
-      </p:sp>
-      <p:sp>
-        <p:nvSpPr>
           <p:cNvPr id="7" name="04">
             <a:extLst xmlns:a="http://schemas.openxmlformats.org/drawingml/2006/main">
               <a:ext uri="{FF2B5EF4-FFF2-40B4-BE49-F238E27FC236}">
@@ -25925,64 +24987,6 @@
       </p:sp>
       <p:sp>
         <p:nvSpPr>
-          <p:cNvPr id="42" name="陳威帆 · 1:50–2:30">
-            <a:extLst xmlns:a="http://schemas.openxmlformats.org/drawingml/2006/main">
-              <a:ext uri="{FF2B5EF4-FFF2-40B4-BE49-F238E27FC236}">
-                <a16:creationId xmlns:a16="http://schemas.microsoft.com/office/drawing/2014/main" id="{1239E67C-7E93-40E5-97FD-9F90C84DC5A8}"/>
-              </a:ext>
-            </a:extLst>
-          </p:cNvPr>
-          <p:cNvSpPr>
-            <a:spLocks xmlns:a="http://schemas.openxmlformats.org/drawingml/2006/main" noGrp="1"/>
-          </p:cNvSpPr>
-          <p:nvPr/>
-        </p:nvSpPr>
-        <p:spPr>
-          <a:xfrm xmlns:a="http://schemas.openxmlformats.org/drawingml/2006/main">
-            <a:off x="8667750" y="457200"/>
-            <a:ext cx="2790825" cy="266700"/>
-          </a:xfrm>
-          <a:prstGeom xmlns:a="http://schemas.openxmlformats.org/drawingml/2006/main" prst="rect">
-            <a:avLst/>
-          </a:prstGeom>
-          <a:noFill xmlns:a="http://schemas.openxmlformats.org/drawingml/2006/main"/>
-          <a:ln xmlns:a="http://schemas.openxmlformats.org/drawingml/2006/main" w="0">
-            <a:noFill/>
-          </a:ln>
-        </p:spPr>
-        <p:txBody>
-          <a:bodyPr xmlns:a="http://schemas.openxmlformats.org/drawingml/2006/main" lIns="0" tIns="0" rIns="0" bIns="0"/>
-          <a:lstStyle xmlns:a="http://schemas.openxmlformats.org/drawingml/2006/main">
-            <a:defPPr>
-              <a:defRPr sz="1275" b="0">
-                <a:solidFill>
-                  <a:srgbClr val="465E78"/>
-                </a:solidFill>
-              </a:defRPr>
-            </a:defPPr>
-          </a:lstStyle>
-          <a:p xmlns:a="http://schemas.openxmlformats.org/drawingml/2006/main">
-            <a:pPr>
-              <a:buNone/>
-              <a:defRPr sz="1275" b="0">
-                <a:solidFill>
-                  <a:srgbClr val="465E78"/>
-                </a:solidFill>
-              </a:defRPr>
-            </a:pPr>
-            <a:r>
-              <a:rPr sz="1275" b="0">
-                <a:solidFill>
-                  <a:srgbClr val="465E78"/>
-                </a:solidFill>
-              </a:rPr>
-              <a:t>陳威帆 · 1:50–2:30</a:t>
-            </a:r>
-          </a:p>
-        </p:txBody>
-      </p:sp>
-      <p:sp>
-        <p:nvSpPr>
           <p:cNvPr id="43" name="05">
             <a:extLst xmlns:a="http://schemas.openxmlformats.org/drawingml/2006/main">
               <a:ext uri="{FF2B5EF4-FFF2-40B4-BE49-F238E27FC236}">
@@ -27532,64 +26536,6 @@
       </p:sp>
       <p:sp>
         <p:nvSpPr>
-          <p:cNvPr id="35" name="陳威帆 · 2:30–3:05">
-            <a:extLst xmlns:a="http://schemas.openxmlformats.org/drawingml/2006/main">
-              <a:ext uri="{FF2B5EF4-FFF2-40B4-BE49-F238E27FC236}">
-                <a16:creationId xmlns:a16="http://schemas.microsoft.com/office/drawing/2014/main" id="{BC982EA8-545D-477C-8DB7-CB5D129DE4EB}"/>
-              </a:ext>
-            </a:extLst>
-          </p:cNvPr>
-          <p:cNvSpPr>
-            <a:spLocks xmlns:a="http://schemas.openxmlformats.org/drawingml/2006/main" noGrp="1"/>
-          </p:cNvSpPr>
-          <p:nvPr/>
-        </p:nvSpPr>
-        <p:spPr>
-          <a:xfrm xmlns:a="http://schemas.openxmlformats.org/drawingml/2006/main">
-            <a:off x="8667750" y="457200"/>
-            <a:ext cx="2790825" cy="266700"/>
-          </a:xfrm>
-          <a:prstGeom xmlns:a="http://schemas.openxmlformats.org/drawingml/2006/main" prst="rect">
-            <a:avLst/>
-          </a:prstGeom>
-          <a:noFill xmlns:a="http://schemas.openxmlformats.org/drawingml/2006/main"/>
-          <a:ln xmlns:a="http://schemas.openxmlformats.org/drawingml/2006/main" w="0">
-            <a:noFill/>
-          </a:ln>
-        </p:spPr>
-        <p:txBody>
-          <a:bodyPr xmlns:a="http://schemas.openxmlformats.org/drawingml/2006/main" lIns="0" tIns="0" rIns="0" bIns="0"/>
-          <a:lstStyle xmlns:a="http://schemas.openxmlformats.org/drawingml/2006/main">
-            <a:defPPr>
-              <a:defRPr sz="1275" b="0">
-                <a:solidFill>
-                  <a:srgbClr val="465E78"/>
-                </a:solidFill>
-              </a:defRPr>
-            </a:defPPr>
-          </a:lstStyle>
-          <a:p xmlns:a="http://schemas.openxmlformats.org/drawingml/2006/main">
-            <a:pPr>
-              <a:buNone/>
-              <a:defRPr sz="1275" b="0">
-                <a:solidFill>
-                  <a:srgbClr val="465E78"/>
-                </a:solidFill>
-              </a:defRPr>
-            </a:pPr>
-            <a:r>
-              <a:rPr sz="1275" b="0">
-                <a:solidFill>
-                  <a:srgbClr val="465E78"/>
-                </a:solidFill>
-              </a:rPr>
-              <a:t>陳威帆 · 2:30–3:05</a:t>
-            </a:r>
-          </a:p>
-        </p:txBody>
-      </p:sp>
-      <p:sp>
-        <p:nvSpPr>
           <p:cNvPr id="36" name="06">
             <a:extLst xmlns:a="http://schemas.openxmlformats.org/drawingml/2006/main">
               <a:ext uri="{FF2B5EF4-FFF2-40B4-BE49-F238E27FC236}">
@@ -28642,64 +27588,6 @@
               <a:t>新臺幣／月；官方單價查於 10/12（1 USD≈32 元）；未含人力，見附錄 C、F。</a:t>
             </a:r>
             <a:endParaRPr sz="1400"/>
-          </a:p>
-        </p:txBody>
-      </p:sp>
-      <p:sp>
-        <p:nvSpPr>
-          <p:cNvPr id="28" name="陳威帆 · 3:05–3:50">
-            <a:extLst xmlns:a="http://schemas.openxmlformats.org/drawingml/2006/main">
-              <a:ext uri="{FF2B5EF4-FFF2-40B4-BE49-F238E27FC236}">
-                <a16:creationId xmlns:a16="http://schemas.microsoft.com/office/drawing/2014/main" id="{6B13CACB-5429-4B4E-8705-C61874EECB50}"/>
-              </a:ext>
-            </a:extLst>
-          </p:cNvPr>
-          <p:cNvSpPr>
-            <a:spLocks xmlns:a="http://schemas.openxmlformats.org/drawingml/2006/main" noGrp="1"/>
-          </p:cNvSpPr>
-          <p:nvPr/>
-        </p:nvSpPr>
-        <p:spPr>
-          <a:xfrm xmlns:a="http://schemas.openxmlformats.org/drawingml/2006/main">
-            <a:off x="8667750" y="457200"/>
-            <a:ext cx="2790825" cy="266700"/>
-          </a:xfrm>
-          <a:prstGeom xmlns:a="http://schemas.openxmlformats.org/drawingml/2006/main" prst="rect">
-            <a:avLst/>
-          </a:prstGeom>
-          <a:noFill xmlns:a="http://schemas.openxmlformats.org/drawingml/2006/main"/>
-          <a:ln xmlns:a="http://schemas.openxmlformats.org/drawingml/2006/main" w="0">
-            <a:noFill/>
-          </a:ln>
-        </p:spPr>
-        <p:txBody>
-          <a:bodyPr xmlns:a="http://schemas.openxmlformats.org/drawingml/2006/main" lIns="0" tIns="0" rIns="0" bIns="0"/>
-          <a:lstStyle xmlns:a="http://schemas.openxmlformats.org/drawingml/2006/main">
-            <a:defPPr>
-              <a:defRPr sz="1275" b="0">
-                <a:solidFill>
-                  <a:srgbClr val="465E78"/>
-                </a:solidFill>
-              </a:defRPr>
-            </a:defPPr>
-          </a:lstStyle>
-          <a:p xmlns:a="http://schemas.openxmlformats.org/drawingml/2006/main">
-            <a:pPr>
-              <a:buNone/>
-              <a:defRPr sz="1275" b="0">
-                <a:solidFill>
-                  <a:srgbClr val="465E78"/>
-                </a:solidFill>
-              </a:defRPr>
-            </a:pPr>
-            <a:r>
-              <a:rPr sz="1275" b="0">
-                <a:solidFill>
-                  <a:srgbClr val="465E78"/>
-                </a:solidFill>
-              </a:rPr>
-              <a:t>陳威帆 · 3:05–3:50</a:t>
-            </a:r>
           </a:p>
         </p:txBody>
       </p:sp>
@@ -30330,64 +29218,6 @@
       </p:sp>
       <p:sp>
         <p:nvSpPr>
-          <p:cNvPr id="38" name="陳威帆 · 3:50–4:25">
-            <a:extLst xmlns:a="http://schemas.openxmlformats.org/drawingml/2006/main">
-              <a:ext uri="{FF2B5EF4-FFF2-40B4-BE49-F238E27FC236}">
-                <a16:creationId xmlns:a16="http://schemas.microsoft.com/office/drawing/2014/main" id="{5E1A92CE-5E9B-40D4-AB1B-030C85CB2A2F}"/>
-              </a:ext>
-            </a:extLst>
-          </p:cNvPr>
-          <p:cNvSpPr>
-            <a:spLocks xmlns:a="http://schemas.openxmlformats.org/drawingml/2006/main" noGrp="1"/>
-          </p:cNvSpPr>
-          <p:nvPr/>
-        </p:nvSpPr>
-        <p:spPr>
-          <a:xfrm xmlns:a="http://schemas.openxmlformats.org/drawingml/2006/main">
-            <a:off x="8667750" y="457200"/>
-            <a:ext cx="2790825" cy="266700"/>
-          </a:xfrm>
-          <a:prstGeom xmlns:a="http://schemas.openxmlformats.org/drawingml/2006/main" prst="rect">
-            <a:avLst/>
-          </a:prstGeom>
-          <a:noFill xmlns:a="http://schemas.openxmlformats.org/drawingml/2006/main"/>
-          <a:ln xmlns:a="http://schemas.openxmlformats.org/drawingml/2006/main" w="0">
-            <a:noFill/>
-          </a:ln>
-        </p:spPr>
-        <p:txBody>
-          <a:bodyPr xmlns:a="http://schemas.openxmlformats.org/drawingml/2006/main" lIns="0" tIns="0" rIns="0" bIns="0"/>
-          <a:lstStyle xmlns:a="http://schemas.openxmlformats.org/drawingml/2006/main">
-            <a:defPPr>
-              <a:defRPr sz="1275" b="0">
-                <a:solidFill>
-                  <a:srgbClr val="465E78"/>
-                </a:solidFill>
-              </a:defRPr>
-            </a:defPPr>
-          </a:lstStyle>
-          <a:p xmlns:a="http://schemas.openxmlformats.org/drawingml/2006/main">
-            <a:pPr>
-              <a:buNone/>
-              <a:defRPr sz="1275" b="0">
-                <a:solidFill>
-                  <a:srgbClr val="465E78"/>
-                </a:solidFill>
-              </a:defRPr>
-            </a:pPr>
-            <a:r>
-              <a:rPr sz="1275" b="0">
-                <a:solidFill>
-                  <a:srgbClr val="465E78"/>
-                </a:solidFill>
-              </a:rPr>
-              <a:t>陳威帆 · 3:50–4:25</a:t>
-            </a:r>
-          </a:p>
-        </p:txBody>
-      </p:sp>
-      <p:sp>
-        <p:nvSpPr>
           <p:cNvPr id="39" name="08">
             <a:extLst xmlns:a="http://schemas.openxmlformats.org/drawingml/2006/main">
               <a:ext uri="{FF2B5EF4-FFF2-40B4-BE49-F238E27FC236}">
@@ -31646,64 +30476,6 @@
               <a:t>權限與額度皆在後端檢查；預警的查詢、已讀與即時檢查已依帳號隔離。</a:t>
             </a:r>
             <a:endParaRPr sz="1400"/>
-          </a:p>
-        </p:txBody>
-      </p:sp>
-      <p:sp>
-        <p:nvSpPr>
-          <p:cNvPr id="33" name="許家全 · 4:25–5:10">
-            <a:extLst xmlns:a="http://schemas.openxmlformats.org/drawingml/2006/main">
-              <a:ext uri="{FF2B5EF4-FFF2-40B4-BE49-F238E27FC236}">
-                <a16:creationId xmlns:a16="http://schemas.microsoft.com/office/drawing/2014/main" id="{D88E650D-A0FC-41A9-8332-49B526C11F61}"/>
-              </a:ext>
-            </a:extLst>
-          </p:cNvPr>
-          <p:cNvSpPr>
-            <a:spLocks xmlns:a="http://schemas.openxmlformats.org/drawingml/2006/main" noGrp="1"/>
-          </p:cNvSpPr>
-          <p:nvPr/>
-        </p:nvSpPr>
-        <p:spPr>
-          <a:xfrm xmlns:a="http://schemas.openxmlformats.org/drawingml/2006/main">
-            <a:off x="8667750" y="457200"/>
-            <a:ext cx="2790825" cy="266700"/>
-          </a:xfrm>
-          <a:prstGeom xmlns:a="http://schemas.openxmlformats.org/drawingml/2006/main" prst="rect">
-            <a:avLst/>
-          </a:prstGeom>
-          <a:noFill xmlns:a="http://schemas.openxmlformats.org/drawingml/2006/main"/>
-          <a:ln xmlns:a="http://schemas.openxmlformats.org/drawingml/2006/main" w="0">
-            <a:noFill/>
-          </a:ln>
-        </p:spPr>
-        <p:txBody>
-          <a:bodyPr xmlns:a="http://schemas.openxmlformats.org/drawingml/2006/main" lIns="0" tIns="0" rIns="0" bIns="0"/>
-          <a:lstStyle xmlns:a="http://schemas.openxmlformats.org/drawingml/2006/main">
-            <a:defPPr>
-              <a:defRPr sz="1275" b="0">
-                <a:solidFill>
-                  <a:srgbClr val="465E78"/>
-                </a:solidFill>
-              </a:defRPr>
-            </a:defPPr>
-          </a:lstStyle>
-          <a:p xmlns:a="http://schemas.openxmlformats.org/drawingml/2006/main">
-            <a:pPr>
-              <a:buNone/>
-              <a:defRPr sz="1275" b="0">
-                <a:solidFill>
-                  <a:srgbClr val="465E78"/>
-                </a:solidFill>
-              </a:defRPr>
-            </a:pPr>
-            <a:r>
-              <a:rPr sz="1275" b="0">
-                <a:solidFill>
-                  <a:srgbClr val="465E78"/>
-                </a:solidFill>
-              </a:rPr>
-              <a:t>許家全 · 4:25–5:10</a:t>
-            </a:r>
           </a:p>
         </p:txBody>
       </p:sp>

--- a/output/ppt-review-20261011/final/MeBOD_複審簡報_第二輪修訂版.pptx
+++ b/output/ppt-review-20261011/final/MeBOD_複審簡報_第二輪修訂版.pptx
@@ -23,7 +23,6 @@
     <p:sldId xmlns:r="http://schemas.openxmlformats.org/officeDocument/2006/relationships" id="268" r:id="R2e34a04d4951441f"/>
     <p:sldId xmlns:r="http://schemas.openxmlformats.org/officeDocument/2006/relationships" id="269" r:id="Rc0e2eaea6c8a454c"/>
     <p:sldId xmlns:r="http://schemas.openxmlformats.org/officeDocument/2006/relationships" id="270" r:id="Rc427127a7a1a4820"/>
-    <p:sldId xmlns:r="http://schemas.openxmlformats.org/officeDocument/2006/relationships" id="271" r:id="Rd84d0f967edf4479"/>
     <p:sldId xmlns:r="http://schemas.openxmlformats.org/officeDocument/2006/relationships" id="272" r:id="Rb13b1a1201294e36"/>
     <p:sldId xmlns:r="http://schemas.openxmlformats.org/officeDocument/2006/relationships" id="273" r:id="R24f78b4f98114178"/>
     <p:sldId xmlns:r="http://schemas.openxmlformats.org/officeDocument/2006/relationships" id="274" r:id="R2ffa6da9ff1d4ab9"/>
@@ -1032,77 +1031,6 @@
           <a:p xmlns:a="http://schemas.openxmlformats.org/drawingml/2006/main">
             <a:r>
               <a:t>【許家全｜140 秒】預先登入正確帳號並備妥兩筆歷史。0–45秒：查詢醫美、設定平台與期間，讀趨勢並點文章。45–95秒：詢問消費者關注重點，展開引用並回原文；可用已完成的答案避免現場等待。95–140秒：歷史比較並匯出Excel。若網站10秒無回應，改以本頁和附錄實際畫面說明，不宣稱即時成功。畫面為原稿嵌入截圖，其數字只屬拍攝當時查詢。</a:t>
-            </a:r>
-            <a:endParaRPr/>
-          </a:p>
-        </p:txBody>
-      </p:sp>
-      <p:sp>
-        <p:nvSpPr>
-          <p:cNvPr id="4" name="Slide Number Placeholder 3"/>
-          <p:cNvSpPr>
-            <a:spLocks xmlns:a="http://schemas.openxmlformats.org/drawingml/2006/main" noGrp="1"/>
-          </p:cNvSpPr>
-          <p:nvPr>
-            <p:ph type="sldNum" idx="5"/>
-          </p:nvPr>
-        </p:nvSpPr>
-        <p:spPr/>
-        <p:txBody>
-          <a:bodyPr xmlns:a="http://schemas.openxmlformats.org/drawingml/2006/main"/>
-          <a:lstStyle xmlns:a="http://schemas.openxmlformats.org/drawingml/2006/main"/>
-          <a:p xmlns:a="http://schemas.openxmlformats.org/drawingml/2006/main"/>
-        </p:txBody>
-      </p:sp>
-    </p:spTree>
-  </p:cSld>
-  <p:clrMapOvr>
-    <a:masterClrMapping xmlns:a="http://schemas.openxmlformats.org/drawingml/2006/main"/>
-  </p:clrMapOvr>
-</p:notes>
-</file>
-
-<file path=ppt/notesSlides/notesSlide16.xml><?xml version="1.0" encoding="utf-8"?>
-<p:notes xmlns:p="http://schemas.openxmlformats.org/presentationml/2006/main">
-  <p:cSld>
-    <p:spTree>
-      <p:nvGrpSpPr>
-        <p:cNvPr id="1" name=""/>
-        <p:cNvGrpSpPr/>
-        <p:nvPr/>
-      </p:nvGrpSpPr>
-      <p:grpSpPr>
-        <a:xfrm xmlns:a="http://schemas.openxmlformats.org/drawingml/2006/main"/>
-      </p:grpSpPr>
-      <p:sp>
-        <p:nvSpPr>
-          <p:cNvPr id="2" name="Slide Image Placeholder 1"/>
-          <p:cNvSpPr>
-            <a:spLocks xmlns:a="http://schemas.openxmlformats.org/drawingml/2006/main" noGrp="1"/>
-          </p:cNvSpPr>
-          <p:nvPr>
-            <p:ph type="sldImg" idx="0"/>
-          </p:nvPr>
-        </p:nvSpPr>
-        <p:spPr/>
-      </p:sp>
-      <p:sp>
-        <p:nvSpPr>
-          <p:cNvPr id="3" name="Notes Placeholder 2"/>
-          <p:cNvSpPr>
-            <a:spLocks xmlns:a="http://schemas.openxmlformats.org/drawingml/2006/main" noGrp="1"/>
-          </p:cNvSpPr>
-          <p:nvPr>
-            <p:ph type="body" idx="1"/>
-          </p:nvPr>
-        </p:nvSpPr>
-        <p:spPr/>
-        <p:txBody>
-          <a:bodyPr xmlns:a="http://schemas.openxmlformats.org/drawingml/2006/main"/>
-          <a:lstStyle xmlns:a="http://schemas.openxmlformats.org/drawingml/2006/main"/>
-          <a:p xmlns:a="http://schemas.openxmlformats.org/drawingml/2006/main">
-            <a:r>
-              <a:t>【許家全｜35 秒】PostgreSQL10項可核對2026/10/03原始XML；E2E4項可核對2026/09/27 17:14的all-results.xml，較早一份曾有1項失敗，保留失敗歷程。後端pytest與前端Vitest已於10/12重跑：後端493通過、1略過，前端43通過，報告存於backend/.test-artifacts。高負載、人工標註與檢索題組尚待驗證。來源：backend/.test-artifacts/pytest-20261012.xml、vitest-20261012.xml、postgres-results.xml、all-results.xml。</a:t>
             </a:r>
             <a:endParaRPr/>
           </a:p>
@@ -10177,887 +10105,6 @@
 </p:sld>
 </file>
 
-<file path=ppt/slides/slide16.xml><?xml version="1.0" encoding="utf-8"?>
-<p:sld xmlns:p="http://schemas.openxmlformats.org/presentationml/2006/main">
-  <p:cSld>
-    <p:bg>
-      <p:bgPr>
-        <a:solidFill xmlns:a="http://schemas.openxmlformats.org/drawingml/2006/main">
-          <a:srgbClr val="F5F8FC"/>
-        </a:solidFill>
-      </p:bgPr>
-    </p:bg>
-    <p:spTree>
-      <p:nvGrpSpPr>
-        <p:cNvPr id="1" name=""/>
-        <p:cNvGrpSpPr/>
-        <p:nvPr/>
-      </p:nvGrpSpPr>
-      <p:grpSpPr>
-        <a:xfrm xmlns:a="http://schemas.openxmlformats.org/drawingml/2006/main"/>
-      </p:grpSpPr>
-      <p:sp>
-        <p:nvSpPr>
-          <p:cNvPr id="2" name="分層測試：區分原始報告與原稿紀錄">
-            <a:extLst xmlns:a="http://schemas.openxmlformats.org/drawingml/2006/main">
-              <a:ext uri="{FF2B5EF4-FFF2-40B4-BE49-F238E27FC236}">
-                <a16:creationId xmlns:a16="http://schemas.microsoft.com/office/drawing/2014/main" id="{D16A66BA-E063-48C5-8CED-B168A753D08B}"/>
-              </a:ext>
-            </a:extLst>
-          </p:cNvPr>
-          <p:cNvSpPr>
-            <a:spLocks xmlns:a="http://schemas.openxmlformats.org/drawingml/2006/main" noGrp="1"/>
-          </p:cNvSpPr>
-          <p:nvPr/>
-        </p:nvSpPr>
-        <p:spPr>
-          <a:xfrm xmlns:a="http://schemas.openxmlformats.org/drawingml/2006/main">
-            <a:off x="733425" y="933450"/>
-            <a:ext cx="10725150" cy="619125"/>
-          </a:xfrm>
-          <a:prstGeom xmlns:a="http://schemas.openxmlformats.org/drawingml/2006/main" prst="rect">
-            <a:avLst/>
-          </a:prstGeom>
-          <a:noFill xmlns:a="http://schemas.openxmlformats.org/drawingml/2006/main"/>
-          <a:ln xmlns:a="http://schemas.openxmlformats.org/drawingml/2006/main" w="0">
-            <a:noFill/>
-          </a:ln>
-        </p:spPr>
-        <p:txBody>
-          <a:bodyPr xmlns:a="http://schemas.openxmlformats.org/drawingml/2006/main" lIns="0" tIns="0" rIns="0" bIns="0"/>
-          <a:lstStyle xmlns:a="http://schemas.openxmlformats.org/drawingml/2006/main">
-            <a:defPPr>
-              <a:defRPr sz="2700" b="1">
-                <a:solidFill>
-                  <a:srgbClr val="14243A"/>
-                </a:solidFill>
-              </a:defRPr>
-            </a:defPPr>
-          </a:lstStyle>
-          <a:p xmlns:a="http://schemas.openxmlformats.org/drawingml/2006/main">
-            <a:pPr>
-              <a:buNone/>
-              <a:defRPr sz="2700" b="1">
-                <a:solidFill>
-                  <a:srgbClr val="14243A"/>
-                </a:solidFill>
-              </a:defRPr>
-            </a:pPr>
-            <a:r>
-              <a:rPr sz="2700" b="1">
-                <a:solidFill>
-                  <a:srgbClr val="14243A"/>
-                </a:solidFill>
-              </a:rPr>
-              <a:t>分層測試：每一層都有可核對的原始報告</a:t>
-            </a:r>
-          </a:p>
-        </p:txBody>
-      </p:sp>
-      <p:graphicFrame>
-        <p:nvGraphicFramePr>
-          <p:cNvPr id="3" name="">
-            <a:extLst xmlns:a="http://schemas.openxmlformats.org/drawingml/2006/main">
-              <a:ext uri="{FF2B5EF4-FFF2-40B4-BE49-F238E27FC236}">
-                <a16:creationId xmlns:a16="http://schemas.microsoft.com/office/drawing/2014/main" id="{A34A74EC-4A35-461F-ABDB-A1528177ABA7}"/>
-              </a:ext>
-            </a:extLst>
-          </p:cNvPr>
-          <p:cNvGraphicFramePr/>
-          <p:nvPr/>
-        </p:nvGraphicFramePr>
-        <p:xfrm>
-          <a:off xmlns:a="http://schemas.openxmlformats.org/drawingml/2006/main" x="733425" y="1771650"/>
-          <a:ext xmlns:a="http://schemas.openxmlformats.org/drawingml/2006/main" cx="10725150" cy="3190875"/>
-        </p:xfrm>
-        <a:graphic xmlns:a="http://schemas.openxmlformats.org/drawingml/2006/main">
-          <a:graphicData uri="http://schemas.openxmlformats.org/drawingml/2006/table">
-            <a:tbl>
-              <a:tblPr/>
-              <a:tblGrid>
-                <a:gridCol w="2419350"/>
-                <a:gridCol w="4000500"/>
-                <a:gridCol w="4305300"/>
-              </a:tblGrid>
-              <a:tr h="638175">
-                <a:tc>
-                  <a:txBody>
-                    <a:bodyPr/>
-                    <a:lstStyle/>
-                    <a:p>
-                      <a:r>
-                        <a:rPr sz="1650" b="1">
-                          <a:solidFill>
-                            <a:srgbClr val="2073BE"/>
-                          </a:solidFill>
-                        </a:rPr>
-                        <a:t>層級</a:t>
-                      </a:r>
-                    </a:p>
-                  </a:txBody>
-                  <a:tcPr marL="114300" marR="114300" marT="76200" marB="76200" anchor="ctr">
-                    <a:lnL w="9525">
-                      <a:solidFill>
-                        <a:srgbClr val="D3DEEA"/>
-                      </a:solidFill>
-                      <a:prstDash val="solid"/>
-                    </a:lnL>
-                    <a:lnR w="9525">
-                      <a:solidFill>
-                        <a:srgbClr val="D3DEEA"/>
-                      </a:solidFill>
-                      <a:prstDash val="solid"/>
-                    </a:lnR>
-                    <a:lnT w="9525">
-                      <a:solidFill>
-                        <a:srgbClr val="D3DEEA"/>
-                      </a:solidFill>
-                      <a:prstDash val="solid"/>
-                    </a:lnT>
-                    <a:lnB w="9525">
-                      <a:solidFill>
-                        <a:srgbClr val="D3DEEA"/>
-                      </a:solidFill>
-                      <a:prstDash val="solid"/>
-                    </a:lnB>
-                    <a:solidFill>
-                      <a:srgbClr val="E2EEFA"/>
-                    </a:solidFill>
-                  </a:tcPr>
-                </a:tc>
-                <a:tc>
-                  <a:txBody>
-                    <a:bodyPr/>
-                    <a:lstStyle/>
-                    <a:p>
-                      <a:r>
-                        <a:rPr sz="1650" b="1">
-                          <a:solidFill>
-                            <a:srgbClr val="2073BE"/>
-                          </a:solidFill>
-                        </a:rPr>
-                        <a:t>結果與日期</a:t>
-                      </a:r>
-                    </a:p>
-                  </a:txBody>
-                  <a:tcPr marL="114300" marR="114300" marT="76200" marB="76200" anchor="ctr">
-                    <a:lnR w="9525">
-                      <a:solidFill>
-                        <a:srgbClr val="D3DEEA"/>
-                      </a:solidFill>
-                      <a:prstDash val="solid"/>
-                    </a:lnR>
-                    <a:lnT w="9525">
-                      <a:solidFill>
-                        <a:srgbClr val="D3DEEA"/>
-                      </a:solidFill>
-                      <a:prstDash val="solid"/>
-                    </a:lnT>
-                    <a:lnB w="9525">
-                      <a:solidFill>
-                        <a:srgbClr val="D3DEEA"/>
-                      </a:solidFill>
-                      <a:prstDash val="solid"/>
-                    </a:lnB>
-                    <a:solidFill>
-                      <a:srgbClr val="E2EEFA"/>
-                    </a:solidFill>
-                  </a:tcPr>
-                </a:tc>
-                <a:tc>
-                  <a:txBody>
-                    <a:bodyPr/>
-                    <a:lstStyle/>
-                    <a:p>
-                      <a:r>
-                        <a:rPr sz="1650" b="1">
-                          <a:solidFill>
-                            <a:srgbClr val="2073BE"/>
-                          </a:solidFill>
-                        </a:rPr>
-                        <a:t>本次可核對的證據</a:t>
-                      </a:r>
-                    </a:p>
-                  </a:txBody>
-                  <a:tcPr marL="114300" marR="114300" marT="76200" marB="76200" anchor="ctr">
-                    <a:lnR w="9525">
-                      <a:solidFill>
-                        <a:srgbClr val="D3DEEA"/>
-                      </a:solidFill>
-                      <a:prstDash val="solid"/>
-                    </a:lnR>
-                    <a:lnT w="9525">
-                      <a:solidFill>
-                        <a:srgbClr val="D3DEEA"/>
-                      </a:solidFill>
-                      <a:prstDash val="solid"/>
-                    </a:lnT>
-                    <a:lnB w="9525">
-                      <a:solidFill>
-                        <a:srgbClr val="D3DEEA"/>
-                      </a:solidFill>
-                      <a:prstDash val="solid"/>
-                    </a:lnB>
-                    <a:solidFill>
-                      <a:srgbClr val="E2EEFA"/>
-                    </a:solidFill>
-                  </a:tcPr>
-                </a:tc>
-              </a:tr>
-              <a:tr h="638175">
-                <a:tc>
-                  <a:txBody>
-                    <a:bodyPr/>
-                    <a:lstStyle/>
-                    <a:p>
-                      <a:r>
-                        <a:rPr sz="1650" b="0">
-                          <a:solidFill>
-                            <a:srgbClr val="14243A"/>
-                          </a:solidFill>
-                        </a:rPr>
-                        <a:t>PostgreSQL 整合</a:t>
-                      </a:r>
-                    </a:p>
-                  </a:txBody>
-                  <a:tcPr marL="114300" marR="114300" marT="76200" marB="76200" anchor="ctr">
-                    <a:lnL w="9525">
-                      <a:solidFill>
-                        <a:srgbClr val="D3DEEA"/>
-                      </a:solidFill>
-                      <a:prstDash val="solid"/>
-                    </a:lnL>
-                    <a:lnR w="9525">
-                      <a:solidFill>
-                        <a:srgbClr val="D3DEEA"/>
-                      </a:solidFill>
-                      <a:prstDash val="solid"/>
-                    </a:lnR>
-                    <a:lnB w="9525">
-                      <a:solidFill>
-                        <a:srgbClr val="D3DEEA"/>
-                      </a:solidFill>
-                      <a:prstDash val="solid"/>
-                    </a:lnB>
-                    <a:solidFill>
-                      <a:srgbClr val="FFFFFF"/>
-                    </a:solidFill>
-                  </a:tcPr>
-                </a:tc>
-                <a:tc>
-                  <a:txBody>
-                    <a:bodyPr/>
-                    <a:lstStyle/>
-                    <a:p>
-                      <a:r>
-                        <a:rPr sz="1650" b="0">
-                          <a:solidFill>
-                            <a:srgbClr val="14243A"/>
-                          </a:solidFill>
-                        </a:rPr>
-                        <a:t>10 通過｜2026/10/03</a:t>
-                      </a:r>
-                    </a:p>
-                  </a:txBody>
-                  <a:tcPr marL="114300" marR="114300" marT="76200" marB="76200" anchor="ctr">
-                    <a:lnR w="9525">
-                      <a:solidFill>
-                        <a:srgbClr val="D3DEEA"/>
-                      </a:solidFill>
-                      <a:prstDash val="solid"/>
-                    </a:lnR>
-                    <a:lnB w="9525">
-                      <a:solidFill>
-                        <a:srgbClr val="D3DEEA"/>
-                      </a:solidFill>
-                      <a:prstDash val="solid"/>
-                    </a:lnB>
-                    <a:solidFill>
-                      <a:srgbClr val="FFFFFF"/>
-                    </a:solidFill>
-                  </a:tcPr>
-                </a:tc>
-                <a:tc>
-                  <a:txBody>
-                    <a:bodyPr/>
-                    <a:lstStyle/>
-                    <a:p>
-                      <a:r>
-                        <a:rPr sz="1650" b="0">
-                          <a:solidFill>
-                            <a:srgbClr val="14243A"/>
-                          </a:solidFill>
-                        </a:rPr>
-                        <a:t>postgres-results.xml</a:t>
-                      </a:r>
-                    </a:p>
-                  </a:txBody>
-                  <a:tcPr marL="114300" marR="114300" marT="76200" marB="76200" anchor="ctr">
-                    <a:lnR w="9525">
-                      <a:solidFill>
-                        <a:srgbClr val="D3DEEA"/>
-                      </a:solidFill>
-                      <a:prstDash val="solid"/>
-                    </a:lnR>
-                    <a:lnB w="9525">
-                      <a:solidFill>
-                        <a:srgbClr val="D3DEEA"/>
-                      </a:solidFill>
-                      <a:prstDash val="solid"/>
-                    </a:lnB>
-                    <a:solidFill>
-                      <a:srgbClr val="FFFFFF"/>
-                    </a:solidFill>
-                  </a:tcPr>
-                </a:tc>
-              </a:tr>
-              <a:tr h="638175">
-                <a:tc>
-                  <a:txBody>
-                    <a:bodyPr/>
-                    <a:lstStyle/>
-                    <a:p>
-                      <a:r>
-                        <a:rPr sz="1650" b="0">
-                          <a:solidFill>
-                            <a:srgbClr val="14243A"/>
-                          </a:solidFill>
-                        </a:rPr>
-                        <a:t>Chromium 端對端</a:t>
-                      </a:r>
-                    </a:p>
-                  </a:txBody>
-                  <a:tcPr marL="114300" marR="114300" marT="76200" marB="76200" anchor="ctr">
-                    <a:lnL w="9525">
-                      <a:solidFill>
-                        <a:srgbClr val="D3DEEA"/>
-                      </a:solidFill>
-                      <a:prstDash val="solid"/>
-                    </a:lnL>
-                    <a:lnR w="9525">
-                      <a:solidFill>
-                        <a:srgbClr val="D3DEEA"/>
-                      </a:solidFill>
-                      <a:prstDash val="solid"/>
-                    </a:lnR>
-                    <a:lnB w="9525">
-                      <a:solidFill>
-                        <a:srgbClr val="D3DEEA"/>
-                      </a:solidFill>
-                      <a:prstDash val="solid"/>
-                    </a:lnB>
-                    <a:solidFill>
-                      <a:srgbClr val="F0F5FB"/>
-                    </a:solidFill>
-                  </a:tcPr>
-                </a:tc>
-                <a:tc>
-                  <a:txBody>
-                    <a:bodyPr/>
-                    <a:lstStyle/>
-                    <a:p>
-                      <a:r>
-                        <a:rPr sz="1650" b="0">
-                          <a:solidFill>
-                            <a:srgbClr val="14243A"/>
-                          </a:solidFill>
-                        </a:rPr>
-                        <a:t>4 通過｜2026/09/27</a:t>
-                      </a:r>
-                    </a:p>
-                  </a:txBody>
-                  <a:tcPr marL="114300" marR="114300" marT="76200" marB="76200" anchor="ctr">
-                    <a:lnR w="9525">
-                      <a:solidFill>
-                        <a:srgbClr val="D3DEEA"/>
-                      </a:solidFill>
-                      <a:prstDash val="solid"/>
-                    </a:lnR>
-                    <a:lnB w="9525">
-                      <a:solidFill>
-                        <a:srgbClr val="D3DEEA"/>
-                      </a:solidFill>
-                      <a:prstDash val="solid"/>
-                    </a:lnB>
-                    <a:solidFill>
-                      <a:srgbClr val="F0F5FB"/>
-                    </a:solidFill>
-                  </a:tcPr>
-                </a:tc>
-                <a:tc>
-                  <a:txBody>
-                    <a:bodyPr/>
-                    <a:lstStyle/>
-                    <a:p>
-                      <a:r>
-                        <a:rPr sz="1650" b="0">
-                          <a:solidFill>
-                            <a:srgbClr val="14243A"/>
-                          </a:solidFill>
-                        </a:rPr>
-                        <a:t>all-results.xml 內 4 個 E2E 案例</a:t>
-                      </a:r>
-                    </a:p>
-                  </a:txBody>
-                  <a:tcPr marL="114300" marR="114300" marT="76200" marB="76200" anchor="ctr">
-                    <a:lnR w="9525">
-                      <a:solidFill>
-                        <a:srgbClr val="D3DEEA"/>
-                      </a:solidFill>
-                      <a:prstDash val="solid"/>
-                    </a:lnR>
-                    <a:lnB w="9525">
-                      <a:solidFill>
-                        <a:srgbClr val="D3DEEA"/>
-                      </a:solidFill>
-                      <a:prstDash val="solid"/>
-                    </a:lnB>
-                    <a:solidFill>
-                      <a:srgbClr val="F0F5FB"/>
-                    </a:solidFill>
-                  </a:tcPr>
-                </a:tc>
-              </a:tr>
-              <a:tr h="638175">
-                <a:tc>
-                  <a:txBody>
-                    <a:bodyPr/>
-                    <a:lstStyle/>
-                    <a:p>
-                      <a:r>
-                        <a:rPr sz="1650" b="0">
-                          <a:solidFill>
-                            <a:srgbClr val="14243A"/>
-                          </a:solidFill>
-                        </a:rPr>
-                        <a:t>後端 pytest</a:t>
-                      </a:r>
-                    </a:p>
-                  </a:txBody>
-                  <a:tcPr marL="114300" marR="114300" marT="76200" marB="76200" anchor="ctr">
-                    <a:lnL w="9525">
-                      <a:solidFill>
-                        <a:srgbClr val="D3DEEA"/>
-                      </a:solidFill>
-                      <a:prstDash val="solid"/>
-                    </a:lnL>
-                    <a:lnR w="9525">
-                      <a:solidFill>
-                        <a:srgbClr val="D3DEEA"/>
-                      </a:solidFill>
-                      <a:prstDash val="solid"/>
-                    </a:lnR>
-                    <a:lnB w="9525">
-                      <a:solidFill>
-                        <a:srgbClr val="D3DEEA"/>
-                      </a:solidFill>
-                      <a:prstDash val="solid"/>
-                    </a:lnB>
-                    <a:solidFill>
-                      <a:srgbClr val="FFFFFF"/>
-                    </a:solidFill>
-                  </a:tcPr>
-                </a:tc>
-                <a:tc>
-                  <a:txBody>
-                    <a:bodyPr/>
-                    <a:lstStyle/>
-                    <a:p>
-                      <a:r>
-                        <a:rPr sz="1650" b="0">
-                          <a:solidFill>
-                            <a:srgbClr val="14243A"/>
-                          </a:solidFill>
-                        </a:rPr>
-                        <a:t>493 通過、1 略過｜2026/10/12</a:t>
-                      </a:r>
-                    </a:p>
-                  </a:txBody>
-                  <a:tcPr marL="114300" marR="114300" marT="76200" marB="76200" anchor="ctr">
-                    <a:lnR w="9525">
-                      <a:solidFill>
-                        <a:srgbClr val="D3DEEA"/>
-                      </a:solidFill>
-                      <a:prstDash val="solid"/>
-                    </a:lnR>
-                    <a:lnB w="9525">
-                      <a:solidFill>
-                        <a:srgbClr val="D3DEEA"/>
-                      </a:solidFill>
-                      <a:prstDash val="solid"/>
-                    </a:lnB>
-                    <a:solidFill>
-                      <a:srgbClr val="FFFFFF"/>
-                    </a:solidFill>
-                  </a:tcPr>
-                </a:tc>
-                <a:tc>
-                  <a:txBody>
-                    <a:bodyPr/>
-                    <a:lstStyle/>
-                    <a:p>
-                      <a:r>
-                        <a:rPr sz="1650" b="0">
-                          <a:solidFill>
-                            <a:srgbClr val="14243A"/>
-                          </a:solidFill>
-                        </a:rPr>
-                        <a:t>pytest-20261012.xml</a:t>
-                      </a:r>
-                    </a:p>
-                  </a:txBody>
-                  <a:tcPr marL="114300" marR="114300" marT="76200" marB="76200" anchor="ctr">
-                    <a:lnR w="9525">
-                      <a:solidFill>
-                        <a:srgbClr val="D3DEEA"/>
-                      </a:solidFill>
-                      <a:prstDash val="solid"/>
-                    </a:lnR>
-                    <a:lnB w="9525">
-                      <a:solidFill>
-                        <a:srgbClr val="D3DEEA"/>
-                      </a:solidFill>
-                      <a:prstDash val="solid"/>
-                    </a:lnB>
-                    <a:solidFill>
-                      <a:srgbClr val="FFFFFF"/>
-                    </a:solidFill>
-                  </a:tcPr>
-                </a:tc>
-              </a:tr>
-              <a:tr h="638175">
-                <a:tc>
-                  <a:txBody>
-                    <a:bodyPr/>
-                    <a:lstStyle/>
-                    <a:p>
-                      <a:r>
-                        <a:rPr sz="1650" b="0">
-                          <a:solidFill>
-                            <a:srgbClr val="14243A"/>
-                          </a:solidFill>
-                        </a:rPr>
-                        <a:t>前端 Vitest</a:t>
-                      </a:r>
-                    </a:p>
-                  </a:txBody>
-                  <a:tcPr marL="114300" marR="114300" marT="76200" marB="76200" anchor="ctr">
-                    <a:lnL w="9525">
-                      <a:solidFill>
-                        <a:srgbClr val="D3DEEA"/>
-                      </a:solidFill>
-                      <a:prstDash val="solid"/>
-                    </a:lnL>
-                    <a:lnR w="9525">
-                      <a:solidFill>
-                        <a:srgbClr val="D3DEEA"/>
-                      </a:solidFill>
-                      <a:prstDash val="solid"/>
-                    </a:lnR>
-                    <a:lnB w="9525">
-                      <a:solidFill>
-                        <a:srgbClr val="D3DEEA"/>
-                      </a:solidFill>
-                      <a:prstDash val="solid"/>
-                    </a:lnB>
-                    <a:solidFill>
-                      <a:srgbClr val="F0F5FB"/>
-                    </a:solidFill>
-                  </a:tcPr>
-                </a:tc>
-                <a:tc>
-                  <a:txBody>
-                    <a:bodyPr/>
-                    <a:lstStyle/>
-                    <a:p>
-                      <a:r>
-                        <a:rPr sz="1650" b="0">
-                          <a:solidFill>
-                            <a:srgbClr val="14243A"/>
-                          </a:solidFill>
-                        </a:rPr>
-                        <a:t>43 通過｜2026/10/12</a:t>
-                      </a:r>
-                    </a:p>
-                  </a:txBody>
-                  <a:tcPr marL="114300" marR="114300" marT="76200" marB="76200" anchor="ctr">
-                    <a:lnR w="9525">
-                      <a:solidFill>
-                        <a:srgbClr val="D3DEEA"/>
-                      </a:solidFill>
-                      <a:prstDash val="solid"/>
-                    </a:lnR>
-                    <a:lnB w="9525">
-                      <a:solidFill>
-                        <a:srgbClr val="D3DEEA"/>
-                      </a:solidFill>
-                      <a:prstDash val="solid"/>
-                    </a:lnB>
-                    <a:solidFill>
-                      <a:srgbClr val="F0F5FB"/>
-                    </a:solidFill>
-                  </a:tcPr>
-                </a:tc>
-                <a:tc>
-                  <a:txBody>
-                    <a:bodyPr/>
-                    <a:lstStyle/>
-                    <a:p>
-                      <a:r>
-                        <a:rPr sz="1650" b="0">
-                          <a:solidFill>
-                            <a:srgbClr val="14243A"/>
-                          </a:solidFill>
-                        </a:rPr>
-                        <a:t>vitest-20261012.xml</a:t>
-                      </a:r>
-                    </a:p>
-                  </a:txBody>
-                  <a:tcPr marL="114300" marR="114300" marT="76200" marB="76200" anchor="ctr">
-                    <a:lnR w="9525">
-                      <a:solidFill>
-                        <a:srgbClr val="D3DEEA"/>
-                      </a:solidFill>
-                      <a:prstDash val="solid"/>
-                    </a:lnR>
-                    <a:lnB w="9525">
-                      <a:solidFill>
-                        <a:srgbClr val="D3DEEA"/>
-                      </a:solidFill>
-                      <a:prstDash val="solid"/>
-                    </a:lnB>
-                    <a:solidFill>
-                      <a:srgbClr val="F0F5FB"/>
-                    </a:solidFill>
-                  </a:tcPr>
-                </a:tc>
-              </a:tr>
-            </a:tbl>
-          </a:graphicData>
-        </a:graphic>
-      </p:graphicFrame>
-      <p:sp>
-        <p:nvSpPr>
-          <p:cNvPr id="4" name="測試能支持流程；外部模型的固定回應不能證明回答品質。">
-            <a:extLst xmlns:a="http://schemas.openxmlformats.org/drawingml/2006/main">
-              <a:ext uri="{FF2B5EF4-FFF2-40B4-BE49-F238E27FC236}">
-                <a16:creationId xmlns:a16="http://schemas.microsoft.com/office/drawing/2014/main" id="{2794C48B-BB46-47CC-BC47-B9099746190B}"/>
-              </a:ext>
-            </a:extLst>
-          </p:cNvPr>
-          <p:cNvSpPr>
-            <a:spLocks xmlns:a="http://schemas.openxmlformats.org/drawingml/2006/main" noGrp="1"/>
-          </p:cNvSpPr>
-          <p:nvPr/>
-        </p:nvSpPr>
-        <p:spPr>
-          <a:xfrm xmlns:a="http://schemas.openxmlformats.org/drawingml/2006/main">
-            <a:off x="733425" y="5181600"/>
-            <a:ext cx="10725150" cy="381000"/>
-          </a:xfrm>
-          <a:prstGeom xmlns:a="http://schemas.openxmlformats.org/drawingml/2006/main" prst="rect">
-            <a:avLst/>
-          </a:prstGeom>
-          <a:noFill xmlns:a="http://schemas.openxmlformats.org/drawingml/2006/main"/>
-          <a:ln xmlns:a="http://schemas.openxmlformats.org/drawingml/2006/main" w="0">
-            <a:noFill/>
-          </a:ln>
-        </p:spPr>
-        <p:txBody>
-          <a:bodyPr xmlns:a="http://schemas.openxmlformats.org/drawingml/2006/main" lIns="0" tIns="0" rIns="0" bIns="0"/>
-          <a:lstStyle xmlns:a="http://schemas.openxmlformats.org/drawingml/2006/main">
-            <a:defPPr>
-              <a:defRPr sz="1800" b="0">
-                <a:solidFill>
-                  <a:srgbClr val="465E78"/>
-                </a:solidFill>
-              </a:defRPr>
-            </a:defPPr>
-          </a:lstStyle>
-          <a:p xmlns:a="http://schemas.openxmlformats.org/drawingml/2006/main">
-            <a:pPr>
-              <a:buNone/>
-              <a:defRPr sz="1800" b="0">
-                <a:solidFill>
-                  <a:srgbClr val="465E78"/>
-                </a:solidFill>
-              </a:defRPr>
-            </a:pPr>
-            <a:r>
-              <a:rPr sz="1800" b="0">
-                <a:solidFill>
-                  <a:srgbClr val="465E78"/>
-                </a:solidFill>
-              </a:rPr>
-              <a:t>測試能支持流程；外部模型的固定回應不能證明回答品質。</a:t>
-            </a:r>
-          </a:p>
-        </p:txBody>
-      </p:sp>
-      <p:sp>
-        <p:nvSpPr>
-          <p:cNvPr id="5" name="">
-            <a:extLst xmlns:a="http://schemas.openxmlformats.org/drawingml/2006/main">
-              <a:ext uri="{FF2B5EF4-FFF2-40B4-BE49-F238E27FC236}">
-                <a16:creationId xmlns:a16="http://schemas.microsoft.com/office/drawing/2014/main" id="{023D7C7B-A4A7-4323-83BE-56D71FBE95AF}"/>
-              </a:ext>
-            </a:extLst>
-          </p:cNvPr>
-          <p:cNvSpPr>
-            <a:spLocks xmlns:a="http://schemas.openxmlformats.org/drawingml/2006/main" noGrp="1"/>
-          </p:cNvSpPr>
-          <p:nvPr/>
-        </p:nvSpPr>
-        <p:spPr>
-          <a:xfrm xmlns:a="http://schemas.openxmlformats.org/drawingml/2006/main">
-            <a:off x="733425" y="5743575"/>
-            <a:ext cx="10725150" cy="514350"/>
-          </a:xfrm>
-          <a:prstGeom xmlns:a="http://schemas.openxmlformats.org/drawingml/2006/main" prst="roundRect">
-            <a:avLst>
-              <a:gd name="adj" fmla="val 25926"/>
-            </a:avLst>
-          </a:prstGeom>
-          <a:solidFill xmlns:a="http://schemas.openxmlformats.org/drawingml/2006/main">
-            <a:srgbClr val="E2EEFA"/>
-          </a:solidFill>
-          <a:ln xmlns:a="http://schemas.openxmlformats.org/drawingml/2006/main" w="9525">
-            <a:solidFill>
-              <a:srgbClr val="D3DEEA"/>
-            </a:solidFill>
-          </a:ln>
-        </p:spPr>
-        <p:txBody xmlns:a="http://schemas.openxmlformats.org/drawingml/2006/main">
-          <a:bodyPr/>
-          <a:p/>
-        </p:txBody>
-      </p:sp>
-      <p:sp>
-        <p:nvSpPr>
-          <p:cNvPr id="6" name="以上為歷史紀錄，本次未重跑系統測試；不同日期、範圍的測試不累">
-            <a:extLst xmlns:a="http://schemas.openxmlformats.org/drawingml/2006/main">
-              <a:ext uri="{FF2B5EF4-FFF2-40B4-BE49-F238E27FC236}">
-                <a16:creationId xmlns:a16="http://schemas.microsoft.com/office/drawing/2014/main" id="{474FE176-8F6C-43D2-BF97-B262F2A7F8E8}"/>
-              </a:ext>
-            </a:extLst>
-          </p:cNvPr>
-          <p:cNvSpPr>
-            <a:spLocks xmlns:a="http://schemas.openxmlformats.org/drawingml/2006/main" noGrp="1"/>
-          </p:cNvSpPr>
-          <p:nvPr/>
-        </p:nvSpPr>
-        <p:spPr>
-          <a:xfrm xmlns:a="http://schemas.openxmlformats.org/drawingml/2006/main">
-            <a:off x="914400" y="5857875"/>
-            <a:ext cx="10363200" cy="304800"/>
-          </a:xfrm>
-          <a:prstGeom xmlns:a="http://schemas.openxmlformats.org/drawingml/2006/main" prst="rect">
-            <a:avLst/>
-          </a:prstGeom>
-          <a:noFill xmlns:a="http://schemas.openxmlformats.org/drawingml/2006/main"/>
-          <a:ln xmlns:a="http://schemas.openxmlformats.org/drawingml/2006/main" w="0">
-            <a:noFill/>
-          </a:ln>
-        </p:spPr>
-        <p:txBody>
-          <a:bodyPr xmlns:a="http://schemas.openxmlformats.org/drawingml/2006/main" lIns="0" tIns="0" rIns="0" bIns="0"/>
-          <a:lstStyle xmlns:a="http://schemas.openxmlformats.org/drawingml/2006/main">
-            <a:defPPr>
-              <a:defRPr sz="1500" b="1">
-                <a:solidFill>
-                  <a:srgbClr val="2073BE"/>
-                </a:solidFill>
-              </a:defRPr>
-            </a:defPPr>
-          </a:lstStyle>
-          <a:p xmlns:a="http://schemas.openxmlformats.org/drawingml/2006/main">
-            <a:pPr>
-              <a:buNone/>
-              <a:defRPr sz="1500" b="1">
-                <a:solidFill>
-                  <a:srgbClr val="2073BE"/>
-                </a:solidFill>
-              </a:defRPr>
-            </a:pPr>
-            <a:r>
-              <a:rPr sz="1500" b="1">
-                <a:solidFill>
-                  <a:srgbClr val="2073BE"/>
-                </a:solidFill>
-              </a:rPr>
-              <a:t>單元／API 測試 10/12 重跑並保存 XML；PostgreSQL、E2E 為先前報告，不同日期不累加。</a:t>
-            </a:r>
-          </a:p>
-        </p:txBody>
-      </p:sp>
-      <p:sp>
-        <p:nvSpPr>
-          <p:cNvPr id="8" name="16">
-            <a:extLst xmlns:a="http://schemas.openxmlformats.org/drawingml/2006/main">
-              <a:ext uri="{FF2B5EF4-FFF2-40B4-BE49-F238E27FC236}">
-                <a16:creationId xmlns:a16="http://schemas.microsoft.com/office/drawing/2014/main" id="{0F8FF5F3-E919-4AB8-85B5-F26C52CDFB82}"/>
-              </a:ext>
-            </a:extLst>
-          </p:cNvPr>
-          <p:cNvSpPr>
-            <a:spLocks xmlns:a="http://schemas.openxmlformats.org/drawingml/2006/main" noGrp="1"/>
-          </p:cNvSpPr>
-          <p:nvPr/>
-        </p:nvSpPr>
-        <p:spPr>
-          <a:xfrm xmlns:a="http://schemas.openxmlformats.org/drawingml/2006/main">
-            <a:off x="733425" y="6391275"/>
-            <a:ext cx="762000" cy="257175"/>
-          </a:xfrm>
-          <a:prstGeom xmlns:a="http://schemas.openxmlformats.org/drawingml/2006/main" prst="rect">
-            <a:avLst/>
-          </a:prstGeom>
-          <a:noFill xmlns:a="http://schemas.openxmlformats.org/drawingml/2006/main"/>
-          <a:ln xmlns:a="http://schemas.openxmlformats.org/drawingml/2006/main" w="0">
-            <a:noFill/>
-          </a:ln>
-        </p:spPr>
-        <p:txBody>
-          <a:bodyPr xmlns:a="http://schemas.openxmlformats.org/drawingml/2006/main" lIns="0" tIns="0" rIns="0" bIns="0"/>
-          <a:lstStyle xmlns:a="http://schemas.openxmlformats.org/drawingml/2006/main">
-            <a:defPPr>
-              <a:defRPr sz="1275" b="0">
-                <a:solidFill>
-                  <a:srgbClr val="465E78"/>
-                </a:solidFill>
-              </a:defRPr>
-            </a:defPPr>
-          </a:lstStyle>
-          <a:p xmlns:a="http://schemas.openxmlformats.org/drawingml/2006/main">
-            <a:pPr>
-              <a:buNone/>
-              <a:defRPr sz="1275" b="0">
-                <a:solidFill>
-                  <a:srgbClr val="465E78"/>
-                </a:solidFill>
-              </a:defRPr>
-            </a:pPr>
-            <a:r>
-              <a:rPr sz="1275" b="0">
-                <a:solidFill>
-                  <a:srgbClr val="465E78"/>
-                </a:solidFill>
-              </a:rPr>
-              <a:t>16</a:t>
-            </a:r>
-          </a:p>
-        </p:txBody>
-      </p:sp>
-    </p:spTree>
-    <p:extLst>
-      <p:ext uri="{BB962C8B-B14F-4D97-AF65-F5344CB8AC3E}">
-        <p14:creationId xmlns:p14="http://schemas.microsoft.com/office/powerpoint/2010/main" val="243830329"/>
-      </p:ext>
-    </p:extLst>
-  </p:cSld>
-</p:sld>
-</file>
-
 <file path=ppt/slides/slide17.xml><?xml version="1.0" encoding="utf-8"?>
 <p:sld xmlns:p="http://schemas.openxmlformats.org/presentationml/2006/main">
   <p:cSld>
@@ -13286,7 +12333,7 @@
                   <a:srgbClr val="465E78"/>
                 </a:solidFill>
               </a:rPr>
-              <a:t>17</a:t>
+              <a:t>16</a:t>
             </a:r>
           </a:p>
         </p:txBody>
@@ -14140,7 +13187,7 @@
                   <a:srgbClr val="465E78"/>
                 </a:solidFill>
               </a:rPr>
-              <a:t>18</a:t>
+              <a:t>17</a:t>
             </a:r>
           </a:p>
         </p:txBody>
@@ -15201,7 +14248,7 @@
                   <a:srgbClr val="465E78"/>
                 </a:solidFill>
               </a:rPr>
-              <a:t>19</a:t>
+              <a:t>18</a:t>
             </a:r>
           </a:p>
         </p:txBody>
@@ -16027,7 +15074,7 @@
                 <a:ea typeface="Microsoft JhengHei"/>
                 <a:cs typeface="Microsoft JhengHei"/>
               </a:rPr>
-              <a:t>實機展示、測試證據</a:t>
+              <a:t>實機展示</a:t>
             </a:r>
             <a:endParaRPr sz="1400"/>
           </a:p>
@@ -17363,7 +16410,7 @@
                             <a:srgbClr val="14243A"/>
                           </a:solidFill>
                         </a:rPr>
-                        <a:t>p17 實際月份</a:t>
+                        <a:t>p16 實際月份</a:t>
                       </a:r>
                     </a:p>
                   </a:txBody>
@@ -17470,7 +16517,7 @@
                             <a:srgbClr val="14243A"/>
                           </a:solidFill>
                         </a:rPr>
-                        <a:t>p17 提交紀錄；p18 分工</a:t>
+                        <a:t>p16 提交紀錄；p17 分工</a:t>
                       </a:r>
                     </a:p>
                   </a:txBody>
@@ -17690,7 +16737,7 @@
                   <a:srgbClr val="465E78"/>
                 </a:solidFill>
               </a:rPr>
-              <a:t>20</a:t>
+              <a:t>19</a:t>
             </a:r>
           </a:p>
         </p:txBody>
@@ -18625,7 +17672,7 @@
                             <a:srgbClr val="14243A"/>
                           </a:solidFill>
                         </a:rPr>
-                        <a:t>p8 TOWS；p19 後續策略</a:t>
+                        <a:t>p8 TOWS；p18 後續策略</a:t>
                       </a:r>
                     </a:p>
                   </a:txBody>
@@ -18941,7 +17988,7 @@
                   <a:srgbClr val="465E78"/>
                 </a:solidFill>
               </a:rPr>
-              <a:t>21</a:t>
+              <a:t>20</a:t>
             </a:r>
           </a:p>
         </p:txBody>
@@ -19715,7 +18762,7 @@
                   <a:srgbClr val="465E78"/>
                 </a:solidFill>
               </a:rPr>
-              <a:t>22</a:t>
+              <a:t>21</a:t>
             </a:r>
           </a:p>
         </p:txBody>
@@ -19984,7 +19031,7 @@
                   <a:srgbClr val="465E78"/>
                 </a:solidFill>
               </a:rPr>
-              <a:t>23</a:t>
+              <a:t>22</a:t>
             </a:r>
           </a:p>
         </p:txBody>
@@ -20253,7 +19300,7 @@
                   <a:srgbClr val="465E78"/>
                 </a:solidFill>
               </a:rPr>
-              <a:t>24</a:t>
+              <a:t>23</a:t>
             </a:r>
           </a:p>
         </p:txBody>
@@ -21290,7 +20337,7 @@
                   <a:srgbClr val="465E78"/>
                 </a:solidFill>
               </a:rPr>
-              <a:t>25</a:t>
+              <a:t>24</a:t>
             </a:r>
           </a:p>
         </p:txBody>

--- a/output/ppt-review-20261011/final/MeBOD_複審簡報_第二輪修訂版.pptx
+++ b/output/ppt-review-20261011/final/MeBOD_複審簡報_第二輪修訂版.pptx
@@ -1101,7 +1101,7 @@
           <a:lstStyle xmlns:a="http://schemas.openxmlformats.org/drawingml/2006/main"/>
           <a:p xmlns:a="http://schemas.openxmlformats.org/drawingml/2006/main">
             <a:r>
-              <a:t>【陳威帆｜45 秒】甘特圖保留原稿115/2至116/1的計畫，10月後為計畫工作。繳件與展覽日期沿用原稿，發表前仍按學校公告確認。提交數由GitHub遠端於2026/10/12確認：5月14、6月0、7月27、8月42、9月47、10月30，總160；7–10月146，皆已推送。提交集中於單一帳號，不能當作兩位組員的貢獻比例。</a:t>
+              <a:t>【陳威帆｜45 秒】甘特圖保留原稿115/2至116/1的計畫，10月後為計畫工作。繳件與展覽日期沿用原稿，發表前仍按學校公告確認。右側里程碑依各功能第一次提交的月份：5月PTT爬蟲、儀表板與WebSocket；7月帳號登入；8月Dcard、Mobile01、Threads；9月方案額度、Alembic與向量檢索；10月情緒一致性與預警權限修正。提交數由GitHub於10/12統計：5月14、6月0、7月27、8月42、9月47、10月34，共164次，皆已推送；提交集中於單一帳號，不能當作兩位組員的貢獻比例。</a:t>
             </a:r>
             <a:endParaRPr/>
           </a:p>
@@ -1243,7 +1243,7 @@
           <a:lstStyle xmlns:a="http://schemas.openxmlformats.org/drawingml/2006/main"/>
           <a:p xmlns:a="http://schemas.openxmlformats.org/drawingml/2006/main">
             <a:r>
-              <a:t>【陳威帆｜105 秒】總結三點：一、四平台到問答與報告形成完整研究流程；二、RAG與分數規則已可說明，測試報告可核對；三、尚未把品質驗證說成全部完成。下一步依序補Linux部署回歸、建立人工標註和檢索題組、辨識業配，再與實際使用者訪談試用。營運上，實測重算後4個專業版帳號可打平雲端支出，算入人力則需12到21個。與通用代理的差異需要同題實測，現階段著重長期資料、來源回查與持續監測。結束於14:30，保留30秒緩衝。</a:t>
+              <a:t>【陳威帆｜105 秒】總結三點：一、四平台到問答與報告形成完整研究流程；二、RAG與分數規則已可說明，後端493項、前端43項自動化測試通過；三、尚未把品質驗證說成全部完成。下一步依序補Linux部署回歸、建立人工標註和檢索題組、辨識業配，再與實際使用者訪談試用。營運上，實測重算後4個專業版帳號可打平雲端支出，算入人力則需12到21個。與通用代理的差異需要同題實測，現階段著重長期資料、來源回查與持續監測。原第16頁測試頁已刪除，主講約13分55秒，可在Demo或此頁多說約35秒。</a:t>
             </a:r>
             <a:endParaRPr/>
           </a:p>
@@ -1314,7 +1314,7 @@
           <a:lstStyle xmlns:a="http://schemas.openxmlformats.org/drawingml/2006/main"/>
           <a:p xmlns:a="http://schemas.openxmlformats.org/drawingml/2006/main">
             <a:r>
-              <a:t>【陳威帆｜15 秒】先談問題與營運，再由家全說明技術、功能與Demo，最後回到進度與限制。主講14分30秒，保留30秒緩衝；附錄供問答使用。</a:t>
+              <a:t>【陳威帆｜15 秒】先談問題與營運，再由家全說明技術、功能與Demo，最後回到進度與限制；附錄供問答使用。</a:t>
             </a:r>
             <a:endParaRPr/>
           </a:p>
@@ -3223,7 +3223,7 @@
                 <a:ea typeface="Microsoft JhengHei"/>
                 <a:cs typeface="Microsoft JhengHei"/>
               </a:rPr>
-              <a:t>GitHub 每月提交（共 160 次）</a:t>
+              <a:t>GitHub 每月提交（共 164 次）</a:t>
             </a:r>
           </a:p>
         </c:rich>
@@ -3317,7 +3317,7 @@
                   <c:v>47</c:v>
                 </c:pt>
                 <c:pt idx="5">
-                  <c:v>30</c:v>
+                  <c:v>34</c:v>
                 </c:pt>
               </c:numCache>
             </c:numRef>
@@ -10105,6 +10105,2271 @@
 </p:sld>
 </file>
 
+<file path=ppt/slides/slide16.xml><?xml version="1.0" encoding="utf-8"?>
+<p:sld xmlns:p="http://schemas.openxmlformats.org/presentationml/2006/main">
+  <p:cSld>
+    <p:bg>
+      <p:bgPr>
+        <a:solidFill xmlns:a="http://schemas.openxmlformats.org/drawingml/2006/main">
+          <a:srgbClr val="F5F8FC"/>
+        </a:solidFill>
+      </p:bgPr>
+    </p:bg>
+    <p:spTree>
+      <p:nvGrpSpPr>
+        <p:cNvPr id="1" name=""/>
+        <p:cNvGrpSpPr/>
+        <p:nvPr/>
+      </p:nvGrpSpPr>
+      <p:grpSpPr>
+        <a:xfrm xmlns:a="http://schemas.openxmlformats.org/drawingml/2006/main"/>
+      </p:grpSpPr>
+      <p:sp>
+        <p:nvSpPr>
+          <p:cNvPr id="4" name="Text 2">
+            <a:extLst xmlns:a="http://schemas.openxmlformats.org/drawingml/2006/main">
+              <a:ext uri="{FF2B5EF4-FFF2-40B4-BE49-F238E27FC236}">
+                <a16:creationId xmlns:a16="http://schemas.microsoft.com/office/drawing/2014/main" id="{C119F8EF-F5DF-40AA-9A65-9DD5DD1FD6A7}"/>
+              </a:ext>
+            </a:extLst>
+          </p:cNvPr>
+          <p:cNvSpPr>
+            <a:spLocks xmlns:a="http://schemas.openxmlformats.org/drawingml/2006/main" noGrp="1"/>
+          </p:cNvSpPr>
+          <p:nvPr/>
+        </p:nvSpPr>
+        <p:spPr>
+          <a:xfrm xmlns:a="http://schemas.openxmlformats.org/drawingml/2006/main">
+            <a:off x="731520" y="777240"/>
+            <a:ext cx="10725912" cy="685800"/>
+          </a:xfrm>
+          <a:prstGeom xmlns:a="http://schemas.openxmlformats.org/drawingml/2006/main" prst="rect">
+            <a:avLst/>
+          </a:prstGeom>
+          <a:noFill xmlns:a="http://schemas.openxmlformats.org/drawingml/2006/main"/>
+        </p:spPr>
+        <p:txBody>
+          <a:bodyPr xmlns:a="http://schemas.openxmlformats.org/drawingml/2006/main" wrap="square" lIns="0" tIns="0" rIns="0" bIns="0" anchor="ctr"/>
+          <a:lstStyle xmlns:a="http://schemas.openxmlformats.org/drawingml/2006/main"/>
+          <a:p xmlns:a="http://schemas.openxmlformats.org/drawingml/2006/main">
+            <a:pPr marL="0" indent="0">
+              <a:buNone/>
+            </a:pPr>
+            <a:r>
+              <a:rPr sz="3000" b="1">
+                <a:solidFill>
+                  <a:srgbClr val="14243A"/>
+                </a:solidFill>
+                <a:latin typeface="Microsoft JhengHei"/>
+                <a:ea typeface="Microsoft JhengHei"/>
+                <a:cs typeface="Microsoft JhengHei"/>
+              </a:rPr>
+              <a:t>一年兩學期：用實際月份管進度</a:t>
+            </a:r>
+            <a:endParaRPr sz="3000"/>
+          </a:p>
+        </p:txBody>
+      </p:sp>
+      <p:sp>
+        <p:nvSpPr>
+          <p:cNvPr id="6" name="Text 4">
+            <a:extLst xmlns:a="http://schemas.openxmlformats.org/drawingml/2006/main">
+              <a:ext uri="{FF2B5EF4-FFF2-40B4-BE49-F238E27FC236}">
+                <a16:creationId xmlns:a16="http://schemas.microsoft.com/office/drawing/2014/main" id="{750CE05C-0D67-44F9-A324-DEE1C279251A}"/>
+              </a:ext>
+            </a:extLst>
+          </p:cNvPr>
+          <p:cNvSpPr>
+            <a:spLocks xmlns:a="http://schemas.openxmlformats.org/drawingml/2006/main" noGrp="1"/>
+          </p:cNvSpPr>
+          <p:nvPr/>
+        </p:nvSpPr>
+        <p:spPr>
+          <a:xfrm xmlns:a="http://schemas.openxmlformats.org/drawingml/2006/main">
+            <a:off x="731520" y="1783080"/>
+            <a:ext cx="893826" cy="274320"/>
+          </a:xfrm>
+          <a:prstGeom xmlns:a="http://schemas.openxmlformats.org/drawingml/2006/main" prst="rect">
+            <a:avLst/>
+          </a:prstGeom>
+          <a:noFill xmlns:a="http://schemas.openxmlformats.org/drawingml/2006/main"/>
+        </p:spPr>
+        <p:txBody>
+          <a:bodyPr xmlns:a="http://schemas.openxmlformats.org/drawingml/2006/main" wrap="square" lIns="0" tIns="0" rIns="0" bIns="0" anchor="ctr"/>
+          <a:lstStyle xmlns:a="http://schemas.openxmlformats.org/drawingml/2006/main"/>
+          <a:p xmlns:a="http://schemas.openxmlformats.org/drawingml/2006/main">
+            <a:pPr marL="0" indent="0" algn="ctr">
+              <a:buNone/>
+            </a:pPr>
+            <a:r>
+              <a:rPr sz="1200">
+                <a:solidFill>
+                  <a:srgbClr val="7A8CA3"/>
+                </a:solidFill>
+                <a:latin typeface="Microsoft JhengHei"/>
+                <a:ea typeface="Microsoft JhengHei"/>
+                <a:cs typeface="Microsoft JhengHei"/>
+              </a:rPr>
+              <a:t>115/2</a:t>
+            </a:r>
+            <a:endParaRPr sz="1200"/>
+          </a:p>
+        </p:txBody>
+      </p:sp>
+      <p:sp>
+        <p:nvSpPr>
+          <p:cNvPr id="7" name="Text 5">
+            <a:extLst xmlns:a="http://schemas.openxmlformats.org/drawingml/2006/main">
+              <a:ext uri="{FF2B5EF4-FFF2-40B4-BE49-F238E27FC236}">
+                <a16:creationId xmlns:a16="http://schemas.microsoft.com/office/drawing/2014/main" id="{A6172688-1603-49F3-9037-34F87F86AA52}"/>
+              </a:ext>
+            </a:extLst>
+          </p:cNvPr>
+          <p:cNvSpPr>
+            <a:spLocks xmlns:a="http://schemas.openxmlformats.org/drawingml/2006/main" noGrp="1"/>
+          </p:cNvSpPr>
+          <p:nvPr/>
+        </p:nvSpPr>
+        <p:spPr>
+          <a:xfrm xmlns:a="http://schemas.openxmlformats.org/drawingml/2006/main">
+            <a:off x="1625346" y="1783080"/>
+            <a:ext cx="893826" cy="274320"/>
+          </a:xfrm>
+          <a:prstGeom xmlns:a="http://schemas.openxmlformats.org/drawingml/2006/main" prst="rect">
+            <a:avLst/>
+          </a:prstGeom>
+          <a:noFill xmlns:a="http://schemas.openxmlformats.org/drawingml/2006/main"/>
+        </p:spPr>
+        <p:txBody>
+          <a:bodyPr xmlns:a="http://schemas.openxmlformats.org/drawingml/2006/main" wrap="square" lIns="0" tIns="0" rIns="0" bIns="0" anchor="ctr"/>
+          <a:lstStyle xmlns:a="http://schemas.openxmlformats.org/drawingml/2006/main"/>
+          <a:p xmlns:a="http://schemas.openxmlformats.org/drawingml/2006/main">
+            <a:pPr marL="0" indent="0" algn="ctr">
+              <a:buNone/>
+            </a:pPr>
+            <a:r>
+              <a:rPr sz="1200">
+                <a:solidFill>
+                  <a:srgbClr val="7A8CA3"/>
+                </a:solidFill>
+                <a:latin typeface="Microsoft JhengHei"/>
+                <a:ea typeface="Microsoft JhengHei"/>
+                <a:cs typeface="Microsoft JhengHei"/>
+              </a:rPr>
+              <a:t>3月</a:t>
+            </a:r>
+            <a:endParaRPr sz="1200"/>
+          </a:p>
+        </p:txBody>
+      </p:sp>
+      <p:sp>
+        <p:nvSpPr>
+          <p:cNvPr id="8" name="Text 6">
+            <a:extLst xmlns:a="http://schemas.openxmlformats.org/drawingml/2006/main">
+              <a:ext uri="{FF2B5EF4-FFF2-40B4-BE49-F238E27FC236}">
+                <a16:creationId xmlns:a16="http://schemas.microsoft.com/office/drawing/2014/main" id="{8DF420BD-015E-4EC4-9A61-03E00ECF3F6C}"/>
+              </a:ext>
+            </a:extLst>
+          </p:cNvPr>
+          <p:cNvSpPr>
+            <a:spLocks xmlns:a="http://schemas.openxmlformats.org/drawingml/2006/main" noGrp="1"/>
+          </p:cNvSpPr>
+          <p:nvPr/>
+        </p:nvSpPr>
+        <p:spPr>
+          <a:xfrm xmlns:a="http://schemas.openxmlformats.org/drawingml/2006/main">
+            <a:off x="2519172" y="1783080"/>
+            <a:ext cx="893826" cy="274320"/>
+          </a:xfrm>
+          <a:prstGeom xmlns:a="http://schemas.openxmlformats.org/drawingml/2006/main" prst="rect">
+            <a:avLst/>
+          </a:prstGeom>
+          <a:noFill xmlns:a="http://schemas.openxmlformats.org/drawingml/2006/main"/>
+        </p:spPr>
+        <p:txBody>
+          <a:bodyPr xmlns:a="http://schemas.openxmlformats.org/drawingml/2006/main" wrap="square" lIns="0" tIns="0" rIns="0" bIns="0" anchor="ctr"/>
+          <a:lstStyle xmlns:a="http://schemas.openxmlformats.org/drawingml/2006/main"/>
+          <a:p xmlns:a="http://schemas.openxmlformats.org/drawingml/2006/main">
+            <a:pPr marL="0" indent="0" algn="ctr">
+              <a:buNone/>
+            </a:pPr>
+            <a:r>
+              <a:rPr sz="1200">
+                <a:solidFill>
+                  <a:srgbClr val="7A8CA3"/>
+                </a:solidFill>
+                <a:latin typeface="Microsoft JhengHei"/>
+                <a:ea typeface="Microsoft JhengHei"/>
+                <a:cs typeface="Microsoft JhengHei"/>
+              </a:rPr>
+              <a:t>4月</a:t>
+            </a:r>
+            <a:endParaRPr sz="1200"/>
+          </a:p>
+        </p:txBody>
+      </p:sp>
+      <p:sp>
+        <p:nvSpPr>
+          <p:cNvPr id="9" name="Text 7">
+            <a:extLst xmlns:a="http://schemas.openxmlformats.org/drawingml/2006/main">
+              <a:ext uri="{FF2B5EF4-FFF2-40B4-BE49-F238E27FC236}">
+                <a16:creationId xmlns:a16="http://schemas.microsoft.com/office/drawing/2014/main" id="{05F6480C-F537-4BEB-B40F-F6EF40BB37B7}"/>
+              </a:ext>
+            </a:extLst>
+          </p:cNvPr>
+          <p:cNvSpPr>
+            <a:spLocks xmlns:a="http://schemas.openxmlformats.org/drawingml/2006/main" noGrp="1"/>
+          </p:cNvSpPr>
+          <p:nvPr/>
+        </p:nvSpPr>
+        <p:spPr>
+          <a:xfrm xmlns:a="http://schemas.openxmlformats.org/drawingml/2006/main">
+            <a:off x="3412998" y="1783080"/>
+            <a:ext cx="893826" cy="274320"/>
+          </a:xfrm>
+          <a:prstGeom xmlns:a="http://schemas.openxmlformats.org/drawingml/2006/main" prst="rect">
+            <a:avLst/>
+          </a:prstGeom>
+          <a:noFill xmlns:a="http://schemas.openxmlformats.org/drawingml/2006/main"/>
+        </p:spPr>
+        <p:txBody>
+          <a:bodyPr xmlns:a="http://schemas.openxmlformats.org/drawingml/2006/main" wrap="square" lIns="0" tIns="0" rIns="0" bIns="0" anchor="ctr"/>
+          <a:lstStyle xmlns:a="http://schemas.openxmlformats.org/drawingml/2006/main"/>
+          <a:p xmlns:a="http://schemas.openxmlformats.org/drawingml/2006/main">
+            <a:pPr marL="0" indent="0" algn="ctr">
+              <a:buNone/>
+            </a:pPr>
+            <a:r>
+              <a:rPr sz="1200">
+                <a:solidFill>
+                  <a:srgbClr val="7A8CA3"/>
+                </a:solidFill>
+                <a:latin typeface="Microsoft JhengHei"/>
+                <a:ea typeface="Microsoft JhengHei"/>
+                <a:cs typeface="Microsoft JhengHei"/>
+              </a:rPr>
+              <a:t>5月</a:t>
+            </a:r>
+            <a:endParaRPr sz="1200"/>
+          </a:p>
+        </p:txBody>
+      </p:sp>
+      <p:sp>
+        <p:nvSpPr>
+          <p:cNvPr id="10" name="Text 8">
+            <a:extLst xmlns:a="http://schemas.openxmlformats.org/drawingml/2006/main">
+              <a:ext uri="{FF2B5EF4-FFF2-40B4-BE49-F238E27FC236}">
+                <a16:creationId xmlns:a16="http://schemas.microsoft.com/office/drawing/2014/main" id="{84F17DD7-21C0-4EEB-9208-13438D2AF201}"/>
+              </a:ext>
+            </a:extLst>
+          </p:cNvPr>
+          <p:cNvSpPr>
+            <a:spLocks xmlns:a="http://schemas.openxmlformats.org/drawingml/2006/main" noGrp="1"/>
+          </p:cNvSpPr>
+          <p:nvPr/>
+        </p:nvSpPr>
+        <p:spPr>
+          <a:xfrm xmlns:a="http://schemas.openxmlformats.org/drawingml/2006/main">
+            <a:off x="4306824" y="1783080"/>
+            <a:ext cx="893826" cy="274320"/>
+          </a:xfrm>
+          <a:prstGeom xmlns:a="http://schemas.openxmlformats.org/drawingml/2006/main" prst="rect">
+            <a:avLst/>
+          </a:prstGeom>
+          <a:noFill xmlns:a="http://schemas.openxmlformats.org/drawingml/2006/main"/>
+        </p:spPr>
+        <p:txBody>
+          <a:bodyPr xmlns:a="http://schemas.openxmlformats.org/drawingml/2006/main" wrap="square" lIns="0" tIns="0" rIns="0" bIns="0" anchor="ctr"/>
+          <a:lstStyle xmlns:a="http://schemas.openxmlformats.org/drawingml/2006/main"/>
+          <a:p xmlns:a="http://schemas.openxmlformats.org/drawingml/2006/main">
+            <a:pPr marL="0" indent="0" algn="ctr">
+              <a:buNone/>
+            </a:pPr>
+            <a:r>
+              <a:rPr sz="1200">
+                <a:solidFill>
+                  <a:srgbClr val="7A8CA3"/>
+                </a:solidFill>
+                <a:latin typeface="Microsoft JhengHei"/>
+                <a:ea typeface="Microsoft JhengHei"/>
+                <a:cs typeface="Microsoft JhengHei"/>
+              </a:rPr>
+              <a:t>6月</a:t>
+            </a:r>
+            <a:endParaRPr sz="1200"/>
+          </a:p>
+        </p:txBody>
+      </p:sp>
+      <p:sp>
+        <p:nvSpPr>
+          <p:cNvPr id="11" name="Text 9">
+            <a:extLst xmlns:a="http://schemas.openxmlformats.org/drawingml/2006/main">
+              <a:ext uri="{FF2B5EF4-FFF2-40B4-BE49-F238E27FC236}">
+                <a16:creationId xmlns:a16="http://schemas.microsoft.com/office/drawing/2014/main" id="{5CD1FBEE-868C-45F1-879C-75AAFC53DC58}"/>
+              </a:ext>
+            </a:extLst>
+          </p:cNvPr>
+          <p:cNvSpPr>
+            <a:spLocks xmlns:a="http://schemas.openxmlformats.org/drawingml/2006/main" noGrp="1"/>
+          </p:cNvSpPr>
+          <p:nvPr/>
+        </p:nvSpPr>
+        <p:spPr>
+          <a:xfrm xmlns:a="http://schemas.openxmlformats.org/drawingml/2006/main">
+            <a:off x="5200650" y="1783080"/>
+            <a:ext cx="893826" cy="274320"/>
+          </a:xfrm>
+          <a:prstGeom xmlns:a="http://schemas.openxmlformats.org/drawingml/2006/main" prst="rect">
+            <a:avLst/>
+          </a:prstGeom>
+          <a:noFill xmlns:a="http://schemas.openxmlformats.org/drawingml/2006/main"/>
+        </p:spPr>
+        <p:txBody>
+          <a:bodyPr xmlns:a="http://schemas.openxmlformats.org/drawingml/2006/main" wrap="square" lIns="0" tIns="0" rIns="0" bIns="0" anchor="ctr"/>
+          <a:lstStyle xmlns:a="http://schemas.openxmlformats.org/drawingml/2006/main"/>
+          <a:p xmlns:a="http://schemas.openxmlformats.org/drawingml/2006/main">
+            <a:pPr marL="0" indent="0" algn="ctr">
+              <a:buNone/>
+            </a:pPr>
+            <a:r>
+              <a:rPr sz="1200">
+                <a:solidFill>
+                  <a:srgbClr val="7A8CA3"/>
+                </a:solidFill>
+                <a:latin typeface="Microsoft JhengHei"/>
+                <a:ea typeface="Microsoft JhengHei"/>
+                <a:cs typeface="Microsoft JhengHei"/>
+              </a:rPr>
+              <a:t>7月</a:t>
+            </a:r>
+            <a:endParaRPr sz="1200"/>
+          </a:p>
+        </p:txBody>
+      </p:sp>
+      <p:sp>
+        <p:nvSpPr>
+          <p:cNvPr id="12" name="Text 10">
+            <a:extLst xmlns:a="http://schemas.openxmlformats.org/drawingml/2006/main">
+              <a:ext uri="{FF2B5EF4-FFF2-40B4-BE49-F238E27FC236}">
+                <a16:creationId xmlns:a16="http://schemas.microsoft.com/office/drawing/2014/main" id="{3DF6BD7C-6AF6-411A-B983-A925B6CBC87D}"/>
+              </a:ext>
+            </a:extLst>
+          </p:cNvPr>
+          <p:cNvSpPr>
+            <a:spLocks xmlns:a="http://schemas.openxmlformats.org/drawingml/2006/main" noGrp="1"/>
+          </p:cNvSpPr>
+          <p:nvPr/>
+        </p:nvSpPr>
+        <p:spPr>
+          <a:xfrm xmlns:a="http://schemas.openxmlformats.org/drawingml/2006/main">
+            <a:off x="6094476" y="1783080"/>
+            <a:ext cx="893826" cy="274320"/>
+          </a:xfrm>
+          <a:prstGeom xmlns:a="http://schemas.openxmlformats.org/drawingml/2006/main" prst="rect">
+            <a:avLst/>
+          </a:prstGeom>
+          <a:noFill xmlns:a="http://schemas.openxmlformats.org/drawingml/2006/main"/>
+        </p:spPr>
+        <p:txBody>
+          <a:bodyPr xmlns:a="http://schemas.openxmlformats.org/drawingml/2006/main" wrap="square" lIns="0" tIns="0" rIns="0" bIns="0" anchor="ctr"/>
+          <a:lstStyle xmlns:a="http://schemas.openxmlformats.org/drawingml/2006/main"/>
+          <a:p xmlns:a="http://schemas.openxmlformats.org/drawingml/2006/main">
+            <a:pPr marL="0" indent="0" algn="ctr">
+              <a:buNone/>
+            </a:pPr>
+            <a:r>
+              <a:rPr sz="1200">
+                <a:solidFill>
+                  <a:srgbClr val="7A8CA3"/>
+                </a:solidFill>
+                <a:latin typeface="Microsoft JhengHei"/>
+                <a:ea typeface="Microsoft JhengHei"/>
+                <a:cs typeface="Microsoft JhengHei"/>
+              </a:rPr>
+              <a:t>8月</a:t>
+            </a:r>
+            <a:endParaRPr sz="1200"/>
+          </a:p>
+        </p:txBody>
+      </p:sp>
+      <p:sp>
+        <p:nvSpPr>
+          <p:cNvPr id="13" name="Text 11">
+            <a:extLst xmlns:a="http://schemas.openxmlformats.org/drawingml/2006/main">
+              <a:ext uri="{FF2B5EF4-FFF2-40B4-BE49-F238E27FC236}">
+                <a16:creationId xmlns:a16="http://schemas.microsoft.com/office/drawing/2014/main" id="{C1B3BC42-EBF2-463E-BDC3-DF66A67666CB}"/>
+              </a:ext>
+            </a:extLst>
+          </p:cNvPr>
+          <p:cNvSpPr>
+            <a:spLocks xmlns:a="http://schemas.openxmlformats.org/drawingml/2006/main" noGrp="1"/>
+          </p:cNvSpPr>
+          <p:nvPr/>
+        </p:nvSpPr>
+        <p:spPr>
+          <a:xfrm xmlns:a="http://schemas.openxmlformats.org/drawingml/2006/main">
+            <a:off x="6988302" y="1783080"/>
+            <a:ext cx="893826" cy="274320"/>
+          </a:xfrm>
+          <a:prstGeom xmlns:a="http://schemas.openxmlformats.org/drawingml/2006/main" prst="rect">
+            <a:avLst/>
+          </a:prstGeom>
+          <a:noFill xmlns:a="http://schemas.openxmlformats.org/drawingml/2006/main"/>
+        </p:spPr>
+        <p:txBody>
+          <a:bodyPr xmlns:a="http://schemas.openxmlformats.org/drawingml/2006/main" wrap="square" lIns="0" tIns="0" rIns="0" bIns="0" anchor="ctr"/>
+          <a:lstStyle xmlns:a="http://schemas.openxmlformats.org/drawingml/2006/main"/>
+          <a:p xmlns:a="http://schemas.openxmlformats.org/drawingml/2006/main">
+            <a:pPr marL="0" indent="0" algn="ctr">
+              <a:buNone/>
+            </a:pPr>
+            <a:r>
+              <a:rPr sz="1200">
+                <a:solidFill>
+                  <a:srgbClr val="7A8CA3"/>
+                </a:solidFill>
+                <a:latin typeface="Microsoft JhengHei"/>
+                <a:ea typeface="Microsoft JhengHei"/>
+                <a:cs typeface="Microsoft JhengHei"/>
+              </a:rPr>
+              <a:t>9月</a:t>
+            </a:r>
+            <a:endParaRPr sz="1200"/>
+          </a:p>
+        </p:txBody>
+      </p:sp>
+      <p:sp>
+        <p:nvSpPr>
+          <p:cNvPr id="14" name="Text 12">
+            <a:extLst xmlns:a="http://schemas.openxmlformats.org/drawingml/2006/main">
+              <a:ext uri="{FF2B5EF4-FFF2-40B4-BE49-F238E27FC236}">
+                <a16:creationId xmlns:a16="http://schemas.microsoft.com/office/drawing/2014/main" id="{4173730A-AD3F-4629-8749-02C465222A2F}"/>
+              </a:ext>
+            </a:extLst>
+          </p:cNvPr>
+          <p:cNvSpPr>
+            <a:spLocks xmlns:a="http://schemas.openxmlformats.org/drawingml/2006/main" noGrp="1"/>
+          </p:cNvSpPr>
+          <p:nvPr/>
+        </p:nvSpPr>
+        <p:spPr>
+          <a:xfrm xmlns:a="http://schemas.openxmlformats.org/drawingml/2006/main">
+            <a:off x="7882128" y="1783080"/>
+            <a:ext cx="893826" cy="274320"/>
+          </a:xfrm>
+          <a:prstGeom xmlns:a="http://schemas.openxmlformats.org/drawingml/2006/main" prst="rect">
+            <a:avLst/>
+          </a:prstGeom>
+          <a:noFill xmlns:a="http://schemas.openxmlformats.org/drawingml/2006/main"/>
+        </p:spPr>
+        <p:txBody>
+          <a:bodyPr xmlns:a="http://schemas.openxmlformats.org/drawingml/2006/main" wrap="square" lIns="0" tIns="0" rIns="0" bIns="0" anchor="ctr"/>
+          <a:lstStyle xmlns:a="http://schemas.openxmlformats.org/drawingml/2006/main"/>
+          <a:p xmlns:a="http://schemas.openxmlformats.org/drawingml/2006/main">
+            <a:pPr marL="0" indent="0" algn="ctr">
+              <a:buNone/>
+            </a:pPr>
+            <a:r>
+              <a:rPr sz="1200">
+                <a:solidFill>
+                  <a:srgbClr val="7A8CA3"/>
+                </a:solidFill>
+                <a:latin typeface="Microsoft JhengHei"/>
+                <a:ea typeface="Microsoft JhengHei"/>
+                <a:cs typeface="Microsoft JhengHei"/>
+              </a:rPr>
+              <a:t>10月</a:t>
+            </a:r>
+            <a:endParaRPr sz="1200"/>
+          </a:p>
+        </p:txBody>
+      </p:sp>
+      <p:sp>
+        <p:nvSpPr>
+          <p:cNvPr id="15" name="Text 13">
+            <a:extLst xmlns:a="http://schemas.openxmlformats.org/drawingml/2006/main">
+              <a:ext uri="{FF2B5EF4-FFF2-40B4-BE49-F238E27FC236}">
+                <a16:creationId xmlns:a16="http://schemas.microsoft.com/office/drawing/2014/main" id="{C3727586-7BC0-4AA2-B812-CF674A06E8CD}"/>
+              </a:ext>
+            </a:extLst>
+          </p:cNvPr>
+          <p:cNvSpPr>
+            <a:spLocks xmlns:a="http://schemas.openxmlformats.org/drawingml/2006/main" noGrp="1"/>
+          </p:cNvSpPr>
+          <p:nvPr/>
+        </p:nvSpPr>
+        <p:spPr>
+          <a:xfrm xmlns:a="http://schemas.openxmlformats.org/drawingml/2006/main">
+            <a:off x="8775954" y="1783080"/>
+            <a:ext cx="893826" cy="274320"/>
+          </a:xfrm>
+          <a:prstGeom xmlns:a="http://schemas.openxmlformats.org/drawingml/2006/main" prst="rect">
+            <a:avLst/>
+          </a:prstGeom>
+          <a:noFill xmlns:a="http://schemas.openxmlformats.org/drawingml/2006/main"/>
+        </p:spPr>
+        <p:txBody>
+          <a:bodyPr xmlns:a="http://schemas.openxmlformats.org/drawingml/2006/main" wrap="square" lIns="0" tIns="0" rIns="0" bIns="0" anchor="ctr"/>
+          <a:lstStyle xmlns:a="http://schemas.openxmlformats.org/drawingml/2006/main"/>
+          <a:p xmlns:a="http://schemas.openxmlformats.org/drawingml/2006/main">
+            <a:pPr marL="0" indent="0" algn="ctr">
+              <a:buNone/>
+            </a:pPr>
+            <a:r>
+              <a:rPr sz="1200">
+                <a:solidFill>
+                  <a:srgbClr val="7A8CA3"/>
+                </a:solidFill>
+                <a:latin typeface="Microsoft JhengHei"/>
+                <a:ea typeface="Microsoft JhengHei"/>
+                <a:cs typeface="Microsoft JhengHei"/>
+              </a:rPr>
+              <a:t>11月</a:t>
+            </a:r>
+            <a:endParaRPr sz="1200"/>
+          </a:p>
+        </p:txBody>
+      </p:sp>
+      <p:sp>
+        <p:nvSpPr>
+          <p:cNvPr id="16" name="Text 14">
+            <a:extLst xmlns:a="http://schemas.openxmlformats.org/drawingml/2006/main">
+              <a:ext uri="{FF2B5EF4-FFF2-40B4-BE49-F238E27FC236}">
+                <a16:creationId xmlns:a16="http://schemas.microsoft.com/office/drawing/2014/main" id="{EEB3137D-C277-4BFF-AAFF-55F9FFCCA81D}"/>
+              </a:ext>
+            </a:extLst>
+          </p:cNvPr>
+          <p:cNvSpPr>
+            <a:spLocks xmlns:a="http://schemas.openxmlformats.org/drawingml/2006/main" noGrp="1"/>
+          </p:cNvSpPr>
+          <p:nvPr/>
+        </p:nvSpPr>
+        <p:spPr>
+          <a:xfrm xmlns:a="http://schemas.openxmlformats.org/drawingml/2006/main">
+            <a:off x="9669780" y="1783080"/>
+            <a:ext cx="893826" cy="274320"/>
+          </a:xfrm>
+          <a:prstGeom xmlns:a="http://schemas.openxmlformats.org/drawingml/2006/main" prst="rect">
+            <a:avLst/>
+          </a:prstGeom>
+          <a:noFill xmlns:a="http://schemas.openxmlformats.org/drawingml/2006/main"/>
+        </p:spPr>
+        <p:txBody>
+          <a:bodyPr xmlns:a="http://schemas.openxmlformats.org/drawingml/2006/main" wrap="square" lIns="0" tIns="0" rIns="0" bIns="0" anchor="ctr"/>
+          <a:lstStyle xmlns:a="http://schemas.openxmlformats.org/drawingml/2006/main"/>
+          <a:p xmlns:a="http://schemas.openxmlformats.org/drawingml/2006/main">
+            <a:pPr marL="0" indent="0" algn="ctr">
+              <a:buNone/>
+            </a:pPr>
+            <a:r>
+              <a:rPr sz="1200">
+                <a:solidFill>
+                  <a:srgbClr val="7A8CA3"/>
+                </a:solidFill>
+                <a:latin typeface="Microsoft JhengHei"/>
+                <a:ea typeface="Microsoft JhengHei"/>
+                <a:cs typeface="Microsoft JhengHei"/>
+              </a:rPr>
+              <a:t>12月</a:t>
+            </a:r>
+            <a:endParaRPr sz="1200"/>
+          </a:p>
+        </p:txBody>
+      </p:sp>
+      <p:sp>
+        <p:nvSpPr>
+          <p:cNvPr id="17" name="Text 15">
+            <a:extLst xmlns:a="http://schemas.openxmlformats.org/drawingml/2006/main">
+              <a:ext uri="{FF2B5EF4-FFF2-40B4-BE49-F238E27FC236}">
+                <a16:creationId xmlns:a16="http://schemas.microsoft.com/office/drawing/2014/main" id="{CD6C11BB-135C-4DD4-B084-C935FAAD0E07}"/>
+              </a:ext>
+            </a:extLst>
+          </p:cNvPr>
+          <p:cNvSpPr>
+            <a:spLocks xmlns:a="http://schemas.openxmlformats.org/drawingml/2006/main" noGrp="1"/>
+          </p:cNvSpPr>
+          <p:nvPr/>
+        </p:nvSpPr>
+        <p:spPr>
+          <a:xfrm xmlns:a="http://schemas.openxmlformats.org/drawingml/2006/main">
+            <a:off x="10563606" y="1783080"/>
+            <a:ext cx="893826" cy="274320"/>
+          </a:xfrm>
+          <a:prstGeom xmlns:a="http://schemas.openxmlformats.org/drawingml/2006/main" prst="rect">
+            <a:avLst/>
+          </a:prstGeom>
+          <a:noFill xmlns:a="http://schemas.openxmlformats.org/drawingml/2006/main"/>
+        </p:spPr>
+        <p:txBody>
+          <a:bodyPr xmlns:a="http://schemas.openxmlformats.org/drawingml/2006/main" wrap="square" lIns="0" tIns="0" rIns="0" bIns="0" anchor="ctr"/>
+          <a:lstStyle xmlns:a="http://schemas.openxmlformats.org/drawingml/2006/main"/>
+          <a:p xmlns:a="http://schemas.openxmlformats.org/drawingml/2006/main">
+            <a:pPr marL="0" indent="0" algn="ctr">
+              <a:buNone/>
+            </a:pPr>
+            <a:r>
+              <a:rPr sz="1200">
+                <a:solidFill>
+                  <a:srgbClr val="7A8CA3"/>
+                </a:solidFill>
+                <a:latin typeface="Microsoft JhengHei"/>
+                <a:ea typeface="Microsoft JhengHei"/>
+                <a:cs typeface="Microsoft JhengHei"/>
+              </a:rPr>
+              <a:t>116/1</a:t>
+            </a:r>
+            <a:endParaRPr sz="1200"/>
+          </a:p>
+        </p:txBody>
+      </p:sp>
+      <p:sp>
+        <p:nvSpPr>
+          <p:cNvPr id="18" name="Shape 16">
+            <a:extLst xmlns:a="http://schemas.openxmlformats.org/drawingml/2006/main">
+              <a:ext uri="{FF2B5EF4-FFF2-40B4-BE49-F238E27FC236}">
+                <a16:creationId xmlns:a16="http://schemas.microsoft.com/office/drawing/2014/main" id="{2CA6B60B-938D-4823-BCC2-411DD7C22F02}"/>
+              </a:ext>
+            </a:extLst>
+          </p:cNvPr>
+          <p:cNvSpPr>
+            <a:spLocks xmlns:a="http://schemas.openxmlformats.org/drawingml/2006/main" noGrp="1"/>
+          </p:cNvSpPr>
+          <p:nvPr/>
+        </p:nvSpPr>
+        <p:spPr>
+          <a:xfrm xmlns:a="http://schemas.openxmlformats.org/drawingml/2006/main">
+            <a:off x="758952" y="2112264"/>
+            <a:ext cx="1285875" cy="384048"/>
+          </a:xfrm>
+          <a:prstGeom xmlns:a="http://schemas.openxmlformats.org/drawingml/2006/main" prst="roundRect">
+            <a:avLst>
+              <a:gd name="adj" fmla="val 23810"/>
+            </a:avLst>
+          </a:prstGeom>
+          <a:solidFill xmlns:a="http://schemas.openxmlformats.org/drawingml/2006/main">
+            <a:srgbClr val="EDF2F8"/>
+          </a:solidFill>
+          <a:ln xmlns:a="http://schemas.openxmlformats.org/drawingml/2006/main" w="12700">
+            <a:solidFill>
+              <a:srgbClr val="D3DEEA"/>
+            </a:solidFill>
+            <a:prstDash val="solid"/>
+          </a:ln>
+        </p:spPr>
+        <p:txBody xmlns:a="http://schemas.openxmlformats.org/drawingml/2006/main">
+          <a:bodyPr/>
+          <a:p/>
+        </p:txBody>
+      </p:sp>
+      <p:sp>
+        <p:nvSpPr>
+          <p:cNvPr id="19" name="Text 17">
+            <a:extLst xmlns:a="http://schemas.openxmlformats.org/drawingml/2006/main">
+              <a:ext uri="{FF2B5EF4-FFF2-40B4-BE49-F238E27FC236}">
+                <a16:creationId xmlns:a16="http://schemas.microsoft.com/office/drawing/2014/main" id="{A6670DA9-0465-461E-AA7C-02D55AB305EA}"/>
+              </a:ext>
+            </a:extLst>
+          </p:cNvPr>
+          <p:cNvSpPr>
+            <a:spLocks xmlns:a="http://schemas.openxmlformats.org/drawingml/2006/main" noGrp="1"/>
+          </p:cNvSpPr>
+          <p:nvPr/>
+        </p:nvSpPr>
+        <p:spPr>
+          <a:xfrm xmlns:a="http://schemas.openxmlformats.org/drawingml/2006/main">
+            <a:off x="731520" y="2112264"/>
+            <a:ext cx="1340739" cy="384048"/>
+          </a:xfrm>
+          <a:prstGeom xmlns:a="http://schemas.openxmlformats.org/drawingml/2006/main" prst="rect">
+            <a:avLst/>
+          </a:prstGeom>
+          <a:noFill xmlns:a="http://schemas.openxmlformats.org/drawingml/2006/main"/>
+        </p:spPr>
+        <p:txBody>
+          <a:bodyPr xmlns:a="http://schemas.openxmlformats.org/drawingml/2006/main" wrap="square" lIns="0" tIns="0" rIns="0" bIns="0" anchor="ctr"/>
+          <a:lstStyle xmlns:a="http://schemas.openxmlformats.org/drawingml/2006/main"/>
+          <a:p xmlns:a="http://schemas.openxmlformats.org/drawingml/2006/main">
+            <a:pPr marL="0" indent="0" algn="ctr">
+              <a:buNone/>
+            </a:pPr>
+            <a:r>
+              <a:rPr sz="1200" b="1">
+                <a:solidFill>
+                  <a:srgbClr val="14243A"/>
+                </a:solidFill>
+                <a:latin typeface="Microsoft JhengHei"/>
+                <a:ea typeface="Microsoft JhengHei"/>
+                <a:cs typeface="Microsoft JhengHei"/>
+              </a:rPr>
+              <a:t>起始</a:t>
+            </a:r>
+            <a:endParaRPr sz="1200"/>
+          </a:p>
+        </p:txBody>
+      </p:sp>
+      <p:sp>
+        <p:nvSpPr>
+          <p:cNvPr id="20" name="Shape 18">
+            <a:extLst xmlns:a="http://schemas.openxmlformats.org/drawingml/2006/main">
+              <a:ext uri="{FF2B5EF4-FFF2-40B4-BE49-F238E27FC236}">
+                <a16:creationId xmlns:a16="http://schemas.microsoft.com/office/drawing/2014/main" id="{167B7FF5-F52F-4975-B88F-F9F8D17EA6DF}"/>
+              </a:ext>
+            </a:extLst>
+          </p:cNvPr>
+          <p:cNvSpPr>
+            <a:spLocks xmlns:a="http://schemas.openxmlformats.org/drawingml/2006/main" noGrp="1"/>
+          </p:cNvSpPr>
+          <p:nvPr/>
+        </p:nvSpPr>
+        <p:spPr>
+          <a:xfrm xmlns:a="http://schemas.openxmlformats.org/drawingml/2006/main">
+            <a:off x="2099691" y="2112264"/>
+            <a:ext cx="1554023" cy="384048"/>
+          </a:xfrm>
+          <a:prstGeom xmlns:a="http://schemas.openxmlformats.org/drawingml/2006/main" prst="roundRect">
+            <a:avLst>
+              <a:gd name="adj" fmla="val 23810"/>
+            </a:avLst>
+          </a:prstGeom>
+          <a:solidFill xmlns:a="http://schemas.openxmlformats.org/drawingml/2006/main">
+            <a:srgbClr val="EDF2F8"/>
+          </a:solidFill>
+          <a:ln xmlns:a="http://schemas.openxmlformats.org/drawingml/2006/main" w="12700">
+            <a:solidFill>
+              <a:srgbClr val="D3DEEA"/>
+            </a:solidFill>
+            <a:prstDash val="solid"/>
+          </a:ln>
+        </p:spPr>
+        <p:txBody xmlns:a="http://schemas.openxmlformats.org/drawingml/2006/main">
+          <a:bodyPr/>
+          <a:p/>
+        </p:txBody>
+      </p:sp>
+      <p:sp>
+        <p:nvSpPr>
+          <p:cNvPr id="21" name="Text 19">
+            <a:extLst xmlns:a="http://schemas.openxmlformats.org/drawingml/2006/main">
+              <a:ext uri="{FF2B5EF4-FFF2-40B4-BE49-F238E27FC236}">
+                <a16:creationId xmlns:a16="http://schemas.microsoft.com/office/drawing/2014/main" id="{DCCDDD2A-5E57-4149-A269-2104A0A45C51}"/>
+              </a:ext>
+            </a:extLst>
+          </p:cNvPr>
+          <p:cNvSpPr>
+            <a:spLocks xmlns:a="http://schemas.openxmlformats.org/drawingml/2006/main" noGrp="1"/>
+          </p:cNvSpPr>
+          <p:nvPr/>
+        </p:nvSpPr>
+        <p:spPr>
+          <a:xfrm xmlns:a="http://schemas.openxmlformats.org/drawingml/2006/main">
+            <a:off x="2072259" y="2112264"/>
+            <a:ext cx="1608887" cy="384048"/>
+          </a:xfrm>
+          <a:prstGeom xmlns:a="http://schemas.openxmlformats.org/drawingml/2006/main" prst="rect">
+            <a:avLst/>
+          </a:prstGeom>
+          <a:noFill xmlns:a="http://schemas.openxmlformats.org/drawingml/2006/main"/>
+        </p:spPr>
+        <p:txBody>
+          <a:bodyPr xmlns:a="http://schemas.openxmlformats.org/drawingml/2006/main" wrap="square" lIns="0" tIns="0" rIns="0" bIns="0" anchor="ctr"/>
+          <a:lstStyle xmlns:a="http://schemas.openxmlformats.org/drawingml/2006/main"/>
+          <a:p xmlns:a="http://schemas.openxmlformats.org/drawingml/2006/main">
+            <a:pPr marL="0" indent="0" algn="ctr">
+              <a:buNone/>
+            </a:pPr>
+            <a:r>
+              <a:rPr sz="1200" b="1">
+                <a:solidFill>
+                  <a:srgbClr val="14243A"/>
+                </a:solidFill>
+                <a:latin typeface="Microsoft JhengHei"/>
+                <a:ea typeface="Microsoft JhengHei"/>
+                <a:cs typeface="Microsoft JhengHei"/>
+              </a:rPr>
+              <a:t>精化</a:t>
+            </a:r>
+            <a:endParaRPr sz="1200"/>
+          </a:p>
+        </p:txBody>
+      </p:sp>
+      <p:sp>
+        <p:nvSpPr>
+          <p:cNvPr id="22" name="Shape 20">
+            <a:extLst xmlns:a="http://schemas.openxmlformats.org/drawingml/2006/main">
+              <a:ext uri="{FF2B5EF4-FFF2-40B4-BE49-F238E27FC236}">
+                <a16:creationId xmlns:a16="http://schemas.microsoft.com/office/drawing/2014/main" id="{60ACEE37-122A-4799-BB96-380889122AEF}"/>
+              </a:ext>
+            </a:extLst>
+          </p:cNvPr>
+          <p:cNvSpPr>
+            <a:spLocks xmlns:a="http://schemas.openxmlformats.org/drawingml/2006/main" noGrp="1"/>
+          </p:cNvSpPr>
+          <p:nvPr/>
+        </p:nvSpPr>
+        <p:spPr>
+          <a:xfrm xmlns:a="http://schemas.openxmlformats.org/drawingml/2006/main">
+            <a:off x="3708578" y="2112264"/>
+            <a:ext cx="4414266" cy="384048"/>
+          </a:xfrm>
+          <a:prstGeom xmlns:a="http://schemas.openxmlformats.org/drawingml/2006/main" prst="roundRect">
+            <a:avLst>
+              <a:gd name="adj" fmla="val 23810"/>
+            </a:avLst>
+          </a:prstGeom>
+          <a:solidFill xmlns:a="http://schemas.openxmlformats.org/drawingml/2006/main">
+            <a:srgbClr val="E2EDF9"/>
+          </a:solidFill>
+          <a:ln xmlns:a="http://schemas.openxmlformats.org/drawingml/2006/main" w="12700">
+            <a:solidFill>
+              <a:srgbClr val="E2EDF9"/>
+            </a:solidFill>
+            <a:prstDash val="solid"/>
+          </a:ln>
+        </p:spPr>
+        <p:txBody xmlns:a="http://schemas.openxmlformats.org/drawingml/2006/main">
+          <a:bodyPr/>
+          <a:p/>
+        </p:txBody>
+      </p:sp>
+      <p:sp>
+        <p:nvSpPr>
+          <p:cNvPr id="23" name="Text 21">
+            <a:extLst xmlns:a="http://schemas.openxmlformats.org/drawingml/2006/main">
+              <a:ext uri="{FF2B5EF4-FFF2-40B4-BE49-F238E27FC236}">
+                <a16:creationId xmlns:a16="http://schemas.microsoft.com/office/drawing/2014/main" id="{66149992-F0B7-4DEC-97E1-9E72FAC929B6}"/>
+              </a:ext>
+            </a:extLst>
+          </p:cNvPr>
+          <p:cNvSpPr>
+            <a:spLocks xmlns:a="http://schemas.openxmlformats.org/drawingml/2006/main" noGrp="1"/>
+          </p:cNvSpPr>
+          <p:nvPr/>
+        </p:nvSpPr>
+        <p:spPr>
+          <a:xfrm xmlns:a="http://schemas.openxmlformats.org/drawingml/2006/main">
+            <a:off x="3681146" y="2112264"/>
+            <a:ext cx="4469130" cy="384048"/>
+          </a:xfrm>
+          <a:prstGeom xmlns:a="http://schemas.openxmlformats.org/drawingml/2006/main" prst="rect">
+            <a:avLst/>
+          </a:prstGeom>
+          <a:noFill xmlns:a="http://schemas.openxmlformats.org/drawingml/2006/main"/>
+        </p:spPr>
+        <p:txBody>
+          <a:bodyPr xmlns:a="http://schemas.openxmlformats.org/drawingml/2006/main" wrap="square" lIns="0" tIns="0" rIns="0" bIns="0" anchor="ctr"/>
+          <a:lstStyle xmlns:a="http://schemas.openxmlformats.org/drawingml/2006/main"/>
+          <a:p xmlns:a="http://schemas.openxmlformats.org/drawingml/2006/main">
+            <a:pPr marL="0" indent="0" algn="ctr">
+              <a:buNone/>
+            </a:pPr>
+            <a:r>
+              <a:rPr sz="1200" b="1">
+                <a:solidFill>
+                  <a:srgbClr val="14243A"/>
+                </a:solidFill>
+                <a:latin typeface="Microsoft JhengHei"/>
+                <a:ea typeface="Microsoft JhengHei"/>
+                <a:cs typeface="Microsoft JhengHei"/>
+              </a:rPr>
+              <a:t>建構</a:t>
+            </a:r>
+            <a:endParaRPr sz="1200"/>
+          </a:p>
+        </p:txBody>
+      </p:sp>
+      <p:sp>
+        <p:nvSpPr>
+          <p:cNvPr id="24" name="Shape 22">
+            <a:extLst xmlns:a="http://schemas.openxmlformats.org/drawingml/2006/main">
+              <a:ext uri="{FF2B5EF4-FFF2-40B4-BE49-F238E27FC236}">
+                <a16:creationId xmlns:a16="http://schemas.microsoft.com/office/drawing/2014/main" id="{1E2DD23C-1F13-4B52-A47E-C4E8B7CD69D4}"/>
+              </a:ext>
+            </a:extLst>
+          </p:cNvPr>
+          <p:cNvSpPr>
+            <a:spLocks xmlns:a="http://schemas.openxmlformats.org/drawingml/2006/main" noGrp="1"/>
+          </p:cNvSpPr>
+          <p:nvPr/>
+        </p:nvSpPr>
+        <p:spPr>
+          <a:xfrm xmlns:a="http://schemas.openxmlformats.org/drawingml/2006/main">
+            <a:off x="8177708" y="2112264"/>
+            <a:ext cx="3252292" cy="384048"/>
+          </a:xfrm>
+          <a:prstGeom xmlns:a="http://schemas.openxmlformats.org/drawingml/2006/main" prst="roundRect">
+            <a:avLst>
+              <a:gd name="adj" fmla="val 23810"/>
+            </a:avLst>
+          </a:prstGeom>
+          <a:solidFill xmlns:a="http://schemas.openxmlformats.org/drawingml/2006/main">
+            <a:srgbClr val="FDEEDF"/>
+          </a:solidFill>
+          <a:ln xmlns:a="http://schemas.openxmlformats.org/drawingml/2006/main" w="12700">
+            <a:solidFill>
+              <a:srgbClr val="D46A12"/>
+            </a:solidFill>
+            <a:prstDash val="solid"/>
+          </a:ln>
+        </p:spPr>
+        <p:txBody xmlns:a="http://schemas.openxmlformats.org/drawingml/2006/main">
+          <a:bodyPr/>
+          <a:p/>
+        </p:txBody>
+      </p:sp>
+      <p:sp>
+        <p:nvSpPr>
+          <p:cNvPr id="25" name="Text 23">
+            <a:extLst xmlns:a="http://schemas.openxmlformats.org/drawingml/2006/main">
+              <a:ext uri="{FF2B5EF4-FFF2-40B4-BE49-F238E27FC236}">
+                <a16:creationId xmlns:a16="http://schemas.microsoft.com/office/drawing/2014/main" id="{AAAA81B3-D9E4-41F5-A3B7-43021EAC0547}"/>
+              </a:ext>
+            </a:extLst>
+          </p:cNvPr>
+          <p:cNvSpPr>
+            <a:spLocks xmlns:a="http://schemas.openxmlformats.org/drawingml/2006/main" noGrp="1"/>
+          </p:cNvSpPr>
+          <p:nvPr/>
+        </p:nvSpPr>
+        <p:spPr>
+          <a:xfrm xmlns:a="http://schemas.openxmlformats.org/drawingml/2006/main">
+            <a:off x="8150276" y="2112264"/>
+            <a:ext cx="3307156" cy="384048"/>
+          </a:xfrm>
+          <a:prstGeom xmlns:a="http://schemas.openxmlformats.org/drawingml/2006/main" prst="rect">
+            <a:avLst/>
+          </a:prstGeom>
+          <a:noFill xmlns:a="http://schemas.openxmlformats.org/drawingml/2006/main"/>
+        </p:spPr>
+        <p:txBody>
+          <a:bodyPr xmlns:a="http://schemas.openxmlformats.org/drawingml/2006/main" wrap="square" lIns="0" tIns="0" rIns="0" bIns="0" anchor="ctr"/>
+          <a:lstStyle xmlns:a="http://schemas.openxmlformats.org/drawingml/2006/main"/>
+          <a:p xmlns:a="http://schemas.openxmlformats.org/drawingml/2006/main">
+            <a:pPr marL="0" indent="0" algn="ctr">
+              <a:buNone/>
+            </a:pPr>
+            <a:r>
+              <a:rPr sz="1200" b="1">
+                <a:solidFill>
+                  <a:srgbClr val="14243A"/>
+                </a:solidFill>
+                <a:latin typeface="Microsoft JhengHei"/>
+                <a:ea typeface="Microsoft JhengHei"/>
+                <a:cs typeface="Microsoft JhengHei"/>
+              </a:rPr>
+              <a:t>移轉（進行中）</a:t>
+            </a:r>
+            <a:endParaRPr sz="1200"/>
+          </a:p>
+        </p:txBody>
+      </p:sp>
+      <p:sp>
+        <p:nvSpPr>
+          <p:cNvPr id="26" name="Shape 24">
+            <a:extLst xmlns:a="http://schemas.openxmlformats.org/drawingml/2006/main">
+              <a:ext uri="{FF2B5EF4-FFF2-40B4-BE49-F238E27FC236}">
+                <a16:creationId xmlns:a16="http://schemas.microsoft.com/office/drawing/2014/main" id="{9C78BB86-82BA-44D9-99B4-72053C76AD3E}"/>
+              </a:ext>
+            </a:extLst>
+          </p:cNvPr>
+          <p:cNvSpPr>
+            <a:spLocks xmlns:a="http://schemas.openxmlformats.org/drawingml/2006/main" noGrp="1"/>
+          </p:cNvSpPr>
+          <p:nvPr/>
+        </p:nvSpPr>
+        <p:spPr>
+          <a:xfrm xmlns:a="http://schemas.openxmlformats.org/drawingml/2006/main">
+            <a:off x="4251343" y="2587752"/>
+            <a:ext cx="164592" cy="164592"/>
+          </a:xfrm>
+          <a:prstGeom xmlns:a="http://schemas.openxmlformats.org/drawingml/2006/main" prst="ellipse">
+            <a:avLst/>
+          </a:prstGeom>
+          <a:solidFill xmlns:a="http://schemas.openxmlformats.org/drawingml/2006/main">
+            <a:srgbClr val="D46A12"/>
+          </a:solidFill>
+          <a:ln xmlns:a="http://schemas.openxmlformats.org/drawingml/2006/main" w="12700">
+            <a:solidFill>
+              <a:srgbClr val="D46A12"/>
+            </a:solidFill>
+            <a:prstDash val="solid"/>
+          </a:ln>
+        </p:spPr>
+        <p:txBody xmlns:a="http://schemas.openxmlformats.org/drawingml/2006/main">
+          <a:bodyPr/>
+          <a:p/>
+        </p:txBody>
+      </p:sp>
+      <p:sp>
+        <p:nvSpPr>
+          <p:cNvPr id="27" name="Text 25">
+            <a:extLst xmlns:a="http://schemas.openxmlformats.org/drawingml/2006/main">
+              <a:ext uri="{FF2B5EF4-FFF2-40B4-BE49-F238E27FC236}">
+                <a16:creationId xmlns:a16="http://schemas.microsoft.com/office/drawing/2014/main" id="{1831BA3F-DA7A-4203-9754-4624537A0E50}"/>
+              </a:ext>
+            </a:extLst>
+          </p:cNvPr>
+          <p:cNvSpPr>
+            <a:spLocks xmlns:a="http://schemas.openxmlformats.org/drawingml/2006/main" noGrp="1"/>
+          </p:cNvSpPr>
+          <p:nvPr/>
+        </p:nvSpPr>
+        <p:spPr>
+          <a:xfrm xmlns:a="http://schemas.openxmlformats.org/drawingml/2006/main">
+            <a:off x="3784999" y="2788920"/>
+            <a:ext cx="1097280" cy="457200"/>
+          </a:xfrm>
+          <a:prstGeom xmlns:a="http://schemas.openxmlformats.org/drawingml/2006/main" prst="rect">
+            <a:avLst/>
+          </a:prstGeom>
+          <a:noFill xmlns:a="http://schemas.openxmlformats.org/drawingml/2006/main"/>
+        </p:spPr>
+        <p:txBody>
+          <a:bodyPr xmlns:a="http://schemas.openxmlformats.org/drawingml/2006/main" wrap="square" lIns="0" tIns="0" rIns="0" bIns="0" anchor="t"/>
+          <a:lstStyle xmlns:a="http://schemas.openxmlformats.org/drawingml/2006/main"/>
+          <a:p xmlns:a="http://schemas.openxmlformats.org/drawingml/2006/main">
+            <a:pPr marL="0" indent="0" algn="ctr">
+              <a:buNone/>
+            </a:pPr>
+            <a:r>
+              <a:rPr sz="1200">
+                <a:solidFill>
+                  <a:srgbClr val="3F546C"/>
+                </a:solidFill>
+                <a:latin typeface="Microsoft JhengHei"/>
+                <a:ea typeface="Microsoft JhengHei"/>
+                <a:cs typeface="Microsoft JhengHei"/>
+              </a:rPr>
+              <a:t>6/2</a:t>
+            </a:r>
+            <a:endParaRPr sz="1200"/>
+          </a:p>
+          <a:p xmlns:a="http://schemas.openxmlformats.org/drawingml/2006/main">
+            <a:pPr marL="0" indent="0" algn="ctr">
+              <a:buNone/>
+            </a:pPr>
+            <a:r>
+              <a:rPr sz="1200">
+                <a:solidFill>
+                  <a:srgbClr val="3F546C"/>
+                </a:solidFill>
+                <a:latin typeface="Microsoft JhengHei"/>
+                <a:ea typeface="Microsoft JhengHei"/>
+                <a:cs typeface="Microsoft JhengHei"/>
+              </a:rPr>
+              <a:t>初審</a:t>
+            </a:r>
+            <a:endParaRPr sz="1200"/>
+          </a:p>
+        </p:txBody>
+      </p:sp>
+      <p:sp>
+        <p:nvSpPr>
+          <p:cNvPr id="28" name="Shape 26">
+            <a:extLst xmlns:a="http://schemas.openxmlformats.org/drawingml/2006/main">
+              <a:ext uri="{FF2B5EF4-FFF2-40B4-BE49-F238E27FC236}">
+                <a16:creationId xmlns:a16="http://schemas.microsoft.com/office/drawing/2014/main" id="{DA486A40-9025-445C-BF06-E4A57A548291}"/>
+              </a:ext>
+            </a:extLst>
+          </p:cNvPr>
+          <p:cNvSpPr>
+            <a:spLocks xmlns:a="http://schemas.openxmlformats.org/drawingml/2006/main" noGrp="1"/>
+          </p:cNvSpPr>
+          <p:nvPr/>
+        </p:nvSpPr>
+        <p:spPr>
+          <a:xfrm xmlns:a="http://schemas.openxmlformats.org/drawingml/2006/main">
+            <a:off x="8157362" y="2587752"/>
+            <a:ext cx="164592" cy="164592"/>
+          </a:xfrm>
+          <a:prstGeom xmlns:a="http://schemas.openxmlformats.org/drawingml/2006/main" prst="ellipse">
+            <a:avLst/>
+          </a:prstGeom>
+          <a:solidFill xmlns:a="http://schemas.openxmlformats.org/drawingml/2006/main">
+            <a:srgbClr val="D46A12"/>
+          </a:solidFill>
+          <a:ln xmlns:a="http://schemas.openxmlformats.org/drawingml/2006/main" w="12700">
+            <a:solidFill>
+              <a:srgbClr val="D46A12"/>
+            </a:solidFill>
+            <a:prstDash val="solid"/>
+          </a:ln>
+        </p:spPr>
+        <p:txBody xmlns:a="http://schemas.openxmlformats.org/drawingml/2006/main">
+          <a:bodyPr/>
+          <a:p/>
+        </p:txBody>
+      </p:sp>
+      <p:sp>
+        <p:nvSpPr>
+          <p:cNvPr id="29" name="Text 27">
+            <a:extLst xmlns:a="http://schemas.openxmlformats.org/drawingml/2006/main">
+              <a:ext uri="{FF2B5EF4-FFF2-40B4-BE49-F238E27FC236}">
+                <a16:creationId xmlns:a16="http://schemas.microsoft.com/office/drawing/2014/main" id="{C906C453-B41D-4EDF-8F56-CF584557532A}"/>
+              </a:ext>
+            </a:extLst>
+          </p:cNvPr>
+          <p:cNvSpPr>
+            <a:spLocks xmlns:a="http://schemas.openxmlformats.org/drawingml/2006/main" noGrp="1"/>
+          </p:cNvSpPr>
+          <p:nvPr/>
+        </p:nvSpPr>
+        <p:spPr>
+          <a:xfrm xmlns:a="http://schemas.openxmlformats.org/drawingml/2006/main">
+            <a:off x="7691018" y="2788920"/>
+            <a:ext cx="1097280" cy="457200"/>
+          </a:xfrm>
+          <a:prstGeom xmlns:a="http://schemas.openxmlformats.org/drawingml/2006/main" prst="rect">
+            <a:avLst/>
+          </a:prstGeom>
+          <a:noFill xmlns:a="http://schemas.openxmlformats.org/drawingml/2006/main"/>
+        </p:spPr>
+        <p:txBody>
+          <a:bodyPr xmlns:a="http://schemas.openxmlformats.org/drawingml/2006/main" wrap="square" lIns="0" tIns="0" rIns="0" bIns="0" anchor="t"/>
+          <a:lstStyle xmlns:a="http://schemas.openxmlformats.org/drawingml/2006/main"/>
+          <a:p xmlns:a="http://schemas.openxmlformats.org/drawingml/2006/main">
+            <a:pPr marL="0" indent="0" algn="ctr">
+              <a:buNone/>
+            </a:pPr>
+            <a:r>
+              <a:rPr sz="1200">
+                <a:solidFill>
+                  <a:srgbClr val="3F546C"/>
+                </a:solidFill>
+                <a:latin typeface="Microsoft JhengHei"/>
+                <a:ea typeface="Microsoft JhengHei"/>
+                <a:cs typeface="Microsoft JhengHei"/>
+              </a:rPr>
+              <a:t>10/13</a:t>
+            </a:r>
+            <a:endParaRPr sz="1200"/>
+          </a:p>
+          <a:p xmlns:a="http://schemas.openxmlformats.org/drawingml/2006/main">
+            <a:pPr marL="0" indent="0" algn="ctr">
+              <a:buNone/>
+            </a:pPr>
+            <a:r>
+              <a:rPr sz="1200">
+                <a:solidFill>
+                  <a:srgbClr val="3F546C"/>
+                </a:solidFill>
+                <a:latin typeface="Microsoft JhengHei"/>
+                <a:ea typeface="Microsoft JhengHei"/>
+                <a:cs typeface="Microsoft JhengHei"/>
+              </a:rPr>
+              <a:t>複審繳件</a:t>
+            </a:r>
+            <a:endParaRPr sz="1200"/>
+          </a:p>
+        </p:txBody>
+      </p:sp>
+      <p:sp>
+        <p:nvSpPr>
+          <p:cNvPr id="30" name="Shape 28">
+            <a:extLst xmlns:a="http://schemas.openxmlformats.org/drawingml/2006/main">
+              <a:ext uri="{FF2B5EF4-FFF2-40B4-BE49-F238E27FC236}">
+                <a16:creationId xmlns:a16="http://schemas.microsoft.com/office/drawing/2014/main" id="{F3C9906E-D32A-4BA9-A3B4-BEC3936871CA}"/>
+              </a:ext>
+            </a:extLst>
+          </p:cNvPr>
+          <p:cNvSpPr>
+            <a:spLocks xmlns:a="http://schemas.openxmlformats.org/drawingml/2006/main" noGrp="1"/>
+          </p:cNvSpPr>
+          <p:nvPr/>
+        </p:nvSpPr>
+        <p:spPr>
+          <a:xfrm xmlns:a="http://schemas.openxmlformats.org/drawingml/2006/main">
+            <a:off x="9408719" y="2587752"/>
+            <a:ext cx="164592" cy="164592"/>
+          </a:xfrm>
+          <a:prstGeom xmlns:a="http://schemas.openxmlformats.org/drawingml/2006/main" prst="ellipse">
+            <a:avLst/>
+          </a:prstGeom>
+          <a:solidFill xmlns:a="http://schemas.openxmlformats.org/drawingml/2006/main">
+            <a:srgbClr val="D46A12"/>
+          </a:solidFill>
+          <a:ln xmlns:a="http://schemas.openxmlformats.org/drawingml/2006/main" w="12700">
+            <a:solidFill>
+              <a:srgbClr val="D46A12"/>
+            </a:solidFill>
+            <a:prstDash val="solid"/>
+          </a:ln>
+        </p:spPr>
+        <p:txBody xmlns:a="http://schemas.openxmlformats.org/drawingml/2006/main">
+          <a:bodyPr/>
+          <a:p/>
+        </p:txBody>
+      </p:sp>
+      <p:sp>
+        <p:nvSpPr>
+          <p:cNvPr id="31" name="Text 29">
+            <a:extLst xmlns:a="http://schemas.openxmlformats.org/drawingml/2006/main">
+              <a:ext uri="{FF2B5EF4-FFF2-40B4-BE49-F238E27FC236}">
+                <a16:creationId xmlns:a16="http://schemas.microsoft.com/office/drawing/2014/main" id="{1BC57DE1-F6A8-4D40-9146-3FD4D0BBF4D2}"/>
+              </a:ext>
+            </a:extLst>
+          </p:cNvPr>
+          <p:cNvSpPr>
+            <a:spLocks xmlns:a="http://schemas.openxmlformats.org/drawingml/2006/main" noGrp="1"/>
+          </p:cNvSpPr>
+          <p:nvPr/>
+        </p:nvSpPr>
+        <p:spPr>
+          <a:xfrm xmlns:a="http://schemas.openxmlformats.org/drawingml/2006/main">
+            <a:off x="8942375" y="2788920"/>
+            <a:ext cx="1097280" cy="457200"/>
+          </a:xfrm>
+          <a:prstGeom xmlns:a="http://schemas.openxmlformats.org/drawingml/2006/main" prst="rect">
+            <a:avLst/>
+          </a:prstGeom>
+          <a:noFill xmlns:a="http://schemas.openxmlformats.org/drawingml/2006/main"/>
+        </p:spPr>
+        <p:txBody>
+          <a:bodyPr xmlns:a="http://schemas.openxmlformats.org/drawingml/2006/main" wrap="square" lIns="0" tIns="0" rIns="0" bIns="0" anchor="t"/>
+          <a:lstStyle xmlns:a="http://schemas.openxmlformats.org/drawingml/2006/main"/>
+          <a:p xmlns:a="http://schemas.openxmlformats.org/drawingml/2006/main">
+            <a:pPr marL="0" indent="0" algn="ctr">
+              <a:buNone/>
+            </a:pPr>
+            <a:r>
+              <a:rPr sz="1200">
+                <a:solidFill>
+                  <a:srgbClr val="3F546C"/>
+                </a:solidFill>
+                <a:latin typeface="Microsoft JhengHei"/>
+                <a:ea typeface="Microsoft JhengHei"/>
+                <a:cs typeface="Microsoft JhengHei"/>
+              </a:rPr>
+              <a:t>11/25</a:t>
+            </a:r>
+            <a:endParaRPr sz="1200"/>
+          </a:p>
+          <a:p xmlns:a="http://schemas.openxmlformats.org/drawingml/2006/main">
+            <a:pPr marL="0" indent="0" algn="ctr">
+              <a:buNone/>
+            </a:pPr>
+            <a:r>
+              <a:rPr sz="1200">
+                <a:solidFill>
+                  <a:srgbClr val="3F546C"/>
+                </a:solidFill>
+                <a:latin typeface="Microsoft JhengHei"/>
+                <a:ea typeface="Microsoft JhengHei"/>
+                <a:cs typeface="Microsoft JhengHei"/>
+              </a:rPr>
+              <a:t>觀摩展</a:t>
+            </a:r>
+            <a:endParaRPr sz="1200"/>
+          </a:p>
+        </p:txBody>
+      </p:sp>
+      <p:sp>
+        <p:nvSpPr>
+          <p:cNvPr id="32" name="Shape 30">
+            <a:extLst xmlns:a="http://schemas.openxmlformats.org/drawingml/2006/main">
+              <a:ext uri="{FF2B5EF4-FFF2-40B4-BE49-F238E27FC236}">
+                <a16:creationId xmlns:a16="http://schemas.microsoft.com/office/drawing/2014/main" id="{672DB685-AB9D-4363-B773-0D7CF409303D}"/>
+              </a:ext>
+            </a:extLst>
+          </p:cNvPr>
+          <p:cNvSpPr>
+            <a:spLocks xmlns:a="http://schemas.openxmlformats.org/drawingml/2006/main" noGrp="1"/>
+          </p:cNvSpPr>
+          <p:nvPr/>
+        </p:nvSpPr>
+        <p:spPr>
+          <a:xfrm xmlns:a="http://schemas.openxmlformats.org/drawingml/2006/main">
+            <a:off x="10436619" y="2587752"/>
+            <a:ext cx="164592" cy="164592"/>
+          </a:xfrm>
+          <a:prstGeom xmlns:a="http://schemas.openxmlformats.org/drawingml/2006/main" prst="ellipse">
+            <a:avLst/>
+          </a:prstGeom>
+          <a:solidFill xmlns:a="http://schemas.openxmlformats.org/drawingml/2006/main">
+            <a:srgbClr val="D46A12"/>
+          </a:solidFill>
+          <a:ln xmlns:a="http://schemas.openxmlformats.org/drawingml/2006/main" w="12700">
+            <a:solidFill>
+              <a:srgbClr val="D46A12"/>
+            </a:solidFill>
+            <a:prstDash val="solid"/>
+          </a:ln>
+        </p:spPr>
+        <p:txBody xmlns:a="http://schemas.openxmlformats.org/drawingml/2006/main">
+          <a:bodyPr/>
+          <a:p/>
+        </p:txBody>
+      </p:sp>
+      <p:sp>
+        <p:nvSpPr>
+          <p:cNvPr id="33" name="Text 31">
+            <a:extLst xmlns:a="http://schemas.openxmlformats.org/drawingml/2006/main">
+              <a:ext uri="{FF2B5EF4-FFF2-40B4-BE49-F238E27FC236}">
+                <a16:creationId xmlns:a16="http://schemas.microsoft.com/office/drawing/2014/main" id="{A74F7715-C5AD-4AD8-8777-D6C4C57D0D26}"/>
+              </a:ext>
+            </a:extLst>
+          </p:cNvPr>
+          <p:cNvSpPr>
+            <a:spLocks xmlns:a="http://schemas.openxmlformats.org/drawingml/2006/main" noGrp="1"/>
+          </p:cNvSpPr>
+          <p:nvPr/>
+        </p:nvSpPr>
+        <p:spPr>
+          <a:xfrm xmlns:a="http://schemas.openxmlformats.org/drawingml/2006/main">
+            <a:off x="9970275" y="2788920"/>
+            <a:ext cx="1097280" cy="457200"/>
+          </a:xfrm>
+          <a:prstGeom xmlns:a="http://schemas.openxmlformats.org/drawingml/2006/main" prst="rect">
+            <a:avLst/>
+          </a:prstGeom>
+          <a:noFill xmlns:a="http://schemas.openxmlformats.org/drawingml/2006/main"/>
+        </p:spPr>
+        <p:txBody>
+          <a:bodyPr xmlns:a="http://schemas.openxmlformats.org/drawingml/2006/main" wrap="square" lIns="0" tIns="0" rIns="0" bIns="0" anchor="t"/>
+          <a:lstStyle xmlns:a="http://schemas.openxmlformats.org/drawingml/2006/main"/>
+          <a:p xmlns:a="http://schemas.openxmlformats.org/drawingml/2006/main">
+            <a:pPr marL="0" indent="0" algn="ctr">
+              <a:buNone/>
+            </a:pPr>
+            <a:r>
+              <a:rPr sz="1200">
+                <a:solidFill>
+                  <a:srgbClr val="3F546C"/>
+                </a:solidFill>
+                <a:latin typeface="Microsoft JhengHei"/>
+                <a:ea typeface="Microsoft JhengHei"/>
+                <a:cs typeface="Microsoft JhengHei"/>
+              </a:rPr>
+              <a:t>12/29</a:t>
+            </a:r>
+            <a:endParaRPr sz="1200"/>
+          </a:p>
+          <a:p xmlns:a="http://schemas.openxmlformats.org/drawingml/2006/main">
+            <a:pPr marL="0" indent="0" algn="ctr">
+              <a:buNone/>
+            </a:pPr>
+            <a:r>
+              <a:rPr sz="1200">
+                <a:solidFill>
+                  <a:srgbClr val="3F546C"/>
+                </a:solidFill>
+                <a:latin typeface="Microsoft JhengHei"/>
+                <a:ea typeface="Microsoft JhengHei"/>
+                <a:cs typeface="Microsoft JhengHei"/>
+              </a:rPr>
+              <a:t>最終版</a:t>
+            </a:r>
+            <a:endParaRPr sz="1200"/>
+          </a:p>
+        </p:txBody>
+      </p:sp>
+      <p:sp>
+        <p:nvSpPr>
+          <p:cNvPr id="34" name="Shape 32">
+            <a:extLst xmlns:a="http://schemas.openxmlformats.org/drawingml/2006/main">
+              <a:ext uri="{FF2B5EF4-FFF2-40B4-BE49-F238E27FC236}">
+                <a16:creationId xmlns:a16="http://schemas.microsoft.com/office/drawing/2014/main" id="{7B0BBB13-89B7-45AB-951A-48BEFA7E1D73}"/>
+              </a:ext>
+            </a:extLst>
+          </p:cNvPr>
+          <p:cNvSpPr>
+            <a:spLocks xmlns:a="http://schemas.openxmlformats.org/drawingml/2006/main" noGrp="1"/>
+          </p:cNvSpPr>
+          <p:nvPr/>
+        </p:nvSpPr>
+        <p:spPr>
+          <a:xfrm xmlns:a="http://schemas.openxmlformats.org/drawingml/2006/main">
+            <a:off x="731520" y="3383280"/>
+            <a:ext cx="6035040" cy="2148840"/>
+          </a:xfrm>
+          <a:prstGeom xmlns:a="http://schemas.openxmlformats.org/drawingml/2006/main" prst="roundRect">
+            <a:avLst>
+              <a:gd name="adj" fmla="val 6809"/>
+            </a:avLst>
+          </a:prstGeom>
+          <a:solidFill xmlns:a="http://schemas.openxmlformats.org/drawingml/2006/main">
+            <a:srgbClr val="FFFFFF"/>
+          </a:solidFill>
+          <a:ln xmlns:a="http://schemas.openxmlformats.org/drawingml/2006/main" w="12700">
+            <a:solidFill>
+              <a:srgbClr val="D3DEEA"/>
+            </a:solidFill>
+            <a:prstDash val="solid"/>
+          </a:ln>
+        </p:spPr>
+        <p:txBody xmlns:a="http://schemas.openxmlformats.org/drawingml/2006/main">
+          <a:bodyPr/>
+          <a:p/>
+        </p:txBody>
+      </p:sp>
+      <p:sp>
+        <p:nvSpPr>
+          <p:cNvPr id="36" name="Shape 33">
+            <a:extLst xmlns:a="http://schemas.openxmlformats.org/drawingml/2006/main">
+              <a:ext uri="{FF2B5EF4-FFF2-40B4-BE49-F238E27FC236}">
+                <a16:creationId xmlns:a16="http://schemas.microsoft.com/office/drawing/2014/main" id="{7643EAF1-6475-49A7-A48F-A432EAFE8A42}"/>
+              </a:ext>
+            </a:extLst>
+          </p:cNvPr>
+          <p:cNvSpPr>
+            <a:spLocks xmlns:a="http://schemas.openxmlformats.org/drawingml/2006/main" noGrp="1"/>
+          </p:cNvSpPr>
+          <p:nvPr/>
+        </p:nvSpPr>
+        <p:spPr>
+          <a:xfrm xmlns:a="http://schemas.openxmlformats.org/drawingml/2006/main">
+            <a:off x="6949440" y="3383280"/>
+            <a:ext cx="4507992" cy="2148840"/>
+          </a:xfrm>
+          <a:prstGeom xmlns:a="http://schemas.openxmlformats.org/drawingml/2006/main" prst="roundRect">
+            <a:avLst>
+              <a:gd name="adj" fmla="val 6809"/>
+            </a:avLst>
+          </a:prstGeom>
+          <a:solidFill xmlns:a="http://schemas.openxmlformats.org/drawingml/2006/main">
+            <a:srgbClr val="FFFFFF"/>
+          </a:solidFill>
+          <a:ln xmlns:a="http://schemas.openxmlformats.org/drawingml/2006/main" w="12700">
+            <a:solidFill>
+              <a:srgbClr val="D3DEEA"/>
+            </a:solidFill>
+            <a:prstDash val="solid"/>
+          </a:ln>
+        </p:spPr>
+        <p:txBody xmlns:a="http://schemas.openxmlformats.org/drawingml/2006/main">
+          <a:bodyPr/>
+          <a:p/>
+        </p:txBody>
+      </p:sp>
+      <p:sp>
+        <p:nvSpPr>
+          <p:cNvPr id="37" name="Shape 34">
+            <a:extLst xmlns:a="http://schemas.openxmlformats.org/drawingml/2006/main">
+              <a:ext uri="{FF2B5EF4-FFF2-40B4-BE49-F238E27FC236}">
+                <a16:creationId xmlns:a16="http://schemas.microsoft.com/office/drawing/2014/main" id="{602A8C67-D741-49E1-9E36-B97E8D78CC35}"/>
+              </a:ext>
+            </a:extLst>
+          </p:cNvPr>
+          <p:cNvSpPr>
+            <a:spLocks xmlns:a="http://schemas.openxmlformats.org/drawingml/2006/main" noGrp="1"/>
+          </p:cNvSpPr>
+          <p:nvPr/>
+        </p:nvSpPr>
+        <p:spPr>
+          <a:xfrm xmlns:a="http://schemas.openxmlformats.org/drawingml/2006/main">
+            <a:off x="7178040" y="3566160"/>
+            <a:ext cx="822960" cy="310896"/>
+          </a:xfrm>
+          <a:prstGeom xmlns:a="http://schemas.openxmlformats.org/drawingml/2006/main" prst="roundRect">
+            <a:avLst>
+              <a:gd name="adj" fmla="val 50000"/>
+            </a:avLst>
+          </a:prstGeom>
+          <a:solidFill xmlns:a="http://schemas.openxmlformats.org/drawingml/2006/main">
+            <a:srgbClr val="E2EDF9"/>
+          </a:solidFill>
+          <a:ln xmlns:a="http://schemas.openxmlformats.org/drawingml/2006/main" w="12700">
+            <a:solidFill>
+              <a:srgbClr val="E2EDF9"/>
+            </a:solidFill>
+            <a:prstDash val="solid"/>
+          </a:ln>
+        </p:spPr>
+        <p:txBody xmlns:a="http://schemas.openxmlformats.org/drawingml/2006/main">
+          <a:bodyPr/>
+          <a:p/>
+        </p:txBody>
+      </p:sp>
+      <p:sp>
+        <p:nvSpPr>
+          <p:cNvPr id="38" name="Text 35">
+            <a:extLst xmlns:a="http://schemas.openxmlformats.org/drawingml/2006/main">
+              <a:ext uri="{FF2B5EF4-FFF2-40B4-BE49-F238E27FC236}">
+                <a16:creationId xmlns:a16="http://schemas.microsoft.com/office/drawing/2014/main" id="{0E730E12-F1AC-47E1-A3A6-3FD8BBC6024B}"/>
+              </a:ext>
+            </a:extLst>
+          </p:cNvPr>
+          <p:cNvSpPr>
+            <a:spLocks xmlns:a="http://schemas.openxmlformats.org/drawingml/2006/main" noGrp="1"/>
+          </p:cNvSpPr>
+          <p:nvPr/>
+        </p:nvSpPr>
+        <p:spPr>
+          <a:xfrm xmlns:a="http://schemas.openxmlformats.org/drawingml/2006/main">
+            <a:off x="7178040" y="3566160"/>
+            <a:ext cx="822960" cy="310896"/>
+          </a:xfrm>
+          <a:prstGeom xmlns:a="http://schemas.openxmlformats.org/drawingml/2006/main" prst="rect">
+            <a:avLst/>
+          </a:prstGeom>
+          <a:noFill xmlns:a="http://schemas.openxmlformats.org/drawingml/2006/main"/>
+        </p:spPr>
+        <p:txBody>
+          <a:bodyPr xmlns:a="http://schemas.openxmlformats.org/drawingml/2006/main" wrap="square" lIns="0" tIns="0" rIns="0" bIns="0" anchor="ctr"/>
+          <a:lstStyle xmlns:a="http://schemas.openxmlformats.org/drawingml/2006/main"/>
+          <a:p xmlns:a="http://schemas.openxmlformats.org/drawingml/2006/main">
+            <a:pPr marL="0" indent="0" algn="ctr">
+              <a:buNone/>
+            </a:pPr>
+            <a:r>
+              <a:rPr sz="1200" b="1">
+                <a:solidFill>
+                  <a:srgbClr val="1F6FB8"/>
+                </a:solidFill>
+                <a:latin typeface="Microsoft JhengHei"/>
+                <a:ea typeface="Microsoft JhengHei"/>
+                <a:cs typeface="Microsoft JhengHei"/>
+              </a:rPr>
+              <a:t>5 月</a:t>
+            </a:r>
+            <a:endParaRPr sz="1200"/>
+          </a:p>
+        </p:txBody>
+      </p:sp>
+      <p:sp>
+        <p:nvSpPr>
+          <p:cNvPr id="39" name="Text 36">
+            <a:extLst xmlns:a="http://schemas.openxmlformats.org/drawingml/2006/main">
+              <a:ext uri="{FF2B5EF4-FFF2-40B4-BE49-F238E27FC236}">
+                <a16:creationId xmlns:a16="http://schemas.microsoft.com/office/drawing/2014/main" id="{1B239023-9E52-4116-B7F8-29BE94324F1A}"/>
+              </a:ext>
+            </a:extLst>
+          </p:cNvPr>
+          <p:cNvSpPr>
+            <a:spLocks xmlns:a="http://schemas.openxmlformats.org/drawingml/2006/main" noGrp="1"/>
+          </p:cNvSpPr>
+          <p:nvPr/>
+        </p:nvSpPr>
+        <p:spPr>
+          <a:xfrm xmlns:a="http://schemas.openxmlformats.org/drawingml/2006/main">
+            <a:off x="8183880" y="3547872"/>
+            <a:ext cx="3154680" cy="347472"/>
+          </a:xfrm>
+          <a:prstGeom xmlns:a="http://schemas.openxmlformats.org/drawingml/2006/main" prst="rect">
+            <a:avLst/>
+          </a:prstGeom>
+          <a:noFill xmlns:a="http://schemas.openxmlformats.org/drawingml/2006/main"/>
+        </p:spPr>
+        <p:txBody>
+          <a:bodyPr xmlns:a="http://schemas.openxmlformats.org/drawingml/2006/main" wrap="square" lIns="0" tIns="0" rIns="0" bIns="0" anchor="ctr"/>
+          <a:lstStyle xmlns:a="http://schemas.openxmlformats.org/drawingml/2006/main"/>
+          <a:p xmlns:a="http://schemas.openxmlformats.org/drawingml/2006/main">
+            <a:pPr marL="0" indent="0">
+              <a:buNone/>
+            </a:pPr>
+            <a:r>
+              <a:rPr sz="1400">
+                <a:solidFill>
+                  <a:srgbClr val="3F546C"/>
+                </a:solidFill>
+                <a:latin typeface="Microsoft JhengHei"/>
+                <a:ea typeface="Microsoft JhengHei"/>
+                <a:cs typeface="Microsoft JhengHei"/>
+              </a:rPr>
+              <a:t>PTT 爬蟲、儀表板、WebSocket</a:t>
+            </a:r>
+            <a:endParaRPr sz="1400"/>
+          </a:p>
+        </p:txBody>
+      </p:sp>
+      <p:sp>
+        <p:nvSpPr>
+          <p:cNvPr id="40" name="Shape 37">
+            <a:extLst xmlns:a="http://schemas.openxmlformats.org/drawingml/2006/main">
+              <a:ext uri="{FF2B5EF4-FFF2-40B4-BE49-F238E27FC236}">
+                <a16:creationId xmlns:a16="http://schemas.microsoft.com/office/drawing/2014/main" id="{F2A69462-030D-4208-B9BA-475C0E9522EF}"/>
+              </a:ext>
+            </a:extLst>
+          </p:cNvPr>
+          <p:cNvSpPr>
+            <a:spLocks xmlns:a="http://schemas.openxmlformats.org/drawingml/2006/main" noGrp="1"/>
+          </p:cNvSpPr>
+          <p:nvPr/>
+        </p:nvSpPr>
+        <p:spPr>
+          <a:xfrm xmlns:a="http://schemas.openxmlformats.org/drawingml/2006/main">
+            <a:off x="7178040" y="3950208"/>
+            <a:ext cx="822960" cy="310896"/>
+          </a:xfrm>
+          <a:prstGeom xmlns:a="http://schemas.openxmlformats.org/drawingml/2006/main" prst="roundRect">
+            <a:avLst>
+              <a:gd name="adj" fmla="val 50000"/>
+            </a:avLst>
+          </a:prstGeom>
+          <a:solidFill xmlns:a="http://schemas.openxmlformats.org/drawingml/2006/main">
+            <a:srgbClr val="E2EDF9"/>
+          </a:solidFill>
+          <a:ln xmlns:a="http://schemas.openxmlformats.org/drawingml/2006/main" w="12700">
+            <a:solidFill>
+              <a:srgbClr val="E2EDF9"/>
+            </a:solidFill>
+            <a:prstDash val="solid"/>
+          </a:ln>
+        </p:spPr>
+        <p:txBody xmlns:a="http://schemas.openxmlformats.org/drawingml/2006/main">
+          <a:bodyPr/>
+          <a:p/>
+        </p:txBody>
+      </p:sp>
+      <p:sp>
+        <p:nvSpPr>
+          <p:cNvPr id="41" name="Text 38">
+            <a:extLst xmlns:a="http://schemas.openxmlformats.org/drawingml/2006/main">
+              <a:ext uri="{FF2B5EF4-FFF2-40B4-BE49-F238E27FC236}">
+                <a16:creationId xmlns:a16="http://schemas.microsoft.com/office/drawing/2014/main" id="{093B1419-DF2B-4FAA-B2BD-EE6941737F2F}"/>
+              </a:ext>
+            </a:extLst>
+          </p:cNvPr>
+          <p:cNvSpPr>
+            <a:spLocks xmlns:a="http://schemas.openxmlformats.org/drawingml/2006/main" noGrp="1"/>
+          </p:cNvSpPr>
+          <p:nvPr/>
+        </p:nvSpPr>
+        <p:spPr>
+          <a:xfrm xmlns:a="http://schemas.openxmlformats.org/drawingml/2006/main">
+            <a:off x="7178040" y="3950208"/>
+            <a:ext cx="822960" cy="310896"/>
+          </a:xfrm>
+          <a:prstGeom xmlns:a="http://schemas.openxmlformats.org/drawingml/2006/main" prst="rect">
+            <a:avLst/>
+          </a:prstGeom>
+          <a:noFill xmlns:a="http://schemas.openxmlformats.org/drawingml/2006/main"/>
+        </p:spPr>
+        <p:txBody>
+          <a:bodyPr xmlns:a="http://schemas.openxmlformats.org/drawingml/2006/main" wrap="square" lIns="0" tIns="0" rIns="0" bIns="0" anchor="ctr"/>
+          <a:lstStyle xmlns:a="http://schemas.openxmlformats.org/drawingml/2006/main"/>
+          <a:p xmlns:a="http://schemas.openxmlformats.org/drawingml/2006/main">
+            <a:pPr marL="0" indent="0" algn="ctr">
+              <a:buNone/>
+            </a:pPr>
+            <a:r>
+              <a:rPr sz="1200" b="1">
+                <a:solidFill>
+                  <a:srgbClr val="1F6FB8"/>
+                </a:solidFill>
+                <a:latin typeface="Microsoft JhengHei"/>
+                <a:ea typeface="Microsoft JhengHei"/>
+                <a:cs typeface="Microsoft JhengHei"/>
+              </a:rPr>
+              <a:t>7 月</a:t>
+            </a:r>
+            <a:endParaRPr sz="1200"/>
+          </a:p>
+        </p:txBody>
+      </p:sp>
+      <p:sp>
+        <p:nvSpPr>
+          <p:cNvPr id="42" name="Text 39">
+            <a:extLst xmlns:a="http://schemas.openxmlformats.org/drawingml/2006/main">
+              <a:ext uri="{FF2B5EF4-FFF2-40B4-BE49-F238E27FC236}">
+                <a16:creationId xmlns:a16="http://schemas.microsoft.com/office/drawing/2014/main" id="{17B9FB28-D2A6-4787-9847-0600FCA08631}"/>
+              </a:ext>
+            </a:extLst>
+          </p:cNvPr>
+          <p:cNvSpPr>
+            <a:spLocks xmlns:a="http://schemas.openxmlformats.org/drawingml/2006/main" noGrp="1"/>
+          </p:cNvSpPr>
+          <p:nvPr/>
+        </p:nvSpPr>
+        <p:spPr>
+          <a:xfrm xmlns:a="http://schemas.openxmlformats.org/drawingml/2006/main">
+            <a:off x="8183880" y="3931920"/>
+            <a:ext cx="3154680" cy="347472"/>
+          </a:xfrm>
+          <a:prstGeom xmlns:a="http://schemas.openxmlformats.org/drawingml/2006/main" prst="rect">
+            <a:avLst/>
+          </a:prstGeom>
+          <a:noFill xmlns:a="http://schemas.openxmlformats.org/drawingml/2006/main"/>
+        </p:spPr>
+        <p:txBody>
+          <a:bodyPr xmlns:a="http://schemas.openxmlformats.org/drawingml/2006/main" wrap="square" lIns="0" tIns="0" rIns="0" bIns="0" anchor="ctr"/>
+          <a:lstStyle xmlns:a="http://schemas.openxmlformats.org/drawingml/2006/main"/>
+          <a:p xmlns:a="http://schemas.openxmlformats.org/drawingml/2006/main">
+            <a:pPr marL="0" indent="0">
+              <a:buNone/>
+            </a:pPr>
+            <a:r>
+              <a:rPr sz="1400">
+                <a:solidFill>
+                  <a:srgbClr val="3F546C"/>
+                </a:solidFill>
+                <a:latin typeface="Microsoft JhengHei"/>
+                <a:ea typeface="Microsoft JhengHei"/>
+                <a:cs typeface="Microsoft JhengHei"/>
+              </a:rPr>
+              <a:t>帳號登入與角色權限</a:t>
+            </a:r>
+            <a:endParaRPr sz="1400"/>
+          </a:p>
+        </p:txBody>
+      </p:sp>
+      <p:sp>
+        <p:nvSpPr>
+          <p:cNvPr id="43" name="Shape 40">
+            <a:extLst xmlns:a="http://schemas.openxmlformats.org/drawingml/2006/main">
+              <a:ext uri="{FF2B5EF4-FFF2-40B4-BE49-F238E27FC236}">
+                <a16:creationId xmlns:a16="http://schemas.microsoft.com/office/drawing/2014/main" id="{D8FE1E07-1E40-4B32-BCD9-A4934E543B9B}"/>
+              </a:ext>
+            </a:extLst>
+          </p:cNvPr>
+          <p:cNvSpPr>
+            <a:spLocks xmlns:a="http://schemas.openxmlformats.org/drawingml/2006/main" noGrp="1"/>
+          </p:cNvSpPr>
+          <p:nvPr/>
+        </p:nvSpPr>
+        <p:spPr>
+          <a:xfrm xmlns:a="http://schemas.openxmlformats.org/drawingml/2006/main">
+            <a:off x="7178040" y="4334256"/>
+            <a:ext cx="822960" cy="310896"/>
+          </a:xfrm>
+          <a:prstGeom xmlns:a="http://schemas.openxmlformats.org/drawingml/2006/main" prst="roundRect">
+            <a:avLst>
+              <a:gd name="adj" fmla="val 50000"/>
+            </a:avLst>
+          </a:prstGeom>
+          <a:solidFill xmlns:a="http://schemas.openxmlformats.org/drawingml/2006/main">
+            <a:srgbClr val="E2EDF9"/>
+          </a:solidFill>
+          <a:ln xmlns:a="http://schemas.openxmlformats.org/drawingml/2006/main" w="12700">
+            <a:solidFill>
+              <a:srgbClr val="E2EDF9"/>
+            </a:solidFill>
+            <a:prstDash val="solid"/>
+          </a:ln>
+        </p:spPr>
+        <p:txBody xmlns:a="http://schemas.openxmlformats.org/drawingml/2006/main">
+          <a:bodyPr/>
+          <a:p/>
+        </p:txBody>
+      </p:sp>
+      <p:sp>
+        <p:nvSpPr>
+          <p:cNvPr id="44" name="Text 41">
+            <a:extLst xmlns:a="http://schemas.openxmlformats.org/drawingml/2006/main">
+              <a:ext uri="{FF2B5EF4-FFF2-40B4-BE49-F238E27FC236}">
+                <a16:creationId xmlns:a16="http://schemas.microsoft.com/office/drawing/2014/main" id="{21099281-C000-4EAE-B247-E0855EE8E5E0}"/>
+              </a:ext>
+            </a:extLst>
+          </p:cNvPr>
+          <p:cNvSpPr>
+            <a:spLocks xmlns:a="http://schemas.openxmlformats.org/drawingml/2006/main" noGrp="1"/>
+          </p:cNvSpPr>
+          <p:nvPr/>
+        </p:nvSpPr>
+        <p:spPr>
+          <a:xfrm xmlns:a="http://schemas.openxmlformats.org/drawingml/2006/main">
+            <a:off x="7178040" y="4334256"/>
+            <a:ext cx="822960" cy="310896"/>
+          </a:xfrm>
+          <a:prstGeom xmlns:a="http://schemas.openxmlformats.org/drawingml/2006/main" prst="rect">
+            <a:avLst/>
+          </a:prstGeom>
+          <a:noFill xmlns:a="http://schemas.openxmlformats.org/drawingml/2006/main"/>
+        </p:spPr>
+        <p:txBody>
+          <a:bodyPr xmlns:a="http://schemas.openxmlformats.org/drawingml/2006/main" wrap="square" lIns="0" tIns="0" rIns="0" bIns="0" anchor="ctr"/>
+          <a:lstStyle xmlns:a="http://schemas.openxmlformats.org/drawingml/2006/main"/>
+          <a:p xmlns:a="http://schemas.openxmlformats.org/drawingml/2006/main">
+            <a:pPr marL="0" indent="0" algn="ctr">
+              <a:buNone/>
+            </a:pPr>
+            <a:r>
+              <a:rPr sz="1200" b="1">
+                <a:solidFill>
+                  <a:srgbClr val="1F6FB8"/>
+                </a:solidFill>
+                <a:latin typeface="Microsoft JhengHei"/>
+                <a:ea typeface="Microsoft JhengHei"/>
+                <a:cs typeface="Microsoft JhengHei"/>
+              </a:rPr>
+              <a:t>8 月</a:t>
+            </a:r>
+            <a:endParaRPr sz="1200"/>
+          </a:p>
+        </p:txBody>
+      </p:sp>
+      <p:sp>
+        <p:nvSpPr>
+          <p:cNvPr id="45" name="Text 42">
+            <a:extLst xmlns:a="http://schemas.openxmlformats.org/drawingml/2006/main">
+              <a:ext uri="{FF2B5EF4-FFF2-40B4-BE49-F238E27FC236}">
+                <a16:creationId xmlns:a16="http://schemas.microsoft.com/office/drawing/2014/main" id="{43D7E73D-6558-4FCB-B74E-F9BEF1F3EBA1}"/>
+              </a:ext>
+            </a:extLst>
+          </p:cNvPr>
+          <p:cNvSpPr>
+            <a:spLocks xmlns:a="http://schemas.openxmlformats.org/drawingml/2006/main" noGrp="1"/>
+          </p:cNvSpPr>
+          <p:nvPr/>
+        </p:nvSpPr>
+        <p:spPr>
+          <a:xfrm xmlns:a="http://schemas.openxmlformats.org/drawingml/2006/main">
+            <a:off x="8183880" y="4315968"/>
+            <a:ext cx="3154680" cy="347472"/>
+          </a:xfrm>
+          <a:prstGeom xmlns:a="http://schemas.openxmlformats.org/drawingml/2006/main" prst="rect">
+            <a:avLst/>
+          </a:prstGeom>
+          <a:noFill xmlns:a="http://schemas.openxmlformats.org/drawingml/2006/main"/>
+        </p:spPr>
+        <p:txBody>
+          <a:bodyPr xmlns:a="http://schemas.openxmlformats.org/drawingml/2006/main" wrap="square" lIns="0" tIns="0" rIns="0" bIns="0" anchor="ctr"/>
+          <a:lstStyle xmlns:a="http://schemas.openxmlformats.org/drawingml/2006/main"/>
+          <a:p xmlns:a="http://schemas.openxmlformats.org/drawingml/2006/main">
+            <a:pPr marL="0" indent="0">
+              <a:buNone/>
+            </a:pPr>
+            <a:r>
+              <a:rPr sz="1400">
+                <a:solidFill>
+                  <a:srgbClr val="3F546C"/>
+                </a:solidFill>
+                <a:latin typeface="Microsoft JhengHei"/>
+                <a:ea typeface="Microsoft JhengHei"/>
+                <a:cs typeface="Microsoft JhengHei"/>
+              </a:rPr>
+              <a:t>Dcard、Mobile01、Threads</a:t>
+            </a:r>
+            <a:endParaRPr sz="1400"/>
+          </a:p>
+        </p:txBody>
+      </p:sp>
+      <p:sp>
+        <p:nvSpPr>
+          <p:cNvPr id="46" name="Shape 43">
+            <a:extLst xmlns:a="http://schemas.openxmlformats.org/drawingml/2006/main">
+              <a:ext uri="{FF2B5EF4-FFF2-40B4-BE49-F238E27FC236}">
+                <a16:creationId xmlns:a16="http://schemas.microsoft.com/office/drawing/2014/main" id="{551EF12F-89F5-42E4-95D5-1BACD5D2F554}"/>
+              </a:ext>
+            </a:extLst>
+          </p:cNvPr>
+          <p:cNvSpPr>
+            <a:spLocks xmlns:a="http://schemas.openxmlformats.org/drawingml/2006/main" noGrp="1"/>
+          </p:cNvSpPr>
+          <p:nvPr/>
+        </p:nvSpPr>
+        <p:spPr>
+          <a:xfrm xmlns:a="http://schemas.openxmlformats.org/drawingml/2006/main">
+            <a:off x="7178040" y="4718304"/>
+            <a:ext cx="822960" cy="310896"/>
+          </a:xfrm>
+          <a:prstGeom xmlns:a="http://schemas.openxmlformats.org/drawingml/2006/main" prst="roundRect">
+            <a:avLst>
+              <a:gd name="adj" fmla="val 50000"/>
+            </a:avLst>
+          </a:prstGeom>
+          <a:solidFill xmlns:a="http://schemas.openxmlformats.org/drawingml/2006/main">
+            <a:srgbClr val="E2EDF9"/>
+          </a:solidFill>
+          <a:ln xmlns:a="http://schemas.openxmlformats.org/drawingml/2006/main" w="12700">
+            <a:solidFill>
+              <a:srgbClr val="E2EDF9"/>
+            </a:solidFill>
+            <a:prstDash val="solid"/>
+          </a:ln>
+        </p:spPr>
+        <p:txBody xmlns:a="http://schemas.openxmlformats.org/drawingml/2006/main">
+          <a:bodyPr/>
+          <a:p/>
+        </p:txBody>
+      </p:sp>
+      <p:sp>
+        <p:nvSpPr>
+          <p:cNvPr id="47" name="Text 44">
+            <a:extLst xmlns:a="http://schemas.openxmlformats.org/drawingml/2006/main">
+              <a:ext uri="{FF2B5EF4-FFF2-40B4-BE49-F238E27FC236}">
+                <a16:creationId xmlns:a16="http://schemas.microsoft.com/office/drawing/2014/main" id="{64826EBD-EDD1-4A9F-9D99-14C6FCA0D24D}"/>
+              </a:ext>
+            </a:extLst>
+          </p:cNvPr>
+          <p:cNvSpPr>
+            <a:spLocks xmlns:a="http://schemas.openxmlformats.org/drawingml/2006/main" noGrp="1"/>
+          </p:cNvSpPr>
+          <p:nvPr/>
+        </p:nvSpPr>
+        <p:spPr>
+          <a:xfrm xmlns:a="http://schemas.openxmlformats.org/drawingml/2006/main">
+            <a:off x="7178040" y="4718304"/>
+            <a:ext cx="822960" cy="310896"/>
+          </a:xfrm>
+          <a:prstGeom xmlns:a="http://schemas.openxmlformats.org/drawingml/2006/main" prst="rect">
+            <a:avLst/>
+          </a:prstGeom>
+          <a:noFill xmlns:a="http://schemas.openxmlformats.org/drawingml/2006/main"/>
+        </p:spPr>
+        <p:txBody>
+          <a:bodyPr xmlns:a="http://schemas.openxmlformats.org/drawingml/2006/main" wrap="square" lIns="0" tIns="0" rIns="0" bIns="0" anchor="ctr"/>
+          <a:lstStyle xmlns:a="http://schemas.openxmlformats.org/drawingml/2006/main"/>
+          <a:p xmlns:a="http://schemas.openxmlformats.org/drawingml/2006/main">
+            <a:pPr marL="0" indent="0" algn="ctr">
+              <a:buNone/>
+            </a:pPr>
+            <a:r>
+              <a:rPr sz="1200" b="1">
+                <a:solidFill>
+                  <a:srgbClr val="1F6FB8"/>
+                </a:solidFill>
+                <a:latin typeface="Microsoft JhengHei"/>
+                <a:ea typeface="Microsoft JhengHei"/>
+                <a:cs typeface="Microsoft JhengHei"/>
+              </a:rPr>
+              <a:t>9 月</a:t>
+            </a:r>
+            <a:endParaRPr sz="1200"/>
+          </a:p>
+        </p:txBody>
+      </p:sp>
+      <p:sp>
+        <p:nvSpPr>
+          <p:cNvPr id="48" name="Text 45">
+            <a:extLst xmlns:a="http://schemas.openxmlformats.org/drawingml/2006/main">
+              <a:ext uri="{FF2B5EF4-FFF2-40B4-BE49-F238E27FC236}">
+                <a16:creationId xmlns:a16="http://schemas.microsoft.com/office/drawing/2014/main" id="{97A4B502-DDBF-4AE9-B88B-968686120D18}"/>
+              </a:ext>
+            </a:extLst>
+          </p:cNvPr>
+          <p:cNvSpPr>
+            <a:spLocks xmlns:a="http://schemas.openxmlformats.org/drawingml/2006/main" noGrp="1"/>
+          </p:cNvSpPr>
+          <p:nvPr/>
+        </p:nvSpPr>
+        <p:spPr>
+          <a:xfrm xmlns:a="http://schemas.openxmlformats.org/drawingml/2006/main">
+            <a:off x="8183880" y="4700016"/>
+            <a:ext cx="3154680" cy="347472"/>
+          </a:xfrm>
+          <a:prstGeom xmlns:a="http://schemas.openxmlformats.org/drawingml/2006/main" prst="rect">
+            <a:avLst/>
+          </a:prstGeom>
+          <a:noFill xmlns:a="http://schemas.openxmlformats.org/drawingml/2006/main"/>
+        </p:spPr>
+        <p:txBody>
+          <a:bodyPr xmlns:a="http://schemas.openxmlformats.org/drawingml/2006/main" wrap="square" lIns="0" tIns="0" rIns="0" bIns="0" anchor="ctr"/>
+          <a:lstStyle xmlns:a="http://schemas.openxmlformats.org/drawingml/2006/main"/>
+          <a:p xmlns:a="http://schemas.openxmlformats.org/drawingml/2006/main">
+            <a:pPr marL="0" indent="0">
+              <a:buNone/>
+            </a:pPr>
+            <a:r>
+              <a:rPr sz="1400">
+                <a:solidFill>
+                  <a:srgbClr val="3F546C"/>
+                </a:solidFill>
+                <a:latin typeface="Microsoft JhengHei"/>
+                <a:ea typeface="Microsoft JhengHei"/>
+                <a:cs typeface="Microsoft JhengHei"/>
+              </a:rPr>
+              <a:t>方案額度、Alembic、向量檢索</a:t>
+            </a:r>
+            <a:endParaRPr sz="1400"/>
+          </a:p>
+        </p:txBody>
+      </p:sp>
+      <p:sp>
+        <p:nvSpPr>
+          <p:cNvPr id="49" name="Shape 46">
+            <a:extLst xmlns:a="http://schemas.openxmlformats.org/drawingml/2006/main">
+              <a:ext uri="{FF2B5EF4-FFF2-40B4-BE49-F238E27FC236}">
+                <a16:creationId xmlns:a16="http://schemas.microsoft.com/office/drawing/2014/main" id="{013B4DC3-643A-4B1A-81C6-E3AE9F643328}"/>
+              </a:ext>
+            </a:extLst>
+          </p:cNvPr>
+          <p:cNvSpPr>
+            <a:spLocks xmlns:a="http://schemas.openxmlformats.org/drawingml/2006/main" noGrp="1"/>
+          </p:cNvSpPr>
+          <p:nvPr/>
+        </p:nvSpPr>
+        <p:spPr>
+          <a:xfrm xmlns:a="http://schemas.openxmlformats.org/drawingml/2006/main">
+            <a:off x="7178040" y="5102352"/>
+            <a:ext cx="822960" cy="310896"/>
+          </a:xfrm>
+          <a:prstGeom xmlns:a="http://schemas.openxmlformats.org/drawingml/2006/main" prst="roundRect">
+            <a:avLst>
+              <a:gd name="adj" fmla="val 50000"/>
+            </a:avLst>
+          </a:prstGeom>
+          <a:solidFill xmlns:a="http://schemas.openxmlformats.org/drawingml/2006/main">
+            <a:srgbClr val="E2EDF9"/>
+          </a:solidFill>
+          <a:ln xmlns:a="http://schemas.openxmlformats.org/drawingml/2006/main" w="12700">
+            <a:solidFill>
+              <a:srgbClr val="E2EDF9"/>
+            </a:solidFill>
+            <a:prstDash val="solid"/>
+          </a:ln>
+        </p:spPr>
+        <p:txBody xmlns:a="http://schemas.openxmlformats.org/drawingml/2006/main">
+          <a:bodyPr/>
+          <a:p/>
+        </p:txBody>
+      </p:sp>
+      <p:sp>
+        <p:nvSpPr>
+          <p:cNvPr id="50" name="Text 47">
+            <a:extLst xmlns:a="http://schemas.openxmlformats.org/drawingml/2006/main">
+              <a:ext uri="{FF2B5EF4-FFF2-40B4-BE49-F238E27FC236}">
+                <a16:creationId xmlns:a16="http://schemas.microsoft.com/office/drawing/2014/main" id="{68A1ADBC-DD35-4C29-A297-584A957348AE}"/>
+              </a:ext>
+            </a:extLst>
+          </p:cNvPr>
+          <p:cNvSpPr>
+            <a:spLocks xmlns:a="http://schemas.openxmlformats.org/drawingml/2006/main" noGrp="1"/>
+          </p:cNvSpPr>
+          <p:nvPr/>
+        </p:nvSpPr>
+        <p:spPr>
+          <a:xfrm xmlns:a="http://schemas.openxmlformats.org/drawingml/2006/main">
+            <a:off x="7178040" y="5102352"/>
+            <a:ext cx="822960" cy="310896"/>
+          </a:xfrm>
+          <a:prstGeom xmlns:a="http://schemas.openxmlformats.org/drawingml/2006/main" prst="rect">
+            <a:avLst/>
+          </a:prstGeom>
+          <a:noFill xmlns:a="http://schemas.openxmlformats.org/drawingml/2006/main"/>
+        </p:spPr>
+        <p:txBody>
+          <a:bodyPr xmlns:a="http://schemas.openxmlformats.org/drawingml/2006/main" wrap="square" lIns="0" tIns="0" rIns="0" bIns="0" anchor="ctr"/>
+          <a:lstStyle xmlns:a="http://schemas.openxmlformats.org/drawingml/2006/main"/>
+          <a:p xmlns:a="http://schemas.openxmlformats.org/drawingml/2006/main">
+            <a:pPr marL="0" indent="0" algn="ctr">
+              <a:buNone/>
+            </a:pPr>
+            <a:r>
+              <a:rPr sz="1200" b="1">
+                <a:solidFill>
+                  <a:srgbClr val="1F6FB8"/>
+                </a:solidFill>
+                <a:latin typeface="Microsoft JhengHei"/>
+                <a:ea typeface="Microsoft JhengHei"/>
+                <a:cs typeface="Microsoft JhengHei"/>
+              </a:rPr>
+              <a:t>10 月</a:t>
+            </a:r>
+            <a:endParaRPr sz="1200"/>
+          </a:p>
+        </p:txBody>
+      </p:sp>
+      <p:sp>
+        <p:nvSpPr>
+          <p:cNvPr id="51" name="Text 48">
+            <a:extLst xmlns:a="http://schemas.openxmlformats.org/drawingml/2006/main">
+              <a:ext uri="{FF2B5EF4-FFF2-40B4-BE49-F238E27FC236}">
+                <a16:creationId xmlns:a16="http://schemas.microsoft.com/office/drawing/2014/main" id="{74CBCE47-65E0-4426-AD10-3048A47036DC}"/>
+              </a:ext>
+            </a:extLst>
+          </p:cNvPr>
+          <p:cNvSpPr>
+            <a:spLocks xmlns:a="http://schemas.openxmlformats.org/drawingml/2006/main" noGrp="1"/>
+          </p:cNvSpPr>
+          <p:nvPr/>
+        </p:nvSpPr>
+        <p:spPr>
+          <a:xfrm xmlns:a="http://schemas.openxmlformats.org/drawingml/2006/main">
+            <a:off x="8183880" y="5084064"/>
+            <a:ext cx="3154680" cy="347472"/>
+          </a:xfrm>
+          <a:prstGeom xmlns:a="http://schemas.openxmlformats.org/drawingml/2006/main" prst="rect">
+            <a:avLst/>
+          </a:prstGeom>
+          <a:noFill xmlns:a="http://schemas.openxmlformats.org/drawingml/2006/main"/>
+        </p:spPr>
+        <p:txBody>
+          <a:bodyPr xmlns:a="http://schemas.openxmlformats.org/drawingml/2006/main" wrap="square" lIns="0" tIns="0" rIns="0" bIns="0" anchor="ctr"/>
+          <a:lstStyle xmlns:a="http://schemas.openxmlformats.org/drawingml/2006/main"/>
+          <a:p xmlns:a="http://schemas.openxmlformats.org/drawingml/2006/main">
+            <a:pPr marL="0" indent="0">
+              <a:buNone/>
+            </a:pPr>
+            <a:r>
+              <a:rPr sz="1400">
+                <a:solidFill>
+                  <a:srgbClr val="3F546C"/>
+                </a:solidFill>
+                <a:latin typeface="Microsoft JhengHei"/>
+                <a:ea typeface="Microsoft JhengHei"/>
+                <a:cs typeface="Microsoft JhengHei"/>
+              </a:rPr>
+              <a:t>情緒一致性、預警權限修正</a:t>
+            </a:r>
+            <a:endParaRPr sz="1400"/>
+          </a:p>
+        </p:txBody>
+      </p:sp>
+      <p:sp>
+        <p:nvSpPr>
+          <p:cNvPr id="52" name="Shape 49">
+            <a:extLst xmlns:a="http://schemas.openxmlformats.org/drawingml/2006/main">
+              <a:ext uri="{FF2B5EF4-FFF2-40B4-BE49-F238E27FC236}">
+                <a16:creationId xmlns:a16="http://schemas.microsoft.com/office/drawing/2014/main" id="{1BC04AE9-A050-40E6-AA53-5E1A8A207C35}"/>
+              </a:ext>
+            </a:extLst>
+          </p:cNvPr>
+          <p:cNvSpPr>
+            <a:spLocks xmlns:a="http://schemas.openxmlformats.org/drawingml/2006/main" noGrp="1"/>
+          </p:cNvSpPr>
+          <p:nvPr/>
+        </p:nvSpPr>
+        <p:spPr>
+          <a:xfrm xmlns:a="http://schemas.openxmlformats.org/drawingml/2006/main">
+            <a:off x="731520" y="5669280"/>
+            <a:ext cx="10725912" cy="457200"/>
+          </a:xfrm>
+          <a:prstGeom xmlns:a="http://schemas.openxmlformats.org/drawingml/2006/main" prst="roundRect">
+            <a:avLst>
+              <a:gd name="adj" fmla="val 24000"/>
+            </a:avLst>
+          </a:prstGeom>
+          <a:solidFill xmlns:a="http://schemas.openxmlformats.org/drawingml/2006/main">
+            <a:srgbClr val="FDEEDF"/>
+          </a:solidFill>
+          <a:ln xmlns:a="http://schemas.openxmlformats.org/drawingml/2006/main" w="12700">
+            <a:solidFill>
+              <a:srgbClr val="FDEEDF"/>
+            </a:solidFill>
+            <a:prstDash val="solid"/>
+          </a:ln>
+        </p:spPr>
+        <p:txBody xmlns:a="http://schemas.openxmlformats.org/drawingml/2006/main">
+          <a:bodyPr/>
+          <a:p/>
+        </p:txBody>
+      </p:sp>
+      <p:sp>
+        <p:nvSpPr>
+          <p:cNvPr id="53" name="Text 50">
+            <a:extLst xmlns:a="http://schemas.openxmlformats.org/drawingml/2006/main">
+              <a:ext uri="{FF2B5EF4-FFF2-40B4-BE49-F238E27FC236}">
+                <a16:creationId xmlns:a16="http://schemas.microsoft.com/office/drawing/2014/main" id="{15366697-B447-49EA-A244-2C2D721D24F5}"/>
+              </a:ext>
+            </a:extLst>
+          </p:cNvPr>
+          <p:cNvSpPr>
+            <a:spLocks xmlns:a="http://schemas.openxmlformats.org/drawingml/2006/main" noGrp="1"/>
+          </p:cNvSpPr>
+          <p:nvPr/>
+        </p:nvSpPr>
+        <p:spPr>
+          <a:xfrm xmlns:a="http://schemas.openxmlformats.org/drawingml/2006/main">
+            <a:off x="731520" y="5669280"/>
+            <a:ext cx="10725912" cy="457200"/>
+          </a:xfrm>
+          <a:prstGeom xmlns:a="http://schemas.openxmlformats.org/drawingml/2006/main" prst="rect">
+            <a:avLst/>
+          </a:prstGeom>
+          <a:noFill xmlns:a="http://schemas.openxmlformats.org/drawingml/2006/main"/>
+        </p:spPr>
+        <p:txBody>
+          <a:bodyPr xmlns:a="http://schemas.openxmlformats.org/drawingml/2006/main" wrap="square" lIns="0" tIns="0" rIns="0" bIns="0" anchor="ctr"/>
+          <a:lstStyle xmlns:a="http://schemas.openxmlformats.org/drawingml/2006/main"/>
+          <a:p xmlns:a="http://schemas.openxmlformats.org/drawingml/2006/main">
+            <a:pPr marL="0" indent="0" algn="ctr">
+              <a:buNone/>
+            </a:pPr>
+            <a:r>
+              <a:rPr sz="1400" b="1">
+                <a:solidFill>
+                  <a:srgbClr val="D46A12"/>
+                </a:solidFill>
+                <a:latin typeface="Microsoft JhengHei"/>
+                <a:ea typeface="Microsoft JhengHei"/>
+                <a:cs typeface="Microsoft JhengHei"/>
+              </a:rPr>
+              <a:t>GitHub：7–10 月 150 次提交（10/12 統計，皆已推送）；非逐人貢獻比例。</a:t>
+            </a:r>
+            <a:endParaRPr sz="1400"/>
+          </a:p>
+        </p:txBody>
+      </p:sp>
+      <p:sp>
+        <p:nvSpPr>
+          <p:cNvPr id="55" name="17">
+            <a:extLst xmlns:a="http://schemas.openxmlformats.org/drawingml/2006/main">
+              <a:ext uri="{FF2B5EF4-FFF2-40B4-BE49-F238E27FC236}">
+                <a16:creationId xmlns:a16="http://schemas.microsoft.com/office/drawing/2014/main" id="{A13AD611-5595-4DFB-8BD9-6296EE5DAC21}"/>
+              </a:ext>
+            </a:extLst>
+          </p:cNvPr>
+          <p:cNvSpPr>
+            <a:spLocks xmlns:a="http://schemas.openxmlformats.org/drawingml/2006/main" noGrp="1"/>
+          </p:cNvSpPr>
+          <p:nvPr/>
+        </p:nvSpPr>
+        <p:spPr>
+          <a:xfrm xmlns:a="http://schemas.openxmlformats.org/drawingml/2006/main">
+            <a:off x="733425" y="6391275"/>
+            <a:ext cx="762000" cy="257175"/>
+          </a:xfrm>
+          <a:prstGeom xmlns:a="http://schemas.openxmlformats.org/drawingml/2006/main" prst="rect">
+            <a:avLst/>
+          </a:prstGeom>
+          <a:noFill xmlns:a="http://schemas.openxmlformats.org/drawingml/2006/main"/>
+          <a:ln xmlns:a="http://schemas.openxmlformats.org/drawingml/2006/main" w="0">
+            <a:noFill/>
+          </a:ln>
+        </p:spPr>
+        <p:txBody>
+          <a:bodyPr xmlns:a="http://schemas.openxmlformats.org/drawingml/2006/main" lIns="0" tIns="0" rIns="0" bIns="0"/>
+          <a:lstStyle xmlns:a="http://schemas.openxmlformats.org/drawingml/2006/main">
+            <a:defPPr>
+              <a:defRPr sz="1275" b="0">
+                <a:solidFill>
+                  <a:srgbClr val="465E78"/>
+                </a:solidFill>
+              </a:defRPr>
+            </a:defPPr>
+          </a:lstStyle>
+          <a:p xmlns:a="http://schemas.openxmlformats.org/drawingml/2006/main">
+            <a:pPr>
+              <a:buNone/>
+              <a:defRPr sz="1275" b="0">
+                <a:solidFill>
+                  <a:srgbClr val="465E78"/>
+                </a:solidFill>
+              </a:defRPr>
+            </a:pPr>
+            <a:r>
+              <a:rPr sz="1275" b="0">
+                <a:solidFill>
+                  <a:srgbClr val="465E78"/>
+                </a:solidFill>
+              </a:rPr>
+              <a:t>16</a:t>
+            </a:r>
+          </a:p>
+        </p:txBody>
+      </p:sp>
+      <p:graphicFrame>
+        <p:nvGraphicFramePr>
+          <p:cNvPr id="56" name="Chart">
+            <a:extLst xmlns:a="http://schemas.openxmlformats.org/drawingml/2006/main">
+              <a:ext uri="{FF2B5EF4-FFF2-40B4-BE49-F238E27FC236}">
+                <a16:creationId xmlns:a16="http://schemas.microsoft.com/office/drawing/2014/main" id="{1010574F-0FDF-4032-8F0A-AF35C50413F4}"/>
+              </a:ext>
+            </a:extLst>
+          </p:cNvPr>
+          <p:cNvGraphicFramePr/>
+          <p:nvPr/>
+        </p:nvGraphicFramePr>
+        <p:xfrm>
+          <a:off xmlns:a="http://schemas.openxmlformats.org/drawingml/2006/main" x="914400" y="3474720"/>
+          <a:ext xmlns:a="http://schemas.openxmlformats.org/drawingml/2006/main" cx="5669280" cy="1965960"/>
+        </p:xfrm>
+        <a:graphic xmlns:a="http://schemas.openxmlformats.org/drawingml/2006/main">
+          <a:graphicData uri="http://schemas.openxmlformats.org/drawingml/2006/chart">
+            <c:chart xmlns:r="http://schemas.openxmlformats.org/officeDocument/2006/relationships" xmlns:c="http://schemas.openxmlformats.org/drawingml/2006/chart" r:id="R2ed47b1b21624dc2"/>
+          </a:graphicData>
+        </a:graphic>
+      </p:graphicFrame>
+    </p:spTree>
+    <p:extLst>
+      <p:ext uri="{BB962C8B-B14F-4D97-AF65-F5344CB8AC3E}">
+        <p14:creationId xmlns:p14="http://schemas.microsoft.com/office/powerpoint/2010/main" val="1144958211"/>
+      </p:ext>
+    </p:extLst>
+  </p:cSld>
+</p:sld>
+</file>
+
 <file path=ppt/slides/slide17.xml><?xml version="1.0" encoding="utf-8"?>
 <p:sld xmlns:p="http://schemas.openxmlformats.org/presentationml/2006/main">
   <p:cSld>
@@ -10129,7 +12394,7 @@
           <p:cNvPr id="4" name="Text 2">
             <a:extLst xmlns:a="http://schemas.openxmlformats.org/drawingml/2006/main">
               <a:ext uri="{FF2B5EF4-FFF2-40B4-BE49-F238E27FC236}">
-                <a16:creationId xmlns:a16="http://schemas.microsoft.com/office/drawing/2014/main" id="{C119F8EF-F5DF-40AA-9A65-9DD5DD1FD6A7}"/>
+                <a16:creationId xmlns:a16="http://schemas.microsoft.com/office/drawing/2014/main" id="{B9B8CFF4-E02B-4252-8BD1-762D52CB9695}"/>
               </a:ext>
             </a:extLst>
           </p:cNvPr>
@@ -10164,7 +12429,7 @@
                 <a:ea typeface="Microsoft JhengHei"/>
                 <a:cs typeface="Microsoft JhengHei"/>
               </a:rPr>
-              <a:t>一年兩學期：用實際月份管進度</a:t>
+              <a:t>兩人分工：一人顧需求與營運，一人顧系統</a:t>
             </a:r>
             <a:endParaRPr sz="3000"/>
           </a:p>
@@ -10172,10 +12437,10 @@
       </p:sp>
       <p:sp>
         <p:nvSpPr>
-          <p:cNvPr id="6" name="Text 4">
-            <a:extLst xmlns:a="http://schemas.openxmlformats.org/drawingml/2006/main">
-              <a:ext uri="{FF2B5EF4-FFF2-40B4-BE49-F238E27FC236}">
-                <a16:creationId xmlns:a16="http://schemas.microsoft.com/office/drawing/2014/main" id="{750CE05C-0D67-44F9-A324-DEE1C279251A}"/>
+          <p:cNvPr id="6" name="Shape 4">
+            <a:extLst xmlns:a="http://schemas.openxmlformats.org/drawingml/2006/main">
+              <a:ext uri="{FF2B5EF4-FFF2-40B4-BE49-F238E27FC236}">
+                <a16:creationId xmlns:a16="http://schemas.microsoft.com/office/drawing/2014/main" id="{88E681A0-5409-45C5-8409-963228D47AED}"/>
               </a:ext>
             </a:extLst>
           </p:cNvPr>
@@ -10187,567 +12452,15 @@
         <p:spPr>
           <a:xfrm xmlns:a="http://schemas.openxmlformats.org/drawingml/2006/main">
             <a:off x="731520" y="1783080"/>
-            <a:ext cx="893826" cy="274320"/>
-          </a:xfrm>
-          <a:prstGeom xmlns:a="http://schemas.openxmlformats.org/drawingml/2006/main" prst="rect">
-            <a:avLst/>
-          </a:prstGeom>
-          <a:noFill xmlns:a="http://schemas.openxmlformats.org/drawingml/2006/main"/>
-        </p:spPr>
-        <p:txBody>
-          <a:bodyPr xmlns:a="http://schemas.openxmlformats.org/drawingml/2006/main" wrap="square" lIns="0" tIns="0" rIns="0" bIns="0" anchor="ctr"/>
-          <a:lstStyle xmlns:a="http://schemas.openxmlformats.org/drawingml/2006/main"/>
-          <a:p xmlns:a="http://schemas.openxmlformats.org/drawingml/2006/main">
-            <a:pPr marL="0" indent="0" algn="ctr">
-              <a:buNone/>
-            </a:pPr>
-            <a:r>
-              <a:rPr sz="1200">
-                <a:solidFill>
-                  <a:srgbClr val="7A8CA3"/>
-                </a:solidFill>
-                <a:latin typeface="Microsoft JhengHei"/>
-                <a:ea typeface="Microsoft JhengHei"/>
-                <a:cs typeface="Microsoft JhengHei"/>
-              </a:rPr>
-              <a:t>115/2</a:t>
-            </a:r>
-            <a:endParaRPr sz="1200"/>
-          </a:p>
-        </p:txBody>
-      </p:sp>
-      <p:sp>
-        <p:nvSpPr>
-          <p:cNvPr id="7" name="Text 5">
-            <a:extLst xmlns:a="http://schemas.openxmlformats.org/drawingml/2006/main">
-              <a:ext uri="{FF2B5EF4-FFF2-40B4-BE49-F238E27FC236}">
-                <a16:creationId xmlns:a16="http://schemas.microsoft.com/office/drawing/2014/main" id="{A6172688-1603-49F3-9037-34F87F86AA52}"/>
-              </a:ext>
-            </a:extLst>
-          </p:cNvPr>
-          <p:cNvSpPr>
-            <a:spLocks xmlns:a="http://schemas.openxmlformats.org/drawingml/2006/main" noGrp="1"/>
-          </p:cNvSpPr>
-          <p:nvPr/>
-        </p:nvSpPr>
-        <p:spPr>
-          <a:xfrm xmlns:a="http://schemas.openxmlformats.org/drawingml/2006/main">
-            <a:off x="1625346" y="1783080"/>
-            <a:ext cx="893826" cy="274320"/>
-          </a:xfrm>
-          <a:prstGeom xmlns:a="http://schemas.openxmlformats.org/drawingml/2006/main" prst="rect">
-            <a:avLst/>
-          </a:prstGeom>
-          <a:noFill xmlns:a="http://schemas.openxmlformats.org/drawingml/2006/main"/>
-        </p:spPr>
-        <p:txBody>
-          <a:bodyPr xmlns:a="http://schemas.openxmlformats.org/drawingml/2006/main" wrap="square" lIns="0" tIns="0" rIns="0" bIns="0" anchor="ctr"/>
-          <a:lstStyle xmlns:a="http://schemas.openxmlformats.org/drawingml/2006/main"/>
-          <a:p xmlns:a="http://schemas.openxmlformats.org/drawingml/2006/main">
-            <a:pPr marL="0" indent="0" algn="ctr">
-              <a:buNone/>
-            </a:pPr>
-            <a:r>
-              <a:rPr sz="1200">
-                <a:solidFill>
-                  <a:srgbClr val="7A8CA3"/>
-                </a:solidFill>
-                <a:latin typeface="Microsoft JhengHei"/>
-                <a:ea typeface="Microsoft JhengHei"/>
-                <a:cs typeface="Microsoft JhengHei"/>
-              </a:rPr>
-              <a:t>3月</a:t>
-            </a:r>
-            <a:endParaRPr sz="1200"/>
-          </a:p>
-        </p:txBody>
-      </p:sp>
-      <p:sp>
-        <p:nvSpPr>
-          <p:cNvPr id="8" name="Text 6">
-            <a:extLst xmlns:a="http://schemas.openxmlformats.org/drawingml/2006/main">
-              <a:ext uri="{FF2B5EF4-FFF2-40B4-BE49-F238E27FC236}">
-                <a16:creationId xmlns:a16="http://schemas.microsoft.com/office/drawing/2014/main" id="{8DF420BD-015E-4EC4-9A61-03E00ECF3F6C}"/>
-              </a:ext>
-            </a:extLst>
-          </p:cNvPr>
-          <p:cNvSpPr>
-            <a:spLocks xmlns:a="http://schemas.openxmlformats.org/drawingml/2006/main" noGrp="1"/>
-          </p:cNvSpPr>
-          <p:nvPr/>
-        </p:nvSpPr>
-        <p:spPr>
-          <a:xfrm xmlns:a="http://schemas.openxmlformats.org/drawingml/2006/main">
-            <a:off x="2519172" y="1783080"/>
-            <a:ext cx="893826" cy="274320"/>
-          </a:xfrm>
-          <a:prstGeom xmlns:a="http://schemas.openxmlformats.org/drawingml/2006/main" prst="rect">
-            <a:avLst/>
-          </a:prstGeom>
-          <a:noFill xmlns:a="http://schemas.openxmlformats.org/drawingml/2006/main"/>
-        </p:spPr>
-        <p:txBody>
-          <a:bodyPr xmlns:a="http://schemas.openxmlformats.org/drawingml/2006/main" wrap="square" lIns="0" tIns="0" rIns="0" bIns="0" anchor="ctr"/>
-          <a:lstStyle xmlns:a="http://schemas.openxmlformats.org/drawingml/2006/main"/>
-          <a:p xmlns:a="http://schemas.openxmlformats.org/drawingml/2006/main">
-            <a:pPr marL="0" indent="0" algn="ctr">
-              <a:buNone/>
-            </a:pPr>
-            <a:r>
-              <a:rPr sz="1200">
-                <a:solidFill>
-                  <a:srgbClr val="7A8CA3"/>
-                </a:solidFill>
-                <a:latin typeface="Microsoft JhengHei"/>
-                <a:ea typeface="Microsoft JhengHei"/>
-                <a:cs typeface="Microsoft JhengHei"/>
-              </a:rPr>
-              <a:t>4月</a:t>
-            </a:r>
-            <a:endParaRPr sz="1200"/>
-          </a:p>
-        </p:txBody>
-      </p:sp>
-      <p:sp>
-        <p:nvSpPr>
-          <p:cNvPr id="9" name="Text 7">
-            <a:extLst xmlns:a="http://schemas.openxmlformats.org/drawingml/2006/main">
-              <a:ext uri="{FF2B5EF4-FFF2-40B4-BE49-F238E27FC236}">
-                <a16:creationId xmlns:a16="http://schemas.microsoft.com/office/drawing/2014/main" id="{05F6480C-F537-4BEB-B40F-F6EF40BB37B7}"/>
-              </a:ext>
-            </a:extLst>
-          </p:cNvPr>
-          <p:cNvSpPr>
-            <a:spLocks xmlns:a="http://schemas.openxmlformats.org/drawingml/2006/main" noGrp="1"/>
-          </p:cNvSpPr>
-          <p:nvPr/>
-        </p:nvSpPr>
-        <p:spPr>
-          <a:xfrm xmlns:a="http://schemas.openxmlformats.org/drawingml/2006/main">
-            <a:off x="3412998" y="1783080"/>
-            <a:ext cx="893826" cy="274320"/>
-          </a:xfrm>
-          <a:prstGeom xmlns:a="http://schemas.openxmlformats.org/drawingml/2006/main" prst="rect">
-            <a:avLst/>
-          </a:prstGeom>
-          <a:noFill xmlns:a="http://schemas.openxmlformats.org/drawingml/2006/main"/>
-        </p:spPr>
-        <p:txBody>
-          <a:bodyPr xmlns:a="http://schemas.openxmlformats.org/drawingml/2006/main" wrap="square" lIns="0" tIns="0" rIns="0" bIns="0" anchor="ctr"/>
-          <a:lstStyle xmlns:a="http://schemas.openxmlformats.org/drawingml/2006/main"/>
-          <a:p xmlns:a="http://schemas.openxmlformats.org/drawingml/2006/main">
-            <a:pPr marL="0" indent="0" algn="ctr">
-              <a:buNone/>
-            </a:pPr>
-            <a:r>
-              <a:rPr sz="1200">
-                <a:solidFill>
-                  <a:srgbClr val="7A8CA3"/>
-                </a:solidFill>
-                <a:latin typeface="Microsoft JhengHei"/>
-                <a:ea typeface="Microsoft JhengHei"/>
-                <a:cs typeface="Microsoft JhengHei"/>
-              </a:rPr>
-              <a:t>5月</a:t>
-            </a:r>
-            <a:endParaRPr sz="1200"/>
-          </a:p>
-        </p:txBody>
-      </p:sp>
-      <p:sp>
-        <p:nvSpPr>
-          <p:cNvPr id="10" name="Text 8">
-            <a:extLst xmlns:a="http://schemas.openxmlformats.org/drawingml/2006/main">
-              <a:ext uri="{FF2B5EF4-FFF2-40B4-BE49-F238E27FC236}">
-                <a16:creationId xmlns:a16="http://schemas.microsoft.com/office/drawing/2014/main" id="{84F17DD7-21C0-4EEB-9208-13438D2AF201}"/>
-              </a:ext>
-            </a:extLst>
-          </p:cNvPr>
-          <p:cNvSpPr>
-            <a:spLocks xmlns:a="http://schemas.openxmlformats.org/drawingml/2006/main" noGrp="1"/>
-          </p:cNvSpPr>
-          <p:nvPr/>
-        </p:nvSpPr>
-        <p:spPr>
-          <a:xfrm xmlns:a="http://schemas.openxmlformats.org/drawingml/2006/main">
-            <a:off x="4306824" y="1783080"/>
-            <a:ext cx="893826" cy="274320"/>
-          </a:xfrm>
-          <a:prstGeom xmlns:a="http://schemas.openxmlformats.org/drawingml/2006/main" prst="rect">
-            <a:avLst/>
-          </a:prstGeom>
-          <a:noFill xmlns:a="http://schemas.openxmlformats.org/drawingml/2006/main"/>
-        </p:spPr>
-        <p:txBody>
-          <a:bodyPr xmlns:a="http://schemas.openxmlformats.org/drawingml/2006/main" wrap="square" lIns="0" tIns="0" rIns="0" bIns="0" anchor="ctr"/>
-          <a:lstStyle xmlns:a="http://schemas.openxmlformats.org/drawingml/2006/main"/>
-          <a:p xmlns:a="http://schemas.openxmlformats.org/drawingml/2006/main">
-            <a:pPr marL="0" indent="0" algn="ctr">
-              <a:buNone/>
-            </a:pPr>
-            <a:r>
-              <a:rPr sz="1200">
-                <a:solidFill>
-                  <a:srgbClr val="7A8CA3"/>
-                </a:solidFill>
-                <a:latin typeface="Microsoft JhengHei"/>
-                <a:ea typeface="Microsoft JhengHei"/>
-                <a:cs typeface="Microsoft JhengHei"/>
-              </a:rPr>
-              <a:t>6月</a:t>
-            </a:r>
-            <a:endParaRPr sz="1200"/>
-          </a:p>
-        </p:txBody>
-      </p:sp>
-      <p:sp>
-        <p:nvSpPr>
-          <p:cNvPr id="11" name="Text 9">
-            <a:extLst xmlns:a="http://schemas.openxmlformats.org/drawingml/2006/main">
-              <a:ext uri="{FF2B5EF4-FFF2-40B4-BE49-F238E27FC236}">
-                <a16:creationId xmlns:a16="http://schemas.microsoft.com/office/drawing/2014/main" id="{5CD1FBEE-868C-45F1-879C-75AAFC53DC58}"/>
-              </a:ext>
-            </a:extLst>
-          </p:cNvPr>
-          <p:cNvSpPr>
-            <a:spLocks xmlns:a="http://schemas.openxmlformats.org/drawingml/2006/main" noGrp="1"/>
-          </p:cNvSpPr>
-          <p:nvPr/>
-        </p:nvSpPr>
-        <p:spPr>
-          <a:xfrm xmlns:a="http://schemas.openxmlformats.org/drawingml/2006/main">
-            <a:off x="5200650" y="1783080"/>
-            <a:ext cx="893826" cy="274320"/>
-          </a:xfrm>
-          <a:prstGeom xmlns:a="http://schemas.openxmlformats.org/drawingml/2006/main" prst="rect">
-            <a:avLst/>
-          </a:prstGeom>
-          <a:noFill xmlns:a="http://schemas.openxmlformats.org/drawingml/2006/main"/>
-        </p:spPr>
-        <p:txBody>
-          <a:bodyPr xmlns:a="http://schemas.openxmlformats.org/drawingml/2006/main" wrap="square" lIns="0" tIns="0" rIns="0" bIns="0" anchor="ctr"/>
-          <a:lstStyle xmlns:a="http://schemas.openxmlformats.org/drawingml/2006/main"/>
-          <a:p xmlns:a="http://schemas.openxmlformats.org/drawingml/2006/main">
-            <a:pPr marL="0" indent="0" algn="ctr">
-              <a:buNone/>
-            </a:pPr>
-            <a:r>
-              <a:rPr sz="1200">
-                <a:solidFill>
-                  <a:srgbClr val="7A8CA3"/>
-                </a:solidFill>
-                <a:latin typeface="Microsoft JhengHei"/>
-                <a:ea typeface="Microsoft JhengHei"/>
-                <a:cs typeface="Microsoft JhengHei"/>
-              </a:rPr>
-              <a:t>7月</a:t>
-            </a:r>
-            <a:endParaRPr sz="1200"/>
-          </a:p>
-        </p:txBody>
-      </p:sp>
-      <p:sp>
-        <p:nvSpPr>
-          <p:cNvPr id="12" name="Text 10">
-            <a:extLst xmlns:a="http://schemas.openxmlformats.org/drawingml/2006/main">
-              <a:ext uri="{FF2B5EF4-FFF2-40B4-BE49-F238E27FC236}">
-                <a16:creationId xmlns:a16="http://schemas.microsoft.com/office/drawing/2014/main" id="{3DF6BD7C-6AF6-411A-B983-A925B6CBC87D}"/>
-              </a:ext>
-            </a:extLst>
-          </p:cNvPr>
-          <p:cNvSpPr>
-            <a:spLocks xmlns:a="http://schemas.openxmlformats.org/drawingml/2006/main" noGrp="1"/>
-          </p:cNvSpPr>
-          <p:nvPr/>
-        </p:nvSpPr>
-        <p:spPr>
-          <a:xfrm xmlns:a="http://schemas.openxmlformats.org/drawingml/2006/main">
-            <a:off x="6094476" y="1783080"/>
-            <a:ext cx="893826" cy="274320"/>
-          </a:xfrm>
-          <a:prstGeom xmlns:a="http://schemas.openxmlformats.org/drawingml/2006/main" prst="rect">
-            <a:avLst/>
-          </a:prstGeom>
-          <a:noFill xmlns:a="http://schemas.openxmlformats.org/drawingml/2006/main"/>
-        </p:spPr>
-        <p:txBody>
-          <a:bodyPr xmlns:a="http://schemas.openxmlformats.org/drawingml/2006/main" wrap="square" lIns="0" tIns="0" rIns="0" bIns="0" anchor="ctr"/>
-          <a:lstStyle xmlns:a="http://schemas.openxmlformats.org/drawingml/2006/main"/>
-          <a:p xmlns:a="http://schemas.openxmlformats.org/drawingml/2006/main">
-            <a:pPr marL="0" indent="0" algn="ctr">
-              <a:buNone/>
-            </a:pPr>
-            <a:r>
-              <a:rPr sz="1200">
-                <a:solidFill>
-                  <a:srgbClr val="7A8CA3"/>
-                </a:solidFill>
-                <a:latin typeface="Microsoft JhengHei"/>
-                <a:ea typeface="Microsoft JhengHei"/>
-                <a:cs typeface="Microsoft JhengHei"/>
-              </a:rPr>
-              <a:t>8月</a:t>
-            </a:r>
-            <a:endParaRPr sz="1200"/>
-          </a:p>
-        </p:txBody>
-      </p:sp>
-      <p:sp>
-        <p:nvSpPr>
-          <p:cNvPr id="13" name="Text 11">
-            <a:extLst xmlns:a="http://schemas.openxmlformats.org/drawingml/2006/main">
-              <a:ext uri="{FF2B5EF4-FFF2-40B4-BE49-F238E27FC236}">
-                <a16:creationId xmlns:a16="http://schemas.microsoft.com/office/drawing/2014/main" id="{C1B3BC42-EBF2-463E-BDC3-DF66A67666CB}"/>
-              </a:ext>
-            </a:extLst>
-          </p:cNvPr>
-          <p:cNvSpPr>
-            <a:spLocks xmlns:a="http://schemas.openxmlformats.org/drawingml/2006/main" noGrp="1"/>
-          </p:cNvSpPr>
-          <p:nvPr/>
-        </p:nvSpPr>
-        <p:spPr>
-          <a:xfrm xmlns:a="http://schemas.openxmlformats.org/drawingml/2006/main">
-            <a:off x="6988302" y="1783080"/>
-            <a:ext cx="893826" cy="274320"/>
-          </a:xfrm>
-          <a:prstGeom xmlns:a="http://schemas.openxmlformats.org/drawingml/2006/main" prst="rect">
-            <a:avLst/>
-          </a:prstGeom>
-          <a:noFill xmlns:a="http://schemas.openxmlformats.org/drawingml/2006/main"/>
-        </p:spPr>
-        <p:txBody>
-          <a:bodyPr xmlns:a="http://schemas.openxmlformats.org/drawingml/2006/main" wrap="square" lIns="0" tIns="0" rIns="0" bIns="0" anchor="ctr"/>
-          <a:lstStyle xmlns:a="http://schemas.openxmlformats.org/drawingml/2006/main"/>
-          <a:p xmlns:a="http://schemas.openxmlformats.org/drawingml/2006/main">
-            <a:pPr marL="0" indent="0" algn="ctr">
-              <a:buNone/>
-            </a:pPr>
-            <a:r>
-              <a:rPr sz="1200">
-                <a:solidFill>
-                  <a:srgbClr val="7A8CA3"/>
-                </a:solidFill>
-                <a:latin typeface="Microsoft JhengHei"/>
-                <a:ea typeface="Microsoft JhengHei"/>
-                <a:cs typeface="Microsoft JhengHei"/>
-              </a:rPr>
-              <a:t>9月</a:t>
-            </a:r>
-            <a:endParaRPr sz="1200"/>
-          </a:p>
-        </p:txBody>
-      </p:sp>
-      <p:sp>
-        <p:nvSpPr>
-          <p:cNvPr id="14" name="Text 12">
-            <a:extLst xmlns:a="http://schemas.openxmlformats.org/drawingml/2006/main">
-              <a:ext uri="{FF2B5EF4-FFF2-40B4-BE49-F238E27FC236}">
-                <a16:creationId xmlns:a16="http://schemas.microsoft.com/office/drawing/2014/main" id="{4173730A-AD3F-4629-8749-02C465222A2F}"/>
-              </a:ext>
-            </a:extLst>
-          </p:cNvPr>
-          <p:cNvSpPr>
-            <a:spLocks xmlns:a="http://schemas.openxmlformats.org/drawingml/2006/main" noGrp="1"/>
-          </p:cNvSpPr>
-          <p:nvPr/>
-        </p:nvSpPr>
-        <p:spPr>
-          <a:xfrm xmlns:a="http://schemas.openxmlformats.org/drawingml/2006/main">
-            <a:off x="7882128" y="1783080"/>
-            <a:ext cx="893826" cy="274320"/>
-          </a:xfrm>
-          <a:prstGeom xmlns:a="http://schemas.openxmlformats.org/drawingml/2006/main" prst="rect">
-            <a:avLst/>
-          </a:prstGeom>
-          <a:noFill xmlns:a="http://schemas.openxmlformats.org/drawingml/2006/main"/>
-        </p:spPr>
-        <p:txBody>
-          <a:bodyPr xmlns:a="http://schemas.openxmlformats.org/drawingml/2006/main" wrap="square" lIns="0" tIns="0" rIns="0" bIns="0" anchor="ctr"/>
-          <a:lstStyle xmlns:a="http://schemas.openxmlformats.org/drawingml/2006/main"/>
-          <a:p xmlns:a="http://schemas.openxmlformats.org/drawingml/2006/main">
-            <a:pPr marL="0" indent="0" algn="ctr">
-              <a:buNone/>
-            </a:pPr>
-            <a:r>
-              <a:rPr sz="1200">
-                <a:solidFill>
-                  <a:srgbClr val="7A8CA3"/>
-                </a:solidFill>
-                <a:latin typeface="Microsoft JhengHei"/>
-                <a:ea typeface="Microsoft JhengHei"/>
-                <a:cs typeface="Microsoft JhengHei"/>
-              </a:rPr>
-              <a:t>10月</a:t>
-            </a:r>
-            <a:endParaRPr sz="1200"/>
-          </a:p>
-        </p:txBody>
-      </p:sp>
-      <p:sp>
-        <p:nvSpPr>
-          <p:cNvPr id="15" name="Text 13">
-            <a:extLst xmlns:a="http://schemas.openxmlformats.org/drawingml/2006/main">
-              <a:ext uri="{FF2B5EF4-FFF2-40B4-BE49-F238E27FC236}">
-                <a16:creationId xmlns:a16="http://schemas.microsoft.com/office/drawing/2014/main" id="{C3727586-7BC0-4AA2-B812-CF674A06E8CD}"/>
-              </a:ext>
-            </a:extLst>
-          </p:cNvPr>
-          <p:cNvSpPr>
-            <a:spLocks xmlns:a="http://schemas.openxmlformats.org/drawingml/2006/main" noGrp="1"/>
-          </p:cNvSpPr>
-          <p:nvPr/>
-        </p:nvSpPr>
-        <p:spPr>
-          <a:xfrm xmlns:a="http://schemas.openxmlformats.org/drawingml/2006/main">
-            <a:off x="8775954" y="1783080"/>
-            <a:ext cx="893826" cy="274320"/>
-          </a:xfrm>
-          <a:prstGeom xmlns:a="http://schemas.openxmlformats.org/drawingml/2006/main" prst="rect">
-            <a:avLst/>
-          </a:prstGeom>
-          <a:noFill xmlns:a="http://schemas.openxmlformats.org/drawingml/2006/main"/>
-        </p:spPr>
-        <p:txBody>
-          <a:bodyPr xmlns:a="http://schemas.openxmlformats.org/drawingml/2006/main" wrap="square" lIns="0" tIns="0" rIns="0" bIns="0" anchor="ctr"/>
-          <a:lstStyle xmlns:a="http://schemas.openxmlformats.org/drawingml/2006/main"/>
-          <a:p xmlns:a="http://schemas.openxmlformats.org/drawingml/2006/main">
-            <a:pPr marL="0" indent="0" algn="ctr">
-              <a:buNone/>
-            </a:pPr>
-            <a:r>
-              <a:rPr sz="1200">
-                <a:solidFill>
-                  <a:srgbClr val="7A8CA3"/>
-                </a:solidFill>
-                <a:latin typeface="Microsoft JhengHei"/>
-                <a:ea typeface="Microsoft JhengHei"/>
-                <a:cs typeface="Microsoft JhengHei"/>
-              </a:rPr>
-              <a:t>11月</a:t>
-            </a:r>
-            <a:endParaRPr sz="1200"/>
-          </a:p>
-        </p:txBody>
-      </p:sp>
-      <p:sp>
-        <p:nvSpPr>
-          <p:cNvPr id="16" name="Text 14">
-            <a:extLst xmlns:a="http://schemas.openxmlformats.org/drawingml/2006/main">
-              <a:ext uri="{FF2B5EF4-FFF2-40B4-BE49-F238E27FC236}">
-                <a16:creationId xmlns:a16="http://schemas.microsoft.com/office/drawing/2014/main" id="{EEB3137D-C277-4BFF-AAFF-55F9FFCCA81D}"/>
-              </a:ext>
-            </a:extLst>
-          </p:cNvPr>
-          <p:cNvSpPr>
-            <a:spLocks xmlns:a="http://schemas.openxmlformats.org/drawingml/2006/main" noGrp="1"/>
-          </p:cNvSpPr>
-          <p:nvPr/>
-        </p:nvSpPr>
-        <p:spPr>
-          <a:xfrm xmlns:a="http://schemas.openxmlformats.org/drawingml/2006/main">
-            <a:off x="9669780" y="1783080"/>
-            <a:ext cx="893826" cy="274320"/>
-          </a:xfrm>
-          <a:prstGeom xmlns:a="http://schemas.openxmlformats.org/drawingml/2006/main" prst="rect">
-            <a:avLst/>
-          </a:prstGeom>
-          <a:noFill xmlns:a="http://schemas.openxmlformats.org/drawingml/2006/main"/>
-        </p:spPr>
-        <p:txBody>
-          <a:bodyPr xmlns:a="http://schemas.openxmlformats.org/drawingml/2006/main" wrap="square" lIns="0" tIns="0" rIns="0" bIns="0" anchor="ctr"/>
-          <a:lstStyle xmlns:a="http://schemas.openxmlformats.org/drawingml/2006/main"/>
-          <a:p xmlns:a="http://schemas.openxmlformats.org/drawingml/2006/main">
-            <a:pPr marL="0" indent="0" algn="ctr">
-              <a:buNone/>
-            </a:pPr>
-            <a:r>
-              <a:rPr sz="1200">
-                <a:solidFill>
-                  <a:srgbClr val="7A8CA3"/>
-                </a:solidFill>
-                <a:latin typeface="Microsoft JhengHei"/>
-                <a:ea typeface="Microsoft JhengHei"/>
-                <a:cs typeface="Microsoft JhengHei"/>
-              </a:rPr>
-              <a:t>12月</a:t>
-            </a:r>
-            <a:endParaRPr sz="1200"/>
-          </a:p>
-        </p:txBody>
-      </p:sp>
-      <p:sp>
-        <p:nvSpPr>
-          <p:cNvPr id="17" name="Text 15">
-            <a:extLst xmlns:a="http://schemas.openxmlformats.org/drawingml/2006/main">
-              <a:ext uri="{FF2B5EF4-FFF2-40B4-BE49-F238E27FC236}">
-                <a16:creationId xmlns:a16="http://schemas.microsoft.com/office/drawing/2014/main" id="{CD6C11BB-135C-4DD4-B084-C935FAAD0E07}"/>
-              </a:ext>
-            </a:extLst>
-          </p:cNvPr>
-          <p:cNvSpPr>
-            <a:spLocks xmlns:a="http://schemas.openxmlformats.org/drawingml/2006/main" noGrp="1"/>
-          </p:cNvSpPr>
-          <p:nvPr/>
-        </p:nvSpPr>
-        <p:spPr>
-          <a:xfrm xmlns:a="http://schemas.openxmlformats.org/drawingml/2006/main">
-            <a:off x="10563606" y="1783080"/>
-            <a:ext cx="893826" cy="274320"/>
-          </a:xfrm>
-          <a:prstGeom xmlns:a="http://schemas.openxmlformats.org/drawingml/2006/main" prst="rect">
-            <a:avLst/>
-          </a:prstGeom>
-          <a:noFill xmlns:a="http://schemas.openxmlformats.org/drawingml/2006/main"/>
-        </p:spPr>
-        <p:txBody>
-          <a:bodyPr xmlns:a="http://schemas.openxmlformats.org/drawingml/2006/main" wrap="square" lIns="0" tIns="0" rIns="0" bIns="0" anchor="ctr"/>
-          <a:lstStyle xmlns:a="http://schemas.openxmlformats.org/drawingml/2006/main"/>
-          <a:p xmlns:a="http://schemas.openxmlformats.org/drawingml/2006/main">
-            <a:pPr marL="0" indent="0" algn="ctr">
-              <a:buNone/>
-            </a:pPr>
-            <a:r>
-              <a:rPr sz="1200">
-                <a:solidFill>
-                  <a:srgbClr val="7A8CA3"/>
-                </a:solidFill>
-                <a:latin typeface="Microsoft JhengHei"/>
-                <a:ea typeface="Microsoft JhengHei"/>
-                <a:cs typeface="Microsoft JhengHei"/>
-              </a:rPr>
-              <a:t>116/1</a:t>
-            </a:r>
-            <a:endParaRPr sz="1200"/>
-          </a:p>
-        </p:txBody>
-      </p:sp>
-      <p:sp>
-        <p:nvSpPr>
-          <p:cNvPr id="18" name="Shape 16">
-            <a:extLst xmlns:a="http://schemas.openxmlformats.org/drawingml/2006/main">
-              <a:ext uri="{FF2B5EF4-FFF2-40B4-BE49-F238E27FC236}">
-                <a16:creationId xmlns:a16="http://schemas.microsoft.com/office/drawing/2014/main" id="{2CA6B60B-938D-4823-BCC2-411DD7C22F02}"/>
-              </a:ext>
-            </a:extLst>
-          </p:cNvPr>
-          <p:cNvSpPr>
-            <a:spLocks xmlns:a="http://schemas.openxmlformats.org/drawingml/2006/main" noGrp="1"/>
-          </p:cNvSpPr>
-          <p:nvPr/>
-        </p:nvSpPr>
-        <p:spPr>
-          <a:xfrm xmlns:a="http://schemas.openxmlformats.org/drawingml/2006/main">
-            <a:off x="758952" y="2112264"/>
-            <a:ext cx="1285875" cy="384048"/>
+            <a:ext cx="5257800" cy="3611880"/>
           </a:xfrm>
           <a:prstGeom xmlns:a="http://schemas.openxmlformats.org/drawingml/2006/main" prst="roundRect">
             <a:avLst>
-              <a:gd name="adj" fmla="val 23810"/>
+              <a:gd name="adj" fmla="val 4051"/>
             </a:avLst>
           </a:prstGeom>
           <a:solidFill xmlns:a="http://schemas.openxmlformats.org/drawingml/2006/main">
-            <a:srgbClr val="EDF2F8"/>
+            <a:srgbClr val="FFFFFF"/>
           </a:solidFill>
           <a:ln xmlns:a="http://schemas.openxmlformats.org/drawingml/2006/main" w="12700">
             <a:solidFill>
@@ -10763,158 +12476,25 @@
       </p:sp>
       <p:sp>
         <p:nvSpPr>
-          <p:cNvPr id="19" name="Text 17">
-            <a:extLst xmlns:a="http://schemas.openxmlformats.org/drawingml/2006/main">
-              <a:ext uri="{FF2B5EF4-FFF2-40B4-BE49-F238E27FC236}">
-                <a16:creationId xmlns:a16="http://schemas.microsoft.com/office/drawing/2014/main" id="{A6670DA9-0465-461E-AA7C-02D55AB305EA}"/>
-              </a:ext>
-            </a:extLst>
-          </p:cNvPr>
-          <p:cNvSpPr>
-            <a:spLocks xmlns:a="http://schemas.openxmlformats.org/drawingml/2006/main" noGrp="1"/>
-          </p:cNvSpPr>
-          <p:nvPr/>
-        </p:nvSpPr>
-        <p:spPr>
-          <a:xfrm xmlns:a="http://schemas.openxmlformats.org/drawingml/2006/main">
-            <a:off x="731520" y="2112264"/>
-            <a:ext cx="1340739" cy="384048"/>
-          </a:xfrm>
-          <a:prstGeom xmlns:a="http://schemas.openxmlformats.org/drawingml/2006/main" prst="rect">
-            <a:avLst/>
-          </a:prstGeom>
-          <a:noFill xmlns:a="http://schemas.openxmlformats.org/drawingml/2006/main"/>
-        </p:spPr>
-        <p:txBody>
-          <a:bodyPr xmlns:a="http://schemas.openxmlformats.org/drawingml/2006/main" wrap="square" lIns="0" tIns="0" rIns="0" bIns="0" anchor="ctr"/>
-          <a:lstStyle xmlns:a="http://schemas.openxmlformats.org/drawingml/2006/main"/>
-          <a:p xmlns:a="http://schemas.openxmlformats.org/drawingml/2006/main">
-            <a:pPr marL="0" indent="0" algn="ctr">
-              <a:buNone/>
-            </a:pPr>
-            <a:r>
-              <a:rPr sz="1200" b="1">
-                <a:solidFill>
-                  <a:srgbClr val="14243A"/>
-                </a:solidFill>
-                <a:latin typeface="Microsoft JhengHei"/>
-                <a:ea typeface="Microsoft JhengHei"/>
-                <a:cs typeface="Microsoft JhengHei"/>
-              </a:rPr>
-              <a:t>起始</a:t>
-            </a:r>
-            <a:endParaRPr sz="1200"/>
-          </a:p>
-        </p:txBody>
-      </p:sp>
-      <p:sp>
-        <p:nvSpPr>
-          <p:cNvPr id="20" name="Shape 18">
-            <a:extLst xmlns:a="http://schemas.openxmlformats.org/drawingml/2006/main">
-              <a:ext uri="{FF2B5EF4-FFF2-40B4-BE49-F238E27FC236}">
-                <a16:creationId xmlns:a16="http://schemas.microsoft.com/office/drawing/2014/main" id="{167B7FF5-F52F-4975-B88F-F9F8D17EA6DF}"/>
-              </a:ext>
-            </a:extLst>
-          </p:cNvPr>
-          <p:cNvSpPr>
-            <a:spLocks xmlns:a="http://schemas.openxmlformats.org/drawingml/2006/main" noGrp="1"/>
-          </p:cNvSpPr>
-          <p:nvPr/>
-        </p:nvSpPr>
-        <p:spPr>
-          <a:xfrm xmlns:a="http://schemas.openxmlformats.org/drawingml/2006/main">
-            <a:off x="2099691" y="2112264"/>
-            <a:ext cx="1554023" cy="384048"/>
-          </a:xfrm>
-          <a:prstGeom xmlns:a="http://schemas.openxmlformats.org/drawingml/2006/main" prst="roundRect">
-            <a:avLst>
-              <a:gd name="adj" fmla="val 23810"/>
-            </a:avLst>
-          </a:prstGeom>
-          <a:solidFill xmlns:a="http://schemas.openxmlformats.org/drawingml/2006/main">
-            <a:srgbClr val="EDF2F8"/>
-          </a:solidFill>
-          <a:ln xmlns:a="http://schemas.openxmlformats.org/drawingml/2006/main" w="12700">
-            <a:solidFill>
-              <a:srgbClr val="D3DEEA"/>
-            </a:solidFill>
-            <a:prstDash val="solid"/>
-          </a:ln>
-        </p:spPr>
-        <p:txBody xmlns:a="http://schemas.openxmlformats.org/drawingml/2006/main">
-          <a:bodyPr/>
-          <a:p/>
-        </p:txBody>
-      </p:sp>
-      <p:sp>
-        <p:nvSpPr>
-          <p:cNvPr id="21" name="Text 19">
-            <a:extLst xmlns:a="http://schemas.openxmlformats.org/drawingml/2006/main">
-              <a:ext uri="{FF2B5EF4-FFF2-40B4-BE49-F238E27FC236}">
-                <a16:creationId xmlns:a16="http://schemas.microsoft.com/office/drawing/2014/main" id="{DCCDDD2A-5E57-4149-A269-2104A0A45C51}"/>
-              </a:ext>
-            </a:extLst>
-          </p:cNvPr>
-          <p:cNvSpPr>
-            <a:spLocks xmlns:a="http://schemas.openxmlformats.org/drawingml/2006/main" noGrp="1"/>
-          </p:cNvSpPr>
-          <p:nvPr/>
-        </p:nvSpPr>
-        <p:spPr>
-          <a:xfrm xmlns:a="http://schemas.openxmlformats.org/drawingml/2006/main">
-            <a:off x="2072259" y="2112264"/>
-            <a:ext cx="1608887" cy="384048"/>
-          </a:xfrm>
-          <a:prstGeom xmlns:a="http://schemas.openxmlformats.org/drawingml/2006/main" prst="rect">
-            <a:avLst/>
-          </a:prstGeom>
-          <a:noFill xmlns:a="http://schemas.openxmlformats.org/drawingml/2006/main"/>
-        </p:spPr>
-        <p:txBody>
-          <a:bodyPr xmlns:a="http://schemas.openxmlformats.org/drawingml/2006/main" wrap="square" lIns="0" tIns="0" rIns="0" bIns="0" anchor="ctr"/>
-          <a:lstStyle xmlns:a="http://schemas.openxmlformats.org/drawingml/2006/main"/>
-          <a:p xmlns:a="http://schemas.openxmlformats.org/drawingml/2006/main">
-            <a:pPr marL="0" indent="0" algn="ctr">
-              <a:buNone/>
-            </a:pPr>
-            <a:r>
-              <a:rPr sz="1200" b="1">
-                <a:solidFill>
-                  <a:srgbClr val="14243A"/>
-                </a:solidFill>
-                <a:latin typeface="Microsoft JhengHei"/>
-                <a:ea typeface="Microsoft JhengHei"/>
-                <a:cs typeface="Microsoft JhengHei"/>
-              </a:rPr>
-              <a:t>精化</a:t>
-            </a:r>
-            <a:endParaRPr sz="1200"/>
-          </a:p>
-        </p:txBody>
-      </p:sp>
-      <p:sp>
-        <p:nvSpPr>
-          <p:cNvPr id="22" name="Shape 20">
-            <a:extLst xmlns:a="http://schemas.openxmlformats.org/drawingml/2006/main">
-              <a:ext uri="{FF2B5EF4-FFF2-40B4-BE49-F238E27FC236}">
-                <a16:creationId xmlns:a16="http://schemas.microsoft.com/office/drawing/2014/main" id="{60ACEE37-122A-4799-BB96-380889122AEF}"/>
-              </a:ext>
-            </a:extLst>
-          </p:cNvPr>
-          <p:cNvSpPr>
-            <a:spLocks xmlns:a="http://schemas.openxmlformats.org/drawingml/2006/main" noGrp="1"/>
-          </p:cNvSpPr>
-          <p:nvPr/>
-        </p:nvSpPr>
-        <p:spPr>
-          <a:xfrm xmlns:a="http://schemas.openxmlformats.org/drawingml/2006/main">
-            <a:off x="3708578" y="2112264"/>
-            <a:ext cx="4414266" cy="384048"/>
-          </a:xfrm>
-          <a:prstGeom xmlns:a="http://schemas.openxmlformats.org/drawingml/2006/main" prst="roundRect">
-            <a:avLst>
-              <a:gd name="adj" fmla="val 23810"/>
-            </a:avLst>
+          <p:cNvPr id="7" name="Shape 5">
+            <a:extLst xmlns:a="http://schemas.openxmlformats.org/drawingml/2006/main">
+              <a:ext uri="{FF2B5EF4-FFF2-40B4-BE49-F238E27FC236}">
+                <a16:creationId xmlns:a16="http://schemas.microsoft.com/office/drawing/2014/main" id="{E76B4F59-4499-4213-A914-8E3D6E72C9BE}"/>
+              </a:ext>
+            </a:extLst>
+          </p:cNvPr>
+          <p:cNvSpPr>
+            <a:spLocks xmlns:a="http://schemas.openxmlformats.org/drawingml/2006/main" noGrp="1"/>
+          </p:cNvSpPr>
+          <p:nvPr/>
+        </p:nvSpPr>
+        <p:spPr>
+          <a:xfrm xmlns:a="http://schemas.openxmlformats.org/drawingml/2006/main">
+            <a:off x="3031236" y="2011680"/>
+            <a:ext cx="658368" cy="658368"/>
+          </a:xfrm>
+          <a:prstGeom xmlns:a="http://schemas.openxmlformats.org/drawingml/2006/main" prst="ellipse">
+            <a:avLst/>
           </a:prstGeom>
           <a:solidFill xmlns:a="http://schemas.openxmlformats.org/drawingml/2006/main">
             <a:srgbClr val="E2EDF9"/>
@@ -10931,24 +12511,54 @@
           <a:p/>
         </p:txBody>
       </p:sp>
-      <p:sp>
-        <p:nvSpPr>
-          <p:cNvPr id="23" name="Text 21">
-            <a:extLst xmlns:a="http://schemas.openxmlformats.org/drawingml/2006/main">
-              <a:ext uri="{FF2B5EF4-FFF2-40B4-BE49-F238E27FC236}">
-                <a16:creationId xmlns:a16="http://schemas.microsoft.com/office/drawing/2014/main" id="{66149992-F0B7-4DEC-97E1-9E72FAC929B6}"/>
-              </a:ext>
-            </a:extLst>
-          </p:cNvPr>
-          <p:cNvSpPr>
-            <a:spLocks xmlns:a="http://schemas.openxmlformats.org/drawingml/2006/main" noGrp="1"/>
-          </p:cNvSpPr>
-          <p:nvPr/>
-        </p:nvSpPr>
-        <p:spPr>
-          <a:xfrm xmlns:a="http://schemas.openxmlformats.org/drawingml/2006/main">
-            <a:off x="3681146" y="2112264"/>
-            <a:ext cx="4469130" cy="384048"/>
+      <p:pic>
+        <p:nvPicPr>
+          <p:cNvPr id="8" name="Image 0">
+            <a:extLst xmlns:a="http://schemas.openxmlformats.org/drawingml/2006/main">
+              <a:ext uri="{FF2B5EF4-FFF2-40B4-BE49-F238E27FC236}">
+                <a16:creationId xmlns:a16="http://schemas.microsoft.com/office/drawing/2014/main" id="{EDD4EF95-F430-4C5B-813C-59626F21DCB6}"/>
+              </a:ext>
+            </a:extLst>
+          </p:cNvPr>
+          <p:cNvPicPr>
+            <a:picLocks xmlns:a="http://schemas.openxmlformats.org/drawingml/2006/main" noChangeAspect="1"/>
+          </p:cNvPicPr>
+          <p:nvPr/>
+        </p:nvPicPr>
+        <p:blipFill>
+          <a:blip xmlns:r="http://schemas.openxmlformats.org/officeDocument/2006/relationships" xmlns:a="http://schemas.openxmlformats.org/drawingml/2006/main" r:embed="R8004c86ae98f4506"/>
+          <a:stretch xmlns:a="http://schemas.openxmlformats.org/drawingml/2006/main">
+            <a:fillRect l="0" t="0" r="0" b="0"/>
+          </a:stretch>
+        </p:blipFill>
+        <p:spPr>
+          <a:xfrm xmlns:a="http://schemas.openxmlformats.org/drawingml/2006/main">
+            <a:off x="3177540" y="2157984"/>
+            <a:ext cx="365760" cy="365760"/>
+          </a:xfrm>
+          <a:prstGeom xmlns:a="http://schemas.openxmlformats.org/drawingml/2006/main" prst="rect">
+            <a:avLst/>
+          </a:prstGeom>
+        </p:spPr>
+      </p:pic>
+      <p:sp>
+        <p:nvSpPr>
+          <p:cNvPr id="9" name="Text 6">
+            <a:extLst xmlns:a="http://schemas.openxmlformats.org/drawingml/2006/main">
+              <a:ext uri="{FF2B5EF4-FFF2-40B4-BE49-F238E27FC236}">
+                <a16:creationId xmlns:a16="http://schemas.microsoft.com/office/drawing/2014/main" id="{AB05FFBB-F3A1-4E2E-A848-8A9E15C43F8E}"/>
+              </a:ext>
+            </a:extLst>
+          </p:cNvPr>
+          <p:cNvSpPr>
+            <a:spLocks xmlns:a="http://schemas.openxmlformats.org/drawingml/2006/main" noGrp="1"/>
+          </p:cNvSpPr>
+          <p:nvPr/>
+        </p:nvSpPr>
+        <p:spPr>
+          <a:xfrm xmlns:a="http://schemas.openxmlformats.org/drawingml/2006/main">
+            <a:off x="731520" y="2743200"/>
+            <a:ext cx="5257800" cy="411480"/>
           </a:xfrm>
           <a:prstGeom xmlns:a="http://schemas.openxmlformats.org/drawingml/2006/main" prst="rect">
             <a:avLst/>
@@ -10963,7 +12573,7 @@
               <a:buNone/>
             </a:pPr>
             <a:r>
-              <a:rPr sz="1200" b="1">
+              <a:rPr sz="2000" b="1">
                 <a:solidFill>
                   <a:srgbClr val="14243A"/>
                 </a:solidFill>
@@ -10971,69 +12581,30 @@
                 <a:ea typeface="Microsoft JhengHei"/>
                 <a:cs typeface="Microsoft JhengHei"/>
               </a:rPr>
-              <a:t>建構</a:t>
-            </a:r>
-            <a:endParaRPr sz="1200"/>
-          </a:p>
-        </p:txBody>
-      </p:sp>
-      <p:sp>
-        <p:nvSpPr>
-          <p:cNvPr id="24" name="Shape 22">
-            <a:extLst xmlns:a="http://schemas.openxmlformats.org/drawingml/2006/main">
-              <a:ext uri="{FF2B5EF4-FFF2-40B4-BE49-F238E27FC236}">
-                <a16:creationId xmlns:a16="http://schemas.microsoft.com/office/drawing/2014/main" id="{1E2DD23C-1F13-4B52-A47E-C4E8B7CD69D4}"/>
-              </a:ext>
-            </a:extLst>
-          </p:cNvPr>
-          <p:cNvSpPr>
-            <a:spLocks xmlns:a="http://schemas.openxmlformats.org/drawingml/2006/main" noGrp="1"/>
-          </p:cNvSpPr>
-          <p:nvPr/>
-        </p:nvSpPr>
-        <p:spPr>
-          <a:xfrm xmlns:a="http://schemas.openxmlformats.org/drawingml/2006/main">
-            <a:off x="8177708" y="2112264"/>
-            <a:ext cx="3252292" cy="384048"/>
-          </a:xfrm>
-          <a:prstGeom xmlns:a="http://schemas.openxmlformats.org/drawingml/2006/main" prst="roundRect">
-            <a:avLst>
-              <a:gd name="adj" fmla="val 23810"/>
-            </a:avLst>
-          </a:prstGeom>
-          <a:solidFill xmlns:a="http://schemas.openxmlformats.org/drawingml/2006/main">
-            <a:srgbClr val="FDEEDF"/>
-          </a:solidFill>
-          <a:ln xmlns:a="http://schemas.openxmlformats.org/drawingml/2006/main" w="12700">
-            <a:solidFill>
-              <a:srgbClr val="D46A12"/>
-            </a:solidFill>
-            <a:prstDash val="solid"/>
-          </a:ln>
-        </p:spPr>
-        <p:txBody xmlns:a="http://schemas.openxmlformats.org/drawingml/2006/main">
-          <a:bodyPr/>
-          <a:p/>
-        </p:txBody>
-      </p:sp>
-      <p:sp>
-        <p:nvSpPr>
-          <p:cNvPr id="25" name="Text 23">
-            <a:extLst xmlns:a="http://schemas.openxmlformats.org/drawingml/2006/main">
-              <a:ext uri="{FF2B5EF4-FFF2-40B4-BE49-F238E27FC236}">
-                <a16:creationId xmlns:a16="http://schemas.microsoft.com/office/drawing/2014/main" id="{AAAA81B3-D9E4-41F5-A3B7-43021EAC0547}"/>
-              </a:ext>
-            </a:extLst>
-          </p:cNvPr>
-          <p:cNvSpPr>
-            <a:spLocks xmlns:a="http://schemas.openxmlformats.org/drawingml/2006/main" noGrp="1"/>
-          </p:cNvSpPr>
-          <p:nvPr/>
-        </p:nvSpPr>
-        <p:spPr>
-          <a:xfrm xmlns:a="http://schemas.openxmlformats.org/drawingml/2006/main">
-            <a:off x="8150276" y="2112264"/>
-            <a:ext cx="3307156" cy="384048"/>
+              <a:t>陳威帆</a:t>
+            </a:r>
+            <a:endParaRPr sz="2000"/>
+          </a:p>
+        </p:txBody>
+      </p:sp>
+      <p:sp>
+        <p:nvSpPr>
+          <p:cNvPr id="10" name="Text 7">
+            <a:extLst xmlns:a="http://schemas.openxmlformats.org/drawingml/2006/main">
+              <a:ext uri="{FF2B5EF4-FFF2-40B4-BE49-F238E27FC236}">
+                <a16:creationId xmlns:a16="http://schemas.microsoft.com/office/drawing/2014/main" id="{AF192125-9823-46B2-B755-8AA0B6280394}"/>
+              </a:ext>
+            </a:extLst>
+          </p:cNvPr>
+          <p:cNvSpPr>
+            <a:spLocks xmlns:a="http://schemas.openxmlformats.org/drawingml/2006/main" noGrp="1"/>
+          </p:cNvSpPr>
+          <p:nvPr/>
+        </p:nvSpPr>
+        <p:spPr>
+          <a:xfrm xmlns:a="http://schemas.openxmlformats.org/drawingml/2006/main">
+            <a:off x="731520" y="3154680"/>
+            <a:ext cx="5257800" cy="292608"/>
           </a:xfrm>
           <a:prstGeom xmlns:a="http://schemas.openxmlformats.org/drawingml/2006/main" prst="rect">
             <a:avLst/>
@@ -11048,15 +12619,15 @@
               <a:buNone/>
             </a:pPr>
             <a:r>
-              <a:rPr sz="1200" b="1">
-                <a:solidFill>
-                  <a:srgbClr val="14243A"/>
+              <a:rPr sz="1200">
+                <a:solidFill>
+                  <a:srgbClr val="D46A12"/>
                 </a:solidFill>
                 <a:latin typeface="Microsoft JhengHei"/>
                 <a:ea typeface="Microsoft JhengHei"/>
                 <a:cs typeface="Microsoft JhengHei"/>
               </a:rPr>
-              <a:t>移轉（進行中）</a:t>
+              <a:t>組長 · 11246044</a:t>
             </a:r>
             <a:endParaRPr sz="1200"/>
           </a:p>
@@ -11064,59 +12635,22 @@
       </p:sp>
       <p:sp>
         <p:nvSpPr>
-          <p:cNvPr id="26" name="Shape 24">
-            <a:extLst xmlns:a="http://schemas.openxmlformats.org/drawingml/2006/main">
-              <a:ext uri="{FF2B5EF4-FFF2-40B4-BE49-F238E27FC236}">
-                <a16:creationId xmlns:a16="http://schemas.microsoft.com/office/drawing/2014/main" id="{9C78BB86-82BA-44D9-99B4-72053C76AD3E}"/>
-              </a:ext>
-            </a:extLst>
-          </p:cNvPr>
-          <p:cNvSpPr>
-            <a:spLocks xmlns:a="http://schemas.openxmlformats.org/drawingml/2006/main" noGrp="1"/>
-          </p:cNvSpPr>
-          <p:nvPr/>
-        </p:nvSpPr>
-        <p:spPr>
-          <a:xfrm xmlns:a="http://schemas.openxmlformats.org/drawingml/2006/main">
-            <a:off x="4251343" y="2587752"/>
-            <a:ext cx="164592" cy="164592"/>
-          </a:xfrm>
-          <a:prstGeom xmlns:a="http://schemas.openxmlformats.org/drawingml/2006/main" prst="ellipse">
-            <a:avLst/>
-          </a:prstGeom>
-          <a:solidFill xmlns:a="http://schemas.openxmlformats.org/drawingml/2006/main">
-            <a:srgbClr val="D46A12"/>
-          </a:solidFill>
-          <a:ln xmlns:a="http://schemas.openxmlformats.org/drawingml/2006/main" w="12700">
-            <a:solidFill>
-              <a:srgbClr val="D46A12"/>
-            </a:solidFill>
-            <a:prstDash val="solid"/>
-          </a:ln>
-        </p:spPr>
-        <p:txBody xmlns:a="http://schemas.openxmlformats.org/drawingml/2006/main">
-          <a:bodyPr/>
-          <a:p/>
-        </p:txBody>
-      </p:sp>
-      <p:sp>
-        <p:nvSpPr>
-          <p:cNvPr id="27" name="Text 25">
-            <a:extLst xmlns:a="http://schemas.openxmlformats.org/drawingml/2006/main">
-              <a:ext uri="{FF2B5EF4-FFF2-40B4-BE49-F238E27FC236}">
-                <a16:creationId xmlns:a16="http://schemas.microsoft.com/office/drawing/2014/main" id="{1831BA3F-DA7A-4203-9754-4624537A0E50}"/>
-              </a:ext>
-            </a:extLst>
-          </p:cNvPr>
-          <p:cNvSpPr>
-            <a:spLocks xmlns:a="http://schemas.openxmlformats.org/drawingml/2006/main" noGrp="1"/>
-          </p:cNvSpPr>
-          <p:nvPr/>
-        </p:nvSpPr>
-        <p:spPr>
-          <a:xfrm xmlns:a="http://schemas.openxmlformats.org/drawingml/2006/main">
-            <a:off x="3784999" y="2788920"/>
-            <a:ext cx="1097280" cy="457200"/>
+          <p:cNvPr id="11" name="Text 8">
+            <a:extLst xmlns:a="http://schemas.openxmlformats.org/drawingml/2006/main">
+              <a:ext uri="{FF2B5EF4-FFF2-40B4-BE49-F238E27FC236}">
+                <a16:creationId xmlns:a16="http://schemas.microsoft.com/office/drawing/2014/main" id="{A3A718B3-CAC3-4AD1-A310-D4FA4F81AD4F}"/>
+              </a:ext>
+            </a:extLst>
+          </p:cNvPr>
+          <p:cNvSpPr>
+            <a:spLocks xmlns:a="http://schemas.openxmlformats.org/drawingml/2006/main" noGrp="1"/>
+          </p:cNvSpPr>
+          <p:nvPr/>
+        </p:nvSpPr>
+        <p:spPr>
+          <a:xfrm xmlns:a="http://schemas.openxmlformats.org/drawingml/2006/main">
+            <a:off x="1005840" y="3611880"/>
+            <a:ext cx="4709160" cy="1645920"/>
           </a:xfrm>
           <a:prstGeom xmlns:a="http://schemas.openxmlformats.org/drawingml/2006/main" prst="rect">
             <a:avLst/>
@@ -11128,10 +12662,13 @@
           <a:lstStyle xmlns:a="http://schemas.openxmlformats.org/drawingml/2006/main"/>
           <a:p xmlns:a="http://schemas.openxmlformats.org/drawingml/2006/main">
             <a:pPr marL="0" indent="0" algn="ctr">
-              <a:buNone/>
-            </a:pPr>
-            <a:r>
-              <a:rPr sz="1200">
+              <a:spcAft>
+                <a:spcPts val="600"/>
+              </a:spcAft>
+              <a:buNone/>
+            </a:pPr>
+            <a:r>
+              <a:rPr sz="1400">
                 <a:solidFill>
                   <a:srgbClr val="3F546C"/>
                 </a:solidFill>
@@ -11139,16 +12676,19 @@
                 <a:ea typeface="Microsoft JhengHei"/>
                 <a:cs typeface="Microsoft JhengHei"/>
               </a:rPr>
-              <a:t>6/2</a:t>
-            </a:r>
-            <a:endParaRPr sz="1200"/>
+              <a:t>需求企劃與雜誌社交流</a:t>
+            </a:r>
+            <a:endParaRPr sz="1400"/>
           </a:p>
           <a:p xmlns:a="http://schemas.openxmlformats.org/drawingml/2006/main">
             <a:pPr marL="0" indent="0" algn="ctr">
-              <a:buNone/>
-            </a:pPr>
-            <a:r>
-              <a:rPr sz="1200">
+              <a:spcAft>
+                <a:spcPts val="600"/>
+              </a:spcAft>
+              <a:buNone/>
+            </a:pPr>
+            <a:r>
+              <a:rPr sz="1400">
                 <a:solidFill>
                   <a:srgbClr val="3F546C"/>
                 </a:solidFill>
@@ -11156,82 +12696,19 @@
                 <a:ea typeface="Microsoft JhengHei"/>
                 <a:cs typeface="Microsoft JhengHei"/>
               </a:rPr>
-              <a:t>初審</a:t>
-            </a:r>
-            <a:endParaRPr sz="1200"/>
-          </a:p>
-        </p:txBody>
-      </p:sp>
-      <p:sp>
-        <p:nvSpPr>
-          <p:cNvPr id="28" name="Shape 26">
-            <a:extLst xmlns:a="http://schemas.openxmlformats.org/drawingml/2006/main">
-              <a:ext uri="{FF2B5EF4-FFF2-40B4-BE49-F238E27FC236}">
-                <a16:creationId xmlns:a16="http://schemas.microsoft.com/office/drawing/2014/main" id="{DA486A40-9025-445C-BF06-E4A57A548291}"/>
-              </a:ext>
-            </a:extLst>
-          </p:cNvPr>
-          <p:cNvSpPr>
-            <a:spLocks xmlns:a="http://schemas.openxmlformats.org/drawingml/2006/main" noGrp="1"/>
-          </p:cNvSpPr>
-          <p:nvPr/>
-        </p:nvSpPr>
-        <p:spPr>
-          <a:xfrm xmlns:a="http://schemas.openxmlformats.org/drawingml/2006/main">
-            <a:off x="8157362" y="2587752"/>
-            <a:ext cx="164592" cy="164592"/>
-          </a:xfrm>
-          <a:prstGeom xmlns:a="http://schemas.openxmlformats.org/drawingml/2006/main" prst="ellipse">
-            <a:avLst/>
-          </a:prstGeom>
-          <a:solidFill xmlns:a="http://schemas.openxmlformats.org/drawingml/2006/main">
-            <a:srgbClr val="D46A12"/>
-          </a:solidFill>
-          <a:ln xmlns:a="http://schemas.openxmlformats.org/drawingml/2006/main" w="12700">
-            <a:solidFill>
-              <a:srgbClr val="D46A12"/>
-            </a:solidFill>
-            <a:prstDash val="solid"/>
-          </a:ln>
-        </p:spPr>
-        <p:txBody xmlns:a="http://schemas.openxmlformats.org/drawingml/2006/main">
-          <a:bodyPr/>
-          <a:p/>
-        </p:txBody>
-      </p:sp>
-      <p:sp>
-        <p:nvSpPr>
-          <p:cNvPr id="29" name="Text 27">
-            <a:extLst xmlns:a="http://schemas.openxmlformats.org/drawingml/2006/main">
-              <a:ext uri="{FF2B5EF4-FFF2-40B4-BE49-F238E27FC236}">
-                <a16:creationId xmlns:a16="http://schemas.microsoft.com/office/drawing/2014/main" id="{C906C453-B41D-4EDF-8F56-CF584557532A}"/>
-              </a:ext>
-            </a:extLst>
-          </p:cNvPr>
-          <p:cNvSpPr>
-            <a:spLocks xmlns:a="http://schemas.openxmlformats.org/drawingml/2006/main" noGrp="1"/>
-          </p:cNvSpPr>
-          <p:nvPr/>
-        </p:nvSpPr>
-        <p:spPr>
-          <a:xfrm xmlns:a="http://schemas.openxmlformats.org/drawingml/2006/main">
-            <a:off x="7691018" y="2788920"/>
-            <a:ext cx="1097280" cy="457200"/>
-          </a:xfrm>
-          <a:prstGeom xmlns:a="http://schemas.openxmlformats.org/drawingml/2006/main" prst="rect">
-            <a:avLst/>
-          </a:prstGeom>
-          <a:noFill xmlns:a="http://schemas.openxmlformats.org/drawingml/2006/main"/>
-        </p:spPr>
-        <p:txBody>
-          <a:bodyPr xmlns:a="http://schemas.openxmlformats.org/drawingml/2006/main" wrap="square" lIns="0" tIns="0" rIns="0" bIns="0" anchor="t"/>
-          <a:lstStyle xmlns:a="http://schemas.openxmlformats.org/drawingml/2006/main"/>
+              <a:t>營運計畫：成本、STP、TOWS</a:t>
+            </a:r>
+            <a:endParaRPr sz="1400"/>
+          </a:p>
           <a:p xmlns:a="http://schemas.openxmlformats.org/drawingml/2006/main">
             <a:pPr marL="0" indent="0" algn="ctr">
-              <a:buNone/>
-            </a:pPr>
-            <a:r>
-              <a:rPr sz="1200">
+              <a:spcAft>
+                <a:spcPts val="600"/>
+              </a:spcAft>
+              <a:buNone/>
+            </a:pPr>
+            <a:r>
+              <a:rPr sz="1400">
                 <a:solidFill>
                   <a:srgbClr val="3F546C"/>
                 </a:solidFill>
@@ -11239,16 +12716,19 @@
                 <a:ea typeface="Microsoft JhengHei"/>
                 <a:cs typeface="Microsoft JhengHei"/>
               </a:rPr>
-              <a:t>10/13</a:t>
-            </a:r>
-            <a:endParaRPr sz="1200"/>
+              <a:t>系統手冊統整、第 1–6 章</a:t>
+            </a:r>
+            <a:endParaRPr sz="1400"/>
           </a:p>
           <a:p xmlns:a="http://schemas.openxmlformats.org/drawingml/2006/main">
             <a:pPr marL="0" indent="0" algn="ctr">
-              <a:buNone/>
-            </a:pPr>
-            <a:r>
-              <a:rPr sz="1200">
+              <a:spcAft>
+                <a:spcPts val="600"/>
+              </a:spcAft>
+              <a:buNone/>
+            </a:pPr>
+            <a:r>
+              <a:rPr sz="1400">
                 <a:solidFill>
                   <a:srgbClr val="3F546C"/>
                 </a:solidFill>
@@ -11256,234 +12736,34 @@
                 <a:ea typeface="Microsoft JhengHei"/>
                 <a:cs typeface="Microsoft JhengHei"/>
               </a:rPr>
-              <a:t>複審繳件</a:t>
-            </a:r>
-            <a:endParaRPr sz="1200"/>
-          </a:p>
-        </p:txBody>
-      </p:sp>
-      <p:sp>
-        <p:nvSpPr>
-          <p:cNvPr id="30" name="Shape 28">
-            <a:extLst xmlns:a="http://schemas.openxmlformats.org/drawingml/2006/main">
-              <a:ext uri="{FF2B5EF4-FFF2-40B4-BE49-F238E27FC236}">
-                <a16:creationId xmlns:a16="http://schemas.microsoft.com/office/drawing/2014/main" id="{F3C9906E-D32A-4BA9-A3B4-BEC3936871CA}"/>
-              </a:ext>
-            </a:extLst>
-          </p:cNvPr>
-          <p:cNvSpPr>
-            <a:spLocks xmlns:a="http://schemas.openxmlformats.org/drawingml/2006/main" noGrp="1"/>
-          </p:cNvSpPr>
-          <p:nvPr/>
-        </p:nvSpPr>
-        <p:spPr>
-          <a:xfrm xmlns:a="http://schemas.openxmlformats.org/drawingml/2006/main">
-            <a:off x="9408719" y="2587752"/>
-            <a:ext cx="164592" cy="164592"/>
-          </a:xfrm>
-          <a:prstGeom xmlns:a="http://schemas.openxmlformats.org/drawingml/2006/main" prst="ellipse">
-            <a:avLst/>
-          </a:prstGeom>
-          <a:solidFill xmlns:a="http://schemas.openxmlformats.org/drawingml/2006/main">
-            <a:srgbClr val="D46A12"/>
-          </a:solidFill>
-          <a:ln xmlns:a="http://schemas.openxmlformats.org/drawingml/2006/main" w="12700">
-            <a:solidFill>
-              <a:srgbClr val="D46A12"/>
-            </a:solidFill>
-            <a:prstDash val="solid"/>
-          </a:ln>
-        </p:spPr>
-        <p:txBody xmlns:a="http://schemas.openxmlformats.org/drawingml/2006/main">
-          <a:bodyPr/>
-          <a:p/>
-        </p:txBody>
-      </p:sp>
-      <p:sp>
-        <p:nvSpPr>
-          <p:cNvPr id="31" name="Text 29">
-            <a:extLst xmlns:a="http://schemas.openxmlformats.org/drawingml/2006/main">
-              <a:ext uri="{FF2B5EF4-FFF2-40B4-BE49-F238E27FC236}">
-                <a16:creationId xmlns:a16="http://schemas.microsoft.com/office/drawing/2014/main" id="{1BC57DE1-F6A8-4D40-9146-3FD4D0BBF4D2}"/>
-              </a:ext>
-            </a:extLst>
-          </p:cNvPr>
-          <p:cNvSpPr>
-            <a:spLocks xmlns:a="http://schemas.openxmlformats.org/drawingml/2006/main" noGrp="1"/>
-          </p:cNvSpPr>
-          <p:nvPr/>
-        </p:nvSpPr>
-        <p:spPr>
-          <a:xfrm xmlns:a="http://schemas.openxmlformats.org/drawingml/2006/main">
-            <a:off x="8942375" y="2788920"/>
-            <a:ext cx="1097280" cy="457200"/>
-          </a:xfrm>
-          <a:prstGeom xmlns:a="http://schemas.openxmlformats.org/drawingml/2006/main" prst="rect">
-            <a:avLst/>
-          </a:prstGeom>
-          <a:noFill xmlns:a="http://schemas.openxmlformats.org/drawingml/2006/main"/>
-        </p:spPr>
-        <p:txBody>
-          <a:bodyPr xmlns:a="http://schemas.openxmlformats.org/drawingml/2006/main" wrap="square" lIns="0" tIns="0" rIns="0" bIns="0" anchor="t"/>
-          <a:lstStyle xmlns:a="http://schemas.openxmlformats.org/drawingml/2006/main"/>
-          <a:p xmlns:a="http://schemas.openxmlformats.org/drawingml/2006/main">
-            <a:pPr marL="0" indent="0" algn="ctr">
-              <a:buNone/>
-            </a:pPr>
-            <a:r>
-              <a:rPr sz="1200">
-                <a:solidFill>
-                  <a:srgbClr val="3F546C"/>
-                </a:solidFill>
-                <a:latin typeface="Microsoft JhengHei"/>
-                <a:ea typeface="Microsoft JhengHei"/>
-                <a:cs typeface="Microsoft JhengHei"/>
-              </a:rPr>
-              <a:t>11/25</a:t>
-            </a:r>
-            <a:endParaRPr sz="1200"/>
-          </a:p>
-          <a:p xmlns:a="http://schemas.openxmlformats.org/drawingml/2006/main">
-            <a:pPr marL="0" indent="0" algn="ctr">
-              <a:buNone/>
-            </a:pPr>
-            <a:r>
-              <a:rPr sz="1200">
-                <a:solidFill>
-                  <a:srgbClr val="3F546C"/>
-                </a:solidFill>
-                <a:latin typeface="Microsoft JhengHei"/>
-                <a:ea typeface="Microsoft JhengHei"/>
-                <a:cs typeface="Microsoft JhengHei"/>
-              </a:rPr>
-              <a:t>觀摩展</a:t>
-            </a:r>
-            <a:endParaRPr sz="1200"/>
-          </a:p>
-        </p:txBody>
-      </p:sp>
-      <p:sp>
-        <p:nvSpPr>
-          <p:cNvPr id="32" name="Shape 30">
-            <a:extLst xmlns:a="http://schemas.openxmlformats.org/drawingml/2006/main">
-              <a:ext uri="{FF2B5EF4-FFF2-40B4-BE49-F238E27FC236}">
-                <a16:creationId xmlns:a16="http://schemas.microsoft.com/office/drawing/2014/main" id="{672DB685-AB9D-4363-B773-0D7CF409303D}"/>
-              </a:ext>
-            </a:extLst>
-          </p:cNvPr>
-          <p:cNvSpPr>
-            <a:spLocks xmlns:a="http://schemas.openxmlformats.org/drawingml/2006/main" noGrp="1"/>
-          </p:cNvSpPr>
-          <p:nvPr/>
-        </p:nvSpPr>
-        <p:spPr>
-          <a:xfrm xmlns:a="http://schemas.openxmlformats.org/drawingml/2006/main">
-            <a:off x="10436619" y="2587752"/>
-            <a:ext cx="164592" cy="164592"/>
-          </a:xfrm>
-          <a:prstGeom xmlns:a="http://schemas.openxmlformats.org/drawingml/2006/main" prst="ellipse">
-            <a:avLst/>
-          </a:prstGeom>
-          <a:solidFill xmlns:a="http://schemas.openxmlformats.org/drawingml/2006/main">
-            <a:srgbClr val="D46A12"/>
-          </a:solidFill>
-          <a:ln xmlns:a="http://schemas.openxmlformats.org/drawingml/2006/main" w="12700">
-            <a:solidFill>
-              <a:srgbClr val="D46A12"/>
-            </a:solidFill>
-            <a:prstDash val="solid"/>
-          </a:ln>
-        </p:spPr>
-        <p:txBody xmlns:a="http://schemas.openxmlformats.org/drawingml/2006/main">
-          <a:bodyPr/>
-          <a:p/>
-        </p:txBody>
-      </p:sp>
-      <p:sp>
-        <p:nvSpPr>
-          <p:cNvPr id="33" name="Text 31">
-            <a:extLst xmlns:a="http://schemas.openxmlformats.org/drawingml/2006/main">
-              <a:ext uri="{FF2B5EF4-FFF2-40B4-BE49-F238E27FC236}">
-                <a16:creationId xmlns:a16="http://schemas.microsoft.com/office/drawing/2014/main" id="{A74F7715-C5AD-4AD8-8777-D6C4C57D0D26}"/>
-              </a:ext>
-            </a:extLst>
-          </p:cNvPr>
-          <p:cNvSpPr>
-            <a:spLocks xmlns:a="http://schemas.openxmlformats.org/drawingml/2006/main" noGrp="1"/>
-          </p:cNvSpPr>
-          <p:nvPr/>
-        </p:nvSpPr>
-        <p:spPr>
-          <a:xfrm xmlns:a="http://schemas.openxmlformats.org/drawingml/2006/main">
-            <a:off x="9970275" y="2788920"/>
-            <a:ext cx="1097280" cy="457200"/>
-          </a:xfrm>
-          <a:prstGeom xmlns:a="http://schemas.openxmlformats.org/drawingml/2006/main" prst="rect">
-            <a:avLst/>
-          </a:prstGeom>
-          <a:noFill xmlns:a="http://schemas.openxmlformats.org/drawingml/2006/main"/>
-        </p:spPr>
-        <p:txBody>
-          <a:bodyPr xmlns:a="http://schemas.openxmlformats.org/drawingml/2006/main" wrap="square" lIns="0" tIns="0" rIns="0" bIns="0" anchor="t"/>
-          <a:lstStyle xmlns:a="http://schemas.openxmlformats.org/drawingml/2006/main"/>
-          <a:p xmlns:a="http://schemas.openxmlformats.org/drawingml/2006/main">
-            <a:pPr marL="0" indent="0" algn="ctr">
-              <a:buNone/>
-            </a:pPr>
-            <a:r>
-              <a:rPr sz="1200">
-                <a:solidFill>
-                  <a:srgbClr val="3F546C"/>
-                </a:solidFill>
-                <a:latin typeface="Microsoft JhengHei"/>
-                <a:ea typeface="Microsoft JhengHei"/>
-                <a:cs typeface="Microsoft JhengHei"/>
-              </a:rPr>
-              <a:t>12/29</a:t>
-            </a:r>
-            <a:endParaRPr sz="1200"/>
-          </a:p>
-          <a:p xmlns:a="http://schemas.openxmlformats.org/drawingml/2006/main">
-            <a:pPr marL="0" indent="0" algn="ctr">
-              <a:buNone/>
-            </a:pPr>
-            <a:r>
-              <a:rPr sz="1200">
-                <a:solidFill>
-                  <a:srgbClr val="3F546C"/>
-                </a:solidFill>
-                <a:latin typeface="Microsoft JhengHei"/>
-                <a:ea typeface="Microsoft JhengHei"/>
-                <a:cs typeface="Microsoft JhengHei"/>
-              </a:rPr>
-              <a:t>最終版</a:t>
-            </a:r>
-            <a:endParaRPr sz="1200"/>
-          </a:p>
-        </p:txBody>
-      </p:sp>
-      <p:sp>
-        <p:nvSpPr>
-          <p:cNvPr id="34" name="Shape 32">
-            <a:extLst xmlns:a="http://schemas.openxmlformats.org/drawingml/2006/main">
-              <a:ext uri="{FF2B5EF4-FFF2-40B4-BE49-F238E27FC236}">
-                <a16:creationId xmlns:a16="http://schemas.microsoft.com/office/drawing/2014/main" id="{7B0BBB13-89B7-45AB-951A-48BEFA7E1D73}"/>
-              </a:ext>
-            </a:extLst>
-          </p:cNvPr>
-          <p:cNvSpPr>
-            <a:spLocks xmlns:a="http://schemas.openxmlformats.org/drawingml/2006/main" noGrp="1"/>
-          </p:cNvSpPr>
-          <p:nvPr/>
-        </p:nvSpPr>
-        <p:spPr>
-          <a:xfrm xmlns:a="http://schemas.openxmlformats.org/drawingml/2006/main">
-            <a:off x="731520" y="3383280"/>
-            <a:ext cx="6035040" cy="2148840"/>
+              <a:t>簡報與報告</a:t>
+            </a:r>
+            <a:endParaRPr sz="1400"/>
+          </a:p>
+        </p:txBody>
+      </p:sp>
+      <p:sp>
+        <p:nvSpPr>
+          <p:cNvPr id="12" name="Shape 9">
+            <a:extLst xmlns:a="http://schemas.openxmlformats.org/drawingml/2006/main">
+              <a:ext uri="{FF2B5EF4-FFF2-40B4-BE49-F238E27FC236}">
+                <a16:creationId xmlns:a16="http://schemas.microsoft.com/office/drawing/2014/main" id="{6C4B1D09-965F-4278-BB96-05EDC6292D4E}"/>
+              </a:ext>
+            </a:extLst>
+          </p:cNvPr>
+          <p:cNvSpPr>
+            <a:spLocks xmlns:a="http://schemas.openxmlformats.org/drawingml/2006/main" noGrp="1"/>
+          </p:cNvSpPr>
+          <p:nvPr/>
+        </p:nvSpPr>
+        <p:spPr>
+          <a:xfrm xmlns:a="http://schemas.openxmlformats.org/drawingml/2006/main">
+            <a:off x="6199632" y="1783080"/>
+            <a:ext cx="5257800" cy="3611880"/>
           </a:xfrm>
           <a:prstGeom xmlns:a="http://schemas.openxmlformats.org/drawingml/2006/main" prst="roundRect">
             <a:avLst>
-              <a:gd name="adj" fmla="val 6809"/>
+              <a:gd name="adj" fmla="val 4051"/>
             </a:avLst>
           </a:prstGeom>
           <a:solidFill xmlns:a="http://schemas.openxmlformats.org/drawingml/2006/main">
@@ -11503,66 +12783,25 @@
       </p:sp>
       <p:sp>
         <p:nvSpPr>
-          <p:cNvPr id="36" name="Shape 33">
-            <a:extLst xmlns:a="http://schemas.openxmlformats.org/drawingml/2006/main">
-              <a:ext uri="{FF2B5EF4-FFF2-40B4-BE49-F238E27FC236}">
-                <a16:creationId xmlns:a16="http://schemas.microsoft.com/office/drawing/2014/main" id="{7643EAF1-6475-49A7-A48F-A432EAFE8A42}"/>
-              </a:ext>
-            </a:extLst>
-          </p:cNvPr>
-          <p:cNvSpPr>
-            <a:spLocks xmlns:a="http://schemas.openxmlformats.org/drawingml/2006/main" noGrp="1"/>
-          </p:cNvSpPr>
-          <p:nvPr/>
-        </p:nvSpPr>
-        <p:spPr>
-          <a:xfrm xmlns:a="http://schemas.openxmlformats.org/drawingml/2006/main">
-            <a:off x="6949440" y="3383280"/>
-            <a:ext cx="4507992" cy="2148840"/>
-          </a:xfrm>
-          <a:prstGeom xmlns:a="http://schemas.openxmlformats.org/drawingml/2006/main" prst="roundRect">
-            <a:avLst>
-              <a:gd name="adj" fmla="val 6809"/>
-            </a:avLst>
-          </a:prstGeom>
-          <a:solidFill xmlns:a="http://schemas.openxmlformats.org/drawingml/2006/main">
-            <a:srgbClr val="FFFFFF"/>
-          </a:solidFill>
-          <a:ln xmlns:a="http://schemas.openxmlformats.org/drawingml/2006/main" w="12700">
-            <a:solidFill>
-              <a:srgbClr val="D3DEEA"/>
-            </a:solidFill>
-            <a:prstDash val="solid"/>
-          </a:ln>
-        </p:spPr>
-        <p:txBody xmlns:a="http://schemas.openxmlformats.org/drawingml/2006/main">
-          <a:bodyPr/>
-          <a:p/>
-        </p:txBody>
-      </p:sp>
-      <p:sp>
-        <p:nvSpPr>
-          <p:cNvPr id="37" name="Shape 34">
-            <a:extLst xmlns:a="http://schemas.openxmlformats.org/drawingml/2006/main">
-              <a:ext uri="{FF2B5EF4-FFF2-40B4-BE49-F238E27FC236}">
-                <a16:creationId xmlns:a16="http://schemas.microsoft.com/office/drawing/2014/main" id="{602A8C67-D741-49E1-9E36-B97E8D78CC35}"/>
-              </a:ext>
-            </a:extLst>
-          </p:cNvPr>
-          <p:cNvSpPr>
-            <a:spLocks xmlns:a="http://schemas.openxmlformats.org/drawingml/2006/main" noGrp="1"/>
-          </p:cNvSpPr>
-          <p:nvPr/>
-        </p:nvSpPr>
-        <p:spPr>
-          <a:xfrm xmlns:a="http://schemas.openxmlformats.org/drawingml/2006/main">
-            <a:off x="7178040" y="3566160"/>
-            <a:ext cx="822960" cy="310896"/>
-          </a:xfrm>
-          <a:prstGeom xmlns:a="http://schemas.openxmlformats.org/drawingml/2006/main" prst="roundRect">
-            <a:avLst>
-              <a:gd name="adj" fmla="val 50000"/>
-            </a:avLst>
+          <p:cNvPr id="13" name="Shape 10">
+            <a:extLst xmlns:a="http://schemas.openxmlformats.org/drawingml/2006/main">
+              <a:ext uri="{FF2B5EF4-FFF2-40B4-BE49-F238E27FC236}">
+                <a16:creationId xmlns:a16="http://schemas.microsoft.com/office/drawing/2014/main" id="{EA7D5A10-81B8-439B-8B6B-2F620F6990D3}"/>
+              </a:ext>
+            </a:extLst>
+          </p:cNvPr>
+          <p:cNvSpPr>
+            <a:spLocks xmlns:a="http://schemas.openxmlformats.org/drawingml/2006/main" noGrp="1"/>
+          </p:cNvSpPr>
+          <p:nvPr/>
+        </p:nvSpPr>
+        <p:spPr>
+          <a:xfrm xmlns:a="http://schemas.openxmlformats.org/drawingml/2006/main">
+            <a:off x="8499348" y="2011680"/>
+            <a:ext cx="658368" cy="658368"/>
+          </a:xfrm>
+          <a:prstGeom xmlns:a="http://schemas.openxmlformats.org/drawingml/2006/main" prst="ellipse">
+            <a:avLst/>
           </a:prstGeom>
           <a:solidFill xmlns:a="http://schemas.openxmlformats.org/drawingml/2006/main">
             <a:srgbClr val="E2EDF9"/>
@@ -11579,24 +12818,54 @@
           <a:p/>
         </p:txBody>
       </p:sp>
-      <p:sp>
-        <p:nvSpPr>
-          <p:cNvPr id="38" name="Text 35">
-            <a:extLst xmlns:a="http://schemas.openxmlformats.org/drawingml/2006/main">
-              <a:ext uri="{FF2B5EF4-FFF2-40B4-BE49-F238E27FC236}">
-                <a16:creationId xmlns:a16="http://schemas.microsoft.com/office/drawing/2014/main" id="{0E730E12-F1AC-47E1-A3A6-3FD8BBC6024B}"/>
-              </a:ext>
-            </a:extLst>
-          </p:cNvPr>
-          <p:cNvSpPr>
-            <a:spLocks xmlns:a="http://schemas.openxmlformats.org/drawingml/2006/main" noGrp="1"/>
-          </p:cNvSpPr>
-          <p:nvPr/>
-        </p:nvSpPr>
-        <p:spPr>
-          <a:xfrm xmlns:a="http://schemas.openxmlformats.org/drawingml/2006/main">
-            <a:off x="7178040" y="3566160"/>
-            <a:ext cx="822960" cy="310896"/>
+      <p:pic>
+        <p:nvPicPr>
+          <p:cNvPr id="14" name="Image 1">
+            <a:extLst xmlns:a="http://schemas.openxmlformats.org/drawingml/2006/main">
+              <a:ext uri="{FF2B5EF4-FFF2-40B4-BE49-F238E27FC236}">
+                <a16:creationId xmlns:a16="http://schemas.microsoft.com/office/drawing/2014/main" id="{B7C32F33-4147-4F1C-A934-265AD1D558DE}"/>
+              </a:ext>
+            </a:extLst>
+          </p:cNvPr>
+          <p:cNvPicPr>
+            <a:picLocks xmlns:a="http://schemas.openxmlformats.org/drawingml/2006/main" noChangeAspect="1"/>
+          </p:cNvPicPr>
+          <p:nvPr/>
+        </p:nvPicPr>
+        <p:blipFill>
+          <a:blip xmlns:r="http://schemas.openxmlformats.org/officeDocument/2006/relationships" xmlns:a="http://schemas.openxmlformats.org/drawingml/2006/main" r:embed="R22f0a7f01c864a2c"/>
+          <a:stretch xmlns:a="http://schemas.openxmlformats.org/drawingml/2006/main">
+            <a:fillRect l="0" t="0" r="0" b="0"/>
+          </a:stretch>
+        </p:blipFill>
+        <p:spPr>
+          <a:xfrm xmlns:a="http://schemas.openxmlformats.org/drawingml/2006/main">
+            <a:off x="8645652" y="2157984"/>
+            <a:ext cx="365760" cy="365760"/>
+          </a:xfrm>
+          <a:prstGeom xmlns:a="http://schemas.openxmlformats.org/drawingml/2006/main" prst="rect">
+            <a:avLst/>
+          </a:prstGeom>
+        </p:spPr>
+      </p:pic>
+      <p:sp>
+        <p:nvSpPr>
+          <p:cNvPr id="15" name="Text 11">
+            <a:extLst xmlns:a="http://schemas.openxmlformats.org/drawingml/2006/main">
+              <a:ext uri="{FF2B5EF4-FFF2-40B4-BE49-F238E27FC236}">
+                <a16:creationId xmlns:a16="http://schemas.microsoft.com/office/drawing/2014/main" id="{0B6C6DAE-D43E-4E74-91FE-6BC25773F152}"/>
+              </a:ext>
+            </a:extLst>
+          </p:cNvPr>
+          <p:cNvSpPr>
+            <a:spLocks xmlns:a="http://schemas.openxmlformats.org/drawingml/2006/main" noGrp="1"/>
+          </p:cNvSpPr>
+          <p:nvPr/>
+        </p:nvSpPr>
+        <p:spPr>
+          <a:xfrm xmlns:a="http://schemas.openxmlformats.org/drawingml/2006/main">
+            <a:off x="6199632" y="2743200"/>
+            <a:ext cx="5257800" cy="411480"/>
           </a:xfrm>
           <a:prstGeom xmlns:a="http://schemas.openxmlformats.org/drawingml/2006/main" prst="rect">
             <a:avLst/>
@@ -11611,38 +12880,38 @@
               <a:buNone/>
             </a:pPr>
             <a:r>
-              <a:rPr sz="1200" b="1">
-                <a:solidFill>
-                  <a:srgbClr val="1F6FB8"/>
+              <a:rPr sz="2000" b="1">
+                <a:solidFill>
+                  <a:srgbClr val="14243A"/>
                 </a:solidFill>
                 <a:latin typeface="Microsoft JhengHei"/>
                 <a:ea typeface="Microsoft JhengHei"/>
                 <a:cs typeface="Microsoft JhengHei"/>
               </a:rPr>
-              <a:t>5 月</a:t>
-            </a:r>
-            <a:endParaRPr sz="1200"/>
-          </a:p>
-        </p:txBody>
-      </p:sp>
-      <p:sp>
-        <p:nvSpPr>
-          <p:cNvPr id="39" name="Text 36">
-            <a:extLst xmlns:a="http://schemas.openxmlformats.org/drawingml/2006/main">
-              <a:ext uri="{FF2B5EF4-FFF2-40B4-BE49-F238E27FC236}">
-                <a16:creationId xmlns:a16="http://schemas.microsoft.com/office/drawing/2014/main" id="{1B239023-9E52-4116-B7F8-29BE94324F1A}"/>
-              </a:ext>
-            </a:extLst>
-          </p:cNvPr>
-          <p:cNvSpPr>
-            <a:spLocks xmlns:a="http://schemas.openxmlformats.org/drawingml/2006/main" noGrp="1"/>
-          </p:cNvSpPr>
-          <p:nvPr/>
-        </p:nvSpPr>
-        <p:spPr>
-          <a:xfrm xmlns:a="http://schemas.openxmlformats.org/drawingml/2006/main">
-            <a:off x="8183880" y="3547872"/>
-            <a:ext cx="3154680" cy="347472"/>
+              <a:t>許家全</a:t>
+            </a:r>
+            <a:endParaRPr sz="2000"/>
+          </a:p>
+        </p:txBody>
+      </p:sp>
+      <p:sp>
+        <p:nvSpPr>
+          <p:cNvPr id="16" name="Text 12">
+            <a:extLst xmlns:a="http://schemas.openxmlformats.org/drawingml/2006/main">
+              <a:ext uri="{FF2B5EF4-FFF2-40B4-BE49-F238E27FC236}">
+                <a16:creationId xmlns:a16="http://schemas.microsoft.com/office/drawing/2014/main" id="{C9737799-19A1-4BE2-AB26-D915C2E62059}"/>
+              </a:ext>
+            </a:extLst>
+          </p:cNvPr>
+          <p:cNvSpPr>
+            <a:spLocks xmlns:a="http://schemas.openxmlformats.org/drawingml/2006/main" noGrp="1"/>
+          </p:cNvSpPr>
+          <p:nvPr/>
+        </p:nvSpPr>
+        <p:spPr>
+          <a:xfrm xmlns:a="http://schemas.openxmlformats.org/drawingml/2006/main">
+            <a:off x="6199632" y="3154680"/>
+            <a:ext cx="5257800" cy="292608"/>
           </a:xfrm>
           <a:prstGeom xmlns:a="http://schemas.openxmlformats.org/drawingml/2006/main" prst="rect">
             <a:avLst/>
@@ -11653,46 +12922,155 @@
           <a:bodyPr xmlns:a="http://schemas.openxmlformats.org/drawingml/2006/main" wrap="square" lIns="0" tIns="0" rIns="0" bIns="0" anchor="ctr"/>
           <a:lstStyle xmlns:a="http://schemas.openxmlformats.org/drawingml/2006/main"/>
           <a:p xmlns:a="http://schemas.openxmlformats.org/drawingml/2006/main">
-            <a:pPr marL="0" indent="0">
-              <a:buNone/>
-            </a:pPr>
-            <a:r>
-              <a:rPr sz="1400">
-                <a:solidFill>
-                  <a:srgbClr val="3F546C"/>
+            <a:pPr marL="0" indent="0" algn="ctr">
+              <a:buNone/>
+            </a:pPr>
+            <a:r>
+              <a:rPr sz="1200">
+                <a:solidFill>
+                  <a:srgbClr val="1F6FB8"/>
                 </a:solidFill>
                 <a:latin typeface="Microsoft JhengHei"/>
                 <a:ea typeface="Microsoft JhengHei"/>
                 <a:cs typeface="Microsoft JhengHei"/>
               </a:rPr>
-              <a:t>PTT 爬蟲、儀表板雛形</a:t>
+              <a:t>組員 · 11246039</a:t>
+            </a:r>
+            <a:endParaRPr sz="1200"/>
+          </a:p>
+        </p:txBody>
+      </p:sp>
+      <p:sp>
+        <p:nvSpPr>
+          <p:cNvPr id="17" name="Text 13">
+            <a:extLst xmlns:a="http://schemas.openxmlformats.org/drawingml/2006/main">
+              <a:ext uri="{FF2B5EF4-FFF2-40B4-BE49-F238E27FC236}">
+                <a16:creationId xmlns:a16="http://schemas.microsoft.com/office/drawing/2014/main" id="{9C700552-A3FE-47BF-A790-D921C5B18B81}"/>
+              </a:ext>
+            </a:extLst>
+          </p:cNvPr>
+          <p:cNvSpPr>
+            <a:spLocks xmlns:a="http://schemas.openxmlformats.org/drawingml/2006/main" noGrp="1"/>
+          </p:cNvSpPr>
+          <p:nvPr/>
+        </p:nvSpPr>
+        <p:spPr>
+          <a:xfrm xmlns:a="http://schemas.openxmlformats.org/drawingml/2006/main">
+            <a:off x="6473952" y="3611880"/>
+            <a:ext cx="4709160" cy="1645920"/>
+          </a:xfrm>
+          <a:prstGeom xmlns:a="http://schemas.openxmlformats.org/drawingml/2006/main" prst="rect">
+            <a:avLst/>
+          </a:prstGeom>
+          <a:noFill xmlns:a="http://schemas.openxmlformats.org/drawingml/2006/main"/>
+        </p:spPr>
+        <p:txBody>
+          <a:bodyPr xmlns:a="http://schemas.openxmlformats.org/drawingml/2006/main" wrap="square" lIns="0" tIns="0" rIns="0" bIns="0" anchor="t"/>
+          <a:lstStyle xmlns:a="http://schemas.openxmlformats.org/drawingml/2006/main"/>
+          <a:p xmlns:a="http://schemas.openxmlformats.org/drawingml/2006/main">
+            <a:pPr marL="0" indent="0" algn="ctr">
+              <a:spcAft>
+                <a:spcPts val="600"/>
+              </a:spcAft>
+              <a:buNone/>
+            </a:pPr>
+            <a:r>
+              <a:rPr sz="1400">
+                <a:solidFill>
+                  <a:srgbClr val="3F546C"/>
+                </a:solidFill>
+                <a:latin typeface="Microsoft JhengHei"/>
+                <a:ea typeface="Microsoft JhengHei"/>
+                <a:cs typeface="Microsoft JhengHei"/>
+              </a:rPr>
+              <a:t>系統架構、資料庫、FastAPI</a:t>
             </a:r>
             <a:endParaRPr sz="1400"/>
           </a:p>
-        </p:txBody>
-      </p:sp>
-      <p:sp>
-        <p:nvSpPr>
-          <p:cNvPr id="40" name="Shape 37">
-            <a:extLst xmlns:a="http://schemas.openxmlformats.org/drawingml/2006/main">
-              <a:ext uri="{FF2B5EF4-FFF2-40B4-BE49-F238E27FC236}">
-                <a16:creationId xmlns:a16="http://schemas.microsoft.com/office/drawing/2014/main" id="{F2A69462-030D-4208-B9BA-475C0E9522EF}"/>
-              </a:ext>
-            </a:extLst>
-          </p:cNvPr>
-          <p:cNvSpPr>
-            <a:spLocks xmlns:a="http://schemas.openxmlformats.org/drawingml/2006/main" noGrp="1"/>
-          </p:cNvSpPr>
-          <p:nvPr/>
-        </p:nvSpPr>
-        <p:spPr>
-          <a:xfrm xmlns:a="http://schemas.openxmlformats.org/drawingml/2006/main">
-            <a:off x="7178040" y="3950208"/>
-            <a:ext cx="822960" cy="310896"/>
+          <a:p xmlns:a="http://schemas.openxmlformats.org/drawingml/2006/main">
+            <a:pPr marL="0" indent="0" algn="ctr">
+              <a:spcAft>
+                <a:spcPts val="600"/>
+              </a:spcAft>
+              <a:buNone/>
+            </a:pPr>
+            <a:r>
+              <a:rPr sz="1400">
+                <a:solidFill>
+                  <a:srgbClr val="3F546C"/>
+                </a:solidFill>
+                <a:latin typeface="Microsoft JhengHei"/>
+                <a:ea typeface="Microsoft JhengHei"/>
+                <a:cs typeface="Microsoft JhengHei"/>
+              </a:rPr>
+              <a:t>四平台爬蟲與每日排程</a:t>
+            </a:r>
+            <a:endParaRPr sz="1400"/>
+          </a:p>
+          <a:p xmlns:a="http://schemas.openxmlformats.org/drawingml/2006/main">
+            <a:pPr marL="0" indent="0" algn="ctr">
+              <a:spcAft>
+                <a:spcPts val="600"/>
+              </a:spcAft>
+              <a:buNone/>
+            </a:pPr>
+            <a:r>
+              <a:rPr sz="1400">
+                <a:solidFill>
+                  <a:srgbClr val="3F546C"/>
+                </a:solidFill>
+                <a:latin typeface="Microsoft JhengHei"/>
+                <a:ea typeface="Microsoft JhengHei"/>
+                <a:cs typeface="Microsoft JhengHei"/>
+              </a:rPr>
+              <a:t>AI 問答、情緒評分、向量檢索</a:t>
+            </a:r>
+            <a:endParaRPr sz="1400"/>
+          </a:p>
+          <a:p xmlns:a="http://schemas.openxmlformats.org/drawingml/2006/main">
+            <a:pPr marL="0" indent="0" algn="ctr">
+              <a:spcAft>
+                <a:spcPts val="600"/>
+              </a:spcAft>
+              <a:buNone/>
+            </a:pPr>
+            <a:r>
+              <a:rPr sz="1400">
+                <a:solidFill>
+                  <a:srgbClr val="3F546C"/>
+                </a:solidFill>
+                <a:latin typeface="Microsoft JhengHei"/>
+                <a:ea typeface="Microsoft JhengHei"/>
+                <a:cs typeface="Microsoft JhengHei"/>
+              </a:rPr>
+              <a:t>前端介面、測試、手冊第 7–12 章</a:t>
+            </a:r>
+            <a:endParaRPr sz="1400"/>
+          </a:p>
+        </p:txBody>
+      </p:sp>
+      <p:sp>
+        <p:nvSpPr>
+          <p:cNvPr id="18" name="Shape 14">
+            <a:extLst xmlns:a="http://schemas.openxmlformats.org/drawingml/2006/main">
+              <a:ext uri="{FF2B5EF4-FFF2-40B4-BE49-F238E27FC236}">
+                <a16:creationId xmlns:a16="http://schemas.microsoft.com/office/drawing/2014/main" id="{FA07CAEA-8240-4DE0-AEC2-AA671D0B784A}"/>
+              </a:ext>
+            </a:extLst>
+          </p:cNvPr>
+          <p:cNvSpPr>
+            <a:spLocks xmlns:a="http://schemas.openxmlformats.org/drawingml/2006/main" noGrp="1"/>
+          </p:cNvSpPr>
+          <p:nvPr/>
+        </p:nvSpPr>
+        <p:spPr>
+          <a:xfrm xmlns:a="http://schemas.openxmlformats.org/drawingml/2006/main">
+            <a:off x="731520" y="5669280"/>
+            <a:ext cx="10725912" cy="457200"/>
           </a:xfrm>
           <a:prstGeom xmlns:a="http://schemas.openxmlformats.org/drawingml/2006/main" prst="roundRect">
             <a:avLst>
-              <a:gd name="adj" fmla="val 50000"/>
+              <a:gd name="adj" fmla="val 24000"/>
             </a:avLst>
           </a:prstGeom>
           <a:solidFill xmlns:a="http://schemas.openxmlformats.org/drawingml/2006/main">
@@ -11712,22 +13090,22 @@
       </p:sp>
       <p:sp>
         <p:nvSpPr>
-          <p:cNvPr id="41" name="Text 38">
-            <a:extLst xmlns:a="http://schemas.openxmlformats.org/drawingml/2006/main">
-              <a:ext uri="{FF2B5EF4-FFF2-40B4-BE49-F238E27FC236}">
-                <a16:creationId xmlns:a16="http://schemas.microsoft.com/office/drawing/2014/main" id="{093B1419-DF2B-4FAA-B2BD-EE6941737F2F}"/>
-              </a:ext>
-            </a:extLst>
-          </p:cNvPr>
-          <p:cNvSpPr>
-            <a:spLocks xmlns:a="http://schemas.openxmlformats.org/drawingml/2006/main" noGrp="1"/>
-          </p:cNvSpPr>
-          <p:nvPr/>
-        </p:nvSpPr>
-        <p:spPr>
-          <a:xfrm xmlns:a="http://schemas.openxmlformats.org/drawingml/2006/main">
-            <a:off x="7178040" y="3950208"/>
-            <a:ext cx="822960" cy="310896"/>
+          <p:cNvPr id="19" name="Text 15">
+            <a:extLst xmlns:a="http://schemas.openxmlformats.org/drawingml/2006/main">
+              <a:ext uri="{FF2B5EF4-FFF2-40B4-BE49-F238E27FC236}">
+                <a16:creationId xmlns:a16="http://schemas.microsoft.com/office/drawing/2014/main" id="{C98A2BE1-896E-4C16-BFFC-0BF8E304B6E0}"/>
+              </a:ext>
+            </a:extLst>
+          </p:cNvPr>
+          <p:cNvSpPr>
+            <a:spLocks xmlns:a="http://schemas.openxmlformats.org/drawingml/2006/main" noGrp="1"/>
+          </p:cNvSpPr>
+          <p:nvPr/>
+        </p:nvSpPr>
+        <p:spPr>
+          <a:xfrm xmlns:a="http://schemas.openxmlformats.org/drawingml/2006/main">
+            <a:off x="731520" y="5669280"/>
+            <a:ext cx="10725912" cy="457200"/>
           </a:xfrm>
           <a:prstGeom xmlns:a="http://schemas.openxmlformats.org/drawingml/2006/main" prst="rect">
             <a:avLst/>
@@ -11742,7 +13120,7 @@
               <a:buNone/>
             </a:pPr>
             <a:r>
-              <a:rPr sz="1200" b="1">
+              <a:rPr sz="1400" b="1">
                 <a:solidFill>
                   <a:srgbClr val="1F6FB8"/>
                 </a:solidFill>
@@ -11750,53 +13128,7 @@
                 <a:ea typeface="Microsoft JhengHei"/>
                 <a:cs typeface="Microsoft JhengHei"/>
               </a:rPr>
-              <a:t>7 月</a:t>
-            </a:r>
-            <a:endParaRPr sz="1200"/>
-          </a:p>
-        </p:txBody>
-      </p:sp>
-      <p:sp>
-        <p:nvSpPr>
-          <p:cNvPr id="42" name="Text 39">
-            <a:extLst xmlns:a="http://schemas.openxmlformats.org/drawingml/2006/main">
-              <a:ext uri="{FF2B5EF4-FFF2-40B4-BE49-F238E27FC236}">
-                <a16:creationId xmlns:a16="http://schemas.microsoft.com/office/drawing/2014/main" id="{17B9FB28-D2A6-4787-9847-0600FCA08631}"/>
-              </a:ext>
-            </a:extLst>
-          </p:cNvPr>
-          <p:cNvSpPr>
-            <a:spLocks xmlns:a="http://schemas.openxmlformats.org/drawingml/2006/main" noGrp="1"/>
-          </p:cNvSpPr>
-          <p:nvPr/>
-        </p:nvSpPr>
-        <p:spPr>
-          <a:xfrm xmlns:a="http://schemas.openxmlformats.org/drawingml/2006/main">
-            <a:off x="8183880" y="3931920"/>
-            <a:ext cx="3154680" cy="347472"/>
-          </a:xfrm>
-          <a:prstGeom xmlns:a="http://schemas.openxmlformats.org/drawingml/2006/main" prst="rect">
-            <a:avLst/>
-          </a:prstGeom>
-          <a:noFill xmlns:a="http://schemas.openxmlformats.org/drawingml/2006/main"/>
-        </p:spPr>
-        <p:txBody>
-          <a:bodyPr xmlns:a="http://schemas.openxmlformats.org/drawingml/2006/main" wrap="square" lIns="0" tIns="0" rIns="0" bIns="0" anchor="ctr"/>
-          <a:lstStyle xmlns:a="http://schemas.openxmlformats.org/drawingml/2006/main"/>
-          <a:p xmlns:a="http://schemas.openxmlformats.org/drawingml/2006/main">
-            <a:pPr marL="0" indent="0">
-              <a:buNone/>
-            </a:pPr>
-            <a:r>
-              <a:rPr sz="1400">
-                <a:solidFill>
-                  <a:srgbClr val="3F546C"/>
-                </a:solidFill>
-                <a:latin typeface="Microsoft JhengHei"/>
-                <a:ea typeface="Microsoft JhengHei"/>
-                <a:cs typeface="Microsoft JhengHei"/>
-              </a:rPr>
-              <a:t>帳號、WebSocket、Threads</a:t>
+              <a:t>程式提交與文件、企劃工作分開佐證；不以單一帳號的提交次數推算貢獻比例。</a:t>
             </a:r>
             <a:endParaRPr sz="1400"/>
           </a:p>
@@ -11804,488 +13136,10 @@
       </p:sp>
       <p:sp>
         <p:nvSpPr>
-          <p:cNvPr id="43" name="Shape 40">
-            <a:extLst xmlns:a="http://schemas.openxmlformats.org/drawingml/2006/main">
-              <a:ext uri="{FF2B5EF4-FFF2-40B4-BE49-F238E27FC236}">
-                <a16:creationId xmlns:a16="http://schemas.microsoft.com/office/drawing/2014/main" id="{D8FE1E07-1E40-4B32-BCD9-A4934E543B9B}"/>
-              </a:ext>
-            </a:extLst>
-          </p:cNvPr>
-          <p:cNvSpPr>
-            <a:spLocks xmlns:a="http://schemas.openxmlformats.org/drawingml/2006/main" noGrp="1"/>
-          </p:cNvSpPr>
-          <p:nvPr/>
-        </p:nvSpPr>
-        <p:spPr>
-          <a:xfrm xmlns:a="http://schemas.openxmlformats.org/drawingml/2006/main">
-            <a:off x="7178040" y="4334256"/>
-            <a:ext cx="822960" cy="310896"/>
-          </a:xfrm>
-          <a:prstGeom xmlns:a="http://schemas.openxmlformats.org/drawingml/2006/main" prst="roundRect">
-            <a:avLst>
-              <a:gd name="adj" fmla="val 50000"/>
-            </a:avLst>
-          </a:prstGeom>
-          <a:solidFill xmlns:a="http://schemas.openxmlformats.org/drawingml/2006/main">
-            <a:srgbClr val="E2EDF9"/>
-          </a:solidFill>
-          <a:ln xmlns:a="http://schemas.openxmlformats.org/drawingml/2006/main" w="12700">
-            <a:solidFill>
-              <a:srgbClr val="E2EDF9"/>
-            </a:solidFill>
-            <a:prstDash val="solid"/>
-          </a:ln>
-        </p:spPr>
-        <p:txBody xmlns:a="http://schemas.openxmlformats.org/drawingml/2006/main">
-          <a:bodyPr/>
-          <a:p/>
-        </p:txBody>
-      </p:sp>
-      <p:sp>
-        <p:nvSpPr>
-          <p:cNvPr id="44" name="Text 41">
-            <a:extLst xmlns:a="http://schemas.openxmlformats.org/drawingml/2006/main">
-              <a:ext uri="{FF2B5EF4-FFF2-40B4-BE49-F238E27FC236}">
-                <a16:creationId xmlns:a16="http://schemas.microsoft.com/office/drawing/2014/main" id="{21099281-C000-4EAE-B247-E0855EE8E5E0}"/>
-              </a:ext>
-            </a:extLst>
-          </p:cNvPr>
-          <p:cNvSpPr>
-            <a:spLocks xmlns:a="http://schemas.openxmlformats.org/drawingml/2006/main" noGrp="1"/>
-          </p:cNvSpPr>
-          <p:nvPr/>
-        </p:nvSpPr>
-        <p:spPr>
-          <a:xfrm xmlns:a="http://schemas.openxmlformats.org/drawingml/2006/main">
-            <a:off x="7178040" y="4334256"/>
-            <a:ext cx="822960" cy="310896"/>
-          </a:xfrm>
-          <a:prstGeom xmlns:a="http://schemas.openxmlformats.org/drawingml/2006/main" prst="rect">
-            <a:avLst/>
-          </a:prstGeom>
-          <a:noFill xmlns:a="http://schemas.openxmlformats.org/drawingml/2006/main"/>
-        </p:spPr>
-        <p:txBody>
-          <a:bodyPr xmlns:a="http://schemas.openxmlformats.org/drawingml/2006/main" wrap="square" lIns="0" tIns="0" rIns="0" bIns="0" anchor="ctr"/>
-          <a:lstStyle xmlns:a="http://schemas.openxmlformats.org/drawingml/2006/main"/>
-          <a:p xmlns:a="http://schemas.openxmlformats.org/drawingml/2006/main">
-            <a:pPr marL="0" indent="0" algn="ctr">
-              <a:buNone/>
-            </a:pPr>
-            <a:r>
-              <a:rPr sz="1200" b="1">
-                <a:solidFill>
-                  <a:srgbClr val="1F6FB8"/>
-                </a:solidFill>
-                <a:latin typeface="Microsoft JhengHei"/>
-                <a:ea typeface="Microsoft JhengHei"/>
-                <a:cs typeface="Microsoft JhengHei"/>
-              </a:rPr>
-              <a:t>8 月</a:t>
-            </a:r>
-            <a:endParaRPr sz="1200"/>
-          </a:p>
-        </p:txBody>
-      </p:sp>
-      <p:sp>
-        <p:nvSpPr>
-          <p:cNvPr id="45" name="Text 42">
-            <a:extLst xmlns:a="http://schemas.openxmlformats.org/drawingml/2006/main">
-              <a:ext uri="{FF2B5EF4-FFF2-40B4-BE49-F238E27FC236}">
-                <a16:creationId xmlns:a16="http://schemas.microsoft.com/office/drawing/2014/main" id="{43D7E73D-6558-4FCB-B74E-F9BEF1F3EBA1}"/>
-              </a:ext>
-            </a:extLst>
-          </p:cNvPr>
-          <p:cNvSpPr>
-            <a:spLocks xmlns:a="http://schemas.openxmlformats.org/drawingml/2006/main" noGrp="1"/>
-          </p:cNvSpPr>
-          <p:nvPr/>
-        </p:nvSpPr>
-        <p:spPr>
-          <a:xfrm xmlns:a="http://schemas.openxmlformats.org/drawingml/2006/main">
-            <a:off x="8183880" y="4315968"/>
-            <a:ext cx="3154680" cy="347472"/>
-          </a:xfrm>
-          <a:prstGeom xmlns:a="http://schemas.openxmlformats.org/drawingml/2006/main" prst="rect">
-            <a:avLst/>
-          </a:prstGeom>
-          <a:noFill xmlns:a="http://schemas.openxmlformats.org/drawingml/2006/main"/>
-        </p:spPr>
-        <p:txBody>
-          <a:bodyPr xmlns:a="http://schemas.openxmlformats.org/drawingml/2006/main" wrap="square" lIns="0" tIns="0" rIns="0" bIns="0" anchor="ctr"/>
-          <a:lstStyle xmlns:a="http://schemas.openxmlformats.org/drawingml/2006/main"/>
-          <a:p xmlns:a="http://schemas.openxmlformats.org/drawingml/2006/main">
-            <a:pPr marL="0" indent="0">
-              <a:buNone/>
-            </a:pPr>
-            <a:r>
-              <a:rPr sz="1400">
-                <a:solidFill>
-                  <a:srgbClr val="3F546C"/>
-                </a:solidFill>
-                <a:latin typeface="Microsoft JhengHei"/>
-                <a:ea typeface="Microsoft JhengHei"/>
-                <a:cs typeface="Microsoft JhengHei"/>
-              </a:rPr>
-              <a:t>Dcard、Mobile01、方案額度</a:t>
-            </a:r>
-            <a:endParaRPr sz="1400"/>
-          </a:p>
-        </p:txBody>
-      </p:sp>
-      <p:sp>
-        <p:nvSpPr>
-          <p:cNvPr id="46" name="Shape 43">
-            <a:extLst xmlns:a="http://schemas.openxmlformats.org/drawingml/2006/main">
-              <a:ext uri="{FF2B5EF4-FFF2-40B4-BE49-F238E27FC236}">
-                <a16:creationId xmlns:a16="http://schemas.microsoft.com/office/drawing/2014/main" id="{551EF12F-89F5-42E4-95D5-1BACD5D2F554}"/>
-              </a:ext>
-            </a:extLst>
-          </p:cNvPr>
-          <p:cNvSpPr>
-            <a:spLocks xmlns:a="http://schemas.openxmlformats.org/drawingml/2006/main" noGrp="1"/>
-          </p:cNvSpPr>
-          <p:nvPr/>
-        </p:nvSpPr>
-        <p:spPr>
-          <a:xfrm xmlns:a="http://schemas.openxmlformats.org/drawingml/2006/main">
-            <a:off x="7178040" y="4718304"/>
-            <a:ext cx="822960" cy="310896"/>
-          </a:xfrm>
-          <a:prstGeom xmlns:a="http://schemas.openxmlformats.org/drawingml/2006/main" prst="roundRect">
-            <a:avLst>
-              <a:gd name="adj" fmla="val 50000"/>
-            </a:avLst>
-          </a:prstGeom>
-          <a:solidFill xmlns:a="http://schemas.openxmlformats.org/drawingml/2006/main">
-            <a:srgbClr val="E2EDF9"/>
-          </a:solidFill>
-          <a:ln xmlns:a="http://schemas.openxmlformats.org/drawingml/2006/main" w="12700">
-            <a:solidFill>
-              <a:srgbClr val="E2EDF9"/>
-            </a:solidFill>
-            <a:prstDash val="solid"/>
-          </a:ln>
-        </p:spPr>
-        <p:txBody xmlns:a="http://schemas.openxmlformats.org/drawingml/2006/main">
-          <a:bodyPr/>
-          <a:p/>
-        </p:txBody>
-      </p:sp>
-      <p:sp>
-        <p:nvSpPr>
-          <p:cNvPr id="47" name="Text 44">
-            <a:extLst xmlns:a="http://schemas.openxmlformats.org/drawingml/2006/main">
-              <a:ext uri="{FF2B5EF4-FFF2-40B4-BE49-F238E27FC236}">
-                <a16:creationId xmlns:a16="http://schemas.microsoft.com/office/drawing/2014/main" id="{64826EBD-EDD1-4A9F-9D99-14C6FCA0D24D}"/>
-              </a:ext>
-            </a:extLst>
-          </p:cNvPr>
-          <p:cNvSpPr>
-            <a:spLocks xmlns:a="http://schemas.openxmlformats.org/drawingml/2006/main" noGrp="1"/>
-          </p:cNvSpPr>
-          <p:nvPr/>
-        </p:nvSpPr>
-        <p:spPr>
-          <a:xfrm xmlns:a="http://schemas.openxmlformats.org/drawingml/2006/main">
-            <a:off x="7178040" y="4718304"/>
-            <a:ext cx="822960" cy="310896"/>
-          </a:xfrm>
-          <a:prstGeom xmlns:a="http://schemas.openxmlformats.org/drawingml/2006/main" prst="rect">
-            <a:avLst/>
-          </a:prstGeom>
-          <a:noFill xmlns:a="http://schemas.openxmlformats.org/drawingml/2006/main"/>
-        </p:spPr>
-        <p:txBody>
-          <a:bodyPr xmlns:a="http://schemas.openxmlformats.org/drawingml/2006/main" wrap="square" lIns="0" tIns="0" rIns="0" bIns="0" anchor="ctr"/>
-          <a:lstStyle xmlns:a="http://schemas.openxmlformats.org/drawingml/2006/main"/>
-          <a:p xmlns:a="http://schemas.openxmlformats.org/drawingml/2006/main">
-            <a:pPr marL="0" indent="0" algn="ctr">
-              <a:buNone/>
-            </a:pPr>
-            <a:r>
-              <a:rPr sz="1200" b="1">
-                <a:solidFill>
-                  <a:srgbClr val="1F6FB8"/>
-                </a:solidFill>
-                <a:latin typeface="Microsoft JhengHei"/>
-                <a:ea typeface="Microsoft JhengHei"/>
-                <a:cs typeface="Microsoft JhengHei"/>
-              </a:rPr>
-              <a:t>9 月</a:t>
-            </a:r>
-            <a:endParaRPr sz="1200"/>
-          </a:p>
-        </p:txBody>
-      </p:sp>
-      <p:sp>
-        <p:nvSpPr>
-          <p:cNvPr id="48" name="Text 45">
-            <a:extLst xmlns:a="http://schemas.openxmlformats.org/drawingml/2006/main">
-              <a:ext uri="{FF2B5EF4-FFF2-40B4-BE49-F238E27FC236}">
-                <a16:creationId xmlns:a16="http://schemas.microsoft.com/office/drawing/2014/main" id="{97A4B502-DDBF-4AE9-B88B-968686120D18}"/>
-              </a:ext>
-            </a:extLst>
-          </p:cNvPr>
-          <p:cNvSpPr>
-            <a:spLocks xmlns:a="http://schemas.openxmlformats.org/drawingml/2006/main" noGrp="1"/>
-          </p:cNvSpPr>
-          <p:nvPr/>
-        </p:nvSpPr>
-        <p:spPr>
-          <a:xfrm xmlns:a="http://schemas.openxmlformats.org/drawingml/2006/main">
-            <a:off x="8183880" y="4700016"/>
-            <a:ext cx="3154680" cy="347472"/>
-          </a:xfrm>
-          <a:prstGeom xmlns:a="http://schemas.openxmlformats.org/drawingml/2006/main" prst="rect">
-            <a:avLst/>
-          </a:prstGeom>
-          <a:noFill xmlns:a="http://schemas.openxmlformats.org/drawingml/2006/main"/>
-        </p:spPr>
-        <p:txBody>
-          <a:bodyPr xmlns:a="http://schemas.openxmlformats.org/drawingml/2006/main" wrap="square" lIns="0" tIns="0" rIns="0" bIns="0" anchor="ctr"/>
-          <a:lstStyle xmlns:a="http://schemas.openxmlformats.org/drawingml/2006/main"/>
-          <a:p xmlns:a="http://schemas.openxmlformats.org/drawingml/2006/main">
-            <a:pPr marL="0" indent="0">
-              <a:buNone/>
-            </a:pPr>
-            <a:r>
-              <a:rPr sz="1400">
-                <a:solidFill>
-                  <a:srgbClr val="3F546C"/>
-                </a:solidFill>
-                <a:latin typeface="Microsoft JhengHei"/>
-                <a:ea typeface="Microsoft JhengHei"/>
-                <a:cs typeface="Microsoft JhengHei"/>
-              </a:rPr>
-              <a:t>Alembic 遷移、向量檢索</a:t>
-            </a:r>
-            <a:endParaRPr sz="1400"/>
-          </a:p>
-        </p:txBody>
-      </p:sp>
-      <p:sp>
-        <p:nvSpPr>
-          <p:cNvPr id="49" name="Shape 46">
-            <a:extLst xmlns:a="http://schemas.openxmlformats.org/drawingml/2006/main">
-              <a:ext uri="{FF2B5EF4-FFF2-40B4-BE49-F238E27FC236}">
-                <a16:creationId xmlns:a16="http://schemas.microsoft.com/office/drawing/2014/main" id="{013B4DC3-643A-4B1A-81C6-E3AE9F643328}"/>
-              </a:ext>
-            </a:extLst>
-          </p:cNvPr>
-          <p:cNvSpPr>
-            <a:spLocks xmlns:a="http://schemas.openxmlformats.org/drawingml/2006/main" noGrp="1"/>
-          </p:cNvSpPr>
-          <p:nvPr/>
-        </p:nvSpPr>
-        <p:spPr>
-          <a:xfrm xmlns:a="http://schemas.openxmlformats.org/drawingml/2006/main">
-            <a:off x="7178040" y="5102352"/>
-            <a:ext cx="822960" cy="310896"/>
-          </a:xfrm>
-          <a:prstGeom xmlns:a="http://schemas.openxmlformats.org/drawingml/2006/main" prst="roundRect">
-            <a:avLst>
-              <a:gd name="adj" fmla="val 50000"/>
-            </a:avLst>
-          </a:prstGeom>
-          <a:solidFill xmlns:a="http://schemas.openxmlformats.org/drawingml/2006/main">
-            <a:srgbClr val="E2EDF9"/>
-          </a:solidFill>
-          <a:ln xmlns:a="http://schemas.openxmlformats.org/drawingml/2006/main" w="12700">
-            <a:solidFill>
-              <a:srgbClr val="E2EDF9"/>
-            </a:solidFill>
-            <a:prstDash val="solid"/>
-          </a:ln>
-        </p:spPr>
-        <p:txBody xmlns:a="http://schemas.openxmlformats.org/drawingml/2006/main">
-          <a:bodyPr/>
-          <a:p/>
-        </p:txBody>
-      </p:sp>
-      <p:sp>
-        <p:nvSpPr>
-          <p:cNvPr id="50" name="Text 47">
-            <a:extLst xmlns:a="http://schemas.openxmlformats.org/drawingml/2006/main">
-              <a:ext uri="{FF2B5EF4-FFF2-40B4-BE49-F238E27FC236}">
-                <a16:creationId xmlns:a16="http://schemas.microsoft.com/office/drawing/2014/main" id="{68A1ADBC-DD35-4C29-A297-584A957348AE}"/>
-              </a:ext>
-            </a:extLst>
-          </p:cNvPr>
-          <p:cNvSpPr>
-            <a:spLocks xmlns:a="http://schemas.openxmlformats.org/drawingml/2006/main" noGrp="1"/>
-          </p:cNvSpPr>
-          <p:nvPr/>
-        </p:nvSpPr>
-        <p:spPr>
-          <a:xfrm xmlns:a="http://schemas.openxmlformats.org/drawingml/2006/main">
-            <a:off x="7178040" y="5102352"/>
-            <a:ext cx="822960" cy="310896"/>
-          </a:xfrm>
-          <a:prstGeom xmlns:a="http://schemas.openxmlformats.org/drawingml/2006/main" prst="rect">
-            <a:avLst/>
-          </a:prstGeom>
-          <a:noFill xmlns:a="http://schemas.openxmlformats.org/drawingml/2006/main"/>
-        </p:spPr>
-        <p:txBody>
-          <a:bodyPr xmlns:a="http://schemas.openxmlformats.org/drawingml/2006/main" wrap="square" lIns="0" tIns="0" rIns="0" bIns="0" anchor="ctr"/>
-          <a:lstStyle xmlns:a="http://schemas.openxmlformats.org/drawingml/2006/main"/>
-          <a:p xmlns:a="http://schemas.openxmlformats.org/drawingml/2006/main">
-            <a:pPr marL="0" indent="0" algn="ctr">
-              <a:buNone/>
-            </a:pPr>
-            <a:r>
-              <a:rPr sz="1200" b="1">
-                <a:solidFill>
-                  <a:srgbClr val="1F6FB8"/>
-                </a:solidFill>
-                <a:latin typeface="Microsoft JhengHei"/>
-                <a:ea typeface="Microsoft JhengHei"/>
-                <a:cs typeface="Microsoft JhengHei"/>
-              </a:rPr>
-              <a:t>10 月</a:t>
-            </a:r>
-            <a:endParaRPr sz="1200"/>
-          </a:p>
-        </p:txBody>
-      </p:sp>
-      <p:sp>
-        <p:nvSpPr>
-          <p:cNvPr id="51" name="Text 48">
-            <a:extLst xmlns:a="http://schemas.openxmlformats.org/drawingml/2006/main">
-              <a:ext uri="{FF2B5EF4-FFF2-40B4-BE49-F238E27FC236}">
-                <a16:creationId xmlns:a16="http://schemas.microsoft.com/office/drawing/2014/main" id="{74CBCE47-65E0-4426-AD10-3048A47036DC}"/>
-              </a:ext>
-            </a:extLst>
-          </p:cNvPr>
-          <p:cNvSpPr>
-            <a:spLocks xmlns:a="http://schemas.openxmlformats.org/drawingml/2006/main" noGrp="1"/>
-          </p:cNvSpPr>
-          <p:nvPr/>
-        </p:nvSpPr>
-        <p:spPr>
-          <a:xfrm xmlns:a="http://schemas.openxmlformats.org/drawingml/2006/main">
-            <a:off x="8183880" y="5084064"/>
-            <a:ext cx="3154680" cy="347472"/>
-          </a:xfrm>
-          <a:prstGeom xmlns:a="http://schemas.openxmlformats.org/drawingml/2006/main" prst="rect">
-            <a:avLst/>
-          </a:prstGeom>
-          <a:noFill xmlns:a="http://schemas.openxmlformats.org/drawingml/2006/main"/>
-        </p:spPr>
-        <p:txBody>
-          <a:bodyPr xmlns:a="http://schemas.openxmlformats.org/drawingml/2006/main" wrap="square" lIns="0" tIns="0" rIns="0" bIns="0" anchor="ctr"/>
-          <a:lstStyle xmlns:a="http://schemas.openxmlformats.org/drawingml/2006/main"/>
-          <a:p xmlns:a="http://schemas.openxmlformats.org/drawingml/2006/main">
-            <a:pPr marL="0" indent="0">
-              <a:buNone/>
-            </a:pPr>
-            <a:r>
-              <a:rPr sz="1400">
-                <a:solidFill>
-                  <a:srgbClr val="3F546C"/>
-                </a:solidFill>
-                <a:latin typeface="Microsoft JhengHei"/>
-                <a:ea typeface="Microsoft JhengHei"/>
-                <a:cs typeface="Microsoft JhengHei"/>
-              </a:rPr>
-              <a:t>整合測試、情緒一致性修正</a:t>
-            </a:r>
-            <a:endParaRPr sz="1400"/>
-          </a:p>
-        </p:txBody>
-      </p:sp>
-      <p:sp>
-        <p:nvSpPr>
-          <p:cNvPr id="52" name="Shape 49">
-            <a:extLst xmlns:a="http://schemas.openxmlformats.org/drawingml/2006/main">
-              <a:ext uri="{FF2B5EF4-FFF2-40B4-BE49-F238E27FC236}">
-                <a16:creationId xmlns:a16="http://schemas.microsoft.com/office/drawing/2014/main" id="{1BC04AE9-A050-40E6-AA53-5E1A8A207C35}"/>
-              </a:ext>
-            </a:extLst>
-          </p:cNvPr>
-          <p:cNvSpPr>
-            <a:spLocks xmlns:a="http://schemas.openxmlformats.org/drawingml/2006/main" noGrp="1"/>
-          </p:cNvSpPr>
-          <p:nvPr/>
-        </p:nvSpPr>
-        <p:spPr>
-          <a:xfrm xmlns:a="http://schemas.openxmlformats.org/drawingml/2006/main">
-            <a:off x="731520" y="5669280"/>
-            <a:ext cx="10725912" cy="457200"/>
-          </a:xfrm>
-          <a:prstGeom xmlns:a="http://schemas.openxmlformats.org/drawingml/2006/main" prst="roundRect">
-            <a:avLst>
-              <a:gd name="adj" fmla="val 24000"/>
-            </a:avLst>
-          </a:prstGeom>
-          <a:solidFill xmlns:a="http://schemas.openxmlformats.org/drawingml/2006/main">
-            <a:srgbClr val="FDEEDF"/>
-          </a:solidFill>
-          <a:ln xmlns:a="http://schemas.openxmlformats.org/drawingml/2006/main" w="12700">
-            <a:solidFill>
-              <a:srgbClr val="FDEEDF"/>
-            </a:solidFill>
-            <a:prstDash val="solid"/>
-          </a:ln>
-        </p:spPr>
-        <p:txBody xmlns:a="http://schemas.openxmlformats.org/drawingml/2006/main">
-          <a:bodyPr/>
-          <a:p/>
-        </p:txBody>
-      </p:sp>
-      <p:sp>
-        <p:nvSpPr>
-          <p:cNvPr id="53" name="Text 50">
-            <a:extLst xmlns:a="http://schemas.openxmlformats.org/drawingml/2006/main">
-              <a:ext uri="{FF2B5EF4-FFF2-40B4-BE49-F238E27FC236}">
-                <a16:creationId xmlns:a16="http://schemas.microsoft.com/office/drawing/2014/main" id="{15366697-B447-49EA-A244-2C2D721D24F5}"/>
-              </a:ext>
-            </a:extLst>
-          </p:cNvPr>
-          <p:cNvSpPr>
-            <a:spLocks xmlns:a="http://schemas.openxmlformats.org/drawingml/2006/main" noGrp="1"/>
-          </p:cNvSpPr>
-          <p:nvPr/>
-        </p:nvSpPr>
-        <p:spPr>
-          <a:xfrm xmlns:a="http://schemas.openxmlformats.org/drawingml/2006/main">
-            <a:off x="731520" y="5669280"/>
-            <a:ext cx="10725912" cy="457200"/>
-          </a:xfrm>
-          <a:prstGeom xmlns:a="http://schemas.openxmlformats.org/drawingml/2006/main" prst="rect">
-            <a:avLst/>
-          </a:prstGeom>
-          <a:noFill xmlns:a="http://schemas.openxmlformats.org/drawingml/2006/main"/>
-        </p:spPr>
-        <p:txBody>
-          <a:bodyPr xmlns:a="http://schemas.openxmlformats.org/drawingml/2006/main" wrap="square" lIns="0" tIns="0" rIns="0" bIns="0" anchor="ctr"/>
-          <a:lstStyle xmlns:a="http://schemas.openxmlformats.org/drawingml/2006/main"/>
-          <a:p xmlns:a="http://schemas.openxmlformats.org/drawingml/2006/main">
-            <a:pPr marL="0" indent="0" algn="ctr">
-              <a:buNone/>
-            </a:pPr>
-            <a:r>
-              <a:rPr sz="1400" b="1">
-                <a:solidFill>
-                  <a:srgbClr val="D46A12"/>
-                </a:solidFill>
-                <a:latin typeface="Microsoft JhengHei"/>
-                <a:ea typeface="Microsoft JhengHei"/>
-                <a:cs typeface="Microsoft JhengHei"/>
-              </a:rPr>
-              <a:t>GitHub：7–10 月 146 次提交（截至 10/12，皆已推送）；非逐人貢獻比例。</a:t>
-            </a:r>
-            <a:endParaRPr sz="1400"/>
-          </a:p>
-        </p:txBody>
-      </p:sp>
-      <p:sp>
-        <p:nvSpPr>
-          <p:cNvPr id="55" name="17">
-            <a:extLst xmlns:a="http://schemas.openxmlformats.org/drawingml/2006/main">
-              <a:ext uri="{FF2B5EF4-FFF2-40B4-BE49-F238E27FC236}">
-                <a16:creationId xmlns:a16="http://schemas.microsoft.com/office/drawing/2014/main" id="{A13AD611-5595-4DFB-8BD9-6296EE5DAC21}"/>
+          <p:cNvPr id="21" name="18">
+            <a:extLst xmlns:a="http://schemas.openxmlformats.org/drawingml/2006/main">
+              <a:ext uri="{FF2B5EF4-FFF2-40B4-BE49-F238E27FC236}">
+                <a16:creationId xmlns:a16="http://schemas.microsoft.com/office/drawing/2014/main" id="{5915EECD-9CB3-4C20-BD63-1E2E07769E6C}"/>
               </a:ext>
             </a:extLst>
           </p:cNvPr>
@@ -12333,37 +13187,15 @@
                   <a:srgbClr val="465E78"/>
                 </a:solidFill>
               </a:rPr>
-              <a:t>16</a:t>
-            </a:r>
-          </a:p>
-        </p:txBody>
-      </p:sp>
-      <p:graphicFrame>
-        <p:nvGraphicFramePr>
-          <p:cNvPr id="56" name="Chart">
-            <a:extLst xmlns:a="http://schemas.openxmlformats.org/drawingml/2006/main">
-              <a:ext uri="{FF2B5EF4-FFF2-40B4-BE49-F238E27FC236}">
-                <a16:creationId xmlns:a16="http://schemas.microsoft.com/office/drawing/2014/main" id="{1010574F-0FDF-4032-8F0A-AF35C50413F4}"/>
-              </a:ext>
-            </a:extLst>
-          </p:cNvPr>
-          <p:cNvGraphicFramePr/>
-          <p:nvPr/>
-        </p:nvGraphicFramePr>
-        <p:xfrm>
-          <a:off xmlns:a="http://schemas.openxmlformats.org/drawingml/2006/main" x="914400" y="3474720"/>
-          <a:ext xmlns:a="http://schemas.openxmlformats.org/drawingml/2006/main" cx="5669280" cy="1965960"/>
-        </p:xfrm>
-        <a:graphic xmlns:a="http://schemas.openxmlformats.org/drawingml/2006/main">
-          <a:graphicData uri="http://schemas.openxmlformats.org/drawingml/2006/chart">
-            <c:chart xmlns:r="http://schemas.openxmlformats.org/officeDocument/2006/relationships" xmlns:c="http://schemas.openxmlformats.org/drawingml/2006/chart" r:id="R2ed47b1b21624dc2"/>
-          </a:graphicData>
-        </a:graphic>
-      </p:graphicFrame>
+              <a:t>17</a:t>
+            </a:r>
+          </a:p>
+        </p:txBody>
+      </p:sp>
     </p:spTree>
     <p:extLst>
       <p:ext uri="{BB962C8B-B14F-4D97-AF65-F5344CB8AC3E}">
-        <p14:creationId xmlns:p14="http://schemas.microsoft.com/office/powerpoint/2010/main" val="1144958211"/>
+        <p14:creationId xmlns:p14="http://schemas.microsoft.com/office/powerpoint/2010/main" val="266194338"/>
       </p:ext>
     </p:extLst>
   </p:cSld>
@@ -12394,838 +13226,6 @@
           <p:cNvPr id="4" name="Text 2">
             <a:extLst xmlns:a="http://schemas.openxmlformats.org/drawingml/2006/main">
               <a:ext uri="{FF2B5EF4-FFF2-40B4-BE49-F238E27FC236}">
-                <a16:creationId xmlns:a16="http://schemas.microsoft.com/office/drawing/2014/main" id="{B9B8CFF4-E02B-4252-8BD1-762D52CB9695}"/>
-              </a:ext>
-            </a:extLst>
-          </p:cNvPr>
-          <p:cNvSpPr>
-            <a:spLocks xmlns:a="http://schemas.openxmlformats.org/drawingml/2006/main" noGrp="1"/>
-          </p:cNvSpPr>
-          <p:nvPr/>
-        </p:nvSpPr>
-        <p:spPr>
-          <a:xfrm xmlns:a="http://schemas.openxmlformats.org/drawingml/2006/main">
-            <a:off x="731520" y="777240"/>
-            <a:ext cx="10725912" cy="685800"/>
-          </a:xfrm>
-          <a:prstGeom xmlns:a="http://schemas.openxmlformats.org/drawingml/2006/main" prst="rect">
-            <a:avLst/>
-          </a:prstGeom>
-          <a:noFill xmlns:a="http://schemas.openxmlformats.org/drawingml/2006/main"/>
-        </p:spPr>
-        <p:txBody>
-          <a:bodyPr xmlns:a="http://schemas.openxmlformats.org/drawingml/2006/main" wrap="square" lIns="0" tIns="0" rIns="0" bIns="0" anchor="ctr"/>
-          <a:lstStyle xmlns:a="http://schemas.openxmlformats.org/drawingml/2006/main"/>
-          <a:p xmlns:a="http://schemas.openxmlformats.org/drawingml/2006/main">
-            <a:pPr marL="0" indent="0">
-              <a:buNone/>
-            </a:pPr>
-            <a:r>
-              <a:rPr sz="3000" b="1">
-                <a:solidFill>
-                  <a:srgbClr val="14243A"/>
-                </a:solidFill>
-                <a:latin typeface="Microsoft JhengHei"/>
-                <a:ea typeface="Microsoft JhengHei"/>
-                <a:cs typeface="Microsoft JhengHei"/>
-              </a:rPr>
-              <a:t>兩人分工：一人顧需求與營運，一人顧系統</a:t>
-            </a:r>
-            <a:endParaRPr sz="3000"/>
-          </a:p>
-        </p:txBody>
-      </p:sp>
-      <p:sp>
-        <p:nvSpPr>
-          <p:cNvPr id="6" name="Shape 4">
-            <a:extLst xmlns:a="http://schemas.openxmlformats.org/drawingml/2006/main">
-              <a:ext uri="{FF2B5EF4-FFF2-40B4-BE49-F238E27FC236}">
-                <a16:creationId xmlns:a16="http://schemas.microsoft.com/office/drawing/2014/main" id="{88E681A0-5409-45C5-8409-963228D47AED}"/>
-              </a:ext>
-            </a:extLst>
-          </p:cNvPr>
-          <p:cNvSpPr>
-            <a:spLocks xmlns:a="http://schemas.openxmlformats.org/drawingml/2006/main" noGrp="1"/>
-          </p:cNvSpPr>
-          <p:nvPr/>
-        </p:nvSpPr>
-        <p:spPr>
-          <a:xfrm xmlns:a="http://schemas.openxmlformats.org/drawingml/2006/main">
-            <a:off x="731520" y="1783080"/>
-            <a:ext cx="5257800" cy="3611880"/>
-          </a:xfrm>
-          <a:prstGeom xmlns:a="http://schemas.openxmlformats.org/drawingml/2006/main" prst="roundRect">
-            <a:avLst>
-              <a:gd name="adj" fmla="val 4051"/>
-            </a:avLst>
-          </a:prstGeom>
-          <a:solidFill xmlns:a="http://schemas.openxmlformats.org/drawingml/2006/main">
-            <a:srgbClr val="FFFFFF"/>
-          </a:solidFill>
-          <a:ln xmlns:a="http://schemas.openxmlformats.org/drawingml/2006/main" w="12700">
-            <a:solidFill>
-              <a:srgbClr val="D3DEEA"/>
-            </a:solidFill>
-            <a:prstDash val="solid"/>
-          </a:ln>
-        </p:spPr>
-        <p:txBody xmlns:a="http://schemas.openxmlformats.org/drawingml/2006/main">
-          <a:bodyPr/>
-          <a:p/>
-        </p:txBody>
-      </p:sp>
-      <p:sp>
-        <p:nvSpPr>
-          <p:cNvPr id="7" name="Shape 5">
-            <a:extLst xmlns:a="http://schemas.openxmlformats.org/drawingml/2006/main">
-              <a:ext uri="{FF2B5EF4-FFF2-40B4-BE49-F238E27FC236}">
-                <a16:creationId xmlns:a16="http://schemas.microsoft.com/office/drawing/2014/main" id="{E76B4F59-4499-4213-A914-8E3D6E72C9BE}"/>
-              </a:ext>
-            </a:extLst>
-          </p:cNvPr>
-          <p:cNvSpPr>
-            <a:spLocks xmlns:a="http://schemas.openxmlformats.org/drawingml/2006/main" noGrp="1"/>
-          </p:cNvSpPr>
-          <p:nvPr/>
-        </p:nvSpPr>
-        <p:spPr>
-          <a:xfrm xmlns:a="http://schemas.openxmlformats.org/drawingml/2006/main">
-            <a:off x="3031236" y="2011680"/>
-            <a:ext cx="658368" cy="658368"/>
-          </a:xfrm>
-          <a:prstGeom xmlns:a="http://schemas.openxmlformats.org/drawingml/2006/main" prst="ellipse">
-            <a:avLst/>
-          </a:prstGeom>
-          <a:solidFill xmlns:a="http://schemas.openxmlformats.org/drawingml/2006/main">
-            <a:srgbClr val="E2EDF9"/>
-          </a:solidFill>
-          <a:ln xmlns:a="http://schemas.openxmlformats.org/drawingml/2006/main" w="12700">
-            <a:solidFill>
-              <a:srgbClr val="E2EDF9"/>
-            </a:solidFill>
-            <a:prstDash val="solid"/>
-          </a:ln>
-        </p:spPr>
-        <p:txBody xmlns:a="http://schemas.openxmlformats.org/drawingml/2006/main">
-          <a:bodyPr/>
-          <a:p/>
-        </p:txBody>
-      </p:sp>
-      <p:pic>
-        <p:nvPicPr>
-          <p:cNvPr id="8" name="Image 0">
-            <a:extLst xmlns:a="http://schemas.openxmlformats.org/drawingml/2006/main">
-              <a:ext uri="{FF2B5EF4-FFF2-40B4-BE49-F238E27FC236}">
-                <a16:creationId xmlns:a16="http://schemas.microsoft.com/office/drawing/2014/main" id="{EDD4EF95-F430-4C5B-813C-59626F21DCB6}"/>
-              </a:ext>
-            </a:extLst>
-          </p:cNvPr>
-          <p:cNvPicPr>
-            <a:picLocks xmlns:a="http://schemas.openxmlformats.org/drawingml/2006/main" noChangeAspect="1"/>
-          </p:cNvPicPr>
-          <p:nvPr/>
-        </p:nvPicPr>
-        <p:blipFill>
-          <a:blip xmlns:r="http://schemas.openxmlformats.org/officeDocument/2006/relationships" xmlns:a="http://schemas.openxmlformats.org/drawingml/2006/main" r:embed="R8004c86ae98f4506"/>
-          <a:stretch xmlns:a="http://schemas.openxmlformats.org/drawingml/2006/main">
-            <a:fillRect l="0" t="0" r="0" b="0"/>
-          </a:stretch>
-        </p:blipFill>
-        <p:spPr>
-          <a:xfrm xmlns:a="http://schemas.openxmlformats.org/drawingml/2006/main">
-            <a:off x="3177540" y="2157984"/>
-            <a:ext cx="365760" cy="365760"/>
-          </a:xfrm>
-          <a:prstGeom xmlns:a="http://schemas.openxmlformats.org/drawingml/2006/main" prst="rect">
-            <a:avLst/>
-          </a:prstGeom>
-        </p:spPr>
-      </p:pic>
-      <p:sp>
-        <p:nvSpPr>
-          <p:cNvPr id="9" name="Text 6">
-            <a:extLst xmlns:a="http://schemas.openxmlformats.org/drawingml/2006/main">
-              <a:ext uri="{FF2B5EF4-FFF2-40B4-BE49-F238E27FC236}">
-                <a16:creationId xmlns:a16="http://schemas.microsoft.com/office/drawing/2014/main" id="{AB05FFBB-F3A1-4E2E-A848-8A9E15C43F8E}"/>
-              </a:ext>
-            </a:extLst>
-          </p:cNvPr>
-          <p:cNvSpPr>
-            <a:spLocks xmlns:a="http://schemas.openxmlformats.org/drawingml/2006/main" noGrp="1"/>
-          </p:cNvSpPr>
-          <p:nvPr/>
-        </p:nvSpPr>
-        <p:spPr>
-          <a:xfrm xmlns:a="http://schemas.openxmlformats.org/drawingml/2006/main">
-            <a:off x="731520" y="2743200"/>
-            <a:ext cx="5257800" cy="411480"/>
-          </a:xfrm>
-          <a:prstGeom xmlns:a="http://schemas.openxmlformats.org/drawingml/2006/main" prst="rect">
-            <a:avLst/>
-          </a:prstGeom>
-          <a:noFill xmlns:a="http://schemas.openxmlformats.org/drawingml/2006/main"/>
-        </p:spPr>
-        <p:txBody>
-          <a:bodyPr xmlns:a="http://schemas.openxmlformats.org/drawingml/2006/main" wrap="square" lIns="0" tIns="0" rIns="0" bIns="0" anchor="ctr"/>
-          <a:lstStyle xmlns:a="http://schemas.openxmlformats.org/drawingml/2006/main"/>
-          <a:p xmlns:a="http://schemas.openxmlformats.org/drawingml/2006/main">
-            <a:pPr marL="0" indent="0" algn="ctr">
-              <a:buNone/>
-            </a:pPr>
-            <a:r>
-              <a:rPr sz="2000" b="1">
-                <a:solidFill>
-                  <a:srgbClr val="14243A"/>
-                </a:solidFill>
-                <a:latin typeface="Microsoft JhengHei"/>
-                <a:ea typeface="Microsoft JhengHei"/>
-                <a:cs typeface="Microsoft JhengHei"/>
-              </a:rPr>
-              <a:t>陳威帆</a:t>
-            </a:r>
-            <a:endParaRPr sz="2000"/>
-          </a:p>
-        </p:txBody>
-      </p:sp>
-      <p:sp>
-        <p:nvSpPr>
-          <p:cNvPr id="10" name="Text 7">
-            <a:extLst xmlns:a="http://schemas.openxmlformats.org/drawingml/2006/main">
-              <a:ext uri="{FF2B5EF4-FFF2-40B4-BE49-F238E27FC236}">
-                <a16:creationId xmlns:a16="http://schemas.microsoft.com/office/drawing/2014/main" id="{AF192125-9823-46B2-B755-8AA0B6280394}"/>
-              </a:ext>
-            </a:extLst>
-          </p:cNvPr>
-          <p:cNvSpPr>
-            <a:spLocks xmlns:a="http://schemas.openxmlformats.org/drawingml/2006/main" noGrp="1"/>
-          </p:cNvSpPr>
-          <p:nvPr/>
-        </p:nvSpPr>
-        <p:spPr>
-          <a:xfrm xmlns:a="http://schemas.openxmlformats.org/drawingml/2006/main">
-            <a:off x="731520" y="3154680"/>
-            <a:ext cx="5257800" cy="292608"/>
-          </a:xfrm>
-          <a:prstGeom xmlns:a="http://schemas.openxmlformats.org/drawingml/2006/main" prst="rect">
-            <a:avLst/>
-          </a:prstGeom>
-          <a:noFill xmlns:a="http://schemas.openxmlformats.org/drawingml/2006/main"/>
-        </p:spPr>
-        <p:txBody>
-          <a:bodyPr xmlns:a="http://schemas.openxmlformats.org/drawingml/2006/main" wrap="square" lIns="0" tIns="0" rIns="0" bIns="0" anchor="ctr"/>
-          <a:lstStyle xmlns:a="http://schemas.openxmlformats.org/drawingml/2006/main"/>
-          <a:p xmlns:a="http://schemas.openxmlformats.org/drawingml/2006/main">
-            <a:pPr marL="0" indent="0" algn="ctr">
-              <a:buNone/>
-            </a:pPr>
-            <a:r>
-              <a:rPr sz="1200">
-                <a:solidFill>
-                  <a:srgbClr val="D46A12"/>
-                </a:solidFill>
-                <a:latin typeface="Microsoft JhengHei"/>
-                <a:ea typeface="Microsoft JhengHei"/>
-                <a:cs typeface="Microsoft JhengHei"/>
-              </a:rPr>
-              <a:t>組長 · 11246044</a:t>
-            </a:r>
-            <a:endParaRPr sz="1200"/>
-          </a:p>
-        </p:txBody>
-      </p:sp>
-      <p:sp>
-        <p:nvSpPr>
-          <p:cNvPr id="11" name="Text 8">
-            <a:extLst xmlns:a="http://schemas.openxmlformats.org/drawingml/2006/main">
-              <a:ext uri="{FF2B5EF4-FFF2-40B4-BE49-F238E27FC236}">
-                <a16:creationId xmlns:a16="http://schemas.microsoft.com/office/drawing/2014/main" id="{A3A718B3-CAC3-4AD1-A310-D4FA4F81AD4F}"/>
-              </a:ext>
-            </a:extLst>
-          </p:cNvPr>
-          <p:cNvSpPr>
-            <a:spLocks xmlns:a="http://schemas.openxmlformats.org/drawingml/2006/main" noGrp="1"/>
-          </p:cNvSpPr>
-          <p:nvPr/>
-        </p:nvSpPr>
-        <p:spPr>
-          <a:xfrm xmlns:a="http://schemas.openxmlformats.org/drawingml/2006/main">
-            <a:off x="1005840" y="3611880"/>
-            <a:ext cx="4709160" cy="1645920"/>
-          </a:xfrm>
-          <a:prstGeom xmlns:a="http://schemas.openxmlformats.org/drawingml/2006/main" prst="rect">
-            <a:avLst/>
-          </a:prstGeom>
-          <a:noFill xmlns:a="http://schemas.openxmlformats.org/drawingml/2006/main"/>
-        </p:spPr>
-        <p:txBody>
-          <a:bodyPr xmlns:a="http://schemas.openxmlformats.org/drawingml/2006/main" wrap="square" lIns="0" tIns="0" rIns="0" bIns="0" anchor="t"/>
-          <a:lstStyle xmlns:a="http://schemas.openxmlformats.org/drawingml/2006/main"/>
-          <a:p xmlns:a="http://schemas.openxmlformats.org/drawingml/2006/main">
-            <a:pPr marL="0" indent="0" algn="ctr">
-              <a:spcAft>
-                <a:spcPts val="600"/>
-              </a:spcAft>
-              <a:buNone/>
-            </a:pPr>
-            <a:r>
-              <a:rPr sz="1400">
-                <a:solidFill>
-                  <a:srgbClr val="3F546C"/>
-                </a:solidFill>
-                <a:latin typeface="Microsoft JhengHei"/>
-                <a:ea typeface="Microsoft JhengHei"/>
-                <a:cs typeface="Microsoft JhengHei"/>
-              </a:rPr>
-              <a:t>需求企劃與雜誌社交流</a:t>
-            </a:r>
-            <a:endParaRPr sz="1400"/>
-          </a:p>
-          <a:p xmlns:a="http://schemas.openxmlformats.org/drawingml/2006/main">
-            <a:pPr marL="0" indent="0" algn="ctr">
-              <a:spcAft>
-                <a:spcPts val="600"/>
-              </a:spcAft>
-              <a:buNone/>
-            </a:pPr>
-            <a:r>
-              <a:rPr sz="1400">
-                <a:solidFill>
-                  <a:srgbClr val="3F546C"/>
-                </a:solidFill>
-                <a:latin typeface="Microsoft JhengHei"/>
-                <a:ea typeface="Microsoft JhengHei"/>
-                <a:cs typeface="Microsoft JhengHei"/>
-              </a:rPr>
-              <a:t>營運計畫：成本、STP、TOWS</a:t>
-            </a:r>
-            <a:endParaRPr sz="1400"/>
-          </a:p>
-          <a:p xmlns:a="http://schemas.openxmlformats.org/drawingml/2006/main">
-            <a:pPr marL="0" indent="0" algn="ctr">
-              <a:spcAft>
-                <a:spcPts val="600"/>
-              </a:spcAft>
-              <a:buNone/>
-            </a:pPr>
-            <a:r>
-              <a:rPr sz="1400">
-                <a:solidFill>
-                  <a:srgbClr val="3F546C"/>
-                </a:solidFill>
-                <a:latin typeface="Microsoft JhengHei"/>
-                <a:ea typeface="Microsoft JhengHei"/>
-                <a:cs typeface="Microsoft JhengHei"/>
-              </a:rPr>
-              <a:t>系統手冊統整、第 1–6 章</a:t>
-            </a:r>
-            <a:endParaRPr sz="1400"/>
-          </a:p>
-          <a:p xmlns:a="http://schemas.openxmlformats.org/drawingml/2006/main">
-            <a:pPr marL="0" indent="0" algn="ctr">
-              <a:spcAft>
-                <a:spcPts val="600"/>
-              </a:spcAft>
-              <a:buNone/>
-            </a:pPr>
-            <a:r>
-              <a:rPr sz="1400">
-                <a:solidFill>
-                  <a:srgbClr val="3F546C"/>
-                </a:solidFill>
-                <a:latin typeface="Microsoft JhengHei"/>
-                <a:ea typeface="Microsoft JhengHei"/>
-                <a:cs typeface="Microsoft JhengHei"/>
-              </a:rPr>
-              <a:t>簡報與報告</a:t>
-            </a:r>
-            <a:endParaRPr sz="1400"/>
-          </a:p>
-        </p:txBody>
-      </p:sp>
-      <p:sp>
-        <p:nvSpPr>
-          <p:cNvPr id="12" name="Shape 9">
-            <a:extLst xmlns:a="http://schemas.openxmlformats.org/drawingml/2006/main">
-              <a:ext uri="{FF2B5EF4-FFF2-40B4-BE49-F238E27FC236}">
-                <a16:creationId xmlns:a16="http://schemas.microsoft.com/office/drawing/2014/main" id="{6C4B1D09-965F-4278-BB96-05EDC6292D4E}"/>
-              </a:ext>
-            </a:extLst>
-          </p:cNvPr>
-          <p:cNvSpPr>
-            <a:spLocks xmlns:a="http://schemas.openxmlformats.org/drawingml/2006/main" noGrp="1"/>
-          </p:cNvSpPr>
-          <p:nvPr/>
-        </p:nvSpPr>
-        <p:spPr>
-          <a:xfrm xmlns:a="http://schemas.openxmlformats.org/drawingml/2006/main">
-            <a:off x="6199632" y="1783080"/>
-            <a:ext cx="5257800" cy="3611880"/>
-          </a:xfrm>
-          <a:prstGeom xmlns:a="http://schemas.openxmlformats.org/drawingml/2006/main" prst="roundRect">
-            <a:avLst>
-              <a:gd name="adj" fmla="val 4051"/>
-            </a:avLst>
-          </a:prstGeom>
-          <a:solidFill xmlns:a="http://schemas.openxmlformats.org/drawingml/2006/main">
-            <a:srgbClr val="FFFFFF"/>
-          </a:solidFill>
-          <a:ln xmlns:a="http://schemas.openxmlformats.org/drawingml/2006/main" w="12700">
-            <a:solidFill>
-              <a:srgbClr val="D3DEEA"/>
-            </a:solidFill>
-            <a:prstDash val="solid"/>
-          </a:ln>
-        </p:spPr>
-        <p:txBody xmlns:a="http://schemas.openxmlformats.org/drawingml/2006/main">
-          <a:bodyPr/>
-          <a:p/>
-        </p:txBody>
-      </p:sp>
-      <p:sp>
-        <p:nvSpPr>
-          <p:cNvPr id="13" name="Shape 10">
-            <a:extLst xmlns:a="http://schemas.openxmlformats.org/drawingml/2006/main">
-              <a:ext uri="{FF2B5EF4-FFF2-40B4-BE49-F238E27FC236}">
-                <a16:creationId xmlns:a16="http://schemas.microsoft.com/office/drawing/2014/main" id="{EA7D5A10-81B8-439B-8B6B-2F620F6990D3}"/>
-              </a:ext>
-            </a:extLst>
-          </p:cNvPr>
-          <p:cNvSpPr>
-            <a:spLocks xmlns:a="http://schemas.openxmlformats.org/drawingml/2006/main" noGrp="1"/>
-          </p:cNvSpPr>
-          <p:nvPr/>
-        </p:nvSpPr>
-        <p:spPr>
-          <a:xfrm xmlns:a="http://schemas.openxmlformats.org/drawingml/2006/main">
-            <a:off x="8499348" y="2011680"/>
-            <a:ext cx="658368" cy="658368"/>
-          </a:xfrm>
-          <a:prstGeom xmlns:a="http://schemas.openxmlformats.org/drawingml/2006/main" prst="ellipse">
-            <a:avLst/>
-          </a:prstGeom>
-          <a:solidFill xmlns:a="http://schemas.openxmlformats.org/drawingml/2006/main">
-            <a:srgbClr val="E2EDF9"/>
-          </a:solidFill>
-          <a:ln xmlns:a="http://schemas.openxmlformats.org/drawingml/2006/main" w="12700">
-            <a:solidFill>
-              <a:srgbClr val="E2EDF9"/>
-            </a:solidFill>
-            <a:prstDash val="solid"/>
-          </a:ln>
-        </p:spPr>
-        <p:txBody xmlns:a="http://schemas.openxmlformats.org/drawingml/2006/main">
-          <a:bodyPr/>
-          <a:p/>
-        </p:txBody>
-      </p:sp>
-      <p:pic>
-        <p:nvPicPr>
-          <p:cNvPr id="14" name="Image 1">
-            <a:extLst xmlns:a="http://schemas.openxmlformats.org/drawingml/2006/main">
-              <a:ext uri="{FF2B5EF4-FFF2-40B4-BE49-F238E27FC236}">
-                <a16:creationId xmlns:a16="http://schemas.microsoft.com/office/drawing/2014/main" id="{B7C32F33-4147-4F1C-A934-265AD1D558DE}"/>
-              </a:ext>
-            </a:extLst>
-          </p:cNvPr>
-          <p:cNvPicPr>
-            <a:picLocks xmlns:a="http://schemas.openxmlformats.org/drawingml/2006/main" noChangeAspect="1"/>
-          </p:cNvPicPr>
-          <p:nvPr/>
-        </p:nvPicPr>
-        <p:blipFill>
-          <a:blip xmlns:r="http://schemas.openxmlformats.org/officeDocument/2006/relationships" xmlns:a="http://schemas.openxmlformats.org/drawingml/2006/main" r:embed="R22f0a7f01c864a2c"/>
-          <a:stretch xmlns:a="http://schemas.openxmlformats.org/drawingml/2006/main">
-            <a:fillRect l="0" t="0" r="0" b="0"/>
-          </a:stretch>
-        </p:blipFill>
-        <p:spPr>
-          <a:xfrm xmlns:a="http://schemas.openxmlformats.org/drawingml/2006/main">
-            <a:off x="8645652" y="2157984"/>
-            <a:ext cx="365760" cy="365760"/>
-          </a:xfrm>
-          <a:prstGeom xmlns:a="http://schemas.openxmlformats.org/drawingml/2006/main" prst="rect">
-            <a:avLst/>
-          </a:prstGeom>
-        </p:spPr>
-      </p:pic>
-      <p:sp>
-        <p:nvSpPr>
-          <p:cNvPr id="15" name="Text 11">
-            <a:extLst xmlns:a="http://schemas.openxmlformats.org/drawingml/2006/main">
-              <a:ext uri="{FF2B5EF4-FFF2-40B4-BE49-F238E27FC236}">
-                <a16:creationId xmlns:a16="http://schemas.microsoft.com/office/drawing/2014/main" id="{0B6C6DAE-D43E-4E74-91FE-6BC25773F152}"/>
-              </a:ext>
-            </a:extLst>
-          </p:cNvPr>
-          <p:cNvSpPr>
-            <a:spLocks xmlns:a="http://schemas.openxmlformats.org/drawingml/2006/main" noGrp="1"/>
-          </p:cNvSpPr>
-          <p:nvPr/>
-        </p:nvSpPr>
-        <p:spPr>
-          <a:xfrm xmlns:a="http://schemas.openxmlformats.org/drawingml/2006/main">
-            <a:off x="6199632" y="2743200"/>
-            <a:ext cx="5257800" cy="411480"/>
-          </a:xfrm>
-          <a:prstGeom xmlns:a="http://schemas.openxmlformats.org/drawingml/2006/main" prst="rect">
-            <a:avLst/>
-          </a:prstGeom>
-          <a:noFill xmlns:a="http://schemas.openxmlformats.org/drawingml/2006/main"/>
-        </p:spPr>
-        <p:txBody>
-          <a:bodyPr xmlns:a="http://schemas.openxmlformats.org/drawingml/2006/main" wrap="square" lIns="0" tIns="0" rIns="0" bIns="0" anchor="ctr"/>
-          <a:lstStyle xmlns:a="http://schemas.openxmlformats.org/drawingml/2006/main"/>
-          <a:p xmlns:a="http://schemas.openxmlformats.org/drawingml/2006/main">
-            <a:pPr marL="0" indent="0" algn="ctr">
-              <a:buNone/>
-            </a:pPr>
-            <a:r>
-              <a:rPr sz="2000" b="1">
-                <a:solidFill>
-                  <a:srgbClr val="14243A"/>
-                </a:solidFill>
-                <a:latin typeface="Microsoft JhengHei"/>
-                <a:ea typeface="Microsoft JhengHei"/>
-                <a:cs typeface="Microsoft JhengHei"/>
-              </a:rPr>
-              <a:t>許家全</a:t>
-            </a:r>
-            <a:endParaRPr sz="2000"/>
-          </a:p>
-        </p:txBody>
-      </p:sp>
-      <p:sp>
-        <p:nvSpPr>
-          <p:cNvPr id="16" name="Text 12">
-            <a:extLst xmlns:a="http://schemas.openxmlformats.org/drawingml/2006/main">
-              <a:ext uri="{FF2B5EF4-FFF2-40B4-BE49-F238E27FC236}">
-                <a16:creationId xmlns:a16="http://schemas.microsoft.com/office/drawing/2014/main" id="{C9737799-19A1-4BE2-AB26-D915C2E62059}"/>
-              </a:ext>
-            </a:extLst>
-          </p:cNvPr>
-          <p:cNvSpPr>
-            <a:spLocks xmlns:a="http://schemas.openxmlformats.org/drawingml/2006/main" noGrp="1"/>
-          </p:cNvSpPr>
-          <p:nvPr/>
-        </p:nvSpPr>
-        <p:spPr>
-          <a:xfrm xmlns:a="http://schemas.openxmlformats.org/drawingml/2006/main">
-            <a:off x="6199632" y="3154680"/>
-            <a:ext cx="5257800" cy="292608"/>
-          </a:xfrm>
-          <a:prstGeom xmlns:a="http://schemas.openxmlformats.org/drawingml/2006/main" prst="rect">
-            <a:avLst/>
-          </a:prstGeom>
-          <a:noFill xmlns:a="http://schemas.openxmlformats.org/drawingml/2006/main"/>
-        </p:spPr>
-        <p:txBody>
-          <a:bodyPr xmlns:a="http://schemas.openxmlformats.org/drawingml/2006/main" wrap="square" lIns="0" tIns="0" rIns="0" bIns="0" anchor="ctr"/>
-          <a:lstStyle xmlns:a="http://schemas.openxmlformats.org/drawingml/2006/main"/>
-          <a:p xmlns:a="http://schemas.openxmlformats.org/drawingml/2006/main">
-            <a:pPr marL="0" indent="0" algn="ctr">
-              <a:buNone/>
-            </a:pPr>
-            <a:r>
-              <a:rPr sz="1200">
-                <a:solidFill>
-                  <a:srgbClr val="1F6FB8"/>
-                </a:solidFill>
-                <a:latin typeface="Microsoft JhengHei"/>
-                <a:ea typeface="Microsoft JhengHei"/>
-                <a:cs typeface="Microsoft JhengHei"/>
-              </a:rPr>
-              <a:t>組員 · 11246039</a:t>
-            </a:r>
-            <a:endParaRPr sz="1200"/>
-          </a:p>
-        </p:txBody>
-      </p:sp>
-      <p:sp>
-        <p:nvSpPr>
-          <p:cNvPr id="17" name="Text 13">
-            <a:extLst xmlns:a="http://schemas.openxmlformats.org/drawingml/2006/main">
-              <a:ext uri="{FF2B5EF4-FFF2-40B4-BE49-F238E27FC236}">
-                <a16:creationId xmlns:a16="http://schemas.microsoft.com/office/drawing/2014/main" id="{9C700552-A3FE-47BF-A790-D921C5B18B81}"/>
-              </a:ext>
-            </a:extLst>
-          </p:cNvPr>
-          <p:cNvSpPr>
-            <a:spLocks xmlns:a="http://schemas.openxmlformats.org/drawingml/2006/main" noGrp="1"/>
-          </p:cNvSpPr>
-          <p:nvPr/>
-        </p:nvSpPr>
-        <p:spPr>
-          <a:xfrm xmlns:a="http://schemas.openxmlformats.org/drawingml/2006/main">
-            <a:off x="6473952" y="3611880"/>
-            <a:ext cx="4709160" cy="1645920"/>
-          </a:xfrm>
-          <a:prstGeom xmlns:a="http://schemas.openxmlformats.org/drawingml/2006/main" prst="rect">
-            <a:avLst/>
-          </a:prstGeom>
-          <a:noFill xmlns:a="http://schemas.openxmlformats.org/drawingml/2006/main"/>
-        </p:spPr>
-        <p:txBody>
-          <a:bodyPr xmlns:a="http://schemas.openxmlformats.org/drawingml/2006/main" wrap="square" lIns="0" tIns="0" rIns="0" bIns="0" anchor="t"/>
-          <a:lstStyle xmlns:a="http://schemas.openxmlformats.org/drawingml/2006/main"/>
-          <a:p xmlns:a="http://schemas.openxmlformats.org/drawingml/2006/main">
-            <a:pPr marL="0" indent="0" algn="ctr">
-              <a:spcAft>
-                <a:spcPts val="600"/>
-              </a:spcAft>
-              <a:buNone/>
-            </a:pPr>
-            <a:r>
-              <a:rPr sz="1400">
-                <a:solidFill>
-                  <a:srgbClr val="3F546C"/>
-                </a:solidFill>
-                <a:latin typeface="Microsoft JhengHei"/>
-                <a:ea typeface="Microsoft JhengHei"/>
-                <a:cs typeface="Microsoft JhengHei"/>
-              </a:rPr>
-              <a:t>系統架構、資料庫、FastAPI</a:t>
-            </a:r>
-            <a:endParaRPr sz="1400"/>
-          </a:p>
-          <a:p xmlns:a="http://schemas.openxmlformats.org/drawingml/2006/main">
-            <a:pPr marL="0" indent="0" algn="ctr">
-              <a:spcAft>
-                <a:spcPts val="600"/>
-              </a:spcAft>
-              <a:buNone/>
-            </a:pPr>
-            <a:r>
-              <a:rPr sz="1400">
-                <a:solidFill>
-                  <a:srgbClr val="3F546C"/>
-                </a:solidFill>
-                <a:latin typeface="Microsoft JhengHei"/>
-                <a:ea typeface="Microsoft JhengHei"/>
-                <a:cs typeface="Microsoft JhengHei"/>
-              </a:rPr>
-              <a:t>四平台爬蟲與每日排程</a:t>
-            </a:r>
-            <a:endParaRPr sz="1400"/>
-          </a:p>
-          <a:p xmlns:a="http://schemas.openxmlformats.org/drawingml/2006/main">
-            <a:pPr marL="0" indent="0" algn="ctr">
-              <a:spcAft>
-                <a:spcPts val="600"/>
-              </a:spcAft>
-              <a:buNone/>
-            </a:pPr>
-            <a:r>
-              <a:rPr sz="1400">
-                <a:solidFill>
-                  <a:srgbClr val="3F546C"/>
-                </a:solidFill>
-                <a:latin typeface="Microsoft JhengHei"/>
-                <a:ea typeface="Microsoft JhengHei"/>
-                <a:cs typeface="Microsoft JhengHei"/>
-              </a:rPr>
-              <a:t>AI 問答、情緒評分、向量檢索</a:t>
-            </a:r>
-            <a:endParaRPr sz="1400"/>
-          </a:p>
-          <a:p xmlns:a="http://schemas.openxmlformats.org/drawingml/2006/main">
-            <a:pPr marL="0" indent="0" algn="ctr">
-              <a:spcAft>
-                <a:spcPts val="600"/>
-              </a:spcAft>
-              <a:buNone/>
-            </a:pPr>
-            <a:r>
-              <a:rPr sz="1400">
-                <a:solidFill>
-                  <a:srgbClr val="3F546C"/>
-                </a:solidFill>
-                <a:latin typeface="Microsoft JhengHei"/>
-                <a:ea typeface="Microsoft JhengHei"/>
-                <a:cs typeface="Microsoft JhengHei"/>
-              </a:rPr>
-              <a:t>前端介面、測試、手冊第 7–12 章</a:t>
-            </a:r>
-            <a:endParaRPr sz="1400"/>
-          </a:p>
-        </p:txBody>
-      </p:sp>
-      <p:sp>
-        <p:nvSpPr>
-          <p:cNvPr id="18" name="Shape 14">
-            <a:extLst xmlns:a="http://schemas.openxmlformats.org/drawingml/2006/main">
-              <a:ext uri="{FF2B5EF4-FFF2-40B4-BE49-F238E27FC236}">
-                <a16:creationId xmlns:a16="http://schemas.microsoft.com/office/drawing/2014/main" id="{FA07CAEA-8240-4DE0-AEC2-AA671D0B784A}"/>
-              </a:ext>
-            </a:extLst>
-          </p:cNvPr>
-          <p:cNvSpPr>
-            <a:spLocks xmlns:a="http://schemas.openxmlformats.org/drawingml/2006/main" noGrp="1"/>
-          </p:cNvSpPr>
-          <p:nvPr/>
-        </p:nvSpPr>
-        <p:spPr>
-          <a:xfrm xmlns:a="http://schemas.openxmlformats.org/drawingml/2006/main">
-            <a:off x="731520" y="5669280"/>
-            <a:ext cx="10725912" cy="457200"/>
-          </a:xfrm>
-          <a:prstGeom xmlns:a="http://schemas.openxmlformats.org/drawingml/2006/main" prst="roundRect">
-            <a:avLst>
-              <a:gd name="adj" fmla="val 24000"/>
-            </a:avLst>
-          </a:prstGeom>
-          <a:solidFill xmlns:a="http://schemas.openxmlformats.org/drawingml/2006/main">
-            <a:srgbClr val="E2EDF9"/>
-          </a:solidFill>
-          <a:ln xmlns:a="http://schemas.openxmlformats.org/drawingml/2006/main" w="12700">
-            <a:solidFill>
-              <a:srgbClr val="E2EDF9"/>
-            </a:solidFill>
-            <a:prstDash val="solid"/>
-          </a:ln>
-        </p:spPr>
-        <p:txBody xmlns:a="http://schemas.openxmlformats.org/drawingml/2006/main">
-          <a:bodyPr/>
-          <a:p/>
-        </p:txBody>
-      </p:sp>
-      <p:sp>
-        <p:nvSpPr>
-          <p:cNvPr id="19" name="Text 15">
-            <a:extLst xmlns:a="http://schemas.openxmlformats.org/drawingml/2006/main">
-              <a:ext uri="{FF2B5EF4-FFF2-40B4-BE49-F238E27FC236}">
-                <a16:creationId xmlns:a16="http://schemas.microsoft.com/office/drawing/2014/main" id="{C98A2BE1-896E-4C16-BFFC-0BF8E304B6E0}"/>
-              </a:ext>
-            </a:extLst>
-          </p:cNvPr>
-          <p:cNvSpPr>
-            <a:spLocks xmlns:a="http://schemas.openxmlformats.org/drawingml/2006/main" noGrp="1"/>
-          </p:cNvSpPr>
-          <p:nvPr/>
-        </p:nvSpPr>
-        <p:spPr>
-          <a:xfrm xmlns:a="http://schemas.openxmlformats.org/drawingml/2006/main">
-            <a:off x="731520" y="5669280"/>
-            <a:ext cx="10725912" cy="457200"/>
-          </a:xfrm>
-          <a:prstGeom xmlns:a="http://schemas.openxmlformats.org/drawingml/2006/main" prst="rect">
-            <a:avLst/>
-          </a:prstGeom>
-          <a:noFill xmlns:a="http://schemas.openxmlformats.org/drawingml/2006/main"/>
-        </p:spPr>
-        <p:txBody>
-          <a:bodyPr xmlns:a="http://schemas.openxmlformats.org/drawingml/2006/main" wrap="square" lIns="0" tIns="0" rIns="0" bIns="0" anchor="ctr"/>
-          <a:lstStyle xmlns:a="http://schemas.openxmlformats.org/drawingml/2006/main"/>
-          <a:p xmlns:a="http://schemas.openxmlformats.org/drawingml/2006/main">
-            <a:pPr marL="0" indent="0" algn="ctr">
-              <a:buNone/>
-            </a:pPr>
-            <a:r>
-              <a:rPr sz="1400" b="1">
-                <a:solidFill>
-                  <a:srgbClr val="1F6FB8"/>
-                </a:solidFill>
-                <a:latin typeface="Microsoft JhengHei"/>
-                <a:ea typeface="Microsoft JhengHei"/>
-                <a:cs typeface="Microsoft JhengHei"/>
-              </a:rPr>
-              <a:t>程式提交與文件、企劃工作分開佐證；不以單一帳號的提交次數推算貢獻比例。</a:t>
-            </a:r>
-            <a:endParaRPr sz="1400"/>
-          </a:p>
-        </p:txBody>
-      </p:sp>
-      <p:sp>
-        <p:nvSpPr>
-          <p:cNvPr id="21" name="18">
-            <a:extLst xmlns:a="http://schemas.openxmlformats.org/drawingml/2006/main">
-              <a:ext uri="{FF2B5EF4-FFF2-40B4-BE49-F238E27FC236}">
-                <a16:creationId xmlns:a16="http://schemas.microsoft.com/office/drawing/2014/main" id="{5915EECD-9CB3-4C20-BD63-1E2E07769E6C}"/>
-              </a:ext>
-            </a:extLst>
-          </p:cNvPr>
-          <p:cNvSpPr>
-            <a:spLocks xmlns:a="http://schemas.openxmlformats.org/drawingml/2006/main" noGrp="1"/>
-          </p:cNvSpPr>
-          <p:nvPr/>
-        </p:nvSpPr>
-        <p:spPr>
-          <a:xfrm xmlns:a="http://schemas.openxmlformats.org/drawingml/2006/main">
-            <a:off x="733425" y="6391275"/>
-            <a:ext cx="762000" cy="257175"/>
-          </a:xfrm>
-          <a:prstGeom xmlns:a="http://schemas.openxmlformats.org/drawingml/2006/main" prst="rect">
-            <a:avLst/>
-          </a:prstGeom>
-          <a:noFill xmlns:a="http://schemas.openxmlformats.org/drawingml/2006/main"/>
-          <a:ln xmlns:a="http://schemas.openxmlformats.org/drawingml/2006/main" w="0">
-            <a:noFill/>
-          </a:ln>
-        </p:spPr>
-        <p:txBody>
-          <a:bodyPr xmlns:a="http://schemas.openxmlformats.org/drawingml/2006/main" lIns="0" tIns="0" rIns="0" bIns="0"/>
-          <a:lstStyle xmlns:a="http://schemas.openxmlformats.org/drawingml/2006/main">
-            <a:defPPr>
-              <a:defRPr sz="1275" b="0">
-                <a:solidFill>
-                  <a:srgbClr val="465E78"/>
-                </a:solidFill>
-              </a:defRPr>
-            </a:defPPr>
-          </a:lstStyle>
-          <a:p xmlns:a="http://schemas.openxmlformats.org/drawingml/2006/main">
-            <a:pPr>
-              <a:buNone/>
-              <a:defRPr sz="1275" b="0">
-                <a:solidFill>
-                  <a:srgbClr val="465E78"/>
-                </a:solidFill>
-              </a:defRPr>
-            </a:pPr>
-            <a:r>
-              <a:rPr sz="1275" b="0">
-                <a:solidFill>
-                  <a:srgbClr val="465E78"/>
-                </a:solidFill>
-              </a:rPr>
-              <a:t>17</a:t>
-            </a:r>
-          </a:p>
-        </p:txBody>
-      </p:sp>
-    </p:spTree>
-    <p:extLst>
-      <p:ext uri="{BB962C8B-B14F-4D97-AF65-F5344CB8AC3E}">
-        <p14:creationId xmlns:p14="http://schemas.microsoft.com/office/powerpoint/2010/main" val="266194338"/>
-      </p:ext>
-    </p:extLst>
-  </p:cSld>
-</p:sld>
-</file>
-
-<file path=ppt/slides/slide19.xml><?xml version="1.0" encoding="utf-8"?>
-<p:sld xmlns:p="http://schemas.openxmlformats.org/presentationml/2006/main">
-  <p:cSld>
-    <p:bg>
-      <p:bgPr>
-        <a:solidFill xmlns:a="http://schemas.openxmlformats.org/drawingml/2006/main">
-          <a:srgbClr val="F5F8FC"/>
-        </a:solidFill>
-      </p:bgPr>
-    </p:bg>
-    <p:spTree>
-      <p:nvGrpSpPr>
-        <p:cNvPr id="1" name=""/>
-        <p:cNvGrpSpPr/>
-        <p:nvPr/>
-      </p:nvGrpSpPr>
-      <p:grpSpPr>
-        <a:xfrm xmlns:a="http://schemas.openxmlformats.org/drawingml/2006/main"/>
-      </p:grpSpPr>
-      <p:sp>
-        <p:nvSpPr>
-          <p:cNvPr id="4" name="Text 2">
-            <a:extLst xmlns:a="http://schemas.openxmlformats.org/drawingml/2006/main">
-              <a:ext uri="{FF2B5EF4-FFF2-40B4-BE49-F238E27FC236}">
                 <a16:creationId xmlns:a16="http://schemas.microsoft.com/office/drawing/2014/main" id="{38207CD5-442C-4087-92D6-711674D5B6E8}"/>
               </a:ext>
             </a:extLst>
@@ -14263,1341 +14263,7 @@
 </p:sld>
 </file>
 
-<file path=ppt/slides/slide2.xml><?xml version="1.0" encoding="utf-8"?>
-<p:sld xmlns:p="http://schemas.openxmlformats.org/presentationml/2006/main">
-  <p:cSld>
-    <p:bg>
-      <p:bgPr>
-        <a:solidFill xmlns:a="http://schemas.openxmlformats.org/drawingml/2006/main">
-          <a:srgbClr val="F5F8FC"/>
-        </a:solidFill>
-      </p:bgPr>
-    </p:bg>
-    <p:spTree>
-      <p:nvGrpSpPr>
-        <p:cNvPr id="1" name=""/>
-        <p:cNvGrpSpPr/>
-        <p:nvPr/>
-      </p:nvGrpSpPr>
-      <p:grpSpPr>
-        <a:xfrm xmlns:a="http://schemas.openxmlformats.org/drawingml/2006/main"/>
-      </p:grpSpPr>
-      <p:sp>
-        <p:nvSpPr>
-          <p:cNvPr id="4" name="Text 2">
-            <a:extLst xmlns:a="http://schemas.openxmlformats.org/drawingml/2006/main">
-              <a:ext uri="{FF2B5EF4-FFF2-40B4-BE49-F238E27FC236}">
-                <a16:creationId xmlns:a16="http://schemas.microsoft.com/office/drawing/2014/main" id="{F568291D-8866-4EFD-B6A9-739524AFD19D}"/>
-              </a:ext>
-            </a:extLst>
-          </p:cNvPr>
-          <p:cNvSpPr>
-            <a:spLocks xmlns:a="http://schemas.openxmlformats.org/drawingml/2006/main" noGrp="1"/>
-          </p:cNvSpPr>
-          <p:nvPr/>
-        </p:nvSpPr>
-        <p:spPr>
-          <a:xfrm xmlns:a="http://schemas.openxmlformats.org/drawingml/2006/main">
-            <a:off x="731520" y="777240"/>
-            <a:ext cx="10725912" cy="685800"/>
-          </a:xfrm>
-          <a:prstGeom xmlns:a="http://schemas.openxmlformats.org/drawingml/2006/main" prst="rect">
-            <a:avLst/>
-          </a:prstGeom>
-          <a:noFill xmlns:a="http://schemas.openxmlformats.org/drawingml/2006/main"/>
-        </p:spPr>
-        <p:txBody>
-          <a:bodyPr xmlns:a="http://schemas.openxmlformats.org/drawingml/2006/main" wrap="square" lIns="0" tIns="0" rIns="0" bIns="0" anchor="ctr"/>
-          <a:lstStyle xmlns:a="http://schemas.openxmlformats.org/drawingml/2006/main"/>
-          <a:p xmlns:a="http://schemas.openxmlformats.org/drawingml/2006/main">
-            <a:pPr marL="0" indent="0">
-              <a:buNone/>
-            </a:pPr>
-            <a:r>
-              <a:rPr sz="3000" b="1">
-                <a:solidFill>
-                  <a:srgbClr val="14243A"/>
-                </a:solidFill>
-                <a:latin typeface="Microsoft JhengHei"/>
-                <a:ea typeface="Microsoft JhengHei"/>
-                <a:cs typeface="Microsoft JhengHei"/>
-              </a:rPr>
-              <a:t>報告流程</a:t>
-            </a:r>
-            <a:endParaRPr sz="3000"/>
-          </a:p>
-        </p:txBody>
-      </p:sp>
-      <p:sp>
-        <p:nvSpPr>
-          <p:cNvPr id="6" name="Shape 4">
-            <a:extLst xmlns:a="http://schemas.openxmlformats.org/drawingml/2006/main">
-              <a:ext uri="{FF2B5EF4-FFF2-40B4-BE49-F238E27FC236}">
-                <a16:creationId xmlns:a16="http://schemas.microsoft.com/office/drawing/2014/main" id="{C6F7EDEF-87BE-487F-829E-8D05DE6BAB7A}"/>
-              </a:ext>
-            </a:extLst>
-          </p:cNvPr>
-          <p:cNvSpPr>
-            <a:spLocks xmlns:a="http://schemas.openxmlformats.org/drawingml/2006/main" noGrp="1"/>
-          </p:cNvSpPr>
-          <p:nvPr/>
-        </p:nvSpPr>
-        <p:spPr>
-          <a:xfrm xmlns:a="http://schemas.openxmlformats.org/drawingml/2006/main">
-            <a:off x="731520" y="1783080"/>
-            <a:ext cx="2523744" cy="3611880"/>
-          </a:xfrm>
-          <a:prstGeom xmlns:a="http://schemas.openxmlformats.org/drawingml/2006/main" prst="roundRect">
-            <a:avLst>
-              <a:gd name="adj" fmla="val 5797"/>
-            </a:avLst>
-          </a:prstGeom>
-          <a:solidFill xmlns:a="http://schemas.openxmlformats.org/drawingml/2006/main">
-            <a:srgbClr val="FFFFFF"/>
-          </a:solidFill>
-          <a:ln xmlns:a="http://schemas.openxmlformats.org/drawingml/2006/main" w="19050">
-            <a:solidFill>
-              <a:srgbClr val="D46A12"/>
-            </a:solidFill>
-            <a:prstDash val="solid"/>
-          </a:ln>
-        </p:spPr>
-        <p:txBody xmlns:a="http://schemas.openxmlformats.org/drawingml/2006/main">
-          <a:bodyPr/>
-          <a:p/>
-        </p:txBody>
-      </p:sp>
-      <p:sp>
-        <p:nvSpPr>
-          <p:cNvPr id="7" name="Text 5">
-            <a:extLst xmlns:a="http://schemas.openxmlformats.org/drawingml/2006/main">
-              <a:ext uri="{FF2B5EF4-FFF2-40B4-BE49-F238E27FC236}">
-                <a16:creationId xmlns:a16="http://schemas.microsoft.com/office/drawing/2014/main" id="{35FE2235-C488-46FA-9968-A8E4453038C8}"/>
-              </a:ext>
-            </a:extLst>
-          </p:cNvPr>
-          <p:cNvSpPr>
-            <a:spLocks xmlns:a="http://schemas.openxmlformats.org/drawingml/2006/main" noGrp="1"/>
-          </p:cNvSpPr>
-          <p:nvPr/>
-        </p:nvSpPr>
-        <p:spPr>
-          <a:xfrm xmlns:a="http://schemas.openxmlformats.org/drawingml/2006/main">
-            <a:off x="731520" y="2057400"/>
-            <a:ext cx="2523744" cy="731520"/>
-          </a:xfrm>
-          <a:prstGeom xmlns:a="http://schemas.openxmlformats.org/drawingml/2006/main" prst="rect">
-            <a:avLst/>
-          </a:prstGeom>
-          <a:noFill xmlns:a="http://schemas.openxmlformats.org/drawingml/2006/main"/>
-        </p:spPr>
-        <p:txBody>
-          <a:bodyPr xmlns:a="http://schemas.openxmlformats.org/drawingml/2006/main" wrap="square" lIns="0" tIns="0" rIns="0" bIns="0" anchor="ctr"/>
-          <a:lstStyle xmlns:a="http://schemas.openxmlformats.org/drawingml/2006/main"/>
-          <a:p xmlns:a="http://schemas.openxmlformats.org/drawingml/2006/main">
-            <a:pPr marL="0" indent="0" algn="ctr">
-              <a:buNone/>
-            </a:pPr>
-            <a:r>
-              <a:rPr sz="4000" b="1">
-                <a:solidFill>
-                  <a:srgbClr val="D46A12"/>
-                </a:solidFill>
-                <a:latin typeface="Microsoft JhengHei"/>
-                <a:ea typeface="Microsoft JhengHei"/>
-                <a:cs typeface="Microsoft JhengHei"/>
-              </a:rPr>
-              <a:t>01</a:t>
-            </a:r>
-            <a:endParaRPr sz="4000"/>
-          </a:p>
-        </p:txBody>
-      </p:sp>
-      <p:sp>
-        <p:nvSpPr>
-          <p:cNvPr id="8" name="Text 6">
-            <a:extLst xmlns:a="http://schemas.openxmlformats.org/drawingml/2006/main">
-              <a:ext uri="{FF2B5EF4-FFF2-40B4-BE49-F238E27FC236}">
-                <a16:creationId xmlns:a16="http://schemas.microsoft.com/office/drawing/2014/main" id="{49AAF241-ABE9-471E-B64D-4E82AA9DE8C9}"/>
-              </a:ext>
-            </a:extLst>
-          </p:cNvPr>
-          <p:cNvSpPr>
-            <a:spLocks xmlns:a="http://schemas.openxmlformats.org/drawingml/2006/main" noGrp="1"/>
-          </p:cNvSpPr>
-          <p:nvPr/>
-        </p:nvSpPr>
-        <p:spPr>
-          <a:xfrm xmlns:a="http://schemas.openxmlformats.org/drawingml/2006/main">
-            <a:off x="822960" y="2926080"/>
-            <a:ext cx="2340864" cy="411480"/>
-          </a:xfrm>
-          <a:prstGeom xmlns:a="http://schemas.openxmlformats.org/drawingml/2006/main" prst="rect">
-            <a:avLst/>
-          </a:prstGeom>
-          <a:noFill xmlns:a="http://schemas.openxmlformats.org/drawingml/2006/main"/>
-        </p:spPr>
-        <p:txBody>
-          <a:bodyPr xmlns:a="http://schemas.openxmlformats.org/drawingml/2006/main" wrap="square" lIns="0" tIns="0" rIns="0" bIns="0" anchor="ctr"/>
-          <a:lstStyle xmlns:a="http://schemas.openxmlformats.org/drawingml/2006/main"/>
-          <a:p xmlns:a="http://schemas.openxmlformats.org/drawingml/2006/main">
-            <a:pPr marL="0" indent="0" algn="ctr">
-              <a:buNone/>
-            </a:pPr>
-            <a:r>
-              <a:rPr sz="1800" b="1">
-                <a:solidFill>
-                  <a:srgbClr val="14243A"/>
-                </a:solidFill>
-                <a:latin typeface="Microsoft JhengHei"/>
-                <a:ea typeface="Microsoft JhengHei"/>
-                <a:cs typeface="Microsoft JhengHei"/>
-              </a:rPr>
-              <a:t>為什麼做、做給誰</a:t>
-            </a:r>
-            <a:endParaRPr sz="1800"/>
-          </a:p>
-        </p:txBody>
-      </p:sp>
-      <p:sp>
-        <p:nvSpPr>
-          <p:cNvPr id="9" name="Text 7">
-            <a:extLst xmlns:a="http://schemas.openxmlformats.org/drawingml/2006/main">
-              <a:ext uri="{FF2B5EF4-FFF2-40B4-BE49-F238E27FC236}">
-                <a16:creationId xmlns:a16="http://schemas.microsoft.com/office/drawing/2014/main" id="{DB9E3FFD-D454-4CBD-A4E6-B7F0FC4452AA}"/>
-              </a:ext>
-            </a:extLst>
-          </p:cNvPr>
-          <p:cNvSpPr>
-            <a:spLocks xmlns:a="http://schemas.openxmlformats.org/drawingml/2006/main" noGrp="1"/>
-          </p:cNvSpPr>
-          <p:nvPr/>
-        </p:nvSpPr>
-        <p:spPr>
-          <a:xfrm xmlns:a="http://schemas.openxmlformats.org/drawingml/2006/main">
-            <a:off x="868680" y="3474720"/>
-            <a:ext cx="2249424" cy="822960"/>
-          </a:xfrm>
-          <a:prstGeom xmlns:a="http://schemas.openxmlformats.org/drawingml/2006/main" prst="rect">
-            <a:avLst/>
-          </a:prstGeom>
-          <a:noFill xmlns:a="http://schemas.openxmlformats.org/drawingml/2006/main"/>
-        </p:spPr>
-        <p:txBody>
-          <a:bodyPr xmlns:a="http://schemas.openxmlformats.org/drawingml/2006/main" wrap="square" lIns="0" tIns="0" rIns="0" bIns="0" anchor="t"/>
-          <a:lstStyle xmlns:a="http://schemas.openxmlformats.org/drawingml/2006/main"/>
-          <a:p xmlns:a="http://schemas.openxmlformats.org/drawingml/2006/main">
-            <a:pPr marL="0" indent="0" algn="ctr">
-              <a:buNone/>
-            </a:pPr>
-            <a:r>
-              <a:rPr sz="1400">
-                <a:solidFill>
-                  <a:srgbClr val="3F546C"/>
-                </a:solidFill>
-                <a:latin typeface="Microsoft JhengHei"/>
-                <a:ea typeface="Microsoft JhengHei"/>
-                <a:cs typeface="Microsoft JhengHei"/>
-              </a:rPr>
-              <a:t>問題、使用者</a:t>
-            </a:r>
-            <a:endParaRPr sz="1400"/>
-          </a:p>
-          <a:p xmlns:a="http://schemas.openxmlformats.org/drawingml/2006/main">
-            <a:pPr marL="0" indent="0" algn="ctr">
-              <a:buNone/>
-            </a:pPr>
-            <a:r>
-              <a:rPr sz="1400">
-                <a:solidFill>
-                  <a:srgbClr val="3F546C"/>
-                </a:solidFill>
-                <a:latin typeface="Microsoft JhengHei"/>
-                <a:ea typeface="Microsoft JhengHei"/>
-                <a:cs typeface="Microsoft JhengHei"/>
-              </a:rPr>
-              <a:t>商業模式、成本、TOWS</a:t>
-            </a:r>
-            <a:endParaRPr sz="1400"/>
-          </a:p>
-        </p:txBody>
-      </p:sp>
-      <p:sp>
-        <p:nvSpPr>
-          <p:cNvPr id="10" name="Shape 8">
-            <a:extLst xmlns:a="http://schemas.openxmlformats.org/drawingml/2006/main">
-              <a:ext uri="{FF2B5EF4-FFF2-40B4-BE49-F238E27FC236}">
-                <a16:creationId xmlns:a16="http://schemas.microsoft.com/office/drawing/2014/main" id="{5AEE99FC-695A-471B-88E0-425C727D2B41}"/>
-              </a:ext>
-            </a:extLst>
-          </p:cNvPr>
-          <p:cNvSpPr>
-            <a:spLocks xmlns:a="http://schemas.openxmlformats.org/drawingml/2006/main" noGrp="1"/>
-          </p:cNvSpPr>
-          <p:nvPr/>
-        </p:nvSpPr>
-        <p:spPr>
-          <a:xfrm xmlns:a="http://schemas.openxmlformats.org/drawingml/2006/main">
-            <a:off x="1170432" y="4480560"/>
-            <a:ext cx="1645920" cy="365760"/>
-          </a:xfrm>
-          <a:prstGeom xmlns:a="http://schemas.openxmlformats.org/drawingml/2006/main" prst="roundRect">
-            <a:avLst>
-              <a:gd name="adj" fmla="val 50000"/>
-            </a:avLst>
-          </a:prstGeom>
-          <a:solidFill xmlns:a="http://schemas.openxmlformats.org/drawingml/2006/main">
-            <a:srgbClr val="E2EDF9"/>
-          </a:solidFill>
-          <a:ln xmlns:a="http://schemas.openxmlformats.org/drawingml/2006/main" w="12700">
-            <a:solidFill>
-              <a:srgbClr val="E2EDF9"/>
-            </a:solidFill>
-            <a:prstDash val="solid"/>
-          </a:ln>
-        </p:spPr>
-        <p:txBody xmlns:a="http://schemas.openxmlformats.org/drawingml/2006/main">
-          <a:bodyPr/>
-          <a:p/>
-        </p:txBody>
-      </p:sp>
-      <p:sp>
-        <p:nvSpPr>
-          <p:cNvPr id="11" name="Text 9">
-            <a:extLst xmlns:a="http://schemas.openxmlformats.org/drawingml/2006/main">
-              <a:ext uri="{FF2B5EF4-FFF2-40B4-BE49-F238E27FC236}">
-                <a16:creationId xmlns:a16="http://schemas.microsoft.com/office/drawing/2014/main" id="{4BAF6D2E-C916-43B4-B39E-A07B8BADE41E}"/>
-              </a:ext>
-            </a:extLst>
-          </p:cNvPr>
-          <p:cNvSpPr>
-            <a:spLocks xmlns:a="http://schemas.openxmlformats.org/drawingml/2006/main" noGrp="1"/>
-          </p:cNvSpPr>
-          <p:nvPr/>
-        </p:nvSpPr>
-        <p:spPr>
-          <a:xfrm xmlns:a="http://schemas.openxmlformats.org/drawingml/2006/main">
-            <a:off x="1170432" y="4480560"/>
-            <a:ext cx="1645920" cy="365760"/>
-          </a:xfrm>
-          <a:prstGeom xmlns:a="http://schemas.openxmlformats.org/drawingml/2006/main" prst="rect">
-            <a:avLst/>
-          </a:prstGeom>
-          <a:noFill xmlns:a="http://schemas.openxmlformats.org/drawingml/2006/main"/>
-        </p:spPr>
-        <p:txBody>
-          <a:bodyPr xmlns:a="http://schemas.openxmlformats.org/drawingml/2006/main" wrap="square" lIns="0" tIns="0" rIns="0" bIns="0" anchor="ctr"/>
-          <a:lstStyle xmlns:a="http://schemas.openxmlformats.org/drawingml/2006/main"/>
-          <a:p xmlns:a="http://schemas.openxmlformats.org/drawingml/2006/main">
-            <a:pPr marL="0" indent="0" algn="ctr">
-              <a:buNone/>
-            </a:pPr>
-            <a:r>
-              <a:rPr sz="1200" b="1">
-                <a:solidFill>
-                  <a:srgbClr val="1F6FB8"/>
-                </a:solidFill>
-                <a:latin typeface="Microsoft JhengHei"/>
-                <a:ea typeface="Microsoft JhengHei"/>
-                <a:cs typeface="Microsoft JhengHei"/>
-              </a:rPr>
-              <a:t>陳威帆</a:t>
-            </a:r>
-            <a:endParaRPr sz="1200"/>
-          </a:p>
-        </p:txBody>
-      </p:sp>
-      <p:sp>
-        <p:nvSpPr>
-          <p:cNvPr id="13" name="Shape 11">
-            <a:extLst xmlns:a="http://schemas.openxmlformats.org/drawingml/2006/main">
-              <a:ext uri="{FF2B5EF4-FFF2-40B4-BE49-F238E27FC236}">
-                <a16:creationId xmlns:a16="http://schemas.microsoft.com/office/drawing/2014/main" id="{C31F49D7-9215-4C44-8DC6-DB022DCC5B10}"/>
-              </a:ext>
-            </a:extLst>
-          </p:cNvPr>
-          <p:cNvSpPr>
-            <a:spLocks xmlns:a="http://schemas.openxmlformats.org/drawingml/2006/main" noGrp="1"/>
-          </p:cNvSpPr>
-          <p:nvPr/>
-        </p:nvSpPr>
-        <p:spPr>
-          <a:xfrm xmlns:a="http://schemas.openxmlformats.org/drawingml/2006/main">
-            <a:off x="3465576" y="1783080"/>
-            <a:ext cx="2523744" cy="3611880"/>
-          </a:xfrm>
-          <a:prstGeom xmlns:a="http://schemas.openxmlformats.org/drawingml/2006/main" prst="roundRect">
-            <a:avLst>
-              <a:gd name="adj" fmla="val 5797"/>
-            </a:avLst>
-          </a:prstGeom>
-          <a:solidFill xmlns:a="http://schemas.openxmlformats.org/drawingml/2006/main">
-            <a:srgbClr val="FFFFFF"/>
-          </a:solidFill>
-          <a:ln xmlns:a="http://schemas.openxmlformats.org/drawingml/2006/main" w="12700">
-            <a:solidFill>
-              <a:srgbClr val="D3DEEA"/>
-            </a:solidFill>
-            <a:prstDash val="solid"/>
-          </a:ln>
-        </p:spPr>
-        <p:txBody xmlns:a="http://schemas.openxmlformats.org/drawingml/2006/main">
-          <a:bodyPr/>
-          <a:p/>
-        </p:txBody>
-      </p:sp>
-      <p:sp>
-        <p:nvSpPr>
-          <p:cNvPr id="14" name="Text 12">
-            <a:extLst xmlns:a="http://schemas.openxmlformats.org/drawingml/2006/main">
-              <a:ext uri="{FF2B5EF4-FFF2-40B4-BE49-F238E27FC236}">
-                <a16:creationId xmlns:a16="http://schemas.microsoft.com/office/drawing/2014/main" id="{C10337B4-99B6-4A74-A890-D45BDC6DB5F0}"/>
-              </a:ext>
-            </a:extLst>
-          </p:cNvPr>
-          <p:cNvSpPr>
-            <a:spLocks xmlns:a="http://schemas.openxmlformats.org/drawingml/2006/main" noGrp="1"/>
-          </p:cNvSpPr>
-          <p:nvPr/>
-        </p:nvSpPr>
-        <p:spPr>
-          <a:xfrm xmlns:a="http://schemas.openxmlformats.org/drawingml/2006/main">
-            <a:off x="3465576" y="2057400"/>
-            <a:ext cx="2523744" cy="731520"/>
-          </a:xfrm>
-          <a:prstGeom xmlns:a="http://schemas.openxmlformats.org/drawingml/2006/main" prst="rect">
-            <a:avLst/>
-          </a:prstGeom>
-          <a:noFill xmlns:a="http://schemas.openxmlformats.org/drawingml/2006/main"/>
-        </p:spPr>
-        <p:txBody>
-          <a:bodyPr xmlns:a="http://schemas.openxmlformats.org/drawingml/2006/main" wrap="square" lIns="0" tIns="0" rIns="0" bIns="0" anchor="ctr"/>
-          <a:lstStyle xmlns:a="http://schemas.openxmlformats.org/drawingml/2006/main"/>
-          <a:p xmlns:a="http://schemas.openxmlformats.org/drawingml/2006/main">
-            <a:pPr marL="0" indent="0" algn="ctr">
-              <a:buNone/>
-            </a:pPr>
-            <a:r>
-              <a:rPr sz="4000" b="1">
-                <a:solidFill>
-                  <a:srgbClr val="D46A12"/>
-                </a:solidFill>
-                <a:latin typeface="Microsoft JhengHei"/>
-                <a:ea typeface="Microsoft JhengHei"/>
-                <a:cs typeface="Microsoft JhengHei"/>
-              </a:rPr>
-              <a:t>02</a:t>
-            </a:r>
-            <a:endParaRPr sz="4000"/>
-          </a:p>
-        </p:txBody>
-      </p:sp>
-      <p:sp>
-        <p:nvSpPr>
-          <p:cNvPr id="15" name="Text 13">
-            <a:extLst xmlns:a="http://schemas.openxmlformats.org/drawingml/2006/main">
-              <a:ext uri="{FF2B5EF4-FFF2-40B4-BE49-F238E27FC236}">
-                <a16:creationId xmlns:a16="http://schemas.microsoft.com/office/drawing/2014/main" id="{AF997F99-60F5-4019-AC65-98BC0805A7C1}"/>
-              </a:ext>
-            </a:extLst>
-          </p:cNvPr>
-          <p:cNvSpPr>
-            <a:spLocks xmlns:a="http://schemas.openxmlformats.org/drawingml/2006/main" noGrp="1"/>
-          </p:cNvSpPr>
-          <p:nvPr/>
-        </p:nvSpPr>
-        <p:spPr>
-          <a:xfrm xmlns:a="http://schemas.openxmlformats.org/drawingml/2006/main">
-            <a:off x="3557016" y="2926080"/>
-            <a:ext cx="2340864" cy="411480"/>
-          </a:xfrm>
-          <a:prstGeom xmlns:a="http://schemas.openxmlformats.org/drawingml/2006/main" prst="rect">
-            <a:avLst/>
-          </a:prstGeom>
-          <a:noFill xmlns:a="http://schemas.openxmlformats.org/drawingml/2006/main"/>
-        </p:spPr>
-        <p:txBody>
-          <a:bodyPr xmlns:a="http://schemas.openxmlformats.org/drawingml/2006/main" wrap="square" lIns="0" tIns="0" rIns="0" bIns="0" anchor="ctr"/>
-          <a:lstStyle xmlns:a="http://schemas.openxmlformats.org/drawingml/2006/main"/>
-          <a:p xmlns:a="http://schemas.openxmlformats.org/drawingml/2006/main">
-            <a:pPr marL="0" indent="0" algn="ctr">
-              <a:buNone/>
-            </a:pPr>
-            <a:r>
-              <a:rPr sz="1800" b="1">
-                <a:solidFill>
-                  <a:srgbClr val="14243A"/>
-                </a:solidFill>
-                <a:latin typeface="Microsoft JhengHei"/>
-                <a:ea typeface="Microsoft JhengHei"/>
-                <a:cs typeface="Microsoft JhengHei"/>
-              </a:rPr>
-              <a:t>怎麼做</a:t>
-            </a:r>
-            <a:endParaRPr sz="1800"/>
-          </a:p>
-        </p:txBody>
-      </p:sp>
-      <p:sp>
-        <p:nvSpPr>
-          <p:cNvPr id="16" name="Text 14">
-            <a:extLst xmlns:a="http://schemas.openxmlformats.org/drawingml/2006/main">
-              <a:ext uri="{FF2B5EF4-FFF2-40B4-BE49-F238E27FC236}">
-                <a16:creationId xmlns:a16="http://schemas.microsoft.com/office/drawing/2014/main" id="{47AC978F-E8EB-4E0A-9110-3579F60DE5F6}"/>
-              </a:ext>
-            </a:extLst>
-          </p:cNvPr>
-          <p:cNvSpPr>
-            <a:spLocks xmlns:a="http://schemas.openxmlformats.org/drawingml/2006/main" noGrp="1"/>
-          </p:cNvSpPr>
-          <p:nvPr/>
-        </p:nvSpPr>
-        <p:spPr>
-          <a:xfrm xmlns:a="http://schemas.openxmlformats.org/drawingml/2006/main">
-            <a:off x="3602736" y="3474720"/>
-            <a:ext cx="2249424" cy="822960"/>
-          </a:xfrm>
-          <a:prstGeom xmlns:a="http://schemas.openxmlformats.org/drawingml/2006/main" prst="rect">
-            <a:avLst/>
-          </a:prstGeom>
-          <a:noFill xmlns:a="http://schemas.openxmlformats.org/drawingml/2006/main"/>
-        </p:spPr>
-        <p:txBody>
-          <a:bodyPr xmlns:a="http://schemas.openxmlformats.org/drawingml/2006/main" wrap="square" lIns="0" tIns="0" rIns="0" bIns="0" anchor="t"/>
-          <a:lstStyle xmlns:a="http://schemas.openxmlformats.org/drawingml/2006/main"/>
-          <a:p xmlns:a="http://schemas.openxmlformats.org/drawingml/2006/main">
-            <a:pPr marL="0" indent="0" algn="ctr">
-              <a:buNone/>
-            </a:pPr>
-            <a:r>
-              <a:rPr sz="1400">
-                <a:solidFill>
-                  <a:srgbClr val="3F546C"/>
-                </a:solidFill>
-                <a:latin typeface="Microsoft JhengHei"/>
-                <a:ea typeface="Microsoft JhengHei"/>
-                <a:cs typeface="Microsoft JhengHei"/>
-              </a:rPr>
-              <a:t>架構、資料收錄</a:t>
-            </a:r>
-            <a:endParaRPr sz="1400"/>
-          </a:p>
-          <a:p xmlns:a="http://schemas.openxmlformats.org/drawingml/2006/main">
-            <a:pPr marL="0" indent="0" algn="ctr">
-              <a:buNone/>
-            </a:pPr>
-            <a:r>
-              <a:rPr sz="1400">
-                <a:solidFill>
-                  <a:srgbClr val="3F546C"/>
-                </a:solidFill>
-                <a:latin typeface="Microsoft JhengHei"/>
-                <a:ea typeface="Microsoft JhengHei"/>
-                <a:cs typeface="Microsoft JhengHei"/>
-              </a:rPr>
-              <a:t>情緒分數一致性</a:t>
-            </a:r>
-            <a:endParaRPr sz="1400"/>
-          </a:p>
-        </p:txBody>
-      </p:sp>
-      <p:sp>
-        <p:nvSpPr>
-          <p:cNvPr id="17" name="Shape 15">
-            <a:extLst xmlns:a="http://schemas.openxmlformats.org/drawingml/2006/main">
-              <a:ext uri="{FF2B5EF4-FFF2-40B4-BE49-F238E27FC236}">
-                <a16:creationId xmlns:a16="http://schemas.microsoft.com/office/drawing/2014/main" id="{D4D8CDB8-C444-4743-ACC4-342DD2E3BE62}"/>
-              </a:ext>
-            </a:extLst>
-          </p:cNvPr>
-          <p:cNvSpPr>
-            <a:spLocks xmlns:a="http://schemas.openxmlformats.org/drawingml/2006/main" noGrp="1"/>
-          </p:cNvSpPr>
-          <p:nvPr/>
-        </p:nvSpPr>
-        <p:spPr>
-          <a:xfrm xmlns:a="http://schemas.openxmlformats.org/drawingml/2006/main">
-            <a:off x="3904488" y="4480560"/>
-            <a:ext cx="1645920" cy="365760"/>
-          </a:xfrm>
-          <a:prstGeom xmlns:a="http://schemas.openxmlformats.org/drawingml/2006/main" prst="roundRect">
-            <a:avLst>
-              <a:gd name="adj" fmla="val 50000"/>
-            </a:avLst>
-          </a:prstGeom>
-          <a:solidFill xmlns:a="http://schemas.openxmlformats.org/drawingml/2006/main">
-            <a:srgbClr val="E2EDF9"/>
-          </a:solidFill>
-          <a:ln xmlns:a="http://schemas.openxmlformats.org/drawingml/2006/main" w="12700">
-            <a:solidFill>
-              <a:srgbClr val="E2EDF9"/>
-            </a:solidFill>
-            <a:prstDash val="solid"/>
-          </a:ln>
-        </p:spPr>
-        <p:txBody xmlns:a="http://schemas.openxmlformats.org/drawingml/2006/main">
-          <a:bodyPr/>
-          <a:p/>
-        </p:txBody>
-      </p:sp>
-      <p:sp>
-        <p:nvSpPr>
-          <p:cNvPr id="18" name="Text 16">
-            <a:extLst xmlns:a="http://schemas.openxmlformats.org/drawingml/2006/main">
-              <a:ext uri="{FF2B5EF4-FFF2-40B4-BE49-F238E27FC236}">
-                <a16:creationId xmlns:a16="http://schemas.microsoft.com/office/drawing/2014/main" id="{D516CD95-4CCA-4E6D-BCAA-68A8E45BCBBE}"/>
-              </a:ext>
-            </a:extLst>
-          </p:cNvPr>
-          <p:cNvSpPr>
-            <a:spLocks xmlns:a="http://schemas.openxmlformats.org/drawingml/2006/main" noGrp="1"/>
-          </p:cNvSpPr>
-          <p:nvPr/>
-        </p:nvSpPr>
-        <p:spPr>
-          <a:xfrm xmlns:a="http://schemas.openxmlformats.org/drawingml/2006/main">
-            <a:off x="3904488" y="4480560"/>
-            <a:ext cx="1645920" cy="365760"/>
-          </a:xfrm>
-          <a:prstGeom xmlns:a="http://schemas.openxmlformats.org/drawingml/2006/main" prst="rect">
-            <a:avLst/>
-          </a:prstGeom>
-          <a:noFill xmlns:a="http://schemas.openxmlformats.org/drawingml/2006/main"/>
-        </p:spPr>
-        <p:txBody>
-          <a:bodyPr xmlns:a="http://schemas.openxmlformats.org/drawingml/2006/main" wrap="square" lIns="0" tIns="0" rIns="0" bIns="0" anchor="ctr"/>
-          <a:lstStyle xmlns:a="http://schemas.openxmlformats.org/drawingml/2006/main"/>
-          <a:p xmlns:a="http://schemas.openxmlformats.org/drawingml/2006/main">
-            <a:pPr marL="0" indent="0" algn="ctr">
-              <a:buNone/>
-            </a:pPr>
-            <a:r>
-              <a:rPr sz="1200" b="1">
-                <a:solidFill>
-                  <a:srgbClr val="1F6FB8"/>
-                </a:solidFill>
-                <a:latin typeface="Microsoft JhengHei"/>
-                <a:ea typeface="Microsoft JhengHei"/>
-                <a:cs typeface="Microsoft JhengHei"/>
-              </a:rPr>
-              <a:t>許家全</a:t>
-            </a:r>
-            <a:endParaRPr sz="1200"/>
-          </a:p>
-        </p:txBody>
-      </p:sp>
-      <p:sp>
-        <p:nvSpPr>
-          <p:cNvPr id="20" name="Shape 18">
-            <a:extLst xmlns:a="http://schemas.openxmlformats.org/drawingml/2006/main">
-              <a:ext uri="{FF2B5EF4-FFF2-40B4-BE49-F238E27FC236}">
-                <a16:creationId xmlns:a16="http://schemas.microsoft.com/office/drawing/2014/main" id="{D58F3A69-E4F1-4209-818B-C2A4109E6CA3}"/>
-              </a:ext>
-            </a:extLst>
-          </p:cNvPr>
-          <p:cNvSpPr>
-            <a:spLocks xmlns:a="http://schemas.openxmlformats.org/drawingml/2006/main" noGrp="1"/>
-          </p:cNvSpPr>
-          <p:nvPr/>
-        </p:nvSpPr>
-        <p:spPr>
-          <a:xfrm xmlns:a="http://schemas.openxmlformats.org/drawingml/2006/main">
-            <a:off x="6199632" y="1783080"/>
-            <a:ext cx="2523744" cy="3611880"/>
-          </a:xfrm>
-          <a:prstGeom xmlns:a="http://schemas.openxmlformats.org/drawingml/2006/main" prst="roundRect">
-            <a:avLst>
-              <a:gd name="adj" fmla="val 5797"/>
-            </a:avLst>
-          </a:prstGeom>
-          <a:solidFill xmlns:a="http://schemas.openxmlformats.org/drawingml/2006/main">
-            <a:srgbClr val="FFFFFF"/>
-          </a:solidFill>
-          <a:ln xmlns:a="http://schemas.openxmlformats.org/drawingml/2006/main" w="12700">
-            <a:solidFill>
-              <a:srgbClr val="D3DEEA"/>
-            </a:solidFill>
-            <a:prstDash val="solid"/>
-          </a:ln>
-        </p:spPr>
-        <p:txBody xmlns:a="http://schemas.openxmlformats.org/drawingml/2006/main">
-          <a:bodyPr/>
-          <a:p/>
-        </p:txBody>
-      </p:sp>
-      <p:sp>
-        <p:nvSpPr>
-          <p:cNvPr id="21" name="Text 19">
-            <a:extLst xmlns:a="http://schemas.openxmlformats.org/drawingml/2006/main">
-              <a:ext uri="{FF2B5EF4-FFF2-40B4-BE49-F238E27FC236}">
-                <a16:creationId xmlns:a16="http://schemas.microsoft.com/office/drawing/2014/main" id="{55FCD0CB-B16A-48F2-A2C8-869F2FB0B929}"/>
-              </a:ext>
-            </a:extLst>
-          </p:cNvPr>
-          <p:cNvSpPr>
-            <a:spLocks xmlns:a="http://schemas.openxmlformats.org/drawingml/2006/main" noGrp="1"/>
-          </p:cNvSpPr>
-          <p:nvPr/>
-        </p:nvSpPr>
-        <p:spPr>
-          <a:xfrm xmlns:a="http://schemas.openxmlformats.org/drawingml/2006/main">
-            <a:off x="6199632" y="2057400"/>
-            <a:ext cx="2523744" cy="731520"/>
-          </a:xfrm>
-          <a:prstGeom xmlns:a="http://schemas.openxmlformats.org/drawingml/2006/main" prst="rect">
-            <a:avLst/>
-          </a:prstGeom>
-          <a:noFill xmlns:a="http://schemas.openxmlformats.org/drawingml/2006/main"/>
-        </p:spPr>
-        <p:txBody>
-          <a:bodyPr xmlns:a="http://schemas.openxmlformats.org/drawingml/2006/main" wrap="square" lIns="0" tIns="0" rIns="0" bIns="0" anchor="ctr"/>
-          <a:lstStyle xmlns:a="http://schemas.openxmlformats.org/drawingml/2006/main"/>
-          <a:p xmlns:a="http://schemas.openxmlformats.org/drawingml/2006/main">
-            <a:pPr marL="0" indent="0" algn="ctr">
-              <a:buNone/>
-            </a:pPr>
-            <a:r>
-              <a:rPr sz="4000" b="1">
-                <a:solidFill>
-                  <a:srgbClr val="D46A12"/>
-                </a:solidFill>
-                <a:latin typeface="Microsoft JhengHei"/>
-                <a:ea typeface="Microsoft JhengHei"/>
-                <a:cs typeface="Microsoft JhengHei"/>
-              </a:rPr>
-              <a:t>03</a:t>
-            </a:r>
-            <a:endParaRPr sz="4000"/>
-          </a:p>
-        </p:txBody>
-      </p:sp>
-      <p:sp>
-        <p:nvSpPr>
-          <p:cNvPr id="22" name="Text 20">
-            <a:extLst xmlns:a="http://schemas.openxmlformats.org/drawingml/2006/main">
-              <a:ext uri="{FF2B5EF4-FFF2-40B4-BE49-F238E27FC236}">
-                <a16:creationId xmlns:a16="http://schemas.microsoft.com/office/drawing/2014/main" id="{FFC4CAFE-9974-4D9D-9A5F-E075DA19299F}"/>
-              </a:ext>
-            </a:extLst>
-          </p:cNvPr>
-          <p:cNvSpPr>
-            <a:spLocks xmlns:a="http://schemas.openxmlformats.org/drawingml/2006/main" noGrp="1"/>
-          </p:cNvSpPr>
-          <p:nvPr/>
-        </p:nvSpPr>
-        <p:spPr>
-          <a:xfrm xmlns:a="http://schemas.openxmlformats.org/drawingml/2006/main">
-            <a:off x="6291072" y="2926080"/>
-            <a:ext cx="2340864" cy="411480"/>
-          </a:xfrm>
-          <a:prstGeom xmlns:a="http://schemas.openxmlformats.org/drawingml/2006/main" prst="rect">
-            <a:avLst/>
-          </a:prstGeom>
-          <a:noFill xmlns:a="http://schemas.openxmlformats.org/drawingml/2006/main"/>
-        </p:spPr>
-        <p:txBody>
-          <a:bodyPr xmlns:a="http://schemas.openxmlformats.org/drawingml/2006/main" wrap="square" lIns="0" tIns="0" rIns="0" bIns="0" anchor="ctr"/>
-          <a:lstStyle xmlns:a="http://schemas.openxmlformats.org/drawingml/2006/main"/>
-          <a:p xmlns:a="http://schemas.openxmlformats.org/drawingml/2006/main">
-            <a:pPr marL="0" indent="0" algn="ctr">
-              <a:buNone/>
-            </a:pPr>
-            <a:r>
-              <a:rPr sz="1800" b="1">
-                <a:solidFill>
-                  <a:srgbClr val="14243A"/>
-                </a:solidFill>
-                <a:latin typeface="Microsoft JhengHei"/>
-                <a:ea typeface="Microsoft JhengHei"/>
-                <a:cs typeface="Microsoft JhengHei"/>
-              </a:rPr>
-              <a:t>做到哪</a:t>
-            </a:r>
-            <a:endParaRPr sz="1800"/>
-          </a:p>
-        </p:txBody>
-      </p:sp>
-      <p:sp>
-        <p:nvSpPr>
-          <p:cNvPr id="23" name="Text 21">
-            <a:extLst xmlns:a="http://schemas.openxmlformats.org/drawingml/2006/main">
-              <a:ext uri="{FF2B5EF4-FFF2-40B4-BE49-F238E27FC236}">
-                <a16:creationId xmlns:a16="http://schemas.microsoft.com/office/drawing/2014/main" id="{9EAD1606-9FAC-437D-BC8B-6FE99C656590}"/>
-              </a:ext>
-            </a:extLst>
-          </p:cNvPr>
-          <p:cNvSpPr>
-            <a:spLocks xmlns:a="http://schemas.openxmlformats.org/drawingml/2006/main" noGrp="1"/>
-          </p:cNvSpPr>
-          <p:nvPr/>
-        </p:nvSpPr>
-        <p:spPr>
-          <a:xfrm xmlns:a="http://schemas.openxmlformats.org/drawingml/2006/main">
-            <a:off x="6336792" y="3474720"/>
-            <a:ext cx="2249424" cy="822960"/>
-          </a:xfrm>
-          <a:prstGeom xmlns:a="http://schemas.openxmlformats.org/drawingml/2006/main" prst="rect">
-            <a:avLst/>
-          </a:prstGeom>
-          <a:noFill xmlns:a="http://schemas.openxmlformats.org/drawingml/2006/main"/>
-        </p:spPr>
-        <p:txBody>
-          <a:bodyPr xmlns:a="http://schemas.openxmlformats.org/drawingml/2006/main" wrap="square" lIns="0" tIns="0" rIns="0" bIns="0" anchor="t"/>
-          <a:lstStyle xmlns:a="http://schemas.openxmlformats.org/drawingml/2006/main"/>
-          <a:p xmlns:a="http://schemas.openxmlformats.org/drawingml/2006/main">
-            <a:pPr marL="0" indent="0" algn="ctr">
-              <a:buNone/>
-            </a:pPr>
-            <a:r>
-              <a:rPr sz="1400">
-                <a:solidFill>
-                  <a:srgbClr val="3F546C"/>
-                </a:solidFill>
-                <a:latin typeface="Microsoft JhengHei"/>
-                <a:ea typeface="Microsoft JhengHei"/>
-                <a:cs typeface="Microsoft JhengHei"/>
-              </a:rPr>
-              <a:t>功能完成度</a:t>
-            </a:r>
-            <a:endParaRPr sz="1400"/>
-          </a:p>
-          <a:p xmlns:a="http://schemas.openxmlformats.org/drawingml/2006/main">
-            <a:pPr marL="0" indent="0" algn="ctr">
-              <a:buNone/>
-            </a:pPr>
-            <a:r>
-              <a:rPr sz="1400">
-                <a:solidFill>
-                  <a:srgbClr val="3F546C"/>
-                </a:solidFill>
-                <a:latin typeface="Microsoft JhengHei"/>
-                <a:ea typeface="Microsoft JhengHei"/>
-                <a:cs typeface="Microsoft JhengHei"/>
-              </a:rPr>
-              <a:t>實機展示</a:t>
-            </a:r>
-            <a:endParaRPr sz="1400"/>
-          </a:p>
-        </p:txBody>
-      </p:sp>
-      <p:sp>
-        <p:nvSpPr>
-          <p:cNvPr id="24" name="Shape 22">
-            <a:extLst xmlns:a="http://schemas.openxmlformats.org/drawingml/2006/main">
-              <a:ext uri="{FF2B5EF4-FFF2-40B4-BE49-F238E27FC236}">
-                <a16:creationId xmlns:a16="http://schemas.microsoft.com/office/drawing/2014/main" id="{77DA017B-2A37-45E1-9BF5-403FD57B71DC}"/>
-              </a:ext>
-            </a:extLst>
-          </p:cNvPr>
-          <p:cNvSpPr>
-            <a:spLocks xmlns:a="http://schemas.openxmlformats.org/drawingml/2006/main" noGrp="1"/>
-          </p:cNvSpPr>
-          <p:nvPr/>
-        </p:nvSpPr>
-        <p:spPr>
-          <a:xfrm xmlns:a="http://schemas.openxmlformats.org/drawingml/2006/main">
-            <a:off x="6638544" y="4480560"/>
-            <a:ext cx="1645920" cy="365760"/>
-          </a:xfrm>
-          <a:prstGeom xmlns:a="http://schemas.openxmlformats.org/drawingml/2006/main" prst="roundRect">
-            <a:avLst>
-              <a:gd name="adj" fmla="val 50000"/>
-            </a:avLst>
-          </a:prstGeom>
-          <a:solidFill xmlns:a="http://schemas.openxmlformats.org/drawingml/2006/main">
-            <a:srgbClr val="E2EDF9"/>
-          </a:solidFill>
-          <a:ln xmlns:a="http://schemas.openxmlformats.org/drawingml/2006/main" w="12700">
-            <a:solidFill>
-              <a:srgbClr val="E2EDF9"/>
-            </a:solidFill>
-            <a:prstDash val="solid"/>
-          </a:ln>
-        </p:spPr>
-        <p:txBody xmlns:a="http://schemas.openxmlformats.org/drawingml/2006/main">
-          <a:bodyPr/>
-          <a:p/>
-        </p:txBody>
-      </p:sp>
-      <p:sp>
-        <p:nvSpPr>
-          <p:cNvPr id="25" name="Text 23">
-            <a:extLst xmlns:a="http://schemas.openxmlformats.org/drawingml/2006/main">
-              <a:ext uri="{FF2B5EF4-FFF2-40B4-BE49-F238E27FC236}">
-                <a16:creationId xmlns:a16="http://schemas.microsoft.com/office/drawing/2014/main" id="{F1F33E70-64EE-4CE5-AFEB-BAA682BF390D}"/>
-              </a:ext>
-            </a:extLst>
-          </p:cNvPr>
-          <p:cNvSpPr>
-            <a:spLocks xmlns:a="http://schemas.openxmlformats.org/drawingml/2006/main" noGrp="1"/>
-          </p:cNvSpPr>
-          <p:nvPr/>
-        </p:nvSpPr>
-        <p:spPr>
-          <a:xfrm xmlns:a="http://schemas.openxmlformats.org/drawingml/2006/main">
-            <a:off x="6638544" y="4480560"/>
-            <a:ext cx="1645920" cy="365760"/>
-          </a:xfrm>
-          <a:prstGeom xmlns:a="http://schemas.openxmlformats.org/drawingml/2006/main" prst="rect">
-            <a:avLst/>
-          </a:prstGeom>
-          <a:noFill xmlns:a="http://schemas.openxmlformats.org/drawingml/2006/main"/>
-        </p:spPr>
-        <p:txBody>
-          <a:bodyPr xmlns:a="http://schemas.openxmlformats.org/drawingml/2006/main" wrap="square" lIns="0" tIns="0" rIns="0" bIns="0" anchor="ctr"/>
-          <a:lstStyle xmlns:a="http://schemas.openxmlformats.org/drawingml/2006/main"/>
-          <a:p xmlns:a="http://schemas.openxmlformats.org/drawingml/2006/main">
-            <a:pPr marL="0" indent="0" algn="ctr">
-              <a:buNone/>
-            </a:pPr>
-            <a:r>
-              <a:rPr sz="1200" b="1">
-                <a:solidFill>
-                  <a:srgbClr val="1F6FB8"/>
-                </a:solidFill>
-                <a:latin typeface="Microsoft JhengHei"/>
-                <a:ea typeface="Microsoft JhengHei"/>
-                <a:cs typeface="Microsoft JhengHei"/>
-              </a:rPr>
-              <a:t>許家全</a:t>
-            </a:r>
-            <a:endParaRPr sz="1200"/>
-          </a:p>
-        </p:txBody>
-      </p:sp>
-      <p:sp>
-        <p:nvSpPr>
-          <p:cNvPr id="27" name="Shape 25">
-            <a:extLst xmlns:a="http://schemas.openxmlformats.org/drawingml/2006/main">
-              <a:ext uri="{FF2B5EF4-FFF2-40B4-BE49-F238E27FC236}">
-                <a16:creationId xmlns:a16="http://schemas.microsoft.com/office/drawing/2014/main" id="{7C005F6A-0FA2-472C-BA57-5ECDD809F898}"/>
-              </a:ext>
-            </a:extLst>
-          </p:cNvPr>
-          <p:cNvSpPr>
-            <a:spLocks xmlns:a="http://schemas.openxmlformats.org/drawingml/2006/main" noGrp="1"/>
-          </p:cNvSpPr>
-          <p:nvPr/>
-        </p:nvSpPr>
-        <p:spPr>
-          <a:xfrm xmlns:a="http://schemas.openxmlformats.org/drawingml/2006/main">
-            <a:off x="8933688" y="1783080"/>
-            <a:ext cx="2523744" cy="3611880"/>
-          </a:xfrm>
-          <a:prstGeom xmlns:a="http://schemas.openxmlformats.org/drawingml/2006/main" prst="roundRect">
-            <a:avLst>
-              <a:gd name="adj" fmla="val 5797"/>
-            </a:avLst>
-          </a:prstGeom>
-          <a:solidFill xmlns:a="http://schemas.openxmlformats.org/drawingml/2006/main">
-            <a:srgbClr val="FFFFFF"/>
-          </a:solidFill>
-          <a:ln xmlns:a="http://schemas.openxmlformats.org/drawingml/2006/main" w="12700">
-            <a:solidFill>
-              <a:srgbClr val="D3DEEA"/>
-            </a:solidFill>
-            <a:prstDash val="solid"/>
-          </a:ln>
-        </p:spPr>
-        <p:txBody xmlns:a="http://schemas.openxmlformats.org/drawingml/2006/main">
-          <a:bodyPr/>
-          <a:p/>
-        </p:txBody>
-      </p:sp>
-      <p:sp>
-        <p:nvSpPr>
-          <p:cNvPr id="28" name="Text 26">
-            <a:extLst xmlns:a="http://schemas.openxmlformats.org/drawingml/2006/main">
-              <a:ext uri="{FF2B5EF4-FFF2-40B4-BE49-F238E27FC236}">
-                <a16:creationId xmlns:a16="http://schemas.microsoft.com/office/drawing/2014/main" id="{5EC66ACC-03AA-43AD-99F2-2E2E732B09E6}"/>
-              </a:ext>
-            </a:extLst>
-          </p:cNvPr>
-          <p:cNvSpPr>
-            <a:spLocks xmlns:a="http://schemas.openxmlformats.org/drawingml/2006/main" noGrp="1"/>
-          </p:cNvSpPr>
-          <p:nvPr/>
-        </p:nvSpPr>
-        <p:spPr>
-          <a:xfrm xmlns:a="http://schemas.openxmlformats.org/drawingml/2006/main">
-            <a:off x="8933688" y="2057400"/>
-            <a:ext cx="2523744" cy="731520"/>
-          </a:xfrm>
-          <a:prstGeom xmlns:a="http://schemas.openxmlformats.org/drawingml/2006/main" prst="rect">
-            <a:avLst/>
-          </a:prstGeom>
-          <a:noFill xmlns:a="http://schemas.openxmlformats.org/drawingml/2006/main"/>
-        </p:spPr>
-        <p:txBody>
-          <a:bodyPr xmlns:a="http://schemas.openxmlformats.org/drawingml/2006/main" wrap="square" lIns="0" tIns="0" rIns="0" bIns="0" anchor="ctr"/>
-          <a:lstStyle xmlns:a="http://schemas.openxmlformats.org/drawingml/2006/main"/>
-          <a:p xmlns:a="http://schemas.openxmlformats.org/drawingml/2006/main">
-            <a:pPr marL="0" indent="0" algn="ctr">
-              <a:buNone/>
-            </a:pPr>
-            <a:r>
-              <a:rPr sz="4000" b="1">
-                <a:solidFill>
-                  <a:srgbClr val="D46A12"/>
-                </a:solidFill>
-                <a:latin typeface="Microsoft JhengHei"/>
-                <a:ea typeface="Microsoft JhengHei"/>
-                <a:cs typeface="Microsoft JhengHei"/>
-              </a:rPr>
-              <a:t>04</a:t>
-            </a:r>
-            <a:endParaRPr sz="4000"/>
-          </a:p>
-        </p:txBody>
-      </p:sp>
-      <p:sp>
-        <p:nvSpPr>
-          <p:cNvPr id="29" name="Text 27">
-            <a:extLst xmlns:a="http://schemas.openxmlformats.org/drawingml/2006/main">
-              <a:ext uri="{FF2B5EF4-FFF2-40B4-BE49-F238E27FC236}">
-                <a16:creationId xmlns:a16="http://schemas.microsoft.com/office/drawing/2014/main" id="{86B147D5-EE5F-4EE7-B372-FF9BA35C5B26}"/>
-              </a:ext>
-            </a:extLst>
-          </p:cNvPr>
-          <p:cNvSpPr>
-            <a:spLocks xmlns:a="http://schemas.openxmlformats.org/drawingml/2006/main" noGrp="1"/>
-          </p:cNvSpPr>
-          <p:nvPr/>
-        </p:nvSpPr>
-        <p:spPr>
-          <a:xfrm xmlns:a="http://schemas.openxmlformats.org/drawingml/2006/main">
-            <a:off x="9025128" y="2926080"/>
-            <a:ext cx="2340864" cy="411480"/>
-          </a:xfrm>
-          <a:prstGeom xmlns:a="http://schemas.openxmlformats.org/drawingml/2006/main" prst="rect">
-            <a:avLst/>
-          </a:prstGeom>
-          <a:noFill xmlns:a="http://schemas.openxmlformats.org/drawingml/2006/main"/>
-        </p:spPr>
-        <p:txBody>
-          <a:bodyPr xmlns:a="http://schemas.openxmlformats.org/drawingml/2006/main" wrap="square" lIns="0" tIns="0" rIns="0" bIns="0" anchor="ctr"/>
-          <a:lstStyle xmlns:a="http://schemas.openxmlformats.org/drawingml/2006/main"/>
-          <a:p xmlns:a="http://schemas.openxmlformats.org/drawingml/2006/main">
-            <a:pPr marL="0" indent="0" algn="ctr">
-              <a:buNone/>
-            </a:pPr>
-            <a:r>
-              <a:rPr sz="1800" b="1">
-                <a:solidFill>
-                  <a:srgbClr val="14243A"/>
-                </a:solidFill>
-                <a:latin typeface="Microsoft JhengHei"/>
-                <a:ea typeface="Microsoft JhengHei"/>
-                <a:cs typeface="Microsoft JhengHei"/>
-              </a:rPr>
-              <a:t>怎麼管、下一步</a:t>
-            </a:r>
-            <a:endParaRPr sz="1800"/>
-          </a:p>
-        </p:txBody>
-      </p:sp>
-      <p:sp>
-        <p:nvSpPr>
-          <p:cNvPr id="30" name="Text 28">
-            <a:extLst xmlns:a="http://schemas.openxmlformats.org/drawingml/2006/main">
-              <a:ext uri="{FF2B5EF4-FFF2-40B4-BE49-F238E27FC236}">
-                <a16:creationId xmlns:a16="http://schemas.microsoft.com/office/drawing/2014/main" id="{AE72B34F-4A9E-4796-BC1D-27A16EA49B38}"/>
-              </a:ext>
-            </a:extLst>
-          </p:cNvPr>
-          <p:cNvSpPr>
-            <a:spLocks xmlns:a="http://schemas.openxmlformats.org/drawingml/2006/main" noGrp="1"/>
-          </p:cNvSpPr>
-          <p:nvPr/>
-        </p:nvSpPr>
-        <p:spPr>
-          <a:xfrm xmlns:a="http://schemas.openxmlformats.org/drawingml/2006/main">
-            <a:off x="9070848" y="3474720"/>
-            <a:ext cx="2249424" cy="822960"/>
-          </a:xfrm>
-          <a:prstGeom xmlns:a="http://schemas.openxmlformats.org/drawingml/2006/main" prst="rect">
-            <a:avLst/>
-          </a:prstGeom>
-          <a:noFill xmlns:a="http://schemas.openxmlformats.org/drawingml/2006/main"/>
-        </p:spPr>
-        <p:txBody>
-          <a:bodyPr xmlns:a="http://schemas.openxmlformats.org/drawingml/2006/main" wrap="square" lIns="0" tIns="0" rIns="0" bIns="0" anchor="t"/>
-          <a:lstStyle xmlns:a="http://schemas.openxmlformats.org/drawingml/2006/main"/>
-          <a:p xmlns:a="http://schemas.openxmlformats.org/drawingml/2006/main">
-            <a:pPr marL="0" indent="0" algn="ctr">
-              <a:buNone/>
-            </a:pPr>
-            <a:r>
-              <a:rPr sz="1400">
-                <a:solidFill>
-                  <a:srgbClr val="3F546C"/>
-                </a:solidFill>
-                <a:latin typeface="Microsoft JhengHei"/>
-                <a:ea typeface="Microsoft JhengHei"/>
-                <a:cs typeface="Microsoft JhengHei"/>
-              </a:rPr>
-              <a:t>時程與 GitHub</a:t>
-            </a:r>
-            <a:endParaRPr sz="1400"/>
-          </a:p>
-          <a:p xmlns:a="http://schemas.openxmlformats.org/drawingml/2006/main">
-            <a:pPr marL="0" indent="0" algn="ctr">
-              <a:buNone/>
-            </a:pPr>
-            <a:r>
-              <a:rPr sz="1400">
-                <a:solidFill>
-                  <a:srgbClr val="3F546C"/>
-                </a:solidFill>
-                <a:latin typeface="Microsoft JhengHei"/>
-                <a:ea typeface="Microsoft JhengHei"/>
-                <a:cs typeface="Microsoft JhengHei"/>
-              </a:rPr>
-              <a:t>分工、結論</a:t>
-            </a:r>
-            <a:endParaRPr sz="1400"/>
-          </a:p>
-        </p:txBody>
-      </p:sp>
-      <p:sp>
-        <p:nvSpPr>
-          <p:cNvPr id="31" name="Shape 29">
-            <a:extLst xmlns:a="http://schemas.openxmlformats.org/drawingml/2006/main">
-              <a:ext uri="{FF2B5EF4-FFF2-40B4-BE49-F238E27FC236}">
-                <a16:creationId xmlns:a16="http://schemas.microsoft.com/office/drawing/2014/main" id="{0FA62E81-73DC-44E5-BDD9-5F76359D6817}"/>
-              </a:ext>
-            </a:extLst>
-          </p:cNvPr>
-          <p:cNvSpPr>
-            <a:spLocks xmlns:a="http://schemas.openxmlformats.org/drawingml/2006/main" noGrp="1"/>
-          </p:cNvSpPr>
-          <p:nvPr/>
-        </p:nvSpPr>
-        <p:spPr>
-          <a:xfrm xmlns:a="http://schemas.openxmlformats.org/drawingml/2006/main">
-            <a:off x="9372600" y="4480560"/>
-            <a:ext cx="1645920" cy="365760"/>
-          </a:xfrm>
-          <a:prstGeom xmlns:a="http://schemas.openxmlformats.org/drawingml/2006/main" prst="roundRect">
-            <a:avLst>
-              <a:gd name="adj" fmla="val 50000"/>
-            </a:avLst>
-          </a:prstGeom>
-          <a:solidFill xmlns:a="http://schemas.openxmlformats.org/drawingml/2006/main">
-            <a:srgbClr val="E2EDF9"/>
-          </a:solidFill>
-          <a:ln xmlns:a="http://schemas.openxmlformats.org/drawingml/2006/main" w="12700">
-            <a:solidFill>
-              <a:srgbClr val="E2EDF9"/>
-            </a:solidFill>
-            <a:prstDash val="solid"/>
-          </a:ln>
-        </p:spPr>
-        <p:txBody xmlns:a="http://schemas.openxmlformats.org/drawingml/2006/main">
-          <a:bodyPr/>
-          <a:p/>
-        </p:txBody>
-      </p:sp>
-      <p:sp>
-        <p:nvSpPr>
-          <p:cNvPr id="32" name="Text 30">
-            <a:extLst xmlns:a="http://schemas.openxmlformats.org/drawingml/2006/main">
-              <a:ext uri="{FF2B5EF4-FFF2-40B4-BE49-F238E27FC236}">
-                <a16:creationId xmlns:a16="http://schemas.microsoft.com/office/drawing/2014/main" id="{5C2C9254-E34F-4B45-9544-6577AE63DB94}"/>
-              </a:ext>
-            </a:extLst>
-          </p:cNvPr>
-          <p:cNvSpPr>
-            <a:spLocks xmlns:a="http://schemas.openxmlformats.org/drawingml/2006/main" noGrp="1"/>
-          </p:cNvSpPr>
-          <p:nvPr/>
-        </p:nvSpPr>
-        <p:spPr>
-          <a:xfrm xmlns:a="http://schemas.openxmlformats.org/drawingml/2006/main">
-            <a:off x="9372600" y="4480560"/>
-            <a:ext cx="1645920" cy="365760"/>
-          </a:xfrm>
-          <a:prstGeom xmlns:a="http://schemas.openxmlformats.org/drawingml/2006/main" prst="rect">
-            <a:avLst/>
-          </a:prstGeom>
-          <a:noFill xmlns:a="http://schemas.openxmlformats.org/drawingml/2006/main"/>
-        </p:spPr>
-        <p:txBody>
-          <a:bodyPr xmlns:a="http://schemas.openxmlformats.org/drawingml/2006/main" wrap="square" lIns="0" tIns="0" rIns="0" bIns="0" anchor="ctr"/>
-          <a:lstStyle xmlns:a="http://schemas.openxmlformats.org/drawingml/2006/main"/>
-          <a:p xmlns:a="http://schemas.openxmlformats.org/drawingml/2006/main">
-            <a:pPr marL="0" indent="0" algn="ctr">
-              <a:buNone/>
-            </a:pPr>
-            <a:r>
-              <a:rPr sz="1200" b="1">
-                <a:solidFill>
-                  <a:srgbClr val="1F6FB8"/>
-                </a:solidFill>
-                <a:latin typeface="Microsoft JhengHei"/>
-                <a:ea typeface="Microsoft JhengHei"/>
-                <a:cs typeface="Microsoft JhengHei"/>
-              </a:rPr>
-              <a:t>陳威帆</a:t>
-            </a:r>
-            <a:endParaRPr sz="1200"/>
-          </a:p>
-        </p:txBody>
-      </p:sp>
-      <p:sp>
-        <p:nvSpPr>
-          <p:cNvPr id="34" name="Shape 32">
-            <a:extLst xmlns:a="http://schemas.openxmlformats.org/drawingml/2006/main">
-              <a:ext uri="{FF2B5EF4-FFF2-40B4-BE49-F238E27FC236}">
-                <a16:creationId xmlns:a16="http://schemas.microsoft.com/office/drawing/2014/main" id="{6E43DCBC-DD71-4B89-9A82-763A4CCBB094}"/>
-              </a:ext>
-            </a:extLst>
-          </p:cNvPr>
-          <p:cNvSpPr>
-            <a:spLocks xmlns:a="http://schemas.openxmlformats.org/drawingml/2006/main" noGrp="1"/>
-          </p:cNvSpPr>
-          <p:nvPr/>
-        </p:nvSpPr>
-        <p:spPr>
-          <a:xfrm xmlns:a="http://schemas.openxmlformats.org/drawingml/2006/main">
-            <a:off x="731520" y="5669280"/>
-            <a:ext cx="10725912" cy="457200"/>
-          </a:xfrm>
-          <a:prstGeom xmlns:a="http://schemas.openxmlformats.org/drawingml/2006/main" prst="roundRect">
-            <a:avLst>
-              <a:gd name="adj" fmla="val 24000"/>
-            </a:avLst>
-          </a:prstGeom>
-          <a:solidFill xmlns:a="http://schemas.openxmlformats.org/drawingml/2006/main">
-            <a:srgbClr val="E2EDF9"/>
-          </a:solidFill>
-          <a:ln xmlns:a="http://schemas.openxmlformats.org/drawingml/2006/main" w="12700">
-            <a:solidFill>
-              <a:srgbClr val="E2EDF9"/>
-            </a:solidFill>
-            <a:prstDash val="solid"/>
-          </a:ln>
-        </p:spPr>
-        <p:txBody xmlns:a="http://schemas.openxmlformats.org/drawingml/2006/main">
-          <a:bodyPr/>
-          <a:p/>
-        </p:txBody>
-      </p:sp>
-      <p:sp>
-        <p:nvSpPr>
-          <p:cNvPr id="35" name="Text 33">
-            <a:extLst xmlns:a="http://schemas.openxmlformats.org/drawingml/2006/main">
-              <a:ext uri="{FF2B5EF4-FFF2-40B4-BE49-F238E27FC236}">
-                <a16:creationId xmlns:a16="http://schemas.microsoft.com/office/drawing/2014/main" id="{489D0AC0-8472-49F9-9FBA-762EF44ACA57}"/>
-              </a:ext>
-            </a:extLst>
-          </p:cNvPr>
-          <p:cNvSpPr>
-            <a:spLocks xmlns:a="http://schemas.openxmlformats.org/drawingml/2006/main" noGrp="1"/>
-          </p:cNvSpPr>
-          <p:nvPr/>
-        </p:nvSpPr>
-        <p:spPr>
-          <a:xfrm xmlns:a="http://schemas.openxmlformats.org/drawingml/2006/main">
-            <a:off x="731520" y="5669280"/>
-            <a:ext cx="10725912" cy="457200"/>
-          </a:xfrm>
-          <a:prstGeom xmlns:a="http://schemas.openxmlformats.org/drawingml/2006/main" prst="rect">
-            <a:avLst/>
-          </a:prstGeom>
-          <a:noFill xmlns:a="http://schemas.openxmlformats.org/drawingml/2006/main"/>
-        </p:spPr>
-        <p:txBody>
-          <a:bodyPr xmlns:a="http://schemas.openxmlformats.org/drawingml/2006/main" wrap="square" lIns="0" tIns="0" rIns="0" bIns="0" anchor="ctr"/>
-          <a:lstStyle xmlns:a="http://schemas.openxmlformats.org/drawingml/2006/main"/>
-          <a:p xmlns:a="http://schemas.openxmlformats.org/drawingml/2006/main">
-            <a:pPr marL="0" indent="0" algn="ctr">
-              <a:buNone/>
-            </a:pPr>
-            <a:r>
-              <a:rPr sz="1400" b="1">
-                <a:solidFill>
-                  <a:srgbClr val="1F6FB8"/>
-                </a:solidFill>
-                <a:latin typeface="Microsoft JhengHei"/>
-                <a:ea typeface="Microsoft JhengHei"/>
-                <a:cs typeface="Microsoft JhengHei"/>
-              </a:rPr>
-              <a:t>16 項初評意見與回應頁碼，逐條對照於附錄 A、B</a:t>
-            </a:r>
-            <a:endParaRPr sz="1400"/>
-          </a:p>
-        </p:txBody>
-      </p:sp>
-      <p:sp>
-        <p:nvSpPr>
-          <p:cNvPr id="37" name="02">
-            <a:extLst xmlns:a="http://schemas.openxmlformats.org/drawingml/2006/main">
-              <a:ext uri="{FF2B5EF4-FFF2-40B4-BE49-F238E27FC236}">
-                <a16:creationId xmlns:a16="http://schemas.microsoft.com/office/drawing/2014/main" id="{5530B98C-4B3A-4176-8E77-B202184269E0}"/>
-              </a:ext>
-            </a:extLst>
-          </p:cNvPr>
-          <p:cNvSpPr>
-            <a:spLocks xmlns:a="http://schemas.openxmlformats.org/drawingml/2006/main" noGrp="1"/>
-          </p:cNvSpPr>
-          <p:nvPr/>
-        </p:nvSpPr>
-        <p:spPr>
-          <a:xfrm xmlns:a="http://schemas.openxmlformats.org/drawingml/2006/main">
-            <a:off x="733425" y="6391275"/>
-            <a:ext cx="762000" cy="257175"/>
-          </a:xfrm>
-          <a:prstGeom xmlns:a="http://schemas.openxmlformats.org/drawingml/2006/main" prst="rect">
-            <a:avLst/>
-          </a:prstGeom>
-          <a:noFill xmlns:a="http://schemas.openxmlformats.org/drawingml/2006/main"/>
-          <a:ln xmlns:a="http://schemas.openxmlformats.org/drawingml/2006/main" w="0">
-            <a:noFill/>
-          </a:ln>
-        </p:spPr>
-        <p:txBody>
-          <a:bodyPr xmlns:a="http://schemas.openxmlformats.org/drawingml/2006/main" lIns="0" tIns="0" rIns="0" bIns="0"/>
-          <a:lstStyle xmlns:a="http://schemas.openxmlformats.org/drawingml/2006/main">
-            <a:defPPr>
-              <a:defRPr sz="1275" b="0">
-                <a:solidFill>
-                  <a:srgbClr val="465E78"/>
-                </a:solidFill>
-              </a:defRPr>
-            </a:defPPr>
-          </a:lstStyle>
-          <a:p xmlns:a="http://schemas.openxmlformats.org/drawingml/2006/main">
-            <a:pPr>
-              <a:buNone/>
-              <a:defRPr sz="1275" b="0">
-                <a:solidFill>
-                  <a:srgbClr val="465E78"/>
-                </a:solidFill>
-              </a:defRPr>
-            </a:pPr>
-            <a:r>
-              <a:rPr sz="1275" b="0">
-                <a:solidFill>
-                  <a:srgbClr val="465E78"/>
-                </a:solidFill>
-              </a:rPr>
-              <a:t>02</a:t>
-            </a:r>
-          </a:p>
-        </p:txBody>
-      </p:sp>
-    </p:spTree>
-    <p:extLst>
-      <p:ext uri="{BB962C8B-B14F-4D97-AF65-F5344CB8AC3E}">
-        <p14:creationId xmlns:p14="http://schemas.microsoft.com/office/powerpoint/2010/main" val="1909388751"/>
-      </p:ext>
-    </p:extLst>
-  </p:cSld>
-</p:sld>
-</file>
-
-<file path=ppt/slides/slide20.xml><?xml version="1.0" encoding="utf-8"?>
+<file path=ppt/slides/slide19.xml><?xml version="1.0" encoding="utf-8"?>
 <p:sld xmlns:p="http://schemas.openxmlformats.org/presentationml/2006/main" show="0">
   <p:cSld>
     <p:bg>
@@ -16752,7 +15418,1341 @@
 </p:sld>
 </file>
 
-<file path=ppt/slides/slide21.xml><?xml version="1.0" encoding="utf-8"?>
+<file path=ppt/slides/slide2.xml><?xml version="1.0" encoding="utf-8"?>
+<p:sld xmlns:p="http://schemas.openxmlformats.org/presentationml/2006/main">
+  <p:cSld>
+    <p:bg>
+      <p:bgPr>
+        <a:solidFill xmlns:a="http://schemas.openxmlformats.org/drawingml/2006/main">
+          <a:srgbClr val="F5F8FC"/>
+        </a:solidFill>
+      </p:bgPr>
+    </p:bg>
+    <p:spTree>
+      <p:nvGrpSpPr>
+        <p:cNvPr id="1" name=""/>
+        <p:cNvGrpSpPr/>
+        <p:nvPr/>
+      </p:nvGrpSpPr>
+      <p:grpSpPr>
+        <a:xfrm xmlns:a="http://schemas.openxmlformats.org/drawingml/2006/main"/>
+      </p:grpSpPr>
+      <p:sp>
+        <p:nvSpPr>
+          <p:cNvPr id="4" name="Text 2">
+            <a:extLst xmlns:a="http://schemas.openxmlformats.org/drawingml/2006/main">
+              <a:ext uri="{FF2B5EF4-FFF2-40B4-BE49-F238E27FC236}">
+                <a16:creationId xmlns:a16="http://schemas.microsoft.com/office/drawing/2014/main" id="{F568291D-8866-4EFD-B6A9-739524AFD19D}"/>
+              </a:ext>
+            </a:extLst>
+          </p:cNvPr>
+          <p:cNvSpPr>
+            <a:spLocks xmlns:a="http://schemas.openxmlformats.org/drawingml/2006/main" noGrp="1"/>
+          </p:cNvSpPr>
+          <p:nvPr/>
+        </p:nvSpPr>
+        <p:spPr>
+          <a:xfrm xmlns:a="http://schemas.openxmlformats.org/drawingml/2006/main">
+            <a:off x="731520" y="777240"/>
+            <a:ext cx="10725912" cy="685800"/>
+          </a:xfrm>
+          <a:prstGeom xmlns:a="http://schemas.openxmlformats.org/drawingml/2006/main" prst="rect">
+            <a:avLst/>
+          </a:prstGeom>
+          <a:noFill xmlns:a="http://schemas.openxmlformats.org/drawingml/2006/main"/>
+        </p:spPr>
+        <p:txBody>
+          <a:bodyPr xmlns:a="http://schemas.openxmlformats.org/drawingml/2006/main" wrap="square" lIns="0" tIns="0" rIns="0" bIns="0" anchor="ctr"/>
+          <a:lstStyle xmlns:a="http://schemas.openxmlformats.org/drawingml/2006/main"/>
+          <a:p xmlns:a="http://schemas.openxmlformats.org/drawingml/2006/main">
+            <a:pPr marL="0" indent="0">
+              <a:buNone/>
+            </a:pPr>
+            <a:r>
+              <a:rPr sz="3000" b="1">
+                <a:solidFill>
+                  <a:srgbClr val="14243A"/>
+                </a:solidFill>
+                <a:latin typeface="Microsoft JhengHei"/>
+                <a:ea typeface="Microsoft JhengHei"/>
+                <a:cs typeface="Microsoft JhengHei"/>
+              </a:rPr>
+              <a:t>報告流程</a:t>
+            </a:r>
+            <a:endParaRPr sz="3000"/>
+          </a:p>
+        </p:txBody>
+      </p:sp>
+      <p:sp>
+        <p:nvSpPr>
+          <p:cNvPr id="6" name="Shape 4">
+            <a:extLst xmlns:a="http://schemas.openxmlformats.org/drawingml/2006/main">
+              <a:ext uri="{FF2B5EF4-FFF2-40B4-BE49-F238E27FC236}">
+                <a16:creationId xmlns:a16="http://schemas.microsoft.com/office/drawing/2014/main" id="{C6F7EDEF-87BE-487F-829E-8D05DE6BAB7A}"/>
+              </a:ext>
+            </a:extLst>
+          </p:cNvPr>
+          <p:cNvSpPr>
+            <a:spLocks xmlns:a="http://schemas.openxmlformats.org/drawingml/2006/main" noGrp="1"/>
+          </p:cNvSpPr>
+          <p:nvPr/>
+        </p:nvSpPr>
+        <p:spPr>
+          <a:xfrm xmlns:a="http://schemas.openxmlformats.org/drawingml/2006/main">
+            <a:off x="731520" y="1783080"/>
+            <a:ext cx="2523744" cy="3611880"/>
+          </a:xfrm>
+          <a:prstGeom xmlns:a="http://schemas.openxmlformats.org/drawingml/2006/main" prst="roundRect">
+            <a:avLst>
+              <a:gd name="adj" fmla="val 5797"/>
+            </a:avLst>
+          </a:prstGeom>
+          <a:solidFill xmlns:a="http://schemas.openxmlformats.org/drawingml/2006/main">
+            <a:srgbClr val="FFFFFF"/>
+          </a:solidFill>
+          <a:ln xmlns:a="http://schemas.openxmlformats.org/drawingml/2006/main" w="19050">
+            <a:solidFill>
+              <a:srgbClr val="D46A12"/>
+            </a:solidFill>
+            <a:prstDash val="solid"/>
+          </a:ln>
+        </p:spPr>
+        <p:txBody xmlns:a="http://schemas.openxmlformats.org/drawingml/2006/main">
+          <a:bodyPr/>
+          <a:p/>
+        </p:txBody>
+      </p:sp>
+      <p:sp>
+        <p:nvSpPr>
+          <p:cNvPr id="7" name="Text 5">
+            <a:extLst xmlns:a="http://schemas.openxmlformats.org/drawingml/2006/main">
+              <a:ext uri="{FF2B5EF4-FFF2-40B4-BE49-F238E27FC236}">
+                <a16:creationId xmlns:a16="http://schemas.microsoft.com/office/drawing/2014/main" id="{35FE2235-C488-46FA-9968-A8E4453038C8}"/>
+              </a:ext>
+            </a:extLst>
+          </p:cNvPr>
+          <p:cNvSpPr>
+            <a:spLocks xmlns:a="http://schemas.openxmlformats.org/drawingml/2006/main" noGrp="1"/>
+          </p:cNvSpPr>
+          <p:nvPr/>
+        </p:nvSpPr>
+        <p:spPr>
+          <a:xfrm xmlns:a="http://schemas.openxmlformats.org/drawingml/2006/main">
+            <a:off x="731520" y="2057400"/>
+            <a:ext cx="2523744" cy="731520"/>
+          </a:xfrm>
+          <a:prstGeom xmlns:a="http://schemas.openxmlformats.org/drawingml/2006/main" prst="rect">
+            <a:avLst/>
+          </a:prstGeom>
+          <a:noFill xmlns:a="http://schemas.openxmlformats.org/drawingml/2006/main"/>
+        </p:spPr>
+        <p:txBody>
+          <a:bodyPr xmlns:a="http://schemas.openxmlformats.org/drawingml/2006/main" wrap="square" lIns="0" tIns="0" rIns="0" bIns="0" anchor="ctr"/>
+          <a:lstStyle xmlns:a="http://schemas.openxmlformats.org/drawingml/2006/main"/>
+          <a:p xmlns:a="http://schemas.openxmlformats.org/drawingml/2006/main">
+            <a:pPr marL="0" indent="0" algn="ctr">
+              <a:buNone/>
+            </a:pPr>
+            <a:r>
+              <a:rPr sz="4000" b="1">
+                <a:solidFill>
+                  <a:srgbClr val="D46A12"/>
+                </a:solidFill>
+                <a:latin typeface="Microsoft JhengHei"/>
+                <a:ea typeface="Microsoft JhengHei"/>
+                <a:cs typeface="Microsoft JhengHei"/>
+              </a:rPr>
+              <a:t>01</a:t>
+            </a:r>
+            <a:endParaRPr sz="4000"/>
+          </a:p>
+        </p:txBody>
+      </p:sp>
+      <p:sp>
+        <p:nvSpPr>
+          <p:cNvPr id="8" name="Text 6">
+            <a:extLst xmlns:a="http://schemas.openxmlformats.org/drawingml/2006/main">
+              <a:ext uri="{FF2B5EF4-FFF2-40B4-BE49-F238E27FC236}">
+                <a16:creationId xmlns:a16="http://schemas.microsoft.com/office/drawing/2014/main" id="{49AAF241-ABE9-471E-B64D-4E82AA9DE8C9}"/>
+              </a:ext>
+            </a:extLst>
+          </p:cNvPr>
+          <p:cNvSpPr>
+            <a:spLocks xmlns:a="http://schemas.openxmlformats.org/drawingml/2006/main" noGrp="1"/>
+          </p:cNvSpPr>
+          <p:nvPr/>
+        </p:nvSpPr>
+        <p:spPr>
+          <a:xfrm xmlns:a="http://schemas.openxmlformats.org/drawingml/2006/main">
+            <a:off x="822960" y="2926080"/>
+            <a:ext cx="2340864" cy="411480"/>
+          </a:xfrm>
+          <a:prstGeom xmlns:a="http://schemas.openxmlformats.org/drawingml/2006/main" prst="rect">
+            <a:avLst/>
+          </a:prstGeom>
+          <a:noFill xmlns:a="http://schemas.openxmlformats.org/drawingml/2006/main"/>
+        </p:spPr>
+        <p:txBody>
+          <a:bodyPr xmlns:a="http://schemas.openxmlformats.org/drawingml/2006/main" wrap="square" lIns="0" tIns="0" rIns="0" bIns="0" anchor="ctr"/>
+          <a:lstStyle xmlns:a="http://schemas.openxmlformats.org/drawingml/2006/main"/>
+          <a:p xmlns:a="http://schemas.openxmlformats.org/drawingml/2006/main">
+            <a:pPr marL="0" indent="0" algn="ctr">
+              <a:buNone/>
+            </a:pPr>
+            <a:r>
+              <a:rPr sz="1800" b="1">
+                <a:solidFill>
+                  <a:srgbClr val="14243A"/>
+                </a:solidFill>
+                <a:latin typeface="Microsoft JhengHei"/>
+                <a:ea typeface="Microsoft JhengHei"/>
+                <a:cs typeface="Microsoft JhengHei"/>
+              </a:rPr>
+              <a:t>為什麼做、做給誰</a:t>
+            </a:r>
+            <a:endParaRPr sz="1800"/>
+          </a:p>
+        </p:txBody>
+      </p:sp>
+      <p:sp>
+        <p:nvSpPr>
+          <p:cNvPr id="9" name="Text 7">
+            <a:extLst xmlns:a="http://schemas.openxmlformats.org/drawingml/2006/main">
+              <a:ext uri="{FF2B5EF4-FFF2-40B4-BE49-F238E27FC236}">
+                <a16:creationId xmlns:a16="http://schemas.microsoft.com/office/drawing/2014/main" id="{DB9E3FFD-D454-4CBD-A4E6-B7F0FC4452AA}"/>
+              </a:ext>
+            </a:extLst>
+          </p:cNvPr>
+          <p:cNvSpPr>
+            <a:spLocks xmlns:a="http://schemas.openxmlformats.org/drawingml/2006/main" noGrp="1"/>
+          </p:cNvSpPr>
+          <p:nvPr/>
+        </p:nvSpPr>
+        <p:spPr>
+          <a:xfrm xmlns:a="http://schemas.openxmlformats.org/drawingml/2006/main">
+            <a:off x="868680" y="3474720"/>
+            <a:ext cx="2249424" cy="822960"/>
+          </a:xfrm>
+          <a:prstGeom xmlns:a="http://schemas.openxmlformats.org/drawingml/2006/main" prst="rect">
+            <a:avLst/>
+          </a:prstGeom>
+          <a:noFill xmlns:a="http://schemas.openxmlformats.org/drawingml/2006/main"/>
+        </p:spPr>
+        <p:txBody>
+          <a:bodyPr xmlns:a="http://schemas.openxmlformats.org/drawingml/2006/main" wrap="square" lIns="0" tIns="0" rIns="0" bIns="0" anchor="t"/>
+          <a:lstStyle xmlns:a="http://schemas.openxmlformats.org/drawingml/2006/main"/>
+          <a:p xmlns:a="http://schemas.openxmlformats.org/drawingml/2006/main">
+            <a:pPr marL="0" indent="0" algn="ctr">
+              <a:buNone/>
+            </a:pPr>
+            <a:r>
+              <a:rPr sz="1400">
+                <a:solidFill>
+                  <a:srgbClr val="3F546C"/>
+                </a:solidFill>
+                <a:latin typeface="Microsoft JhengHei"/>
+                <a:ea typeface="Microsoft JhengHei"/>
+                <a:cs typeface="Microsoft JhengHei"/>
+              </a:rPr>
+              <a:t>問題、使用者</a:t>
+            </a:r>
+            <a:endParaRPr sz="1400"/>
+          </a:p>
+          <a:p xmlns:a="http://schemas.openxmlformats.org/drawingml/2006/main">
+            <a:pPr marL="0" indent="0" algn="ctr">
+              <a:buNone/>
+            </a:pPr>
+            <a:r>
+              <a:rPr sz="1400">
+                <a:solidFill>
+                  <a:srgbClr val="3F546C"/>
+                </a:solidFill>
+                <a:latin typeface="Microsoft JhengHei"/>
+                <a:ea typeface="Microsoft JhengHei"/>
+                <a:cs typeface="Microsoft JhengHei"/>
+              </a:rPr>
+              <a:t>商業模式、成本、TOWS</a:t>
+            </a:r>
+            <a:endParaRPr sz="1400"/>
+          </a:p>
+        </p:txBody>
+      </p:sp>
+      <p:sp>
+        <p:nvSpPr>
+          <p:cNvPr id="10" name="Shape 8">
+            <a:extLst xmlns:a="http://schemas.openxmlformats.org/drawingml/2006/main">
+              <a:ext uri="{FF2B5EF4-FFF2-40B4-BE49-F238E27FC236}">
+                <a16:creationId xmlns:a16="http://schemas.microsoft.com/office/drawing/2014/main" id="{5AEE99FC-695A-471B-88E0-425C727D2B41}"/>
+              </a:ext>
+            </a:extLst>
+          </p:cNvPr>
+          <p:cNvSpPr>
+            <a:spLocks xmlns:a="http://schemas.openxmlformats.org/drawingml/2006/main" noGrp="1"/>
+          </p:cNvSpPr>
+          <p:nvPr/>
+        </p:nvSpPr>
+        <p:spPr>
+          <a:xfrm xmlns:a="http://schemas.openxmlformats.org/drawingml/2006/main">
+            <a:off x="1170432" y="4480560"/>
+            <a:ext cx="1645920" cy="365760"/>
+          </a:xfrm>
+          <a:prstGeom xmlns:a="http://schemas.openxmlformats.org/drawingml/2006/main" prst="roundRect">
+            <a:avLst>
+              <a:gd name="adj" fmla="val 50000"/>
+            </a:avLst>
+          </a:prstGeom>
+          <a:solidFill xmlns:a="http://schemas.openxmlformats.org/drawingml/2006/main">
+            <a:srgbClr val="E2EDF9"/>
+          </a:solidFill>
+          <a:ln xmlns:a="http://schemas.openxmlformats.org/drawingml/2006/main" w="12700">
+            <a:solidFill>
+              <a:srgbClr val="E2EDF9"/>
+            </a:solidFill>
+            <a:prstDash val="solid"/>
+          </a:ln>
+        </p:spPr>
+        <p:txBody xmlns:a="http://schemas.openxmlformats.org/drawingml/2006/main">
+          <a:bodyPr/>
+          <a:p/>
+        </p:txBody>
+      </p:sp>
+      <p:sp>
+        <p:nvSpPr>
+          <p:cNvPr id="11" name="Text 9">
+            <a:extLst xmlns:a="http://schemas.openxmlformats.org/drawingml/2006/main">
+              <a:ext uri="{FF2B5EF4-FFF2-40B4-BE49-F238E27FC236}">
+                <a16:creationId xmlns:a16="http://schemas.microsoft.com/office/drawing/2014/main" id="{4BAF6D2E-C916-43B4-B39E-A07B8BADE41E}"/>
+              </a:ext>
+            </a:extLst>
+          </p:cNvPr>
+          <p:cNvSpPr>
+            <a:spLocks xmlns:a="http://schemas.openxmlformats.org/drawingml/2006/main" noGrp="1"/>
+          </p:cNvSpPr>
+          <p:nvPr/>
+        </p:nvSpPr>
+        <p:spPr>
+          <a:xfrm xmlns:a="http://schemas.openxmlformats.org/drawingml/2006/main">
+            <a:off x="1170432" y="4480560"/>
+            <a:ext cx="1645920" cy="365760"/>
+          </a:xfrm>
+          <a:prstGeom xmlns:a="http://schemas.openxmlformats.org/drawingml/2006/main" prst="rect">
+            <a:avLst/>
+          </a:prstGeom>
+          <a:noFill xmlns:a="http://schemas.openxmlformats.org/drawingml/2006/main"/>
+        </p:spPr>
+        <p:txBody>
+          <a:bodyPr xmlns:a="http://schemas.openxmlformats.org/drawingml/2006/main" wrap="square" lIns="0" tIns="0" rIns="0" bIns="0" anchor="ctr"/>
+          <a:lstStyle xmlns:a="http://schemas.openxmlformats.org/drawingml/2006/main"/>
+          <a:p xmlns:a="http://schemas.openxmlformats.org/drawingml/2006/main">
+            <a:pPr marL="0" indent="0" algn="ctr">
+              <a:buNone/>
+            </a:pPr>
+            <a:r>
+              <a:rPr sz="1200" b="1">
+                <a:solidFill>
+                  <a:srgbClr val="1F6FB8"/>
+                </a:solidFill>
+                <a:latin typeface="Microsoft JhengHei"/>
+                <a:ea typeface="Microsoft JhengHei"/>
+                <a:cs typeface="Microsoft JhengHei"/>
+              </a:rPr>
+              <a:t>陳威帆</a:t>
+            </a:r>
+            <a:endParaRPr sz="1200"/>
+          </a:p>
+        </p:txBody>
+      </p:sp>
+      <p:sp>
+        <p:nvSpPr>
+          <p:cNvPr id="13" name="Shape 11">
+            <a:extLst xmlns:a="http://schemas.openxmlformats.org/drawingml/2006/main">
+              <a:ext uri="{FF2B5EF4-FFF2-40B4-BE49-F238E27FC236}">
+                <a16:creationId xmlns:a16="http://schemas.microsoft.com/office/drawing/2014/main" id="{C31F49D7-9215-4C44-8DC6-DB022DCC5B10}"/>
+              </a:ext>
+            </a:extLst>
+          </p:cNvPr>
+          <p:cNvSpPr>
+            <a:spLocks xmlns:a="http://schemas.openxmlformats.org/drawingml/2006/main" noGrp="1"/>
+          </p:cNvSpPr>
+          <p:nvPr/>
+        </p:nvSpPr>
+        <p:spPr>
+          <a:xfrm xmlns:a="http://schemas.openxmlformats.org/drawingml/2006/main">
+            <a:off x="3465576" y="1783080"/>
+            <a:ext cx="2523744" cy="3611880"/>
+          </a:xfrm>
+          <a:prstGeom xmlns:a="http://schemas.openxmlformats.org/drawingml/2006/main" prst="roundRect">
+            <a:avLst>
+              <a:gd name="adj" fmla="val 5797"/>
+            </a:avLst>
+          </a:prstGeom>
+          <a:solidFill xmlns:a="http://schemas.openxmlformats.org/drawingml/2006/main">
+            <a:srgbClr val="FFFFFF"/>
+          </a:solidFill>
+          <a:ln xmlns:a="http://schemas.openxmlformats.org/drawingml/2006/main" w="12700">
+            <a:solidFill>
+              <a:srgbClr val="D3DEEA"/>
+            </a:solidFill>
+            <a:prstDash val="solid"/>
+          </a:ln>
+        </p:spPr>
+        <p:txBody xmlns:a="http://schemas.openxmlformats.org/drawingml/2006/main">
+          <a:bodyPr/>
+          <a:p/>
+        </p:txBody>
+      </p:sp>
+      <p:sp>
+        <p:nvSpPr>
+          <p:cNvPr id="14" name="Text 12">
+            <a:extLst xmlns:a="http://schemas.openxmlformats.org/drawingml/2006/main">
+              <a:ext uri="{FF2B5EF4-FFF2-40B4-BE49-F238E27FC236}">
+                <a16:creationId xmlns:a16="http://schemas.microsoft.com/office/drawing/2014/main" id="{C10337B4-99B6-4A74-A890-D45BDC6DB5F0}"/>
+              </a:ext>
+            </a:extLst>
+          </p:cNvPr>
+          <p:cNvSpPr>
+            <a:spLocks xmlns:a="http://schemas.openxmlformats.org/drawingml/2006/main" noGrp="1"/>
+          </p:cNvSpPr>
+          <p:nvPr/>
+        </p:nvSpPr>
+        <p:spPr>
+          <a:xfrm xmlns:a="http://schemas.openxmlformats.org/drawingml/2006/main">
+            <a:off x="3465576" y="2057400"/>
+            <a:ext cx="2523744" cy="731520"/>
+          </a:xfrm>
+          <a:prstGeom xmlns:a="http://schemas.openxmlformats.org/drawingml/2006/main" prst="rect">
+            <a:avLst/>
+          </a:prstGeom>
+          <a:noFill xmlns:a="http://schemas.openxmlformats.org/drawingml/2006/main"/>
+        </p:spPr>
+        <p:txBody>
+          <a:bodyPr xmlns:a="http://schemas.openxmlformats.org/drawingml/2006/main" wrap="square" lIns="0" tIns="0" rIns="0" bIns="0" anchor="ctr"/>
+          <a:lstStyle xmlns:a="http://schemas.openxmlformats.org/drawingml/2006/main"/>
+          <a:p xmlns:a="http://schemas.openxmlformats.org/drawingml/2006/main">
+            <a:pPr marL="0" indent="0" algn="ctr">
+              <a:buNone/>
+            </a:pPr>
+            <a:r>
+              <a:rPr sz="4000" b="1">
+                <a:solidFill>
+                  <a:srgbClr val="D46A12"/>
+                </a:solidFill>
+                <a:latin typeface="Microsoft JhengHei"/>
+                <a:ea typeface="Microsoft JhengHei"/>
+                <a:cs typeface="Microsoft JhengHei"/>
+              </a:rPr>
+              <a:t>02</a:t>
+            </a:r>
+            <a:endParaRPr sz="4000"/>
+          </a:p>
+        </p:txBody>
+      </p:sp>
+      <p:sp>
+        <p:nvSpPr>
+          <p:cNvPr id="15" name="Text 13">
+            <a:extLst xmlns:a="http://schemas.openxmlformats.org/drawingml/2006/main">
+              <a:ext uri="{FF2B5EF4-FFF2-40B4-BE49-F238E27FC236}">
+                <a16:creationId xmlns:a16="http://schemas.microsoft.com/office/drawing/2014/main" id="{AF997F99-60F5-4019-AC65-98BC0805A7C1}"/>
+              </a:ext>
+            </a:extLst>
+          </p:cNvPr>
+          <p:cNvSpPr>
+            <a:spLocks xmlns:a="http://schemas.openxmlformats.org/drawingml/2006/main" noGrp="1"/>
+          </p:cNvSpPr>
+          <p:nvPr/>
+        </p:nvSpPr>
+        <p:spPr>
+          <a:xfrm xmlns:a="http://schemas.openxmlformats.org/drawingml/2006/main">
+            <a:off x="3557016" y="2926080"/>
+            <a:ext cx="2340864" cy="411480"/>
+          </a:xfrm>
+          <a:prstGeom xmlns:a="http://schemas.openxmlformats.org/drawingml/2006/main" prst="rect">
+            <a:avLst/>
+          </a:prstGeom>
+          <a:noFill xmlns:a="http://schemas.openxmlformats.org/drawingml/2006/main"/>
+        </p:spPr>
+        <p:txBody>
+          <a:bodyPr xmlns:a="http://schemas.openxmlformats.org/drawingml/2006/main" wrap="square" lIns="0" tIns="0" rIns="0" bIns="0" anchor="ctr"/>
+          <a:lstStyle xmlns:a="http://schemas.openxmlformats.org/drawingml/2006/main"/>
+          <a:p xmlns:a="http://schemas.openxmlformats.org/drawingml/2006/main">
+            <a:pPr marL="0" indent="0" algn="ctr">
+              <a:buNone/>
+            </a:pPr>
+            <a:r>
+              <a:rPr sz="1800" b="1">
+                <a:solidFill>
+                  <a:srgbClr val="14243A"/>
+                </a:solidFill>
+                <a:latin typeface="Microsoft JhengHei"/>
+                <a:ea typeface="Microsoft JhengHei"/>
+                <a:cs typeface="Microsoft JhengHei"/>
+              </a:rPr>
+              <a:t>怎麼做</a:t>
+            </a:r>
+            <a:endParaRPr sz="1800"/>
+          </a:p>
+        </p:txBody>
+      </p:sp>
+      <p:sp>
+        <p:nvSpPr>
+          <p:cNvPr id="16" name="Text 14">
+            <a:extLst xmlns:a="http://schemas.openxmlformats.org/drawingml/2006/main">
+              <a:ext uri="{FF2B5EF4-FFF2-40B4-BE49-F238E27FC236}">
+                <a16:creationId xmlns:a16="http://schemas.microsoft.com/office/drawing/2014/main" id="{47AC978F-E8EB-4E0A-9110-3579F60DE5F6}"/>
+              </a:ext>
+            </a:extLst>
+          </p:cNvPr>
+          <p:cNvSpPr>
+            <a:spLocks xmlns:a="http://schemas.openxmlformats.org/drawingml/2006/main" noGrp="1"/>
+          </p:cNvSpPr>
+          <p:nvPr/>
+        </p:nvSpPr>
+        <p:spPr>
+          <a:xfrm xmlns:a="http://schemas.openxmlformats.org/drawingml/2006/main">
+            <a:off x="3602736" y="3474720"/>
+            <a:ext cx="2249424" cy="822960"/>
+          </a:xfrm>
+          <a:prstGeom xmlns:a="http://schemas.openxmlformats.org/drawingml/2006/main" prst="rect">
+            <a:avLst/>
+          </a:prstGeom>
+          <a:noFill xmlns:a="http://schemas.openxmlformats.org/drawingml/2006/main"/>
+        </p:spPr>
+        <p:txBody>
+          <a:bodyPr xmlns:a="http://schemas.openxmlformats.org/drawingml/2006/main" wrap="square" lIns="0" tIns="0" rIns="0" bIns="0" anchor="t"/>
+          <a:lstStyle xmlns:a="http://schemas.openxmlformats.org/drawingml/2006/main"/>
+          <a:p xmlns:a="http://schemas.openxmlformats.org/drawingml/2006/main">
+            <a:pPr marL="0" indent="0" algn="ctr">
+              <a:buNone/>
+            </a:pPr>
+            <a:r>
+              <a:rPr sz="1400">
+                <a:solidFill>
+                  <a:srgbClr val="3F546C"/>
+                </a:solidFill>
+                <a:latin typeface="Microsoft JhengHei"/>
+                <a:ea typeface="Microsoft JhengHei"/>
+                <a:cs typeface="Microsoft JhengHei"/>
+              </a:rPr>
+              <a:t>架構、資料收錄</a:t>
+            </a:r>
+            <a:endParaRPr sz="1400"/>
+          </a:p>
+          <a:p xmlns:a="http://schemas.openxmlformats.org/drawingml/2006/main">
+            <a:pPr marL="0" indent="0" algn="ctr">
+              <a:buNone/>
+            </a:pPr>
+            <a:r>
+              <a:rPr sz="1400">
+                <a:solidFill>
+                  <a:srgbClr val="3F546C"/>
+                </a:solidFill>
+                <a:latin typeface="Microsoft JhengHei"/>
+                <a:ea typeface="Microsoft JhengHei"/>
+                <a:cs typeface="Microsoft JhengHei"/>
+              </a:rPr>
+              <a:t>情緒分數一致性</a:t>
+            </a:r>
+            <a:endParaRPr sz="1400"/>
+          </a:p>
+        </p:txBody>
+      </p:sp>
+      <p:sp>
+        <p:nvSpPr>
+          <p:cNvPr id="17" name="Shape 15">
+            <a:extLst xmlns:a="http://schemas.openxmlformats.org/drawingml/2006/main">
+              <a:ext uri="{FF2B5EF4-FFF2-40B4-BE49-F238E27FC236}">
+                <a16:creationId xmlns:a16="http://schemas.microsoft.com/office/drawing/2014/main" id="{D4D8CDB8-C444-4743-ACC4-342DD2E3BE62}"/>
+              </a:ext>
+            </a:extLst>
+          </p:cNvPr>
+          <p:cNvSpPr>
+            <a:spLocks xmlns:a="http://schemas.openxmlformats.org/drawingml/2006/main" noGrp="1"/>
+          </p:cNvSpPr>
+          <p:nvPr/>
+        </p:nvSpPr>
+        <p:spPr>
+          <a:xfrm xmlns:a="http://schemas.openxmlformats.org/drawingml/2006/main">
+            <a:off x="3904488" y="4480560"/>
+            <a:ext cx="1645920" cy="365760"/>
+          </a:xfrm>
+          <a:prstGeom xmlns:a="http://schemas.openxmlformats.org/drawingml/2006/main" prst="roundRect">
+            <a:avLst>
+              <a:gd name="adj" fmla="val 50000"/>
+            </a:avLst>
+          </a:prstGeom>
+          <a:solidFill xmlns:a="http://schemas.openxmlformats.org/drawingml/2006/main">
+            <a:srgbClr val="E2EDF9"/>
+          </a:solidFill>
+          <a:ln xmlns:a="http://schemas.openxmlformats.org/drawingml/2006/main" w="12700">
+            <a:solidFill>
+              <a:srgbClr val="E2EDF9"/>
+            </a:solidFill>
+            <a:prstDash val="solid"/>
+          </a:ln>
+        </p:spPr>
+        <p:txBody xmlns:a="http://schemas.openxmlformats.org/drawingml/2006/main">
+          <a:bodyPr/>
+          <a:p/>
+        </p:txBody>
+      </p:sp>
+      <p:sp>
+        <p:nvSpPr>
+          <p:cNvPr id="18" name="Text 16">
+            <a:extLst xmlns:a="http://schemas.openxmlformats.org/drawingml/2006/main">
+              <a:ext uri="{FF2B5EF4-FFF2-40B4-BE49-F238E27FC236}">
+                <a16:creationId xmlns:a16="http://schemas.microsoft.com/office/drawing/2014/main" id="{D516CD95-4CCA-4E6D-BCAA-68A8E45BCBBE}"/>
+              </a:ext>
+            </a:extLst>
+          </p:cNvPr>
+          <p:cNvSpPr>
+            <a:spLocks xmlns:a="http://schemas.openxmlformats.org/drawingml/2006/main" noGrp="1"/>
+          </p:cNvSpPr>
+          <p:nvPr/>
+        </p:nvSpPr>
+        <p:spPr>
+          <a:xfrm xmlns:a="http://schemas.openxmlformats.org/drawingml/2006/main">
+            <a:off x="3904488" y="4480560"/>
+            <a:ext cx="1645920" cy="365760"/>
+          </a:xfrm>
+          <a:prstGeom xmlns:a="http://schemas.openxmlformats.org/drawingml/2006/main" prst="rect">
+            <a:avLst/>
+          </a:prstGeom>
+          <a:noFill xmlns:a="http://schemas.openxmlformats.org/drawingml/2006/main"/>
+        </p:spPr>
+        <p:txBody>
+          <a:bodyPr xmlns:a="http://schemas.openxmlformats.org/drawingml/2006/main" wrap="square" lIns="0" tIns="0" rIns="0" bIns="0" anchor="ctr"/>
+          <a:lstStyle xmlns:a="http://schemas.openxmlformats.org/drawingml/2006/main"/>
+          <a:p xmlns:a="http://schemas.openxmlformats.org/drawingml/2006/main">
+            <a:pPr marL="0" indent="0" algn="ctr">
+              <a:buNone/>
+            </a:pPr>
+            <a:r>
+              <a:rPr sz="1200" b="1">
+                <a:solidFill>
+                  <a:srgbClr val="1F6FB8"/>
+                </a:solidFill>
+                <a:latin typeface="Microsoft JhengHei"/>
+                <a:ea typeface="Microsoft JhengHei"/>
+                <a:cs typeface="Microsoft JhengHei"/>
+              </a:rPr>
+              <a:t>許家全</a:t>
+            </a:r>
+            <a:endParaRPr sz="1200"/>
+          </a:p>
+        </p:txBody>
+      </p:sp>
+      <p:sp>
+        <p:nvSpPr>
+          <p:cNvPr id="20" name="Shape 18">
+            <a:extLst xmlns:a="http://schemas.openxmlformats.org/drawingml/2006/main">
+              <a:ext uri="{FF2B5EF4-FFF2-40B4-BE49-F238E27FC236}">
+                <a16:creationId xmlns:a16="http://schemas.microsoft.com/office/drawing/2014/main" id="{D58F3A69-E4F1-4209-818B-C2A4109E6CA3}"/>
+              </a:ext>
+            </a:extLst>
+          </p:cNvPr>
+          <p:cNvSpPr>
+            <a:spLocks xmlns:a="http://schemas.openxmlformats.org/drawingml/2006/main" noGrp="1"/>
+          </p:cNvSpPr>
+          <p:nvPr/>
+        </p:nvSpPr>
+        <p:spPr>
+          <a:xfrm xmlns:a="http://schemas.openxmlformats.org/drawingml/2006/main">
+            <a:off x="6199632" y="1783080"/>
+            <a:ext cx="2523744" cy="3611880"/>
+          </a:xfrm>
+          <a:prstGeom xmlns:a="http://schemas.openxmlformats.org/drawingml/2006/main" prst="roundRect">
+            <a:avLst>
+              <a:gd name="adj" fmla="val 5797"/>
+            </a:avLst>
+          </a:prstGeom>
+          <a:solidFill xmlns:a="http://schemas.openxmlformats.org/drawingml/2006/main">
+            <a:srgbClr val="FFFFFF"/>
+          </a:solidFill>
+          <a:ln xmlns:a="http://schemas.openxmlformats.org/drawingml/2006/main" w="12700">
+            <a:solidFill>
+              <a:srgbClr val="D3DEEA"/>
+            </a:solidFill>
+            <a:prstDash val="solid"/>
+          </a:ln>
+        </p:spPr>
+        <p:txBody xmlns:a="http://schemas.openxmlformats.org/drawingml/2006/main">
+          <a:bodyPr/>
+          <a:p/>
+        </p:txBody>
+      </p:sp>
+      <p:sp>
+        <p:nvSpPr>
+          <p:cNvPr id="21" name="Text 19">
+            <a:extLst xmlns:a="http://schemas.openxmlformats.org/drawingml/2006/main">
+              <a:ext uri="{FF2B5EF4-FFF2-40B4-BE49-F238E27FC236}">
+                <a16:creationId xmlns:a16="http://schemas.microsoft.com/office/drawing/2014/main" id="{55FCD0CB-B16A-48F2-A2C8-869F2FB0B929}"/>
+              </a:ext>
+            </a:extLst>
+          </p:cNvPr>
+          <p:cNvSpPr>
+            <a:spLocks xmlns:a="http://schemas.openxmlformats.org/drawingml/2006/main" noGrp="1"/>
+          </p:cNvSpPr>
+          <p:nvPr/>
+        </p:nvSpPr>
+        <p:spPr>
+          <a:xfrm xmlns:a="http://schemas.openxmlformats.org/drawingml/2006/main">
+            <a:off x="6199632" y="2057400"/>
+            <a:ext cx="2523744" cy="731520"/>
+          </a:xfrm>
+          <a:prstGeom xmlns:a="http://schemas.openxmlformats.org/drawingml/2006/main" prst="rect">
+            <a:avLst/>
+          </a:prstGeom>
+          <a:noFill xmlns:a="http://schemas.openxmlformats.org/drawingml/2006/main"/>
+        </p:spPr>
+        <p:txBody>
+          <a:bodyPr xmlns:a="http://schemas.openxmlformats.org/drawingml/2006/main" wrap="square" lIns="0" tIns="0" rIns="0" bIns="0" anchor="ctr"/>
+          <a:lstStyle xmlns:a="http://schemas.openxmlformats.org/drawingml/2006/main"/>
+          <a:p xmlns:a="http://schemas.openxmlformats.org/drawingml/2006/main">
+            <a:pPr marL="0" indent="0" algn="ctr">
+              <a:buNone/>
+            </a:pPr>
+            <a:r>
+              <a:rPr sz="4000" b="1">
+                <a:solidFill>
+                  <a:srgbClr val="D46A12"/>
+                </a:solidFill>
+                <a:latin typeface="Microsoft JhengHei"/>
+                <a:ea typeface="Microsoft JhengHei"/>
+                <a:cs typeface="Microsoft JhengHei"/>
+              </a:rPr>
+              <a:t>03</a:t>
+            </a:r>
+            <a:endParaRPr sz="4000"/>
+          </a:p>
+        </p:txBody>
+      </p:sp>
+      <p:sp>
+        <p:nvSpPr>
+          <p:cNvPr id="22" name="Text 20">
+            <a:extLst xmlns:a="http://schemas.openxmlformats.org/drawingml/2006/main">
+              <a:ext uri="{FF2B5EF4-FFF2-40B4-BE49-F238E27FC236}">
+                <a16:creationId xmlns:a16="http://schemas.microsoft.com/office/drawing/2014/main" id="{FFC4CAFE-9974-4D9D-9A5F-E075DA19299F}"/>
+              </a:ext>
+            </a:extLst>
+          </p:cNvPr>
+          <p:cNvSpPr>
+            <a:spLocks xmlns:a="http://schemas.openxmlformats.org/drawingml/2006/main" noGrp="1"/>
+          </p:cNvSpPr>
+          <p:nvPr/>
+        </p:nvSpPr>
+        <p:spPr>
+          <a:xfrm xmlns:a="http://schemas.openxmlformats.org/drawingml/2006/main">
+            <a:off x="6291072" y="2926080"/>
+            <a:ext cx="2340864" cy="411480"/>
+          </a:xfrm>
+          <a:prstGeom xmlns:a="http://schemas.openxmlformats.org/drawingml/2006/main" prst="rect">
+            <a:avLst/>
+          </a:prstGeom>
+          <a:noFill xmlns:a="http://schemas.openxmlformats.org/drawingml/2006/main"/>
+        </p:spPr>
+        <p:txBody>
+          <a:bodyPr xmlns:a="http://schemas.openxmlformats.org/drawingml/2006/main" wrap="square" lIns="0" tIns="0" rIns="0" bIns="0" anchor="ctr"/>
+          <a:lstStyle xmlns:a="http://schemas.openxmlformats.org/drawingml/2006/main"/>
+          <a:p xmlns:a="http://schemas.openxmlformats.org/drawingml/2006/main">
+            <a:pPr marL="0" indent="0" algn="ctr">
+              <a:buNone/>
+            </a:pPr>
+            <a:r>
+              <a:rPr sz="1800" b="1">
+                <a:solidFill>
+                  <a:srgbClr val="14243A"/>
+                </a:solidFill>
+                <a:latin typeface="Microsoft JhengHei"/>
+                <a:ea typeface="Microsoft JhengHei"/>
+                <a:cs typeface="Microsoft JhengHei"/>
+              </a:rPr>
+              <a:t>做到哪</a:t>
+            </a:r>
+            <a:endParaRPr sz="1800"/>
+          </a:p>
+        </p:txBody>
+      </p:sp>
+      <p:sp>
+        <p:nvSpPr>
+          <p:cNvPr id="23" name="Text 21">
+            <a:extLst xmlns:a="http://schemas.openxmlformats.org/drawingml/2006/main">
+              <a:ext uri="{FF2B5EF4-FFF2-40B4-BE49-F238E27FC236}">
+                <a16:creationId xmlns:a16="http://schemas.microsoft.com/office/drawing/2014/main" id="{9EAD1606-9FAC-437D-BC8B-6FE99C656590}"/>
+              </a:ext>
+            </a:extLst>
+          </p:cNvPr>
+          <p:cNvSpPr>
+            <a:spLocks xmlns:a="http://schemas.openxmlformats.org/drawingml/2006/main" noGrp="1"/>
+          </p:cNvSpPr>
+          <p:nvPr/>
+        </p:nvSpPr>
+        <p:spPr>
+          <a:xfrm xmlns:a="http://schemas.openxmlformats.org/drawingml/2006/main">
+            <a:off x="6336792" y="3474720"/>
+            <a:ext cx="2249424" cy="822960"/>
+          </a:xfrm>
+          <a:prstGeom xmlns:a="http://schemas.openxmlformats.org/drawingml/2006/main" prst="rect">
+            <a:avLst/>
+          </a:prstGeom>
+          <a:noFill xmlns:a="http://schemas.openxmlformats.org/drawingml/2006/main"/>
+        </p:spPr>
+        <p:txBody>
+          <a:bodyPr xmlns:a="http://schemas.openxmlformats.org/drawingml/2006/main" wrap="square" lIns="0" tIns="0" rIns="0" bIns="0" anchor="t"/>
+          <a:lstStyle xmlns:a="http://schemas.openxmlformats.org/drawingml/2006/main"/>
+          <a:p xmlns:a="http://schemas.openxmlformats.org/drawingml/2006/main">
+            <a:pPr marL="0" indent="0" algn="ctr">
+              <a:buNone/>
+            </a:pPr>
+            <a:r>
+              <a:rPr sz="1400">
+                <a:solidFill>
+                  <a:srgbClr val="3F546C"/>
+                </a:solidFill>
+                <a:latin typeface="Microsoft JhengHei"/>
+                <a:ea typeface="Microsoft JhengHei"/>
+                <a:cs typeface="Microsoft JhengHei"/>
+              </a:rPr>
+              <a:t>功能完成度</a:t>
+            </a:r>
+            <a:endParaRPr sz="1400"/>
+          </a:p>
+          <a:p xmlns:a="http://schemas.openxmlformats.org/drawingml/2006/main">
+            <a:pPr marL="0" indent="0" algn="ctr">
+              <a:buNone/>
+            </a:pPr>
+            <a:r>
+              <a:rPr sz="1400">
+                <a:solidFill>
+                  <a:srgbClr val="3F546C"/>
+                </a:solidFill>
+                <a:latin typeface="Microsoft JhengHei"/>
+                <a:ea typeface="Microsoft JhengHei"/>
+                <a:cs typeface="Microsoft JhengHei"/>
+              </a:rPr>
+              <a:t>實機展示</a:t>
+            </a:r>
+            <a:endParaRPr sz="1400"/>
+          </a:p>
+        </p:txBody>
+      </p:sp>
+      <p:sp>
+        <p:nvSpPr>
+          <p:cNvPr id="24" name="Shape 22">
+            <a:extLst xmlns:a="http://schemas.openxmlformats.org/drawingml/2006/main">
+              <a:ext uri="{FF2B5EF4-FFF2-40B4-BE49-F238E27FC236}">
+                <a16:creationId xmlns:a16="http://schemas.microsoft.com/office/drawing/2014/main" id="{77DA017B-2A37-45E1-9BF5-403FD57B71DC}"/>
+              </a:ext>
+            </a:extLst>
+          </p:cNvPr>
+          <p:cNvSpPr>
+            <a:spLocks xmlns:a="http://schemas.openxmlformats.org/drawingml/2006/main" noGrp="1"/>
+          </p:cNvSpPr>
+          <p:nvPr/>
+        </p:nvSpPr>
+        <p:spPr>
+          <a:xfrm xmlns:a="http://schemas.openxmlformats.org/drawingml/2006/main">
+            <a:off x="6638544" y="4480560"/>
+            <a:ext cx="1645920" cy="365760"/>
+          </a:xfrm>
+          <a:prstGeom xmlns:a="http://schemas.openxmlformats.org/drawingml/2006/main" prst="roundRect">
+            <a:avLst>
+              <a:gd name="adj" fmla="val 50000"/>
+            </a:avLst>
+          </a:prstGeom>
+          <a:solidFill xmlns:a="http://schemas.openxmlformats.org/drawingml/2006/main">
+            <a:srgbClr val="E2EDF9"/>
+          </a:solidFill>
+          <a:ln xmlns:a="http://schemas.openxmlformats.org/drawingml/2006/main" w="12700">
+            <a:solidFill>
+              <a:srgbClr val="E2EDF9"/>
+            </a:solidFill>
+            <a:prstDash val="solid"/>
+          </a:ln>
+        </p:spPr>
+        <p:txBody xmlns:a="http://schemas.openxmlformats.org/drawingml/2006/main">
+          <a:bodyPr/>
+          <a:p/>
+        </p:txBody>
+      </p:sp>
+      <p:sp>
+        <p:nvSpPr>
+          <p:cNvPr id="25" name="Text 23">
+            <a:extLst xmlns:a="http://schemas.openxmlformats.org/drawingml/2006/main">
+              <a:ext uri="{FF2B5EF4-FFF2-40B4-BE49-F238E27FC236}">
+                <a16:creationId xmlns:a16="http://schemas.microsoft.com/office/drawing/2014/main" id="{F1F33E70-64EE-4CE5-AFEB-BAA682BF390D}"/>
+              </a:ext>
+            </a:extLst>
+          </p:cNvPr>
+          <p:cNvSpPr>
+            <a:spLocks xmlns:a="http://schemas.openxmlformats.org/drawingml/2006/main" noGrp="1"/>
+          </p:cNvSpPr>
+          <p:nvPr/>
+        </p:nvSpPr>
+        <p:spPr>
+          <a:xfrm xmlns:a="http://schemas.openxmlformats.org/drawingml/2006/main">
+            <a:off x="6638544" y="4480560"/>
+            <a:ext cx="1645920" cy="365760"/>
+          </a:xfrm>
+          <a:prstGeom xmlns:a="http://schemas.openxmlformats.org/drawingml/2006/main" prst="rect">
+            <a:avLst/>
+          </a:prstGeom>
+          <a:noFill xmlns:a="http://schemas.openxmlformats.org/drawingml/2006/main"/>
+        </p:spPr>
+        <p:txBody>
+          <a:bodyPr xmlns:a="http://schemas.openxmlformats.org/drawingml/2006/main" wrap="square" lIns="0" tIns="0" rIns="0" bIns="0" anchor="ctr"/>
+          <a:lstStyle xmlns:a="http://schemas.openxmlformats.org/drawingml/2006/main"/>
+          <a:p xmlns:a="http://schemas.openxmlformats.org/drawingml/2006/main">
+            <a:pPr marL="0" indent="0" algn="ctr">
+              <a:buNone/>
+            </a:pPr>
+            <a:r>
+              <a:rPr sz="1200" b="1">
+                <a:solidFill>
+                  <a:srgbClr val="1F6FB8"/>
+                </a:solidFill>
+                <a:latin typeface="Microsoft JhengHei"/>
+                <a:ea typeface="Microsoft JhengHei"/>
+                <a:cs typeface="Microsoft JhengHei"/>
+              </a:rPr>
+              <a:t>許家全</a:t>
+            </a:r>
+            <a:endParaRPr sz="1200"/>
+          </a:p>
+        </p:txBody>
+      </p:sp>
+      <p:sp>
+        <p:nvSpPr>
+          <p:cNvPr id="27" name="Shape 25">
+            <a:extLst xmlns:a="http://schemas.openxmlformats.org/drawingml/2006/main">
+              <a:ext uri="{FF2B5EF4-FFF2-40B4-BE49-F238E27FC236}">
+                <a16:creationId xmlns:a16="http://schemas.microsoft.com/office/drawing/2014/main" id="{7C005F6A-0FA2-472C-BA57-5ECDD809F898}"/>
+              </a:ext>
+            </a:extLst>
+          </p:cNvPr>
+          <p:cNvSpPr>
+            <a:spLocks xmlns:a="http://schemas.openxmlformats.org/drawingml/2006/main" noGrp="1"/>
+          </p:cNvSpPr>
+          <p:nvPr/>
+        </p:nvSpPr>
+        <p:spPr>
+          <a:xfrm xmlns:a="http://schemas.openxmlformats.org/drawingml/2006/main">
+            <a:off x="8933688" y="1783080"/>
+            <a:ext cx="2523744" cy="3611880"/>
+          </a:xfrm>
+          <a:prstGeom xmlns:a="http://schemas.openxmlformats.org/drawingml/2006/main" prst="roundRect">
+            <a:avLst>
+              <a:gd name="adj" fmla="val 5797"/>
+            </a:avLst>
+          </a:prstGeom>
+          <a:solidFill xmlns:a="http://schemas.openxmlformats.org/drawingml/2006/main">
+            <a:srgbClr val="FFFFFF"/>
+          </a:solidFill>
+          <a:ln xmlns:a="http://schemas.openxmlformats.org/drawingml/2006/main" w="12700">
+            <a:solidFill>
+              <a:srgbClr val="D3DEEA"/>
+            </a:solidFill>
+            <a:prstDash val="solid"/>
+          </a:ln>
+        </p:spPr>
+        <p:txBody xmlns:a="http://schemas.openxmlformats.org/drawingml/2006/main">
+          <a:bodyPr/>
+          <a:p/>
+        </p:txBody>
+      </p:sp>
+      <p:sp>
+        <p:nvSpPr>
+          <p:cNvPr id="28" name="Text 26">
+            <a:extLst xmlns:a="http://schemas.openxmlformats.org/drawingml/2006/main">
+              <a:ext uri="{FF2B5EF4-FFF2-40B4-BE49-F238E27FC236}">
+                <a16:creationId xmlns:a16="http://schemas.microsoft.com/office/drawing/2014/main" id="{5EC66ACC-03AA-43AD-99F2-2E2E732B09E6}"/>
+              </a:ext>
+            </a:extLst>
+          </p:cNvPr>
+          <p:cNvSpPr>
+            <a:spLocks xmlns:a="http://schemas.openxmlformats.org/drawingml/2006/main" noGrp="1"/>
+          </p:cNvSpPr>
+          <p:nvPr/>
+        </p:nvSpPr>
+        <p:spPr>
+          <a:xfrm xmlns:a="http://schemas.openxmlformats.org/drawingml/2006/main">
+            <a:off x="8933688" y="2057400"/>
+            <a:ext cx="2523744" cy="731520"/>
+          </a:xfrm>
+          <a:prstGeom xmlns:a="http://schemas.openxmlformats.org/drawingml/2006/main" prst="rect">
+            <a:avLst/>
+          </a:prstGeom>
+          <a:noFill xmlns:a="http://schemas.openxmlformats.org/drawingml/2006/main"/>
+        </p:spPr>
+        <p:txBody>
+          <a:bodyPr xmlns:a="http://schemas.openxmlformats.org/drawingml/2006/main" wrap="square" lIns="0" tIns="0" rIns="0" bIns="0" anchor="ctr"/>
+          <a:lstStyle xmlns:a="http://schemas.openxmlformats.org/drawingml/2006/main"/>
+          <a:p xmlns:a="http://schemas.openxmlformats.org/drawingml/2006/main">
+            <a:pPr marL="0" indent="0" algn="ctr">
+              <a:buNone/>
+            </a:pPr>
+            <a:r>
+              <a:rPr sz="4000" b="1">
+                <a:solidFill>
+                  <a:srgbClr val="D46A12"/>
+                </a:solidFill>
+                <a:latin typeface="Microsoft JhengHei"/>
+                <a:ea typeface="Microsoft JhengHei"/>
+                <a:cs typeface="Microsoft JhengHei"/>
+              </a:rPr>
+              <a:t>04</a:t>
+            </a:r>
+            <a:endParaRPr sz="4000"/>
+          </a:p>
+        </p:txBody>
+      </p:sp>
+      <p:sp>
+        <p:nvSpPr>
+          <p:cNvPr id="29" name="Text 27">
+            <a:extLst xmlns:a="http://schemas.openxmlformats.org/drawingml/2006/main">
+              <a:ext uri="{FF2B5EF4-FFF2-40B4-BE49-F238E27FC236}">
+                <a16:creationId xmlns:a16="http://schemas.microsoft.com/office/drawing/2014/main" id="{86B147D5-EE5F-4EE7-B372-FF9BA35C5B26}"/>
+              </a:ext>
+            </a:extLst>
+          </p:cNvPr>
+          <p:cNvSpPr>
+            <a:spLocks xmlns:a="http://schemas.openxmlformats.org/drawingml/2006/main" noGrp="1"/>
+          </p:cNvSpPr>
+          <p:nvPr/>
+        </p:nvSpPr>
+        <p:spPr>
+          <a:xfrm xmlns:a="http://schemas.openxmlformats.org/drawingml/2006/main">
+            <a:off x="9025128" y="2926080"/>
+            <a:ext cx="2340864" cy="411480"/>
+          </a:xfrm>
+          <a:prstGeom xmlns:a="http://schemas.openxmlformats.org/drawingml/2006/main" prst="rect">
+            <a:avLst/>
+          </a:prstGeom>
+          <a:noFill xmlns:a="http://schemas.openxmlformats.org/drawingml/2006/main"/>
+        </p:spPr>
+        <p:txBody>
+          <a:bodyPr xmlns:a="http://schemas.openxmlformats.org/drawingml/2006/main" wrap="square" lIns="0" tIns="0" rIns="0" bIns="0" anchor="ctr"/>
+          <a:lstStyle xmlns:a="http://schemas.openxmlformats.org/drawingml/2006/main"/>
+          <a:p xmlns:a="http://schemas.openxmlformats.org/drawingml/2006/main">
+            <a:pPr marL="0" indent="0" algn="ctr">
+              <a:buNone/>
+            </a:pPr>
+            <a:r>
+              <a:rPr sz="1800" b="1">
+                <a:solidFill>
+                  <a:srgbClr val="14243A"/>
+                </a:solidFill>
+                <a:latin typeface="Microsoft JhengHei"/>
+                <a:ea typeface="Microsoft JhengHei"/>
+                <a:cs typeface="Microsoft JhengHei"/>
+              </a:rPr>
+              <a:t>怎麼管、下一步</a:t>
+            </a:r>
+            <a:endParaRPr sz="1800"/>
+          </a:p>
+        </p:txBody>
+      </p:sp>
+      <p:sp>
+        <p:nvSpPr>
+          <p:cNvPr id="30" name="Text 28">
+            <a:extLst xmlns:a="http://schemas.openxmlformats.org/drawingml/2006/main">
+              <a:ext uri="{FF2B5EF4-FFF2-40B4-BE49-F238E27FC236}">
+                <a16:creationId xmlns:a16="http://schemas.microsoft.com/office/drawing/2014/main" id="{AE72B34F-4A9E-4796-BC1D-27A16EA49B38}"/>
+              </a:ext>
+            </a:extLst>
+          </p:cNvPr>
+          <p:cNvSpPr>
+            <a:spLocks xmlns:a="http://schemas.openxmlformats.org/drawingml/2006/main" noGrp="1"/>
+          </p:cNvSpPr>
+          <p:nvPr/>
+        </p:nvSpPr>
+        <p:spPr>
+          <a:xfrm xmlns:a="http://schemas.openxmlformats.org/drawingml/2006/main">
+            <a:off x="9070848" y="3474720"/>
+            <a:ext cx="2249424" cy="822960"/>
+          </a:xfrm>
+          <a:prstGeom xmlns:a="http://schemas.openxmlformats.org/drawingml/2006/main" prst="rect">
+            <a:avLst/>
+          </a:prstGeom>
+          <a:noFill xmlns:a="http://schemas.openxmlformats.org/drawingml/2006/main"/>
+        </p:spPr>
+        <p:txBody>
+          <a:bodyPr xmlns:a="http://schemas.openxmlformats.org/drawingml/2006/main" wrap="square" lIns="0" tIns="0" rIns="0" bIns="0" anchor="t"/>
+          <a:lstStyle xmlns:a="http://schemas.openxmlformats.org/drawingml/2006/main"/>
+          <a:p xmlns:a="http://schemas.openxmlformats.org/drawingml/2006/main">
+            <a:pPr marL="0" indent="0" algn="ctr">
+              <a:buNone/>
+            </a:pPr>
+            <a:r>
+              <a:rPr sz="1400">
+                <a:solidFill>
+                  <a:srgbClr val="3F546C"/>
+                </a:solidFill>
+                <a:latin typeface="Microsoft JhengHei"/>
+                <a:ea typeface="Microsoft JhengHei"/>
+                <a:cs typeface="Microsoft JhengHei"/>
+              </a:rPr>
+              <a:t>時程與 GitHub</a:t>
+            </a:r>
+            <a:endParaRPr sz="1400"/>
+          </a:p>
+          <a:p xmlns:a="http://schemas.openxmlformats.org/drawingml/2006/main">
+            <a:pPr marL="0" indent="0" algn="ctr">
+              <a:buNone/>
+            </a:pPr>
+            <a:r>
+              <a:rPr sz="1400">
+                <a:solidFill>
+                  <a:srgbClr val="3F546C"/>
+                </a:solidFill>
+                <a:latin typeface="Microsoft JhengHei"/>
+                <a:ea typeface="Microsoft JhengHei"/>
+                <a:cs typeface="Microsoft JhengHei"/>
+              </a:rPr>
+              <a:t>分工、結論</a:t>
+            </a:r>
+            <a:endParaRPr sz="1400"/>
+          </a:p>
+        </p:txBody>
+      </p:sp>
+      <p:sp>
+        <p:nvSpPr>
+          <p:cNvPr id="31" name="Shape 29">
+            <a:extLst xmlns:a="http://schemas.openxmlformats.org/drawingml/2006/main">
+              <a:ext uri="{FF2B5EF4-FFF2-40B4-BE49-F238E27FC236}">
+                <a16:creationId xmlns:a16="http://schemas.microsoft.com/office/drawing/2014/main" id="{0FA62E81-73DC-44E5-BDD9-5F76359D6817}"/>
+              </a:ext>
+            </a:extLst>
+          </p:cNvPr>
+          <p:cNvSpPr>
+            <a:spLocks xmlns:a="http://schemas.openxmlformats.org/drawingml/2006/main" noGrp="1"/>
+          </p:cNvSpPr>
+          <p:nvPr/>
+        </p:nvSpPr>
+        <p:spPr>
+          <a:xfrm xmlns:a="http://schemas.openxmlformats.org/drawingml/2006/main">
+            <a:off x="9372600" y="4480560"/>
+            <a:ext cx="1645920" cy="365760"/>
+          </a:xfrm>
+          <a:prstGeom xmlns:a="http://schemas.openxmlformats.org/drawingml/2006/main" prst="roundRect">
+            <a:avLst>
+              <a:gd name="adj" fmla="val 50000"/>
+            </a:avLst>
+          </a:prstGeom>
+          <a:solidFill xmlns:a="http://schemas.openxmlformats.org/drawingml/2006/main">
+            <a:srgbClr val="E2EDF9"/>
+          </a:solidFill>
+          <a:ln xmlns:a="http://schemas.openxmlformats.org/drawingml/2006/main" w="12700">
+            <a:solidFill>
+              <a:srgbClr val="E2EDF9"/>
+            </a:solidFill>
+            <a:prstDash val="solid"/>
+          </a:ln>
+        </p:spPr>
+        <p:txBody xmlns:a="http://schemas.openxmlformats.org/drawingml/2006/main">
+          <a:bodyPr/>
+          <a:p/>
+        </p:txBody>
+      </p:sp>
+      <p:sp>
+        <p:nvSpPr>
+          <p:cNvPr id="32" name="Text 30">
+            <a:extLst xmlns:a="http://schemas.openxmlformats.org/drawingml/2006/main">
+              <a:ext uri="{FF2B5EF4-FFF2-40B4-BE49-F238E27FC236}">
+                <a16:creationId xmlns:a16="http://schemas.microsoft.com/office/drawing/2014/main" id="{5C2C9254-E34F-4B45-9544-6577AE63DB94}"/>
+              </a:ext>
+            </a:extLst>
+          </p:cNvPr>
+          <p:cNvSpPr>
+            <a:spLocks xmlns:a="http://schemas.openxmlformats.org/drawingml/2006/main" noGrp="1"/>
+          </p:cNvSpPr>
+          <p:nvPr/>
+        </p:nvSpPr>
+        <p:spPr>
+          <a:xfrm xmlns:a="http://schemas.openxmlformats.org/drawingml/2006/main">
+            <a:off x="9372600" y="4480560"/>
+            <a:ext cx="1645920" cy="365760"/>
+          </a:xfrm>
+          <a:prstGeom xmlns:a="http://schemas.openxmlformats.org/drawingml/2006/main" prst="rect">
+            <a:avLst/>
+          </a:prstGeom>
+          <a:noFill xmlns:a="http://schemas.openxmlformats.org/drawingml/2006/main"/>
+        </p:spPr>
+        <p:txBody>
+          <a:bodyPr xmlns:a="http://schemas.openxmlformats.org/drawingml/2006/main" wrap="square" lIns="0" tIns="0" rIns="0" bIns="0" anchor="ctr"/>
+          <a:lstStyle xmlns:a="http://schemas.openxmlformats.org/drawingml/2006/main"/>
+          <a:p xmlns:a="http://schemas.openxmlformats.org/drawingml/2006/main">
+            <a:pPr marL="0" indent="0" algn="ctr">
+              <a:buNone/>
+            </a:pPr>
+            <a:r>
+              <a:rPr sz="1200" b="1">
+                <a:solidFill>
+                  <a:srgbClr val="1F6FB8"/>
+                </a:solidFill>
+                <a:latin typeface="Microsoft JhengHei"/>
+                <a:ea typeface="Microsoft JhengHei"/>
+                <a:cs typeface="Microsoft JhengHei"/>
+              </a:rPr>
+              <a:t>陳威帆</a:t>
+            </a:r>
+            <a:endParaRPr sz="1200"/>
+          </a:p>
+        </p:txBody>
+      </p:sp>
+      <p:sp>
+        <p:nvSpPr>
+          <p:cNvPr id="34" name="Shape 32">
+            <a:extLst xmlns:a="http://schemas.openxmlformats.org/drawingml/2006/main">
+              <a:ext uri="{FF2B5EF4-FFF2-40B4-BE49-F238E27FC236}">
+                <a16:creationId xmlns:a16="http://schemas.microsoft.com/office/drawing/2014/main" id="{6E43DCBC-DD71-4B89-9A82-763A4CCBB094}"/>
+              </a:ext>
+            </a:extLst>
+          </p:cNvPr>
+          <p:cNvSpPr>
+            <a:spLocks xmlns:a="http://schemas.openxmlformats.org/drawingml/2006/main" noGrp="1"/>
+          </p:cNvSpPr>
+          <p:nvPr/>
+        </p:nvSpPr>
+        <p:spPr>
+          <a:xfrm xmlns:a="http://schemas.openxmlformats.org/drawingml/2006/main">
+            <a:off x="731520" y="5669280"/>
+            <a:ext cx="10725912" cy="457200"/>
+          </a:xfrm>
+          <a:prstGeom xmlns:a="http://schemas.openxmlformats.org/drawingml/2006/main" prst="roundRect">
+            <a:avLst>
+              <a:gd name="adj" fmla="val 24000"/>
+            </a:avLst>
+          </a:prstGeom>
+          <a:solidFill xmlns:a="http://schemas.openxmlformats.org/drawingml/2006/main">
+            <a:srgbClr val="E2EDF9"/>
+          </a:solidFill>
+          <a:ln xmlns:a="http://schemas.openxmlformats.org/drawingml/2006/main" w="12700">
+            <a:solidFill>
+              <a:srgbClr val="E2EDF9"/>
+            </a:solidFill>
+            <a:prstDash val="solid"/>
+          </a:ln>
+        </p:spPr>
+        <p:txBody xmlns:a="http://schemas.openxmlformats.org/drawingml/2006/main">
+          <a:bodyPr/>
+          <a:p/>
+        </p:txBody>
+      </p:sp>
+      <p:sp>
+        <p:nvSpPr>
+          <p:cNvPr id="35" name="Text 33">
+            <a:extLst xmlns:a="http://schemas.openxmlformats.org/drawingml/2006/main">
+              <a:ext uri="{FF2B5EF4-FFF2-40B4-BE49-F238E27FC236}">
+                <a16:creationId xmlns:a16="http://schemas.microsoft.com/office/drawing/2014/main" id="{489D0AC0-8472-49F9-9FBA-762EF44ACA57}"/>
+              </a:ext>
+            </a:extLst>
+          </p:cNvPr>
+          <p:cNvSpPr>
+            <a:spLocks xmlns:a="http://schemas.openxmlformats.org/drawingml/2006/main" noGrp="1"/>
+          </p:cNvSpPr>
+          <p:nvPr/>
+        </p:nvSpPr>
+        <p:spPr>
+          <a:xfrm xmlns:a="http://schemas.openxmlformats.org/drawingml/2006/main">
+            <a:off x="731520" y="5669280"/>
+            <a:ext cx="10725912" cy="457200"/>
+          </a:xfrm>
+          <a:prstGeom xmlns:a="http://schemas.openxmlformats.org/drawingml/2006/main" prst="rect">
+            <a:avLst/>
+          </a:prstGeom>
+          <a:noFill xmlns:a="http://schemas.openxmlformats.org/drawingml/2006/main"/>
+        </p:spPr>
+        <p:txBody>
+          <a:bodyPr xmlns:a="http://schemas.openxmlformats.org/drawingml/2006/main" wrap="square" lIns="0" tIns="0" rIns="0" bIns="0" anchor="ctr"/>
+          <a:lstStyle xmlns:a="http://schemas.openxmlformats.org/drawingml/2006/main"/>
+          <a:p xmlns:a="http://schemas.openxmlformats.org/drawingml/2006/main">
+            <a:pPr marL="0" indent="0" algn="ctr">
+              <a:buNone/>
+            </a:pPr>
+            <a:r>
+              <a:rPr sz="1400" b="1">
+                <a:solidFill>
+                  <a:srgbClr val="1F6FB8"/>
+                </a:solidFill>
+                <a:latin typeface="Microsoft JhengHei"/>
+                <a:ea typeface="Microsoft JhengHei"/>
+                <a:cs typeface="Microsoft JhengHei"/>
+              </a:rPr>
+              <a:t>16 項初評意見與回應頁碼，逐條對照於附錄 A、B</a:t>
+            </a:r>
+            <a:endParaRPr sz="1400"/>
+          </a:p>
+        </p:txBody>
+      </p:sp>
+      <p:sp>
+        <p:nvSpPr>
+          <p:cNvPr id="37" name="02">
+            <a:extLst xmlns:a="http://schemas.openxmlformats.org/drawingml/2006/main">
+              <a:ext uri="{FF2B5EF4-FFF2-40B4-BE49-F238E27FC236}">
+                <a16:creationId xmlns:a16="http://schemas.microsoft.com/office/drawing/2014/main" id="{5530B98C-4B3A-4176-8E77-B202184269E0}"/>
+              </a:ext>
+            </a:extLst>
+          </p:cNvPr>
+          <p:cNvSpPr>
+            <a:spLocks xmlns:a="http://schemas.openxmlformats.org/drawingml/2006/main" noGrp="1"/>
+          </p:cNvSpPr>
+          <p:nvPr/>
+        </p:nvSpPr>
+        <p:spPr>
+          <a:xfrm xmlns:a="http://schemas.openxmlformats.org/drawingml/2006/main">
+            <a:off x="733425" y="6391275"/>
+            <a:ext cx="762000" cy="257175"/>
+          </a:xfrm>
+          <a:prstGeom xmlns:a="http://schemas.openxmlformats.org/drawingml/2006/main" prst="rect">
+            <a:avLst/>
+          </a:prstGeom>
+          <a:noFill xmlns:a="http://schemas.openxmlformats.org/drawingml/2006/main"/>
+          <a:ln xmlns:a="http://schemas.openxmlformats.org/drawingml/2006/main" w="0">
+            <a:noFill/>
+          </a:ln>
+        </p:spPr>
+        <p:txBody>
+          <a:bodyPr xmlns:a="http://schemas.openxmlformats.org/drawingml/2006/main" lIns="0" tIns="0" rIns="0" bIns="0"/>
+          <a:lstStyle xmlns:a="http://schemas.openxmlformats.org/drawingml/2006/main">
+            <a:defPPr>
+              <a:defRPr sz="1275" b="0">
+                <a:solidFill>
+                  <a:srgbClr val="465E78"/>
+                </a:solidFill>
+              </a:defRPr>
+            </a:defPPr>
+          </a:lstStyle>
+          <a:p xmlns:a="http://schemas.openxmlformats.org/drawingml/2006/main">
+            <a:pPr>
+              <a:buNone/>
+              <a:defRPr sz="1275" b="0">
+                <a:solidFill>
+                  <a:srgbClr val="465E78"/>
+                </a:solidFill>
+              </a:defRPr>
+            </a:pPr>
+            <a:r>
+              <a:rPr sz="1275" b="0">
+                <a:solidFill>
+                  <a:srgbClr val="465E78"/>
+                </a:solidFill>
+              </a:rPr>
+              <a:t>02</a:t>
+            </a:r>
+          </a:p>
+        </p:txBody>
+      </p:sp>
+    </p:spTree>
+    <p:extLst>
+      <p:ext uri="{BB962C8B-B14F-4D97-AF65-F5344CB8AC3E}">
+        <p14:creationId xmlns:p14="http://schemas.microsoft.com/office/powerpoint/2010/main" val="1909388751"/>
+      </p:ext>
+    </p:extLst>
+  </p:cSld>
+</p:sld>
+</file>
+
+<file path=ppt/slides/slide20.xml><?xml version="1.0" encoding="utf-8"?>
 <p:sld xmlns:p="http://schemas.openxmlformats.org/presentationml/2006/main" show="0">
   <p:cSld>
     <p:bg>
@@ -18003,7 +18003,7 @@
 </p:sld>
 </file>
 
-<file path=ppt/slides/slide22.xml><?xml version="1.0" encoding="utf-8"?>
+<file path=ppt/slides/slide21.xml><?xml version="1.0" encoding="utf-8"?>
 <p:sld xmlns:p="http://schemas.openxmlformats.org/presentationml/2006/main" show="0">
   <p:cSld>
     <p:bg>
@@ -18777,6 +18777,275 @@
 </p:sld>
 </file>
 
+<file path=ppt/slides/slide22.xml><?xml version="1.0" encoding="utf-8"?>
+<p:sld xmlns:p="http://schemas.openxmlformats.org/presentationml/2006/main" show="0">
+  <p:cSld>
+    <p:bg>
+      <p:bgPr>
+        <a:solidFill xmlns:a="http://schemas.openxmlformats.org/drawingml/2006/main">
+          <a:srgbClr val="F5F8FC"/>
+        </a:solidFill>
+      </p:bgPr>
+    </p:bg>
+    <p:spTree>
+      <p:nvGrpSpPr>
+        <p:cNvPr id="1" name=""/>
+        <p:cNvGrpSpPr/>
+        <p:nvPr/>
+      </p:nvGrpSpPr>
+      <p:grpSpPr>
+        <a:xfrm xmlns:a="http://schemas.openxmlformats.org/drawingml/2006/main"/>
+      </p:grpSpPr>
+      <p:sp>
+        <p:nvSpPr>
+          <p:cNvPr id="2" name="AI 問答：從回答回到引用文章">
+            <a:extLst xmlns:a="http://schemas.openxmlformats.org/drawingml/2006/main">
+              <a:ext uri="{FF2B5EF4-FFF2-40B4-BE49-F238E27FC236}">
+                <a16:creationId xmlns:a16="http://schemas.microsoft.com/office/drawing/2014/main" id="{CD4E88AE-E5B8-4FC4-AFE2-AC0F898C4A3F}"/>
+              </a:ext>
+            </a:extLst>
+          </p:cNvPr>
+          <p:cNvSpPr>
+            <a:spLocks xmlns:a="http://schemas.openxmlformats.org/drawingml/2006/main" noGrp="1"/>
+          </p:cNvSpPr>
+          <p:nvPr/>
+        </p:nvSpPr>
+        <p:spPr>
+          <a:xfrm xmlns:a="http://schemas.openxmlformats.org/drawingml/2006/main">
+            <a:off x="733425" y="933450"/>
+            <a:ext cx="10725150" cy="619125"/>
+          </a:xfrm>
+          <a:prstGeom xmlns:a="http://schemas.openxmlformats.org/drawingml/2006/main" prst="rect">
+            <a:avLst/>
+          </a:prstGeom>
+          <a:noFill xmlns:a="http://schemas.openxmlformats.org/drawingml/2006/main"/>
+          <a:ln xmlns:a="http://schemas.openxmlformats.org/drawingml/2006/main" w="0">
+            <a:noFill/>
+          </a:ln>
+        </p:spPr>
+        <p:txBody>
+          <a:bodyPr xmlns:a="http://schemas.openxmlformats.org/drawingml/2006/main" lIns="0" tIns="0" rIns="0" bIns="0"/>
+          <a:lstStyle xmlns:a="http://schemas.openxmlformats.org/drawingml/2006/main">
+            <a:defPPr>
+              <a:defRPr sz="2700" b="1">
+                <a:solidFill>
+                  <a:srgbClr val="14243A"/>
+                </a:solidFill>
+              </a:defRPr>
+            </a:defPPr>
+          </a:lstStyle>
+          <a:p xmlns:a="http://schemas.openxmlformats.org/drawingml/2006/main">
+            <a:pPr>
+              <a:buNone/>
+              <a:defRPr sz="2700" b="1">
+                <a:solidFill>
+                  <a:srgbClr val="14243A"/>
+                </a:solidFill>
+              </a:defRPr>
+            </a:pPr>
+            <a:r>
+              <a:rPr sz="2700" b="1">
+                <a:solidFill>
+                  <a:srgbClr val="14243A"/>
+                </a:solidFill>
+              </a:rPr>
+              <a:t>附錄 D｜AI 問答：從回答回到引用文章</a:t>
+            </a:r>
+          </a:p>
+        </p:txBody>
+      </p:sp>
+      <p:pic>
+        <p:nvPicPr>
+          <p:cNvPr id="3" name="">
+            <a:extLst xmlns:a="http://schemas.openxmlformats.org/drawingml/2006/main">
+              <a:ext uri="{FF2B5EF4-FFF2-40B4-BE49-F238E27FC236}">
+                <a16:creationId xmlns:a16="http://schemas.microsoft.com/office/drawing/2014/main" id="{F9A1255E-DF0F-4CF2-8509-CAAC797998DE}"/>
+              </a:ext>
+            </a:extLst>
+          </p:cNvPr>
+          <p:cNvPicPr>
+            <a:picLocks xmlns:a="http://schemas.openxmlformats.org/drawingml/2006/main" noChangeAspect="1"/>
+          </p:cNvPicPr>
+          <p:nvPr/>
+        </p:nvPicPr>
+        <p:blipFill>
+          <a:blip xmlns:r="http://schemas.openxmlformats.org/officeDocument/2006/relationships" xmlns:a="http://schemas.openxmlformats.org/drawingml/2006/main" r:embed="R1525623db041404b"/>
+          <a:stretch xmlns:a="http://schemas.openxmlformats.org/drawingml/2006/main"/>
+        </p:blipFill>
+        <p:spPr>
+          <a:xfrm xmlns:a="http://schemas.openxmlformats.org/drawingml/2006/main">
+            <a:off x="2819400" y="1695450"/>
+            <a:ext cx="6553200" cy="4095750"/>
+          </a:xfrm>
+          <a:prstGeom xmlns:a="http://schemas.openxmlformats.org/drawingml/2006/main" prst="rect">
+            <a:avLst/>
+          </a:prstGeom>
+        </p:spPr>
+      </p:pic>
+      <p:sp>
+        <p:nvSpPr>
+          <p:cNvPr id="4" name="">
+            <a:extLst xmlns:a="http://schemas.openxmlformats.org/drawingml/2006/main">
+              <a:ext uri="{FF2B5EF4-FFF2-40B4-BE49-F238E27FC236}">
+                <a16:creationId xmlns:a16="http://schemas.microsoft.com/office/drawing/2014/main" id="{660746D0-4EA9-4B28-B657-30B4A22C5691}"/>
+              </a:ext>
+            </a:extLst>
+          </p:cNvPr>
+          <p:cNvSpPr>
+            <a:spLocks xmlns:a="http://schemas.openxmlformats.org/drawingml/2006/main" noGrp="1"/>
+          </p:cNvSpPr>
+          <p:nvPr/>
+        </p:nvSpPr>
+        <p:spPr>
+          <a:xfrm xmlns:a="http://schemas.openxmlformats.org/drawingml/2006/main">
+            <a:off x="733425" y="5743575"/>
+            <a:ext cx="10725150" cy="514350"/>
+          </a:xfrm>
+          <a:prstGeom xmlns:a="http://schemas.openxmlformats.org/drawingml/2006/main" prst="roundRect">
+            <a:avLst>
+              <a:gd name="adj" fmla="val 25926"/>
+            </a:avLst>
+          </a:prstGeom>
+          <a:solidFill xmlns:a="http://schemas.openxmlformats.org/drawingml/2006/main">
+            <a:srgbClr val="E2EEFA"/>
+          </a:solidFill>
+          <a:ln xmlns:a="http://schemas.openxmlformats.org/drawingml/2006/main" w="9525">
+            <a:solidFill>
+              <a:srgbClr val="D3DEEA"/>
+            </a:solidFill>
+          </a:ln>
+        </p:spPr>
+        <p:txBody xmlns:a="http://schemas.openxmlformats.org/drawingml/2006/main">
+          <a:bodyPr/>
+          <a:p/>
+        </p:txBody>
+      </p:sp>
+      <p:sp>
+        <p:nvSpPr>
+          <p:cNvPr id="5" name="既有管理員操作截圖（2026/10/07）；示範引用回查，不">
+            <a:extLst xmlns:a="http://schemas.openxmlformats.org/drawingml/2006/main">
+              <a:ext uri="{FF2B5EF4-FFF2-40B4-BE49-F238E27FC236}">
+                <a16:creationId xmlns:a16="http://schemas.microsoft.com/office/drawing/2014/main" id="{E70FBA50-1BEB-4C84-BBA4-850692405AA7}"/>
+              </a:ext>
+            </a:extLst>
+          </p:cNvPr>
+          <p:cNvSpPr>
+            <a:spLocks xmlns:a="http://schemas.openxmlformats.org/drawingml/2006/main" noGrp="1"/>
+          </p:cNvSpPr>
+          <p:nvPr/>
+        </p:nvSpPr>
+        <p:spPr>
+          <a:xfrm xmlns:a="http://schemas.openxmlformats.org/drawingml/2006/main">
+            <a:off x="914400" y="5857875"/>
+            <a:ext cx="10363200" cy="304800"/>
+          </a:xfrm>
+          <a:prstGeom xmlns:a="http://schemas.openxmlformats.org/drawingml/2006/main" prst="rect">
+            <a:avLst/>
+          </a:prstGeom>
+          <a:noFill xmlns:a="http://schemas.openxmlformats.org/drawingml/2006/main"/>
+          <a:ln xmlns:a="http://schemas.openxmlformats.org/drawingml/2006/main" w="0">
+            <a:noFill/>
+          </a:ln>
+        </p:spPr>
+        <p:txBody>
+          <a:bodyPr xmlns:a="http://schemas.openxmlformats.org/drawingml/2006/main" lIns="0" tIns="0" rIns="0" bIns="0"/>
+          <a:lstStyle xmlns:a="http://schemas.openxmlformats.org/drawingml/2006/main">
+            <a:defPPr>
+              <a:defRPr sz="1500" b="1">
+                <a:solidFill>
+                  <a:srgbClr val="2073BE"/>
+                </a:solidFill>
+              </a:defRPr>
+            </a:defPPr>
+          </a:lstStyle>
+          <a:p xmlns:a="http://schemas.openxmlformats.org/drawingml/2006/main">
+            <a:pPr>
+              <a:buNone/>
+              <a:defRPr sz="1500" b="1">
+                <a:solidFill>
+                  <a:srgbClr val="2073BE"/>
+                </a:solidFill>
+              </a:defRPr>
+            </a:pPr>
+            <a:r>
+              <a:rPr sz="1500" b="1">
+                <a:solidFill>
+                  <a:srgbClr val="2073BE"/>
+                </a:solidFill>
+              </a:rPr>
+              <a:t>既有管理員操作截圖（2026/10/07）；示範引用回查，不代表即時服務狀態。</a:t>
+            </a:r>
+          </a:p>
+        </p:txBody>
+      </p:sp>
+      <p:sp>
+        <p:nvSpPr>
+          <p:cNvPr id="6" name="23">
+            <a:extLst xmlns:a="http://schemas.openxmlformats.org/drawingml/2006/main">
+              <a:ext uri="{FF2B5EF4-FFF2-40B4-BE49-F238E27FC236}">
+                <a16:creationId xmlns:a16="http://schemas.microsoft.com/office/drawing/2014/main" id="{3D9CCD87-5EA3-481E-AD2D-07ADB22B71CE}"/>
+              </a:ext>
+            </a:extLst>
+          </p:cNvPr>
+          <p:cNvSpPr>
+            <a:spLocks xmlns:a="http://schemas.openxmlformats.org/drawingml/2006/main" noGrp="1"/>
+          </p:cNvSpPr>
+          <p:nvPr/>
+        </p:nvSpPr>
+        <p:spPr>
+          <a:xfrm xmlns:a="http://schemas.openxmlformats.org/drawingml/2006/main">
+            <a:off x="733425" y="6391275"/>
+            <a:ext cx="762000" cy="257175"/>
+          </a:xfrm>
+          <a:prstGeom xmlns:a="http://schemas.openxmlformats.org/drawingml/2006/main" prst="rect">
+            <a:avLst/>
+          </a:prstGeom>
+          <a:noFill xmlns:a="http://schemas.openxmlformats.org/drawingml/2006/main"/>
+          <a:ln xmlns:a="http://schemas.openxmlformats.org/drawingml/2006/main" w="0">
+            <a:noFill/>
+          </a:ln>
+        </p:spPr>
+        <p:txBody>
+          <a:bodyPr xmlns:a="http://schemas.openxmlformats.org/drawingml/2006/main" lIns="0" tIns="0" rIns="0" bIns="0"/>
+          <a:lstStyle xmlns:a="http://schemas.openxmlformats.org/drawingml/2006/main">
+            <a:defPPr>
+              <a:defRPr sz="1275" b="0">
+                <a:solidFill>
+                  <a:srgbClr val="465E78"/>
+                </a:solidFill>
+              </a:defRPr>
+            </a:defPPr>
+          </a:lstStyle>
+          <a:p xmlns:a="http://schemas.openxmlformats.org/drawingml/2006/main">
+            <a:pPr>
+              <a:buNone/>
+              <a:defRPr sz="1275" b="0">
+                <a:solidFill>
+                  <a:srgbClr val="465E78"/>
+                </a:solidFill>
+              </a:defRPr>
+            </a:pPr>
+            <a:r>
+              <a:rPr sz="1275" b="0">
+                <a:solidFill>
+                  <a:srgbClr val="465E78"/>
+                </a:solidFill>
+              </a:rPr>
+              <a:t>22</a:t>
+            </a:r>
+          </a:p>
+        </p:txBody>
+      </p:sp>
+    </p:spTree>
+    <p:extLst>
+      <p:ext uri="{BB962C8B-B14F-4D97-AF65-F5344CB8AC3E}">
+        <p14:creationId xmlns:p14="http://schemas.microsoft.com/office/powerpoint/2010/main" val="139713143"/>
+      </p:ext>
+    </p:extLst>
+  </p:cSld>
+</p:sld>
+</file>
+
 <file path=ppt/slides/slide23.xml><?xml version="1.0" encoding="utf-8"?>
 <p:sld xmlns:p="http://schemas.openxmlformats.org/presentationml/2006/main" show="0">
   <p:cSld>
@@ -18798,275 +19067,6 @@
       </p:grpSpPr>
       <p:sp>
         <p:nvSpPr>
-          <p:cNvPr id="2" name="AI 問答：從回答回到引用文章">
-            <a:extLst xmlns:a="http://schemas.openxmlformats.org/drawingml/2006/main">
-              <a:ext uri="{FF2B5EF4-FFF2-40B4-BE49-F238E27FC236}">
-                <a16:creationId xmlns:a16="http://schemas.microsoft.com/office/drawing/2014/main" id="{CD4E88AE-E5B8-4FC4-AFE2-AC0F898C4A3F}"/>
-              </a:ext>
-            </a:extLst>
-          </p:cNvPr>
-          <p:cNvSpPr>
-            <a:spLocks xmlns:a="http://schemas.openxmlformats.org/drawingml/2006/main" noGrp="1"/>
-          </p:cNvSpPr>
-          <p:nvPr/>
-        </p:nvSpPr>
-        <p:spPr>
-          <a:xfrm xmlns:a="http://schemas.openxmlformats.org/drawingml/2006/main">
-            <a:off x="733425" y="933450"/>
-            <a:ext cx="10725150" cy="619125"/>
-          </a:xfrm>
-          <a:prstGeom xmlns:a="http://schemas.openxmlformats.org/drawingml/2006/main" prst="rect">
-            <a:avLst/>
-          </a:prstGeom>
-          <a:noFill xmlns:a="http://schemas.openxmlformats.org/drawingml/2006/main"/>
-          <a:ln xmlns:a="http://schemas.openxmlformats.org/drawingml/2006/main" w="0">
-            <a:noFill/>
-          </a:ln>
-        </p:spPr>
-        <p:txBody>
-          <a:bodyPr xmlns:a="http://schemas.openxmlformats.org/drawingml/2006/main" lIns="0" tIns="0" rIns="0" bIns="0"/>
-          <a:lstStyle xmlns:a="http://schemas.openxmlformats.org/drawingml/2006/main">
-            <a:defPPr>
-              <a:defRPr sz="2700" b="1">
-                <a:solidFill>
-                  <a:srgbClr val="14243A"/>
-                </a:solidFill>
-              </a:defRPr>
-            </a:defPPr>
-          </a:lstStyle>
-          <a:p xmlns:a="http://schemas.openxmlformats.org/drawingml/2006/main">
-            <a:pPr>
-              <a:buNone/>
-              <a:defRPr sz="2700" b="1">
-                <a:solidFill>
-                  <a:srgbClr val="14243A"/>
-                </a:solidFill>
-              </a:defRPr>
-            </a:pPr>
-            <a:r>
-              <a:rPr sz="2700" b="1">
-                <a:solidFill>
-                  <a:srgbClr val="14243A"/>
-                </a:solidFill>
-              </a:rPr>
-              <a:t>附錄 D｜AI 問答：從回答回到引用文章</a:t>
-            </a:r>
-          </a:p>
-        </p:txBody>
-      </p:sp>
-      <p:pic>
-        <p:nvPicPr>
-          <p:cNvPr id="3" name="">
-            <a:extLst xmlns:a="http://schemas.openxmlformats.org/drawingml/2006/main">
-              <a:ext uri="{FF2B5EF4-FFF2-40B4-BE49-F238E27FC236}">
-                <a16:creationId xmlns:a16="http://schemas.microsoft.com/office/drawing/2014/main" id="{F9A1255E-DF0F-4CF2-8509-CAAC797998DE}"/>
-              </a:ext>
-            </a:extLst>
-          </p:cNvPr>
-          <p:cNvPicPr>
-            <a:picLocks xmlns:a="http://schemas.openxmlformats.org/drawingml/2006/main" noChangeAspect="1"/>
-          </p:cNvPicPr>
-          <p:nvPr/>
-        </p:nvPicPr>
-        <p:blipFill>
-          <a:blip xmlns:r="http://schemas.openxmlformats.org/officeDocument/2006/relationships" xmlns:a="http://schemas.openxmlformats.org/drawingml/2006/main" r:embed="R1525623db041404b"/>
-          <a:stretch xmlns:a="http://schemas.openxmlformats.org/drawingml/2006/main"/>
-        </p:blipFill>
-        <p:spPr>
-          <a:xfrm xmlns:a="http://schemas.openxmlformats.org/drawingml/2006/main">
-            <a:off x="2819400" y="1695450"/>
-            <a:ext cx="6553200" cy="4095750"/>
-          </a:xfrm>
-          <a:prstGeom xmlns:a="http://schemas.openxmlformats.org/drawingml/2006/main" prst="rect">
-            <a:avLst/>
-          </a:prstGeom>
-        </p:spPr>
-      </p:pic>
-      <p:sp>
-        <p:nvSpPr>
-          <p:cNvPr id="4" name="">
-            <a:extLst xmlns:a="http://schemas.openxmlformats.org/drawingml/2006/main">
-              <a:ext uri="{FF2B5EF4-FFF2-40B4-BE49-F238E27FC236}">
-                <a16:creationId xmlns:a16="http://schemas.microsoft.com/office/drawing/2014/main" id="{660746D0-4EA9-4B28-B657-30B4A22C5691}"/>
-              </a:ext>
-            </a:extLst>
-          </p:cNvPr>
-          <p:cNvSpPr>
-            <a:spLocks xmlns:a="http://schemas.openxmlformats.org/drawingml/2006/main" noGrp="1"/>
-          </p:cNvSpPr>
-          <p:nvPr/>
-        </p:nvSpPr>
-        <p:spPr>
-          <a:xfrm xmlns:a="http://schemas.openxmlformats.org/drawingml/2006/main">
-            <a:off x="733425" y="5743575"/>
-            <a:ext cx="10725150" cy="514350"/>
-          </a:xfrm>
-          <a:prstGeom xmlns:a="http://schemas.openxmlformats.org/drawingml/2006/main" prst="roundRect">
-            <a:avLst>
-              <a:gd name="adj" fmla="val 25926"/>
-            </a:avLst>
-          </a:prstGeom>
-          <a:solidFill xmlns:a="http://schemas.openxmlformats.org/drawingml/2006/main">
-            <a:srgbClr val="E2EEFA"/>
-          </a:solidFill>
-          <a:ln xmlns:a="http://schemas.openxmlformats.org/drawingml/2006/main" w="9525">
-            <a:solidFill>
-              <a:srgbClr val="D3DEEA"/>
-            </a:solidFill>
-          </a:ln>
-        </p:spPr>
-        <p:txBody xmlns:a="http://schemas.openxmlformats.org/drawingml/2006/main">
-          <a:bodyPr/>
-          <a:p/>
-        </p:txBody>
-      </p:sp>
-      <p:sp>
-        <p:nvSpPr>
-          <p:cNvPr id="5" name="既有管理員操作截圖（2026/10/07）；示範引用回查，不">
-            <a:extLst xmlns:a="http://schemas.openxmlformats.org/drawingml/2006/main">
-              <a:ext uri="{FF2B5EF4-FFF2-40B4-BE49-F238E27FC236}">
-                <a16:creationId xmlns:a16="http://schemas.microsoft.com/office/drawing/2014/main" id="{E70FBA50-1BEB-4C84-BBA4-850692405AA7}"/>
-              </a:ext>
-            </a:extLst>
-          </p:cNvPr>
-          <p:cNvSpPr>
-            <a:spLocks xmlns:a="http://schemas.openxmlformats.org/drawingml/2006/main" noGrp="1"/>
-          </p:cNvSpPr>
-          <p:nvPr/>
-        </p:nvSpPr>
-        <p:spPr>
-          <a:xfrm xmlns:a="http://schemas.openxmlformats.org/drawingml/2006/main">
-            <a:off x="914400" y="5857875"/>
-            <a:ext cx="10363200" cy="304800"/>
-          </a:xfrm>
-          <a:prstGeom xmlns:a="http://schemas.openxmlformats.org/drawingml/2006/main" prst="rect">
-            <a:avLst/>
-          </a:prstGeom>
-          <a:noFill xmlns:a="http://schemas.openxmlformats.org/drawingml/2006/main"/>
-          <a:ln xmlns:a="http://schemas.openxmlformats.org/drawingml/2006/main" w="0">
-            <a:noFill/>
-          </a:ln>
-        </p:spPr>
-        <p:txBody>
-          <a:bodyPr xmlns:a="http://schemas.openxmlformats.org/drawingml/2006/main" lIns="0" tIns="0" rIns="0" bIns="0"/>
-          <a:lstStyle xmlns:a="http://schemas.openxmlformats.org/drawingml/2006/main">
-            <a:defPPr>
-              <a:defRPr sz="1500" b="1">
-                <a:solidFill>
-                  <a:srgbClr val="2073BE"/>
-                </a:solidFill>
-              </a:defRPr>
-            </a:defPPr>
-          </a:lstStyle>
-          <a:p xmlns:a="http://schemas.openxmlformats.org/drawingml/2006/main">
-            <a:pPr>
-              <a:buNone/>
-              <a:defRPr sz="1500" b="1">
-                <a:solidFill>
-                  <a:srgbClr val="2073BE"/>
-                </a:solidFill>
-              </a:defRPr>
-            </a:pPr>
-            <a:r>
-              <a:rPr sz="1500" b="1">
-                <a:solidFill>
-                  <a:srgbClr val="2073BE"/>
-                </a:solidFill>
-              </a:rPr>
-              <a:t>既有管理員操作截圖（2026/10/07）；示範引用回查，不代表即時服務狀態。</a:t>
-            </a:r>
-          </a:p>
-        </p:txBody>
-      </p:sp>
-      <p:sp>
-        <p:nvSpPr>
-          <p:cNvPr id="6" name="23">
-            <a:extLst xmlns:a="http://schemas.openxmlformats.org/drawingml/2006/main">
-              <a:ext uri="{FF2B5EF4-FFF2-40B4-BE49-F238E27FC236}">
-                <a16:creationId xmlns:a16="http://schemas.microsoft.com/office/drawing/2014/main" id="{3D9CCD87-5EA3-481E-AD2D-07ADB22B71CE}"/>
-              </a:ext>
-            </a:extLst>
-          </p:cNvPr>
-          <p:cNvSpPr>
-            <a:spLocks xmlns:a="http://schemas.openxmlformats.org/drawingml/2006/main" noGrp="1"/>
-          </p:cNvSpPr>
-          <p:nvPr/>
-        </p:nvSpPr>
-        <p:spPr>
-          <a:xfrm xmlns:a="http://schemas.openxmlformats.org/drawingml/2006/main">
-            <a:off x="733425" y="6391275"/>
-            <a:ext cx="762000" cy="257175"/>
-          </a:xfrm>
-          <a:prstGeom xmlns:a="http://schemas.openxmlformats.org/drawingml/2006/main" prst="rect">
-            <a:avLst/>
-          </a:prstGeom>
-          <a:noFill xmlns:a="http://schemas.openxmlformats.org/drawingml/2006/main"/>
-          <a:ln xmlns:a="http://schemas.openxmlformats.org/drawingml/2006/main" w="0">
-            <a:noFill/>
-          </a:ln>
-        </p:spPr>
-        <p:txBody>
-          <a:bodyPr xmlns:a="http://schemas.openxmlformats.org/drawingml/2006/main" lIns="0" tIns="0" rIns="0" bIns="0"/>
-          <a:lstStyle xmlns:a="http://schemas.openxmlformats.org/drawingml/2006/main">
-            <a:defPPr>
-              <a:defRPr sz="1275" b="0">
-                <a:solidFill>
-                  <a:srgbClr val="465E78"/>
-                </a:solidFill>
-              </a:defRPr>
-            </a:defPPr>
-          </a:lstStyle>
-          <a:p xmlns:a="http://schemas.openxmlformats.org/drawingml/2006/main">
-            <a:pPr>
-              <a:buNone/>
-              <a:defRPr sz="1275" b="0">
-                <a:solidFill>
-                  <a:srgbClr val="465E78"/>
-                </a:solidFill>
-              </a:defRPr>
-            </a:pPr>
-            <a:r>
-              <a:rPr sz="1275" b="0">
-                <a:solidFill>
-                  <a:srgbClr val="465E78"/>
-                </a:solidFill>
-              </a:rPr>
-              <a:t>22</a:t>
-            </a:r>
-          </a:p>
-        </p:txBody>
-      </p:sp>
-    </p:spTree>
-    <p:extLst>
-      <p:ext uri="{BB962C8B-B14F-4D97-AF65-F5344CB8AC3E}">
-        <p14:creationId xmlns:p14="http://schemas.microsoft.com/office/powerpoint/2010/main" val="139713143"/>
-      </p:ext>
-    </p:extLst>
-  </p:cSld>
-</p:sld>
-</file>
-
-<file path=ppt/slides/slide24.xml><?xml version="1.0" encoding="utf-8"?>
-<p:sld xmlns:p="http://schemas.openxmlformats.org/presentationml/2006/main" show="0">
-  <p:cSld>
-    <p:bg>
-      <p:bgPr>
-        <a:solidFill xmlns:a="http://schemas.openxmlformats.org/drawingml/2006/main">
-          <a:srgbClr val="F5F8FC"/>
-        </a:solidFill>
-      </p:bgPr>
-    </p:bg>
-    <p:spTree>
-      <p:nvGrpSpPr>
-        <p:cNvPr id="1" name=""/>
-        <p:cNvGrpSpPr/>
-        <p:nvPr/>
-      </p:nvGrpSpPr>
-      <p:grpSpPr>
-        <a:xfrm xmlns:a="http://schemas.openxmlformats.org/drawingml/2006/main"/>
-      </p:grpSpPr>
-      <p:sp>
-        <p:nvSpPr>
           <p:cNvPr id="2" name="歷史比較：保留兩次查詢的分析結果">
             <a:extLst xmlns:a="http://schemas.openxmlformats.org/drawingml/2006/main">
               <a:ext uri="{FF2B5EF4-FFF2-40B4-BE49-F238E27FC236}">
@@ -19315,7 +19315,7 @@
 </p:sld>
 </file>
 
-<file path=ppt/slides/slide25.xml><?xml version="1.0" encoding="utf-8"?>
+<file path=ppt/slides/slide24.xml><?xml version="1.0" encoding="utf-8"?>
 <p:sld xmlns:p="http://schemas.openxmlformats.org/presentationml/2006/main" show="0">
   <p:cSld>
     <p:bg>

--- a/output/ppt-review-20261011/final/MeBOD_複審簡報_第二輪修訂版.pptx
+++ b/output/ppt-review-20261011/final/MeBOD_複審簡報_第二輪修訂版.pptx
@@ -748,7 +748,7 @@
           <a:lstStyle xmlns:a="http://schemas.openxmlformats.org/drawingml/2006/main"/>
           <a:p xmlns:a="http://schemas.openxmlformats.org/drawingml/2006/main">
             <a:r>
-              <a:t>【許家全｜45 秒】初評指出只有 keyword 比對。現在先解析問題意圖，再以關鍵字和向量雙路找證據，RRF 合併排序後給模型作答。資料預先切段並建立向量；向量無結果時回退關鍵字。引用支持人工回查，不保證每句結論都有充分證據。尚未完成專家知識庫和固定題組評估。來源：backend/app/services/rag_service.py（parse_question_intent、RRF_K、混合檢索）；embedding_service.py；article_compressor.py。</a:t>
+              <a:t>【許家全｜45 秒】初評指出只有 keyword 比對。現在先解析問題意圖，再以關鍵字和向量雙路找證據，RRF 合併排序後給模型作答。在 AI 問答頁提問時，檢索範圍會套用使用者在 Dashboard 選的關鍵字與期間，回答以檢索到的文章為證據、Dashboard 數字為背景，引用清單就是這些文章。資料預先切段並建立向量；向量無結果時回退關鍵字，完全找不到文章時才只用 Dashboard 數字回答。引用支持人工回查，不保證每句結論都有充分證據；尚未完成專家知識庫和固定題組評估。來源：backend/app/services/rag_service.py（answer_question、scope_intent_to_dashboard、RRF_K）；embedding_service.py。</a:t>
             </a:r>
           </a:p>
         </p:txBody>
@@ -1101,7 +1101,7 @@
           <a:lstStyle xmlns:a="http://schemas.openxmlformats.org/drawingml/2006/main"/>
           <a:p xmlns:a="http://schemas.openxmlformats.org/drawingml/2006/main">
             <a:r>
-              <a:t>【陳威帆｜45 秒】甘特圖保留原稿115/2至116/1的計畫，10月後為計畫工作。繳件與展覽日期沿用原稿，發表前仍按學校公告確認。右側里程碑依各功能第一次提交的月份：5月PTT爬蟲、儀表板與WebSocket；7月帳號登入；8月Dcard、Mobile01、Threads；9月方案額度、Alembic與向量檢索；10月情緒一致性與預警權限修正。提交數由GitHub於10/12統計：5月14、6月0、7月27、8月42、9月47、10月34，共164次，皆已推送；提交集中於單一帳號，不能當作兩位組員的貢獻比例。</a:t>
+              <a:t>【陳威帆｜45 秒】甘特圖保留原稿115/2至116/1的計畫，10月後為計畫工作。繳件與展覽日期沿用原稿，發表前仍按學校公告確認。右側里程碑依各功能第一次提交的月份：5月PTT爬蟲、儀表板與WebSocket；7月帳號登入；8月Dcard、Mobile01、Threads；9月方案額度、Alembic與向量檢索；10月情緒一致性、預警權限與問答檢索修正。提交數由GitHub於10/12統計：5月14、6月0、7月27、8月42、9月47、10月36，共166次，皆已推送；提交集中於單一帳號，不能當作兩位組員的貢獻比例。</a:t>
             </a:r>
             <a:endParaRPr/>
           </a:p>
@@ -1243,7 +1243,7 @@
           <a:lstStyle xmlns:a="http://schemas.openxmlformats.org/drawingml/2006/main"/>
           <a:p xmlns:a="http://schemas.openxmlformats.org/drawingml/2006/main">
             <a:r>
-              <a:t>【陳威帆｜105 秒】總結三點：一、四平台到問答與報告形成完整研究流程；二、RAG與分數規則已可說明，後端493項、前端43項自動化測試通過；三、尚未把品質驗證說成全部完成。下一步依序補Linux部署回歸、建立人工標註和檢索題組、辨識業配，再與實際使用者訪談試用。營運上，實測重算後4個專業版帳號可打平雲端支出，算入人力則需12到21個。與通用代理的差異需要同題實測，現階段著重長期資料、來源回查與持續監測。原第16頁測試頁已刪除，主講約13分55秒，可在Demo或此頁多說約35秒。</a:t>
+              <a:t>【陳威帆｜105 秒】總結三點：一、四平台到問答與報告形成完整研究流程；二、RAG與分數規則已可說明，後端498項、前端43項自動化測試通過；三、尚未把品質驗證說成全部完成。下一步依序補Linux部署回歸、建立人工標註和檢索題組、辨識業配，再與實際使用者訪談試用。營運上，實測重算後4個專業版帳號可打平雲端支出，算入人力則需12到21個。與通用代理的差異需要同題實測，現階段著重長期資料、來源回查與持續監測。原第16頁測試頁已刪除，主講約13分55秒，可在Demo或此頁多說約35秒。</a:t>
             </a:r>
             <a:endParaRPr/>
           </a:p>
@@ -2090,7 +2090,7 @@
           <a:lstStyle xmlns:a="http://schemas.openxmlformats.org/drawingml/2006/main"/>
           <a:p xmlns:a="http://schemas.openxmlformats.org/drawingml/2006/main">
             <a:r>
-              <a:t>【陳威帆｜45 秒】初評說我們沒有量化，這頁用實測重算，不再沿用原稿的假設單價。一次 AI 問答：用系統程式組出真實 prompt，最多約 9 千 token 輸入、2 千 token 輸出，以 Gemini 2.5 Flash-Lite 官方價每百萬 0.10／0.40 美元計算，約 0.06 元，原稿假設 0.33 元高估了五倍。專業版用戶每月 100 次問答、60 次洞察，加上 3% 金流手續費，變動成本約 27 元。固定支出以 render.yaml 的雲端部署計：主機 25 美元、資料庫 19 美元，加網域與每日判讀約 1,450 元。收入 490N、支出 1,450＋27N，4 個帳號就能打平，每月餘 402 元。但這還沒算人力，算進去要 12 到 21 個帳號，見附錄 C；每個數字的出處在附錄 F。</a:t>
+              <a:t>【陳威帆｜45 秒】初評說我們沒有量化，這頁用實測重算，不再沿用原稿的假設單價。一次 AI 問答包含問題解析與依證據回答兩次呼叫，用系統程式組出真實 prompt，最多約 9,800 token 輸入、2,150 token 輸出，以 Gemini 2.5 Flash-Lite 官方價每百萬 0.10／0.40 美元計算，約 0.06 元，原稿假設 0.33 元高估了五倍。專業版用戶每月 100 次問答、60 次洞察，加上 3% 金流手續費，變動成本約 27 元。固定支出以 render.yaml 的雲端部署計：主機 25 美元、資料庫 19 美元，加網域與每日判讀約 1,450 元。收入 490N、支出 1,450＋27N，4 個帳號就能打平，每月餘 402 元。但這還沒算人力，算進去要 12 到 21 個帳號，見附錄 C；每個數字的出處在附錄 F。</a:t>
             </a:r>
             <a:endParaRPr/>
           </a:p>
@@ -3223,7 +3223,7 @@
                 <a:ea typeface="Microsoft JhengHei"/>
                 <a:cs typeface="Microsoft JhengHei"/>
               </a:rPr>
-              <a:t>GitHub 每月提交（共 164 次）</a:t>
+              <a:t>GitHub 每月提交（共 166 次）</a:t>
             </a:r>
           </a:p>
         </c:rich>
@@ -3317,7 +3317,7 @@
                   <c:v>47</c:v>
                 </c:pt>
                 <c:pt idx="5">
-                  <c:v>34</c:v>
+                  <c:v>36</c:v>
                 </c:pt>
               </c:numCache>
             </c:numRef>
@@ -12189,7 +12189,7 @@
                 <a:ea typeface="Microsoft JhengHei"/>
                 <a:cs typeface="Microsoft JhengHei"/>
               </a:rPr>
-              <a:t>情緒一致性、預警權限修正</a:t>
+              <a:t>情緒一致性、預警與問答修正</a:t>
             </a:r>
             <a:endParaRPr sz="1400"/>
           </a:p>
@@ -12274,7 +12274,7 @@
                 <a:ea typeface="Microsoft JhengHei"/>
                 <a:cs typeface="Microsoft JhengHei"/>
               </a:rPr>
-              <a:t>GitHub：7–10 月 150 次提交（10/12 統計，皆已推送）；非逐人貢獻比例。</a:t>
+              <a:t>GitHub：7–10 月 152 次提交（10/12 統計，皆已推送）；非逐人貢獻比例。</a:t>
             </a:r>
             <a:endParaRPr sz="1400"/>
           </a:p>
@@ -19593,7 +19593,7 @@
                             <a:srgbClr val="14243A"/>
                           </a:solidFill>
                         </a:rPr>
-                        <a:t>輸入 8,963＋輸出 2,150 token ≈ 0.06 元</a:t>
+                        <a:t>兩次呼叫：輸入 9,794＋輸出 2,150 ≈ 0.06 元</a:t>
                       </a:r>
                     </a:p>
                   </a:txBody>

--- a/output/ppt-review-20261011/final/MeBOD_複審簡報_第二輪修訂版.pptx
+++ b/output/ppt-review-20261011/final/MeBOD_複審簡報_第二輪修訂版.pptx
@@ -27905,860 +27905,2864 @@
           </a:p>
         </p:txBody>
       </p:sp>
-      <p:sp>
-        <p:nvSpPr>
-          <p:cNvPr id="6" name="Shape 4">
-            <a:extLst>
-              <a:ext uri="{FF2B5EF4-FFF2-40B4-BE49-F238E27FC236}">
-                <a16:creationId xmlns:a16="http://schemas.microsoft.com/office/drawing/2014/main" id="{02ABE0FF-C9C7-43A7-B316-AB3805180185}"/>
-              </a:ext>
-            </a:extLst>
-          </p:cNvPr>
-          <p:cNvSpPr>
-            <a:spLocks noGrp="1"/>
-          </p:cNvSpPr>
-          <p:nvPr/>
-        </p:nvSpPr>
-        <p:spPr>
-          <a:xfrm>
-            <a:off x="731520" y="1783080"/>
-            <a:ext cx="2560320" cy="1965960"/>
-          </a:xfrm>
-          <a:prstGeom prst="roundRect">
-            <a:avLst>
-              <a:gd name="adj" fmla="val 7442"/>
-            </a:avLst>
-          </a:prstGeom>
-          <a:solidFill>
-            <a:srgbClr val="FFFFFF"/>
-          </a:solidFill>
-          <a:ln w="12700">
-            <a:solidFill>
-              <a:srgbClr val="D3DEEA"/>
-            </a:solidFill>
-            <a:prstDash val="solid"/>
-          </a:ln>
-        </p:spPr>
-        <p:txBody>
-          <a:bodyPr/>
-          <a:lstStyle/>
-          <a:p>
-            <a:endParaRPr/>
-          </a:p>
-        </p:txBody>
-      </p:sp>
-      <p:sp>
-        <p:nvSpPr>
-          <p:cNvPr id="7" name="Text 5">
-            <a:extLst>
-              <a:ext uri="{FF2B5EF4-FFF2-40B4-BE49-F238E27FC236}">
-                <a16:creationId xmlns:a16="http://schemas.microsoft.com/office/drawing/2014/main" id="{985A3F5F-CAC5-40D7-A02D-39DBD2B4ABE9}"/>
-              </a:ext>
-            </a:extLst>
-          </p:cNvPr>
-          <p:cNvSpPr>
-            <a:spLocks noGrp="1"/>
-          </p:cNvSpPr>
-          <p:nvPr/>
-        </p:nvSpPr>
-        <p:spPr>
-          <a:xfrm>
-            <a:off x="822960" y="2057400"/>
-            <a:ext cx="2377440" cy="777240"/>
+      <p:graphicFrame>
+        <p:nvGraphicFramePr>
+          <p:cNvPr id="30" name="Cost Table"/>
+          <p:cNvGraphicFramePr>
+            <a:graphicFrameLocks noGrp="1"/>
+          </p:cNvGraphicFramePr>
+          <p:nvPr/>
+        </p:nvGraphicFramePr>
+        <p:xfrm>
+          <a:off x="731520" y="1627632"/>
+          <a:ext cx="6492240" cy="3470148"/>
+        </p:xfrm>
+        <a:graphic>
+          <a:graphicData uri="http://schemas.openxmlformats.org/drawingml/2006/table">
+            <a:tbl>
+              <a:tblPr/>
+              <a:tblGrid>
+                <a:gridCol w="1965960"/>
+                <a:gridCol w="3429000"/>
+                <a:gridCol w="1097280"/>
+              </a:tblGrid>
+              <a:tr h="315468">
+                <a:tc>
+                  <a:txBody>
+                    <a:bodyPr wrap="square"/>
+                    <a:lstStyle/>
+                    <a:p>
+                      <a:pPr algn="l"/>
+                      <a:r>
+                        <a:rPr sz="1300" b="1">
+                          <a:solidFill>
+                            <a:srgbClr val="2073BE"/>
+                          </a:solidFill>
+                          <a:latin typeface="Microsoft JhengHei"/>
+                          <a:ea typeface="Microsoft JhengHei"/>
+                          <a:cs typeface="Microsoft JhengHei"/>
+                        </a:rPr>
+                        <a:t>項目</a:t>
+                      </a:r>
+                    </a:p>
+                  </a:txBody>
+                  <a:tcPr anchor="ctr" marL="91440" marR="91440" marT="18288" marB="18288">
+                    <a:lnL w="9525">
+                      <a:solidFill>
+                        <a:srgbClr val="D3DEEA"/>
+                      </a:solidFill>
+                    </a:lnL>
+                    <a:lnR w="9525">
+                      <a:solidFill>
+                        <a:srgbClr val="D3DEEA"/>
+                      </a:solidFill>
+                    </a:lnR>
+                    <a:lnT w="9525">
+                      <a:solidFill>
+                        <a:srgbClr val="D3DEEA"/>
+                      </a:solidFill>
+                    </a:lnT>
+                    <a:lnB w="9525">
+                      <a:solidFill>
+                        <a:srgbClr val="D3DEEA"/>
+                      </a:solidFill>
+                    </a:lnB>
+                    <a:solidFill>
+                      <a:srgbClr val="E2EEFA"/>
+                    </a:solidFill>
+                  </a:tcPr>
+                </a:tc>
+                <a:tc>
+                  <a:txBody>
+                    <a:bodyPr wrap="square"/>
+                    <a:lstStyle/>
+                    <a:p>
+                      <a:pPr algn="l"/>
+                      <a:r>
+                        <a:rPr sz="1300" b="1">
+                          <a:solidFill>
+                            <a:srgbClr val="2073BE"/>
+                          </a:solidFill>
+                          <a:latin typeface="Microsoft JhengHei"/>
+                          <a:ea typeface="Microsoft JhengHei"/>
+                          <a:cs typeface="Microsoft JhengHei"/>
+                        </a:rPr>
+                        <a:t>計算式</a:t>
+                      </a:r>
+                    </a:p>
+                  </a:txBody>
+                  <a:tcPr anchor="ctr" marL="91440" marR="91440" marT="18288" marB="18288">
+                    <a:lnL w="9525">
+                      <a:solidFill>
+                        <a:srgbClr val="D3DEEA"/>
+                      </a:solidFill>
+                    </a:lnL>
+                    <a:lnR w="9525">
+                      <a:solidFill>
+                        <a:srgbClr val="D3DEEA"/>
+                      </a:solidFill>
+                    </a:lnR>
+                    <a:lnT w="9525">
+                      <a:solidFill>
+                        <a:srgbClr val="D3DEEA"/>
+                      </a:solidFill>
+                    </a:lnT>
+                    <a:lnB w="9525">
+                      <a:solidFill>
+                        <a:srgbClr val="D3DEEA"/>
+                      </a:solidFill>
+                    </a:lnB>
+                    <a:solidFill>
+                      <a:srgbClr val="E2EEFA"/>
+                    </a:solidFill>
+                  </a:tcPr>
+                </a:tc>
+                <a:tc>
+                  <a:txBody>
+                    <a:bodyPr wrap="square"/>
+                    <a:lstStyle/>
+                    <a:p>
+                      <a:pPr algn="r"/>
+                      <a:r>
+                        <a:rPr sz="1300" b="1">
+                          <a:solidFill>
+                            <a:srgbClr val="2073BE"/>
+                          </a:solidFill>
+                          <a:latin typeface="Microsoft JhengHei"/>
+                          <a:ea typeface="Microsoft JhengHei"/>
+                          <a:cs typeface="Microsoft JhengHei"/>
+                        </a:rPr>
+                        <a:t>元／月</a:t>
+                      </a:r>
+                    </a:p>
+                  </a:txBody>
+                  <a:tcPr anchor="ctr" marL="91440" marR="91440" marT="18288" marB="18288">
+                    <a:lnL w="9525">
+                      <a:solidFill>
+                        <a:srgbClr val="D3DEEA"/>
+                      </a:solidFill>
+                    </a:lnL>
+                    <a:lnR w="9525">
+                      <a:solidFill>
+                        <a:srgbClr val="D3DEEA"/>
+                      </a:solidFill>
+                    </a:lnR>
+                    <a:lnT w="9525">
+                      <a:solidFill>
+                        <a:srgbClr val="D3DEEA"/>
+                      </a:solidFill>
+                    </a:lnT>
+                    <a:lnB w="9525">
+                      <a:solidFill>
+                        <a:srgbClr val="D3DEEA"/>
+                      </a:solidFill>
+                    </a:lnB>
+                    <a:solidFill>
+                      <a:srgbClr val="E2EEFA"/>
+                    </a:solidFill>
+                  </a:tcPr>
+                </a:tc>
+              </a:tr>
+              <a:tr h="315468">
+                <a:tc gridSpan="3">
+                  <a:txBody>
+                    <a:bodyPr wrap="square"/>
+                    <a:lstStyle/>
+                    <a:p>
+                      <a:pPr algn="l"/>
+                      <a:r>
+                        <a:rPr sz="1200" b="1">
+                          <a:solidFill>
+                            <a:srgbClr val="3F546C"/>
+                          </a:solidFill>
+                          <a:latin typeface="Microsoft JhengHei"/>
+                          <a:ea typeface="Microsoft JhengHei"/>
+                          <a:cs typeface="Microsoft JhengHei"/>
+                        </a:rPr>
+                        <a:t>固定支出 F：每月都要付，與帳號數無關</a:t>
+                      </a:r>
+                    </a:p>
+                  </a:txBody>
+                  <a:tcPr anchor="ctr" marL="91440" marR="91440" marT="18288" marB="18288">
+                    <a:lnL w="9525">
+                      <a:solidFill>
+                        <a:srgbClr val="D3DEEA"/>
+                      </a:solidFill>
+                    </a:lnL>
+                    <a:lnR w="9525">
+                      <a:solidFill>
+                        <a:srgbClr val="D3DEEA"/>
+                      </a:solidFill>
+                    </a:lnR>
+                    <a:lnT w="9525">
+                      <a:solidFill>
+                        <a:srgbClr val="D3DEEA"/>
+                      </a:solidFill>
+                    </a:lnT>
+                    <a:lnB w="9525">
+                      <a:solidFill>
+                        <a:srgbClr val="D3DEEA"/>
+                      </a:solidFill>
+                    </a:lnB>
+                    <a:solidFill>
+                      <a:srgbClr val="EEF4FB"/>
+                    </a:solidFill>
+                  </a:tcPr>
+                </a:tc>
+                <a:tc hMerge="1">
+                  <a:txBody>
+                    <a:bodyPr/>
+                    <a:lstStyle/>
+                    <a:p/>
+                  </a:txBody>
+                  <a:tcPr/>
+                </a:tc>
+                <a:tc hMerge="1">
+                  <a:txBody>
+                    <a:bodyPr/>
+                    <a:lstStyle/>
+                    <a:p/>
+                  </a:txBody>
+                  <a:tcPr/>
+                </a:tc>
+              </a:tr>
+              <a:tr h="315468">
+                <a:tc>
+                  <a:txBody>
+                    <a:bodyPr wrap="square"/>
+                    <a:lstStyle/>
+                    <a:p>
+                      <a:pPr algn="l"/>
+                      <a:r>
+                        <a:rPr sz="1200" b="0">
+                          <a:solidFill>
+                            <a:srgbClr val="14243A"/>
+                          </a:solidFill>
+                          <a:latin typeface="Microsoft JhengHei"/>
+                          <a:ea typeface="Microsoft JhengHei"/>
+                          <a:cs typeface="Microsoft JhengHei"/>
+                        </a:rPr>
+                        <a:t>雲端主機＋資料庫</a:t>
+                      </a:r>
+                    </a:p>
+                  </a:txBody>
+                  <a:tcPr anchor="ctr" marL="91440" marR="91440" marT="18288" marB="18288">
+                    <a:lnL w="9525">
+                      <a:solidFill>
+                        <a:srgbClr val="D3DEEA"/>
+                      </a:solidFill>
+                    </a:lnL>
+                    <a:lnR w="9525">
+                      <a:solidFill>
+                        <a:srgbClr val="D3DEEA"/>
+                      </a:solidFill>
+                    </a:lnR>
+                    <a:lnT w="9525">
+                      <a:solidFill>
+                        <a:srgbClr val="D3DEEA"/>
+                      </a:solidFill>
+                    </a:lnT>
+                    <a:lnB w="9525">
+                      <a:solidFill>
+                        <a:srgbClr val="D3DEEA"/>
+                      </a:solidFill>
+                    </a:lnB>
+                    <a:solidFill>
+                      <a:srgbClr val="FFFFFF"/>
+                    </a:solidFill>
+                  </a:tcPr>
+                </a:tc>
+                <a:tc>
+                  <a:txBody>
+                    <a:bodyPr wrap="square"/>
+                    <a:lstStyle/>
+                    <a:p>
+                      <a:pPr algn="l"/>
+                      <a:r>
+                        <a:rPr sz="1200" b="0">
+                          <a:solidFill>
+                            <a:srgbClr val="3F546C"/>
+                          </a:solidFill>
+                          <a:latin typeface="Microsoft JhengHei"/>
+                          <a:ea typeface="Microsoft JhengHei"/>
+                          <a:cs typeface="Microsoft JhengHei"/>
+                        </a:rPr>
+                        <a:t>（US$25＋US$19）× 匯率 32</a:t>
+                      </a:r>
+                    </a:p>
+                  </a:txBody>
+                  <a:tcPr anchor="ctr" marL="91440" marR="91440" marT="18288" marB="18288">
+                    <a:lnL w="9525">
+                      <a:solidFill>
+                        <a:srgbClr val="D3DEEA"/>
+                      </a:solidFill>
+                    </a:lnL>
+                    <a:lnR w="9525">
+                      <a:solidFill>
+                        <a:srgbClr val="D3DEEA"/>
+                      </a:solidFill>
+                    </a:lnR>
+                    <a:lnT w="9525">
+                      <a:solidFill>
+                        <a:srgbClr val="D3DEEA"/>
+                      </a:solidFill>
+                    </a:lnT>
+                    <a:lnB w="9525">
+                      <a:solidFill>
+                        <a:srgbClr val="D3DEEA"/>
+                      </a:solidFill>
+                    </a:lnB>
+                    <a:solidFill>
+                      <a:srgbClr val="FFFFFF"/>
+                    </a:solidFill>
+                  </a:tcPr>
+                </a:tc>
+                <a:tc>
+                  <a:txBody>
+                    <a:bodyPr wrap="square"/>
+                    <a:lstStyle/>
+                    <a:p>
+                      <a:pPr algn="r"/>
+                      <a:r>
+                        <a:rPr sz="1200" b="1">
+                          <a:solidFill>
+                            <a:srgbClr val="14243A"/>
+                          </a:solidFill>
+                          <a:latin typeface="Microsoft JhengHei"/>
+                          <a:ea typeface="Microsoft JhengHei"/>
+                          <a:cs typeface="Microsoft JhengHei"/>
+                        </a:rPr>
+                        <a:t>1,408</a:t>
+                      </a:r>
+                    </a:p>
+                  </a:txBody>
+                  <a:tcPr anchor="ctr" marL="91440" marR="91440" marT="18288" marB="18288">
+                    <a:lnL w="9525">
+                      <a:solidFill>
+                        <a:srgbClr val="D3DEEA"/>
+                      </a:solidFill>
+                    </a:lnL>
+                    <a:lnR w="9525">
+                      <a:solidFill>
+                        <a:srgbClr val="D3DEEA"/>
+                      </a:solidFill>
+                    </a:lnR>
+                    <a:lnT w="9525">
+                      <a:solidFill>
+                        <a:srgbClr val="D3DEEA"/>
+                      </a:solidFill>
+                    </a:lnT>
+                    <a:lnB w="9525">
+                      <a:solidFill>
+                        <a:srgbClr val="D3DEEA"/>
+                      </a:solidFill>
+                    </a:lnB>
+                    <a:solidFill>
+                      <a:srgbClr val="FFFFFF"/>
+                    </a:solidFill>
+                  </a:tcPr>
+                </a:tc>
+              </a:tr>
+              <a:tr h="315468">
+                <a:tc>
+                  <a:txBody>
+                    <a:bodyPr wrap="square"/>
+                    <a:lstStyle/>
+                    <a:p>
+                      <a:pPr algn="l"/>
+                      <a:r>
+                        <a:rPr sz="1200" b="0">
+                          <a:solidFill>
+                            <a:srgbClr val="14243A"/>
+                          </a:solidFill>
+                          <a:latin typeface="Microsoft JhengHei"/>
+                          <a:ea typeface="Microsoft JhengHei"/>
+                          <a:cs typeface="Microsoft JhengHei"/>
+                        </a:rPr>
+                        <a:t>網域</a:t>
+                      </a:r>
+                    </a:p>
+                  </a:txBody>
+                  <a:tcPr anchor="ctr" marL="91440" marR="91440" marT="18288" marB="18288">
+                    <a:lnL w="9525">
+                      <a:solidFill>
+                        <a:srgbClr val="D3DEEA"/>
+                      </a:solidFill>
+                    </a:lnL>
+                    <a:lnR w="9525">
+                      <a:solidFill>
+                        <a:srgbClr val="D3DEEA"/>
+                      </a:solidFill>
+                    </a:lnR>
+                    <a:lnT w="9525">
+                      <a:solidFill>
+                        <a:srgbClr val="D3DEEA"/>
+                      </a:solidFill>
+                    </a:lnT>
+                    <a:lnB w="9525">
+                      <a:solidFill>
+                        <a:srgbClr val="D3DEEA"/>
+                      </a:solidFill>
+                    </a:lnB>
+                    <a:solidFill>
+                      <a:srgbClr val="F3F7FC"/>
+                    </a:solidFill>
+                  </a:tcPr>
+                </a:tc>
+                <a:tc>
+                  <a:txBody>
+                    <a:bodyPr wrap="square"/>
+                    <a:lstStyle/>
+                    <a:p>
+                      <a:pPr algn="l"/>
+                      <a:r>
+                        <a:rPr sz="1200" b="0">
+                          <a:solidFill>
+                            <a:srgbClr val="3F546C"/>
+                          </a:solidFill>
+                          <a:latin typeface="Microsoft JhengHei"/>
+                          <a:ea typeface="Microsoft JhengHei"/>
+                          <a:cs typeface="Microsoft JhengHei"/>
+                        </a:rPr>
+                        <a:t>年費 420 ÷ 12 個月</a:t>
+                      </a:r>
+                    </a:p>
+                  </a:txBody>
+                  <a:tcPr anchor="ctr" marL="91440" marR="91440" marT="18288" marB="18288">
+                    <a:lnL w="9525">
+                      <a:solidFill>
+                        <a:srgbClr val="D3DEEA"/>
+                      </a:solidFill>
+                    </a:lnL>
+                    <a:lnR w="9525">
+                      <a:solidFill>
+                        <a:srgbClr val="D3DEEA"/>
+                      </a:solidFill>
+                    </a:lnR>
+                    <a:lnT w="9525">
+                      <a:solidFill>
+                        <a:srgbClr val="D3DEEA"/>
+                      </a:solidFill>
+                    </a:lnT>
+                    <a:lnB w="9525">
+                      <a:solidFill>
+                        <a:srgbClr val="D3DEEA"/>
+                      </a:solidFill>
+                    </a:lnB>
+                    <a:solidFill>
+                      <a:srgbClr val="F3F7FC"/>
+                    </a:solidFill>
+                  </a:tcPr>
+                </a:tc>
+                <a:tc>
+                  <a:txBody>
+                    <a:bodyPr wrap="square"/>
+                    <a:lstStyle/>
+                    <a:p>
+                      <a:pPr algn="r"/>
+                      <a:r>
+                        <a:rPr sz="1200" b="1">
+                          <a:solidFill>
+                            <a:srgbClr val="14243A"/>
+                          </a:solidFill>
+                          <a:latin typeface="Microsoft JhengHei"/>
+                          <a:ea typeface="Microsoft JhengHei"/>
+                          <a:cs typeface="Microsoft JhengHei"/>
+                        </a:rPr>
+                        <a:t>35</a:t>
+                      </a:r>
+                    </a:p>
+                  </a:txBody>
+                  <a:tcPr anchor="ctr" marL="91440" marR="91440" marT="18288" marB="18288">
+                    <a:lnL w="9525">
+                      <a:solidFill>
+                        <a:srgbClr val="D3DEEA"/>
+                      </a:solidFill>
+                    </a:lnL>
+                    <a:lnR w="9525">
+                      <a:solidFill>
+                        <a:srgbClr val="D3DEEA"/>
+                      </a:solidFill>
+                    </a:lnR>
+                    <a:lnT w="9525">
+                      <a:solidFill>
+                        <a:srgbClr val="D3DEEA"/>
+                      </a:solidFill>
+                    </a:lnT>
+                    <a:lnB w="9525">
+                      <a:solidFill>
+                        <a:srgbClr val="D3DEEA"/>
+                      </a:solidFill>
+                    </a:lnB>
+                    <a:solidFill>
+                      <a:srgbClr val="F3F7FC"/>
+                    </a:solidFill>
+                  </a:tcPr>
+                </a:tc>
+              </a:tr>
+              <a:tr h="315468">
+                <a:tc>
+                  <a:txBody>
+                    <a:bodyPr wrap="square"/>
+                    <a:lstStyle/>
+                    <a:p>
+                      <a:pPr algn="l"/>
+                      <a:r>
+                        <a:rPr sz="1200" b="0">
+                          <a:solidFill>
+                            <a:srgbClr val="14243A"/>
+                          </a:solidFill>
+                          <a:latin typeface="Microsoft JhengHei"/>
+                          <a:ea typeface="Microsoft JhengHei"/>
+                          <a:cs typeface="Microsoft JhengHei"/>
+                        </a:rPr>
+                        <a:t>情緒判讀＋向量</a:t>
+                      </a:r>
+                    </a:p>
+                  </a:txBody>
+                  <a:tcPr anchor="ctr" marL="91440" marR="91440" marT="18288" marB="18288">
+                    <a:lnL w="9525">
+                      <a:solidFill>
+                        <a:srgbClr val="D3DEEA"/>
+                      </a:solidFill>
+                    </a:lnL>
+                    <a:lnR w="9525">
+                      <a:solidFill>
+                        <a:srgbClr val="D3DEEA"/>
+                      </a:solidFill>
+                    </a:lnR>
+                    <a:lnT w="9525">
+                      <a:solidFill>
+                        <a:srgbClr val="D3DEEA"/>
+                      </a:solidFill>
+                    </a:lnT>
+                    <a:lnB w="9525">
+                      <a:solidFill>
+                        <a:srgbClr val="D3DEEA"/>
+                      </a:solidFill>
+                    </a:lnB>
+                    <a:solidFill>
+                      <a:srgbClr val="FFFFFF"/>
+                    </a:solidFill>
+                  </a:tcPr>
+                </a:tc>
+                <a:tc>
+                  <a:txBody>
+                    <a:bodyPr wrap="square"/>
+                    <a:lstStyle/>
+                    <a:p>
+                      <a:pPr algn="l"/>
+                      <a:r>
+                        <a:rPr sz="1200" b="0">
+                          <a:solidFill>
+                            <a:srgbClr val="3F546C"/>
+                          </a:solidFill>
+                          <a:latin typeface="Microsoft JhengHei"/>
+                          <a:ea typeface="Microsoft JhengHei"/>
+                          <a:cs typeface="Microsoft JhengHei"/>
+                        </a:rPr>
+                        <a:t>近 30 天 897 篇＋3,216 則留言</a:t>
+                      </a:r>
+                    </a:p>
+                  </a:txBody>
+                  <a:tcPr anchor="ctr" marL="91440" marR="91440" marT="18288" marB="18288">
+                    <a:lnL w="9525">
+                      <a:solidFill>
+                        <a:srgbClr val="D3DEEA"/>
+                      </a:solidFill>
+                    </a:lnL>
+                    <a:lnR w="9525">
+                      <a:solidFill>
+                        <a:srgbClr val="D3DEEA"/>
+                      </a:solidFill>
+                    </a:lnR>
+                    <a:lnT w="9525">
+                      <a:solidFill>
+                        <a:srgbClr val="D3DEEA"/>
+                      </a:solidFill>
+                    </a:lnT>
+                    <a:lnB w="9525">
+                      <a:solidFill>
+                        <a:srgbClr val="D3DEEA"/>
+                      </a:solidFill>
+                    </a:lnB>
+                    <a:solidFill>
+                      <a:srgbClr val="FFFFFF"/>
+                    </a:solidFill>
+                  </a:tcPr>
+                </a:tc>
+                <a:tc>
+                  <a:txBody>
+                    <a:bodyPr wrap="square"/>
+                    <a:lstStyle/>
+                    <a:p>
+                      <a:pPr algn="r"/>
+                      <a:r>
+                        <a:rPr sz="1200" b="1">
+                          <a:solidFill>
+                            <a:srgbClr val="14243A"/>
+                          </a:solidFill>
+                          <a:latin typeface="Microsoft JhengHei"/>
+                          <a:ea typeface="Microsoft JhengHei"/>
+                          <a:cs typeface="Microsoft JhengHei"/>
+                        </a:rPr>
+                        <a:t>13</a:t>
+                      </a:r>
+                    </a:p>
+                  </a:txBody>
+                  <a:tcPr anchor="ctr" marL="91440" marR="91440" marT="18288" marB="18288">
+                    <a:lnL w="9525">
+                      <a:solidFill>
+                        <a:srgbClr val="D3DEEA"/>
+                      </a:solidFill>
+                    </a:lnL>
+                    <a:lnR w="9525">
+                      <a:solidFill>
+                        <a:srgbClr val="D3DEEA"/>
+                      </a:solidFill>
+                    </a:lnR>
+                    <a:lnT w="9525">
+                      <a:solidFill>
+                        <a:srgbClr val="D3DEEA"/>
+                      </a:solidFill>
+                    </a:lnT>
+                    <a:lnB w="9525">
+                      <a:solidFill>
+                        <a:srgbClr val="D3DEEA"/>
+                      </a:solidFill>
+                    </a:lnB>
+                    <a:solidFill>
+                      <a:srgbClr val="FFFFFF"/>
+                    </a:solidFill>
+                  </a:tcPr>
+                </a:tc>
+              </a:tr>
+              <a:tr h="315468">
+                <a:tc>
+                  <a:txBody>
+                    <a:bodyPr wrap="square"/>
+                    <a:lstStyle/>
+                    <a:p>
+                      <a:pPr algn="l"/>
+                      <a:r>
+                        <a:rPr sz="1300" b="1">
+                          <a:solidFill>
+                            <a:srgbClr val="D46A12"/>
+                          </a:solidFill>
+                          <a:latin typeface="Microsoft JhengHei"/>
+                          <a:ea typeface="Microsoft JhengHei"/>
+                          <a:cs typeface="Microsoft JhengHei"/>
+                        </a:rPr>
+                        <a:t>固定支出 F</a:t>
+                      </a:r>
+                    </a:p>
+                  </a:txBody>
+                  <a:tcPr anchor="ctr" marL="91440" marR="91440" marT="18288" marB="18288">
+                    <a:lnL w="9525">
+                      <a:solidFill>
+                        <a:srgbClr val="D3DEEA"/>
+                      </a:solidFill>
+                    </a:lnL>
+                    <a:lnR w="9525">
+                      <a:solidFill>
+                        <a:srgbClr val="D3DEEA"/>
+                      </a:solidFill>
+                    </a:lnR>
+                    <a:lnT w="9525">
+                      <a:solidFill>
+                        <a:srgbClr val="D3DEEA"/>
+                      </a:solidFill>
+                    </a:lnT>
+                    <a:lnB w="9525">
+                      <a:solidFill>
+                        <a:srgbClr val="D3DEEA"/>
+                      </a:solidFill>
+                    </a:lnB>
+                    <a:solidFill>
+                      <a:srgbClr val="FDEEDF"/>
+                    </a:solidFill>
+                  </a:tcPr>
+                </a:tc>
+                <a:tc>
+                  <a:txBody>
+                    <a:bodyPr wrap="square"/>
+                    <a:lstStyle/>
+                    <a:p>
+                      <a:pPr algn="l"/>
+                      <a:r>
+                        <a:rPr sz="1200" b="0">
+                          <a:solidFill>
+                            <a:srgbClr val="3F546C"/>
+                          </a:solidFill>
+                          <a:latin typeface="Microsoft JhengHei"/>
+                          <a:ea typeface="Microsoft JhengHei"/>
+                          <a:cs typeface="Microsoft JhengHei"/>
+                        </a:rPr>
+                        <a:t>以上三項合計</a:t>
+                      </a:r>
+                    </a:p>
+                  </a:txBody>
+                  <a:tcPr anchor="ctr" marL="91440" marR="91440" marT="18288" marB="18288">
+                    <a:lnL w="9525">
+                      <a:solidFill>
+                        <a:srgbClr val="D3DEEA"/>
+                      </a:solidFill>
+                    </a:lnL>
+                    <a:lnR w="9525">
+                      <a:solidFill>
+                        <a:srgbClr val="D3DEEA"/>
+                      </a:solidFill>
+                    </a:lnR>
+                    <a:lnT w="9525">
+                      <a:solidFill>
+                        <a:srgbClr val="D3DEEA"/>
+                      </a:solidFill>
+                    </a:lnT>
+                    <a:lnB w="9525">
+                      <a:solidFill>
+                        <a:srgbClr val="D3DEEA"/>
+                      </a:solidFill>
+                    </a:lnB>
+                    <a:solidFill>
+                      <a:srgbClr val="FDEEDF"/>
+                    </a:solidFill>
+                  </a:tcPr>
+                </a:tc>
+                <a:tc>
+                  <a:txBody>
+                    <a:bodyPr wrap="square"/>
+                    <a:lstStyle/>
+                    <a:p>
+                      <a:pPr algn="r"/>
+                      <a:r>
+                        <a:rPr sz="1400" b="1">
+                          <a:solidFill>
+                            <a:srgbClr val="D46A12"/>
+                          </a:solidFill>
+                          <a:latin typeface="Microsoft JhengHei"/>
+                          <a:ea typeface="Microsoft JhengHei"/>
+                          <a:cs typeface="Microsoft JhengHei"/>
+                        </a:rPr>
+                        <a:t>1,456</a:t>
+                      </a:r>
+                    </a:p>
+                  </a:txBody>
+                  <a:tcPr anchor="ctr" marL="91440" marR="91440" marT="18288" marB="18288">
+                    <a:lnL w="9525">
+                      <a:solidFill>
+                        <a:srgbClr val="D3DEEA"/>
+                      </a:solidFill>
+                    </a:lnL>
+                    <a:lnR w="9525">
+                      <a:solidFill>
+                        <a:srgbClr val="D3DEEA"/>
+                      </a:solidFill>
+                    </a:lnR>
+                    <a:lnT w="9525">
+                      <a:solidFill>
+                        <a:srgbClr val="D3DEEA"/>
+                      </a:solidFill>
+                    </a:lnT>
+                    <a:lnB w="9525">
+                      <a:solidFill>
+                        <a:srgbClr val="D3DEEA"/>
+                      </a:solidFill>
+                    </a:lnB>
+                    <a:solidFill>
+                      <a:srgbClr val="FDEEDF"/>
+                    </a:solidFill>
+                  </a:tcPr>
+                </a:tc>
+              </a:tr>
+              <a:tr h="315468">
+                <a:tc gridSpan="3">
+                  <a:txBody>
+                    <a:bodyPr wrap="square"/>
+                    <a:lstStyle/>
+                    <a:p>
+                      <a:pPr algn="l"/>
+                      <a:r>
+                        <a:rPr sz="1200" b="1">
+                          <a:solidFill>
+                            <a:srgbClr val="3F546C"/>
+                          </a:solidFill>
+                          <a:latin typeface="Microsoft JhengHei"/>
+                          <a:ea typeface="Microsoft JhengHei"/>
+                          <a:cs typeface="Microsoft JhengHei"/>
+                        </a:rPr>
+                        <a:t>變動成本 v：每多 1 位專業版用戶，每月增加</a:t>
+                      </a:r>
+                    </a:p>
+                  </a:txBody>
+                  <a:tcPr anchor="ctr" marL="91440" marR="91440" marT="18288" marB="18288">
+                    <a:lnL w="9525">
+                      <a:solidFill>
+                        <a:srgbClr val="D3DEEA"/>
+                      </a:solidFill>
+                    </a:lnL>
+                    <a:lnR w="9525">
+                      <a:solidFill>
+                        <a:srgbClr val="D3DEEA"/>
+                      </a:solidFill>
+                    </a:lnR>
+                    <a:lnT w="9525">
+                      <a:solidFill>
+                        <a:srgbClr val="D3DEEA"/>
+                      </a:solidFill>
+                    </a:lnT>
+                    <a:lnB w="9525">
+                      <a:solidFill>
+                        <a:srgbClr val="D3DEEA"/>
+                      </a:solidFill>
+                    </a:lnB>
+                    <a:solidFill>
+                      <a:srgbClr val="EEF4FB"/>
+                    </a:solidFill>
+                  </a:tcPr>
+                </a:tc>
+                <a:tc hMerge="1">
+                  <a:txBody>
+                    <a:bodyPr/>
+                    <a:lstStyle/>
+                    <a:p/>
+                  </a:txBody>
+                  <a:tcPr/>
+                </a:tc>
+                <a:tc hMerge="1">
+                  <a:txBody>
+                    <a:bodyPr/>
+                    <a:lstStyle/>
+                    <a:p/>
+                  </a:txBody>
+                  <a:tcPr/>
+                </a:tc>
+              </a:tr>
+              <a:tr h="315468">
+                <a:tc>
+                  <a:txBody>
+                    <a:bodyPr wrap="square"/>
+                    <a:lstStyle/>
+                    <a:p>
+                      <a:pPr algn="l"/>
+                      <a:r>
+                        <a:rPr sz="1200" b="0">
+                          <a:solidFill>
+                            <a:srgbClr val="14243A"/>
+                          </a:solidFill>
+                          <a:latin typeface="Microsoft JhengHei"/>
+                          <a:ea typeface="Microsoft JhengHei"/>
+                          <a:cs typeface="Microsoft JhengHei"/>
+                        </a:rPr>
+                        <a:t>AI 問答 100 次</a:t>
+                      </a:r>
+                    </a:p>
+                  </a:txBody>
+                  <a:tcPr anchor="ctr" marL="91440" marR="91440" marT="18288" marB="18288">
+                    <a:lnL w="9525">
+                      <a:solidFill>
+                        <a:srgbClr val="D3DEEA"/>
+                      </a:solidFill>
+                    </a:lnL>
+                    <a:lnR w="9525">
+                      <a:solidFill>
+                        <a:srgbClr val="D3DEEA"/>
+                      </a:solidFill>
+                    </a:lnR>
+                    <a:lnT w="9525">
+                      <a:solidFill>
+                        <a:srgbClr val="D3DEEA"/>
+                      </a:solidFill>
+                    </a:lnT>
+                    <a:lnB w="9525">
+                      <a:solidFill>
+                        <a:srgbClr val="D3DEEA"/>
+                      </a:solidFill>
+                    </a:lnB>
+                    <a:solidFill>
+                      <a:srgbClr val="FFFFFF"/>
+                    </a:solidFill>
+                  </a:tcPr>
+                </a:tc>
+                <a:tc>
+                  <a:txBody>
+                    <a:bodyPr wrap="square"/>
+                    <a:lstStyle/>
+                    <a:p>
+                      <a:pPr algn="l"/>
+                      <a:r>
+                        <a:rPr sz="1200" b="0">
+                          <a:solidFill>
+                            <a:srgbClr val="3F546C"/>
+                          </a:solidFill>
+                          <a:latin typeface="Microsoft JhengHei"/>
+                          <a:ea typeface="Microsoft JhengHei"/>
+                          <a:cs typeface="Microsoft JhengHei"/>
+                        </a:rPr>
+                        <a:t>100 × 0.18 元</a:t>
+                      </a:r>
+                    </a:p>
+                  </a:txBody>
+                  <a:tcPr anchor="ctr" marL="91440" marR="91440" marT="18288" marB="18288">
+                    <a:lnL w="9525">
+                      <a:solidFill>
+                        <a:srgbClr val="D3DEEA"/>
+                      </a:solidFill>
+                    </a:lnL>
+                    <a:lnR w="9525">
+                      <a:solidFill>
+                        <a:srgbClr val="D3DEEA"/>
+                      </a:solidFill>
+                    </a:lnR>
+                    <a:lnT w="9525">
+                      <a:solidFill>
+                        <a:srgbClr val="D3DEEA"/>
+                      </a:solidFill>
+                    </a:lnT>
+                    <a:lnB w="9525">
+                      <a:solidFill>
+                        <a:srgbClr val="D3DEEA"/>
+                      </a:solidFill>
+                    </a:lnB>
+                    <a:solidFill>
+                      <a:srgbClr val="FFFFFF"/>
+                    </a:solidFill>
+                  </a:tcPr>
+                </a:tc>
+                <a:tc>
+                  <a:txBody>
+                    <a:bodyPr wrap="square"/>
+                    <a:lstStyle/>
+                    <a:p>
+                      <a:pPr algn="r"/>
+                      <a:r>
+                        <a:rPr sz="1200" b="1">
+                          <a:solidFill>
+                            <a:srgbClr val="14243A"/>
+                          </a:solidFill>
+                          <a:latin typeface="Microsoft JhengHei"/>
+                          <a:ea typeface="Microsoft JhengHei"/>
+                          <a:cs typeface="Microsoft JhengHei"/>
+                        </a:rPr>
+                        <a:t>18</a:t>
+                      </a:r>
+                    </a:p>
+                  </a:txBody>
+                  <a:tcPr anchor="ctr" marL="91440" marR="91440" marT="18288" marB="18288">
+                    <a:lnL w="9525">
+                      <a:solidFill>
+                        <a:srgbClr val="D3DEEA"/>
+                      </a:solidFill>
+                    </a:lnL>
+                    <a:lnR w="9525">
+                      <a:solidFill>
+                        <a:srgbClr val="D3DEEA"/>
+                      </a:solidFill>
+                    </a:lnR>
+                    <a:lnT w="9525">
+                      <a:solidFill>
+                        <a:srgbClr val="D3DEEA"/>
+                      </a:solidFill>
+                    </a:lnT>
+                    <a:lnB w="9525">
+                      <a:solidFill>
+                        <a:srgbClr val="D3DEEA"/>
+                      </a:solidFill>
+                    </a:lnB>
+                    <a:solidFill>
+                      <a:srgbClr val="FFFFFF"/>
+                    </a:solidFill>
+                  </a:tcPr>
+                </a:tc>
+              </a:tr>
+              <a:tr h="315468">
+                <a:tc>
+                  <a:txBody>
+                    <a:bodyPr wrap="square"/>
+                    <a:lstStyle/>
+                    <a:p>
+                      <a:pPr algn="l"/>
+                      <a:r>
+                        <a:rPr sz="1200" b="0">
+                          <a:solidFill>
+                            <a:srgbClr val="14243A"/>
+                          </a:solidFill>
+                          <a:latin typeface="Microsoft JhengHei"/>
+                          <a:ea typeface="Microsoft JhengHei"/>
+                          <a:cs typeface="Microsoft JhengHei"/>
+                        </a:rPr>
+                        <a:t>儀表板洞察 60 次</a:t>
+                      </a:r>
+                    </a:p>
+                  </a:txBody>
+                  <a:tcPr anchor="ctr" marL="91440" marR="91440" marT="18288" marB="18288">
+                    <a:lnL w="9525">
+                      <a:solidFill>
+                        <a:srgbClr val="D3DEEA"/>
+                      </a:solidFill>
+                    </a:lnL>
+                    <a:lnR w="9525">
+                      <a:solidFill>
+                        <a:srgbClr val="D3DEEA"/>
+                      </a:solidFill>
+                    </a:lnR>
+                    <a:lnT w="9525">
+                      <a:solidFill>
+                        <a:srgbClr val="D3DEEA"/>
+                      </a:solidFill>
+                    </a:lnT>
+                    <a:lnB w="9525">
+                      <a:solidFill>
+                        <a:srgbClr val="D3DEEA"/>
+                      </a:solidFill>
+                    </a:lnB>
+                    <a:solidFill>
+                      <a:srgbClr val="F3F7FC"/>
+                    </a:solidFill>
+                  </a:tcPr>
+                </a:tc>
+                <a:tc>
+                  <a:txBody>
+                    <a:bodyPr wrap="square"/>
+                    <a:lstStyle/>
+                    <a:p>
+                      <a:pPr algn="l"/>
+                      <a:r>
+                        <a:rPr sz="1200" b="0">
+                          <a:solidFill>
+                            <a:srgbClr val="3F546C"/>
+                          </a:solidFill>
+                          <a:latin typeface="Microsoft JhengHei"/>
+                          <a:ea typeface="Microsoft JhengHei"/>
+                          <a:cs typeface="Microsoft JhengHei"/>
+                        </a:rPr>
+                        <a:t>60 × 0.33 元</a:t>
+                      </a:r>
+                    </a:p>
+                  </a:txBody>
+                  <a:tcPr anchor="ctr" marL="91440" marR="91440" marT="18288" marB="18288">
+                    <a:lnL w="9525">
+                      <a:solidFill>
+                        <a:srgbClr val="D3DEEA"/>
+                      </a:solidFill>
+                    </a:lnL>
+                    <a:lnR w="9525">
+                      <a:solidFill>
+                        <a:srgbClr val="D3DEEA"/>
+                      </a:solidFill>
+                    </a:lnR>
+                    <a:lnT w="9525">
+                      <a:solidFill>
+                        <a:srgbClr val="D3DEEA"/>
+                      </a:solidFill>
+                    </a:lnT>
+                    <a:lnB w="9525">
+                      <a:solidFill>
+                        <a:srgbClr val="D3DEEA"/>
+                      </a:solidFill>
+                    </a:lnB>
+                    <a:solidFill>
+                      <a:srgbClr val="F3F7FC"/>
+                    </a:solidFill>
+                  </a:tcPr>
+                </a:tc>
+                <a:tc>
+                  <a:txBody>
+                    <a:bodyPr wrap="square"/>
+                    <a:lstStyle/>
+                    <a:p>
+                      <a:pPr algn="r"/>
+                      <a:r>
+                        <a:rPr sz="1200" b="1">
+                          <a:solidFill>
+                            <a:srgbClr val="14243A"/>
+                          </a:solidFill>
+                          <a:latin typeface="Microsoft JhengHei"/>
+                          <a:ea typeface="Microsoft JhengHei"/>
+                          <a:cs typeface="Microsoft JhengHei"/>
+                        </a:rPr>
+                        <a:t>20</a:t>
+                      </a:r>
+                    </a:p>
+                  </a:txBody>
+                  <a:tcPr anchor="ctr" marL="91440" marR="91440" marT="18288" marB="18288">
+                    <a:lnL w="9525">
+                      <a:solidFill>
+                        <a:srgbClr val="D3DEEA"/>
+                      </a:solidFill>
+                    </a:lnL>
+                    <a:lnR w="9525">
+                      <a:solidFill>
+                        <a:srgbClr val="D3DEEA"/>
+                      </a:solidFill>
+                    </a:lnR>
+                    <a:lnT w="9525">
+                      <a:solidFill>
+                        <a:srgbClr val="D3DEEA"/>
+                      </a:solidFill>
+                    </a:lnT>
+                    <a:lnB w="9525">
+                      <a:solidFill>
+                        <a:srgbClr val="D3DEEA"/>
+                      </a:solidFill>
+                    </a:lnB>
+                    <a:solidFill>
+                      <a:srgbClr val="F3F7FC"/>
+                    </a:solidFill>
+                  </a:tcPr>
+                </a:tc>
+              </a:tr>
+              <a:tr h="315468">
+                <a:tc>
+                  <a:txBody>
+                    <a:bodyPr wrap="square"/>
+                    <a:lstStyle/>
+                    <a:p>
+                      <a:pPr algn="l"/>
+                      <a:r>
+                        <a:rPr sz="1200" b="0">
+                          <a:solidFill>
+                            <a:srgbClr val="14243A"/>
+                          </a:solidFill>
+                          <a:latin typeface="Microsoft JhengHei"/>
+                          <a:ea typeface="Microsoft JhengHei"/>
+                          <a:cs typeface="Microsoft JhengHei"/>
+                        </a:rPr>
+                        <a:t>金流手續費</a:t>
+                      </a:r>
+                    </a:p>
+                  </a:txBody>
+                  <a:tcPr anchor="ctr" marL="91440" marR="91440" marT="18288" marB="18288">
+                    <a:lnL w="9525">
+                      <a:solidFill>
+                        <a:srgbClr val="D3DEEA"/>
+                      </a:solidFill>
+                    </a:lnL>
+                    <a:lnR w="9525">
+                      <a:solidFill>
+                        <a:srgbClr val="D3DEEA"/>
+                      </a:solidFill>
+                    </a:lnR>
+                    <a:lnT w="9525">
+                      <a:solidFill>
+                        <a:srgbClr val="D3DEEA"/>
+                      </a:solidFill>
+                    </a:lnT>
+                    <a:lnB w="9525">
+                      <a:solidFill>
+                        <a:srgbClr val="D3DEEA"/>
+                      </a:solidFill>
+                    </a:lnB>
+                    <a:solidFill>
+                      <a:srgbClr val="FFFFFF"/>
+                    </a:solidFill>
+                  </a:tcPr>
+                </a:tc>
+                <a:tc>
+                  <a:txBody>
+                    <a:bodyPr wrap="square"/>
+                    <a:lstStyle/>
+                    <a:p>
+                      <a:pPr algn="l"/>
+                      <a:r>
+                        <a:rPr sz="1200" b="0">
+                          <a:solidFill>
+                            <a:srgbClr val="3F546C"/>
+                          </a:solidFill>
+                          <a:latin typeface="Microsoft JhengHei"/>
+                          <a:ea typeface="Microsoft JhengHei"/>
+                          <a:cs typeface="Microsoft JhengHei"/>
+                        </a:rPr>
+                        <a:t>月費 490 × 3%</a:t>
+                      </a:r>
+                    </a:p>
+                  </a:txBody>
+                  <a:tcPr anchor="ctr" marL="91440" marR="91440" marT="18288" marB="18288">
+                    <a:lnL w="9525">
+                      <a:solidFill>
+                        <a:srgbClr val="D3DEEA"/>
+                      </a:solidFill>
+                    </a:lnL>
+                    <a:lnR w="9525">
+                      <a:solidFill>
+                        <a:srgbClr val="D3DEEA"/>
+                      </a:solidFill>
+                    </a:lnR>
+                    <a:lnT w="9525">
+                      <a:solidFill>
+                        <a:srgbClr val="D3DEEA"/>
+                      </a:solidFill>
+                    </a:lnT>
+                    <a:lnB w="9525">
+                      <a:solidFill>
+                        <a:srgbClr val="D3DEEA"/>
+                      </a:solidFill>
+                    </a:lnB>
+                    <a:solidFill>
+                      <a:srgbClr val="FFFFFF"/>
+                    </a:solidFill>
+                  </a:tcPr>
+                </a:tc>
+                <a:tc>
+                  <a:txBody>
+                    <a:bodyPr wrap="square"/>
+                    <a:lstStyle/>
+                    <a:p>
+                      <a:pPr algn="r"/>
+                      <a:r>
+                        <a:rPr sz="1200" b="1">
+                          <a:solidFill>
+                            <a:srgbClr val="14243A"/>
+                          </a:solidFill>
+                          <a:latin typeface="Microsoft JhengHei"/>
+                          <a:ea typeface="Microsoft JhengHei"/>
+                          <a:cs typeface="Microsoft JhengHei"/>
+                        </a:rPr>
+                        <a:t>15</a:t>
+                      </a:r>
+                    </a:p>
+                  </a:txBody>
+                  <a:tcPr anchor="ctr" marL="91440" marR="91440" marT="18288" marB="18288">
+                    <a:lnL w="9525">
+                      <a:solidFill>
+                        <a:srgbClr val="D3DEEA"/>
+                      </a:solidFill>
+                    </a:lnL>
+                    <a:lnR w="9525">
+                      <a:solidFill>
+                        <a:srgbClr val="D3DEEA"/>
+                      </a:solidFill>
+                    </a:lnR>
+                    <a:lnT w="9525">
+                      <a:solidFill>
+                        <a:srgbClr val="D3DEEA"/>
+                      </a:solidFill>
+                    </a:lnT>
+                    <a:lnB w="9525">
+                      <a:solidFill>
+                        <a:srgbClr val="D3DEEA"/>
+                      </a:solidFill>
+                    </a:lnB>
+                    <a:solidFill>
+                      <a:srgbClr val="FFFFFF"/>
+                    </a:solidFill>
+                  </a:tcPr>
+                </a:tc>
+              </a:tr>
+              <a:tr h="315468">
+                <a:tc>
+                  <a:txBody>
+                    <a:bodyPr wrap="square"/>
+                    <a:lstStyle/>
+                    <a:p>
+                      <a:pPr algn="l"/>
+                      <a:r>
+                        <a:rPr sz="1300" b="1">
+                          <a:solidFill>
+                            <a:srgbClr val="D46A12"/>
+                          </a:solidFill>
+                          <a:latin typeface="Microsoft JhengHei"/>
+                          <a:ea typeface="Microsoft JhengHei"/>
+                          <a:cs typeface="Microsoft JhengHei"/>
+                        </a:rPr>
+                        <a:t>變動成本 v</a:t>
+                      </a:r>
+                    </a:p>
+                  </a:txBody>
+                  <a:tcPr anchor="ctr" marL="91440" marR="91440" marT="18288" marB="18288">
+                    <a:lnL w="9525">
+                      <a:solidFill>
+                        <a:srgbClr val="D3DEEA"/>
+                      </a:solidFill>
+                    </a:lnL>
+                    <a:lnR w="9525">
+                      <a:solidFill>
+                        <a:srgbClr val="D3DEEA"/>
+                      </a:solidFill>
+                    </a:lnR>
+                    <a:lnT w="9525">
+                      <a:solidFill>
+                        <a:srgbClr val="D3DEEA"/>
+                      </a:solidFill>
+                    </a:lnT>
+                    <a:lnB w="9525">
+                      <a:solidFill>
+                        <a:srgbClr val="D3DEEA"/>
+                      </a:solidFill>
+                    </a:lnB>
+                    <a:solidFill>
+                      <a:srgbClr val="FDEEDF"/>
+                    </a:solidFill>
+                  </a:tcPr>
+                </a:tc>
+                <a:tc>
+                  <a:txBody>
+                    <a:bodyPr wrap="square"/>
+                    <a:lstStyle/>
+                    <a:p>
+                      <a:pPr algn="l"/>
+                      <a:r>
+                        <a:rPr sz="1200" b="0">
+                          <a:solidFill>
+                            <a:srgbClr val="3F546C"/>
+                          </a:solidFill>
+                          <a:latin typeface="Microsoft JhengHei"/>
+                          <a:ea typeface="Microsoft JhengHei"/>
+                          <a:cs typeface="Microsoft JhengHei"/>
+                        </a:rPr>
+                        <a:t>以上三項合計（每位用戶／月）</a:t>
+                      </a:r>
+                    </a:p>
+                  </a:txBody>
+                  <a:tcPr anchor="ctr" marL="91440" marR="91440" marT="18288" marB="18288">
+                    <a:lnL w="9525">
+                      <a:solidFill>
+                        <a:srgbClr val="D3DEEA"/>
+                      </a:solidFill>
+                    </a:lnL>
+                    <a:lnR w="9525">
+                      <a:solidFill>
+                        <a:srgbClr val="D3DEEA"/>
+                      </a:solidFill>
+                    </a:lnR>
+                    <a:lnT w="9525">
+                      <a:solidFill>
+                        <a:srgbClr val="D3DEEA"/>
+                      </a:solidFill>
+                    </a:lnT>
+                    <a:lnB w="9525">
+                      <a:solidFill>
+                        <a:srgbClr val="D3DEEA"/>
+                      </a:solidFill>
+                    </a:lnB>
+                    <a:solidFill>
+                      <a:srgbClr val="FDEEDF"/>
+                    </a:solidFill>
+                  </a:tcPr>
+                </a:tc>
+                <a:tc>
+                  <a:txBody>
+                    <a:bodyPr wrap="square"/>
+                    <a:lstStyle/>
+                    <a:p>
+                      <a:pPr algn="r"/>
+                      <a:r>
+                        <a:rPr sz="1400" b="1">
+                          <a:solidFill>
+                            <a:srgbClr val="D46A12"/>
+                          </a:solidFill>
+                          <a:latin typeface="Microsoft JhengHei"/>
+                          <a:ea typeface="Microsoft JhengHei"/>
+                          <a:cs typeface="Microsoft JhengHei"/>
+                        </a:rPr>
+                        <a:t>53</a:t>
+                      </a:r>
+                    </a:p>
+                  </a:txBody>
+                  <a:tcPr anchor="ctr" marL="91440" marR="91440" marT="18288" marB="18288">
+                    <a:lnL w="9525">
+                      <a:solidFill>
+                        <a:srgbClr val="D3DEEA"/>
+                      </a:solidFill>
+                    </a:lnL>
+                    <a:lnR w="9525">
+                      <a:solidFill>
+                        <a:srgbClr val="D3DEEA"/>
+                      </a:solidFill>
+                    </a:lnR>
+                    <a:lnT w="9525">
+                      <a:solidFill>
+                        <a:srgbClr val="D3DEEA"/>
+                      </a:solidFill>
+                    </a:lnT>
+                    <a:lnB w="9525">
+                      <a:solidFill>
+                        <a:srgbClr val="D3DEEA"/>
+                      </a:solidFill>
+                    </a:lnB>
+                    <a:solidFill>
+                      <a:srgbClr val="FDEEDF"/>
+                    </a:solidFill>
+                  </a:tcPr>
+                </a:tc>
+              </a:tr>
+            </a:tbl>
+          </a:graphicData>
+        </a:graphic>
+      </p:graphicFrame>
+      <p:sp>
+        <p:nvSpPr>
+          <p:cNvPr id="31" name="Unit Cost Formula"/>
+          <p:cNvSpPr/>
+          <p:nvPr/>
+        </p:nvSpPr>
+        <p:spPr>
+          <a:xfrm>
+            <a:off x="731520" y="5125212"/>
+            <a:ext cx="6492240" cy="292608"/>
           </a:xfrm>
           <a:prstGeom prst="rect">
             <a:avLst/>
           </a:prstGeom>
           <a:noFill/>
-        </p:spPr>
-        <p:txBody>
-          <a:bodyPr wrap="square" lIns="0" tIns="0" rIns="0" bIns="0" anchor="ctr"/>
-          <a:lstStyle/>
-          <a:p>
-            <a:pPr marL="0" indent="0" algn="ctr">
-              <a:buNone/>
+          <a:ln>
+            <a:noFill/>
+          </a:ln>
+          <a:effectLst/>
+        </p:spPr>
+        <p:style>
+          <a:lnRef idx="1">
+            <a:schemeClr val="accent1"/>
+          </a:lnRef>
+          <a:fillRef idx="3">
+            <a:schemeClr val="accent1"/>
+          </a:fillRef>
+          <a:effectRef idx="2">
+            <a:schemeClr val="accent1"/>
+          </a:effectRef>
+          <a:fontRef idx="minor">
+            <a:schemeClr val="lt1"/>
+          </a:fontRef>
+        </p:style>
+        <p:txBody>
+          <a:bodyPr rtlCol="0" anchor="ctr" wrap="square" lIns="137160" rIns="137160"/>
+          <a:lstStyle/>
+          <a:p>
+            <a:pPr algn="l">
+              <a:spcAft>
+                <a:spcPts val="300"/>
+              </a:spcAft>
             </a:pPr>
             <a:r>
-              <a:rPr sz="3400" b="1">
-                <a:solidFill>
-                  <a:srgbClr val="1F6FB8"/>
+              <a:rPr sz="1050" b="0">
+                <a:solidFill>
+                  <a:srgbClr val="3F546C"/>
                 </a:solidFill>
                 <a:latin typeface="Microsoft JhengHei"/>
                 <a:ea typeface="Microsoft JhengHei"/>
                 <a:cs typeface="Microsoft JhengHei"/>
               </a:rPr>
-              <a:t>0.18 元</a:t>
-            </a:r>
-            <a:endParaRPr sz="3400"/>
-          </a:p>
-        </p:txBody>
-      </p:sp>
-      <p:sp>
-        <p:nvSpPr>
-          <p:cNvPr id="8" name="Text 6">
-            <a:extLst>
-              <a:ext uri="{FF2B5EF4-FFF2-40B4-BE49-F238E27FC236}">
-                <a16:creationId xmlns:a16="http://schemas.microsoft.com/office/drawing/2014/main" id="{D2BEA3D9-A009-4CEA-B0DD-D5E222787E0A}"/>
-              </a:ext>
-            </a:extLst>
-          </p:cNvPr>
-          <p:cNvSpPr>
-            <a:spLocks noGrp="1"/>
-          </p:cNvSpPr>
-          <p:nvPr/>
-        </p:nvSpPr>
-        <p:spPr>
-          <a:xfrm>
-            <a:off x="822960" y="2880360"/>
-            <a:ext cx="2377440" cy="365760"/>
-          </a:xfrm>
-          <a:prstGeom prst="rect">
-            <a:avLst/>
-          </a:prstGeom>
-          <a:noFill/>
-        </p:spPr>
-        <p:txBody>
-          <a:bodyPr wrap="square" lIns="0" tIns="0" rIns="0" bIns="0" anchor="ctr"/>
-          <a:lstStyle/>
-          <a:p>
-            <a:pPr marL="0" indent="0" algn="ctr">
-              <a:buNone/>
+              <a:t>單次費用＝（輸入 token × 0.25＋輸出 token × 1.50）÷ 10⁶ × 32 → 問答 0.18 元、洞察 0.33 元</a:t>
+            </a:r>
+          </a:p>
+        </p:txBody>
+      </p:sp>
+      <p:sp>
+        <p:nvSpPr>
+          <p:cNvPr id="32" name="Break-even Formula"/>
+          <p:cNvSpPr/>
+          <p:nvPr/>
+        </p:nvSpPr>
+        <p:spPr>
+          <a:xfrm>
+            <a:off x="7452360" y="1627632"/>
+            <a:ext cx="4005072" cy="1298448"/>
+          </a:xfrm>
+          <a:prstGeom prst="roundRect">
+            <a:avLst>
+              <a:gd name="adj" fmla="val 6000"/>
+            </a:avLst>
+          </a:prstGeom>
+          <a:solidFill>
+            <a:srgbClr val="E2EDF9"/>
+          </a:solidFill>
+          <a:ln w="12700">
+            <a:solidFill>
+              <a:srgbClr val="C9DAEE"/>
+            </a:solidFill>
+          </a:ln>
+          <a:effectLst/>
+        </p:spPr>
+        <p:style>
+          <a:lnRef idx="1">
+            <a:schemeClr val="accent1"/>
+          </a:lnRef>
+          <a:fillRef idx="3">
+            <a:schemeClr val="accent1"/>
+          </a:fillRef>
+          <a:effectRef idx="2">
+            <a:schemeClr val="accent1"/>
+          </a:effectRef>
+          <a:fontRef idx="minor">
+            <a:schemeClr val="lt1"/>
+          </a:fontRef>
+        </p:style>
+        <p:txBody>
+          <a:bodyPr rtlCol="0" anchor="ctr" wrap="square" lIns="137160" rIns="137160"/>
+          <a:lstStyle/>
+          <a:p>
+            <a:pPr algn="l">
+              <a:spcAft>
+                <a:spcPts val="300"/>
+              </a:spcAft>
             </a:pPr>
             <a:r>
-              <a:rPr sz="1600" b="1">
-                <a:solidFill>
-                  <a:srgbClr val="14243A"/>
+              <a:rPr sz="1400" b="1">
+                <a:solidFill>
+                  <a:srgbClr val="D46A12"/>
                 </a:solidFill>
                 <a:latin typeface="Microsoft JhengHei"/>
                 <a:ea typeface="Microsoft JhengHei"/>
                 <a:cs typeface="Microsoft JhengHei"/>
               </a:rPr>
-              <a:t>每次 AI 問答（保守上限）</a:t>
-            </a:r>
-            <a:endParaRPr sz="1600"/>
-          </a:p>
-        </p:txBody>
-      </p:sp>
-      <p:sp>
-        <p:nvSpPr>
-          <p:cNvPr id="9" name="Text 7">
-            <a:extLst>
-              <a:ext uri="{FF2B5EF4-FFF2-40B4-BE49-F238E27FC236}">
-                <a16:creationId xmlns:a16="http://schemas.microsoft.com/office/drawing/2014/main" id="{5C76224E-6880-42E4-BCC5-DD201F63DAD7}"/>
-              </a:ext>
-            </a:extLst>
-          </p:cNvPr>
-          <p:cNvSpPr>
-            <a:spLocks noGrp="1"/>
-          </p:cNvSpPr>
-          <p:nvPr/>
-        </p:nvSpPr>
-        <p:spPr>
-          <a:xfrm>
-            <a:off x="868680" y="3291840"/>
-            <a:ext cx="2286000" cy="365760"/>
-          </a:xfrm>
-          <a:prstGeom prst="rect">
-            <a:avLst/>
-          </a:prstGeom>
-          <a:noFill/>
-        </p:spPr>
-        <p:txBody>
-          <a:bodyPr wrap="square" lIns="0" tIns="0" rIns="0" bIns="0" anchor="t"/>
-          <a:lstStyle/>
-          <a:p>
-            <a:pPr marL="0" indent="0" algn="ctr">
-              <a:buNone/>
+              <a:t>損益平衡怎麼算</a:t>
+            </a:r>
+          </a:p>
+          <a:p>
+            <a:pPr algn="l">
+              <a:spcAft>
+                <a:spcPts val="300"/>
+              </a:spcAft>
             </a:pPr>
             <a:r>
-              <a:rPr sz="1200">
-                <a:solidFill>
-                  <a:srgbClr val="3F546C"/>
+              <a:rPr sz="1400" b="1">
+                <a:solidFill>
+                  <a:srgbClr val="14243A"/>
                 </a:solidFill>
                 <a:latin typeface="Microsoft JhengHei"/>
                 <a:ea typeface="Microsoft JhengHei"/>
                 <a:cs typeface="Microsoft JhengHei"/>
               </a:rPr>
-              <a:t>實測 prompt×官方單價</a:t>
-            </a:r>
-            <a:endParaRPr sz="1200"/>
-          </a:p>
-        </p:txBody>
-      </p:sp>
-      <p:sp>
-        <p:nvSpPr>
-          <p:cNvPr id="10" name="Shape 8">
-            <a:extLst>
-              <a:ext uri="{FF2B5EF4-FFF2-40B4-BE49-F238E27FC236}">
-                <a16:creationId xmlns:a16="http://schemas.microsoft.com/office/drawing/2014/main" id="{9F5898B4-0D91-400B-A3E6-1EA3FA362362}"/>
-              </a:ext>
-            </a:extLst>
-          </p:cNvPr>
-          <p:cNvSpPr>
-            <a:spLocks noGrp="1"/>
-          </p:cNvSpPr>
-          <p:nvPr/>
-        </p:nvSpPr>
-        <p:spPr>
-          <a:xfrm>
-            <a:off x="3474720" y="1783080"/>
-            <a:ext cx="2560320" cy="1965960"/>
-          </a:xfrm>
-          <a:prstGeom prst="roundRect">
-            <a:avLst>
-              <a:gd name="adj" fmla="val 7442"/>
-            </a:avLst>
-          </a:prstGeom>
-          <a:solidFill>
-            <a:srgbClr val="FFFFFF"/>
-          </a:solidFill>
-          <a:ln w="12700">
-            <a:solidFill>
-              <a:srgbClr val="D3DEEA"/>
-            </a:solidFill>
-            <a:prstDash val="solid"/>
-          </a:ln>
-        </p:spPr>
-        <p:txBody>
-          <a:bodyPr/>
-          <a:lstStyle/>
-          <a:p>
-            <a:endParaRPr/>
-          </a:p>
-        </p:txBody>
-      </p:sp>
-      <p:sp>
-        <p:nvSpPr>
-          <p:cNvPr id="11" name="Text 9">
-            <a:extLst>
-              <a:ext uri="{FF2B5EF4-FFF2-40B4-BE49-F238E27FC236}">
-                <a16:creationId xmlns:a16="http://schemas.microsoft.com/office/drawing/2014/main" id="{B8A85723-AC44-4CA2-ACCB-8AE9A59763C9}"/>
-              </a:ext>
-            </a:extLst>
-          </p:cNvPr>
-          <p:cNvSpPr>
-            <a:spLocks noGrp="1"/>
-          </p:cNvSpPr>
-          <p:nvPr/>
-        </p:nvSpPr>
-        <p:spPr>
-          <a:xfrm>
-            <a:off x="3566160" y="2057400"/>
-            <a:ext cx="2377440" cy="777240"/>
-          </a:xfrm>
-          <a:prstGeom prst="rect">
-            <a:avLst/>
-          </a:prstGeom>
-          <a:noFill/>
-        </p:spPr>
-        <p:txBody>
-          <a:bodyPr wrap="square" lIns="0" tIns="0" rIns="0" bIns="0" anchor="ctr"/>
-          <a:lstStyle/>
-          <a:p>
-            <a:pPr marL="0" indent="0" algn="ctr">
-              <a:buNone/>
+              <a:t>月收入 R(N)＝490 × N</a:t>
+            </a:r>
+          </a:p>
+          <a:p>
+            <a:pPr algn="l">
+              <a:spcAft>
+                <a:spcPts val="300"/>
+              </a:spcAft>
             </a:pPr>
             <a:r>
-              <a:rPr sz="3400" b="1">
-                <a:solidFill>
-                  <a:srgbClr val="1F6FB8"/>
+              <a:rPr sz="1400" b="1">
+                <a:solidFill>
+                  <a:srgbClr val="14243A"/>
                 </a:solidFill>
                 <a:latin typeface="Microsoft JhengHei"/>
                 <a:ea typeface="Microsoft JhengHei"/>
                 <a:cs typeface="Microsoft JhengHei"/>
               </a:rPr>
-              <a:t>53 元</a:t>
-            </a:r>
-            <a:endParaRPr sz="3400"/>
-          </a:p>
-        </p:txBody>
-      </p:sp>
-      <p:sp>
-        <p:nvSpPr>
-          <p:cNvPr id="12" name="Text 10">
-            <a:extLst>
-              <a:ext uri="{FF2B5EF4-FFF2-40B4-BE49-F238E27FC236}">
-                <a16:creationId xmlns:a16="http://schemas.microsoft.com/office/drawing/2014/main" id="{4DCBBE7D-2D2D-4D5C-8E2C-9C15E8694073}"/>
-              </a:ext>
-            </a:extLst>
-          </p:cNvPr>
-          <p:cNvSpPr>
-            <a:spLocks noGrp="1"/>
-          </p:cNvSpPr>
-          <p:nvPr/>
-        </p:nvSpPr>
-        <p:spPr>
-          <a:xfrm>
-            <a:off x="3566160" y="2880360"/>
-            <a:ext cx="2377440" cy="365760"/>
-          </a:xfrm>
-          <a:prstGeom prst="rect">
-            <a:avLst/>
-          </a:prstGeom>
-          <a:noFill/>
-        </p:spPr>
-        <p:txBody>
-          <a:bodyPr wrap="square" lIns="0" tIns="0" rIns="0" bIns="0" anchor="ctr"/>
-          <a:lstStyle/>
-          <a:p>
-            <a:pPr marL="0" indent="0" algn="ctr">
-              <a:buNone/>
+              <a:t>月支出 C(N)＝1,456＋53 × N</a:t>
+            </a:r>
+          </a:p>
+          <a:p>
+            <a:pPr algn="l">
+              <a:spcAft>
+                <a:spcPts val="300"/>
+              </a:spcAft>
             </a:pPr>
             <a:r>
-              <a:rPr sz="1600" b="1">
-                <a:solidFill>
-                  <a:srgbClr val="14243A"/>
+              <a:rPr sz="1300" b="1">
+                <a:solidFill>
+                  <a:srgbClr val="2073BE"/>
                 </a:solidFill>
                 <a:latin typeface="Microsoft JhengHei"/>
                 <a:ea typeface="Microsoft JhengHei"/>
                 <a:cs typeface="Microsoft JhengHei"/>
               </a:rPr>
-              <a:t>每位專業版用戶／月</a:t>
-            </a:r>
-            <a:endParaRPr sz="1600"/>
-          </a:p>
-        </p:txBody>
-      </p:sp>
-      <p:sp>
-        <p:nvSpPr>
-          <p:cNvPr id="13" name="Text 11">
-            <a:extLst>
-              <a:ext uri="{FF2B5EF4-FFF2-40B4-BE49-F238E27FC236}">
-                <a16:creationId xmlns:a16="http://schemas.microsoft.com/office/drawing/2014/main" id="{2E7B73D4-0CE7-48A5-BF08-571B22683F5C}"/>
-              </a:ext>
-            </a:extLst>
-          </p:cNvPr>
-          <p:cNvSpPr>
-            <a:spLocks noGrp="1"/>
-          </p:cNvSpPr>
-          <p:nvPr/>
-        </p:nvSpPr>
-        <p:spPr>
-          <a:xfrm>
-            <a:off x="3611880" y="3291840"/>
-            <a:ext cx="2286000" cy="365760"/>
-          </a:xfrm>
-          <a:prstGeom prst="rect">
-            <a:avLst/>
-          </a:prstGeom>
-          <a:noFill/>
-        </p:spPr>
-        <p:txBody>
-          <a:bodyPr wrap="square" lIns="0" tIns="0" rIns="0" bIns="0" anchor="t"/>
-          <a:lstStyle/>
-          <a:p>
-            <a:pPr marL="0" indent="0" algn="ctr">
-              <a:buNone/>
-            </a:pPr>
-            <a:r>
-              <a:rPr sz="1200">
-                <a:solidFill>
-                  <a:srgbClr val="3F546C"/>
-                </a:solidFill>
-                <a:latin typeface="Microsoft JhengHei"/>
-                <a:ea typeface="Microsoft JhengHei"/>
-                <a:cs typeface="Microsoft JhengHei"/>
-              </a:rPr>
-              <a:t>問答100、洞察60、金流3%</a:t>
-            </a:r>
-            <a:endParaRPr sz="1200"/>
-          </a:p>
-        </p:txBody>
-      </p:sp>
-      <p:sp>
-        <p:nvSpPr>
-          <p:cNvPr id="14" name="Shape 12">
-            <a:extLst>
-              <a:ext uri="{FF2B5EF4-FFF2-40B4-BE49-F238E27FC236}">
-                <a16:creationId xmlns:a16="http://schemas.microsoft.com/office/drawing/2014/main" id="{269880F6-9021-42D8-857E-6B3D32E8F860}"/>
-              </a:ext>
-            </a:extLst>
-          </p:cNvPr>
-          <p:cNvSpPr>
-            <a:spLocks noGrp="1"/>
-          </p:cNvSpPr>
-          <p:nvPr/>
-        </p:nvSpPr>
-        <p:spPr>
-          <a:xfrm>
-            <a:off x="6217920" y="1783080"/>
-            <a:ext cx="2560320" cy="1965960"/>
-          </a:xfrm>
-          <a:prstGeom prst="roundRect">
-            <a:avLst>
-              <a:gd name="adj" fmla="val 7442"/>
-            </a:avLst>
-          </a:prstGeom>
-          <a:solidFill>
-            <a:srgbClr val="FFFFFF"/>
-          </a:solidFill>
-          <a:ln w="12700">
-            <a:solidFill>
-              <a:srgbClr val="D3DEEA"/>
-            </a:solidFill>
-            <a:prstDash val="solid"/>
-          </a:ln>
-        </p:spPr>
-        <p:txBody>
-          <a:bodyPr/>
-          <a:lstStyle/>
-          <a:p>
-            <a:endParaRPr/>
-          </a:p>
-        </p:txBody>
-      </p:sp>
-      <p:sp>
-        <p:nvSpPr>
-          <p:cNvPr id="15" name="Text 13">
-            <a:extLst>
-              <a:ext uri="{FF2B5EF4-FFF2-40B4-BE49-F238E27FC236}">
-                <a16:creationId xmlns:a16="http://schemas.microsoft.com/office/drawing/2014/main" id="{D4D12D62-5D8D-4E45-BCFC-ED5E485912D6}"/>
-              </a:ext>
-            </a:extLst>
-          </p:cNvPr>
-          <p:cNvSpPr>
-            <a:spLocks noGrp="1"/>
-          </p:cNvSpPr>
-          <p:nvPr/>
-        </p:nvSpPr>
-        <p:spPr>
-          <a:xfrm>
-            <a:off x="6309360" y="2057400"/>
-            <a:ext cx="2377440" cy="777240"/>
-          </a:xfrm>
-          <a:prstGeom prst="rect">
-            <a:avLst/>
-          </a:prstGeom>
-          <a:noFill/>
-        </p:spPr>
-        <p:txBody>
-          <a:bodyPr wrap="square" lIns="0" tIns="0" rIns="0" bIns="0" anchor="ctr"/>
-          <a:lstStyle/>
-          <a:p>
-            <a:pPr marL="0" indent="0" algn="ctr">
-              <a:buNone/>
-            </a:pPr>
-            <a:r>
-              <a:rPr sz="3400" b="1">
-                <a:solidFill>
-                  <a:srgbClr val="1F6FB8"/>
-                </a:solidFill>
-                <a:latin typeface="Microsoft JhengHei"/>
-                <a:ea typeface="Microsoft JhengHei"/>
-                <a:cs typeface="Microsoft JhengHei"/>
-              </a:rPr>
-              <a:t>1,456 元</a:t>
-            </a:r>
-            <a:endParaRPr sz="3400"/>
-          </a:p>
-        </p:txBody>
-      </p:sp>
-      <p:sp>
-        <p:nvSpPr>
-          <p:cNvPr id="16" name="Text 14">
-            <a:extLst>
-              <a:ext uri="{FF2B5EF4-FFF2-40B4-BE49-F238E27FC236}">
-                <a16:creationId xmlns:a16="http://schemas.microsoft.com/office/drawing/2014/main" id="{2ED8EA77-2B5E-469E-8275-5A4B4D5F31DC}"/>
-              </a:ext>
-            </a:extLst>
-          </p:cNvPr>
-          <p:cNvSpPr>
-            <a:spLocks noGrp="1"/>
-          </p:cNvSpPr>
-          <p:nvPr/>
-        </p:nvSpPr>
-        <p:spPr>
-          <a:xfrm>
-            <a:off x="6309360" y="2880360"/>
-            <a:ext cx="2377440" cy="365760"/>
-          </a:xfrm>
-          <a:prstGeom prst="rect">
-            <a:avLst/>
-          </a:prstGeom>
-          <a:noFill/>
-        </p:spPr>
-        <p:txBody>
-          <a:bodyPr wrap="square" lIns="0" tIns="0" rIns="0" bIns="0" anchor="ctr"/>
-          <a:lstStyle/>
-          <a:p>
-            <a:pPr marL="0" indent="0" algn="ctr">
-              <a:buNone/>
-            </a:pPr>
-            <a:r>
-              <a:rPr sz="1600" b="1">
-                <a:solidFill>
-                  <a:srgbClr val="14243A"/>
-                </a:solidFill>
-                <a:latin typeface="Microsoft JhengHei"/>
-                <a:ea typeface="Microsoft JhengHei"/>
-                <a:cs typeface="Microsoft JhengHei"/>
-              </a:rPr>
-              <a:t>每月雲端固定支出</a:t>
-            </a:r>
-            <a:endParaRPr sz="1600"/>
-          </a:p>
-        </p:txBody>
-      </p:sp>
-      <p:sp>
-        <p:nvSpPr>
-          <p:cNvPr id="17" name="Text 15">
-            <a:extLst>
-              <a:ext uri="{FF2B5EF4-FFF2-40B4-BE49-F238E27FC236}">
-                <a16:creationId xmlns:a16="http://schemas.microsoft.com/office/drawing/2014/main" id="{0AC93142-C0A9-4B69-9623-0ABACA098C3D}"/>
-              </a:ext>
-            </a:extLst>
-          </p:cNvPr>
-          <p:cNvSpPr>
-            <a:spLocks noGrp="1"/>
-          </p:cNvSpPr>
-          <p:nvPr/>
-        </p:nvSpPr>
-        <p:spPr>
-          <a:xfrm>
-            <a:off x="6355080" y="3291840"/>
-            <a:ext cx="2286000" cy="365760"/>
-          </a:xfrm>
-          <a:prstGeom prst="rect">
-            <a:avLst/>
-          </a:prstGeom>
-          <a:noFill/>
-        </p:spPr>
-        <p:txBody>
-          <a:bodyPr wrap="square" lIns="0" tIns="0" rIns="0" bIns="0" anchor="t"/>
-          <a:lstStyle/>
-          <a:p>
-            <a:pPr marL="0" indent="0" algn="ctr">
-              <a:buNone/>
-            </a:pPr>
-            <a:r>
-              <a:rPr sz="1200">
-                <a:solidFill>
-                  <a:srgbClr val="3F546C"/>
-                </a:solidFill>
-                <a:latin typeface="Microsoft JhengHei"/>
-                <a:ea typeface="Microsoft JhengHei"/>
-                <a:cs typeface="Microsoft JhengHei"/>
-              </a:rPr>
-              <a:t>主機、資料庫、網域、判讀</a:t>
-            </a:r>
-            <a:endParaRPr sz="1200"/>
-          </a:p>
-        </p:txBody>
-      </p:sp>
-      <p:sp>
-        <p:nvSpPr>
-          <p:cNvPr id="18" name="Shape 16">
-            <a:extLst>
-              <a:ext uri="{FF2B5EF4-FFF2-40B4-BE49-F238E27FC236}">
-                <a16:creationId xmlns:a16="http://schemas.microsoft.com/office/drawing/2014/main" id="{5EC6AB01-C01E-4038-B70A-DD2D8BA2BB57}"/>
-              </a:ext>
-            </a:extLst>
-          </p:cNvPr>
-          <p:cNvSpPr>
-            <a:spLocks noGrp="1"/>
-          </p:cNvSpPr>
-          <p:nvPr/>
-        </p:nvSpPr>
-        <p:spPr>
-          <a:xfrm>
-            <a:off x="9052560" y="1783080"/>
-            <a:ext cx="2404872" cy="3703320"/>
-          </a:xfrm>
-          <a:prstGeom prst="roundRect">
-            <a:avLst>
-              <a:gd name="adj" fmla="val 6084"/>
-            </a:avLst>
-          </a:prstGeom>
-          <a:solidFill>
-            <a:srgbClr val="E2EDF9"/>
-          </a:solidFill>
-          <a:ln w="19050">
-            <a:solidFill>
-              <a:srgbClr val="D46A12"/>
-            </a:solidFill>
-            <a:prstDash val="solid"/>
-          </a:ln>
-        </p:spPr>
-        <p:txBody>
-          <a:bodyPr/>
-          <a:lstStyle/>
-          <a:p>
-            <a:endParaRPr/>
-          </a:p>
-        </p:txBody>
-      </p:sp>
-      <p:sp>
-        <p:nvSpPr>
-          <p:cNvPr id="19" name="Text 17">
-            <a:extLst>
-              <a:ext uri="{FF2B5EF4-FFF2-40B4-BE49-F238E27FC236}">
-                <a16:creationId xmlns:a16="http://schemas.microsoft.com/office/drawing/2014/main" id="{8F08BD10-8E54-4639-B49F-5A1262B8B7C0}"/>
-              </a:ext>
-            </a:extLst>
-          </p:cNvPr>
-          <p:cNvSpPr>
-            <a:spLocks noGrp="1"/>
-          </p:cNvSpPr>
-          <p:nvPr/>
-        </p:nvSpPr>
-        <p:spPr>
-          <a:xfrm>
-            <a:off x="9052560" y="2057400"/>
-            <a:ext cx="2404872" cy="365760"/>
-          </a:xfrm>
-          <a:prstGeom prst="rect">
-            <a:avLst/>
-          </a:prstGeom>
-          <a:noFill/>
-        </p:spPr>
-        <p:txBody>
-          <a:bodyPr wrap="square" lIns="0" tIns="0" rIns="0" bIns="0" anchor="ctr"/>
-          <a:lstStyle/>
-          <a:p>
-            <a:pPr marL="0" indent="0" algn="ctr">
-              <a:buNone/>
-            </a:pPr>
-            <a:r>
-              <a:rPr sz="1600" b="1">
-                <a:solidFill>
-                  <a:srgbClr val="D46A12"/>
-                </a:solidFill>
-                <a:latin typeface="Microsoft JhengHei"/>
-                <a:ea typeface="Microsoft JhengHei"/>
-                <a:cs typeface="Microsoft JhengHei"/>
-              </a:rPr>
-              <a:t>損益平衡點</a:t>
-            </a:r>
-            <a:endParaRPr sz="1600"/>
-          </a:p>
-        </p:txBody>
-      </p:sp>
-      <p:sp>
-        <p:nvSpPr>
-          <p:cNvPr id="20" name="Text 18">
-            <a:extLst>
-              <a:ext uri="{FF2B5EF4-FFF2-40B4-BE49-F238E27FC236}">
-                <a16:creationId xmlns:a16="http://schemas.microsoft.com/office/drawing/2014/main" id="{3CBD95C2-6776-488D-8AA1-A33AB42A5892}"/>
-              </a:ext>
-            </a:extLst>
-          </p:cNvPr>
-          <p:cNvSpPr>
-            <a:spLocks noGrp="1"/>
-          </p:cNvSpPr>
-          <p:nvPr/>
-        </p:nvSpPr>
-        <p:spPr>
-          <a:xfrm>
-            <a:off x="9052560" y="2514600"/>
-            <a:ext cx="2404872" cy="1005840"/>
-          </a:xfrm>
-          <a:prstGeom prst="rect">
-            <a:avLst/>
-          </a:prstGeom>
-          <a:noFill/>
-        </p:spPr>
-        <p:txBody>
-          <a:bodyPr wrap="square" lIns="0" tIns="0" rIns="0" bIns="0" anchor="ctr"/>
-          <a:lstStyle/>
-          <a:p>
-            <a:pPr marL="0" indent="0" algn="ctr">
-              <a:buNone/>
-            </a:pPr>
-            <a:r>
-              <a:rPr sz="5200" b="1">
-                <a:solidFill>
-                  <a:srgbClr val="14243A"/>
-                </a:solidFill>
-                <a:latin typeface="Microsoft JhengHei"/>
-                <a:ea typeface="Microsoft JhengHei"/>
-                <a:cs typeface="Microsoft JhengHei"/>
-              </a:rPr>
-              <a:t>4 個</a:t>
-            </a:r>
-            <a:endParaRPr sz="5200"/>
-          </a:p>
-        </p:txBody>
-      </p:sp>
-      <p:sp>
-        <p:nvSpPr>
-          <p:cNvPr id="21" name="Text 19">
-            <a:extLst>
-              <a:ext uri="{FF2B5EF4-FFF2-40B4-BE49-F238E27FC236}">
-                <a16:creationId xmlns:a16="http://schemas.microsoft.com/office/drawing/2014/main" id="{2A99349E-721C-4384-ABAB-AE70C0D15DA7}"/>
-              </a:ext>
-            </a:extLst>
-          </p:cNvPr>
-          <p:cNvSpPr>
-            <a:spLocks noGrp="1"/>
-          </p:cNvSpPr>
-          <p:nvPr/>
-        </p:nvSpPr>
-        <p:spPr>
-          <a:xfrm>
-            <a:off x="9052560" y="3657600"/>
-            <a:ext cx="2404872" cy="320040"/>
-          </a:xfrm>
-          <a:prstGeom prst="rect">
-            <a:avLst/>
-          </a:prstGeom>
-          <a:noFill/>
-        </p:spPr>
-        <p:txBody>
-          <a:bodyPr wrap="square" lIns="0" tIns="0" rIns="0" bIns="0" anchor="ctr"/>
-          <a:lstStyle/>
-          <a:p>
-            <a:pPr marL="0" indent="0" algn="ctr">
-              <a:buNone/>
-            </a:pPr>
-            <a:r>
-              <a:rPr sz="1400" b="1">
-                <a:solidFill>
-                  <a:srgbClr val="3F546C"/>
-                </a:solidFill>
-                <a:latin typeface="Microsoft JhengHei"/>
-                <a:ea typeface="Microsoft JhengHei"/>
-                <a:cs typeface="Microsoft JhengHei"/>
-              </a:rPr>
-              <a:t>專業版付費帳號／月</a:t>
-            </a:r>
-            <a:endParaRPr sz="1200"/>
-          </a:p>
-        </p:txBody>
-      </p:sp>
-      <p:sp>
-        <p:nvSpPr>
-          <p:cNvPr id="22" name="Text 20">
-            <a:extLst>
-              <a:ext uri="{FF2B5EF4-FFF2-40B4-BE49-F238E27FC236}">
-                <a16:creationId xmlns:a16="http://schemas.microsoft.com/office/drawing/2014/main" id="{F05FECCB-D9C7-4154-8CE1-A7738D358DAF}"/>
-              </a:ext>
-            </a:extLst>
-          </p:cNvPr>
-          <p:cNvSpPr>
-            <a:spLocks noGrp="1"/>
-          </p:cNvSpPr>
-          <p:nvPr/>
-        </p:nvSpPr>
-        <p:spPr>
-          <a:xfrm>
-            <a:off x="9052560" y="4069080"/>
-            <a:ext cx="2404872" cy="320040"/>
-          </a:xfrm>
-          <a:prstGeom prst="rect">
-            <a:avLst/>
-          </a:prstGeom>
-          <a:noFill/>
-        </p:spPr>
-        <p:txBody>
-          <a:bodyPr wrap="square" lIns="0" tIns="0" rIns="0" bIns="0" anchor="ctr"/>
-          <a:lstStyle/>
-          <a:p>
-            <a:pPr marL="0" indent="0" algn="ctr">
-              <a:buNone/>
-            </a:pPr>
-            <a:r>
-              <a:rPr sz="1400">
-                <a:solidFill>
-                  <a:srgbClr val="3F546C"/>
-                </a:solidFill>
-                <a:latin typeface="Microsoft JhengHei"/>
-                <a:ea typeface="Microsoft JhengHei"/>
-                <a:cs typeface="Microsoft JhengHei"/>
-              </a:rPr>
-              <a:t>收入 1,960 ＞ 支出 1,668</a:t>
-            </a:r>
-            <a:endParaRPr sz="1200"/>
-          </a:p>
-        </p:txBody>
-      </p:sp>
-      <p:sp>
-        <p:nvSpPr>
-          <p:cNvPr id="23" name="Text 21">
-            <a:extLst>
-              <a:ext uri="{FF2B5EF4-FFF2-40B4-BE49-F238E27FC236}">
-                <a16:creationId xmlns:a16="http://schemas.microsoft.com/office/drawing/2014/main" id="{831788AA-EE2A-4983-B910-E496729D9D25}"/>
-              </a:ext>
-            </a:extLst>
-          </p:cNvPr>
-          <p:cNvSpPr>
-            <a:spLocks noGrp="1"/>
-          </p:cNvSpPr>
-          <p:nvPr/>
-        </p:nvSpPr>
-        <p:spPr>
-          <a:xfrm>
-            <a:off x="9052560" y="4754880"/>
-            <a:ext cx="2404872" cy="320040"/>
-          </a:xfrm>
-          <a:prstGeom prst="rect">
-            <a:avLst/>
-          </a:prstGeom>
-          <a:noFill/>
-        </p:spPr>
-        <p:txBody>
-          <a:bodyPr wrap="square" lIns="0" tIns="0" rIns="0" bIns="0" anchor="ctr"/>
-          <a:lstStyle/>
-          <a:p>
-            <a:pPr marL="0" indent="0" algn="ctr">
-              <a:buNone/>
-            </a:pPr>
-            <a:r>
-              <a:rPr sz="1200">
-                <a:solidFill>
-                  <a:srgbClr val="D46A12"/>
-                </a:solidFill>
-                <a:latin typeface="Microsoft JhengHei"/>
-                <a:ea typeface="Microsoft JhengHei"/>
-                <a:cs typeface="Microsoft JhengHei"/>
-              </a:rPr>
-              <a:t>每月 1,456 固定支出＋每帳號 53</a:t>
-            </a:r>
-            <a:endParaRPr sz="1200"/>
-          </a:p>
-        </p:txBody>
-      </p:sp>
-      <p:sp>
-        <p:nvSpPr>
-          <p:cNvPr id="24" name="Shape 22">
-            <a:extLst>
-              <a:ext uri="{FF2B5EF4-FFF2-40B4-BE49-F238E27FC236}">
-                <a16:creationId xmlns:a16="http://schemas.microsoft.com/office/drawing/2014/main" id="{21E81070-A35F-42FD-8834-66AC620E07BF}"/>
-              </a:ext>
-            </a:extLst>
-          </p:cNvPr>
-          <p:cNvSpPr>
-            <a:spLocks noGrp="1"/>
-          </p:cNvSpPr>
-          <p:nvPr/>
-        </p:nvSpPr>
-        <p:spPr>
-          <a:xfrm>
-            <a:off x="731520" y="3886200"/>
-            <a:ext cx="8046720" cy="1600200"/>
-          </a:xfrm>
-          <a:prstGeom prst="roundRect">
-            <a:avLst>
-              <a:gd name="adj" fmla="val 9143"/>
-            </a:avLst>
-          </a:prstGeom>
-          <a:solidFill>
-            <a:srgbClr val="FFFFFF"/>
-          </a:solidFill>
-          <a:ln w="12700">
-            <a:solidFill>
-              <a:srgbClr val="D3DEEA"/>
-            </a:solidFill>
-            <a:prstDash val="solid"/>
-          </a:ln>
-        </p:spPr>
-        <p:txBody>
-          <a:bodyPr/>
-          <a:lstStyle/>
-          <a:p>
-            <a:endParaRPr/>
-          </a:p>
-        </p:txBody>
-      </p:sp>
+              <a:t>打平：N ≥ 1,456 ÷（490－53）＝3.3 → 4 個</a:t>
+            </a:r>
+          </a:p>
+        </p:txBody>
+      </p:sp>
+      <p:graphicFrame>
+        <p:nvGraphicFramePr>
+          <p:cNvPr id="33" name="Break-even Table"/>
+          <p:cNvGraphicFramePr>
+            <a:graphicFrameLocks noGrp="1"/>
+          </p:cNvGraphicFramePr>
+          <p:nvPr/>
+        </p:nvGraphicFramePr>
+        <p:xfrm>
+          <a:off x="7452360" y="3017520"/>
+          <a:ext cx="4005072" cy="2080260"/>
+        </p:xfrm>
+        <a:graphic>
+          <a:graphicData uri="http://schemas.openxmlformats.org/drawingml/2006/table">
+            <a:tbl>
+              <a:tblPr/>
+              <a:tblGrid>
+                <a:gridCol w="914400"/>
+                <a:gridCol w="987552"/>
+                <a:gridCol w="987552"/>
+                <a:gridCol w="1115568"/>
+              </a:tblGrid>
+              <a:tr h="297180">
+                <a:tc>
+                  <a:txBody>
+                    <a:bodyPr wrap="square"/>
+                    <a:lstStyle/>
+                    <a:p>
+                      <a:pPr algn="ctr"/>
+                      <a:r>
+                        <a:rPr sz="1200" b="1">
+                          <a:solidFill>
+                            <a:srgbClr val="2073BE"/>
+                          </a:solidFill>
+                          <a:latin typeface="Microsoft JhengHei"/>
+                          <a:ea typeface="Microsoft JhengHei"/>
+                          <a:cs typeface="Microsoft JhengHei"/>
+                        </a:rPr>
+                        <a:t>帳號數 N</a:t>
+                      </a:r>
+                    </a:p>
+                  </a:txBody>
+                  <a:tcPr anchor="ctr" marL="91440" marR="91440" marT="18288" marB="18288">
+                    <a:lnL w="9525">
+                      <a:solidFill>
+                        <a:srgbClr val="D3DEEA"/>
+                      </a:solidFill>
+                    </a:lnL>
+                    <a:lnR w="9525">
+                      <a:solidFill>
+                        <a:srgbClr val="D3DEEA"/>
+                      </a:solidFill>
+                    </a:lnR>
+                    <a:lnT w="9525">
+                      <a:solidFill>
+                        <a:srgbClr val="D3DEEA"/>
+                      </a:solidFill>
+                    </a:lnT>
+                    <a:lnB w="9525">
+                      <a:solidFill>
+                        <a:srgbClr val="D3DEEA"/>
+                      </a:solidFill>
+                    </a:lnB>
+                    <a:solidFill>
+                      <a:srgbClr val="E2EEFA"/>
+                    </a:solidFill>
+                  </a:tcPr>
+                </a:tc>
+                <a:tc>
+                  <a:txBody>
+                    <a:bodyPr wrap="square"/>
+                    <a:lstStyle/>
+                    <a:p>
+                      <a:pPr algn="ctr"/>
+                      <a:r>
+                        <a:rPr sz="1200" b="1">
+                          <a:solidFill>
+                            <a:srgbClr val="2073BE"/>
+                          </a:solidFill>
+                          <a:latin typeface="Microsoft JhengHei"/>
+                          <a:ea typeface="Microsoft JhengHei"/>
+                          <a:cs typeface="Microsoft JhengHei"/>
+                        </a:rPr>
+                        <a:t>收入</a:t>
+                      </a:r>
+                    </a:p>
+                  </a:txBody>
+                  <a:tcPr anchor="ctr" marL="91440" marR="91440" marT="18288" marB="18288">
+                    <a:lnL w="9525">
+                      <a:solidFill>
+                        <a:srgbClr val="D3DEEA"/>
+                      </a:solidFill>
+                    </a:lnL>
+                    <a:lnR w="9525">
+                      <a:solidFill>
+                        <a:srgbClr val="D3DEEA"/>
+                      </a:solidFill>
+                    </a:lnR>
+                    <a:lnT w="9525">
+                      <a:solidFill>
+                        <a:srgbClr val="D3DEEA"/>
+                      </a:solidFill>
+                    </a:lnT>
+                    <a:lnB w="9525">
+                      <a:solidFill>
+                        <a:srgbClr val="D3DEEA"/>
+                      </a:solidFill>
+                    </a:lnB>
+                    <a:solidFill>
+                      <a:srgbClr val="E2EEFA"/>
+                    </a:solidFill>
+                  </a:tcPr>
+                </a:tc>
+                <a:tc>
+                  <a:txBody>
+                    <a:bodyPr wrap="square"/>
+                    <a:lstStyle/>
+                    <a:p>
+                      <a:pPr algn="ctr"/>
+                      <a:r>
+                        <a:rPr sz="1200" b="1">
+                          <a:solidFill>
+                            <a:srgbClr val="2073BE"/>
+                          </a:solidFill>
+                          <a:latin typeface="Microsoft JhengHei"/>
+                          <a:ea typeface="Microsoft JhengHei"/>
+                          <a:cs typeface="Microsoft JhengHei"/>
+                        </a:rPr>
+                        <a:t>支出</a:t>
+                      </a:r>
+                    </a:p>
+                  </a:txBody>
+                  <a:tcPr anchor="ctr" marL="91440" marR="91440" marT="18288" marB="18288">
+                    <a:lnL w="9525">
+                      <a:solidFill>
+                        <a:srgbClr val="D3DEEA"/>
+                      </a:solidFill>
+                    </a:lnL>
+                    <a:lnR w="9525">
+                      <a:solidFill>
+                        <a:srgbClr val="D3DEEA"/>
+                      </a:solidFill>
+                    </a:lnR>
+                    <a:lnT w="9525">
+                      <a:solidFill>
+                        <a:srgbClr val="D3DEEA"/>
+                      </a:solidFill>
+                    </a:lnT>
+                    <a:lnB w="9525">
+                      <a:solidFill>
+                        <a:srgbClr val="D3DEEA"/>
+                      </a:solidFill>
+                    </a:lnB>
+                    <a:solidFill>
+                      <a:srgbClr val="E2EEFA"/>
+                    </a:solidFill>
+                  </a:tcPr>
+                </a:tc>
+                <a:tc>
+                  <a:txBody>
+                    <a:bodyPr wrap="square"/>
+                    <a:lstStyle/>
+                    <a:p>
+                      <a:pPr algn="ctr"/>
+                      <a:r>
+                        <a:rPr sz="1200" b="1">
+                          <a:solidFill>
+                            <a:srgbClr val="2073BE"/>
+                          </a:solidFill>
+                          <a:latin typeface="Microsoft JhengHei"/>
+                          <a:ea typeface="Microsoft JhengHei"/>
+                          <a:cs typeface="Microsoft JhengHei"/>
+                        </a:rPr>
+                        <a:t>損益</a:t>
+                      </a:r>
+                    </a:p>
+                  </a:txBody>
+                  <a:tcPr anchor="ctr" marL="91440" marR="91440" marT="18288" marB="18288">
+                    <a:lnL w="9525">
+                      <a:solidFill>
+                        <a:srgbClr val="D3DEEA"/>
+                      </a:solidFill>
+                    </a:lnL>
+                    <a:lnR w="9525">
+                      <a:solidFill>
+                        <a:srgbClr val="D3DEEA"/>
+                      </a:solidFill>
+                    </a:lnR>
+                    <a:lnT w="9525">
+                      <a:solidFill>
+                        <a:srgbClr val="D3DEEA"/>
+                      </a:solidFill>
+                    </a:lnT>
+                    <a:lnB w="9525">
+                      <a:solidFill>
+                        <a:srgbClr val="D3DEEA"/>
+                      </a:solidFill>
+                    </a:lnB>
+                    <a:solidFill>
+                      <a:srgbClr val="E2EEFA"/>
+                    </a:solidFill>
+                  </a:tcPr>
+                </a:tc>
+              </a:tr>
+              <a:tr h="297180">
+                <a:tc>
+                  <a:txBody>
+                    <a:bodyPr wrap="square"/>
+                    <a:lstStyle/>
+                    <a:p>
+                      <a:pPr algn="ctr"/>
+                      <a:r>
+                        <a:rPr sz="1200" b="0">
+                          <a:solidFill>
+                            <a:srgbClr val="14243A"/>
+                          </a:solidFill>
+                          <a:latin typeface="Microsoft JhengHei"/>
+                          <a:ea typeface="Microsoft JhengHei"/>
+                          <a:cs typeface="Microsoft JhengHei"/>
+                        </a:rPr>
+                        <a:t>0 個</a:t>
+                      </a:r>
+                    </a:p>
+                  </a:txBody>
+                  <a:tcPr anchor="ctr" marL="91440" marR="91440" marT="18288" marB="18288">
+                    <a:lnL w="9525">
+                      <a:solidFill>
+                        <a:srgbClr val="D3DEEA"/>
+                      </a:solidFill>
+                    </a:lnL>
+                    <a:lnR w="9525">
+                      <a:solidFill>
+                        <a:srgbClr val="D3DEEA"/>
+                      </a:solidFill>
+                    </a:lnR>
+                    <a:lnT w="9525">
+                      <a:solidFill>
+                        <a:srgbClr val="D3DEEA"/>
+                      </a:solidFill>
+                    </a:lnT>
+                    <a:lnB w="9525">
+                      <a:solidFill>
+                        <a:srgbClr val="D3DEEA"/>
+                      </a:solidFill>
+                    </a:lnB>
+                    <a:solidFill>
+                      <a:srgbClr val="FFFFFF"/>
+                    </a:solidFill>
+                  </a:tcPr>
+                </a:tc>
+                <a:tc>
+                  <a:txBody>
+                    <a:bodyPr wrap="square"/>
+                    <a:lstStyle/>
+                    <a:p>
+                      <a:pPr algn="r"/>
+                      <a:r>
+                        <a:rPr sz="1200" b="0">
+                          <a:solidFill>
+                            <a:srgbClr val="14243A"/>
+                          </a:solidFill>
+                          <a:latin typeface="Microsoft JhengHei"/>
+                          <a:ea typeface="Microsoft JhengHei"/>
+                          <a:cs typeface="Microsoft JhengHei"/>
+                        </a:rPr>
+                        <a:t>0</a:t>
+                      </a:r>
+                    </a:p>
+                  </a:txBody>
+                  <a:tcPr anchor="ctr" marL="91440" marR="91440" marT="18288" marB="18288">
+                    <a:lnL w="9525">
+                      <a:solidFill>
+                        <a:srgbClr val="D3DEEA"/>
+                      </a:solidFill>
+                    </a:lnL>
+                    <a:lnR w="9525">
+                      <a:solidFill>
+                        <a:srgbClr val="D3DEEA"/>
+                      </a:solidFill>
+                    </a:lnR>
+                    <a:lnT w="9525">
+                      <a:solidFill>
+                        <a:srgbClr val="D3DEEA"/>
+                      </a:solidFill>
+                    </a:lnT>
+                    <a:lnB w="9525">
+                      <a:solidFill>
+                        <a:srgbClr val="D3DEEA"/>
+                      </a:solidFill>
+                    </a:lnB>
+                    <a:solidFill>
+                      <a:srgbClr val="FFFFFF"/>
+                    </a:solidFill>
+                  </a:tcPr>
+                </a:tc>
+                <a:tc>
+                  <a:txBody>
+                    <a:bodyPr wrap="square"/>
+                    <a:lstStyle/>
+                    <a:p>
+                      <a:pPr algn="r"/>
+                      <a:r>
+                        <a:rPr sz="1200" b="0">
+                          <a:solidFill>
+                            <a:srgbClr val="14243A"/>
+                          </a:solidFill>
+                          <a:latin typeface="Microsoft JhengHei"/>
+                          <a:ea typeface="Microsoft JhengHei"/>
+                          <a:cs typeface="Microsoft JhengHei"/>
+                        </a:rPr>
+                        <a:t>1,456</a:t>
+                      </a:r>
+                    </a:p>
+                  </a:txBody>
+                  <a:tcPr anchor="ctr" marL="91440" marR="91440" marT="18288" marB="18288">
+                    <a:lnL w="9525">
+                      <a:solidFill>
+                        <a:srgbClr val="D3DEEA"/>
+                      </a:solidFill>
+                    </a:lnL>
+                    <a:lnR w="9525">
+                      <a:solidFill>
+                        <a:srgbClr val="D3DEEA"/>
+                      </a:solidFill>
+                    </a:lnR>
+                    <a:lnT w="9525">
+                      <a:solidFill>
+                        <a:srgbClr val="D3DEEA"/>
+                      </a:solidFill>
+                    </a:lnT>
+                    <a:lnB w="9525">
+                      <a:solidFill>
+                        <a:srgbClr val="D3DEEA"/>
+                      </a:solidFill>
+                    </a:lnB>
+                    <a:solidFill>
+                      <a:srgbClr val="FFFFFF"/>
+                    </a:solidFill>
+                  </a:tcPr>
+                </a:tc>
+                <a:tc>
+                  <a:txBody>
+                    <a:bodyPr wrap="square"/>
+                    <a:lstStyle/>
+                    <a:p>
+                      <a:pPr algn="r"/>
+                      <a:r>
+                        <a:rPr sz="1200" b="1">
+                          <a:solidFill>
+                            <a:srgbClr val="3F546C"/>
+                          </a:solidFill>
+                          <a:latin typeface="Microsoft JhengHei"/>
+                          <a:ea typeface="Microsoft JhengHei"/>
+                          <a:cs typeface="Microsoft JhengHei"/>
+                        </a:rPr>
+                        <a:t>−1,456</a:t>
+                      </a:r>
+                    </a:p>
+                  </a:txBody>
+                  <a:tcPr anchor="ctr" marL="91440" marR="91440" marT="18288" marB="18288">
+                    <a:lnL w="9525">
+                      <a:solidFill>
+                        <a:srgbClr val="D3DEEA"/>
+                      </a:solidFill>
+                    </a:lnL>
+                    <a:lnR w="9525">
+                      <a:solidFill>
+                        <a:srgbClr val="D3DEEA"/>
+                      </a:solidFill>
+                    </a:lnR>
+                    <a:lnT w="9525">
+                      <a:solidFill>
+                        <a:srgbClr val="D3DEEA"/>
+                      </a:solidFill>
+                    </a:lnT>
+                    <a:lnB w="9525">
+                      <a:solidFill>
+                        <a:srgbClr val="D3DEEA"/>
+                      </a:solidFill>
+                    </a:lnB>
+                    <a:solidFill>
+                      <a:srgbClr val="FFFFFF"/>
+                    </a:solidFill>
+                  </a:tcPr>
+                </a:tc>
+              </a:tr>
+              <a:tr h="297180">
+                <a:tc>
+                  <a:txBody>
+                    <a:bodyPr wrap="square"/>
+                    <a:lstStyle/>
+                    <a:p>
+                      <a:pPr algn="ctr"/>
+                      <a:r>
+                        <a:rPr sz="1200" b="0">
+                          <a:solidFill>
+                            <a:srgbClr val="14243A"/>
+                          </a:solidFill>
+                          <a:latin typeface="Microsoft JhengHei"/>
+                          <a:ea typeface="Microsoft JhengHei"/>
+                          <a:cs typeface="Microsoft JhengHei"/>
+                        </a:rPr>
+                        <a:t>2 個</a:t>
+                      </a:r>
+                    </a:p>
+                  </a:txBody>
+                  <a:tcPr anchor="ctr" marL="91440" marR="91440" marT="18288" marB="18288">
+                    <a:lnL w="9525">
+                      <a:solidFill>
+                        <a:srgbClr val="D3DEEA"/>
+                      </a:solidFill>
+                    </a:lnL>
+                    <a:lnR w="9525">
+                      <a:solidFill>
+                        <a:srgbClr val="D3DEEA"/>
+                      </a:solidFill>
+                    </a:lnR>
+                    <a:lnT w="9525">
+                      <a:solidFill>
+                        <a:srgbClr val="D3DEEA"/>
+                      </a:solidFill>
+                    </a:lnT>
+                    <a:lnB w="9525">
+                      <a:solidFill>
+                        <a:srgbClr val="D3DEEA"/>
+                      </a:solidFill>
+                    </a:lnB>
+                    <a:solidFill>
+                      <a:srgbClr val="F3F7FC"/>
+                    </a:solidFill>
+                  </a:tcPr>
+                </a:tc>
+                <a:tc>
+                  <a:txBody>
+                    <a:bodyPr wrap="square"/>
+                    <a:lstStyle/>
+                    <a:p>
+                      <a:pPr algn="r"/>
+                      <a:r>
+                        <a:rPr sz="1200" b="0">
+                          <a:solidFill>
+                            <a:srgbClr val="14243A"/>
+                          </a:solidFill>
+                          <a:latin typeface="Microsoft JhengHei"/>
+                          <a:ea typeface="Microsoft JhengHei"/>
+                          <a:cs typeface="Microsoft JhengHei"/>
+                        </a:rPr>
+                        <a:t>980</a:t>
+                      </a:r>
+                    </a:p>
+                  </a:txBody>
+                  <a:tcPr anchor="ctr" marL="91440" marR="91440" marT="18288" marB="18288">
+                    <a:lnL w="9525">
+                      <a:solidFill>
+                        <a:srgbClr val="D3DEEA"/>
+                      </a:solidFill>
+                    </a:lnL>
+                    <a:lnR w="9525">
+                      <a:solidFill>
+                        <a:srgbClr val="D3DEEA"/>
+                      </a:solidFill>
+                    </a:lnR>
+                    <a:lnT w="9525">
+                      <a:solidFill>
+                        <a:srgbClr val="D3DEEA"/>
+                      </a:solidFill>
+                    </a:lnT>
+                    <a:lnB w="9525">
+                      <a:solidFill>
+                        <a:srgbClr val="D3DEEA"/>
+                      </a:solidFill>
+                    </a:lnB>
+                    <a:solidFill>
+                      <a:srgbClr val="F3F7FC"/>
+                    </a:solidFill>
+                  </a:tcPr>
+                </a:tc>
+                <a:tc>
+                  <a:txBody>
+                    <a:bodyPr wrap="square"/>
+                    <a:lstStyle/>
+                    <a:p>
+                      <a:pPr algn="r"/>
+                      <a:r>
+                        <a:rPr sz="1200" b="0">
+                          <a:solidFill>
+                            <a:srgbClr val="14243A"/>
+                          </a:solidFill>
+                          <a:latin typeface="Microsoft JhengHei"/>
+                          <a:ea typeface="Microsoft JhengHei"/>
+                          <a:cs typeface="Microsoft JhengHei"/>
+                        </a:rPr>
+                        <a:t>1,562</a:t>
+                      </a:r>
+                    </a:p>
+                  </a:txBody>
+                  <a:tcPr anchor="ctr" marL="91440" marR="91440" marT="18288" marB="18288">
+                    <a:lnL w="9525">
+                      <a:solidFill>
+                        <a:srgbClr val="D3DEEA"/>
+                      </a:solidFill>
+                    </a:lnL>
+                    <a:lnR w="9525">
+                      <a:solidFill>
+                        <a:srgbClr val="D3DEEA"/>
+                      </a:solidFill>
+                    </a:lnR>
+                    <a:lnT w="9525">
+                      <a:solidFill>
+                        <a:srgbClr val="D3DEEA"/>
+                      </a:solidFill>
+                    </a:lnT>
+                    <a:lnB w="9525">
+                      <a:solidFill>
+                        <a:srgbClr val="D3DEEA"/>
+                      </a:solidFill>
+                    </a:lnB>
+                    <a:solidFill>
+                      <a:srgbClr val="F3F7FC"/>
+                    </a:solidFill>
+                  </a:tcPr>
+                </a:tc>
+                <a:tc>
+                  <a:txBody>
+                    <a:bodyPr wrap="square"/>
+                    <a:lstStyle/>
+                    <a:p>
+                      <a:pPr algn="r"/>
+                      <a:r>
+                        <a:rPr sz="1200" b="1">
+                          <a:solidFill>
+                            <a:srgbClr val="3F546C"/>
+                          </a:solidFill>
+                          <a:latin typeface="Microsoft JhengHei"/>
+                          <a:ea typeface="Microsoft JhengHei"/>
+                          <a:cs typeface="Microsoft JhengHei"/>
+                        </a:rPr>
+                        <a:t>−582</a:t>
+                      </a:r>
+                    </a:p>
+                  </a:txBody>
+                  <a:tcPr anchor="ctr" marL="91440" marR="91440" marT="18288" marB="18288">
+                    <a:lnL w="9525">
+                      <a:solidFill>
+                        <a:srgbClr val="D3DEEA"/>
+                      </a:solidFill>
+                    </a:lnL>
+                    <a:lnR w="9525">
+                      <a:solidFill>
+                        <a:srgbClr val="D3DEEA"/>
+                      </a:solidFill>
+                    </a:lnR>
+                    <a:lnT w="9525">
+                      <a:solidFill>
+                        <a:srgbClr val="D3DEEA"/>
+                      </a:solidFill>
+                    </a:lnT>
+                    <a:lnB w="9525">
+                      <a:solidFill>
+                        <a:srgbClr val="D3DEEA"/>
+                      </a:solidFill>
+                    </a:lnB>
+                    <a:solidFill>
+                      <a:srgbClr val="F3F7FC"/>
+                    </a:solidFill>
+                  </a:tcPr>
+                </a:tc>
+              </a:tr>
+              <a:tr h="297180">
+                <a:tc>
+                  <a:txBody>
+                    <a:bodyPr wrap="square"/>
+                    <a:lstStyle/>
+                    <a:p>
+                      <a:pPr algn="ctr"/>
+                      <a:r>
+                        <a:rPr sz="1200" b="0">
+                          <a:solidFill>
+                            <a:srgbClr val="14243A"/>
+                          </a:solidFill>
+                          <a:latin typeface="Microsoft JhengHei"/>
+                          <a:ea typeface="Microsoft JhengHei"/>
+                          <a:cs typeface="Microsoft JhengHei"/>
+                        </a:rPr>
+                        <a:t>3 個</a:t>
+                      </a:r>
+                    </a:p>
+                  </a:txBody>
+                  <a:tcPr anchor="ctr" marL="91440" marR="91440" marT="18288" marB="18288">
+                    <a:lnL w="9525">
+                      <a:solidFill>
+                        <a:srgbClr val="D3DEEA"/>
+                      </a:solidFill>
+                    </a:lnL>
+                    <a:lnR w="9525">
+                      <a:solidFill>
+                        <a:srgbClr val="D3DEEA"/>
+                      </a:solidFill>
+                    </a:lnR>
+                    <a:lnT w="9525">
+                      <a:solidFill>
+                        <a:srgbClr val="D3DEEA"/>
+                      </a:solidFill>
+                    </a:lnT>
+                    <a:lnB w="9525">
+                      <a:solidFill>
+                        <a:srgbClr val="D3DEEA"/>
+                      </a:solidFill>
+                    </a:lnB>
+                    <a:solidFill>
+                      <a:srgbClr val="FFFFFF"/>
+                    </a:solidFill>
+                  </a:tcPr>
+                </a:tc>
+                <a:tc>
+                  <a:txBody>
+                    <a:bodyPr wrap="square"/>
+                    <a:lstStyle/>
+                    <a:p>
+                      <a:pPr algn="r"/>
+                      <a:r>
+                        <a:rPr sz="1200" b="0">
+                          <a:solidFill>
+                            <a:srgbClr val="14243A"/>
+                          </a:solidFill>
+                          <a:latin typeface="Microsoft JhengHei"/>
+                          <a:ea typeface="Microsoft JhengHei"/>
+                          <a:cs typeface="Microsoft JhengHei"/>
+                        </a:rPr>
+                        <a:t>1,470</a:t>
+                      </a:r>
+                    </a:p>
+                  </a:txBody>
+                  <a:tcPr anchor="ctr" marL="91440" marR="91440" marT="18288" marB="18288">
+                    <a:lnL w="9525">
+                      <a:solidFill>
+                        <a:srgbClr val="D3DEEA"/>
+                      </a:solidFill>
+                    </a:lnL>
+                    <a:lnR w="9525">
+                      <a:solidFill>
+                        <a:srgbClr val="D3DEEA"/>
+                      </a:solidFill>
+                    </a:lnR>
+                    <a:lnT w="9525">
+                      <a:solidFill>
+                        <a:srgbClr val="D3DEEA"/>
+                      </a:solidFill>
+                    </a:lnT>
+                    <a:lnB w="9525">
+                      <a:solidFill>
+                        <a:srgbClr val="D3DEEA"/>
+                      </a:solidFill>
+                    </a:lnB>
+                    <a:solidFill>
+                      <a:srgbClr val="FFFFFF"/>
+                    </a:solidFill>
+                  </a:tcPr>
+                </a:tc>
+                <a:tc>
+                  <a:txBody>
+                    <a:bodyPr wrap="square"/>
+                    <a:lstStyle/>
+                    <a:p>
+                      <a:pPr algn="r"/>
+                      <a:r>
+                        <a:rPr sz="1200" b="0">
+                          <a:solidFill>
+                            <a:srgbClr val="14243A"/>
+                          </a:solidFill>
+                          <a:latin typeface="Microsoft JhengHei"/>
+                          <a:ea typeface="Microsoft JhengHei"/>
+                          <a:cs typeface="Microsoft JhengHei"/>
+                        </a:rPr>
+                        <a:t>1,615</a:t>
+                      </a:r>
+                    </a:p>
+                  </a:txBody>
+                  <a:tcPr anchor="ctr" marL="91440" marR="91440" marT="18288" marB="18288">
+                    <a:lnL w="9525">
+                      <a:solidFill>
+                        <a:srgbClr val="D3DEEA"/>
+                      </a:solidFill>
+                    </a:lnL>
+                    <a:lnR w="9525">
+                      <a:solidFill>
+                        <a:srgbClr val="D3DEEA"/>
+                      </a:solidFill>
+                    </a:lnR>
+                    <a:lnT w="9525">
+                      <a:solidFill>
+                        <a:srgbClr val="D3DEEA"/>
+                      </a:solidFill>
+                    </a:lnT>
+                    <a:lnB w="9525">
+                      <a:solidFill>
+                        <a:srgbClr val="D3DEEA"/>
+                      </a:solidFill>
+                    </a:lnB>
+                    <a:solidFill>
+                      <a:srgbClr val="FFFFFF"/>
+                    </a:solidFill>
+                  </a:tcPr>
+                </a:tc>
+                <a:tc>
+                  <a:txBody>
+                    <a:bodyPr wrap="square"/>
+                    <a:lstStyle/>
+                    <a:p>
+                      <a:pPr algn="r"/>
+                      <a:r>
+                        <a:rPr sz="1200" b="1">
+                          <a:solidFill>
+                            <a:srgbClr val="3F546C"/>
+                          </a:solidFill>
+                          <a:latin typeface="Microsoft JhengHei"/>
+                          <a:ea typeface="Microsoft JhengHei"/>
+                          <a:cs typeface="Microsoft JhengHei"/>
+                        </a:rPr>
+                        <a:t>−145</a:t>
+                      </a:r>
+                    </a:p>
+                  </a:txBody>
+                  <a:tcPr anchor="ctr" marL="91440" marR="91440" marT="18288" marB="18288">
+                    <a:lnL w="9525">
+                      <a:solidFill>
+                        <a:srgbClr val="D3DEEA"/>
+                      </a:solidFill>
+                    </a:lnL>
+                    <a:lnR w="9525">
+                      <a:solidFill>
+                        <a:srgbClr val="D3DEEA"/>
+                      </a:solidFill>
+                    </a:lnR>
+                    <a:lnT w="9525">
+                      <a:solidFill>
+                        <a:srgbClr val="D3DEEA"/>
+                      </a:solidFill>
+                    </a:lnT>
+                    <a:lnB w="9525">
+                      <a:solidFill>
+                        <a:srgbClr val="D3DEEA"/>
+                      </a:solidFill>
+                    </a:lnB>
+                    <a:solidFill>
+                      <a:srgbClr val="FFFFFF"/>
+                    </a:solidFill>
+                  </a:tcPr>
+                </a:tc>
+              </a:tr>
+              <a:tr h="297180">
+                <a:tc>
+                  <a:txBody>
+                    <a:bodyPr wrap="square"/>
+                    <a:lstStyle/>
+                    <a:p>
+                      <a:pPr algn="ctr"/>
+                      <a:r>
+                        <a:rPr sz="1200" b="1">
+                          <a:solidFill>
+                            <a:srgbClr val="D46A12"/>
+                          </a:solidFill>
+                          <a:latin typeface="Microsoft JhengHei"/>
+                          <a:ea typeface="Microsoft JhengHei"/>
+                          <a:cs typeface="Microsoft JhengHei"/>
+                        </a:rPr>
+                        <a:t>4 個 ✓</a:t>
+                      </a:r>
+                    </a:p>
+                  </a:txBody>
+                  <a:tcPr anchor="ctr" marL="91440" marR="91440" marT="18288" marB="18288">
+                    <a:lnL w="9525">
+                      <a:solidFill>
+                        <a:srgbClr val="D3DEEA"/>
+                      </a:solidFill>
+                    </a:lnL>
+                    <a:lnR w="9525">
+                      <a:solidFill>
+                        <a:srgbClr val="D3DEEA"/>
+                      </a:solidFill>
+                    </a:lnR>
+                    <a:lnT w="9525">
+                      <a:solidFill>
+                        <a:srgbClr val="D3DEEA"/>
+                      </a:solidFill>
+                    </a:lnT>
+                    <a:lnB w="9525">
+                      <a:solidFill>
+                        <a:srgbClr val="D3DEEA"/>
+                      </a:solidFill>
+                    </a:lnB>
+                    <a:solidFill>
+                      <a:srgbClr val="FDEEDF"/>
+                    </a:solidFill>
+                  </a:tcPr>
+                </a:tc>
+                <a:tc>
+                  <a:txBody>
+                    <a:bodyPr wrap="square"/>
+                    <a:lstStyle/>
+                    <a:p>
+                      <a:pPr algn="r"/>
+                      <a:r>
+                        <a:rPr sz="1200" b="1">
+                          <a:solidFill>
+                            <a:srgbClr val="14243A"/>
+                          </a:solidFill>
+                          <a:latin typeface="Microsoft JhengHei"/>
+                          <a:ea typeface="Microsoft JhengHei"/>
+                          <a:cs typeface="Microsoft JhengHei"/>
+                        </a:rPr>
+                        <a:t>1,960</a:t>
+                      </a:r>
+                    </a:p>
+                  </a:txBody>
+                  <a:tcPr anchor="ctr" marL="91440" marR="91440" marT="18288" marB="18288">
+                    <a:lnL w="9525">
+                      <a:solidFill>
+                        <a:srgbClr val="D3DEEA"/>
+                      </a:solidFill>
+                    </a:lnL>
+                    <a:lnR w="9525">
+                      <a:solidFill>
+                        <a:srgbClr val="D3DEEA"/>
+                      </a:solidFill>
+                    </a:lnR>
+                    <a:lnT w="9525">
+                      <a:solidFill>
+                        <a:srgbClr val="D3DEEA"/>
+                      </a:solidFill>
+                    </a:lnT>
+                    <a:lnB w="9525">
+                      <a:solidFill>
+                        <a:srgbClr val="D3DEEA"/>
+                      </a:solidFill>
+                    </a:lnB>
+                    <a:solidFill>
+                      <a:srgbClr val="FDEEDF"/>
+                    </a:solidFill>
+                  </a:tcPr>
+                </a:tc>
+                <a:tc>
+                  <a:txBody>
+                    <a:bodyPr wrap="square"/>
+                    <a:lstStyle/>
+                    <a:p>
+                      <a:pPr algn="r"/>
+                      <a:r>
+                        <a:rPr sz="1200" b="1">
+                          <a:solidFill>
+                            <a:srgbClr val="14243A"/>
+                          </a:solidFill>
+                          <a:latin typeface="Microsoft JhengHei"/>
+                          <a:ea typeface="Microsoft JhengHei"/>
+                          <a:cs typeface="Microsoft JhengHei"/>
+                        </a:rPr>
+                        <a:t>1,668</a:t>
+                      </a:r>
+                    </a:p>
+                  </a:txBody>
+                  <a:tcPr anchor="ctr" marL="91440" marR="91440" marT="18288" marB="18288">
+                    <a:lnL w="9525">
+                      <a:solidFill>
+                        <a:srgbClr val="D3DEEA"/>
+                      </a:solidFill>
+                    </a:lnL>
+                    <a:lnR w="9525">
+                      <a:solidFill>
+                        <a:srgbClr val="D3DEEA"/>
+                      </a:solidFill>
+                    </a:lnR>
+                    <a:lnT w="9525">
+                      <a:solidFill>
+                        <a:srgbClr val="D3DEEA"/>
+                      </a:solidFill>
+                    </a:lnT>
+                    <a:lnB w="9525">
+                      <a:solidFill>
+                        <a:srgbClr val="D3DEEA"/>
+                      </a:solidFill>
+                    </a:lnB>
+                    <a:solidFill>
+                      <a:srgbClr val="FDEEDF"/>
+                    </a:solidFill>
+                  </a:tcPr>
+                </a:tc>
+                <a:tc>
+                  <a:txBody>
+                    <a:bodyPr wrap="square"/>
+                    <a:lstStyle/>
+                    <a:p>
+                      <a:pPr algn="r"/>
+                      <a:r>
+                        <a:rPr sz="1200" b="1">
+                          <a:solidFill>
+                            <a:srgbClr val="D46A12"/>
+                          </a:solidFill>
+                          <a:latin typeface="Microsoft JhengHei"/>
+                          <a:ea typeface="Microsoft JhengHei"/>
+                          <a:cs typeface="Microsoft JhengHei"/>
+                        </a:rPr>
+                        <a:t>+292</a:t>
+                      </a:r>
+                    </a:p>
+                  </a:txBody>
+                  <a:tcPr anchor="ctr" marL="91440" marR="91440" marT="18288" marB="18288">
+                    <a:lnL w="9525">
+                      <a:solidFill>
+                        <a:srgbClr val="D3DEEA"/>
+                      </a:solidFill>
+                    </a:lnL>
+                    <a:lnR w="9525">
+                      <a:solidFill>
+                        <a:srgbClr val="D3DEEA"/>
+                      </a:solidFill>
+                    </a:lnR>
+                    <a:lnT w="9525">
+                      <a:solidFill>
+                        <a:srgbClr val="D3DEEA"/>
+                      </a:solidFill>
+                    </a:lnT>
+                    <a:lnB w="9525">
+                      <a:solidFill>
+                        <a:srgbClr val="D3DEEA"/>
+                      </a:solidFill>
+                    </a:lnB>
+                    <a:solidFill>
+                      <a:srgbClr val="FDEEDF"/>
+                    </a:solidFill>
+                  </a:tcPr>
+                </a:tc>
+              </a:tr>
+              <a:tr h="297180">
+                <a:tc>
+                  <a:txBody>
+                    <a:bodyPr wrap="square"/>
+                    <a:lstStyle/>
+                    <a:p>
+                      <a:pPr algn="ctr"/>
+                      <a:r>
+                        <a:rPr sz="1200" b="0">
+                          <a:solidFill>
+                            <a:srgbClr val="14243A"/>
+                          </a:solidFill>
+                          <a:latin typeface="Microsoft JhengHei"/>
+                          <a:ea typeface="Microsoft JhengHei"/>
+                          <a:cs typeface="Microsoft JhengHei"/>
+                        </a:rPr>
+                        <a:t>5 個</a:t>
+                      </a:r>
+                    </a:p>
+                  </a:txBody>
+                  <a:tcPr anchor="ctr" marL="91440" marR="91440" marT="18288" marB="18288">
+                    <a:lnL w="9525">
+                      <a:solidFill>
+                        <a:srgbClr val="D3DEEA"/>
+                      </a:solidFill>
+                    </a:lnL>
+                    <a:lnR w="9525">
+                      <a:solidFill>
+                        <a:srgbClr val="D3DEEA"/>
+                      </a:solidFill>
+                    </a:lnR>
+                    <a:lnT w="9525">
+                      <a:solidFill>
+                        <a:srgbClr val="D3DEEA"/>
+                      </a:solidFill>
+                    </a:lnT>
+                    <a:lnB w="9525">
+                      <a:solidFill>
+                        <a:srgbClr val="D3DEEA"/>
+                      </a:solidFill>
+                    </a:lnB>
+                    <a:solidFill>
+                      <a:srgbClr val="FFFFFF"/>
+                    </a:solidFill>
+                  </a:tcPr>
+                </a:tc>
+                <a:tc>
+                  <a:txBody>
+                    <a:bodyPr wrap="square"/>
+                    <a:lstStyle/>
+                    <a:p>
+                      <a:pPr algn="r"/>
+                      <a:r>
+                        <a:rPr sz="1200" b="0">
+                          <a:solidFill>
+                            <a:srgbClr val="14243A"/>
+                          </a:solidFill>
+                          <a:latin typeface="Microsoft JhengHei"/>
+                          <a:ea typeface="Microsoft JhengHei"/>
+                          <a:cs typeface="Microsoft JhengHei"/>
+                        </a:rPr>
+                        <a:t>2,450</a:t>
+                      </a:r>
+                    </a:p>
+                  </a:txBody>
+                  <a:tcPr anchor="ctr" marL="91440" marR="91440" marT="18288" marB="18288">
+                    <a:lnL w="9525">
+                      <a:solidFill>
+                        <a:srgbClr val="D3DEEA"/>
+                      </a:solidFill>
+                    </a:lnL>
+                    <a:lnR w="9525">
+                      <a:solidFill>
+                        <a:srgbClr val="D3DEEA"/>
+                      </a:solidFill>
+                    </a:lnR>
+                    <a:lnT w="9525">
+                      <a:solidFill>
+                        <a:srgbClr val="D3DEEA"/>
+                      </a:solidFill>
+                    </a:lnT>
+                    <a:lnB w="9525">
+                      <a:solidFill>
+                        <a:srgbClr val="D3DEEA"/>
+                      </a:solidFill>
+                    </a:lnB>
+                    <a:solidFill>
+                      <a:srgbClr val="FFFFFF"/>
+                    </a:solidFill>
+                  </a:tcPr>
+                </a:tc>
+                <a:tc>
+                  <a:txBody>
+                    <a:bodyPr wrap="square"/>
+                    <a:lstStyle/>
+                    <a:p>
+                      <a:pPr algn="r"/>
+                      <a:r>
+                        <a:rPr sz="1200" b="0">
+                          <a:solidFill>
+                            <a:srgbClr val="14243A"/>
+                          </a:solidFill>
+                          <a:latin typeface="Microsoft JhengHei"/>
+                          <a:ea typeface="Microsoft JhengHei"/>
+                          <a:cs typeface="Microsoft JhengHei"/>
+                        </a:rPr>
+                        <a:t>1,721</a:t>
+                      </a:r>
+                    </a:p>
+                  </a:txBody>
+                  <a:tcPr anchor="ctr" marL="91440" marR="91440" marT="18288" marB="18288">
+                    <a:lnL w="9525">
+                      <a:solidFill>
+                        <a:srgbClr val="D3DEEA"/>
+                      </a:solidFill>
+                    </a:lnL>
+                    <a:lnR w="9525">
+                      <a:solidFill>
+                        <a:srgbClr val="D3DEEA"/>
+                      </a:solidFill>
+                    </a:lnR>
+                    <a:lnT w="9525">
+                      <a:solidFill>
+                        <a:srgbClr val="D3DEEA"/>
+                      </a:solidFill>
+                    </a:lnT>
+                    <a:lnB w="9525">
+                      <a:solidFill>
+                        <a:srgbClr val="D3DEEA"/>
+                      </a:solidFill>
+                    </a:lnB>
+                    <a:solidFill>
+                      <a:srgbClr val="FFFFFF"/>
+                    </a:solidFill>
+                  </a:tcPr>
+                </a:tc>
+                <a:tc>
+                  <a:txBody>
+                    <a:bodyPr wrap="square"/>
+                    <a:lstStyle/>
+                    <a:p>
+                      <a:pPr algn="r"/>
+                      <a:r>
+                        <a:rPr sz="1200" b="1">
+                          <a:solidFill>
+                            <a:srgbClr val="2073BE"/>
+                          </a:solidFill>
+                          <a:latin typeface="Microsoft JhengHei"/>
+                          <a:ea typeface="Microsoft JhengHei"/>
+                          <a:cs typeface="Microsoft JhengHei"/>
+                        </a:rPr>
+                        <a:t>+729</a:t>
+                      </a:r>
+                    </a:p>
+                  </a:txBody>
+                  <a:tcPr anchor="ctr" marL="91440" marR="91440" marT="18288" marB="18288">
+                    <a:lnL w="9525">
+                      <a:solidFill>
+                        <a:srgbClr val="D3DEEA"/>
+                      </a:solidFill>
+                    </a:lnL>
+                    <a:lnR w="9525">
+                      <a:solidFill>
+                        <a:srgbClr val="D3DEEA"/>
+                      </a:solidFill>
+                    </a:lnR>
+                    <a:lnT w="9525">
+                      <a:solidFill>
+                        <a:srgbClr val="D3DEEA"/>
+                      </a:solidFill>
+                    </a:lnT>
+                    <a:lnB w="9525">
+                      <a:solidFill>
+                        <a:srgbClr val="D3DEEA"/>
+                      </a:solidFill>
+                    </a:lnB>
+                    <a:solidFill>
+                      <a:srgbClr val="FFFFFF"/>
+                    </a:solidFill>
+                  </a:tcPr>
+                </a:tc>
+              </a:tr>
+              <a:tr h="297180">
+                <a:tc>
+                  <a:txBody>
+                    <a:bodyPr wrap="square"/>
+                    <a:lstStyle/>
+                    <a:p>
+                      <a:pPr algn="ctr"/>
+                      <a:r>
+                        <a:rPr sz="1200" b="0">
+                          <a:solidFill>
+                            <a:srgbClr val="14243A"/>
+                          </a:solidFill>
+                          <a:latin typeface="Microsoft JhengHei"/>
+                          <a:ea typeface="Microsoft JhengHei"/>
+                          <a:cs typeface="Microsoft JhengHei"/>
+                        </a:rPr>
+                        <a:t>10 個</a:t>
+                      </a:r>
+                    </a:p>
+                  </a:txBody>
+                  <a:tcPr anchor="ctr" marL="91440" marR="91440" marT="18288" marB="18288">
+                    <a:lnL w="9525">
+                      <a:solidFill>
+                        <a:srgbClr val="D3DEEA"/>
+                      </a:solidFill>
+                    </a:lnL>
+                    <a:lnR w="9525">
+                      <a:solidFill>
+                        <a:srgbClr val="D3DEEA"/>
+                      </a:solidFill>
+                    </a:lnR>
+                    <a:lnT w="9525">
+                      <a:solidFill>
+                        <a:srgbClr val="D3DEEA"/>
+                      </a:solidFill>
+                    </a:lnT>
+                    <a:lnB w="9525">
+                      <a:solidFill>
+                        <a:srgbClr val="D3DEEA"/>
+                      </a:solidFill>
+                    </a:lnB>
+                    <a:solidFill>
+                      <a:srgbClr val="F3F7FC"/>
+                    </a:solidFill>
+                  </a:tcPr>
+                </a:tc>
+                <a:tc>
+                  <a:txBody>
+                    <a:bodyPr wrap="square"/>
+                    <a:lstStyle/>
+                    <a:p>
+                      <a:pPr algn="r"/>
+                      <a:r>
+                        <a:rPr sz="1200" b="0">
+                          <a:solidFill>
+                            <a:srgbClr val="14243A"/>
+                          </a:solidFill>
+                          <a:latin typeface="Microsoft JhengHei"/>
+                          <a:ea typeface="Microsoft JhengHei"/>
+                          <a:cs typeface="Microsoft JhengHei"/>
+                        </a:rPr>
+                        <a:t>4,900</a:t>
+                      </a:r>
+                    </a:p>
+                  </a:txBody>
+                  <a:tcPr anchor="ctr" marL="91440" marR="91440" marT="18288" marB="18288">
+                    <a:lnL w="9525">
+                      <a:solidFill>
+                        <a:srgbClr val="D3DEEA"/>
+                      </a:solidFill>
+                    </a:lnL>
+                    <a:lnR w="9525">
+                      <a:solidFill>
+                        <a:srgbClr val="D3DEEA"/>
+                      </a:solidFill>
+                    </a:lnR>
+                    <a:lnT w="9525">
+                      <a:solidFill>
+                        <a:srgbClr val="D3DEEA"/>
+                      </a:solidFill>
+                    </a:lnT>
+                    <a:lnB w="9525">
+                      <a:solidFill>
+                        <a:srgbClr val="D3DEEA"/>
+                      </a:solidFill>
+                    </a:lnB>
+                    <a:solidFill>
+                      <a:srgbClr val="F3F7FC"/>
+                    </a:solidFill>
+                  </a:tcPr>
+                </a:tc>
+                <a:tc>
+                  <a:txBody>
+                    <a:bodyPr wrap="square"/>
+                    <a:lstStyle/>
+                    <a:p>
+                      <a:pPr algn="r"/>
+                      <a:r>
+                        <a:rPr sz="1200" b="0">
+                          <a:solidFill>
+                            <a:srgbClr val="14243A"/>
+                          </a:solidFill>
+                          <a:latin typeface="Microsoft JhengHei"/>
+                          <a:ea typeface="Microsoft JhengHei"/>
+                          <a:cs typeface="Microsoft JhengHei"/>
+                        </a:rPr>
+                        <a:t>1,986</a:t>
+                      </a:r>
+                    </a:p>
+                  </a:txBody>
+                  <a:tcPr anchor="ctr" marL="91440" marR="91440" marT="18288" marB="18288">
+                    <a:lnL w="9525">
+                      <a:solidFill>
+                        <a:srgbClr val="D3DEEA"/>
+                      </a:solidFill>
+                    </a:lnL>
+                    <a:lnR w="9525">
+                      <a:solidFill>
+                        <a:srgbClr val="D3DEEA"/>
+                      </a:solidFill>
+                    </a:lnR>
+                    <a:lnT w="9525">
+                      <a:solidFill>
+                        <a:srgbClr val="D3DEEA"/>
+                      </a:solidFill>
+                    </a:lnT>
+                    <a:lnB w="9525">
+                      <a:solidFill>
+                        <a:srgbClr val="D3DEEA"/>
+                      </a:solidFill>
+                    </a:lnB>
+                    <a:solidFill>
+                      <a:srgbClr val="F3F7FC"/>
+                    </a:solidFill>
+                  </a:tcPr>
+                </a:tc>
+                <a:tc>
+                  <a:txBody>
+                    <a:bodyPr wrap="square"/>
+                    <a:lstStyle/>
+                    <a:p>
+                      <a:pPr algn="r"/>
+                      <a:r>
+                        <a:rPr sz="1200" b="1">
+                          <a:solidFill>
+                            <a:srgbClr val="2073BE"/>
+                          </a:solidFill>
+                          <a:latin typeface="Microsoft JhengHei"/>
+                          <a:ea typeface="Microsoft JhengHei"/>
+                          <a:cs typeface="Microsoft JhengHei"/>
+                        </a:rPr>
+                        <a:t>+2,914</a:t>
+                      </a:r>
+                    </a:p>
+                  </a:txBody>
+                  <a:tcPr anchor="ctr" marL="91440" marR="91440" marT="18288" marB="18288">
+                    <a:lnL w="9525">
+                      <a:solidFill>
+                        <a:srgbClr val="D3DEEA"/>
+                      </a:solidFill>
+                    </a:lnL>
+                    <a:lnR w="9525">
+                      <a:solidFill>
+                        <a:srgbClr val="D3DEEA"/>
+                      </a:solidFill>
+                    </a:lnR>
+                    <a:lnT w="9525">
+                      <a:solidFill>
+                        <a:srgbClr val="D3DEEA"/>
+                      </a:solidFill>
+                    </a:lnT>
+                    <a:lnB w="9525">
+                      <a:solidFill>
+                        <a:srgbClr val="D3DEEA"/>
+                      </a:solidFill>
+                    </a:lnB>
+                    <a:solidFill>
+                      <a:srgbClr val="F3F7FC"/>
+                    </a:solidFill>
+                  </a:tcPr>
+                </a:tc>
+              </a:tr>
+            </a:tbl>
+          </a:graphicData>
+        </a:graphic>
+      </p:graphicFrame>
       <p:sp>
         <p:nvSpPr>
           <p:cNvPr id="26" name="Shape 23">
@@ -28841,7 +30845,7 @@
                 <a:ea typeface="Microsoft JhengHei"/>
                 <a:cs typeface="Microsoft JhengHei"/>
               </a:rPr>
-              <a:t>新臺幣／月；Gemini 3.1 Flash-Lite 官方單價查於 10/18（1 USD≈32 元）；未含人力，見附錄 C、F。</a:t>
+              <a:t>新臺幣／月；Gemini 3.1 Flash-Lite 每百萬 token 0.25／1.50 美元（10/18 查，1 USD≈32 元）；未含人力，見附錄 C、F。</a:t>
             </a:r>
             <a:endParaRPr sz="1400"/>
           </a:p>
@@ -28905,28 +30909,6 @@
           </a:p>
         </p:txBody>
       </p:sp>
-      <p:graphicFrame>
-        <p:nvGraphicFramePr>
-          <p:cNvPr id="30" name="Chart">
-            <a:extLst>
-              <a:ext uri="{FF2B5EF4-FFF2-40B4-BE49-F238E27FC236}">
-                <a16:creationId xmlns:a16="http://schemas.microsoft.com/office/drawing/2014/main" id="{CF1A1B14-1B85-4032-AA9E-AA4200B256E5}"/>
-              </a:ext>
-            </a:extLst>
-          </p:cNvPr>
-          <p:cNvGraphicFramePr/>
-          <p:nvPr/>
-        </p:nvGraphicFramePr>
-        <p:xfrm>
-          <a:off x="868680" y="3959352"/>
-          <a:ext cx="7772400" cy="1463040"/>
-        </p:xfrm>
-        <a:graphic>
-          <a:graphicData uri="http://schemas.openxmlformats.org/drawingml/2006/chart">
-            <c:chart xmlns:c="http://schemas.openxmlformats.org/drawingml/2006/chart" xmlns:r="http://schemas.openxmlformats.org/officeDocument/2006/relationships" r:id="rId3"/>
-          </a:graphicData>
-        </a:graphic>
-      </p:graphicFrame>
     </p:spTree>
     <p:extLst>
       <p:ext uri="{BB962C8B-B14F-4D97-AF65-F5344CB8AC3E}">

--- a/output/ppt-review-20261011/final/MeBOD_複審簡報_第二輪修訂版.pptx
+++ b/output/ppt-review-20261011/final/MeBOD_複審簡報_第二輪修訂版.pptx
@@ -7556,9 +7556,9 @@
           <a:solidFill>
             <a:srgbClr val="FFFFFF"/>
           </a:solidFill>
-          <a:ln w="19050">
+          <a:ln w="12700">
             <a:solidFill>
-              <a:srgbClr val="D46A12"/>
+              <a:srgbClr val="D3DEEA"/>
             </a:solidFill>
             <a:prstDash val="solid"/>
           </a:ln>
@@ -14127,9 +14127,9 @@
           <a:solidFill>
             <a:srgbClr val="FFFFFF"/>
           </a:solidFill>
-          <a:ln w="19050">
+          <a:ln w="12700">
             <a:solidFill>
-              <a:srgbClr val="D46A12"/>
+              <a:srgbClr val="D3DEEA"/>
             </a:solidFill>
             <a:prstDash val="solid"/>
           </a:ln>
@@ -14246,7 +14246,7 @@
             <a:r>
               <a:rPr sz="1800" b="1">
                 <a:solidFill>
-                  <a:srgbClr val="D46A12"/>
+                  <a:srgbClr val="14243A"/>
                 </a:solidFill>
                 <a:latin typeface="Microsoft JhengHei"/>
                 <a:ea typeface="Microsoft JhengHei"/>
@@ -16249,9 +16249,9 @@
           <a:solidFill>
             <a:srgbClr val="FFFFFF"/>
           </a:solidFill>
-          <a:ln w="19050">
+          <a:ln w="12700">
             <a:solidFill>
-              <a:srgbClr val="D46A12"/>
+              <a:srgbClr val="D3DEEA"/>
             </a:solidFill>
             <a:prstDash val="solid"/>
           </a:ln>
@@ -26495,9 +26495,9 @@
           <a:solidFill>
             <a:srgbClr val="FFFFFF"/>
           </a:solidFill>
-          <a:ln w="19050">
+          <a:ln w="12700">
             <a:solidFill>
-              <a:srgbClr val="D46A12"/>
+              <a:srgbClr val="D3DEEA"/>
             </a:solidFill>
             <a:prstDash val="solid"/>
           </a:ln>
@@ -31873,11 +31873,11 @@
             </a:avLst>
           </a:prstGeom>
           <a:solidFill>
-            <a:srgbClr val="FDEEDF"/>
+            <a:srgbClr val="FFFFFF"/>
           </a:solidFill>
-          <a:ln w="19050">
+          <a:ln w="12700">
             <a:solidFill>
-              <a:srgbClr val="D46A12"/>
+              <a:srgbClr val="D3DEEA"/>
             </a:solidFill>
             <a:prstDash val="solid"/>
           </a:ln>
@@ -31924,7 +31924,7 @@
             <a:r>
               <a:rPr sz="1600" b="1">
                 <a:solidFill>
-                  <a:srgbClr val="D46A12"/>
+                  <a:srgbClr val="14243A"/>
                 </a:solidFill>
                 <a:latin typeface="Microsoft JhengHei"/>
                 <a:ea typeface="Microsoft JhengHei"/>
@@ -32033,7 +32033,7 @@
             <a:r>
               <a:rPr sz="1200">
                 <a:solidFill>
-                  <a:srgbClr val="D46A12"/>
+                  <a:srgbClr val="1F6FB8"/>
                 </a:solidFill>
                 <a:latin typeface="Microsoft JhengHei"/>
                 <a:ea typeface="Microsoft JhengHei"/>

--- a/output/ppt-review-20261011/final/MeBOD_複審簡報_第二輪修訂版.pptx
+++ b/output/ppt-review-20261011/final/MeBOD_複審簡報_第二輪修訂版.pptx
@@ -1471,7 +1471,7 @@
           <a:lstStyle/>
           <a:p>
             <a:r>
-              <a:t>【許家全｜140 秒】預先登入正確帳號並備妥兩筆歷史。0–45秒：查詢醫美、設定平台與期間，讀趨勢並點文章。45–95秒：詢問消費者關注重點，展開引用並回原文；可用已完成的答案避免現場等待。95–140秒：歷史比較並匯出Excel。若網站10秒無回應，改以本頁和附錄實際畫面說明，不宣稱即時成功。畫面為原稿嵌入截圖，其數字只屬拍攝當時查詢。</a:t>
+              <a:t>【許家全｜140 秒】預先以專業版或管理員帳號登入並備妥兩筆歷史；Dashboard 開啟時為空白，需先輸入關鍵字再搜尋，訪客與免費版只能查近 7 天。0–45秒：查詢醫美、設定平台與期間，讀趨勢並點文章。45–95秒：詢問消費者關注重點，展開引用並回原文；可用已完成的答案避免現場等待。95–140秒：歷史比較並匯出Excel。若網站10秒無回應，改以本頁和附錄實際畫面說明，不宣稱即時成功。畫面為原稿嵌入截圖，其數字只屬拍攝當時查詢。</a:t>
             </a:r>
           </a:p>
         </p:txBody>
@@ -1702,7 +1702,7 @@
           <a:lstStyle/>
           <a:p>
             <a:r>
-              <a:t>【陳威帆｜105 秒】總結三點：一、四平台到問答與報告形成完整研究流程；二、RAG與分數規則已可說明，後端498項、前端43項自動化測試通過；三、尚未把品質驗證說成全部完成。下一步依序補Linux部署回歸、建立人工標註和檢索題組、辨識業配，再與實際使用者訪談試用。營運上，實測重算後4個專業版帳號可打平雲端支出，算入人力則需12到21個。與通用代理的差異需要同題實測，現階段著重長期資料、來源回查與持續監測。原第16頁測試頁已刪除，主講約13分55秒，可在Demo或此頁多說約35秒。</a:t>
+              <a:t>【陳威帆｜105 秒】總結三點：一、四平台到問答與報告形成完整研究流程；二、RAG與分數規則已可說明，後端522項、前端47項自動化測試通過；三、尚未把品質驗證說成全部完成。下一步依序補Linux部署回歸、建立人工標註和檢索題組、辨識業配，再與實際使用者訪談試用。營運上，實測重算後4個專業版帳號可打平雲端支出，算入人力則需13到22個。與通用代理的差異需要同題實測，現階段著重長期資料、來源回查與持續監測。原第16頁測試頁已刪除，主講約13分55秒，可在Demo或此頁多說約35秒。</a:t>
             </a:r>
           </a:p>
         </p:txBody>
@@ -2010,7 +2010,7 @@
           <a:lstStyle/>
           <a:p>
             <a:r>
-              <a:t>備詢：人力以115年基本工資時薪196元計，每月20或40小時維運。固定支出1,450＋3,920＝5,370，÷463取整為12；1,450＋7,840＝9,290，÷463取整為21。企業版建議價1,990為假設：重度使用者每月1,000次問答約60元、200次洞察約20元、金流3%約60元，貢獻約1,850元，約等於4個專業版。要回答何時獲利，還需實際帳單、獲客速度與開發投入，目前沒有可支持的日期。</a:t>
+              <a:t>備詢：人力以115年基本工資時薪196元計，每月20或40小時維運。固定支出1,456＋3,920＝5,376，÷437取整為13；1,456＋7,840＝9,296，÷437取整為22。企業版建議價1,990為假設：重度使用者每月1,000次問答約182元、200次洞察約66元、金流3%約60元，貢獻約1,682元，約等於3.8個專業版。要回答何時獲利，還需實際帳單、獲客速度與開發投入，目前沒有可支持的日期。</a:t>
             </a:r>
           </a:p>
         </p:txBody>
@@ -2241,7 +2241,7 @@
           <a:lstStyle/>
           <a:p>
             <a:r>
-              <a:t>備詢：本頁列出第7頁與附錄C每個數字的算法。token數由backend/scripts/measure_llm_cost.py以系統實際組prompt的函式量測，不呼叫模型；中文以1字約1 token估算，英文與數字其實更省，結果偏高。Gemini單價查自ai.google.dev/gemini-api/docs/pricing（10/12）；embedding單價依Google開發者部落格公告；Render價格為第三方整理，正式採用前要以官網確認；金流3%為假設。</a:t>
+              <a:t>備詢：本頁列出第7頁與附錄C每個數字的算法。token數由backend/scripts/measure_llm_cost.py以系統實際組prompt的函式量測，不呼叫模型；中文以1字約1 token估算，英文與數字其實更省，結果偏高。Gemini 3.1 Flash-Lite單價查自ai.google.dev/gemini-api/docs/pricing（10/18）；思考token依輸出計價，系統設為minimal；embedding單價依Google開發者部落格公告；Render價格為第三方整理，正式採用前要以官網確認；金流3%為假設。</a:t>
             </a:r>
           </a:p>
         </p:txBody>
@@ -2542,7 +2542,7 @@
           <a:lstStyle/>
           <a:p>
             <a:r>
-              <a:t>【陳威帆｜35 秒】九個區塊串起訂閱服務：小型團隊透過網頁整理口碑，我們維護收錄、分析與檢索，以方案額度區分免費、專業、企業三級。專業版 490、企業版 1,990 都是假設價格，系統已有方案額度但尚未串接收款。成本結構依下一頁實測重算：雲端主機與資料庫是主要固定支出，模型呼叫很便宜，金流手續費與維運人力反而是大頭。來源：backend/app/models/database_models.py（plans）；附錄 C、F。</a:t>
+              <a:t>【陳威帆｜35 秒】九個區塊串起訂閱服務：小型團隊透過網頁整理口碑，我們維護收錄、分析與檢索，以方案額度區分免費、專業、企業三級。專業版 490、企業版 1,990 都是假設價格，系統已有方案額度但尚未串接收款。成本結構依下一頁實測重算：雲端主機與資料庫是主要固定支出；每位專業版用戶每月模型費用約 38 元，加金流手續費約 15 元，變動成本約 53 元；維運人力則是最大的隱藏成本。來源：backend/app/models/database_models.py（plans）；附錄 C、F。</a:t>
             </a:r>
           </a:p>
         </p:txBody>
@@ -2619,7 +2619,7 @@
           <a:lstStyle/>
           <a:p>
             <a:r>
-              <a:t>【陳威帆｜45 秒】初評說我們沒有量化，這頁用實測重算，不再沿用原稿的假設單價。一次 AI 問答包含問題解析與依證據回答兩次呼叫，用系統程式組出真實 prompt，最多約 9,800 token 輸入、2,150 token 輸出，以 Gemini 3.1 Flash-Lite 官方價每百萬 0.25／1.50 美元計算，約 0.18 元；一次洞察約 0.33 元。專業版用戶每月 100 次問答、60 次洞察，加上 3% 金流手續費，變動成本約 53 元。固定支出以 render.yaml 的雲端部署計：主機 25 美元、資料庫 19 美元，加網域與每日判讀約 1,456 元。收入 490N、支出 1,456＋53N，4 個帳號就能打平，每月餘 292 元。但這還沒算人力，算進去要 13 到 22 個帳號，見附錄 C；每個數字的出處在附錄 F。</a:t>
+              <a:t>【陳威帆｜45 秒】初評說我們沒有量化，這頁用實測重算，不再沿用原稿的假設單價。一次 AI 問答包含問題解析與依證據回答兩次呼叫，用系統程式組出真實 prompt，最多約 9,800 token 輸入、2,150 token 輸出，系統已改用 Gemini 3.1 Flash-Lite，思考等級設為 minimal，以官方價每百萬 0.25／1.50 美元計算，約 0.18 元；一次洞察約 0.33 元。專業版用戶每月 100 次問答、60 次洞察，加上 3% 金流手續費，變動成本約 53 元。固定支出以 render.yaml 的雲端部署計：主機 25 美元、資料庫 19 美元，加網域與每日判讀約 1,456 元。收入 490N、支出 1,456＋53N，4 個帳號就能打平，每月餘 292 元。但這還沒算人力，算進去要 13 到 22 個帳號，見附錄 C；每個數字的出處在附錄 F。</a:t>
             </a:r>
           </a:p>
         </p:txBody>
@@ -2773,7 +2773,7 @@
           <a:lstStyle/>
           <a:p>
             <a:r>
-              <a:t>【許家全｜45 秒】Vue介面透過FastAPI存取PostgreSQL，服務層提供分析、檢索及匯出，另接Gemini和四平台收錄。現行ORM有18張表。權限一律在後端檢查；上一版列為缺口的預警已讀端點，已於10/12修正為只能操作自己的預警，並補上跨帳號測試。來源：backend/app/models/database_models.py、backend/app/routers/monitor.py、backend/tests/test_monitor_api.py。</a:t>
+              <a:t>【許家全｜45 秒】Vue介面透過FastAPI存取PostgreSQL，服務層提供分析、檢索及匯出，另接Gemini和四平台收錄。現行ORM有19張表，10/18新增qa_conversations，AI問答對話改存資料庫並依帳號隔離。權限一律在後端檢查；上一版列為缺口的預警已讀端點，已於10/12修正為只能操作自己的預警，並補上跨帳號測試。來源：backend/app/models/database_models.py、backend/app/routers/monitor.py、backend/tests/test_monitor_api.py。</a:t>
             </a:r>
           </a:p>
         </p:txBody>
@@ -4588,7 +4588,7 @@
                 <a:ea typeface="Microsoft JhengHei"/>
                 <a:cs typeface="Microsoft JhengHei"/>
               </a:rPr>
-              <a:t>18 張資料表</a:t>
+              <a:t>19 張資料表</a:t>
             </a:r>
             <a:endParaRPr sz="1400"/>
           </a:p>
@@ -19304,7 +19304,7 @@
                   <a:srgbClr val="14243A"/>
                 </a:solidFill>
               </a:rPr>
-              <a:t>附錄 C｜加入維運人力後，平衡帳號數變成 12～21 個</a:t>
+              <a:t>附錄 C｜加入維運人力後，平衡帳號數變成 13～22 個</a:t>
             </a:r>
           </a:p>
         </p:txBody>
@@ -19560,7 +19560,7 @@
                             <a:srgbClr val="14243A"/>
                           </a:solidFill>
                         </a:rPr>
-                        <a:t>1,450</a:t>
+                        <a:t>1,456</a:t>
                       </a:r>
                     </a:p>
                   </a:txBody>
@@ -19611,7 +19611,7 @@
                             <a:srgbClr val="14243A"/>
                           </a:solidFill>
                         </a:rPr>
-                        <a:t>⌈1,450 ÷ 463⌉ = 4</a:t>
+                        <a:t>⌈1,456 ÷ 437⌉ = 4</a:t>
                       </a:r>
                     </a:p>
                   </a:txBody>
@@ -19717,7 +19717,7 @@
                             <a:srgbClr val="14243A"/>
                           </a:solidFill>
                         </a:rPr>
-                        <a:t>5,370</a:t>
+                        <a:t>5,376</a:t>
                       </a:r>
                     </a:p>
                   </a:txBody>
@@ -19768,7 +19768,7 @@
                             <a:srgbClr val="14243A"/>
                           </a:solidFill>
                         </a:rPr>
-                        <a:t>⌈5,370 ÷ 463⌉ = 12</a:t>
+                        <a:t>⌈5,376 ÷ 437⌉ = 13</a:t>
                       </a:r>
                     </a:p>
                   </a:txBody>
@@ -19874,7 +19874,7 @@
                             <a:srgbClr val="14243A"/>
                           </a:solidFill>
                         </a:rPr>
-                        <a:t>9,290</a:t>
+                        <a:t>9,296</a:t>
                       </a:r>
                     </a:p>
                   </a:txBody>
@@ -19925,7 +19925,7 @@
                             <a:srgbClr val="14243A"/>
                           </a:solidFill>
                         </a:rPr>
-                        <a:t>⌈9,290 ÷ 463⌉ = 21</a:t>
+                        <a:t>⌈9,296 ÷ 437⌉ = 22</a:t>
                       </a:r>
                     </a:p>
                   </a:txBody>
@@ -20028,7 +20028,7 @@
                   <a:srgbClr val="2073BE"/>
                 </a:solidFill>
               </a:rPr>
-              <a:t>每帳號月貢獻＝月費 490 − 變動成本 27＝463 元</a:t>
+              <a:t>每帳號月貢獻＝月費 490 − 變動成本 53＝437 元</a:t>
             </a:r>
           </a:p>
         </p:txBody>
@@ -21099,7 +21099,7 @@
                             <a:srgbClr val="14243A"/>
                           </a:solidFill>
                         </a:rPr>
-                        <a:t>兩次呼叫：輸入 9,794＋輸出 2,150 ≈ 0.06 元</a:t>
+                        <a:t>兩次呼叫：輸入 9,794＋輸出 2,150 ≈ 0.18 元</a:t>
                       </a:r>
                     </a:p>
                   </a:txBody>
@@ -21150,7 +21150,7 @@
                             <a:srgbClr val="14243A"/>
                           </a:solidFill>
                         </a:rPr>
-                        <a:t>Gemini 官方價 0.10／0.40 美元／百萬 token</a:t>
+                        <a:t>Gemini 3.1 Flash-Lite 0.25／1.50 美元／百萬 token；思考等級 minimal</a:t>
                       </a:r>
                     </a:p>
                   </a:txBody>
@@ -21256,7 +21256,7 @@
                             <a:srgbClr val="14243A"/>
                           </a:solidFill>
                         </a:rPr>
-                        <a:t>輸入 14,341＋輸出 4,519 token ≈ 0.10 元</a:t>
+                        <a:t>輸入 14,341＋輸出 4,519 token ≈ 0.33 元</a:t>
                       </a:r>
                     </a:p>
                   </a:txBody>
@@ -21413,7 +21413,7 @@
                             <a:srgbClr val="14243A"/>
                           </a:solidFill>
                         </a:rPr>
-                        <a:t>近 30 天 897 篇＋3,216 則 ≈ 6.3 元（計 7）</a:t>
+                        <a:t>近 30 天 897 篇＋3,216 則 ≈ 12.5 元（計 13）</a:t>
                       </a:r>
                     </a:p>
                   </a:txBody>
@@ -24315,7 +24315,7 @@
                             <a:srgbClr val="14243A"/>
                           </a:solidFill>
                         </a:rPr>
-                        <a:t>四平台、18 張表、分層測試紀錄</a:t>
+                        <a:t>四平台、19 張表、分層測試紀錄</a:t>
                       </a:r>
                     </a:p>
                   </a:txBody>
@@ -33440,7 +33440,7 @@
                 <a:ea typeface="Microsoft JhengHei"/>
                 <a:cs typeface="Microsoft JhengHei"/>
               </a:rPr>
-              <a:t>18 張表・Alembic 遷移</a:t>
+              <a:t>19 張表・Alembic 遷移</a:t>
             </a:r>
             <a:endParaRPr sz="1200"/>
           </a:p>

--- a/output/ppt-review-20261011/final/MeBOD_複審簡報_第二輪修訂版.pptx
+++ b/output/ppt-review-20261011/final/MeBOD_複審簡報_第二輪修訂版.pptx
@@ -145,367 +145,6 @@
 </file>
 
 <file path=ppt/charts/chart1.xml><?xml version="1.0" encoding="utf-8"?>
-<c:chartSpace xmlns:c="http://schemas.openxmlformats.org/drawingml/2006/chart" xmlns:a="http://schemas.openxmlformats.org/drawingml/2006/main" xmlns:r="http://schemas.openxmlformats.org/officeDocument/2006/relationships" xmlns:c16r2="http://schemas.microsoft.com/office/drawing/2015/06/chart">
-  <c:date1904 val="1"/>
-  <c:lang val="en-US"/>
-  <c:roundedCorners val="1"/>
-  <c:style val="2"/>
-  <c:chart>
-    <c:autoTitleDeleted val="1"/>
-    <c:plotArea>
-      <c:layout/>
-      <c:lineChart>
-        <c:grouping val="standard"/>
-        <c:varyColors val="0"/>
-        <c:ser>
-          <c:idx val="0"/>
-          <c:order val="0"/>
-          <c:tx>
-            <c:strRef>
-              <c:f>Sheet1!$B$1</c:f>
-              <c:strCache>
-                <c:ptCount val="1"/>
-                <c:pt idx="0">
-                  <c:v>月收入</c:v>
-                </c:pt>
-              </c:strCache>
-            </c:strRef>
-          </c:tx>
-          <c:spPr>
-            <a:ln w="28575">
-              <a:solidFill>
-                <a:srgbClr val="2073BE"/>
-              </a:solidFill>
-            </a:ln>
-          </c:spPr>
-          <c:marker>
-            <c:symbol val="circle"/>
-            <c:size val="5"/>
-            <c:spPr>
-              <a:solidFill>
-                <a:srgbClr val="2073BE"/>
-              </a:solidFill>
-            </c:spPr>
-          </c:marker>
-          <c:cat>
-            <c:strRef>
-              <c:f>Sheet1!$A$2:$A$7</c:f>
-              <c:strCache>
-                <c:ptCount val="6"/>
-                <c:pt idx="0">
-                  <c:v>0</c:v>
-                </c:pt>
-                <c:pt idx="1">
-                  <c:v>2</c:v>
-                </c:pt>
-                <c:pt idx="2">
-                  <c:v>4</c:v>
-                </c:pt>
-                <c:pt idx="3">
-                  <c:v>6</c:v>
-                </c:pt>
-                <c:pt idx="4">
-                  <c:v>8</c:v>
-                </c:pt>
-                <c:pt idx="5">
-                  <c:v>10</c:v>
-                </c:pt>
-              </c:strCache>
-            </c:strRef>
-          </c:cat>
-          <c:val>
-            <c:numRef>
-              <c:f>Sheet1!$B$2:$B$7</c:f>
-              <c:numCache>
-                <c:formatCode>General</c:formatCode>
-                <c:ptCount val="6"/>
-                <c:pt idx="0">
-                  <c:v>0</c:v>
-                </c:pt>
-                <c:pt idx="1">
-                  <c:v>980</c:v>
-                </c:pt>
-                <c:pt idx="2">
-                  <c:v>1960</c:v>
-                </c:pt>
-                <c:pt idx="3">
-                  <c:v>2940</c:v>
-                </c:pt>
-                <c:pt idx="4">
-                  <c:v>3920</c:v>
-                </c:pt>
-                <c:pt idx="5">
-                  <c:v>4900</c:v>
-                </c:pt>
-              </c:numCache>
-            </c:numRef>
-          </c:val>
-          <c:smooth val="1"/>
-          <c:extLst>
-            <c:ext xmlns:c16="http://schemas.microsoft.com/office/drawing/2014/chart" uri="{C3380CC4-5D6E-409C-BE32-E72D297353CC}">
-              <c16:uniqueId val="{00000000-E6DB-481F-8D9D-1C27ECDCE128}"/>
-            </c:ext>
-          </c:extLst>
-        </c:ser>
-        <c:ser>
-          <c:idx val="1"/>
-          <c:order val="1"/>
-          <c:tx>
-            <c:strRef>
-              <c:f>Sheet1!$C$1</c:f>
-              <c:strCache>
-                <c:ptCount val="1"/>
-                <c:pt idx="0">
-                  <c:v>月支出</c:v>
-                </c:pt>
-              </c:strCache>
-            </c:strRef>
-          </c:tx>
-          <c:spPr>
-            <a:ln w="28575">
-              <a:solidFill>
-                <a:srgbClr val="D46A12"/>
-              </a:solidFill>
-            </a:ln>
-          </c:spPr>
-          <c:marker>
-            <c:symbol val="circle"/>
-            <c:size val="5"/>
-            <c:spPr>
-              <a:solidFill>
-                <a:srgbClr val="D46A12"/>
-              </a:solidFill>
-            </c:spPr>
-          </c:marker>
-          <c:cat>
-            <c:strRef>
-              <c:f>Sheet1!$A$2:$A$7</c:f>
-              <c:strCache>
-                <c:ptCount val="6"/>
-                <c:pt idx="0">
-                  <c:v>0</c:v>
-                </c:pt>
-                <c:pt idx="1">
-                  <c:v>2</c:v>
-                </c:pt>
-                <c:pt idx="2">
-                  <c:v>4</c:v>
-                </c:pt>
-                <c:pt idx="3">
-                  <c:v>6</c:v>
-                </c:pt>
-                <c:pt idx="4">
-                  <c:v>8</c:v>
-                </c:pt>
-                <c:pt idx="5">
-                  <c:v>10</c:v>
-                </c:pt>
-              </c:strCache>
-            </c:strRef>
-          </c:cat>
-          <c:val>
-            <c:numRef>
-              <c:f>Sheet1!$C$2:$C$7</c:f>
-              <c:numCache>
-                <c:formatCode>General</c:formatCode>
-                <c:ptCount val="6"/>
-                <c:pt idx="0">
-                  <c:v>1456</c:v>
-                </c:pt>
-                <c:pt idx="1">
-                  <c:v>1562</c:v>
-                </c:pt>
-                <c:pt idx="2">
-                  <c:v>1668</c:v>
-                </c:pt>
-                <c:pt idx="3">
-                  <c:v>1774</c:v>
-                </c:pt>
-                <c:pt idx="4">
-                  <c:v>1880</c:v>
-                </c:pt>
-                <c:pt idx="5">
-                  <c:v>1986</c:v>
-                </c:pt>
-              </c:numCache>
-            </c:numRef>
-          </c:val>
-          <c:smooth val="1"/>
-          <c:extLst>
-            <c:ext xmlns:c16="http://schemas.microsoft.com/office/drawing/2014/chart" uri="{C3380CC4-5D6E-409C-BE32-E72D297353CC}">
-              <c16:uniqueId val="{00000001-E6DB-481F-8D9D-1C27ECDCE128}"/>
-            </c:ext>
-          </c:extLst>
-        </c:ser>
-        <c:dLbls>
-          <c:showLegendKey val="0"/>
-          <c:showVal val="0"/>
-          <c:showCatName val="0"/>
-          <c:showSerName val="0"/>
-          <c:showPercent val="0"/>
-          <c:showBubbleSize val="0"/>
-        </c:dLbls>
-        <c:marker val="1"/>
-        <c:smooth val="0"/>
-        <c:axId val="48650112"/>
-        <c:axId val="48672768"/>
-      </c:lineChart>
-      <c:catAx>
-        <c:axId val="48650112"/>
-        <c:scaling>
-          <c:orientation val="minMax"/>
-        </c:scaling>
-        <c:delete val="0"/>
-        <c:axPos val="b"/>
-        <c:title>
-          <c:tx>
-            <c:rich>
-              <a:bodyPr/>
-              <a:lstStyle/>
-              <a:p>
-                <a:r>
-                  <a:rPr lang="zh-TW" altLang="en-US">
-                    <a:latin typeface="Microsoft JhengHei"/>
-                    <a:ea typeface="Microsoft JhengHei"/>
-                    <a:cs typeface="Microsoft JhengHei"/>
-                  </a:rPr>
-                  <a:t>付費帳號數</a:t>
-                </a:r>
-              </a:p>
-            </c:rich>
-          </c:tx>
-          <c:overlay val="0"/>
-        </c:title>
-        <c:numFmt formatCode="General" sourceLinked="1"/>
-        <c:majorTickMark val="none"/>
-        <c:minorTickMark val="none"/>
-        <c:tickLblPos val="nextTo"/>
-        <c:spPr>
-          <a:ln w="9525">
-            <a:solidFill>
-              <a:srgbClr val="D4D4D4"/>
-            </a:solidFill>
-            <a:prstDash val="solid"/>
-          </a:ln>
-        </c:spPr>
-        <c:txPr>
-          <a:bodyPr anchorCtr="1"/>
-          <a:lstStyle/>
-          <a:p>
-            <a:pPr>
-              <a:defRPr sz="1200">
-                <a:solidFill>
-                  <a:srgbClr val="465E78"/>
-                </a:solidFill>
-                <a:latin typeface="Microsoft JhengHei"/>
-                <a:ea typeface="Microsoft JhengHei"/>
-                <a:cs typeface="Microsoft JhengHei"/>
-              </a:defRPr>
-            </a:pPr>
-            <a:endParaRPr lang="en-US"/>
-          </a:p>
-        </c:txPr>
-        <c:crossAx val="48672768"/>
-        <c:crosses val="autoZero"/>
-        <c:auto val="1"/>
-        <c:lblAlgn val="ctr"/>
-        <c:lblOffset val="100"/>
-        <c:noMultiLvlLbl val="1"/>
-      </c:catAx>
-      <c:valAx>
-        <c:axId val="48672768"/>
-        <c:scaling>
-          <c:orientation val="minMax"/>
-          <c:max val="5000"/>
-        </c:scaling>
-        <c:delete val="0"/>
-        <c:axPos val="l"/>
-        <c:majorGridlines>
-          <c:spPr>
-            <a:ln w="9525">
-              <a:solidFill>
-                <a:srgbClr val="E2EEFA"/>
-              </a:solidFill>
-            </a:ln>
-          </c:spPr>
-        </c:majorGridlines>
-        <c:numFmt formatCode="General" sourceLinked="1"/>
-        <c:majorTickMark val="none"/>
-        <c:minorTickMark val="none"/>
-        <c:tickLblPos val="nextTo"/>
-        <c:spPr>
-          <a:ln w="9525">
-            <a:solidFill>
-              <a:srgbClr val="D4D4D4"/>
-            </a:solidFill>
-            <a:prstDash val="solid"/>
-          </a:ln>
-        </c:spPr>
-        <c:txPr>
-          <a:bodyPr anchorCtr="1"/>
-          <a:lstStyle/>
-          <a:p>
-            <a:pPr>
-              <a:defRPr sz="1200">
-                <a:solidFill>
-                  <a:srgbClr val="465E78"/>
-                </a:solidFill>
-                <a:latin typeface="Microsoft JhengHei"/>
-                <a:ea typeface="Microsoft JhengHei"/>
-                <a:cs typeface="Microsoft JhengHei"/>
-              </a:defRPr>
-            </a:pPr>
-            <a:endParaRPr lang="en-US"/>
-          </a:p>
-        </c:txPr>
-        <c:crossAx val="48650112"/>
-        <c:crosses val="autoZero"/>
-        <c:crossBetween val="between"/>
-        <c:majorUnit val="2500"/>
-      </c:valAx>
-      <c:spPr>
-        <a:solidFill>
-          <a:srgbClr val="FFFFFF"/>
-        </a:solidFill>
-      </c:spPr>
-    </c:plotArea>
-    <c:legend>
-      <c:legendPos val="r"/>
-      <c:overlay val="0"/>
-      <c:txPr>
-        <a:bodyPr anchorCtr="1"/>
-        <a:lstStyle/>
-        <a:p>
-          <a:pPr>
-            <a:defRPr sz="1200">
-              <a:solidFill>
-                <a:srgbClr val="465E78"/>
-              </a:solidFill>
-              <a:latin typeface="Microsoft JhengHei"/>
-              <a:ea typeface="Microsoft JhengHei"/>
-              <a:cs typeface="Microsoft JhengHei"/>
-            </a:defRPr>
-          </a:pPr>
-          <a:endParaRPr lang="en-US"/>
-        </a:p>
-      </c:txPr>
-    </c:legend>
-    <c:plotVisOnly val="1"/>
-    <c:dispBlanksAs val="zero"/>
-    <c:showDLblsOverMax val="1"/>
-  </c:chart>
-  <c:spPr>
-    <a:solidFill>
-      <a:srgbClr val="FFFFFF"/>
-    </a:solidFill>
-  </c:spPr>
-  <c:externalData r:id="rId1">
-    <c:autoUpdate val="0"/>
-  </c:externalData>
-</c:chartSpace>
-</file>
-
-<file path=ppt/charts/chart2.xml><?xml version="1.0" encoding="utf-8"?>
 <c:chartSpace xmlns:c="http://schemas.openxmlformats.org/drawingml/2006/chart" xmlns:a="http://schemas.openxmlformats.org/drawingml/2006/main" xmlns:r="http://schemas.openxmlformats.org/officeDocument/2006/relationships" xmlns:c16r2="http://schemas.microsoft.com/office/drawing/2015/06/chart">
   <c:date1904 val="1"/>
   <c:lang val="en-US"/>
@@ -1548,7 +1187,27 @@
           <a:lstStyle/>
           <a:p>
             <a:r>
-              <a:t>【陳威帆｜45 秒】甘特圖保留原稿115/2至116/1的計畫，10月後為計畫工作。繳件與展覽日期沿用原稿，發表前仍按學校公告確認。右側里程碑依各功能第一次提交的月份：5月PTT爬蟲、儀表板與WebSocket；7月帳號登入；8月Dcard、Mobile01、Threads；9月方案額度、Alembic與向量檢索；10月情緒一致性、預警權限與問答檢索修正。提交數由GitHub於10/12統計：5月14、6月0、7月27、8月42、9月47、10月36，共166次，皆已推送；提交集中於單一帳號，不能當作兩位組員的貢獻比例。</a:t>
+              <a:t>【許家全｜45 秒】</a:t>
+            </a:r>
+          </a:p>
+          <a:p>
+            <a:r>
+              <a:t>接下來由我說明進度管理與後續規劃。</a:t>
+            </a:r>
+          </a:p>
+          <a:p>
+            <a:r>
+              <a:t>初評時老師提醒甘特圖要用實際年月，所以這頁從 115 年 2 月排到 116 年 1 月，分成起始、精化、建構、移轉四個階段，目前正在移轉階段。上方標出四個查核點：6 月 2 日初審、10 月 13 日複審繳件、11 月 25 日觀摩展，以及 12 月 29 日最終版。</a:t>
+            </a:r>
+          </a:p>
+          <a:p>
+            <a:r>
+              <a:t>左邊是 GitHub 每月提交數，統計到 10 月 12 日共 166 次；右邊是各月份第一次完成的功能：5 月 PTT 爬蟲與儀表板，7 月帳號與權限，8 月擴充到 Dcard、Mobile01、Threads，9 月加入方案額度、資料庫遷移與向量檢索，10 月則完成情緒一致性與問答修正。</a:t>
+            </a:r>
+          </a:p>
+          <a:p>
+            <a:r>
+              <a:t>來源：GitHub 提交紀錄（10/12 統計：5 月 14、6 月 0、7 月 27、8 月 42、9 月 47、10 月 36）。</a:t>
             </a:r>
           </a:p>
         </p:txBody>
@@ -1625,7 +1284,27 @@
           <a:lstStyle/>
           <a:p>
             <a:r>
-              <a:t>【陳威帆｜30 秒】威帆負責需求、營運、文件統整與報告；家全負責架構、後端、爬蟲、模型、前端與測試。沿用原稿工作分配；程式提交和文件交付分別佐證，不能把單一作者提交數當兩人貢獻比例。來源：使用者原稿第16頁；本機Git提交歷史。</a:t>
+              <a:t>【許家全｜30 秒】</a:t>
+            </a:r>
+          </a:p>
+          <a:p>
+            <a:r>
+              <a:t>分工上，組長威帆負責需求企劃與雜誌社交流，以及成本、STP、TOWS 等營運計畫，並統整系統手冊第 1 到 6 章與簡報。</a:t>
+            </a:r>
+          </a:p>
+          <a:p>
+            <a:r>
+              <a:t>我負責系統架構、資料庫與 FastAPI 後端，四平台爬蟲和每日排程，AI 問答、情緒評分與向量檢索，也包含前端介面、測試，以及手冊第 7 到 12 章。</a:t>
+            </a:r>
+          </a:p>
+          <a:p>
+            <a:r>
+              <a:t>另外說明，程式提交集中在單一帳號，所以提交次數不能直接當作兩個人的貢獻比例。</a:t>
+            </a:r>
+          </a:p>
+          <a:p>
+            <a:r>
+              <a:t>來源：使用者原稿第 16 頁工作分配；本機 Git 提交歷史。</a:t>
             </a:r>
           </a:p>
         </p:txBody>
@@ -1702,7 +1381,37 @@
           <a:lstStyle/>
           <a:p>
             <a:r>
-              <a:t>【陳威帆｜105 秒】總結三點：一、四平台到問答與報告形成完整研究流程；二、RAG與分數規則已可說明，後端522項、前端47項自動化測試通過；三、尚未把品質驗證說成全部完成。下一步依序補Linux部署回歸、建立人工標註和檢索題組、辨識業配，再與實際使用者訪談試用。營運上，實測重算後4個專業版帳號可打平雲端支出，算入人力則需13到22個。與通用代理的差異需要同題實測，現階段著重長期資料、來源回查與持續監測。原第16頁測試頁已刪除，主講約13分55秒，可在Demo或此頁多說約35秒。</a:t>
+              <a:t>【許家全｜105 秒】</a:t>
+            </a:r>
+          </a:p>
+          <a:p>
+            <a:r>
+              <a:t>最後做個總結。</a:t>
+            </a:r>
+          </a:p>
+          <a:p>
+            <a:r>
+              <a:t>先說已經完成的：系統每天自動收錄四個平台的討論；AI 問答用關鍵字加向量的混合檢索，每個回答都附引用來源；情緒評分有 100 篇重跑的一致性紀錄；帳號、方案額度與監測預警都在後端檢查，目前後端 528 項、前端 47 項自動化測試全部通過。營運面依實測重算，4 個專業版帳號就能打平每月約 1,456 元的雲端支出；如果算入每月 20 到 40 小時的維運人力，則需要 13 到 22 個帳號。</a:t>
+            </a:r>
+          </a:p>
+          <a:p>
+            <a:r>
+              <a:t>但我們也要清楚說明還差什麼。下一步依序是：補上 Linux 部署的回歸驗證；建立人工標註，驗證情緒判讀的準確度；用固定題組評估檢索品質；開發業配辨識；最後和實際使用者進行正式的需求訪談與試用。</a:t>
+            </a:r>
+          </a:p>
+          <a:p>
+            <a:r>
+              <a:t>至於評審提到的通用 AI 代理：它確實能自己搜尋、整理資料，我們不宣稱一定比它好。MeBOD 的定位是長期累積的歷史資料、每個回答都能回查原文，以及依帳號持續監測與預警；兩者的差異，我們會用同一題實際比較來驗證。</a:t>
+            </a:r>
+          </a:p>
+          <a:p>
+            <a:r>
+              <a:t>以上是我們的報告，謝謝老師，敬請指教。</a:t>
+            </a:r>
+          </a:p>
+          <a:p>
+            <a:r>
+              <a:t>備註：測試數為 10/20 統計（後端 528 項通過、1 項略過；前端 47 項）。</a:t>
             </a:r>
           </a:p>
         </p:txBody>
@@ -6618,7 +6327,7 @@
               <a:buNone/>
             </a:pPr>
             <a:r>
-              <a:rPr sz="1600" b="1">
+              <a:rPr lang="zh-CN" altLang="en-US" sz="1600" b="1" dirty="0">
                 <a:solidFill>
                   <a:srgbClr val="14243A"/>
                 </a:solidFill>
@@ -6626,9 +6335,31 @@
                 <a:ea typeface="Microsoft JhengHei"/>
                 <a:cs typeface="Microsoft JhengHei"/>
               </a:rPr>
-              <a:t>本批 100 篇標籤變動</a:t>
-            </a:r>
-            <a:endParaRPr sz="1600"/>
+              <a:t>同</a:t>
+            </a:r>
+            <a:r>
+              <a:rPr sz="1600" b="1" dirty="0">
+                <a:solidFill>
+                  <a:srgbClr val="14243A"/>
+                </a:solidFill>
+                <a:latin typeface="Microsoft JhengHei"/>
+                <a:ea typeface="Microsoft JhengHei"/>
+                <a:cs typeface="Microsoft JhengHei"/>
+              </a:rPr>
+              <a:t>批 100 </a:t>
+            </a:r>
+            <a:r>
+              <a:rPr sz="1600" b="1" dirty="0" err="1">
+                <a:solidFill>
+                  <a:srgbClr val="14243A"/>
+                </a:solidFill>
+                <a:latin typeface="Microsoft JhengHei"/>
+                <a:ea typeface="Microsoft JhengHei"/>
+                <a:cs typeface="Microsoft JhengHei"/>
+              </a:rPr>
+              <a:t>篇標籤變動</a:t>
+            </a:r>
+            <a:endParaRPr sz="1600" dirty="0"/>
           </a:p>
         </p:txBody>
       </p:sp>
@@ -6794,11 +6525,9 @@
           <a:bodyPr wrap="square" lIns="0" tIns="0" rIns="0" bIns="0" anchor="ctr"/>
           <a:lstStyle/>
           <a:p>
-            <a:pPr marL="0" indent="0" algn="ctr">
-              <a:buNone/>
-            </a:pPr>
-            <a:r>
-              <a:rPr sz="1600" b="1">
+            <a:pPr algn="ctr"/>
+            <a:r>
+              <a:rPr sz="1600" b="1" dirty="0" err="1">
                 <a:solidFill>
                   <a:srgbClr val="14243A"/>
                 </a:solidFill>
@@ -6806,9 +6535,50 @@
                 <a:ea typeface="Microsoft JhengHei"/>
                 <a:cs typeface="Microsoft JhengHei"/>
               </a:rPr>
-              <a:t>負面 precision（AI 對照）</a:t>
-            </a:r>
-            <a:endParaRPr sz="1600"/>
+              <a:t>負面</a:t>
+            </a:r>
+            <a:r>
+              <a:rPr lang="zh-TW" altLang="en-US" sz="1600" b="1" dirty="0">
+                <a:solidFill>
+                  <a:srgbClr val="14243A"/>
+                </a:solidFill>
+              </a:rPr>
+              <a:t>精確率</a:t>
+            </a:r>
+            <a:r>
+              <a:rPr sz="1600" b="1" dirty="0">
+                <a:solidFill>
+                  <a:srgbClr val="14243A"/>
+                </a:solidFill>
+                <a:latin typeface="Microsoft JhengHei"/>
+                <a:ea typeface="Microsoft JhengHei"/>
+                <a:cs typeface="Microsoft JhengHei"/>
+              </a:rPr>
+              <a:t>（AI </a:t>
+            </a:r>
+            <a:r>
+              <a:rPr sz="1600" b="1" dirty="0" err="1">
+                <a:solidFill>
+                  <a:srgbClr val="14243A"/>
+                </a:solidFill>
+                <a:latin typeface="Microsoft JhengHei"/>
+                <a:ea typeface="Microsoft JhengHei"/>
+                <a:cs typeface="Microsoft JhengHei"/>
+              </a:rPr>
+              <a:t>對照</a:t>
+            </a:r>
+            <a:r>
+              <a:rPr sz="1600" b="1" dirty="0">
+                <a:solidFill>
+                  <a:srgbClr val="14243A"/>
+                </a:solidFill>
+                <a:latin typeface="Microsoft JhengHei"/>
+                <a:ea typeface="Microsoft JhengHei"/>
+                <a:cs typeface="Microsoft JhengHei"/>
+              </a:rPr>
+              <a:t>）</a:t>
+            </a:r>
+            <a:endParaRPr sz="1600" dirty="0"/>
           </a:p>
         </p:txBody>
       </p:sp>
@@ -7066,7 +6836,7 @@
               <a:buNone/>
             </a:pPr>
             <a:r>
-              <a:rPr sz="1400" b="1">
+              <a:rPr sz="1400" b="1" dirty="0" err="1">
                 <a:solidFill>
                   <a:srgbClr val="D46A12"/>
                 </a:solidFill>
@@ -7074,9 +6844,64 @@
                 <a:ea typeface="Microsoft JhengHei"/>
                 <a:cs typeface="Microsoft JhengHei"/>
               </a:rPr>
-              <a:t>全庫 1.6 萬筆已改 temperature 0 重評；模型一致率不等於正確率，人工標註待補。</a:t>
-            </a:r>
-            <a:endParaRPr sz="1400"/>
+              <a:t>全庫</a:t>
+            </a:r>
+            <a:r>
+              <a:rPr sz="1400" b="1" dirty="0">
+                <a:solidFill>
+                  <a:srgbClr val="D46A12"/>
+                </a:solidFill>
+                <a:latin typeface="Microsoft JhengHei"/>
+                <a:ea typeface="Microsoft JhengHei"/>
+                <a:cs typeface="Microsoft JhengHei"/>
+              </a:rPr>
+              <a:t> 1.6 </a:t>
+            </a:r>
+            <a:r>
+              <a:rPr sz="1400" b="1" dirty="0" err="1">
+                <a:solidFill>
+                  <a:srgbClr val="D46A12"/>
+                </a:solidFill>
+                <a:latin typeface="Microsoft JhengHei"/>
+                <a:ea typeface="Microsoft JhengHei"/>
+                <a:cs typeface="Microsoft JhengHei"/>
+              </a:rPr>
+              <a:t>萬筆已改</a:t>
+            </a:r>
+            <a:r>
+              <a:rPr sz="1400" b="1" dirty="0">
+                <a:solidFill>
+                  <a:srgbClr val="D46A12"/>
+                </a:solidFill>
+                <a:latin typeface="Microsoft JhengHei"/>
+                <a:ea typeface="Microsoft JhengHei"/>
+                <a:cs typeface="Microsoft JhengHei"/>
+              </a:rPr>
+              <a:t> temperature 0 </a:t>
+            </a:r>
+            <a:r>
+              <a:rPr sz="1400" b="1" dirty="0" err="1">
+                <a:solidFill>
+                  <a:srgbClr val="D46A12"/>
+                </a:solidFill>
+                <a:latin typeface="Microsoft JhengHei"/>
+                <a:ea typeface="Microsoft JhengHei"/>
+                <a:cs typeface="Microsoft JhengHei"/>
+              </a:rPr>
+              <a:t>重評；模型一致率不等於正確率，人工標註待補</a:t>
+            </a:r>
+            <a:r>
+              <a:rPr sz="1400" b="1" dirty="0">
+                <a:solidFill>
+                  <a:srgbClr val="D46A12"/>
+                </a:solidFill>
+                <a:latin typeface="Microsoft JhengHei"/>
+                <a:ea typeface="Microsoft JhengHei"/>
+                <a:cs typeface="Microsoft JhengHei"/>
+              </a:rPr>
+              <a:t>。</a:t>
+            </a:r>
+            <a:endParaRPr sz="1400" dirty="0"/>
           </a:p>
         </p:txBody>
       </p:sp>
@@ -9685,13 +9510,30 @@
               </a:defRPr>
             </a:pPr>
             <a:r>
-              <a:rPr sz="2700" b="1">
+              <a:rPr sz="2700" b="1" dirty="0" err="1">
+                <a:hlinkClick r:id="rId3">
+                  <a:extLst>
+                    <a:ext uri="{A12FA001-AC4F-418D-AE19-62706E023703}">
+                      <ahyp:hlinkClr xmlns:ahyp="http://schemas.microsoft.com/office/drawing/2018/hyperlinkcolor" val="tx"/>
+                    </a:ext>
+                  </a:extLst>
+                </a:hlinkClick>
+              </a:rPr>
+              <a:t>Demo</a:t>
+            </a:r>
+            <a:r>
+              <a:rPr sz="2700" b="1" dirty="0" err="1">
                 <a:solidFill>
                   <a:srgbClr val="14243A"/>
                 </a:solidFill>
               </a:rPr>
-              <a:t>Demo：完成一次跨平台口碑研究</a:t>
-            </a:r>
+              <a:t>：完成一次跨平台口碑研究</a:t>
+            </a:r>
+            <a:endParaRPr sz="2700" b="1" dirty="0">
+              <a:solidFill>
+                <a:srgbClr val="14243A"/>
+              </a:solidFill>
+            </a:endParaRPr>
           </a:p>
         </p:txBody>
       </p:sp>
@@ -9710,7 +9552,7 @@
           <p:nvPr/>
         </p:nvPicPr>
         <p:blipFill>
-          <a:blip r:embed="rId3"/>
+          <a:blip r:embed="rId4"/>
           <a:stretch/>
         </p:blipFill>
         <p:spPr>
@@ -12492,7 +12334,7 @@
               <a:buNone/>
             </a:pPr>
             <a:r>
-              <a:rPr sz="1400" b="1">
+              <a:rPr sz="1400" b="1" dirty="0">
                 <a:solidFill>
                   <a:srgbClr val="D46A12"/>
                 </a:solidFill>
@@ -12500,9 +12342,75 @@
                 <a:ea typeface="Microsoft JhengHei"/>
                 <a:cs typeface="Microsoft JhengHei"/>
               </a:rPr>
-              <a:t>GitHub：7–10 月 152 次提交（10/12 統計，皆已推送）；非逐人貢獻比例。</a:t>
-            </a:r>
-            <a:endParaRPr sz="1400"/>
+              <a:t>GitHub：7–10 月 1</a:t>
+            </a:r>
+            <a:r>
+              <a:rPr lang="en-US" sz="1400" b="1" dirty="0">
+                <a:solidFill>
+                  <a:srgbClr val="D46A12"/>
+                </a:solidFill>
+                <a:latin typeface="Microsoft JhengHei"/>
+                <a:ea typeface="Microsoft JhengHei"/>
+                <a:cs typeface="Microsoft JhengHei"/>
+              </a:rPr>
+              <a:t>66</a:t>
+            </a:r>
+            <a:r>
+              <a:rPr sz="1400" b="1" dirty="0">
+                <a:solidFill>
+                  <a:srgbClr val="D46A12"/>
+                </a:solidFill>
+                <a:latin typeface="Microsoft JhengHei"/>
+                <a:ea typeface="Microsoft JhengHei"/>
+                <a:cs typeface="Microsoft JhengHei"/>
+              </a:rPr>
+              <a:t> 次提交（10/1</a:t>
+            </a:r>
+            <a:r>
+              <a:rPr lang="en-US" sz="1400" b="1" dirty="0">
+                <a:solidFill>
+                  <a:srgbClr val="D46A12"/>
+                </a:solidFill>
+                <a:latin typeface="Microsoft JhengHei"/>
+                <a:ea typeface="Microsoft JhengHei"/>
+                <a:cs typeface="Microsoft JhengHei"/>
+              </a:rPr>
+              <a:t>1</a:t>
+            </a:r>
+            <a:r>
+              <a:rPr sz="1400" b="1" dirty="0">
+                <a:solidFill>
+                  <a:srgbClr val="D46A12"/>
+                </a:solidFill>
+                <a:latin typeface="Microsoft JhengHei"/>
+                <a:ea typeface="Microsoft JhengHei"/>
+                <a:cs typeface="Microsoft JhengHei"/>
+              </a:rPr>
+              <a:t> </a:t>
+            </a:r>
+            <a:r>
+              <a:rPr sz="1400" b="1" dirty="0" err="1">
+                <a:solidFill>
+                  <a:srgbClr val="D46A12"/>
+                </a:solidFill>
+                <a:latin typeface="Microsoft JhengHei"/>
+                <a:ea typeface="Microsoft JhengHei"/>
+                <a:cs typeface="Microsoft JhengHei"/>
+              </a:rPr>
+              <a:t>統計</a:t>
+            </a:r>
+            <a:r>
+              <a:rPr sz="1400" b="1" dirty="0">
+                <a:solidFill>
+                  <a:srgbClr val="D46A12"/>
+                </a:solidFill>
+                <a:latin typeface="Microsoft JhengHei"/>
+                <a:ea typeface="Microsoft JhengHei"/>
+                <a:cs typeface="Microsoft JhengHei"/>
+              </a:rPr>
+              <a:t>）。</a:t>
+            </a:r>
+            <a:endParaRPr sz="1400" dirty="0"/>
           </a:p>
         </p:txBody>
       </p:sp>
@@ -20862,7 +20770,7 @@
         </p:nvGraphicFramePr>
         <p:xfrm>
           <a:off x="733425" y="1771650"/>
-          <a:ext cx="10725912" cy="3712463"/>
+          <a:ext cx="10725912" cy="3791712"/>
         </p:xfrm>
         <a:graphic>
           <a:graphicData uri="http://schemas.openxmlformats.org/drawingml/2006/table">
@@ -27041,7 +26949,7 @@
               <a:buNone/>
             </a:pPr>
             <a:r>
-              <a:rPr sz="1400">
+              <a:rPr sz="1400" dirty="0" err="1">
                 <a:solidFill>
                   <a:srgbClr val="3F546C"/>
                 </a:solidFill>
@@ -27049,16 +26957,27 @@
                 <a:ea typeface="Microsoft JhengHei"/>
                 <a:cs typeface="Microsoft JhengHei"/>
               </a:rPr>
-              <a:t>免費／專業 490／企業 1,990</a:t>
-            </a:r>
-            <a:endParaRPr sz="1400"/>
+              <a:t>免費／專業</a:t>
+            </a:r>
+            <a:r>
+              <a:rPr sz="1400" dirty="0">
+                <a:solidFill>
+                  <a:srgbClr val="3F546C"/>
+                </a:solidFill>
+                <a:latin typeface="Microsoft JhengHei"/>
+                <a:ea typeface="Microsoft JhengHei"/>
+                <a:cs typeface="Microsoft JhengHei"/>
+              </a:rPr>
+              <a:t> 490</a:t>
+            </a:r>
+            <a:endParaRPr sz="1400" dirty="0"/>
           </a:p>
           <a:p>
             <a:pPr marL="0" indent="0" algn="ctr">
               <a:buNone/>
             </a:pPr>
             <a:r>
-              <a:rPr sz="1400">
+              <a:rPr sz="1400" dirty="0" err="1">
                 <a:solidFill>
                   <a:srgbClr val="3F546C"/>
                 </a:solidFill>
@@ -27068,7 +26987,7 @@
               </a:rPr>
               <a:t>月費皆為假設，待付費意願驗證</a:t>
             </a:r>
-            <a:endParaRPr sz="1400"/>
+            <a:endParaRPr sz="1400" dirty="0"/>
           </a:p>
         </p:txBody>
       </p:sp>
@@ -27887,11 +27806,8 @@
           <a:bodyPr wrap="square" lIns="0" tIns="0" rIns="0" bIns="0" anchor="ctr"/>
           <a:lstStyle/>
           <a:p>
-            <a:pPr marL="0" indent="0">
-              <a:buNone/>
-            </a:pPr>
-            <a:r>
-              <a:rPr sz="3000" b="1">
+            <a:r>
+              <a:rPr sz="3000" b="1" dirty="0" err="1">
                 <a:solidFill>
                   <a:srgbClr val="14243A"/>
                 </a:solidFill>
@@ -27899,9 +27815,39 @@
                 <a:ea typeface="Microsoft JhengHei"/>
                 <a:cs typeface="Microsoft JhengHei"/>
               </a:rPr>
-              <a:t>成本重算：4 個專業版帳號可打平雲端支出</a:t>
-            </a:r>
-            <a:endParaRPr sz="3000"/>
+              <a:t>成本</a:t>
+            </a:r>
+            <a:r>
+              <a:rPr lang="zh-TW" altLang="en-US" sz="3000" b="1" dirty="0">
+                <a:solidFill>
+                  <a:srgbClr val="14243A"/>
+                </a:solidFill>
+              </a:rPr>
+              <a:t>情境</a:t>
+            </a:r>
+            <a:r>
+              <a:rPr sz="3000" b="1" dirty="0">
+                <a:solidFill>
+                  <a:srgbClr val="14243A"/>
+                </a:solidFill>
+                <a:latin typeface="Microsoft JhengHei"/>
+                <a:ea typeface="Microsoft JhengHei"/>
+                <a:cs typeface="Microsoft JhengHei"/>
+              </a:rPr>
+              <a:t>：4 </a:t>
+            </a:r>
+            <a:r>
+              <a:rPr sz="3000" b="1" dirty="0" err="1">
+                <a:solidFill>
+                  <a:srgbClr val="14243A"/>
+                </a:solidFill>
+                <a:latin typeface="Microsoft JhengHei"/>
+                <a:ea typeface="Microsoft JhengHei"/>
+                <a:cs typeface="Microsoft JhengHei"/>
+              </a:rPr>
+              <a:t>個專業版帳號可打平雲端支出</a:t>
+            </a:r>
+            <a:endParaRPr sz="3000" dirty="0"/>
           </a:p>
         </p:txBody>
       </p:sp>
@@ -27911,7 +27857,13 @@
           <p:cNvGraphicFramePr>
             <a:graphicFrameLocks noGrp="1"/>
           </p:cNvGraphicFramePr>
-          <p:nvPr/>
+          <p:nvPr>
+            <p:extLst>
+              <p:ext uri="{D42A27DB-BD31-4B8C-83A1-F6EECF244321}">
+                <p14:modId xmlns:p14="http://schemas.microsoft.com/office/powerpoint/2010/main" val="2352038850"/>
+              </p:ext>
+            </p:extLst>
+          </p:nvPr>
         </p:nvGraphicFramePr>
         <p:xfrm>
           <a:off x="731520" y="1627632"/>
@@ -27922,14 +27874,32 @@
             <a:tbl>
               <a:tblPr/>
               <a:tblGrid>
-                <a:gridCol w="1965960"/>
-                <a:gridCol w="3429000"/>
-                <a:gridCol w="1097280"/>
+                <a:gridCol w="1965960">
+                  <a:extLst>
+                    <a:ext uri="{9D8B030D-6E8A-4147-A177-3AD203B41FA5}">
+                      <a16:colId xmlns:a16="http://schemas.microsoft.com/office/drawing/2014/main" val="20000"/>
+                    </a:ext>
+                  </a:extLst>
+                </a:gridCol>
+                <a:gridCol w="3429000">
+                  <a:extLst>
+                    <a:ext uri="{9D8B030D-6E8A-4147-A177-3AD203B41FA5}">
+                      <a16:colId xmlns:a16="http://schemas.microsoft.com/office/drawing/2014/main" val="20001"/>
+                    </a:ext>
+                  </a:extLst>
+                </a:gridCol>
+                <a:gridCol w="1097280">
+                  <a:extLst>
+                    <a:ext uri="{9D8B030D-6E8A-4147-A177-3AD203B41FA5}">
+                      <a16:colId xmlns:a16="http://schemas.microsoft.com/office/drawing/2014/main" val="20002"/>
+                    </a:ext>
+                  </a:extLst>
+                </a:gridCol>
               </a:tblGrid>
               <a:tr h="315468">
                 <a:tc>
                   <a:txBody>
-                    <a:bodyPr wrap="square"/>
+                    <a:bodyPr/>
                     <a:lstStyle/>
                     <a:p>
                       <a:pPr algn="l"/>
@@ -27946,7 +27916,7 @@
                       </a:r>
                     </a:p>
                   </a:txBody>
-                  <a:tcPr anchor="ctr" marL="91440" marR="91440" marT="18288" marB="18288">
+                  <a:tcPr marT="18288" marB="18288" anchor="ctr">
                     <a:lnL w="9525">
                       <a:solidFill>
                         <a:srgbClr val="D3DEEA"/>
@@ -27974,7 +27944,7 @@
                 </a:tc>
                 <a:tc>
                   <a:txBody>
-                    <a:bodyPr wrap="square"/>
+                    <a:bodyPr/>
                     <a:lstStyle/>
                     <a:p>
                       <a:pPr algn="l"/>
@@ -27991,7 +27961,7 @@
                       </a:r>
                     </a:p>
                   </a:txBody>
-                  <a:tcPr anchor="ctr" marL="91440" marR="91440" marT="18288" marB="18288">
+                  <a:tcPr marT="18288" marB="18288" anchor="ctr">
                     <a:lnL w="9525">
                       <a:solidFill>
                         <a:srgbClr val="D3DEEA"/>
@@ -28019,7 +27989,7 @@
                 </a:tc>
                 <a:tc>
                   <a:txBody>
-                    <a:bodyPr wrap="square"/>
+                    <a:bodyPr/>
                     <a:lstStyle/>
                     <a:p>
                       <a:pPr algn="r"/>
@@ -28036,7 +28006,7 @@
                       </a:r>
                     </a:p>
                   </a:txBody>
-                  <a:tcPr anchor="ctr" marL="91440" marR="91440" marT="18288" marB="18288">
+                  <a:tcPr marT="18288" marB="18288" anchor="ctr">
                     <a:lnL w="9525">
                       <a:solidFill>
                         <a:srgbClr val="D3DEEA"/>
@@ -28062,11 +28032,16 @@
                     </a:solidFill>
                   </a:tcPr>
                 </a:tc>
+                <a:extLst>
+                  <a:ext uri="{0D108BD9-81ED-4DB2-BD59-A6C34878D82A}">
+                    <a16:rowId xmlns:a16="http://schemas.microsoft.com/office/drawing/2014/main" val="10000"/>
+                  </a:ext>
+                </a:extLst>
               </a:tr>
               <a:tr h="315468">
                 <a:tc gridSpan="3">
                   <a:txBody>
-                    <a:bodyPr wrap="square"/>
+                    <a:bodyPr/>
                     <a:lstStyle/>
                     <a:p>
                       <a:pPr algn="l"/>
@@ -28083,7 +28058,7 @@
                       </a:r>
                     </a:p>
                   </a:txBody>
-                  <a:tcPr anchor="ctr" marL="91440" marR="91440" marT="18288" marB="18288">
+                  <a:tcPr marT="18288" marB="18288" anchor="ctr">
                     <a:lnL w="9525">
                       <a:solidFill>
                         <a:srgbClr val="D3DEEA"/>
@@ -28113,7 +28088,9 @@
                   <a:txBody>
                     <a:bodyPr/>
                     <a:lstStyle/>
-                    <a:p/>
+                    <a:p>
+                      <a:endParaRPr/>
+                    </a:p>
                   </a:txBody>
                   <a:tcPr/>
                 </a:tc>
@@ -28121,15 +28098,22 @@
                   <a:txBody>
                     <a:bodyPr/>
                     <a:lstStyle/>
-                    <a:p/>
+                    <a:p>
+                      <a:endParaRPr/>
+                    </a:p>
                   </a:txBody>
                   <a:tcPr/>
                 </a:tc>
+                <a:extLst>
+                  <a:ext uri="{0D108BD9-81ED-4DB2-BD59-A6C34878D82A}">
+                    <a16:rowId xmlns:a16="http://schemas.microsoft.com/office/drawing/2014/main" val="10001"/>
+                  </a:ext>
+                </a:extLst>
               </a:tr>
               <a:tr h="315468">
                 <a:tc>
                   <a:txBody>
-                    <a:bodyPr wrap="square"/>
+                    <a:bodyPr/>
                     <a:lstStyle/>
                     <a:p>
                       <a:pPr algn="l"/>
@@ -28146,7 +28130,7 @@
                       </a:r>
                     </a:p>
                   </a:txBody>
-                  <a:tcPr anchor="ctr" marL="91440" marR="91440" marT="18288" marB="18288">
+                  <a:tcPr marT="18288" marB="18288" anchor="ctr">
                     <a:lnL w="9525">
                       <a:solidFill>
                         <a:srgbClr val="D3DEEA"/>
@@ -28174,12 +28158,12 @@
                 </a:tc>
                 <a:tc>
                   <a:txBody>
-                    <a:bodyPr wrap="square"/>
+                    <a:bodyPr/>
                     <a:lstStyle/>
                     <a:p>
                       <a:pPr algn="l"/>
                       <a:r>
-                        <a:rPr sz="1200" b="0">
+                        <a:rPr sz="1200" b="0" dirty="0">
                           <a:solidFill>
                             <a:srgbClr val="3F546C"/>
                           </a:solidFill>
@@ -28187,11 +28171,33 @@
                           <a:ea typeface="Microsoft JhengHei"/>
                           <a:cs typeface="Microsoft JhengHei"/>
                         </a:rPr>
-                        <a:t>（US$25＋US$19）× 匯率 32</a:t>
+                        <a:t>（US$25＋US$19）× </a:t>
+                      </a:r>
+                      <a:r>
+                        <a:rPr sz="1200" b="0" dirty="0" err="1">
+                          <a:solidFill>
+                            <a:srgbClr val="3F546C"/>
+                          </a:solidFill>
+                          <a:latin typeface="Microsoft JhengHei"/>
+                          <a:ea typeface="Microsoft JhengHei"/>
+                          <a:cs typeface="Microsoft JhengHei"/>
+                        </a:rPr>
+                        <a:t>匯率</a:t>
+                      </a:r>
+                      <a:r>
+                        <a:rPr sz="1200" b="0" dirty="0">
+                          <a:solidFill>
+                            <a:srgbClr val="3F546C"/>
+                          </a:solidFill>
+                          <a:latin typeface="Microsoft JhengHei"/>
+                          <a:ea typeface="Microsoft JhengHei"/>
+                          <a:cs typeface="Microsoft JhengHei"/>
+                        </a:rPr>
+                        <a:t> 32</a:t>
                       </a:r>
                     </a:p>
                   </a:txBody>
-                  <a:tcPr anchor="ctr" marL="91440" marR="91440" marT="18288" marB="18288">
+                  <a:tcPr marT="18288" marB="18288" anchor="ctr">
                     <a:lnL w="9525">
                       <a:solidFill>
                         <a:srgbClr val="D3DEEA"/>
@@ -28219,7 +28225,7 @@
                 </a:tc>
                 <a:tc>
                   <a:txBody>
-                    <a:bodyPr wrap="square"/>
+                    <a:bodyPr/>
                     <a:lstStyle/>
                     <a:p>
                       <a:pPr algn="r"/>
@@ -28236,7 +28242,7 @@
                       </a:r>
                     </a:p>
                   </a:txBody>
-                  <a:tcPr anchor="ctr" marL="91440" marR="91440" marT="18288" marB="18288">
+                  <a:tcPr marT="18288" marB="18288" anchor="ctr">
                     <a:lnL w="9525">
                       <a:solidFill>
                         <a:srgbClr val="D3DEEA"/>
@@ -28262,11 +28268,16 @@
                     </a:solidFill>
                   </a:tcPr>
                 </a:tc>
+                <a:extLst>
+                  <a:ext uri="{0D108BD9-81ED-4DB2-BD59-A6C34878D82A}">
+                    <a16:rowId xmlns:a16="http://schemas.microsoft.com/office/drawing/2014/main" val="10002"/>
+                  </a:ext>
+                </a:extLst>
               </a:tr>
               <a:tr h="315468">
                 <a:tc>
                   <a:txBody>
-                    <a:bodyPr wrap="square"/>
+                    <a:bodyPr/>
                     <a:lstStyle/>
                     <a:p>
                       <a:pPr algn="l"/>
@@ -28283,7 +28294,7 @@
                       </a:r>
                     </a:p>
                   </a:txBody>
-                  <a:tcPr anchor="ctr" marL="91440" marR="91440" marT="18288" marB="18288">
+                  <a:tcPr marT="18288" marB="18288" anchor="ctr">
                     <a:lnL w="9525">
                       <a:solidFill>
                         <a:srgbClr val="D3DEEA"/>
@@ -28311,7 +28322,7 @@
                 </a:tc>
                 <a:tc>
                   <a:txBody>
-                    <a:bodyPr wrap="square"/>
+                    <a:bodyPr/>
                     <a:lstStyle/>
                     <a:p>
                       <a:pPr algn="l"/>
@@ -28328,7 +28339,7 @@
                       </a:r>
                     </a:p>
                   </a:txBody>
-                  <a:tcPr anchor="ctr" marL="91440" marR="91440" marT="18288" marB="18288">
+                  <a:tcPr marT="18288" marB="18288" anchor="ctr">
                     <a:lnL w="9525">
                       <a:solidFill>
                         <a:srgbClr val="D3DEEA"/>
@@ -28356,7 +28367,7 @@
                 </a:tc>
                 <a:tc>
                   <a:txBody>
-                    <a:bodyPr wrap="square"/>
+                    <a:bodyPr/>
                     <a:lstStyle/>
                     <a:p>
                       <a:pPr algn="r"/>
@@ -28373,7 +28384,7 @@
                       </a:r>
                     </a:p>
                   </a:txBody>
-                  <a:tcPr anchor="ctr" marL="91440" marR="91440" marT="18288" marB="18288">
+                  <a:tcPr marT="18288" marB="18288" anchor="ctr">
                     <a:lnL w="9525">
                       <a:solidFill>
                         <a:srgbClr val="D3DEEA"/>
@@ -28399,11 +28410,16 @@
                     </a:solidFill>
                   </a:tcPr>
                 </a:tc>
+                <a:extLst>
+                  <a:ext uri="{0D108BD9-81ED-4DB2-BD59-A6C34878D82A}">
+                    <a16:rowId xmlns:a16="http://schemas.microsoft.com/office/drawing/2014/main" val="10003"/>
+                  </a:ext>
+                </a:extLst>
               </a:tr>
               <a:tr h="315468">
                 <a:tc>
                   <a:txBody>
-                    <a:bodyPr wrap="square"/>
+                    <a:bodyPr/>
                     <a:lstStyle/>
                     <a:p>
                       <a:pPr algn="l"/>
@@ -28420,7 +28436,7 @@
                       </a:r>
                     </a:p>
                   </a:txBody>
-                  <a:tcPr anchor="ctr" marL="91440" marR="91440" marT="18288" marB="18288">
+                  <a:tcPr marT="18288" marB="18288" anchor="ctr">
                     <a:lnL w="9525">
                       <a:solidFill>
                         <a:srgbClr val="D3DEEA"/>
@@ -28448,7 +28464,7 @@
                 </a:tc>
                 <a:tc>
                   <a:txBody>
-                    <a:bodyPr wrap="square"/>
+                    <a:bodyPr/>
                     <a:lstStyle/>
                     <a:p>
                       <a:pPr algn="l"/>
@@ -28465,7 +28481,7 @@
                       </a:r>
                     </a:p>
                   </a:txBody>
-                  <a:tcPr anchor="ctr" marL="91440" marR="91440" marT="18288" marB="18288">
+                  <a:tcPr marT="18288" marB="18288" anchor="ctr">
                     <a:lnL w="9525">
                       <a:solidFill>
                         <a:srgbClr val="D3DEEA"/>
@@ -28493,7 +28509,7 @@
                 </a:tc>
                 <a:tc>
                   <a:txBody>
-                    <a:bodyPr wrap="square"/>
+                    <a:bodyPr/>
                     <a:lstStyle/>
                     <a:p>
                       <a:pPr algn="r"/>
@@ -28510,7 +28526,7 @@
                       </a:r>
                     </a:p>
                   </a:txBody>
-                  <a:tcPr anchor="ctr" marL="91440" marR="91440" marT="18288" marB="18288">
+                  <a:tcPr marT="18288" marB="18288" anchor="ctr">
                     <a:lnL w="9525">
                       <a:solidFill>
                         <a:srgbClr val="D3DEEA"/>
@@ -28536,11 +28552,16 @@
                     </a:solidFill>
                   </a:tcPr>
                 </a:tc>
+                <a:extLst>
+                  <a:ext uri="{0D108BD9-81ED-4DB2-BD59-A6C34878D82A}">
+                    <a16:rowId xmlns:a16="http://schemas.microsoft.com/office/drawing/2014/main" val="10004"/>
+                  </a:ext>
+                </a:extLst>
               </a:tr>
               <a:tr h="315468">
                 <a:tc>
                   <a:txBody>
-                    <a:bodyPr wrap="square"/>
+                    <a:bodyPr/>
                     <a:lstStyle/>
                     <a:p>
                       <a:pPr algn="l"/>
@@ -28557,7 +28578,7 @@
                       </a:r>
                     </a:p>
                   </a:txBody>
-                  <a:tcPr anchor="ctr" marL="91440" marR="91440" marT="18288" marB="18288">
+                  <a:tcPr marT="18288" marB="18288" anchor="ctr">
                     <a:lnL w="9525">
                       <a:solidFill>
                         <a:srgbClr val="D3DEEA"/>
@@ -28585,7 +28606,7 @@
                 </a:tc>
                 <a:tc>
                   <a:txBody>
-                    <a:bodyPr wrap="square"/>
+                    <a:bodyPr/>
                     <a:lstStyle/>
                     <a:p>
                       <a:pPr algn="l"/>
@@ -28602,7 +28623,7 @@
                       </a:r>
                     </a:p>
                   </a:txBody>
-                  <a:tcPr anchor="ctr" marL="91440" marR="91440" marT="18288" marB="18288">
+                  <a:tcPr marT="18288" marB="18288" anchor="ctr">
                     <a:lnL w="9525">
                       <a:solidFill>
                         <a:srgbClr val="D3DEEA"/>
@@ -28630,7 +28651,7 @@
                 </a:tc>
                 <a:tc>
                   <a:txBody>
-                    <a:bodyPr wrap="square"/>
+                    <a:bodyPr/>
                     <a:lstStyle/>
                     <a:p>
                       <a:pPr algn="r"/>
@@ -28647,7 +28668,7 @@
                       </a:r>
                     </a:p>
                   </a:txBody>
-                  <a:tcPr anchor="ctr" marL="91440" marR="91440" marT="18288" marB="18288">
+                  <a:tcPr marT="18288" marB="18288" anchor="ctr">
                     <a:lnL w="9525">
                       <a:solidFill>
                         <a:srgbClr val="D3DEEA"/>
@@ -28673,28 +28694,41 @@
                     </a:solidFill>
                   </a:tcPr>
                 </a:tc>
+                <a:extLst>
+                  <a:ext uri="{0D108BD9-81ED-4DB2-BD59-A6C34878D82A}">
+                    <a16:rowId xmlns:a16="http://schemas.microsoft.com/office/drawing/2014/main" val="10005"/>
+                  </a:ext>
+                </a:extLst>
               </a:tr>
               <a:tr h="315468">
                 <a:tc gridSpan="3">
                   <a:txBody>
-                    <a:bodyPr wrap="square"/>
+                    <a:bodyPr/>
                     <a:lstStyle/>
                     <a:p>
                       <a:pPr algn="l"/>
                       <a:r>
-                        <a:rPr sz="1200" b="1">
+                        <a:rPr lang="zh-TW" altLang="en-US" sz="1200" b="1" dirty="0">
                           <a:solidFill>
                             <a:srgbClr val="3F546C"/>
                           </a:solidFill>
-                          <a:latin typeface="Microsoft JhengHei"/>
+                          <a:latin typeface="+mn-lt"/>
                           <a:ea typeface="Microsoft JhengHei"/>
                           <a:cs typeface="Microsoft JhengHei"/>
                         </a:rPr>
-                        <a:t>變動成本 v：每多 1 位專業版用戶，每月增加</a:t>
+                        <a:t>每位專業版用戶的月用量情境 </a:t>
                       </a:r>
+                      <a:endParaRPr lang="en-US" altLang="zh-TW" sz="1200" b="1" dirty="0">
+                        <a:solidFill>
+                          <a:srgbClr val="3F546C"/>
+                        </a:solidFill>
+                        <a:latin typeface="+mn-lt"/>
+                        <a:ea typeface="Microsoft JhengHei"/>
+                        <a:cs typeface="Microsoft JhengHei"/>
+                      </a:endParaRPr>
                     </a:p>
                   </a:txBody>
-                  <a:tcPr anchor="ctr" marL="91440" marR="91440" marT="18288" marB="18288">
+                  <a:tcPr marT="18288" marB="18288" anchor="ctr">
                     <a:lnL w="9525">
                       <a:solidFill>
                         <a:srgbClr val="D3DEEA"/>
@@ -28724,7 +28758,9 @@
                   <a:txBody>
                     <a:bodyPr/>
                     <a:lstStyle/>
-                    <a:p/>
+                    <a:p>
+                      <a:endParaRPr/>
+                    </a:p>
                   </a:txBody>
                   <a:tcPr/>
                 </a:tc>
@@ -28732,15 +28768,22 @@
                   <a:txBody>
                     <a:bodyPr/>
                     <a:lstStyle/>
-                    <a:p/>
+                    <a:p>
+                      <a:endParaRPr/>
+                    </a:p>
                   </a:txBody>
                   <a:tcPr/>
                 </a:tc>
+                <a:extLst>
+                  <a:ext uri="{0D108BD9-81ED-4DB2-BD59-A6C34878D82A}">
+                    <a16:rowId xmlns:a16="http://schemas.microsoft.com/office/drawing/2014/main" val="10006"/>
+                  </a:ext>
+                </a:extLst>
               </a:tr>
               <a:tr h="315468">
                 <a:tc>
                   <a:txBody>
-                    <a:bodyPr wrap="square"/>
+                    <a:bodyPr/>
                     <a:lstStyle/>
                     <a:p>
                       <a:pPr algn="l"/>
@@ -28757,7 +28800,7 @@
                       </a:r>
                     </a:p>
                   </a:txBody>
-                  <a:tcPr anchor="ctr" marL="91440" marR="91440" marT="18288" marB="18288">
+                  <a:tcPr marT="18288" marB="18288" anchor="ctr">
                     <a:lnL w="9525">
                       <a:solidFill>
                         <a:srgbClr val="D3DEEA"/>
@@ -28785,7 +28828,7 @@
                 </a:tc>
                 <a:tc>
                   <a:txBody>
-                    <a:bodyPr wrap="square"/>
+                    <a:bodyPr/>
                     <a:lstStyle/>
                     <a:p>
                       <a:pPr algn="l"/>
@@ -28802,7 +28845,7 @@
                       </a:r>
                     </a:p>
                   </a:txBody>
-                  <a:tcPr anchor="ctr" marL="91440" marR="91440" marT="18288" marB="18288">
+                  <a:tcPr marT="18288" marB="18288" anchor="ctr">
                     <a:lnL w="9525">
                       <a:solidFill>
                         <a:srgbClr val="D3DEEA"/>
@@ -28830,7 +28873,7 @@
                 </a:tc>
                 <a:tc>
                   <a:txBody>
-                    <a:bodyPr wrap="square"/>
+                    <a:bodyPr/>
                     <a:lstStyle/>
                     <a:p>
                       <a:pPr algn="r"/>
@@ -28847,7 +28890,7 @@
                       </a:r>
                     </a:p>
                   </a:txBody>
-                  <a:tcPr anchor="ctr" marL="91440" marR="91440" marT="18288" marB="18288">
+                  <a:tcPr marT="18288" marB="18288" anchor="ctr">
                     <a:lnL w="9525">
                       <a:solidFill>
                         <a:srgbClr val="D3DEEA"/>
@@ -28873,11 +28916,16 @@
                     </a:solidFill>
                   </a:tcPr>
                 </a:tc>
+                <a:extLst>
+                  <a:ext uri="{0D108BD9-81ED-4DB2-BD59-A6C34878D82A}">
+                    <a16:rowId xmlns:a16="http://schemas.microsoft.com/office/drawing/2014/main" val="10007"/>
+                  </a:ext>
+                </a:extLst>
               </a:tr>
               <a:tr h="315468">
                 <a:tc>
                   <a:txBody>
-                    <a:bodyPr wrap="square"/>
+                    <a:bodyPr/>
                     <a:lstStyle/>
                     <a:p>
                       <a:pPr algn="l"/>
@@ -28894,7 +28942,7 @@
                       </a:r>
                     </a:p>
                   </a:txBody>
-                  <a:tcPr anchor="ctr" marL="91440" marR="91440" marT="18288" marB="18288">
+                  <a:tcPr marT="18288" marB="18288" anchor="ctr">
                     <a:lnL w="9525">
                       <a:solidFill>
                         <a:srgbClr val="D3DEEA"/>
@@ -28922,7 +28970,7 @@
                 </a:tc>
                 <a:tc>
                   <a:txBody>
-                    <a:bodyPr wrap="square"/>
+                    <a:bodyPr/>
                     <a:lstStyle/>
                     <a:p>
                       <a:pPr algn="l"/>
@@ -28939,7 +28987,7 @@
                       </a:r>
                     </a:p>
                   </a:txBody>
-                  <a:tcPr anchor="ctr" marL="91440" marR="91440" marT="18288" marB="18288">
+                  <a:tcPr marT="18288" marB="18288" anchor="ctr">
                     <a:lnL w="9525">
                       <a:solidFill>
                         <a:srgbClr val="D3DEEA"/>
@@ -28967,7 +29015,7 @@
                 </a:tc>
                 <a:tc>
                   <a:txBody>
-                    <a:bodyPr wrap="square"/>
+                    <a:bodyPr/>
                     <a:lstStyle/>
                     <a:p>
                       <a:pPr algn="r"/>
@@ -28984,7 +29032,7 @@
                       </a:r>
                     </a:p>
                   </a:txBody>
-                  <a:tcPr anchor="ctr" marL="91440" marR="91440" marT="18288" marB="18288">
+                  <a:tcPr marT="18288" marB="18288" anchor="ctr">
                     <a:lnL w="9525">
                       <a:solidFill>
                         <a:srgbClr val="D3DEEA"/>
@@ -29010,11 +29058,16 @@
                     </a:solidFill>
                   </a:tcPr>
                 </a:tc>
+                <a:extLst>
+                  <a:ext uri="{0D108BD9-81ED-4DB2-BD59-A6C34878D82A}">
+                    <a16:rowId xmlns:a16="http://schemas.microsoft.com/office/drawing/2014/main" val="10008"/>
+                  </a:ext>
+                </a:extLst>
               </a:tr>
               <a:tr h="315468">
                 <a:tc>
                   <a:txBody>
-                    <a:bodyPr wrap="square"/>
+                    <a:bodyPr/>
                     <a:lstStyle/>
                     <a:p>
                       <a:pPr algn="l"/>
@@ -29031,7 +29084,7 @@
                       </a:r>
                     </a:p>
                   </a:txBody>
-                  <a:tcPr anchor="ctr" marL="91440" marR="91440" marT="18288" marB="18288">
+                  <a:tcPr marT="18288" marB="18288" anchor="ctr">
                     <a:lnL w="9525">
                       <a:solidFill>
                         <a:srgbClr val="D3DEEA"/>
@@ -29059,7 +29112,7 @@
                 </a:tc>
                 <a:tc>
                   <a:txBody>
-                    <a:bodyPr wrap="square"/>
+                    <a:bodyPr/>
                     <a:lstStyle/>
                     <a:p>
                       <a:pPr algn="l"/>
@@ -29076,7 +29129,7 @@
                       </a:r>
                     </a:p>
                   </a:txBody>
-                  <a:tcPr anchor="ctr" marL="91440" marR="91440" marT="18288" marB="18288">
+                  <a:tcPr marT="18288" marB="18288" anchor="ctr">
                     <a:lnL w="9525">
                       <a:solidFill>
                         <a:srgbClr val="D3DEEA"/>
@@ -29104,7 +29157,7 @@
                 </a:tc>
                 <a:tc>
                   <a:txBody>
-                    <a:bodyPr wrap="square"/>
+                    <a:bodyPr/>
                     <a:lstStyle/>
                     <a:p>
                       <a:pPr algn="r"/>
@@ -29121,7 +29174,7 @@
                       </a:r>
                     </a:p>
                   </a:txBody>
-                  <a:tcPr anchor="ctr" marL="91440" marR="91440" marT="18288" marB="18288">
+                  <a:tcPr marT="18288" marB="18288" anchor="ctr">
                     <a:lnL w="9525">
                       <a:solidFill>
                         <a:srgbClr val="D3DEEA"/>
@@ -29147,16 +29200,21 @@
                     </a:solidFill>
                   </a:tcPr>
                 </a:tc>
+                <a:extLst>
+                  <a:ext uri="{0D108BD9-81ED-4DB2-BD59-A6C34878D82A}">
+                    <a16:rowId xmlns:a16="http://schemas.microsoft.com/office/drawing/2014/main" val="10009"/>
+                  </a:ext>
+                </a:extLst>
               </a:tr>
               <a:tr h="315468">
                 <a:tc>
                   <a:txBody>
-                    <a:bodyPr wrap="square"/>
+                    <a:bodyPr/>
                     <a:lstStyle/>
                     <a:p>
                       <a:pPr algn="l"/>
                       <a:r>
-                        <a:rPr sz="1300" b="1">
+                        <a:rPr sz="1300" b="1" dirty="0" err="1">
                           <a:solidFill>
                             <a:srgbClr val="D46A12"/>
                           </a:solidFill>
@@ -29164,11 +29222,22 @@
                           <a:ea typeface="Microsoft JhengHei"/>
                           <a:cs typeface="Microsoft JhengHei"/>
                         </a:rPr>
-                        <a:t>變動成本 v</a:t>
+                        <a:t>變動成本</a:t>
+                      </a:r>
+                      <a:r>
+                        <a:rPr sz="1300" b="1" dirty="0">
+                          <a:solidFill>
+                            <a:srgbClr val="D46A12"/>
+                          </a:solidFill>
+                          <a:latin typeface="Microsoft JhengHei"/>
+                          <a:ea typeface="Microsoft JhengHei"/>
+                          <a:cs typeface="Microsoft JhengHei"/>
+                        </a:rPr>
+                        <a:t> </a:t>
                       </a:r>
                     </a:p>
                   </a:txBody>
-                  <a:tcPr anchor="ctr" marL="91440" marR="91440" marT="18288" marB="18288">
+                  <a:tcPr marT="18288" marB="18288" anchor="ctr">
                     <a:lnL w="9525">
                       <a:solidFill>
                         <a:srgbClr val="D3DEEA"/>
@@ -29196,7 +29265,7 @@
                 </a:tc>
                 <a:tc>
                   <a:txBody>
-                    <a:bodyPr wrap="square"/>
+                    <a:bodyPr/>
                     <a:lstStyle/>
                     <a:p>
                       <a:pPr algn="l"/>
@@ -29213,7 +29282,7 @@
                       </a:r>
                     </a:p>
                   </a:txBody>
-                  <a:tcPr anchor="ctr" marL="91440" marR="91440" marT="18288" marB="18288">
+                  <a:tcPr marT="18288" marB="18288" anchor="ctr">
                     <a:lnL w="9525">
                       <a:solidFill>
                         <a:srgbClr val="D3DEEA"/>
@@ -29241,12 +29310,12 @@
                 </a:tc>
                 <a:tc>
                   <a:txBody>
-                    <a:bodyPr wrap="square"/>
+                    <a:bodyPr/>
                     <a:lstStyle/>
                     <a:p>
                       <a:pPr algn="r"/>
                       <a:r>
-                        <a:rPr sz="1400" b="1">
+                        <a:rPr sz="1400" b="1" dirty="0">
                           <a:solidFill>
                             <a:srgbClr val="D46A12"/>
                           </a:solidFill>
@@ -29258,7 +29327,7 @@
                       </a:r>
                     </a:p>
                   </a:txBody>
-                  <a:tcPr anchor="ctr" marL="91440" marR="91440" marT="18288" marB="18288">
+                  <a:tcPr marT="18288" marB="18288" anchor="ctr">
                     <a:lnL w="9525">
                       <a:solidFill>
                         <a:srgbClr val="D3DEEA"/>
@@ -29284,6 +29353,11 @@
                     </a:solidFill>
                   </a:tcPr>
                 </a:tc>
+                <a:extLst>
+                  <a:ext uri="{0D108BD9-81ED-4DB2-BD59-A6C34878D82A}">
+                    <a16:rowId xmlns:a16="http://schemas.microsoft.com/office/drawing/2014/main" val="10010"/>
+                  </a:ext>
+                </a:extLst>
               </a:tr>
             </a:tbl>
           </a:graphicData>
@@ -29324,7 +29398,7 @@
           </a:fontRef>
         </p:style>
         <p:txBody>
-          <a:bodyPr rtlCol="0" anchor="ctr" wrap="square" lIns="137160" rIns="137160"/>
+          <a:bodyPr wrap="square" lIns="137160" rIns="137160" rtlCol="0" anchor="ctr"/>
           <a:lstStyle/>
           <a:p>
             <a:pPr algn="l">
@@ -29387,7 +29461,7 @@
           </a:fontRef>
         </p:style>
         <p:txBody>
-          <a:bodyPr rtlCol="0" anchor="ctr" wrap="square" lIns="137160" rIns="137160"/>
+          <a:bodyPr wrap="square" lIns="137160" rIns="137160" rtlCol="0" anchor="ctr"/>
           <a:lstStyle/>
           <a:p>
             <a:pPr algn="l">
@@ -29480,15 +29554,39 @@
             <a:tbl>
               <a:tblPr/>
               <a:tblGrid>
-                <a:gridCol w="914400"/>
-                <a:gridCol w="987552"/>
-                <a:gridCol w="987552"/>
-                <a:gridCol w="1115568"/>
+                <a:gridCol w="914400">
+                  <a:extLst>
+                    <a:ext uri="{9D8B030D-6E8A-4147-A177-3AD203B41FA5}">
+                      <a16:colId xmlns:a16="http://schemas.microsoft.com/office/drawing/2014/main" val="20000"/>
+                    </a:ext>
+                  </a:extLst>
+                </a:gridCol>
+                <a:gridCol w="987552">
+                  <a:extLst>
+                    <a:ext uri="{9D8B030D-6E8A-4147-A177-3AD203B41FA5}">
+                      <a16:colId xmlns:a16="http://schemas.microsoft.com/office/drawing/2014/main" val="20001"/>
+                    </a:ext>
+                  </a:extLst>
+                </a:gridCol>
+                <a:gridCol w="987552">
+                  <a:extLst>
+                    <a:ext uri="{9D8B030D-6E8A-4147-A177-3AD203B41FA5}">
+                      <a16:colId xmlns:a16="http://schemas.microsoft.com/office/drawing/2014/main" val="20002"/>
+                    </a:ext>
+                  </a:extLst>
+                </a:gridCol>
+                <a:gridCol w="1115568">
+                  <a:extLst>
+                    <a:ext uri="{9D8B030D-6E8A-4147-A177-3AD203B41FA5}">
+                      <a16:colId xmlns:a16="http://schemas.microsoft.com/office/drawing/2014/main" val="20003"/>
+                    </a:ext>
+                  </a:extLst>
+                </a:gridCol>
               </a:tblGrid>
               <a:tr h="297180">
                 <a:tc>
                   <a:txBody>
-                    <a:bodyPr wrap="square"/>
+                    <a:bodyPr/>
                     <a:lstStyle/>
                     <a:p>
                       <a:pPr algn="ctr"/>
@@ -29505,7 +29603,7 @@
                       </a:r>
                     </a:p>
                   </a:txBody>
-                  <a:tcPr anchor="ctr" marL="91440" marR="91440" marT="18288" marB="18288">
+                  <a:tcPr marT="18288" marB="18288" anchor="ctr">
                     <a:lnL w="9525">
                       <a:solidFill>
                         <a:srgbClr val="D3DEEA"/>
@@ -29533,7 +29631,7 @@
                 </a:tc>
                 <a:tc>
                   <a:txBody>
-                    <a:bodyPr wrap="square"/>
+                    <a:bodyPr/>
                     <a:lstStyle/>
                     <a:p>
                       <a:pPr algn="ctr"/>
@@ -29550,7 +29648,7 @@
                       </a:r>
                     </a:p>
                   </a:txBody>
-                  <a:tcPr anchor="ctr" marL="91440" marR="91440" marT="18288" marB="18288">
+                  <a:tcPr marT="18288" marB="18288" anchor="ctr">
                     <a:lnL w="9525">
                       <a:solidFill>
                         <a:srgbClr val="D3DEEA"/>
@@ -29578,7 +29676,7 @@
                 </a:tc>
                 <a:tc>
                   <a:txBody>
-                    <a:bodyPr wrap="square"/>
+                    <a:bodyPr/>
                     <a:lstStyle/>
                     <a:p>
                       <a:pPr algn="ctr"/>
@@ -29595,7 +29693,7 @@
                       </a:r>
                     </a:p>
                   </a:txBody>
-                  <a:tcPr anchor="ctr" marL="91440" marR="91440" marT="18288" marB="18288">
+                  <a:tcPr marT="18288" marB="18288" anchor="ctr">
                     <a:lnL w="9525">
                       <a:solidFill>
                         <a:srgbClr val="D3DEEA"/>
@@ -29623,7 +29721,7 @@
                 </a:tc>
                 <a:tc>
                   <a:txBody>
-                    <a:bodyPr wrap="square"/>
+                    <a:bodyPr/>
                     <a:lstStyle/>
                     <a:p>
                       <a:pPr algn="ctr"/>
@@ -29640,7 +29738,7 @@
                       </a:r>
                     </a:p>
                   </a:txBody>
-                  <a:tcPr anchor="ctr" marL="91440" marR="91440" marT="18288" marB="18288">
+                  <a:tcPr marT="18288" marB="18288" anchor="ctr">
                     <a:lnL w="9525">
                       <a:solidFill>
                         <a:srgbClr val="D3DEEA"/>
@@ -29666,11 +29764,16 @@
                     </a:solidFill>
                   </a:tcPr>
                 </a:tc>
+                <a:extLst>
+                  <a:ext uri="{0D108BD9-81ED-4DB2-BD59-A6C34878D82A}">
+                    <a16:rowId xmlns:a16="http://schemas.microsoft.com/office/drawing/2014/main" val="10000"/>
+                  </a:ext>
+                </a:extLst>
               </a:tr>
               <a:tr h="297180">
                 <a:tc>
                   <a:txBody>
-                    <a:bodyPr wrap="square"/>
+                    <a:bodyPr/>
                     <a:lstStyle/>
                     <a:p>
                       <a:pPr algn="ctr"/>
@@ -29687,7 +29790,7 @@
                       </a:r>
                     </a:p>
                   </a:txBody>
-                  <a:tcPr anchor="ctr" marL="91440" marR="91440" marT="18288" marB="18288">
+                  <a:tcPr marT="18288" marB="18288" anchor="ctr">
                     <a:lnL w="9525">
                       <a:solidFill>
                         <a:srgbClr val="D3DEEA"/>
@@ -29715,7 +29818,7 @@
                 </a:tc>
                 <a:tc>
                   <a:txBody>
-                    <a:bodyPr wrap="square"/>
+                    <a:bodyPr/>
                     <a:lstStyle/>
                     <a:p>
                       <a:pPr algn="r"/>
@@ -29732,7 +29835,7 @@
                       </a:r>
                     </a:p>
                   </a:txBody>
-                  <a:tcPr anchor="ctr" marL="91440" marR="91440" marT="18288" marB="18288">
+                  <a:tcPr marT="18288" marB="18288" anchor="ctr">
                     <a:lnL w="9525">
                       <a:solidFill>
                         <a:srgbClr val="D3DEEA"/>
@@ -29760,7 +29863,7 @@
                 </a:tc>
                 <a:tc>
                   <a:txBody>
-                    <a:bodyPr wrap="square"/>
+                    <a:bodyPr/>
                     <a:lstStyle/>
                     <a:p>
                       <a:pPr algn="r"/>
@@ -29777,7 +29880,7 @@
                       </a:r>
                     </a:p>
                   </a:txBody>
-                  <a:tcPr anchor="ctr" marL="91440" marR="91440" marT="18288" marB="18288">
+                  <a:tcPr marT="18288" marB="18288" anchor="ctr">
                     <a:lnL w="9525">
                       <a:solidFill>
                         <a:srgbClr val="D3DEEA"/>
@@ -29805,7 +29908,7 @@
                 </a:tc>
                 <a:tc>
                   <a:txBody>
-                    <a:bodyPr wrap="square"/>
+                    <a:bodyPr/>
                     <a:lstStyle/>
                     <a:p>
                       <a:pPr algn="r"/>
@@ -29822,7 +29925,7 @@
                       </a:r>
                     </a:p>
                   </a:txBody>
-                  <a:tcPr anchor="ctr" marL="91440" marR="91440" marT="18288" marB="18288">
+                  <a:tcPr marT="18288" marB="18288" anchor="ctr">
                     <a:lnL w="9525">
                       <a:solidFill>
                         <a:srgbClr val="D3DEEA"/>
@@ -29848,11 +29951,16 @@
                     </a:solidFill>
                   </a:tcPr>
                 </a:tc>
+                <a:extLst>
+                  <a:ext uri="{0D108BD9-81ED-4DB2-BD59-A6C34878D82A}">
+                    <a16:rowId xmlns:a16="http://schemas.microsoft.com/office/drawing/2014/main" val="10001"/>
+                  </a:ext>
+                </a:extLst>
               </a:tr>
               <a:tr h="297180">
                 <a:tc>
                   <a:txBody>
-                    <a:bodyPr wrap="square"/>
+                    <a:bodyPr/>
                     <a:lstStyle/>
                     <a:p>
                       <a:pPr algn="ctr"/>
@@ -29869,7 +29977,7 @@
                       </a:r>
                     </a:p>
                   </a:txBody>
-                  <a:tcPr anchor="ctr" marL="91440" marR="91440" marT="18288" marB="18288">
+                  <a:tcPr marT="18288" marB="18288" anchor="ctr">
                     <a:lnL w="9525">
                       <a:solidFill>
                         <a:srgbClr val="D3DEEA"/>
@@ -29897,7 +30005,7 @@
                 </a:tc>
                 <a:tc>
                   <a:txBody>
-                    <a:bodyPr wrap="square"/>
+                    <a:bodyPr/>
                     <a:lstStyle/>
                     <a:p>
                       <a:pPr algn="r"/>
@@ -29914,7 +30022,7 @@
                       </a:r>
                     </a:p>
                   </a:txBody>
-                  <a:tcPr anchor="ctr" marL="91440" marR="91440" marT="18288" marB="18288">
+                  <a:tcPr marT="18288" marB="18288" anchor="ctr">
                     <a:lnL w="9525">
                       <a:solidFill>
                         <a:srgbClr val="D3DEEA"/>
@@ -29942,7 +30050,7 @@
                 </a:tc>
                 <a:tc>
                   <a:txBody>
-                    <a:bodyPr wrap="square"/>
+                    <a:bodyPr/>
                     <a:lstStyle/>
                     <a:p>
                       <a:pPr algn="r"/>
@@ -29959,7 +30067,7 @@
                       </a:r>
                     </a:p>
                   </a:txBody>
-                  <a:tcPr anchor="ctr" marL="91440" marR="91440" marT="18288" marB="18288">
+                  <a:tcPr marT="18288" marB="18288" anchor="ctr">
                     <a:lnL w="9525">
                       <a:solidFill>
                         <a:srgbClr val="D3DEEA"/>
@@ -29987,7 +30095,7 @@
                 </a:tc>
                 <a:tc>
                   <a:txBody>
-                    <a:bodyPr wrap="square"/>
+                    <a:bodyPr/>
                     <a:lstStyle/>
                     <a:p>
                       <a:pPr algn="r"/>
@@ -30004,7 +30112,7 @@
                       </a:r>
                     </a:p>
                   </a:txBody>
-                  <a:tcPr anchor="ctr" marL="91440" marR="91440" marT="18288" marB="18288">
+                  <a:tcPr marT="18288" marB="18288" anchor="ctr">
                     <a:lnL w="9525">
                       <a:solidFill>
                         <a:srgbClr val="D3DEEA"/>
@@ -30030,11 +30138,16 @@
                     </a:solidFill>
                   </a:tcPr>
                 </a:tc>
+                <a:extLst>
+                  <a:ext uri="{0D108BD9-81ED-4DB2-BD59-A6C34878D82A}">
+                    <a16:rowId xmlns:a16="http://schemas.microsoft.com/office/drawing/2014/main" val="10002"/>
+                  </a:ext>
+                </a:extLst>
               </a:tr>
               <a:tr h="297180">
                 <a:tc>
                   <a:txBody>
-                    <a:bodyPr wrap="square"/>
+                    <a:bodyPr/>
                     <a:lstStyle/>
                     <a:p>
                       <a:pPr algn="ctr"/>
@@ -30051,7 +30164,7 @@
                       </a:r>
                     </a:p>
                   </a:txBody>
-                  <a:tcPr anchor="ctr" marL="91440" marR="91440" marT="18288" marB="18288">
+                  <a:tcPr marT="18288" marB="18288" anchor="ctr">
                     <a:lnL w="9525">
                       <a:solidFill>
                         <a:srgbClr val="D3DEEA"/>
@@ -30079,7 +30192,7 @@
                 </a:tc>
                 <a:tc>
                   <a:txBody>
-                    <a:bodyPr wrap="square"/>
+                    <a:bodyPr/>
                     <a:lstStyle/>
                     <a:p>
                       <a:pPr algn="r"/>
@@ -30096,7 +30209,7 @@
                       </a:r>
                     </a:p>
                   </a:txBody>
-                  <a:tcPr anchor="ctr" marL="91440" marR="91440" marT="18288" marB="18288">
+                  <a:tcPr marT="18288" marB="18288" anchor="ctr">
                     <a:lnL w="9525">
                       <a:solidFill>
                         <a:srgbClr val="D3DEEA"/>
@@ -30124,7 +30237,7 @@
                 </a:tc>
                 <a:tc>
                   <a:txBody>
-                    <a:bodyPr wrap="square"/>
+                    <a:bodyPr/>
                     <a:lstStyle/>
                     <a:p>
                       <a:pPr algn="r"/>
@@ -30141,7 +30254,7 @@
                       </a:r>
                     </a:p>
                   </a:txBody>
-                  <a:tcPr anchor="ctr" marL="91440" marR="91440" marT="18288" marB="18288">
+                  <a:tcPr marT="18288" marB="18288" anchor="ctr">
                     <a:lnL w="9525">
                       <a:solidFill>
                         <a:srgbClr val="D3DEEA"/>
@@ -30169,7 +30282,7 @@
                 </a:tc>
                 <a:tc>
                   <a:txBody>
-                    <a:bodyPr wrap="square"/>
+                    <a:bodyPr/>
                     <a:lstStyle/>
                     <a:p>
                       <a:pPr algn="r"/>
@@ -30186,7 +30299,7 @@
                       </a:r>
                     </a:p>
                   </a:txBody>
-                  <a:tcPr anchor="ctr" marL="91440" marR="91440" marT="18288" marB="18288">
+                  <a:tcPr marT="18288" marB="18288" anchor="ctr">
                     <a:lnL w="9525">
                       <a:solidFill>
                         <a:srgbClr val="D3DEEA"/>
@@ -30212,11 +30325,16 @@
                     </a:solidFill>
                   </a:tcPr>
                 </a:tc>
+                <a:extLst>
+                  <a:ext uri="{0D108BD9-81ED-4DB2-BD59-A6C34878D82A}">
+                    <a16:rowId xmlns:a16="http://schemas.microsoft.com/office/drawing/2014/main" val="10003"/>
+                  </a:ext>
+                </a:extLst>
               </a:tr>
               <a:tr h="297180">
                 <a:tc>
                   <a:txBody>
-                    <a:bodyPr wrap="square"/>
+                    <a:bodyPr/>
                     <a:lstStyle/>
                     <a:p>
                       <a:pPr algn="ctr"/>
@@ -30233,7 +30351,7 @@
                       </a:r>
                     </a:p>
                   </a:txBody>
-                  <a:tcPr anchor="ctr" marL="91440" marR="91440" marT="18288" marB="18288">
+                  <a:tcPr marT="18288" marB="18288" anchor="ctr">
                     <a:lnL w="9525">
                       <a:solidFill>
                         <a:srgbClr val="D3DEEA"/>
@@ -30261,7 +30379,7 @@
                 </a:tc>
                 <a:tc>
                   <a:txBody>
-                    <a:bodyPr wrap="square"/>
+                    <a:bodyPr/>
                     <a:lstStyle/>
                     <a:p>
                       <a:pPr algn="r"/>
@@ -30278,7 +30396,7 @@
                       </a:r>
                     </a:p>
                   </a:txBody>
-                  <a:tcPr anchor="ctr" marL="91440" marR="91440" marT="18288" marB="18288">
+                  <a:tcPr marT="18288" marB="18288" anchor="ctr">
                     <a:lnL w="9525">
                       <a:solidFill>
                         <a:srgbClr val="D3DEEA"/>
@@ -30306,7 +30424,7 @@
                 </a:tc>
                 <a:tc>
                   <a:txBody>
-                    <a:bodyPr wrap="square"/>
+                    <a:bodyPr/>
                     <a:lstStyle/>
                     <a:p>
                       <a:pPr algn="r"/>
@@ -30323,7 +30441,7 @@
                       </a:r>
                     </a:p>
                   </a:txBody>
-                  <a:tcPr anchor="ctr" marL="91440" marR="91440" marT="18288" marB="18288">
+                  <a:tcPr marT="18288" marB="18288" anchor="ctr">
                     <a:lnL w="9525">
                       <a:solidFill>
                         <a:srgbClr val="D3DEEA"/>
@@ -30351,7 +30469,7 @@
                 </a:tc>
                 <a:tc>
                   <a:txBody>
-                    <a:bodyPr wrap="square"/>
+                    <a:bodyPr/>
                     <a:lstStyle/>
                     <a:p>
                       <a:pPr algn="r"/>
@@ -30368,7 +30486,7 @@
                       </a:r>
                     </a:p>
                   </a:txBody>
-                  <a:tcPr anchor="ctr" marL="91440" marR="91440" marT="18288" marB="18288">
+                  <a:tcPr marT="18288" marB="18288" anchor="ctr">
                     <a:lnL w="9525">
                       <a:solidFill>
                         <a:srgbClr val="D3DEEA"/>
@@ -30394,11 +30512,16 @@
                     </a:solidFill>
                   </a:tcPr>
                 </a:tc>
+                <a:extLst>
+                  <a:ext uri="{0D108BD9-81ED-4DB2-BD59-A6C34878D82A}">
+                    <a16:rowId xmlns:a16="http://schemas.microsoft.com/office/drawing/2014/main" val="10004"/>
+                  </a:ext>
+                </a:extLst>
               </a:tr>
               <a:tr h="297180">
                 <a:tc>
                   <a:txBody>
-                    <a:bodyPr wrap="square"/>
+                    <a:bodyPr/>
                     <a:lstStyle/>
                     <a:p>
                       <a:pPr algn="ctr"/>
@@ -30415,7 +30538,7 @@
                       </a:r>
                     </a:p>
                   </a:txBody>
-                  <a:tcPr anchor="ctr" marL="91440" marR="91440" marT="18288" marB="18288">
+                  <a:tcPr marT="18288" marB="18288" anchor="ctr">
                     <a:lnL w="9525">
                       <a:solidFill>
                         <a:srgbClr val="D3DEEA"/>
@@ -30443,7 +30566,7 @@
                 </a:tc>
                 <a:tc>
                   <a:txBody>
-                    <a:bodyPr wrap="square"/>
+                    <a:bodyPr/>
                     <a:lstStyle/>
                     <a:p>
                       <a:pPr algn="r"/>
@@ -30460,7 +30583,7 @@
                       </a:r>
                     </a:p>
                   </a:txBody>
-                  <a:tcPr anchor="ctr" marL="91440" marR="91440" marT="18288" marB="18288">
+                  <a:tcPr marT="18288" marB="18288" anchor="ctr">
                     <a:lnL w="9525">
                       <a:solidFill>
                         <a:srgbClr val="D3DEEA"/>
@@ -30488,7 +30611,7 @@
                 </a:tc>
                 <a:tc>
                   <a:txBody>
-                    <a:bodyPr wrap="square"/>
+                    <a:bodyPr/>
                     <a:lstStyle/>
                     <a:p>
                       <a:pPr algn="r"/>
@@ -30505,7 +30628,7 @@
                       </a:r>
                     </a:p>
                   </a:txBody>
-                  <a:tcPr anchor="ctr" marL="91440" marR="91440" marT="18288" marB="18288">
+                  <a:tcPr marT="18288" marB="18288" anchor="ctr">
                     <a:lnL w="9525">
                       <a:solidFill>
                         <a:srgbClr val="D3DEEA"/>
@@ -30533,7 +30656,7 @@
                 </a:tc>
                 <a:tc>
                   <a:txBody>
-                    <a:bodyPr wrap="square"/>
+                    <a:bodyPr/>
                     <a:lstStyle/>
                     <a:p>
                       <a:pPr algn="r"/>
@@ -30550,7 +30673,7 @@
                       </a:r>
                     </a:p>
                   </a:txBody>
-                  <a:tcPr anchor="ctr" marL="91440" marR="91440" marT="18288" marB="18288">
+                  <a:tcPr marT="18288" marB="18288" anchor="ctr">
                     <a:lnL w="9525">
                       <a:solidFill>
                         <a:srgbClr val="D3DEEA"/>
@@ -30576,11 +30699,16 @@
                     </a:solidFill>
                   </a:tcPr>
                 </a:tc>
+                <a:extLst>
+                  <a:ext uri="{0D108BD9-81ED-4DB2-BD59-A6C34878D82A}">
+                    <a16:rowId xmlns:a16="http://schemas.microsoft.com/office/drawing/2014/main" val="10005"/>
+                  </a:ext>
+                </a:extLst>
               </a:tr>
               <a:tr h="297180">
                 <a:tc>
                   <a:txBody>
-                    <a:bodyPr wrap="square"/>
+                    <a:bodyPr/>
                     <a:lstStyle/>
                     <a:p>
                       <a:pPr algn="ctr"/>
@@ -30597,7 +30725,7 @@
                       </a:r>
                     </a:p>
                   </a:txBody>
-                  <a:tcPr anchor="ctr" marL="91440" marR="91440" marT="18288" marB="18288">
+                  <a:tcPr marT="18288" marB="18288" anchor="ctr">
                     <a:lnL w="9525">
                       <a:solidFill>
                         <a:srgbClr val="D3DEEA"/>
@@ -30625,7 +30753,7 @@
                 </a:tc>
                 <a:tc>
                   <a:txBody>
-                    <a:bodyPr wrap="square"/>
+                    <a:bodyPr/>
                     <a:lstStyle/>
                     <a:p>
                       <a:pPr algn="r"/>
@@ -30642,7 +30770,7 @@
                       </a:r>
                     </a:p>
                   </a:txBody>
-                  <a:tcPr anchor="ctr" marL="91440" marR="91440" marT="18288" marB="18288">
+                  <a:tcPr marT="18288" marB="18288" anchor="ctr">
                     <a:lnL w="9525">
                       <a:solidFill>
                         <a:srgbClr val="D3DEEA"/>
@@ -30670,7 +30798,7 @@
                 </a:tc>
                 <a:tc>
                   <a:txBody>
-                    <a:bodyPr wrap="square"/>
+                    <a:bodyPr/>
                     <a:lstStyle/>
                     <a:p>
                       <a:pPr algn="r"/>
@@ -30687,7 +30815,7 @@
                       </a:r>
                     </a:p>
                   </a:txBody>
-                  <a:tcPr anchor="ctr" marL="91440" marR="91440" marT="18288" marB="18288">
+                  <a:tcPr marT="18288" marB="18288" anchor="ctr">
                     <a:lnL w="9525">
                       <a:solidFill>
                         <a:srgbClr val="D3DEEA"/>
@@ -30715,7 +30843,7 @@
                 </a:tc>
                 <a:tc>
                   <a:txBody>
-                    <a:bodyPr wrap="square"/>
+                    <a:bodyPr/>
                     <a:lstStyle/>
                     <a:p>
                       <a:pPr algn="r"/>
@@ -30732,7 +30860,7 @@
                       </a:r>
                     </a:p>
                   </a:txBody>
-                  <a:tcPr anchor="ctr" marL="91440" marR="91440" marT="18288" marB="18288">
+                  <a:tcPr marT="18288" marB="18288" anchor="ctr">
                     <a:lnL w="9525">
                       <a:solidFill>
                         <a:srgbClr val="D3DEEA"/>
@@ -30758,6 +30886,11 @@
                     </a:solidFill>
                   </a:tcPr>
                 </a:tc>
+                <a:extLst>
+                  <a:ext uri="{0D108BD9-81ED-4DB2-BD59-A6C34878D82A}">
+                    <a16:rowId xmlns:a16="http://schemas.microsoft.com/office/drawing/2014/main" val="10006"/>
+                  </a:ext>
+                </a:extLst>
               </a:tr>
             </a:tbl>
           </a:graphicData>
@@ -30837,7 +30970,7 @@
               <a:buNone/>
             </a:pPr>
             <a:r>
-              <a:rPr sz="1400" b="1">
+              <a:rPr sz="1400" b="1" dirty="0" err="1">
                 <a:solidFill>
                   <a:srgbClr val="D46A12"/>
                 </a:solidFill>
@@ -30845,9 +30978,42 @@
                 <a:ea typeface="Microsoft JhengHei"/>
                 <a:cs typeface="Microsoft JhengHei"/>
               </a:rPr>
-              <a:t>新臺幣／月；Gemini 3.1 Flash-Lite 每百萬 token 0.25／1.50 美元（10/18 查，1 USD≈32 元）；未含人力，見附錄 C、F。</a:t>
-            </a:r>
-            <a:endParaRPr sz="1400"/>
+              <a:t>新臺幣／月；Gemini</a:t>
+            </a:r>
+            <a:r>
+              <a:rPr sz="1400" b="1" dirty="0">
+                <a:solidFill>
+                  <a:srgbClr val="D46A12"/>
+                </a:solidFill>
+                <a:latin typeface="Microsoft JhengHei"/>
+                <a:ea typeface="Microsoft JhengHei"/>
+                <a:cs typeface="Microsoft JhengHei"/>
+              </a:rPr>
+              <a:t> 3.1 Flash-Lite </a:t>
+            </a:r>
+            <a:r>
+              <a:rPr sz="1400" b="1" dirty="0" err="1">
+                <a:solidFill>
+                  <a:srgbClr val="D46A12"/>
+                </a:solidFill>
+                <a:latin typeface="Microsoft JhengHei"/>
+                <a:ea typeface="Microsoft JhengHei"/>
+                <a:cs typeface="Microsoft JhengHei"/>
+              </a:rPr>
+              <a:t>每百萬</a:t>
+            </a:r>
+            <a:r>
+              <a:rPr sz="1400" b="1" dirty="0">
+                <a:solidFill>
+                  <a:srgbClr val="D46A12"/>
+                </a:solidFill>
+                <a:latin typeface="Microsoft JhengHei"/>
+                <a:ea typeface="Microsoft JhengHei"/>
+                <a:cs typeface="Microsoft JhengHei"/>
+              </a:rPr>
+              <a:t> token 0.25／1.50 美元（1 USD≈32 元）。</a:t>
+            </a:r>
+            <a:endParaRPr sz="1400" dirty="0"/>
           </a:p>
         </p:txBody>
       </p:sp>
@@ -31017,16 +31183,22 @@
               <a:gd name="adj" fmla="val 18824"/>
             </a:avLst>
           </a:prstGeom>
-          <a:solidFill>
-            <a:srgbClr val="F5F8FC"/>
-          </a:solidFill>
-          <a:ln w="12700">
-            <a:solidFill>
-              <a:srgbClr val="F5F8FC"/>
-            </a:solidFill>
-            <a:prstDash val="solid"/>
-          </a:ln>
-        </p:spPr>
+          <a:ln/>
+        </p:spPr>
+        <p:style>
+          <a:lnRef idx="2">
+            <a:schemeClr val="accent3"/>
+          </a:lnRef>
+          <a:fillRef idx="1">
+            <a:schemeClr val="lt1"/>
+          </a:fillRef>
+          <a:effectRef idx="0">
+            <a:schemeClr val="accent3"/>
+          </a:effectRef>
+          <a:fontRef idx="minor">
+            <a:schemeClr val="dk1"/>
+          </a:fontRef>
+        </p:style>
         <p:txBody>
           <a:bodyPr/>
           <a:lstStyle/>
@@ -32479,7 +32651,7 @@
               <a:buNone/>
             </a:pPr>
             <a:r>
-              <a:rPr sz="1400" b="1">
+              <a:rPr sz="1400" b="1" dirty="0">
                 <a:solidFill>
                   <a:srgbClr val="D46A12"/>
                 </a:solidFill>
@@ -32487,9 +32659,42 @@
                 <a:ea typeface="Microsoft JhengHei"/>
                 <a:cs typeface="Microsoft JhengHei"/>
               </a:rPr>
-              <a:t>Agentic AI 是評審C最後的提問：通用 AI 能自己搜尋整理，我們靠累積資料與可回查做區隔</a:t>
-            </a:r>
-            <a:endParaRPr sz="1400"/>
+              <a:t>Agentic AI </a:t>
+            </a:r>
+            <a:r>
+              <a:rPr sz="1400" b="1" dirty="0" err="1">
+                <a:solidFill>
+                  <a:srgbClr val="D46A12"/>
+                </a:solidFill>
+                <a:latin typeface="Microsoft JhengHei"/>
+                <a:ea typeface="Microsoft JhengHei"/>
+                <a:cs typeface="Microsoft JhengHei"/>
+              </a:rPr>
+              <a:t>是評審最後的提問：通用</a:t>
+            </a:r>
+            <a:r>
+              <a:rPr sz="1400" b="1" dirty="0">
+                <a:solidFill>
+                  <a:srgbClr val="D46A12"/>
+                </a:solidFill>
+                <a:latin typeface="Microsoft JhengHei"/>
+                <a:ea typeface="Microsoft JhengHei"/>
+                <a:cs typeface="Microsoft JhengHei"/>
+              </a:rPr>
+              <a:t> AI </a:t>
+            </a:r>
+            <a:r>
+              <a:rPr sz="1400" b="1" dirty="0" err="1">
+                <a:solidFill>
+                  <a:srgbClr val="D46A12"/>
+                </a:solidFill>
+                <a:latin typeface="Microsoft JhengHei"/>
+                <a:ea typeface="Microsoft JhengHei"/>
+                <a:cs typeface="Microsoft JhengHei"/>
+              </a:rPr>
+              <a:t>能自己搜尋整理，我們靠累積資料與可回查做區隔</a:t>
+            </a:r>
+            <a:endParaRPr sz="1400" dirty="0"/>
           </a:p>
         </p:txBody>
       </p:sp>
